--- a/pres/rentabilidad_pyme_laminas_adicionales.pptx
+++ b/pres/rentabilidad_pyme_laminas_adicionales.pptx
@@ -10,9 +10,10 @@
     <p:sldId id="258" r:id="rId4"/>
     <p:sldId id="259" r:id="rId5"/>
     <p:sldId id="260" r:id="rId6"/>
+    <p:sldId id="261" r:id="rId7"/>
   </p:sldIdLst>
   <p:notesMasterIdLst>
-    <p:notesMasterId r:id="rId7"/>
+    <p:notesMasterId r:id="rId8"/>
   </p:notesMasterIdLst>
   <p:sldSz cx="12192000" cy="6858000"/>
   <p:notesSz cx="6858000" cy="12192000"/>
@@ -2969,6 +2970,94 @@
 </p:notes>
 </file>
 
+<file path=ppt/notesSlides/notesSlide6.xml><?xml version="1.0" encoding="utf-8"?>
+<p:notes xmlns:a="http://schemas.openxmlformats.org/drawingml/2006/main" xmlns:r="http://schemas.openxmlformats.org/officeDocument/2006/relationships" xmlns:p="http://schemas.openxmlformats.org/presentationml/2006/main">
+  <p:cSld>
+    <p:spTree>
+      <p:nvGrpSpPr>
+        <p:cNvPr id="1" name=""/>
+        <p:cNvGrpSpPr/>
+        <p:nvPr/>
+      </p:nvGrpSpPr>
+      <p:grpSpPr>
+        <a:xfrm>
+          <a:off x="0" y="0"/>
+          <a:ext cx="0" cy="0"/>
+          <a:chOff x="0" y="0"/>
+          <a:chExt cx="0" cy="0"/>
+        </a:xfrm>
+      </p:grpSpPr>
+      <p:sp>
+        <p:nvSpPr>
+          <p:cNvPr id="2" name="Slide Image Placeholder 1"/>
+          <p:cNvSpPr>
+            <a:spLocks noGrp="1" noRot="1" noChangeAspect="1"/>
+          </p:cNvSpPr>
+          <p:nvPr>
+            <p:ph type="sldImg"/>
+          </p:nvPr>
+        </p:nvSpPr>
+        <p:spPr/>
+      </p:sp>
+      <p:sp>
+        <p:nvSpPr>
+          <p:cNvPr id="3" name="Notes Placeholder 2"/>
+          <p:cNvSpPr>
+            <a:spLocks noGrp="1"/>
+          </p:cNvSpPr>
+          <p:nvPr>
+            <p:ph type="body" idx="1"/>
+          </p:nvPr>
+        </p:nvSpPr>
+        <p:spPr/>
+        <p:txBody>
+          <a:bodyPr/>
+          <a:lstStyle/>
+          <a:p>
+            <a:r>
+              <a:rPr lang="en-US" dirty="0"/>
+              <a:t/>
+            </a:r>
+            <a:endParaRPr lang="en-US" dirty="0"/>
+          </a:p>
+        </p:txBody>
+      </p:sp>
+      <p:sp>
+        <p:nvSpPr>
+          <p:cNvPr id="4" name="Slide Number Placeholder 3"/>
+          <p:cNvSpPr>
+            <a:spLocks noGrp="1"/>
+          </p:cNvSpPr>
+          <p:nvPr>
+            <p:ph type="sldNum" sz="quarter" idx="10"/>
+          </p:nvPr>
+        </p:nvSpPr>
+        <p:spPr/>
+        <p:txBody>
+          <a:bodyPr/>
+          <a:lstStyle/>
+          <a:p>
+            <a:fld id="{F7021451-1387-4CA6-816F-3879F97B5CBC}" type="slidenum">
+              <a:rPr lang="en-US"/>
+              <a:t>6</a:t>
+            </a:fld>
+            <a:endParaRPr lang="en-US"/>
+          </a:p>
+        </p:txBody>
+      </p:sp>
+    </p:spTree>
+    <p:extLst>
+      <p:ext uri="{BB962C8B-B14F-4D97-AF65-F5344CB8AC3E}">
+        <p14:creationId xmlns:p14="http://schemas.microsoft.com/office/powerpoint/2010/main" val="1024086991"/>
+      </p:ext>
+    </p:extLst>
+  </p:cSld>
+  <p:clrMapOvr>
+    <a:masterClrMapping/>
+  </p:clrMapOvr>
+</p:notes>
+</file>
+
 <file path=ppt/slideLayouts/slideLayout1.xml><?xml version="1.0" encoding="utf-8"?>
 <p:sldLayout xmlns:a="http://schemas.openxmlformats.org/drawingml/2006/main" xmlns:r="http://schemas.openxmlformats.org/officeDocument/2006/relationships" xmlns:p="http://schemas.openxmlformats.org/presentationml/2006/main" preserve="1">
   <p:cSld name="DEFAULT">
@@ -16239,6 +16328,4612 @@
 </p:sld>
 </file>
 
+<file path=ppt/slides/slide6.xml><?xml version="1.0" encoding="utf-8"?>
+<p:sld xmlns:a="http://schemas.openxmlformats.org/drawingml/2006/main" xmlns:r="http://schemas.openxmlformats.org/officeDocument/2006/relationships" xmlns:p="http://schemas.openxmlformats.org/presentationml/2006/main">
+  <p:cSld name="Slide 6">
+    <p:bg>
+      <p:bgPr>
+        <a:solidFill>
+          <a:srgbClr val="FAFBFC"/>
+        </a:solidFill>
+      </p:bgPr>
+    </p:bg>
+    <p:spTree>
+      <p:nvGrpSpPr>
+        <p:cNvPr id="1" name=""/>
+        <p:cNvGrpSpPr/>
+        <p:nvPr/>
+      </p:nvGrpSpPr>
+      <p:grpSpPr>
+        <a:xfrm>
+          <a:off x="0" y="0"/>
+          <a:ext cx="0" cy="0"/>
+          <a:chOff x="0" y="0"/>
+          <a:chExt cx="0" cy="0"/>
+        </a:xfrm>
+      </p:grpSpPr>
+      <p:sp>
+        <p:nvSpPr>
+          <p:cNvPr id="2" name="Text 0"/>
+          <p:cNvSpPr txBox="1"/>
+          <p:nvPr/>
+        </p:nvSpPr>
+        <p:spPr>
+          <a:xfrm>
+            <a:off x="10040112" y="274320"/>
+            <a:ext cx="1600200" cy="256032"/>
+          </a:xfrm>
+          <a:prstGeom prst="rect">
+            <a:avLst/>
+          </a:prstGeom>
+          <a:noFill/>
+          <a:ln/>
+        </p:spPr>
+        <p:txBody>
+          <a:bodyPr wrap="square" lIns="0" tIns="0" rIns="0" bIns="0" rtlCol="0" anchor="ctr"/>
+          <a:lstStyle/>
+          <a:p>
+            <a:pPr algn="r" indent="0" marL="0">
+              <a:buNone/>
+            </a:pPr>
+            <a:r>
+              <a:rPr lang="en-US" sz="1300" b="1" dirty="0">
+                <a:solidFill>
+                  <a:srgbClr val="2B2B2B"/>
+                </a:solidFill>
+                <a:latin typeface="Verdana" pitchFamily="34" charset="0"/>
+                <a:ea typeface="Verdana" pitchFamily="34" charset="-122"/>
+                <a:cs typeface="Verdana" pitchFamily="34" charset="-120"/>
+              </a:rPr>
+              <a:t>bankinter</a:t>
+            </a:r>
+            <a:pPr algn="r" indent="0" marL="0">
+              <a:buNone/>
+            </a:pPr>
+            <a:r>
+              <a:rPr lang="en-US" sz="1300" b="1" dirty="0">
+                <a:solidFill>
+                  <a:srgbClr val="F56600"/>
+                </a:solidFill>
+                <a:latin typeface="Verdana" pitchFamily="34" charset="0"/>
+                <a:ea typeface="Verdana" pitchFamily="34" charset="-122"/>
+                <a:cs typeface="Verdana" pitchFamily="34" charset="-120"/>
+              </a:rPr>
+              <a:t>.</a:t>
+            </a:r>
+            <a:endParaRPr lang="en-US" sz="1300" dirty="0"/>
+          </a:p>
+        </p:txBody>
+      </p:sp>
+      <p:sp>
+        <p:nvSpPr>
+          <p:cNvPr id="3" name="Text 1"/>
+          <p:cNvSpPr txBox="1"/>
+          <p:nvPr/>
+        </p:nvSpPr>
+        <p:spPr>
+          <a:xfrm>
+            <a:off x="621792" y="420624"/>
+            <a:ext cx="9208008" cy="676656"/>
+          </a:xfrm>
+          <a:prstGeom prst="rect">
+            <a:avLst/>
+          </a:prstGeom>
+          <a:noFill/>
+          <a:ln/>
+        </p:spPr>
+        <p:txBody>
+          <a:bodyPr wrap="square" lIns="0" tIns="0" rIns="0" bIns="0" rtlCol="0" anchor="ctr"/>
+          <a:lstStyle/>
+          <a:p>
+            <a:pPr indent="0" marL="0">
+              <a:buNone/>
+            </a:pPr>
+            <a:r>
+              <a:rPr lang="en-US" sz="2200" b="1" dirty="0">
+                <a:solidFill>
+                  <a:srgbClr val="2B2B2B"/>
+                </a:solidFill>
+                <a:latin typeface="Verdana" pitchFamily="34" charset="0"/>
+                <a:ea typeface="Verdana" pitchFamily="34" charset="-122"/>
+                <a:cs typeface="Verdana" pitchFamily="34" charset="-120"/>
+              </a:rPr>
+              <a:t>Lo que publican los bancos, en % de la inversión</a:t>
+            </a:r>
+            <a:endParaRPr lang="en-US" sz="2200" dirty="0"/>
+          </a:p>
+        </p:txBody>
+      </p:sp>
+      <p:sp>
+        <p:nvSpPr>
+          <p:cNvPr id="4" name="Text 2"/>
+          <p:cNvSpPr txBox="1"/>
+          <p:nvPr/>
+        </p:nvSpPr>
+        <p:spPr>
+          <a:xfrm>
+            <a:off x="621792" y="1060704"/>
+            <a:ext cx="10945368" cy="365760"/>
+          </a:xfrm>
+          <a:prstGeom prst="rect">
+            <a:avLst/>
+          </a:prstGeom>
+          <a:noFill/>
+          <a:ln/>
+        </p:spPr>
+        <p:txBody>
+          <a:bodyPr wrap="square" lIns="0" tIns="0" rIns="0" bIns="0" rtlCol="0" anchor="ctr"/>
+          <a:lstStyle/>
+          <a:p>
+            <a:pPr indent="0" marL="0">
+              <a:buNone/>
+            </a:pPr>
+            <a:r>
+              <a:rPr lang="en-US" sz="1050" dirty="0">
+                <a:solidFill>
+                  <a:srgbClr val="818181"/>
+                </a:solidFill>
+                <a:latin typeface="Verdana" pitchFamily="34" charset="0"/>
+                <a:ea typeface="Verdana" pitchFamily="34" charset="-122"/>
+                <a:cs typeface="Verdana" pitchFamily="34" charset="-120"/>
+              </a:rPr>
+              <a:t>Las mismas cuentas de la lámina anterior divididas por la inversión crediticia de su propio perímetro y anualizadas · Commerzbank publica trimestre (×4), el resto semestre (×2)</a:t>
+            </a:r>
+            <a:endParaRPr lang="en-US" sz="1050" dirty="0"/>
+          </a:p>
+        </p:txBody>
+      </p:sp>
+      <p:graphicFrame>
+        <p:nvGraphicFramePr>
+          <p:cNvPr id="7" name="Table 0"/>
+          <p:cNvGraphicFramePr>
+            <a:graphicFrameLocks noGrp="1"/>
+          </p:cNvGraphicFramePr>
+          <p:nvPr>
+            <p:extLst>
+              <p:ext uri="{D42A27DB-BD31-4B8C-83A1-F6EECF244321}">
+                <p14:modId xmlns:p14="http://schemas.microsoft.com/office/powerpoint/2010/main" val="1579011935"/>
+              </p:ext>
+            </p:extLst>
+          </p:nvPr>
+        </p:nvGraphicFramePr>
+        <p:xfrm>
+          <a:off x="621792" y="1664208"/>
+          <a:ext cx="10945368" cy="914400"/>
+        </p:xfrm>
+        <a:graphic>
+          <a:graphicData uri="http://schemas.openxmlformats.org/drawingml/2006/table">
+            <a:tbl>
+              <a:tblPr/>
+              <a:tblGrid>
+                <a:gridCol w="1417320"/>
+                <a:gridCol w="914400"/>
+                <a:gridCol w="1874520"/>
+                <a:gridCol w="1143000"/>
+                <a:gridCol w="960120"/>
+                <a:gridCol w="960120"/>
+                <a:gridCol w="1051560"/>
+                <a:gridCol w="914400"/>
+                <a:gridCol w="841248"/>
+                <a:gridCol w="868680"/>
+              </a:tblGrid>
+              <a:tr h="310896">
+                <a:tc>
+                  <a:txBody>
+                    <a:bodyPr/>
+                    <a:lstStyle/>
+                    <a:p>
+                      <a:pPr algn="l" indent="0" marL="0">
+                        <a:buNone/>
+                      </a:pPr>
+                      <a:r>
+                        <a:rPr lang="en-US" sz="850" b="1" dirty="0">
+                          <a:solidFill>
+                            <a:srgbClr val="FFFFFF"/>
+                          </a:solidFill>
+                          <a:latin typeface="Verdana" pitchFamily="34" charset="0"/>
+                          <a:ea typeface="Verdana" pitchFamily="34" charset="-122"/>
+                          <a:cs typeface="Verdana" pitchFamily="34" charset="-120"/>
+                        </a:rPr>
+                        <a:t>Banco</a:t>
+                      </a:r>
+                      <a:endParaRPr lang="en-US" sz="850" dirty="0">
+                        <a:latin typeface="Verdana" charset="0"/>
+                        <a:ea typeface="Verdana" charset="0"/>
+                        <a:cs typeface="Verdana" charset="0"/>
+                      </a:endParaRPr>
+                    </a:p>
+                  </a:txBody>
+                  <a:tcPr marL="91440" marR="91440" marT="45720" marB="45720" anchor="ctr">
+                    <a:lnL w="6350" cap="flat" cmpd="sng" algn="ctr">
+                      <a:solidFill>
+                        <a:srgbClr val="CACACA"/>
+                      </a:solidFill>
+                      <a:prstDash val="solid"/>
+                      <a:round/>
+                      <a:headEnd type="none" w="med" len="med"/>
+                      <a:tailEnd type="none" w="med" len="med"/>
+                    </a:lnL>
+                    <a:lnR w="6350" cap="flat" cmpd="sng" algn="ctr">
+                      <a:solidFill>
+                        <a:srgbClr val="CACACA"/>
+                      </a:solidFill>
+                      <a:prstDash val="solid"/>
+                      <a:round/>
+                      <a:headEnd type="none" w="med" len="med"/>
+                      <a:tailEnd type="none" w="med" len="med"/>
+                    </a:lnR>
+                    <a:lnT w="6350" cap="flat" cmpd="sng" algn="ctr">
+                      <a:solidFill>
+                        <a:srgbClr val="CACACA"/>
+                      </a:solidFill>
+                      <a:prstDash val="solid"/>
+                      <a:round/>
+                      <a:headEnd type="none" w="med" len="med"/>
+                      <a:tailEnd type="none" w="med" len="med"/>
+                    </a:lnT>
+                    <a:lnB w="6350" cap="flat" cmpd="sng" algn="ctr">
+                      <a:solidFill>
+                        <a:srgbClr val="CACACA"/>
+                      </a:solidFill>
+                      <a:prstDash val="solid"/>
+                      <a:round/>
+                      <a:headEnd type="none" w="med" len="med"/>
+                      <a:tailEnd type="none" w="med" len="med"/>
+                    </a:lnB>
+                    <a:solidFill>
+                      <a:srgbClr val="F56600"/>
+                    </a:solidFill>
+                  </a:tcPr>
+                </a:tc>
+                <a:tc>
+                  <a:txBody>
+                    <a:bodyPr/>
+                    <a:lstStyle/>
+                    <a:p>
+                      <a:pPr algn="l" indent="0" marL="0">
+                        <a:buNone/>
+                      </a:pPr>
+                      <a:r>
+                        <a:rPr lang="en-US" sz="850" b="1" dirty="0">
+                          <a:solidFill>
+                            <a:srgbClr val="FFFFFF"/>
+                          </a:solidFill>
+                          <a:latin typeface="Verdana" pitchFamily="34" charset="0"/>
+                          <a:ea typeface="Verdana" pitchFamily="34" charset="-122"/>
+                          <a:cs typeface="Verdana" pitchFamily="34" charset="-120"/>
+                        </a:rPr>
+                        <a:t>País</a:t>
+                      </a:r>
+                      <a:endParaRPr lang="en-US" sz="850" dirty="0">
+                        <a:latin typeface="Verdana" charset="0"/>
+                        <a:ea typeface="Verdana" charset="0"/>
+                        <a:cs typeface="Verdana" charset="0"/>
+                      </a:endParaRPr>
+                    </a:p>
+                  </a:txBody>
+                  <a:tcPr marL="91440" marR="91440" marT="45720" marB="45720" anchor="ctr">
+                    <a:lnL w="6350" cap="flat" cmpd="sng" algn="ctr">
+                      <a:solidFill>
+                        <a:srgbClr val="CACACA"/>
+                      </a:solidFill>
+                      <a:prstDash val="solid"/>
+                      <a:round/>
+                      <a:headEnd type="none" w="med" len="med"/>
+                      <a:tailEnd type="none" w="med" len="med"/>
+                    </a:lnL>
+                    <a:lnR w="6350" cap="flat" cmpd="sng" algn="ctr">
+                      <a:solidFill>
+                        <a:srgbClr val="CACACA"/>
+                      </a:solidFill>
+                      <a:prstDash val="solid"/>
+                      <a:round/>
+                      <a:headEnd type="none" w="med" len="med"/>
+                      <a:tailEnd type="none" w="med" len="med"/>
+                    </a:lnR>
+                    <a:lnT w="6350" cap="flat" cmpd="sng" algn="ctr">
+                      <a:solidFill>
+                        <a:srgbClr val="CACACA"/>
+                      </a:solidFill>
+                      <a:prstDash val="solid"/>
+                      <a:round/>
+                      <a:headEnd type="none" w="med" len="med"/>
+                      <a:tailEnd type="none" w="med" len="med"/>
+                    </a:lnT>
+                    <a:lnB w="6350" cap="flat" cmpd="sng" algn="ctr">
+                      <a:solidFill>
+                        <a:srgbClr val="CACACA"/>
+                      </a:solidFill>
+                      <a:prstDash val="solid"/>
+                      <a:round/>
+                      <a:headEnd type="none" w="med" len="med"/>
+                      <a:tailEnd type="none" w="med" len="med"/>
+                    </a:lnB>
+                    <a:solidFill>
+                      <a:srgbClr val="F56600"/>
+                    </a:solidFill>
+                  </a:tcPr>
+                </a:tc>
+                <a:tc>
+                  <a:txBody>
+                    <a:bodyPr/>
+                    <a:lstStyle/>
+                    <a:p>
+                      <a:pPr algn="l" indent="0" marL="0">
+                        <a:buNone/>
+                      </a:pPr>
+                      <a:r>
+                        <a:rPr lang="en-US" sz="850" b="1" dirty="0">
+                          <a:solidFill>
+                            <a:srgbClr val="FFFFFF"/>
+                          </a:solidFill>
+                          <a:latin typeface="Verdana" pitchFamily="34" charset="0"/>
+                          <a:ea typeface="Verdana" pitchFamily="34" charset="-122"/>
+                          <a:cs typeface="Verdana" pitchFamily="34" charset="-120"/>
+                        </a:rPr>
+                        <a:t>Perímetro publicado</a:t>
+                      </a:r>
+                      <a:endParaRPr lang="en-US" sz="850" dirty="0">
+                        <a:latin typeface="Verdana" charset="0"/>
+                        <a:ea typeface="Verdana" charset="0"/>
+                        <a:cs typeface="Verdana" charset="0"/>
+                      </a:endParaRPr>
+                    </a:p>
+                  </a:txBody>
+                  <a:tcPr marL="91440" marR="91440" marT="45720" marB="45720" anchor="ctr">
+                    <a:lnL w="6350" cap="flat" cmpd="sng" algn="ctr">
+                      <a:solidFill>
+                        <a:srgbClr val="CACACA"/>
+                      </a:solidFill>
+                      <a:prstDash val="solid"/>
+                      <a:round/>
+                      <a:headEnd type="none" w="med" len="med"/>
+                      <a:tailEnd type="none" w="med" len="med"/>
+                    </a:lnL>
+                    <a:lnR w="6350" cap="flat" cmpd="sng" algn="ctr">
+                      <a:solidFill>
+                        <a:srgbClr val="CACACA"/>
+                      </a:solidFill>
+                      <a:prstDash val="solid"/>
+                      <a:round/>
+                      <a:headEnd type="none" w="med" len="med"/>
+                      <a:tailEnd type="none" w="med" len="med"/>
+                    </a:lnR>
+                    <a:lnT w="6350" cap="flat" cmpd="sng" algn="ctr">
+                      <a:solidFill>
+                        <a:srgbClr val="CACACA"/>
+                      </a:solidFill>
+                      <a:prstDash val="solid"/>
+                      <a:round/>
+                      <a:headEnd type="none" w="med" len="med"/>
+                      <a:tailEnd type="none" w="med" len="med"/>
+                    </a:lnT>
+                    <a:lnB w="6350" cap="flat" cmpd="sng" algn="ctr">
+                      <a:solidFill>
+                        <a:srgbClr val="CACACA"/>
+                      </a:solidFill>
+                      <a:prstDash val="solid"/>
+                      <a:round/>
+                      <a:headEnd type="none" w="med" len="med"/>
+                      <a:tailEnd type="none" w="med" len="med"/>
+                    </a:lnB>
+                    <a:solidFill>
+                      <a:srgbClr val="F56600"/>
+                    </a:solidFill>
+                  </a:tcPr>
+                </a:tc>
+                <a:tc>
+                  <a:txBody>
+                    <a:bodyPr/>
+                    <a:lstStyle/>
+                    <a:p>
+                      <a:pPr algn="ctr" indent="0" marL="0">
+                        <a:buNone/>
+                      </a:pPr>
+                      <a:r>
+                        <a:rPr lang="en-US" sz="850" b="1" dirty="0">
+                          <a:solidFill>
+                            <a:srgbClr val="FFFFFF"/>
+                          </a:solidFill>
+                          <a:latin typeface="Verdana" pitchFamily="34" charset="0"/>
+                          <a:ea typeface="Verdana" pitchFamily="34" charset="-122"/>
+                          <a:cs typeface="Verdana" pitchFamily="34" charset="-120"/>
+                        </a:rPr>
+                        <a:t>Inversión</a:t>
+                      </a:r>
+                      <a:endParaRPr lang="en-US" sz="850" dirty="0">
+                        <a:latin typeface="Verdana" charset="0"/>
+                        <a:ea typeface="Verdana" charset="0"/>
+                        <a:cs typeface="Verdana" charset="0"/>
+                      </a:endParaRPr>
+                    </a:p>
+                    <a:p>
+                      <a:pPr algn="ctr" indent="0" marL="0">
+                        <a:buNone/>
+                      </a:pPr>
+                      <a:r>
+                        <a:rPr lang="en-US" sz="850" b="1" dirty="0">
+                          <a:solidFill>
+                            <a:srgbClr val="FFFFFF"/>
+                          </a:solidFill>
+                          <a:latin typeface="Verdana" pitchFamily="34" charset="0"/>
+                          <a:ea typeface="Verdana" pitchFamily="34" charset="-122"/>
+                          <a:cs typeface="Verdana" pitchFamily="34" charset="-120"/>
+                        </a:rPr>
+                        <a:t>M€</a:t>
+                      </a:r>
+                      <a:endParaRPr lang="en-US" sz="850" dirty="0">
+                        <a:latin typeface="Verdana" charset="0"/>
+                        <a:ea typeface="Verdana" charset="0"/>
+                        <a:cs typeface="Verdana" charset="0"/>
+                      </a:endParaRPr>
+                    </a:p>
+                  </a:txBody>
+                  <a:tcPr marL="91440" marR="91440" marT="45720" marB="45720" anchor="ctr">
+                    <a:lnL w="6350" cap="flat" cmpd="sng" algn="ctr">
+                      <a:solidFill>
+                        <a:srgbClr val="CACACA"/>
+                      </a:solidFill>
+                      <a:prstDash val="solid"/>
+                      <a:round/>
+                      <a:headEnd type="none" w="med" len="med"/>
+                      <a:tailEnd type="none" w="med" len="med"/>
+                    </a:lnL>
+                    <a:lnR w="6350" cap="flat" cmpd="sng" algn="ctr">
+                      <a:solidFill>
+                        <a:srgbClr val="CACACA"/>
+                      </a:solidFill>
+                      <a:prstDash val="solid"/>
+                      <a:round/>
+                      <a:headEnd type="none" w="med" len="med"/>
+                      <a:tailEnd type="none" w="med" len="med"/>
+                    </a:lnR>
+                    <a:lnT w="6350" cap="flat" cmpd="sng" algn="ctr">
+                      <a:solidFill>
+                        <a:srgbClr val="CACACA"/>
+                      </a:solidFill>
+                      <a:prstDash val="solid"/>
+                      <a:round/>
+                      <a:headEnd type="none" w="med" len="med"/>
+                      <a:tailEnd type="none" w="med" len="med"/>
+                    </a:lnT>
+                    <a:lnB w="6350" cap="flat" cmpd="sng" algn="ctr">
+                      <a:solidFill>
+                        <a:srgbClr val="CACACA"/>
+                      </a:solidFill>
+                      <a:prstDash val="solid"/>
+                      <a:round/>
+                      <a:headEnd type="none" w="med" len="med"/>
+                      <a:tailEnd type="none" w="med" len="med"/>
+                    </a:lnB>
+                    <a:solidFill>
+                      <a:srgbClr val="F56600"/>
+                    </a:solidFill>
+                  </a:tcPr>
+                </a:tc>
+                <a:tc>
+                  <a:txBody>
+                    <a:bodyPr/>
+                    <a:lstStyle/>
+                    <a:p>
+                      <a:pPr algn="ctr" indent="0" marL="0">
+                        <a:buNone/>
+                      </a:pPr>
+                      <a:r>
+                        <a:rPr lang="en-US" sz="850" b="1" dirty="0">
+                          <a:solidFill>
+                            <a:srgbClr val="FFFFFF"/>
+                          </a:solidFill>
+                          <a:latin typeface="Verdana" pitchFamily="34" charset="0"/>
+                          <a:ea typeface="Verdana" pitchFamily="34" charset="-122"/>
+                          <a:cs typeface="Verdana" pitchFamily="34" charset="-120"/>
+                        </a:rPr>
+                        <a:t>Ingresos</a:t>
+                      </a:r>
+                      <a:endParaRPr lang="en-US" sz="850" dirty="0">
+                        <a:latin typeface="Verdana" charset="0"/>
+                        <a:ea typeface="Verdana" charset="0"/>
+                        <a:cs typeface="Verdana" charset="0"/>
+                      </a:endParaRPr>
+                    </a:p>
+                  </a:txBody>
+                  <a:tcPr marL="91440" marR="91440" marT="45720" marB="45720" anchor="ctr">
+                    <a:lnL w="6350" cap="flat" cmpd="sng" algn="ctr">
+                      <a:solidFill>
+                        <a:srgbClr val="CACACA"/>
+                      </a:solidFill>
+                      <a:prstDash val="solid"/>
+                      <a:round/>
+                      <a:headEnd type="none" w="med" len="med"/>
+                      <a:tailEnd type="none" w="med" len="med"/>
+                    </a:lnL>
+                    <a:lnR w="6350" cap="flat" cmpd="sng" algn="ctr">
+                      <a:solidFill>
+                        <a:srgbClr val="CACACA"/>
+                      </a:solidFill>
+                      <a:prstDash val="solid"/>
+                      <a:round/>
+                      <a:headEnd type="none" w="med" len="med"/>
+                      <a:tailEnd type="none" w="med" len="med"/>
+                    </a:lnR>
+                    <a:lnT w="6350" cap="flat" cmpd="sng" algn="ctr">
+                      <a:solidFill>
+                        <a:srgbClr val="CACACA"/>
+                      </a:solidFill>
+                      <a:prstDash val="solid"/>
+                      <a:round/>
+                      <a:headEnd type="none" w="med" len="med"/>
+                      <a:tailEnd type="none" w="med" len="med"/>
+                    </a:lnT>
+                    <a:lnB w="6350" cap="flat" cmpd="sng" algn="ctr">
+                      <a:solidFill>
+                        <a:srgbClr val="CACACA"/>
+                      </a:solidFill>
+                      <a:prstDash val="solid"/>
+                      <a:round/>
+                      <a:headEnd type="none" w="med" len="med"/>
+                      <a:tailEnd type="none" w="med" len="med"/>
+                    </a:lnB>
+                    <a:solidFill>
+                      <a:srgbClr val="F56600"/>
+                    </a:solidFill>
+                  </a:tcPr>
+                </a:tc>
+                <a:tc>
+                  <a:txBody>
+                    <a:bodyPr/>
+                    <a:lstStyle/>
+                    <a:p>
+                      <a:pPr algn="ctr" indent="0" marL="0">
+                        <a:buNone/>
+                      </a:pPr>
+                      <a:r>
+                        <a:rPr lang="en-US" sz="850" b="1" dirty="0">
+                          <a:solidFill>
+                            <a:srgbClr val="FFFFFF"/>
+                          </a:solidFill>
+                          <a:latin typeface="Verdana" pitchFamily="34" charset="0"/>
+                          <a:ea typeface="Verdana" pitchFamily="34" charset="-122"/>
+                          <a:cs typeface="Verdana" pitchFamily="34" charset="-120"/>
+                        </a:rPr>
+                        <a:t>M. intereses</a:t>
+                      </a:r>
+                      <a:endParaRPr lang="en-US" sz="850" dirty="0">
+                        <a:latin typeface="Verdana" charset="0"/>
+                        <a:ea typeface="Verdana" charset="0"/>
+                        <a:cs typeface="Verdana" charset="0"/>
+                      </a:endParaRPr>
+                    </a:p>
+                  </a:txBody>
+                  <a:tcPr marL="91440" marR="91440" marT="45720" marB="45720" anchor="ctr">
+                    <a:lnL w="6350" cap="flat" cmpd="sng" algn="ctr">
+                      <a:solidFill>
+                        <a:srgbClr val="CACACA"/>
+                      </a:solidFill>
+                      <a:prstDash val="solid"/>
+                      <a:round/>
+                      <a:headEnd type="none" w="med" len="med"/>
+                      <a:tailEnd type="none" w="med" len="med"/>
+                    </a:lnL>
+                    <a:lnR w="6350" cap="flat" cmpd="sng" algn="ctr">
+                      <a:solidFill>
+                        <a:srgbClr val="CACACA"/>
+                      </a:solidFill>
+                      <a:prstDash val="solid"/>
+                      <a:round/>
+                      <a:headEnd type="none" w="med" len="med"/>
+                      <a:tailEnd type="none" w="med" len="med"/>
+                    </a:lnR>
+                    <a:lnT w="6350" cap="flat" cmpd="sng" algn="ctr">
+                      <a:solidFill>
+                        <a:srgbClr val="CACACA"/>
+                      </a:solidFill>
+                      <a:prstDash val="solid"/>
+                      <a:round/>
+                      <a:headEnd type="none" w="med" len="med"/>
+                      <a:tailEnd type="none" w="med" len="med"/>
+                    </a:lnT>
+                    <a:lnB w="6350" cap="flat" cmpd="sng" algn="ctr">
+                      <a:solidFill>
+                        <a:srgbClr val="CACACA"/>
+                      </a:solidFill>
+                      <a:prstDash val="solid"/>
+                      <a:round/>
+                      <a:headEnd type="none" w="med" len="med"/>
+                      <a:tailEnd type="none" w="med" len="med"/>
+                    </a:lnB>
+                    <a:solidFill>
+                      <a:srgbClr val="F56600"/>
+                    </a:solidFill>
+                  </a:tcPr>
+                </a:tc>
+                <a:tc>
+                  <a:txBody>
+                    <a:bodyPr/>
+                    <a:lstStyle/>
+                    <a:p>
+                      <a:pPr algn="ctr" indent="0" marL="0">
+                        <a:buNone/>
+                      </a:pPr>
+                      <a:r>
+                        <a:rPr lang="en-US" sz="850" b="1" dirty="0">
+                          <a:solidFill>
+                            <a:srgbClr val="FFFFFF"/>
+                          </a:solidFill>
+                          <a:latin typeface="Verdana" pitchFamily="34" charset="0"/>
+                          <a:ea typeface="Verdana" pitchFamily="34" charset="-122"/>
+                          <a:cs typeface="Verdana" pitchFamily="34" charset="-120"/>
+                        </a:rPr>
+                        <a:t>Comisiones</a:t>
+                      </a:r>
+                      <a:endParaRPr lang="en-US" sz="850" dirty="0">
+                        <a:latin typeface="Verdana" charset="0"/>
+                        <a:ea typeface="Verdana" charset="0"/>
+                        <a:cs typeface="Verdana" charset="0"/>
+                      </a:endParaRPr>
+                    </a:p>
+                  </a:txBody>
+                  <a:tcPr marL="91440" marR="91440" marT="45720" marB="45720" anchor="ctr">
+                    <a:lnL w="6350" cap="flat" cmpd="sng" algn="ctr">
+                      <a:solidFill>
+                        <a:srgbClr val="CACACA"/>
+                      </a:solidFill>
+                      <a:prstDash val="solid"/>
+                      <a:round/>
+                      <a:headEnd type="none" w="med" len="med"/>
+                      <a:tailEnd type="none" w="med" len="med"/>
+                    </a:lnL>
+                    <a:lnR w="6350" cap="flat" cmpd="sng" algn="ctr">
+                      <a:solidFill>
+                        <a:srgbClr val="CACACA"/>
+                      </a:solidFill>
+                      <a:prstDash val="solid"/>
+                      <a:round/>
+                      <a:headEnd type="none" w="med" len="med"/>
+                      <a:tailEnd type="none" w="med" len="med"/>
+                    </a:lnR>
+                    <a:lnT w="6350" cap="flat" cmpd="sng" algn="ctr">
+                      <a:solidFill>
+                        <a:srgbClr val="CACACA"/>
+                      </a:solidFill>
+                      <a:prstDash val="solid"/>
+                      <a:round/>
+                      <a:headEnd type="none" w="med" len="med"/>
+                      <a:tailEnd type="none" w="med" len="med"/>
+                    </a:lnT>
+                    <a:lnB w="6350" cap="flat" cmpd="sng" algn="ctr">
+                      <a:solidFill>
+                        <a:srgbClr val="CACACA"/>
+                      </a:solidFill>
+                      <a:prstDash val="solid"/>
+                      <a:round/>
+                      <a:headEnd type="none" w="med" len="med"/>
+                      <a:tailEnd type="none" w="med" len="med"/>
+                    </a:lnB>
+                    <a:solidFill>
+                      <a:srgbClr val="2B2B2B"/>
+                    </a:solidFill>
+                  </a:tcPr>
+                </a:tc>
+                <a:tc>
+                  <a:txBody>
+                    <a:bodyPr/>
+                    <a:lstStyle/>
+                    <a:p>
+                      <a:pPr algn="ctr" indent="0" marL="0">
+                        <a:buNone/>
+                      </a:pPr>
+                      <a:r>
+                        <a:rPr lang="en-US" sz="850" b="1" dirty="0">
+                          <a:solidFill>
+                            <a:srgbClr val="FFFFFF"/>
+                          </a:solidFill>
+                          <a:latin typeface="Verdana" pitchFamily="34" charset="0"/>
+                          <a:ea typeface="Verdana" pitchFamily="34" charset="-122"/>
+                          <a:cs typeface="Verdana" pitchFamily="34" charset="-120"/>
+                        </a:rPr>
+                        <a:t>Costes</a:t>
+                      </a:r>
+                      <a:endParaRPr lang="en-US" sz="850" dirty="0">
+                        <a:latin typeface="Verdana" charset="0"/>
+                        <a:ea typeface="Verdana" charset="0"/>
+                        <a:cs typeface="Verdana" charset="0"/>
+                      </a:endParaRPr>
+                    </a:p>
+                  </a:txBody>
+                  <a:tcPr marL="91440" marR="91440" marT="45720" marB="45720" anchor="ctr">
+                    <a:lnL w="6350" cap="flat" cmpd="sng" algn="ctr">
+                      <a:solidFill>
+                        <a:srgbClr val="CACACA"/>
+                      </a:solidFill>
+                      <a:prstDash val="solid"/>
+                      <a:round/>
+                      <a:headEnd type="none" w="med" len="med"/>
+                      <a:tailEnd type="none" w="med" len="med"/>
+                    </a:lnL>
+                    <a:lnR w="6350" cap="flat" cmpd="sng" algn="ctr">
+                      <a:solidFill>
+                        <a:srgbClr val="CACACA"/>
+                      </a:solidFill>
+                      <a:prstDash val="solid"/>
+                      <a:round/>
+                      <a:headEnd type="none" w="med" len="med"/>
+                      <a:tailEnd type="none" w="med" len="med"/>
+                    </a:lnR>
+                    <a:lnT w="6350" cap="flat" cmpd="sng" algn="ctr">
+                      <a:solidFill>
+                        <a:srgbClr val="CACACA"/>
+                      </a:solidFill>
+                      <a:prstDash val="solid"/>
+                      <a:round/>
+                      <a:headEnd type="none" w="med" len="med"/>
+                      <a:tailEnd type="none" w="med" len="med"/>
+                    </a:lnT>
+                    <a:lnB w="6350" cap="flat" cmpd="sng" algn="ctr">
+                      <a:solidFill>
+                        <a:srgbClr val="CACACA"/>
+                      </a:solidFill>
+                      <a:prstDash val="solid"/>
+                      <a:round/>
+                      <a:headEnd type="none" w="med" len="med"/>
+                      <a:tailEnd type="none" w="med" len="med"/>
+                    </a:lnB>
+                    <a:solidFill>
+                      <a:srgbClr val="F56600"/>
+                    </a:solidFill>
+                  </a:tcPr>
+                </a:tc>
+                <a:tc>
+                  <a:txBody>
+                    <a:bodyPr/>
+                    <a:lstStyle/>
+                    <a:p>
+                      <a:pPr algn="ctr" indent="0" marL="0">
+                        <a:buNone/>
+                      </a:pPr>
+                      <a:r>
+                        <a:rPr lang="en-US" sz="850" b="1" dirty="0">
+                          <a:solidFill>
+                            <a:srgbClr val="FFFFFF"/>
+                          </a:solidFill>
+                          <a:latin typeface="Verdana" pitchFamily="34" charset="0"/>
+                          <a:ea typeface="Verdana" pitchFamily="34" charset="-122"/>
+                          <a:cs typeface="Verdana" pitchFamily="34" charset="-120"/>
+                        </a:rPr>
+                        <a:t>Coste riesgo</a:t>
+                      </a:r>
+                      <a:endParaRPr lang="en-US" sz="850" dirty="0">
+                        <a:latin typeface="Verdana" charset="0"/>
+                        <a:ea typeface="Verdana" charset="0"/>
+                        <a:cs typeface="Verdana" charset="0"/>
+                      </a:endParaRPr>
+                    </a:p>
+                  </a:txBody>
+                  <a:tcPr marL="91440" marR="91440" marT="45720" marB="45720" anchor="ctr">
+                    <a:lnL w="6350" cap="flat" cmpd="sng" algn="ctr">
+                      <a:solidFill>
+                        <a:srgbClr val="CACACA"/>
+                      </a:solidFill>
+                      <a:prstDash val="solid"/>
+                      <a:round/>
+                      <a:headEnd type="none" w="med" len="med"/>
+                      <a:tailEnd type="none" w="med" len="med"/>
+                    </a:lnL>
+                    <a:lnR w="6350" cap="flat" cmpd="sng" algn="ctr">
+                      <a:solidFill>
+                        <a:srgbClr val="CACACA"/>
+                      </a:solidFill>
+                      <a:prstDash val="solid"/>
+                      <a:round/>
+                      <a:headEnd type="none" w="med" len="med"/>
+                      <a:tailEnd type="none" w="med" len="med"/>
+                    </a:lnR>
+                    <a:lnT w="6350" cap="flat" cmpd="sng" algn="ctr">
+                      <a:solidFill>
+                        <a:srgbClr val="CACACA"/>
+                      </a:solidFill>
+                      <a:prstDash val="solid"/>
+                      <a:round/>
+                      <a:headEnd type="none" w="med" len="med"/>
+                      <a:tailEnd type="none" w="med" len="med"/>
+                    </a:lnT>
+                    <a:lnB w="6350" cap="flat" cmpd="sng" algn="ctr">
+                      <a:solidFill>
+                        <a:srgbClr val="CACACA"/>
+                      </a:solidFill>
+                      <a:prstDash val="solid"/>
+                      <a:round/>
+                      <a:headEnd type="none" w="med" len="med"/>
+                      <a:tailEnd type="none" w="med" len="med"/>
+                    </a:lnB>
+                    <a:solidFill>
+                      <a:srgbClr val="F56600"/>
+                    </a:solidFill>
+                  </a:tcPr>
+                </a:tc>
+                <a:tc>
+                  <a:txBody>
+                    <a:bodyPr/>
+                    <a:lstStyle/>
+                    <a:p>
+                      <a:pPr algn="ctr" indent="0" marL="0">
+                        <a:buNone/>
+                      </a:pPr>
+                      <a:r>
+                        <a:rPr lang="en-US" sz="850" b="1" dirty="0">
+                          <a:solidFill>
+                            <a:srgbClr val="FFFFFF"/>
+                          </a:solidFill>
+                          <a:latin typeface="Verdana" pitchFamily="34" charset="0"/>
+                          <a:ea typeface="Verdana" pitchFamily="34" charset="-122"/>
+                          <a:cs typeface="Verdana" pitchFamily="34" charset="-120"/>
+                        </a:rPr>
+                        <a:t>BAI</a:t>
+                      </a:r>
+                      <a:endParaRPr lang="en-US" sz="850" dirty="0">
+                        <a:latin typeface="Verdana" charset="0"/>
+                        <a:ea typeface="Verdana" charset="0"/>
+                        <a:cs typeface="Verdana" charset="0"/>
+                      </a:endParaRPr>
+                    </a:p>
+                  </a:txBody>
+                  <a:tcPr marL="91440" marR="91440" marT="45720" marB="45720" anchor="ctr">
+                    <a:lnL w="6350" cap="flat" cmpd="sng" algn="ctr">
+                      <a:solidFill>
+                        <a:srgbClr val="CACACA"/>
+                      </a:solidFill>
+                      <a:prstDash val="solid"/>
+                      <a:round/>
+                      <a:headEnd type="none" w="med" len="med"/>
+                      <a:tailEnd type="none" w="med" len="med"/>
+                    </a:lnL>
+                    <a:lnR w="6350" cap="flat" cmpd="sng" algn="ctr">
+                      <a:solidFill>
+                        <a:srgbClr val="CACACA"/>
+                      </a:solidFill>
+                      <a:prstDash val="solid"/>
+                      <a:round/>
+                      <a:headEnd type="none" w="med" len="med"/>
+                      <a:tailEnd type="none" w="med" len="med"/>
+                    </a:lnR>
+                    <a:lnT w="6350" cap="flat" cmpd="sng" algn="ctr">
+                      <a:solidFill>
+                        <a:srgbClr val="CACACA"/>
+                      </a:solidFill>
+                      <a:prstDash val="solid"/>
+                      <a:round/>
+                      <a:headEnd type="none" w="med" len="med"/>
+                      <a:tailEnd type="none" w="med" len="med"/>
+                    </a:lnT>
+                    <a:lnB w="6350" cap="flat" cmpd="sng" algn="ctr">
+                      <a:solidFill>
+                        <a:srgbClr val="CACACA"/>
+                      </a:solidFill>
+                      <a:prstDash val="solid"/>
+                      <a:round/>
+                      <a:headEnd type="none" w="med" len="med"/>
+                      <a:tailEnd type="none" w="med" len="med"/>
+                    </a:lnB>
+                    <a:solidFill>
+                      <a:srgbClr val="F56600"/>
+                    </a:solidFill>
+                  </a:tcPr>
+                </a:tc>
+              </a:tr>
+              <a:tr h="310896">
+                <a:tc>
+                  <a:txBody>
+                    <a:bodyPr/>
+                    <a:lstStyle/>
+                    <a:p>
+                      <a:pPr algn="l" indent="0" marL="0">
+                        <a:buNone/>
+                      </a:pPr>
+                      <a:r>
+                        <a:rPr lang="en-US" sz="950" b="1" dirty="0">
+                          <a:solidFill>
+                            <a:srgbClr val="2B2B2B"/>
+                          </a:solidFill>
+                          <a:latin typeface="Verdana" pitchFamily="34" charset="0"/>
+                          <a:ea typeface="Verdana" pitchFamily="34" charset="-122"/>
+                          <a:cs typeface="Verdana" pitchFamily="34" charset="-120"/>
+                        </a:rPr>
+                        <a:t>Commerzbank</a:t>
+                      </a:r>
+                      <a:endParaRPr lang="en-US" sz="950" dirty="0">
+                        <a:latin typeface="Verdana" charset="0"/>
+                        <a:ea typeface="Verdana" charset="0"/>
+                        <a:cs typeface="Verdana" charset="0"/>
+                      </a:endParaRPr>
+                    </a:p>
+                  </a:txBody>
+                  <a:tcPr marL="91440" marR="91440" marT="45720" marB="45720" anchor="ctr">
+                    <a:lnL w="6350" cap="flat" cmpd="sng" algn="ctr">
+                      <a:solidFill>
+                        <a:srgbClr val="CACACA"/>
+                      </a:solidFill>
+                      <a:prstDash val="solid"/>
+                      <a:round/>
+                      <a:headEnd type="none" w="med" len="med"/>
+                      <a:tailEnd type="none" w="med" len="med"/>
+                    </a:lnL>
+                    <a:lnR w="6350" cap="flat" cmpd="sng" algn="ctr">
+                      <a:solidFill>
+                        <a:srgbClr val="CACACA"/>
+                      </a:solidFill>
+                      <a:prstDash val="solid"/>
+                      <a:round/>
+                      <a:headEnd type="none" w="med" len="med"/>
+                      <a:tailEnd type="none" w="med" len="med"/>
+                    </a:lnR>
+                    <a:lnT w="6350" cap="flat" cmpd="sng" algn="ctr">
+                      <a:solidFill>
+                        <a:srgbClr val="CACACA"/>
+                      </a:solidFill>
+                      <a:prstDash val="solid"/>
+                      <a:round/>
+                      <a:headEnd type="none" w="med" len="med"/>
+                      <a:tailEnd type="none" w="med" len="med"/>
+                    </a:lnT>
+                    <a:lnB w="6350" cap="flat" cmpd="sng" algn="ctr">
+                      <a:solidFill>
+                        <a:srgbClr val="CACACA"/>
+                      </a:solidFill>
+                      <a:prstDash val="solid"/>
+                      <a:round/>
+                      <a:headEnd type="none" w="med" len="med"/>
+                      <a:tailEnd type="none" w="med" len="med"/>
+                    </a:lnB>
+                  </a:tcPr>
+                </a:tc>
+                <a:tc>
+                  <a:txBody>
+                    <a:bodyPr/>
+                    <a:lstStyle/>
+                    <a:p>
+                      <a:pPr algn="l" indent="0" marL="0">
+                        <a:buNone/>
+                      </a:pPr>
+                      <a:r>
+                        <a:rPr lang="en-US" sz="950" dirty="0">
+                          <a:solidFill>
+                            <a:srgbClr val="818181"/>
+                          </a:solidFill>
+                          <a:latin typeface="Verdana" pitchFamily="34" charset="0"/>
+                          <a:ea typeface="Verdana" pitchFamily="34" charset="-122"/>
+                          <a:cs typeface="Verdana" pitchFamily="34" charset="-120"/>
+                        </a:rPr>
+                        <a:t>Alemania</a:t>
+                      </a:r>
+                      <a:endParaRPr lang="en-US" sz="950" dirty="0">
+                        <a:latin typeface="Verdana" charset="0"/>
+                        <a:ea typeface="Verdana" charset="0"/>
+                        <a:cs typeface="Verdana" charset="0"/>
+                      </a:endParaRPr>
+                    </a:p>
+                  </a:txBody>
+                  <a:tcPr marL="91440" marR="91440" marT="45720" marB="45720" anchor="ctr">
+                    <a:lnL w="6350" cap="flat" cmpd="sng" algn="ctr">
+                      <a:solidFill>
+                        <a:srgbClr val="CACACA"/>
+                      </a:solidFill>
+                      <a:prstDash val="solid"/>
+                      <a:round/>
+                      <a:headEnd type="none" w="med" len="med"/>
+                      <a:tailEnd type="none" w="med" len="med"/>
+                    </a:lnL>
+                    <a:lnR w="6350" cap="flat" cmpd="sng" algn="ctr">
+                      <a:solidFill>
+                        <a:srgbClr val="CACACA"/>
+                      </a:solidFill>
+                      <a:prstDash val="solid"/>
+                      <a:round/>
+                      <a:headEnd type="none" w="med" len="med"/>
+                      <a:tailEnd type="none" w="med" len="med"/>
+                    </a:lnR>
+                    <a:lnT w="6350" cap="flat" cmpd="sng" algn="ctr">
+                      <a:solidFill>
+                        <a:srgbClr val="CACACA"/>
+                      </a:solidFill>
+                      <a:prstDash val="solid"/>
+                      <a:round/>
+                      <a:headEnd type="none" w="med" len="med"/>
+                      <a:tailEnd type="none" w="med" len="med"/>
+                    </a:lnT>
+                    <a:lnB w="6350" cap="flat" cmpd="sng" algn="ctr">
+                      <a:solidFill>
+                        <a:srgbClr val="CACACA"/>
+                      </a:solidFill>
+                      <a:prstDash val="solid"/>
+                      <a:round/>
+                      <a:headEnd type="none" w="med" len="med"/>
+                      <a:tailEnd type="none" w="med" len="med"/>
+                    </a:lnB>
+                  </a:tcPr>
+                </a:tc>
+                <a:tc>
+                  <a:txBody>
+                    <a:bodyPr/>
+                    <a:lstStyle/>
+                    <a:p>
+                      <a:pPr algn="l" indent="0" marL="0">
+                        <a:buNone/>
+                      </a:pPr>
+                      <a:r>
+                        <a:rPr lang="en-US" sz="900" dirty="0">
+                          <a:solidFill>
+                            <a:srgbClr val="F56600"/>
+                          </a:solidFill>
+                          <a:latin typeface="Verdana" pitchFamily="34" charset="0"/>
+                          <a:ea typeface="Verdana" pitchFamily="34" charset="-122"/>
+                          <a:cs typeface="Verdana" pitchFamily="34" charset="-120"/>
+                        </a:rPr>
+                        <a:t>Corporate Clients</a:t>
+                      </a:r>
+                      <a:endParaRPr lang="en-US" sz="900" dirty="0">
+                        <a:latin typeface="Verdana" charset="0"/>
+                        <a:ea typeface="Verdana" charset="0"/>
+                        <a:cs typeface="Verdana" charset="0"/>
+                      </a:endParaRPr>
+                    </a:p>
+                  </a:txBody>
+                  <a:tcPr marL="91440" marR="91440" marT="45720" marB="45720" anchor="ctr">
+                    <a:lnL w="6350" cap="flat" cmpd="sng" algn="ctr">
+                      <a:solidFill>
+                        <a:srgbClr val="CACACA"/>
+                      </a:solidFill>
+                      <a:prstDash val="solid"/>
+                      <a:round/>
+                      <a:headEnd type="none" w="med" len="med"/>
+                      <a:tailEnd type="none" w="med" len="med"/>
+                    </a:lnL>
+                    <a:lnR w="6350" cap="flat" cmpd="sng" algn="ctr">
+                      <a:solidFill>
+                        <a:srgbClr val="CACACA"/>
+                      </a:solidFill>
+                      <a:prstDash val="solid"/>
+                      <a:round/>
+                      <a:headEnd type="none" w="med" len="med"/>
+                      <a:tailEnd type="none" w="med" len="med"/>
+                    </a:lnR>
+                    <a:lnT w="6350" cap="flat" cmpd="sng" algn="ctr">
+                      <a:solidFill>
+                        <a:srgbClr val="CACACA"/>
+                      </a:solidFill>
+                      <a:prstDash val="solid"/>
+                      <a:round/>
+                      <a:headEnd type="none" w="med" len="med"/>
+                      <a:tailEnd type="none" w="med" len="med"/>
+                    </a:lnT>
+                    <a:lnB w="6350" cap="flat" cmpd="sng" algn="ctr">
+                      <a:solidFill>
+                        <a:srgbClr val="CACACA"/>
+                      </a:solidFill>
+                      <a:prstDash val="solid"/>
+                      <a:round/>
+                      <a:headEnd type="none" w="med" len="med"/>
+                      <a:tailEnd type="none" w="med" len="med"/>
+                    </a:lnB>
+                  </a:tcPr>
+                </a:tc>
+                <a:tc>
+                  <a:txBody>
+                    <a:bodyPr/>
+                    <a:lstStyle/>
+                    <a:p>
+                      <a:pPr algn="ctr" indent="0" marL="0">
+                        <a:buNone/>
+                      </a:pPr>
+                      <a:r>
+                        <a:rPr lang="en-US" sz="950" dirty="0">
+                          <a:solidFill>
+                            <a:srgbClr val="818181"/>
+                          </a:solidFill>
+                          <a:latin typeface="Verdana" pitchFamily="34" charset="0"/>
+                          <a:ea typeface="Verdana" pitchFamily="34" charset="-122"/>
+                          <a:cs typeface="Verdana" pitchFamily="34" charset="-120"/>
+                        </a:rPr>
+                        <a:t>123.000</a:t>
+                      </a:r>
+                      <a:endParaRPr lang="en-US" sz="950" dirty="0">
+                        <a:latin typeface="Verdana" charset="0"/>
+                        <a:ea typeface="Verdana" charset="0"/>
+                        <a:cs typeface="Verdana" charset="0"/>
+                      </a:endParaRPr>
+                    </a:p>
+                  </a:txBody>
+                  <a:tcPr marL="91440" marR="91440" marT="45720" marB="45720" anchor="ctr">
+                    <a:lnL w="6350" cap="flat" cmpd="sng" algn="ctr">
+                      <a:solidFill>
+                        <a:srgbClr val="CACACA"/>
+                      </a:solidFill>
+                      <a:prstDash val="solid"/>
+                      <a:round/>
+                      <a:headEnd type="none" w="med" len="med"/>
+                      <a:tailEnd type="none" w="med" len="med"/>
+                    </a:lnL>
+                    <a:lnR w="6350" cap="flat" cmpd="sng" algn="ctr">
+                      <a:solidFill>
+                        <a:srgbClr val="CACACA"/>
+                      </a:solidFill>
+                      <a:prstDash val="solid"/>
+                      <a:round/>
+                      <a:headEnd type="none" w="med" len="med"/>
+                      <a:tailEnd type="none" w="med" len="med"/>
+                    </a:lnR>
+                    <a:lnT w="6350" cap="flat" cmpd="sng" algn="ctr">
+                      <a:solidFill>
+                        <a:srgbClr val="CACACA"/>
+                      </a:solidFill>
+                      <a:prstDash val="solid"/>
+                      <a:round/>
+                      <a:headEnd type="none" w="med" len="med"/>
+                      <a:tailEnd type="none" w="med" len="med"/>
+                    </a:lnT>
+                    <a:lnB w="6350" cap="flat" cmpd="sng" algn="ctr">
+                      <a:solidFill>
+                        <a:srgbClr val="CACACA"/>
+                      </a:solidFill>
+                      <a:prstDash val="solid"/>
+                      <a:round/>
+                      <a:headEnd type="none" w="med" len="med"/>
+                      <a:tailEnd type="none" w="med" len="med"/>
+                    </a:lnB>
+                  </a:tcPr>
+                </a:tc>
+                <a:tc>
+                  <a:txBody>
+                    <a:bodyPr/>
+                    <a:lstStyle/>
+                    <a:p>
+                      <a:pPr algn="ctr" indent="0" marL="0">
+                        <a:buNone/>
+                      </a:pPr>
+                      <a:r>
+                        <a:rPr lang="en-US" sz="950" dirty="0">
+                          <a:solidFill>
+                            <a:srgbClr val="2B2B2B"/>
+                          </a:solidFill>
+                          <a:latin typeface="Verdana" pitchFamily="34" charset="0"/>
+                          <a:ea typeface="Verdana" pitchFamily="34" charset="-122"/>
+                          <a:cs typeface="Verdana" pitchFamily="34" charset="-120"/>
+                        </a:rPr>
+                        <a:t>4,01 %</a:t>
+                      </a:r>
+                      <a:endParaRPr lang="en-US" sz="950" dirty="0">
+                        <a:latin typeface="Verdana" charset="0"/>
+                        <a:ea typeface="Verdana" charset="0"/>
+                        <a:cs typeface="Verdana" charset="0"/>
+                      </a:endParaRPr>
+                    </a:p>
+                  </a:txBody>
+                  <a:tcPr marL="91440" marR="91440" marT="45720" marB="45720" anchor="ctr">
+                    <a:lnL w="6350" cap="flat" cmpd="sng" algn="ctr">
+                      <a:solidFill>
+                        <a:srgbClr val="CACACA"/>
+                      </a:solidFill>
+                      <a:prstDash val="solid"/>
+                      <a:round/>
+                      <a:headEnd type="none" w="med" len="med"/>
+                      <a:tailEnd type="none" w="med" len="med"/>
+                    </a:lnL>
+                    <a:lnR w="6350" cap="flat" cmpd="sng" algn="ctr">
+                      <a:solidFill>
+                        <a:srgbClr val="CACACA"/>
+                      </a:solidFill>
+                      <a:prstDash val="solid"/>
+                      <a:round/>
+                      <a:headEnd type="none" w="med" len="med"/>
+                      <a:tailEnd type="none" w="med" len="med"/>
+                    </a:lnR>
+                    <a:lnT w="6350" cap="flat" cmpd="sng" algn="ctr">
+                      <a:solidFill>
+                        <a:srgbClr val="CACACA"/>
+                      </a:solidFill>
+                      <a:prstDash val="solid"/>
+                      <a:round/>
+                      <a:headEnd type="none" w="med" len="med"/>
+                      <a:tailEnd type="none" w="med" len="med"/>
+                    </a:lnT>
+                    <a:lnB w="6350" cap="flat" cmpd="sng" algn="ctr">
+                      <a:solidFill>
+                        <a:srgbClr val="CACACA"/>
+                      </a:solidFill>
+                      <a:prstDash val="solid"/>
+                      <a:round/>
+                      <a:headEnd type="none" w="med" len="med"/>
+                      <a:tailEnd type="none" w="med" len="med"/>
+                    </a:lnB>
+                  </a:tcPr>
+                </a:tc>
+                <a:tc>
+                  <a:txBody>
+                    <a:bodyPr/>
+                    <a:lstStyle/>
+                    <a:p>
+                      <a:pPr algn="ctr" indent="0" marL="0">
+                        <a:buNone/>
+                      </a:pPr>
+                      <a:r>
+                        <a:rPr lang="en-US" sz="950" dirty="0">
+                          <a:solidFill>
+                            <a:srgbClr val="2B2B2B"/>
+                          </a:solidFill>
+                          <a:latin typeface="Verdana" pitchFamily="34" charset="0"/>
+                          <a:ea typeface="Verdana" pitchFamily="34" charset="-122"/>
+                          <a:cs typeface="Verdana" pitchFamily="34" charset="-120"/>
+                        </a:rPr>
+                        <a:t>2,15 %</a:t>
+                      </a:r>
+                      <a:endParaRPr lang="en-US" sz="950" dirty="0">
+                        <a:latin typeface="Verdana" charset="0"/>
+                        <a:ea typeface="Verdana" charset="0"/>
+                        <a:cs typeface="Verdana" charset="0"/>
+                      </a:endParaRPr>
+                    </a:p>
+                  </a:txBody>
+                  <a:tcPr marL="91440" marR="91440" marT="45720" marB="45720" anchor="ctr">
+                    <a:lnL w="6350" cap="flat" cmpd="sng" algn="ctr">
+                      <a:solidFill>
+                        <a:srgbClr val="CACACA"/>
+                      </a:solidFill>
+                      <a:prstDash val="solid"/>
+                      <a:round/>
+                      <a:headEnd type="none" w="med" len="med"/>
+                      <a:tailEnd type="none" w="med" len="med"/>
+                    </a:lnL>
+                    <a:lnR w="6350" cap="flat" cmpd="sng" algn="ctr">
+                      <a:solidFill>
+                        <a:srgbClr val="CACACA"/>
+                      </a:solidFill>
+                      <a:prstDash val="solid"/>
+                      <a:round/>
+                      <a:headEnd type="none" w="med" len="med"/>
+                      <a:tailEnd type="none" w="med" len="med"/>
+                    </a:lnR>
+                    <a:lnT w="6350" cap="flat" cmpd="sng" algn="ctr">
+                      <a:solidFill>
+                        <a:srgbClr val="CACACA"/>
+                      </a:solidFill>
+                      <a:prstDash val="solid"/>
+                      <a:round/>
+                      <a:headEnd type="none" w="med" len="med"/>
+                      <a:tailEnd type="none" w="med" len="med"/>
+                    </a:lnT>
+                    <a:lnB w="6350" cap="flat" cmpd="sng" algn="ctr">
+                      <a:solidFill>
+                        <a:srgbClr val="CACACA"/>
+                      </a:solidFill>
+                      <a:prstDash val="solid"/>
+                      <a:round/>
+                      <a:headEnd type="none" w="med" len="med"/>
+                      <a:tailEnd type="none" w="med" len="med"/>
+                    </a:lnB>
+                  </a:tcPr>
+                </a:tc>
+                <a:tc>
+                  <a:txBody>
+                    <a:bodyPr/>
+                    <a:lstStyle/>
+                    <a:p>
+                      <a:pPr algn="ctr" indent="0" marL="0">
+                        <a:buNone/>
+                      </a:pPr>
+                      <a:r>
+                        <a:rPr lang="en-US" sz="1000" b="1" dirty="0">
+                          <a:solidFill>
+                            <a:srgbClr val="2B2B2B"/>
+                          </a:solidFill>
+                          <a:latin typeface="Verdana" pitchFamily="34" charset="0"/>
+                          <a:ea typeface="Verdana" pitchFamily="34" charset="-122"/>
+                          <a:cs typeface="Verdana" pitchFamily="34" charset="-120"/>
+                        </a:rPr>
+                        <a:t>1,22 %</a:t>
+                      </a:r>
+                      <a:endParaRPr lang="en-US" sz="1000" dirty="0">
+                        <a:latin typeface="Verdana" charset="0"/>
+                        <a:ea typeface="Verdana" charset="0"/>
+                        <a:cs typeface="Verdana" charset="0"/>
+                      </a:endParaRPr>
+                    </a:p>
+                  </a:txBody>
+                  <a:tcPr marL="91440" marR="91440" marT="45720" marB="45720" anchor="ctr">
+                    <a:lnL w="6350" cap="flat" cmpd="sng" algn="ctr">
+                      <a:solidFill>
+                        <a:srgbClr val="CACACA"/>
+                      </a:solidFill>
+                      <a:prstDash val="solid"/>
+                      <a:round/>
+                      <a:headEnd type="none" w="med" len="med"/>
+                      <a:tailEnd type="none" w="med" len="med"/>
+                    </a:lnL>
+                    <a:lnR w="6350" cap="flat" cmpd="sng" algn="ctr">
+                      <a:solidFill>
+                        <a:srgbClr val="CACACA"/>
+                      </a:solidFill>
+                      <a:prstDash val="solid"/>
+                      <a:round/>
+                      <a:headEnd type="none" w="med" len="med"/>
+                      <a:tailEnd type="none" w="med" len="med"/>
+                    </a:lnR>
+                    <a:lnT w="6350" cap="flat" cmpd="sng" algn="ctr">
+                      <a:solidFill>
+                        <a:srgbClr val="CACACA"/>
+                      </a:solidFill>
+                      <a:prstDash val="solid"/>
+                      <a:round/>
+                      <a:headEnd type="none" w="med" len="med"/>
+                      <a:tailEnd type="none" w="med" len="med"/>
+                    </a:lnT>
+                    <a:lnB w="6350" cap="flat" cmpd="sng" algn="ctr">
+                      <a:solidFill>
+                        <a:srgbClr val="CACACA"/>
+                      </a:solidFill>
+                      <a:prstDash val="solid"/>
+                      <a:round/>
+                      <a:headEnd type="none" w="med" len="med"/>
+                      <a:tailEnd type="none" w="med" len="med"/>
+                    </a:lnB>
+                    <a:solidFill>
+                      <a:srgbClr val="FFD200"/>
+                    </a:solidFill>
+                  </a:tcPr>
+                </a:tc>
+                <a:tc>
+                  <a:txBody>
+                    <a:bodyPr/>
+                    <a:lstStyle/>
+                    <a:p>
+                      <a:pPr algn="ctr" indent="0" marL="0">
+                        <a:buNone/>
+                      </a:pPr>
+                      <a:r>
+                        <a:rPr lang="en-US" sz="950" dirty="0">
+                          <a:solidFill>
+                            <a:srgbClr val="2B2B2B"/>
+                          </a:solidFill>
+                          <a:latin typeface="Verdana" pitchFamily="34" charset="0"/>
+                          <a:ea typeface="Verdana" pitchFamily="34" charset="-122"/>
+                          <a:cs typeface="Verdana" pitchFamily="34" charset="-120"/>
+                        </a:rPr>
+                        <a:t>n/d</a:t>
+                      </a:r>
+                      <a:endParaRPr lang="en-US" sz="950" dirty="0">
+                        <a:latin typeface="Verdana" charset="0"/>
+                        <a:ea typeface="Verdana" charset="0"/>
+                        <a:cs typeface="Verdana" charset="0"/>
+                      </a:endParaRPr>
+                    </a:p>
+                  </a:txBody>
+                  <a:tcPr marL="91440" marR="91440" marT="45720" marB="45720" anchor="ctr">
+                    <a:lnL w="6350" cap="flat" cmpd="sng" algn="ctr">
+                      <a:solidFill>
+                        <a:srgbClr val="CACACA"/>
+                      </a:solidFill>
+                      <a:prstDash val="solid"/>
+                      <a:round/>
+                      <a:headEnd type="none" w="med" len="med"/>
+                      <a:tailEnd type="none" w="med" len="med"/>
+                    </a:lnL>
+                    <a:lnR w="6350" cap="flat" cmpd="sng" algn="ctr">
+                      <a:solidFill>
+                        <a:srgbClr val="CACACA"/>
+                      </a:solidFill>
+                      <a:prstDash val="solid"/>
+                      <a:round/>
+                      <a:headEnd type="none" w="med" len="med"/>
+                      <a:tailEnd type="none" w="med" len="med"/>
+                    </a:lnR>
+                    <a:lnT w="6350" cap="flat" cmpd="sng" algn="ctr">
+                      <a:solidFill>
+                        <a:srgbClr val="CACACA"/>
+                      </a:solidFill>
+                      <a:prstDash val="solid"/>
+                      <a:round/>
+                      <a:headEnd type="none" w="med" len="med"/>
+                      <a:tailEnd type="none" w="med" len="med"/>
+                    </a:lnT>
+                    <a:lnB w="6350" cap="flat" cmpd="sng" algn="ctr">
+                      <a:solidFill>
+                        <a:srgbClr val="CACACA"/>
+                      </a:solidFill>
+                      <a:prstDash val="solid"/>
+                      <a:round/>
+                      <a:headEnd type="none" w="med" len="med"/>
+                      <a:tailEnd type="none" w="med" len="med"/>
+                    </a:lnB>
+                  </a:tcPr>
+                </a:tc>
+                <a:tc>
+                  <a:txBody>
+                    <a:bodyPr/>
+                    <a:lstStyle/>
+                    <a:p>
+                      <a:pPr algn="ctr" indent="0" marL="0">
+                        <a:buNone/>
+                      </a:pPr>
+                      <a:r>
+                        <a:rPr lang="en-US" sz="950" dirty="0">
+                          <a:solidFill>
+                            <a:srgbClr val="2B2B2B"/>
+                          </a:solidFill>
+                          <a:latin typeface="Verdana" pitchFamily="34" charset="0"/>
+                          <a:ea typeface="Verdana" pitchFamily="34" charset="-122"/>
+                          <a:cs typeface="Verdana" pitchFamily="34" charset="-120"/>
+                        </a:rPr>
+                        <a:t>n/d</a:t>
+                      </a:r>
+                      <a:endParaRPr lang="en-US" sz="950" dirty="0">
+                        <a:latin typeface="Verdana" charset="0"/>
+                        <a:ea typeface="Verdana" charset="0"/>
+                        <a:cs typeface="Verdana" charset="0"/>
+                      </a:endParaRPr>
+                    </a:p>
+                  </a:txBody>
+                  <a:tcPr marL="91440" marR="91440" marT="45720" marB="45720" anchor="ctr">
+                    <a:lnL w="6350" cap="flat" cmpd="sng" algn="ctr">
+                      <a:solidFill>
+                        <a:srgbClr val="CACACA"/>
+                      </a:solidFill>
+                      <a:prstDash val="solid"/>
+                      <a:round/>
+                      <a:headEnd type="none" w="med" len="med"/>
+                      <a:tailEnd type="none" w="med" len="med"/>
+                    </a:lnL>
+                    <a:lnR w="6350" cap="flat" cmpd="sng" algn="ctr">
+                      <a:solidFill>
+                        <a:srgbClr val="CACACA"/>
+                      </a:solidFill>
+                      <a:prstDash val="solid"/>
+                      <a:round/>
+                      <a:headEnd type="none" w="med" len="med"/>
+                      <a:tailEnd type="none" w="med" len="med"/>
+                    </a:lnR>
+                    <a:lnT w="6350" cap="flat" cmpd="sng" algn="ctr">
+                      <a:solidFill>
+                        <a:srgbClr val="CACACA"/>
+                      </a:solidFill>
+                      <a:prstDash val="solid"/>
+                      <a:round/>
+                      <a:headEnd type="none" w="med" len="med"/>
+                      <a:tailEnd type="none" w="med" len="med"/>
+                    </a:lnT>
+                    <a:lnB w="6350" cap="flat" cmpd="sng" algn="ctr">
+                      <a:solidFill>
+                        <a:srgbClr val="CACACA"/>
+                      </a:solidFill>
+                      <a:prstDash val="solid"/>
+                      <a:round/>
+                      <a:headEnd type="none" w="med" len="med"/>
+                      <a:tailEnd type="none" w="med" len="med"/>
+                    </a:lnB>
+                  </a:tcPr>
+                </a:tc>
+                <a:tc>
+                  <a:txBody>
+                    <a:bodyPr/>
+                    <a:lstStyle/>
+                    <a:p>
+                      <a:pPr algn="ctr" indent="0" marL="0">
+                        <a:buNone/>
+                      </a:pPr>
+                      <a:r>
+                        <a:rPr lang="en-US" sz="950" dirty="0">
+                          <a:solidFill>
+                            <a:srgbClr val="2B2B2B"/>
+                          </a:solidFill>
+                          <a:latin typeface="Verdana" pitchFamily="34" charset="0"/>
+                          <a:ea typeface="Verdana" pitchFamily="34" charset="-122"/>
+                          <a:cs typeface="Verdana" pitchFamily="34" charset="-120"/>
+                        </a:rPr>
+                        <a:t>n/d</a:t>
+                      </a:r>
+                      <a:endParaRPr lang="en-US" sz="950" dirty="0">
+                        <a:latin typeface="Verdana" charset="0"/>
+                        <a:ea typeface="Verdana" charset="0"/>
+                        <a:cs typeface="Verdana" charset="0"/>
+                      </a:endParaRPr>
+                    </a:p>
+                  </a:txBody>
+                  <a:tcPr marL="91440" marR="91440" marT="45720" marB="45720" anchor="ctr">
+                    <a:lnL w="6350" cap="flat" cmpd="sng" algn="ctr">
+                      <a:solidFill>
+                        <a:srgbClr val="CACACA"/>
+                      </a:solidFill>
+                      <a:prstDash val="solid"/>
+                      <a:round/>
+                      <a:headEnd type="none" w="med" len="med"/>
+                      <a:tailEnd type="none" w="med" len="med"/>
+                    </a:lnL>
+                    <a:lnR w="6350" cap="flat" cmpd="sng" algn="ctr">
+                      <a:solidFill>
+                        <a:srgbClr val="CACACA"/>
+                      </a:solidFill>
+                      <a:prstDash val="solid"/>
+                      <a:round/>
+                      <a:headEnd type="none" w="med" len="med"/>
+                      <a:tailEnd type="none" w="med" len="med"/>
+                    </a:lnR>
+                    <a:lnT w="6350" cap="flat" cmpd="sng" algn="ctr">
+                      <a:solidFill>
+                        <a:srgbClr val="CACACA"/>
+                      </a:solidFill>
+                      <a:prstDash val="solid"/>
+                      <a:round/>
+                      <a:headEnd type="none" w="med" len="med"/>
+                      <a:tailEnd type="none" w="med" len="med"/>
+                    </a:lnT>
+                    <a:lnB w="6350" cap="flat" cmpd="sng" algn="ctr">
+                      <a:solidFill>
+                        <a:srgbClr val="CACACA"/>
+                      </a:solidFill>
+                      <a:prstDash val="solid"/>
+                      <a:round/>
+                      <a:headEnd type="none" w="med" len="med"/>
+                      <a:tailEnd type="none" w="med" len="med"/>
+                    </a:lnB>
+                  </a:tcPr>
+                </a:tc>
+              </a:tr>
+              <a:tr h="310896">
+                <a:tc>
+                  <a:txBody>
+                    <a:bodyPr/>
+                    <a:lstStyle/>
+                    <a:p>
+                      <a:pPr algn="l" indent="0" marL="0">
+                        <a:buNone/>
+                      </a:pPr>
+                      <a:r>
+                        <a:rPr lang="en-US" sz="950" b="1" dirty="0">
+                          <a:solidFill>
+                            <a:srgbClr val="2B2B2B"/>
+                          </a:solidFill>
+                          <a:latin typeface="Verdana" pitchFamily="34" charset="0"/>
+                          <a:ea typeface="Verdana" pitchFamily="34" charset="-122"/>
+                          <a:cs typeface="Verdana" pitchFamily="34" charset="-120"/>
+                        </a:rPr>
+                        <a:t>ABN AMRO</a:t>
+                      </a:r>
+                      <a:endParaRPr lang="en-US" sz="950" dirty="0">
+                        <a:latin typeface="Verdana" charset="0"/>
+                        <a:ea typeface="Verdana" charset="0"/>
+                        <a:cs typeface="Verdana" charset="0"/>
+                      </a:endParaRPr>
+                    </a:p>
+                  </a:txBody>
+                  <a:tcPr marL="91440" marR="91440" marT="45720" marB="45720" anchor="ctr">
+                    <a:lnL w="6350" cap="flat" cmpd="sng" algn="ctr">
+                      <a:solidFill>
+                        <a:srgbClr val="CACACA"/>
+                      </a:solidFill>
+                      <a:prstDash val="solid"/>
+                      <a:round/>
+                      <a:headEnd type="none" w="med" len="med"/>
+                      <a:tailEnd type="none" w="med" len="med"/>
+                    </a:lnL>
+                    <a:lnR w="6350" cap="flat" cmpd="sng" algn="ctr">
+                      <a:solidFill>
+                        <a:srgbClr val="CACACA"/>
+                      </a:solidFill>
+                      <a:prstDash val="solid"/>
+                      <a:round/>
+                      <a:headEnd type="none" w="med" len="med"/>
+                      <a:tailEnd type="none" w="med" len="med"/>
+                    </a:lnR>
+                    <a:lnT w="6350" cap="flat" cmpd="sng" algn="ctr">
+                      <a:solidFill>
+                        <a:srgbClr val="CACACA"/>
+                      </a:solidFill>
+                      <a:prstDash val="solid"/>
+                      <a:round/>
+                      <a:headEnd type="none" w="med" len="med"/>
+                      <a:tailEnd type="none" w="med" len="med"/>
+                    </a:lnT>
+                    <a:lnB w="6350" cap="flat" cmpd="sng" algn="ctr">
+                      <a:solidFill>
+                        <a:srgbClr val="CACACA"/>
+                      </a:solidFill>
+                      <a:prstDash val="solid"/>
+                      <a:round/>
+                      <a:headEnd type="none" w="med" len="med"/>
+                      <a:tailEnd type="none" w="med" len="med"/>
+                    </a:lnB>
+                  </a:tcPr>
+                </a:tc>
+                <a:tc>
+                  <a:txBody>
+                    <a:bodyPr/>
+                    <a:lstStyle/>
+                    <a:p>
+                      <a:pPr algn="l" indent="0" marL="0">
+                        <a:buNone/>
+                      </a:pPr>
+                      <a:r>
+                        <a:rPr lang="en-US" sz="950" dirty="0">
+                          <a:solidFill>
+                            <a:srgbClr val="818181"/>
+                          </a:solidFill>
+                          <a:latin typeface="Verdana" pitchFamily="34" charset="0"/>
+                          <a:ea typeface="Verdana" pitchFamily="34" charset="-122"/>
+                          <a:cs typeface="Verdana" pitchFamily="34" charset="-120"/>
+                        </a:rPr>
+                        <a:t>P. Bajos</a:t>
+                      </a:r>
+                      <a:endParaRPr lang="en-US" sz="950" dirty="0">
+                        <a:latin typeface="Verdana" charset="0"/>
+                        <a:ea typeface="Verdana" charset="0"/>
+                        <a:cs typeface="Verdana" charset="0"/>
+                      </a:endParaRPr>
+                    </a:p>
+                  </a:txBody>
+                  <a:tcPr marL="91440" marR="91440" marT="45720" marB="45720" anchor="ctr">
+                    <a:lnL w="6350" cap="flat" cmpd="sng" algn="ctr">
+                      <a:solidFill>
+                        <a:srgbClr val="CACACA"/>
+                      </a:solidFill>
+                      <a:prstDash val="solid"/>
+                      <a:round/>
+                      <a:headEnd type="none" w="med" len="med"/>
+                      <a:tailEnd type="none" w="med" len="med"/>
+                    </a:lnL>
+                    <a:lnR w="6350" cap="flat" cmpd="sng" algn="ctr">
+                      <a:solidFill>
+                        <a:srgbClr val="CACACA"/>
+                      </a:solidFill>
+                      <a:prstDash val="solid"/>
+                      <a:round/>
+                      <a:headEnd type="none" w="med" len="med"/>
+                      <a:tailEnd type="none" w="med" len="med"/>
+                    </a:lnR>
+                    <a:lnT w="6350" cap="flat" cmpd="sng" algn="ctr">
+                      <a:solidFill>
+                        <a:srgbClr val="CACACA"/>
+                      </a:solidFill>
+                      <a:prstDash val="solid"/>
+                      <a:round/>
+                      <a:headEnd type="none" w="med" len="med"/>
+                      <a:tailEnd type="none" w="med" len="med"/>
+                    </a:lnT>
+                    <a:lnB w="6350" cap="flat" cmpd="sng" algn="ctr">
+                      <a:solidFill>
+                        <a:srgbClr val="CACACA"/>
+                      </a:solidFill>
+                      <a:prstDash val="solid"/>
+                      <a:round/>
+                      <a:headEnd type="none" w="med" len="med"/>
+                      <a:tailEnd type="none" w="med" len="med"/>
+                    </a:lnB>
+                  </a:tcPr>
+                </a:tc>
+                <a:tc>
+                  <a:txBody>
+                    <a:bodyPr/>
+                    <a:lstStyle/>
+                    <a:p>
+                      <a:pPr algn="l" indent="0" marL="0">
+                        <a:buNone/>
+                      </a:pPr>
+                      <a:r>
+                        <a:rPr lang="en-US" sz="900" dirty="0">
+                          <a:solidFill>
+                            <a:srgbClr val="F56600"/>
+                          </a:solidFill>
+                          <a:latin typeface="Verdana" pitchFamily="34" charset="0"/>
+                          <a:ea typeface="Verdana" pitchFamily="34" charset="-122"/>
+                          <a:cs typeface="Verdana" pitchFamily="34" charset="-120"/>
+                        </a:rPr>
+                        <a:t>Corporate Banking</a:t>
+                      </a:r>
+                      <a:endParaRPr lang="en-US" sz="900" dirty="0">
+                        <a:latin typeface="Verdana" charset="0"/>
+                        <a:ea typeface="Verdana" charset="0"/>
+                        <a:cs typeface="Verdana" charset="0"/>
+                      </a:endParaRPr>
+                    </a:p>
+                  </a:txBody>
+                  <a:tcPr marL="91440" marR="91440" marT="45720" marB="45720" anchor="ctr">
+                    <a:lnL w="6350" cap="flat" cmpd="sng" algn="ctr">
+                      <a:solidFill>
+                        <a:srgbClr val="CACACA"/>
+                      </a:solidFill>
+                      <a:prstDash val="solid"/>
+                      <a:round/>
+                      <a:headEnd type="none" w="med" len="med"/>
+                      <a:tailEnd type="none" w="med" len="med"/>
+                    </a:lnL>
+                    <a:lnR w="6350" cap="flat" cmpd="sng" algn="ctr">
+                      <a:solidFill>
+                        <a:srgbClr val="CACACA"/>
+                      </a:solidFill>
+                      <a:prstDash val="solid"/>
+                      <a:round/>
+                      <a:headEnd type="none" w="med" len="med"/>
+                      <a:tailEnd type="none" w="med" len="med"/>
+                    </a:lnR>
+                    <a:lnT w="6350" cap="flat" cmpd="sng" algn="ctr">
+                      <a:solidFill>
+                        <a:srgbClr val="CACACA"/>
+                      </a:solidFill>
+                      <a:prstDash val="solid"/>
+                      <a:round/>
+                      <a:headEnd type="none" w="med" len="med"/>
+                      <a:tailEnd type="none" w="med" len="med"/>
+                    </a:lnT>
+                    <a:lnB w="6350" cap="flat" cmpd="sng" algn="ctr">
+                      <a:solidFill>
+                        <a:srgbClr val="CACACA"/>
+                      </a:solidFill>
+                      <a:prstDash val="solid"/>
+                      <a:round/>
+                      <a:headEnd type="none" w="med" len="med"/>
+                      <a:tailEnd type="none" w="med" len="med"/>
+                    </a:lnB>
+                  </a:tcPr>
+                </a:tc>
+                <a:tc>
+                  <a:txBody>
+                    <a:bodyPr/>
+                    <a:lstStyle/>
+                    <a:p>
+                      <a:pPr algn="ctr" indent="0" marL="0">
+                        <a:buNone/>
+                      </a:pPr>
+                      <a:r>
+                        <a:rPr lang="en-US" sz="950" dirty="0">
+                          <a:solidFill>
+                            <a:srgbClr val="818181"/>
+                          </a:solidFill>
+                          <a:latin typeface="Verdana" pitchFamily="34" charset="0"/>
+                          <a:ea typeface="Verdana" pitchFamily="34" charset="-122"/>
+                          <a:cs typeface="Verdana" pitchFamily="34" charset="-120"/>
+                        </a:rPr>
+                        <a:t>86.900</a:t>
+                      </a:r>
+                      <a:endParaRPr lang="en-US" sz="950" dirty="0">
+                        <a:latin typeface="Verdana" charset="0"/>
+                        <a:ea typeface="Verdana" charset="0"/>
+                        <a:cs typeface="Verdana" charset="0"/>
+                      </a:endParaRPr>
+                    </a:p>
+                  </a:txBody>
+                  <a:tcPr marL="91440" marR="91440" marT="45720" marB="45720" anchor="ctr">
+                    <a:lnL w="6350" cap="flat" cmpd="sng" algn="ctr">
+                      <a:solidFill>
+                        <a:srgbClr val="CACACA"/>
+                      </a:solidFill>
+                      <a:prstDash val="solid"/>
+                      <a:round/>
+                      <a:headEnd type="none" w="med" len="med"/>
+                      <a:tailEnd type="none" w="med" len="med"/>
+                    </a:lnL>
+                    <a:lnR w="6350" cap="flat" cmpd="sng" algn="ctr">
+                      <a:solidFill>
+                        <a:srgbClr val="CACACA"/>
+                      </a:solidFill>
+                      <a:prstDash val="solid"/>
+                      <a:round/>
+                      <a:headEnd type="none" w="med" len="med"/>
+                      <a:tailEnd type="none" w="med" len="med"/>
+                    </a:lnR>
+                    <a:lnT w="6350" cap="flat" cmpd="sng" algn="ctr">
+                      <a:solidFill>
+                        <a:srgbClr val="CACACA"/>
+                      </a:solidFill>
+                      <a:prstDash val="solid"/>
+                      <a:round/>
+                      <a:headEnd type="none" w="med" len="med"/>
+                      <a:tailEnd type="none" w="med" len="med"/>
+                    </a:lnT>
+                    <a:lnB w="6350" cap="flat" cmpd="sng" algn="ctr">
+                      <a:solidFill>
+                        <a:srgbClr val="CACACA"/>
+                      </a:solidFill>
+                      <a:prstDash val="solid"/>
+                      <a:round/>
+                      <a:headEnd type="none" w="med" len="med"/>
+                      <a:tailEnd type="none" w="med" len="med"/>
+                    </a:lnB>
+                  </a:tcPr>
+                </a:tc>
+                <a:tc>
+                  <a:txBody>
+                    <a:bodyPr/>
+                    <a:lstStyle/>
+                    <a:p>
+                      <a:pPr algn="ctr" indent="0" marL="0">
+                        <a:buNone/>
+                      </a:pPr>
+                      <a:r>
+                        <a:rPr lang="en-US" sz="950" dirty="0">
+                          <a:solidFill>
+                            <a:srgbClr val="2B2B2B"/>
+                          </a:solidFill>
+                          <a:latin typeface="Verdana" pitchFamily="34" charset="0"/>
+                          <a:ea typeface="Verdana" pitchFamily="34" charset="-122"/>
+                          <a:cs typeface="Verdana" pitchFamily="34" charset="-120"/>
+                        </a:rPr>
+                        <a:t>3,90 %</a:t>
+                      </a:r>
+                      <a:endParaRPr lang="en-US" sz="950" dirty="0">
+                        <a:latin typeface="Verdana" charset="0"/>
+                        <a:ea typeface="Verdana" charset="0"/>
+                        <a:cs typeface="Verdana" charset="0"/>
+                      </a:endParaRPr>
+                    </a:p>
+                  </a:txBody>
+                  <a:tcPr marL="91440" marR="91440" marT="45720" marB="45720" anchor="ctr">
+                    <a:lnL w="6350" cap="flat" cmpd="sng" algn="ctr">
+                      <a:solidFill>
+                        <a:srgbClr val="CACACA"/>
+                      </a:solidFill>
+                      <a:prstDash val="solid"/>
+                      <a:round/>
+                      <a:headEnd type="none" w="med" len="med"/>
+                      <a:tailEnd type="none" w="med" len="med"/>
+                    </a:lnL>
+                    <a:lnR w="6350" cap="flat" cmpd="sng" algn="ctr">
+                      <a:solidFill>
+                        <a:srgbClr val="CACACA"/>
+                      </a:solidFill>
+                      <a:prstDash val="solid"/>
+                      <a:round/>
+                      <a:headEnd type="none" w="med" len="med"/>
+                      <a:tailEnd type="none" w="med" len="med"/>
+                    </a:lnR>
+                    <a:lnT w="6350" cap="flat" cmpd="sng" algn="ctr">
+                      <a:solidFill>
+                        <a:srgbClr val="CACACA"/>
+                      </a:solidFill>
+                      <a:prstDash val="solid"/>
+                      <a:round/>
+                      <a:headEnd type="none" w="med" len="med"/>
+                      <a:tailEnd type="none" w="med" len="med"/>
+                    </a:lnT>
+                    <a:lnB w="6350" cap="flat" cmpd="sng" algn="ctr">
+                      <a:solidFill>
+                        <a:srgbClr val="CACACA"/>
+                      </a:solidFill>
+                      <a:prstDash val="solid"/>
+                      <a:round/>
+                      <a:headEnd type="none" w="med" len="med"/>
+                      <a:tailEnd type="none" w="med" len="med"/>
+                    </a:lnB>
+                  </a:tcPr>
+                </a:tc>
+                <a:tc>
+                  <a:txBody>
+                    <a:bodyPr/>
+                    <a:lstStyle/>
+                    <a:p>
+                      <a:pPr algn="ctr" indent="0" marL="0">
+                        <a:buNone/>
+                      </a:pPr>
+                      <a:r>
+                        <a:rPr lang="en-US" sz="950" dirty="0">
+                          <a:solidFill>
+                            <a:srgbClr val="2B2B2B"/>
+                          </a:solidFill>
+                          <a:latin typeface="Verdana" pitchFamily="34" charset="0"/>
+                          <a:ea typeface="Verdana" pitchFamily="34" charset="-122"/>
+                          <a:cs typeface="Verdana" pitchFamily="34" charset="-120"/>
+                        </a:rPr>
+                        <a:t>2,52 %</a:t>
+                      </a:r>
+                      <a:endParaRPr lang="en-US" sz="950" dirty="0">
+                        <a:latin typeface="Verdana" charset="0"/>
+                        <a:ea typeface="Verdana" charset="0"/>
+                        <a:cs typeface="Verdana" charset="0"/>
+                      </a:endParaRPr>
+                    </a:p>
+                  </a:txBody>
+                  <a:tcPr marL="91440" marR="91440" marT="45720" marB="45720" anchor="ctr">
+                    <a:lnL w="6350" cap="flat" cmpd="sng" algn="ctr">
+                      <a:solidFill>
+                        <a:srgbClr val="CACACA"/>
+                      </a:solidFill>
+                      <a:prstDash val="solid"/>
+                      <a:round/>
+                      <a:headEnd type="none" w="med" len="med"/>
+                      <a:tailEnd type="none" w="med" len="med"/>
+                    </a:lnL>
+                    <a:lnR w="6350" cap="flat" cmpd="sng" algn="ctr">
+                      <a:solidFill>
+                        <a:srgbClr val="CACACA"/>
+                      </a:solidFill>
+                      <a:prstDash val="solid"/>
+                      <a:round/>
+                      <a:headEnd type="none" w="med" len="med"/>
+                      <a:tailEnd type="none" w="med" len="med"/>
+                    </a:lnR>
+                    <a:lnT w="6350" cap="flat" cmpd="sng" algn="ctr">
+                      <a:solidFill>
+                        <a:srgbClr val="CACACA"/>
+                      </a:solidFill>
+                      <a:prstDash val="solid"/>
+                      <a:round/>
+                      <a:headEnd type="none" w="med" len="med"/>
+                      <a:tailEnd type="none" w="med" len="med"/>
+                    </a:lnT>
+                    <a:lnB w="6350" cap="flat" cmpd="sng" algn="ctr">
+                      <a:solidFill>
+                        <a:srgbClr val="CACACA"/>
+                      </a:solidFill>
+                      <a:prstDash val="solid"/>
+                      <a:round/>
+                      <a:headEnd type="none" w="med" len="med"/>
+                      <a:tailEnd type="none" w="med" len="med"/>
+                    </a:lnB>
+                  </a:tcPr>
+                </a:tc>
+                <a:tc>
+                  <a:txBody>
+                    <a:bodyPr/>
+                    <a:lstStyle/>
+                    <a:p>
+                      <a:pPr algn="ctr" indent="0" marL="0">
+                        <a:buNone/>
+                      </a:pPr>
+                      <a:r>
+                        <a:rPr lang="en-US" sz="1000" b="1" dirty="0">
+                          <a:solidFill>
+                            <a:srgbClr val="2B2B2B"/>
+                          </a:solidFill>
+                          <a:latin typeface="Verdana" pitchFamily="34" charset="0"/>
+                          <a:ea typeface="Verdana" pitchFamily="34" charset="-122"/>
+                          <a:cs typeface="Verdana" pitchFamily="34" charset="-120"/>
+                        </a:rPr>
+                        <a:t>0,99 %</a:t>
+                      </a:r>
+                      <a:endParaRPr lang="en-US" sz="1000" dirty="0">
+                        <a:latin typeface="Verdana" charset="0"/>
+                        <a:ea typeface="Verdana" charset="0"/>
+                        <a:cs typeface="Verdana" charset="0"/>
+                      </a:endParaRPr>
+                    </a:p>
+                  </a:txBody>
+                  <a:tcPr marL="91440" marR="91440" marT="45720" marB="45720" anchor="ctr">
+                    <a:lnL w="6350" cap="flat" cmpd="sng" algn="ctr">
+                      <a:solidFill>
+                        <a:srgbClr val="CACACA"/>
+                      </a:solidFill>
+                      <a:prstDash val="solid"/>
+                      <a:round/>
+                      <a:headEnd type="none" w="med" len="med"/>
+                      <a:tailEnd type="none" w="med" len="med"/>
+                    </a:lnL>
+                    <a:lnR w="6350" cap="flat" cmpd="sng" algn="ctr">
+                      <a:solidFill>
+                        <a:srgbClr val="CACACA"/>
+                      </a:solidFill>
+                      <a:prstDash val="solid"/>
+                      <a:round/>
+                      <a:headEnd type="none" w="med" len="med"/>
+                      <a:tailEnd type="none" w="med" len="med"/>
+                    </a:lnR>
+                    <a:lnT w="6350" cap="flat" cmpd="sng" algn="ctr">
+                      <a:solidFill>
+                        <a:srgbClr val="CACACA"/>
+                      </a:solidFill>
+                      <a:prstDash val="solid"/>
+                      <a:round/>
+                      <a:headEnd type="none" w="med" len="med"/>
+                      <a:tailEnd type="none" w="med" len="med"/>
+                    </a:lnT>
+                    <a:lnB w="6350" cap="flat" cmpd="sng" algn="ctr">
+                      <a:solidFill>
+                        <a:srgbClr val="CACACA"/>
+                      </a:solidFill>
+                      <a:prstDash val="solid"/>
+                      <a:round/>
+                      <a:headEnd type="none" w="med" len="med"/>
+                      <a:tailEnd type="none" w="med" len="med"/>
+                    </a:lnB>
+                    <a:solidFill>
+                      <a:srgbClr val="FFD200"/>
+                    </a:solidFill>
+                  </a:tcPr>
+                </a:tc>
+                <a:tc>
+                  <a:txBody>
+                    <a:bodyPr/>
+                    <a:lstStyle/>
+                    <a:p>
+                      <a:pPr algn="ctr" indent="0" marL="0">
+                        <a:buNone/>
+                      </a:pPr>
+                      <a:r>
+                        <a:rPr lang="en-US" sz="950" dirty="0">
+                          <a:solidFill>
+                            <a:srgbClr val="2B2B2B"/>
+                          </a:solidFill>
+                          <a:latin typeface="Verdana" pitchFamily="34" charset="0"/>
+                          <a:ea typeface="Verdana" pitchFamily="34" charset="-122"/>
+                          <a:cs typeface="Verdana" pitchFamily="34" charset="-120"/>
+                        </a:rPr>
+                        <a:t>1,93 %</a:t>
+                      </a:r>
+                      <a:endParaRPr lang="en-US" sz="950" dirty="0">
+                        <a:latin typeface="Verdana" charset="0"/>
+                        <a:ea typeface="Verdana" charset="0"/>
+                        <a:cs typeface="Verdana" charset="0"/>
+                      </a:endParaRPr>
+                    </a:p>
+                  </a:txBody>
+                  <a:tcPr marL="91440" marR="91440" marT="45720" marB="45720" anchor="ctr">
+                    <a:lnL w="6350" cap="flat" cmpd="sng" algn="ctr">
+                      <a:solidFill>
+                        <a:srgbClr val="CACACA"/>
+                      </a:solidFill>
+                      <a:prstDash val="solid"/>
+                      <a:round/>
+                      <a:headEnd type="none" w="med" len="med"/>
+                      <a:tailEnd type="none" w="med" len="med"/>
+                    </a:lnL>
+                    <a:lnR w="6350" cap="flat" cmpd="sng" algn="ctr">
+                      <a:solidFill>
+                        <a:srgbClr val="CACACA"/>
+                      </a:solidFill>
+                      <a:prstDash val="solid"/>
+                      <a:round/>
+                      <a:headEnd type="none" w="med" len="med"/>
+                      <a:tailEnd type="none" w="med" len="med"/>
+                    </a:lnR>
+                    <a:lnT w="6350" cap="flat" cmpd="sng" algn="ctr">
+                      <a:solidFill>
+                        <a:srgbClr val="CACACA"/>
+                      </a:solidFill>
+                      <a:prstDash val="solid"/>
+                      <a:round/>
+                      <a:headEnd type="none" w="med" len="med"/>
+                      <a:tailEnd type="none" w="med" len="med"/>
+                    </a:lnT>
+                    <a:lnB w="6350" cap="flat" cmpd="sng" algn="ctr">
+                      <a:solidFill>
+                        <a:srgbClr val="CACACA"/>
+                      </a:solidFill>
+                      <a:prstDash val="solid"/>
+                      <a:round/>
+                      <a:headEnd type="none" w="med" len="med"/>
+                      <a:tailEnd type="none" w="med" len="med"/>
+                    </a:lnB>
+                  </a:tcPr>
+                </a:tc>
+                <a:tc>
+                  <a:txBody>
+                    <a:bodyPr/>
+                    <a:lstStyle/>
+                    <a:p>
+                      <a:pPr algn="ctr" indent="0" marL="0">
+                        <a:buNone/>
+                      </a:pPr>
+                      <a:r>
+                        <a:rPr lang="en-US" sz="950" dirty="0">
+                          <a:solidFill>
+                            <a:srgbClr val="2B2B2B"/>
+                          </a:solidFill>
+                          <a:latin typeface="Verdana" pitchFamily="34" charset="0"/>
+                          <a:ea typeface="Verdana" pitchFamily="34" charset="-122"/>
+                          <a:cs typeface="Verdana" pitchFamily="34" charset="-120"/>
+                        </a:rPr>
+                        <a:t>15 pb</a:t>
+                      </a:r>
+                      <a:endParaRPr lang="en-US" sz="950" dirty="0">
+                        <a:latin typeface="Verdana" charset="0"/>
+                        <a:ea typeface="Verdana" charset="0"/>
+                        <a:cs typeface="Verdana" charset="0"/>
+                      </a:endParaRPr>
+                    </a:p>
+                  </a:txBody>
+                  <a:tcPr marL="91440" marR="91440" marT="45720" marB="45720" anchor="ctr">
+                    <a:lnL w="6350" cap="flat" cmpd="sng" algn="ctr">
+                      <a:solidFill>
+                        <a:srgbClr val="CACACA"/>
+                      </a:solidFill>
+                      <a:prstDash val="solid"/>
+                      <a:round/>
+                      <a:headEnd type="none" w="med" len="med"/>
+                      <a:tailEnd type="none" w="med" len="med"/>
+                    </a:lnL>
+                    <a:lnR w="6350" cap="flat" cmpd="sng" algn="ctr">
+                      <a:solidFill>
+                        <a:srgbClr val="CACACA"/>
+                      </a:solidFill>
+                      <a:prstDash val="solid"/>
+                      <a:round/>
+                      <a:headEnd type="none" w="med" len="med"/>
+                      <a:tailEnd type="none" w="med" len="med"/>
+                    </a:lnR>
+                    <a:lnT w="6350" cap="flat" cmpd="sng" algn="ctr">
+                      <a:solidFill>
+                        <a:srgbClr val="CACACA"/>
+                      </a:solidFill>
+                      <a:prstDash val="solid"/>
+                      <a:round/>
+                      <a:headEnd type="none" w="med" len="med"/>
+                      <a:tailEnd type="none" w="med" len="med"/>
+                    </a:lnT>
+                    <a:lnB w="6350" cap="flat" cmpd="sng" algn="ctr">
+                      <a:solidFill>
+                        <a:srgbClr val="CACACA"/>
+                      </a:solidFill>
+                      <a:prstDash val="solid"/>
+                      <a:round/>
+                      <a:headEnd type="none" w="med" len="med"/>
+                      <a:tailEnd type="none" w="med" len="med"/>
+                    </a:lnB>
+                  </a:tcPr>
+                </a:tc>
+                <a:tc>
+                  <a:txBody>
+                    <a:bodyPr/>
+                    <a:lstStyle/>
+                    <a:p>
+                      <a:pPr algn="ctr" indent="0" marL="0">
+                        <a:buNone/>
+                      </a:pPr>
+                      <a:r>
+                        <a:rPr lang="en-US" sz="950" dirty="0">
+                          <a:solidFill>
+                            <a:srgbClr val="2B2B2B"/>
+                          </a:solidFill>
+                          <a:latin typeface="Verdana" pitchFamily="34" charset="0"/>
+                          <a:ea typeface="Verdana" pitchFamily="34" charset="-122"/>
+                          <a:cs typeface="Verdana" pitchFamily="34" charset="-120"/>
+                        </a:rPr>
+                        <a:t>1,82 %</a:t>
+                      </a:r>
+                      <a:endParaRPr lang="en-US" sz="950" dirty="0">
+                        <a:latin typeface="Verdana" charset="0"/>
+                        <a:ea typeface="Verdana" charset="0"/>
+                        <a:cs typeface="Verdana" charset="0"/>
+                      </a:endParaRPr>
+                    </a:p>
+                  </a:txBody>
+                  <a:tcPr marL="91440" marR="91440" marT="45720" marB="45720" anchor="ctr">
+                    <a:lnL w="6350" cap="flat" cmpd="sng" algn="ctr">
+                      <a:solidFill>
+                        <a:srgbClr val="CACACA"/>
+                      </a:solidFill>
+                      <a:prstDash val="solid"/>
+                      <a:round/>
+                      <a:headEnd type="none" w="med" len="med"/>
+                      <a:tailEnd type="none" w="med" len="med"/>
+                    </a:lnL>
+                    <a:lnR w="6350" cap="flat" cmpd="sng" algn="ctr">
+                      <a:solidFill>
+                        <a:srgbClr val="CACACA"/>
+                      </a:solidFill>
+                      <a:prstDash val="solid"/>
+                      <a:round/>
+                      <a:headEnd type="none" w="med" len="med"/>
+                      <a:tailEnd type="none" w="med" len="med"/>
+                    </a:lnR>
+                    <a:lnT w="6350" cap="flat" cmpd="sng" algn="ctr">
+                      <a:solidFill>
+                        <a:srgbClr val="CACACA"/>
+                      </a:solidFill>
+                      <a:prstDash val="solid"/>
+                      <a:round/>
+                      <a:headEnd type="none" w="med" len="med"/>
+                      <a:tailEnd type="none" w="med" len="med"/>
+                    </a:lnT>
+                    <a:lnB w="6350" cap="flat" cmpd="sng" algn="ctr">
+                      <a:solidFill>
+                        <a:srgbClr val="CACACA"/>
+                      </a:solidFill>
+                      <a:prstDash val="solid"/>
+                      <a:round/>
+                      <a:headEnd type="none" w="med" len="med"/>
+                      <a:tailEnd type="none" w="med" len="med"/>
+                    </a:lnB>
+                  </a:tcPr>
+                </a:tc>
+              </a:tr>
+              <a:tr h="310896">
+                <a:tc>
+                  <a:txBody>
+                    <a:bodyPr/>
+                    <a:lstStyle/>
+                    <a:p>
+                      <a:pPr algn="l" indent="0" marL="0">
+                        <a:buNone/>
+                      </a:pPr>
+                      <a:r>
+                        <a:rPr lang="en-US" sz="950" b="1" dirty="0">
+                          <a:solidFill>
+                            <a:srgbClr val="2B2B2B"/>
+                          </a:solidFill>
+                          <a:latin typeface="Verdana" pitchFamily="34" charset="0"/>
+                          <a:ea typeface="Verdana" pitchFamily="34" charset="-122"/>
+                          <a:cs typeface="Verdana" pitchFamily="34" charset="-120"/>
+                        </a:rPr>
+                        <a:t>Intesa Sanpaolo</a:t>
+                      </a:r>
+                      <a:endParaRPr lang="en-US" sz="950" dirty="0">
+                        <a:latin typeface="Verdana" charset="0"/>
+                        <a:ea typeface="Verdana" charset="0"/>
+                        <a:cs typeface="Verdana" charset="0"/>
+                      </a:endParaRPr>
+                    </a:p>
+                  </a:txBody>
+                  <a:tcPr marL="91440" marR="91440" marT="45720" marB="45720" anchor="ctr">
+                    <a:lnL w="6350" cap="flat" cmpd="sng" algn="ctr">
+                      <a:solidFill>
+                        <a:srgbClr val="CACACA"/>
+                      </a:solidFill>
+                      <a:prstDash val="solid"/>
+                      <a:round/>
+                      <a:headEnd type="none" w="med" len="med"/>
+                      <a:tailEnd type="none" w="med" len="med"/>
+                    </a:lnL>
+                    <a:lnR w="6350" cap="flat" cmpd="sng" algn="ctr">
+                      <a:solidFill>
+                        <a:srgbClr val="CACACA"/>
+                      </a:solidFill>
+                      <a:prstDash val="solid"/>
+                      <a:round/>
+                      <a:headEnd type="none" w="med" len="med"/>
+                      <a:tailEnd type="none" w="med" len="med"/>
+                    </a:lnR>
+                    <a:lnT w="6350" cap="flat" cmpd="sng" algn="ctr">
+                      <a:solidFill>
+                        <a:srgbClr val="CACACA"/>
+                      </a:solidFill>
+                      <a:prstDash val="solid"/>
+                      <a:round/>
+                      <a:headEnd type="none" w="med" len="med"/>
+                      <a:tailEnd type="none" w="med" len="med"/>
+                    </a:lnT>
+                    <a:lnB w="6350" cap="flat" cmpd="sng" algn="ctr">
+                      <a:solidFill>
+                        <a:srgbClr val="CACACA"/>
+                      </a:solidFill>
+                      <a:prstDash val="solid"/>
+                      <a:round/>
+                      <a:headEnd type="none" w="med" len="med"/>
+                      <a:tailEnd type="none" w="med" len="med"/>
+                    </a:lnB>
+                  </a:tcPr>
+                </a:tc>
+                <a:tc>
+                  <a:txBody>
+                    <a:bodyPr/>
+                    <a:lstStyle/>
+                    <a:p>
+                      <a:pPr algn="l" indent="0" marL="0">
+                        <a:buNone/>
+                      </a:pPr>
+                      <a:r>
+                        <a:rPr lang="en-US" sz="950" dirty="0">
+                          <a:solidFill>
+                            <a:srgbClr val="818181"/>
+                          </a:solidFill>
+                          <a:latin typeface="Verdana" pitchFamily="34" charset="0"/>
+                          <a:ea typeface="Verdana" pitchFamily="34" charset="-122"/>
+                          <a:cs typeface="Verdana" pitchFamily="34" charset="-120"/>
+                        </a:rPr>
+                        <a:t>Italia</a:t>
+                      </a:r>
+                      <a:endParaRPr lang="en-US" sz="950" dirty="0">
+                        <a:latin typeface="Verdana" charset="0"/>
+                        <a:ea typeface="Verdana" charset="0"/>
+                        <a:cs typeface="Verdana" charset="0"/>
+                      </a:endParaRPr>
+                    </a:p>
+                  </a:txBody>
+                  <a:tcPr marL="91440" marR="91440" marT="45720" marB="45720" anchor="ctr">
+                    <a:lnL w="6350" cap="flat" cmpd="sng" algn="ctr">
+                      <a:solidFill>
+                        <a:srgbClr val="CACACA"/>
+                      </a:solidFill>
+                      <a:prstDash val="solid"/>
+                      <a:round/>
+                      <a:headEnd type="none" w="med" len="med"/>
+                      <a:tailEnd type="none" w="med" len="med"/>
+                    </a:lnL>
+                    <a:lnR w="6350" cap="flat" cmpd="sng" algn="ctr">
+                      <a:solidFill>
+                        <a:srgbClr val="CACACA"/>
+                      </a:solidFill>
+                      <a:prstDash val="solid"/>
+                      <a:round/>
+                      <a:headEnd type="none" w="med" len="med"/>
+                      <a:tailEnd type="none" w="med" len="med"/>
+                    </a:lnR>
+                    <a:lnT w="6350" cap="flat" cmpd="sng" algn="ctr">
+                      <a:solidFill>
+                        <a:srgbClr val="CACACA"/>
+                      </a:solidFill>
+                      <a:prstDash val="solid"/>
+                      <a:round/>
+                      <a:headEnd type="none" w="med" len="med"/>
+                      <a:tailEnd type="none" w="med" len="med"/>
+                    </a:lnT>
+                    <a:lnB w="6350" cap="flat" cmpd="sng" algn="ctr">
+                      <a:solidFill>
+                        <a:srgbClr val="CACACA"/>
+                      </a:solidFill>
+                      <a:prstDash val="solid"/>
+                      <a:round/>
+                      <a:headEnd type="none" w="med" len="med"/>
+                      <a:tailEnd type="none" w="med" len="med"/>
+                    </a:lnB>
+                  </a:tcPr>
+                </a:tc>
+                <a:tc>
+                  <a:txBody>
+                    <a:bodyPr/>
+                    <a:lstStyle/>
+                    <a:p>
+                      <a:pPr algn="l" indent="0" marL="0">
+                        <a:buNone/>
+                      </a:pPr>
+                      <a:r>
+                        <a:rPr lang="en-US" sz="900" dirty="0">
+                          <a:solidFill>
+                            <a:srgbClr val="F56600"/>
+                          </a:solidFill>
+                          <a:latin typeface="Verdana" pitchFamily="34" charset="0"/>
+                          <a:ea typeface="Verdana" pitchFamily="34" charset="-122"/>
+                          <a:cs typeface="Verdana" pitchFamily="34" charset="-120"/>
+                        </a:rPr>
+                        <a:t>Banca dei Territori</a:t>
+                      </a:r>
+                      <a:endParaRPr lang="en-US" sz="900" dirty="0">
+                        <a:latin typeface="Verdana" charset="0"/>
+                        <a:ea typeface="Verdana" charset="0"/>
+                        <a:cs typeface="Verdana" charset="0"/>
+                      </a:endParaRPr>
+                    </a:p>
+                  </a:txBody>
+                  <a:tcPr marL="91440" marR="91440" marT="45720" marB="45720" anchor="ctr">
+                    <a:lnL w="6350" cap="flat" cmpd="sng" algn="ctr">
+                      <a:solidFill>
+                        <a:srgbClr val="CACACA"/>
+                      </a:solidFill>
+                      <a:prstDash val="solid"/>
+                      <a:round/>
+                      <a:headEnd type="none" w="med" len="med"/>
+                      <a:tailEnd type="none" w="med" len="med"/>
+                    </a:lnL>
+                    <a:lnR w="6350" cap="flat" cmpd="sng" algn="ctr">
+                      <a:solidFill>
+                        <a:srgbClr val="CACACA"/>
+                      </a:solidFill>
+                      <a:prstDash val="solid"/>
+                      <a:round/>
+                      <a:headEnd type="none" w="med" len="med"/>
+                      <a:tailEnd type="none" w="med" len="med"/>
+                    </a:lnR>
+                    <a:lnT w="6350" cap="flat" cmpd="sng" algn="ctr">
+                      <a:solidFill>
+                        <a:srgbClr val="CACACA"/>
+                      </a:solidFill>
+                      <a:prstDash val="solid"/>
+                      <a:round/>
+                      <a:headEnd type="none" w="med" len="med"/>
+                      <a:tailEnd type="none" w="med" len="med"/>
+                    </a:lnT>
+                    <a:lnB w="6350" cap="flat" cmpd="sng" algn="ctr">
+                      <a:solidFill>
+                        <a:srgbClr val="CACACA"/>
+                      </a:solidFill>
+                      <a:prstDash val="solid"/>
+                      <a:round/>
+                      <a:headEnd type="none" w="med" len="med"/>
+                      <a:tailEnd type="none" w="med" len="med"/>
+                    </a:lnB>
+                  </a:tcPr>
+                </a:tc>
+                <a:tc>
+                  <a:txBody>
+                    <a:bodyPr/>
+                    <a:lstStyle/>
+                    <a:p>
+                      <a:pPr algn="ctr" indent="0" marL="0">
+                        <a:buNone/>
+                      </a:pPr>
+                      <a:r>
+                        <a:rPr lang="en-US" sz="950" dirty="0">
+                          <a:solidFill>
+                            <a:srgbClr val="818181"/>
+                          </a:solidFill>
+                          <a:latin typeface="Verdana" pitchFamily="34" charset="0"/>
+                          <a:ea typeface="Verdana" pitchFamily="34" charset="-122"/>
+                          <a:cs typeface="Verdana" pitchFamily="34" charset="-120"/>
+                        </a:rPr>
+                        <a:t>219.966</a:t>
+                      </a:r>
+                      <a:endParaRPr lang="en-US" sz="950" dirty="0">
+                        <a:latin typeface="Verdana" charset="0"/>
+                        <a:ea typeface="Verdana" charset="0"/>
+                        <a:cs typeface="Verdana" charset="0"/>
+                      </a:endParaRPr>
+                    </a:p>
+                  </a:txBody>
+                  <a:tcPr marL="91440" marR="91440" marT="45720" marB="45720" anchor="ctr">
+                    <a:lnL w="6350" cap="flat" cmpd="sng" algn="ctr">
+                      <a:solidFill>
+                        <a:srgbClr val="CACACA"/>
+                      </a:solidFill>
+                      <a:prstDash val="solid"/>
+                      <a:round/>
+                      <a:headEnd type="none" w="med" len="med"/>
+                      <a:tailEnd type="none" w="med" len="med"/>
+                    </a:lnL>
+                    <a:lnR w="6350" cap="flat" cmpd="sng" algn="ctr">
+                      <a:solidFill>
+                        <a:srgbClr val="CACACA"/>
+                      </a:solidFill>
+                      <a:prstDash val="solid"/>
+                      <a:round/>
+                      <a:headEnd type="none" w="med" len="med"/>
+                      <a:tailEnd type="none" w="med" len="med"/>
+                    </a:lnR>
+                    <a:lnT w="6350" cap="flat" cmpd="sng" algn="ctr">
+                      <a:solidFill>
+                        <a:srgbClr val="CACACA"/>
+                      </a:solidFill>
+                      <a:prstDash val="solid"/>
+                      <a:round/>
+                      <a:headEnd type="none" w="med" len="med"/>
+                      <a:tailEnd type="none" w="med" len="med"/>
+                    </a:lnT>
+                    <a:lnB w="6350" cap="flat" cmpd="sng" algn="ctr">
+                      <a:solidFill>
+                        <a:srgbClr val="CACACA"/>
+                      </a:solidFill>
+                      <a:prstDash val="solid"/>
+                      <a:round/>
+                      <a:headEnd type="none" w="med" len="med"/>
+                      <a:tailEnd type="none" w="med" len="med"/>
+                    </a:lnB>
+                  </a:tcPr>
+                </a:tc>
+                <a:tc>
+                  <a:txBody>
+                    <a:bodyPr/>
+                    <a:lstStyle/>
+                    <a:p>
+                      <a:pPr algn="ctr" indent="0" marL="0">
+                        <a:buNone/>
+                      </a:pPr>
+                      <a:r>
+                        <a:rPr lang="en-US" sz="950" dirty="0">
+                          <a:solidFill>
+                            <a:srgbClr val="2B2B2B"/>
+                          </a:solidFill>
+                          <a:latin typeface="Verdana" pitchFamily="34" charset="0"/>
+                          <a:ea typeface="Verdana" pitchFamily="34" charset="-122"/>
+                          <a:cs typeface="Verdana" pitchFamily="34" charset="-120"/>
+                        </a:rPr>
+                        <a:t>5,64 %</a:t>
+                      </a:r>
+                      <a:endParaRPr lang="en-US" sz="950" dirty="0">
+                        <a:latin typeface="Verdana" charset="0"/>
+                        <a:ea typeface="Verdana" charset="0"/>
+                        <a:cs typeface="Verdana" charset="0"/>
+                      </a:endParaRPr>
+                    </a:p>
+                  </a:txBody>
+                  <a:tcPr marL="91440" marR="91440" marT="45720" marB="45720" anchor="ctr">
+                    <a:lnL w="6350" cap="flat" cmpd="sng" algn="ctr">
+                      <a:solidFill>
+                        <a:srgbClr val="CACACA"/>
+                      </a:solidFill>
+                      <a:prstDash val="solid"/>
+                      <a:round/>
+                      <a:headEnd type="none" w="med" len="med"/>
+                      <a:tailEnd type="none" w="med" len="med"/>
+                    </a:lnL>
+                    <a:lnR w="6350" cap="flat" cmpd="sng" algn="ctr">
+                      <a:solidFill>
+                        <a:srgbClr val="CACACA"/>
+                      </a:solidFill>
+                      <a:prstDash val="solid"/>
+                      <a:round/>
+                      <a:headEnd type="none" w="med" len="med"/>
+                      <a:tailEnd type="none" w="med" len="med"/>
+                    </a:lnR>
+                    <a:lnT w="6350" cap="flat" cmpd="sng" algn="ctr">
+                      <a:solidFill>
+                        <a:srgbClr val="CACACA"/>
+                      </a:solidFill>
+                      <a:prstDash val="solid"/>
+                      <a:round/>
+                      <a:headEnd type="none" w="med" len="med"/>
+                      <a:tailEnd type="none" w="med" len="med"/>
+                    </a:lnT>
+                    <a:lnB w="6350" cap="flat" cmpd="sng" algn="ctr">
+                      <a:solidFill>
+                        <a:srgbClr val="CACACA"/>
+                      </a:solidFill>
+                      <a:prstDash val="solid"/>
+                      <a:round/>
+                      <a:headEnd type="none" w="med" len="med"/>
+                      <a:tailEnd type="none" w="med" len="med"/>
+                    </a:lnB>
+                  </a:tcPr>
+                </a:tc>
+                <a:tc>
+                  <a:txBody>
+                    <a:bodyPr/>
+                    <a:lstStyle/>
+                    <a:p>
+                      <a:pPr algn="ctr" indent="0" marL="0">
+                        <a:buNone/>
+                      </a:pPr>
+                      <a:r>
+                        <a:rPr lang="en-US" sz="950" dirty="0">
+                          <a:solidFill>
+                            <a:srgbClr val="2B2B2B"/>
+                          </a:solidFill>
+                          <a:latin typeface="Verdana" pitchFamily="34" charset="0"/>
+                          <a:ea typeface="Verdana" pitchFamily="34" charset="-122"/>
+                          <a:cs typeface="Verdana" pitchFamily="34" charset="-120"/>
+                        </a:rPr>
+                        <a:t>n/d</a:t>
+                      </a:r>
+                      <a:endParaRPr lang="en-US" sz="950" dirty="0">
+                        <a:latin typeface="Verdana" charset="0"/>
+                        <a:ea typeface="Verdana" charset="0"/>
+                        <a:cs typeface="Verdana" charset="0"/>
+                      </a:endParaRPr>
+                    </a:p>
+                  </a:txBody>
+                  <a:tcPr marL="91440" marR="91440" marT="45720" marB="45720" anchor="ctr">
+                    <a:lnL w="6350" cap="flat" cmpd="sng" algn="ctr">
+                      <a:solidFill>
+                        <a:srgbClr val="CACACA"/>
+                      </a:solidFill>
+                      <a:prstDash val="solid"/>
+                      <a:round/>
+                      <a:headEnd type="none" w="med" len="med"/>
+                      <a:tailEnd type="none" w="med" len="med"/>
+                    </a:lnL>
+                    <a:lnR w="6350" cap="flat" cmpd="sng" algn="ctr">
+                      <a:solidFill>
+                        <a:srgbClr val="CACACA"/>
+                      </a:solidFill>
+                      <a:prstDash val="solid"/>
+                      <a:round/>
+                      <a:headEnd type="none" w="med" len="med"/>
+                      <a:tailEnd type="none" w="med" len="med"/>
+                    </a:lnR>
+                    <a:lnT w="6350" cap="flat" cmpd="sng" algn="ctr">
+                      <a:solidFill>
+                        <a:srgbClr val="CACACA"/>
+                      </a:solidFill>
+                      <a:prstDash val="solid"/>
+                      <a:round/>
+                      <a:headEnd type="none" w="med" len="med"/>
+                      <a:tailEnd type="none" w="med" len="med"/>
+                    </a:lnT>
+                    <a:lnB w="6350" cap="flat" cmpd="sng" algn="ctr">
+                      <a:solidFill>
+                        <a:srgbClr val="CACACA"/>
+                      </a:solidFill>
+                      <a:prstDash val="solid"/>
+                      <a:round/>
+                      <a:headEnd type="none" w="med" len="med"/>
+                      <a:tailEnd type="none" w="med" len="med"/>
+                    </a:lnB>
+                  </a:tcPr>
+                </a:tc>
+                <a:tc>
+                  <a:txBody>
+                    <a:bodyPr/>
+                    <a:lstStyle/>
+                    <a:p>
+                      <a:pPr algn="ctr" indent="0" marL="0">
+                        <a:buNone/>
+                      </a:pPr>
+                      <a:r>
+                        <a:rPr lang="en-US" sz="1000" b="1" dirty="0">
+                          <a:solidFill>
+                            <a:srgbClr val="2B2B2B"/>
+                          </a:solidFill>
+                          <a:latin typeface="Verdana" pitchFamily="34" charset="0"/>
+                          <a:ea typeface="Verdana" pitchFamily="34" charset="-122"/>
+                          <a:cs typeface="Verdana" pitchFamily="34" charset="-120"/>
+                        </a:rPr>
+                        <a:t>n/d</a:t>
+                      </a:r>
+                      <a:endParaRPr lang="en-US" sz="1000" dirty="0">
+                        <a:latin typeface="Verdana" charset="0"/>
+                        <a:ea typeface="Verdana" charset="0"/>
+                        <a:cs typeface="Verdana" charset="0"/>
+                      </a:endParaRPr>
+                    </a:p>
+                  </a:txBody>
+                  <a:tcPr marL="91440" marR="91440" marT="45720" marB="45720" anchor="ctr">
+                    <a:lnL w="6350" cap="flat" cmpd="sng" algn="ctr">
+                      <a:solidFill>
+                        <a:srgbClr val="CACACA"/>
+                      </a:solidFill>
+                      <a:prstDash val="solid"/>
+                      <a:round/>
+                      <a:headEnd type="none" w="med" len="med"/>
+                      <a:tailEnd type="none" w="med" len="med"/>
+                    </a:lnL>
+                    <a:lnR w="6350" cap="flat" cmpd="sng" algn="ctr">
+                      <a:solidFill>
+                        <a:srgbClr val="CACACA"/>
+                      </a:solidFill>
+                      <a:prstDash val="solid"/>
+                      <a:round/>
+                      <a:headEnd type="none" w="med" len="med"/>
+                      <a:tailEnd type="none" w="med" len="med"/>
+                    </a:lnR>
+                    <a:lnT w="6350" cap="flat" cmpd="sng" algn="ctr">
+                      <a:solidFill>
+                        <a:srgbClr val="CACACA"/>
+                      </a:solidFill>
+                      <a:prstDash val="solid"/>
+                      <a:round/>
+                      <a:headEnd type="none" w="med" len="med"/>
+                      <a:tailEnd type="none" w="med" len="med"/>
+                    </a:lnT>
+                    <a:lnB w="6350" cap="flat" cmpd="sng" algn="ctr">
+                      <a:solidFill>
+                        <a:srgbClr val="CACACA"/>
+                      </a:solidFill>
+                      <a:prstDash val="solid"/>
+                      <a:round/>
+                      <a:headEnd type="none" w="med" len="med"/>
+                      <a:tailEnd type="none" w="med" len="med"/>
+                    </a:lnB>
+                    <a:solidFill>
+                      <a:srgbClr val="FFFFFF"/>
+                    </a:solidFill>
+                  </a:tcPr>
+                </a:tc>
+                <a:tc>
+                  <a:txBody>
+                    <a:bodyPr/>
+                    <a:lstStyle/>
+                    <a:p>
+                      <a:pPr algn="ctr" indent="0" marL="0">
+                        <a:buNone/>
+                      </a:pPr>
+                      <a:r>
+                        <a:rPr lang="en-US" sz="950" dirty="0">
+                          <a:solidFill>
+                            <a:srgbClr val="2B2B2B"/>
+                          </a:solidFill>
+                          <a:latin typeface="Verdana" pitchFamily="34" charset="0"/>
+                          <a:ea typeface="Verdana" pitchFamily="34" charset="-122"/>
+                          <a:cs typeface="Verdana" pitchFamily="34" charset="-120"/>
+                        </a:rPr>
+                        <a:t>2,63 %</a:t>
+                      </a:r>
+                      <a:endParaRPr lang="en-US" sz="950" dirty="0">
+                        <a:latin typeface="Verdana" charset="0"/>
+                        <a:ea typeface="Verdana" charset="0"/>
+                        <a:cs typeface="Verdana" charset="0"/>
+                      </a:endParaRPr>
+                    </a:p>
+                  </a:txBody>
+                  <a:tcPr marL="91440" marR="91440" marT="45720" marB="45720" anchor="ctr">
+                    <a:lnL w="6350" cap="flat" cmpd="sng" algn="ctr">
+                      <a:solidFill>
+                        <a:srgbClr val="CACACA"/>
+                      </a:solidFill>
+                      <a:prstDash val="solid"/>
+                      <a:round/>
+                      <a:headEnd type="none" w="med" len="med"/>
+                      <a:tailEnd type="none" w="med" len="med"/>
+                    </a:lnL>
+                    <a:lnR w="6350" cap="flat" cmpd="sng" algn="ctr">
+                      <a:solidFill>
+                        <a:srgbClr val="CACACA"/>
+                      </a:solidFill>
+                      <a:prstDash val="solid"/>
+                      <a:round/>
+                      <a:headEnd type="none" w="med" len="med"/>
+                      <a:tailEnd type="none" w="med" len="med"/>
+                    </a:lnR>
+                    <a:lnT w="6350" cap="flat" cmpd="sng" algn="ctr">
+                      <a:solidFill>
+                        <a:srgbClr val="CACACA"/>
+                      </a:solidFill>
+                      <a:prstDash val="solid"/>
+                      <a:round/>
+                      <a:headEnd type="none" w="med" len="med"/>
+                      <a:tailEnd type="none" w="med" len="med"/>
+                    </a:lnT>
+                    <a:lnB w="6350" cap="flat" cmpd="sng" algn="ctr">
+                      <a:solidFill>
+                        <a:srgbClr val="CACACA"/>
+                      </a:solidFill>
+                      <a:prstDash val="solid"/>
+                      <a:round/>
+                      <a:headEnd type="none" w="med" len="med"/>
+                      <a:tailEnd type="none" w="med" len="med"/>
+                    </a:lnB>
+                  </a:tcPr>
+                </a:tc>
+                <a:tc>
+                  <a:txBody>
+                    <a:bodyPr/>
+                    <a:lstStyle/>
+                    <a:p>
+                      <a:pPr algn="ctr" indent="0" marL="0">
+                        <a:buNone/>
+                      </a:pPr>
+                      <a:r>
+                        <a:rPr lang="en-US" sz="950" dirty="0">
+                          <a:solidFill>
+                            <a:srgbClr val="2B2B2B"/>
+                          </a:solidFill>
+                          <a:latin typeface="Verdana" pitchFamily="34" charset="0"/>
+                          <a:ea typeface="Verdana" pitchFamily="34" charset="-122"/>
+                          <a:cs typeface="Verdana" pitchFamily="34" charset="-120"/>
+                        </a:rPr>
+                        <a:t>48 pb</a:t>
+                      </a:r>
+                      <a:endParaRPr lang="en-US" sz="950" dirty="0">
+                        <a:latin typeface="Verdana" charset="0"/>
+                        <a:ea typeface="Verdana" charset="0"/>
+                        <a:cs typeface="Verdana" charset="0"/>
+                      </a:endParaRPr>
+                    </a:p>
+                  </a:txBody>
+                  <a:tcPr marL="91440" marR="91440" marT="45720" marB="45720" anchor="ctr">
+                    <a:lnL w="6350" cap="flat" cmpd="sng" algn="ctr">
+                      <a:solidFill>
+                        <a:srgbClr val="CACACA"/>
+                      </a:solidFill>
+                      <a:prstDash val="solid"/>
+                      <a:round/>
+                      <a:headEnd type="none" w="med" len="med"/>
+                      <a:tailEnd type="none" w="med" len="med"/>
+                    </a:lnL>
+                    <a:lnR w="6350" cap="flat" cmpd="sng" algn="ctr">
+                      <a:solidFill>
+                        <a:srgbClr val="CACACA"/>
+                      </a:solidFill>
+                      <a:prstDash val="solid"/>
+                      <a:round/>
+                      <a:headEnd type="none" w="med" len="med"/>
+                      <a:tailEnd type="none" w="med" len="med"/>
+                    </a:lnR>
+                    <a:lnT w="6350" cap="flat" cmpd="sng" algn="ctr">
+                      <a:solidFill>
+                        <a:srgbClr val="CACACA"/>
+                      </a:solidFill>
+                      <a:prstDash val="solid"/>
+                      <a:round/>
+                      <a:headEnd type="none" w="med" len="med"/>
+                      <a:tailEnd type="none" w="med" len="med"/>
+                    </a:lnT>
+                    <a:lnB w="6350" cap="flat" cmpd="sng" algn="ctr">
+                      <a:solidFill>
+                        <a:srgbClr val="CACACA"/>
+                      </a:solidFill>
+                      <a:prstDash val="solid"/>
+                      <a:round/>
+                      <a:headEnd type="none" w="med" len="med"/>
+                      <a:tailEnd type="none" w="med" len="med"/>
+                    </a:lnB>
+                  </a:tcPr>
+                </a:tc>
+                <a:tc>
+                  <a:txBody>
+                    <a:bodyPr/>
+                    <a:lstStyle/>
+                    <a:p>
+                      <a:pPr algn="ctr" indent="0" marL="0">
+                        <a:buNone/>
+                      </a:pPr>
+                      <a:r>
+                        <a:rPr lang="en-US" sz="950" dirty="0">
+                          <a:solidFill>
+                            <a:srgbClr val="2B2B2B"/>
+                          </a:solidFill>
+                          <a:latin typeface="Verdana" pitchFamily="34" charset="0"/>
+                          <a:ea typeface="Verdana" pitchFamily="34" charset="-122"/>
+                          <a:cs typeface="Verdana" pitchFamily="34" charset="-120"/>
+                        </a:rPr>
+                        <a:t>2,53 %</a:t>
+                      </a:r>
+                      <a:endParaRPr lang="en-US" sz="950" dirty="0">
+                        <a:latin typeface="Verdana" charset="0"/>
+                        <a:ea typeface="Verdana" charset="0"/>
+                        <a:cs typeface="Verdana" charset="0"/>
+                      </a:endParaRPr>
+                    </a:p>
+                  </a:txBody>
+                  <a:tcPr marL="91440" marR="91440" marT="45720" marB="45720" anchor="ctr">
+                    <a:lnL w="6350" cap="flat" cmpd="sng" algn="ctr">
+                      <a:solidFill>
+                        <a:srgbClr val="CACACA"/>
+                      </a:solidFill>
+                      <a:prstDash val="solid"/>
+                      <a:round/>
+                      <a:headEnd type="none" w="med" len="med"/>
+                      <a:tailEnd type="none" w="med" len="med"/>
+                    </a:lnL>
+                    <a:lnR w="6350" cap="flat" cmpd="sng" algn="ctr">
+                      <a:solidFill>
+                        <a:srgbClr val="CACACA"/>
+                      </a:solidFill>
+                      <a:prstDash val="solid"/>
+                      <a:round/>
+                      <a:headEnd type="none" w="med" len="med"/>
+                      <a:tailEnd type="none" w="med" len="med"/>
+                    </a:lnR>
+                    <a:lnT w="6350" cap="flat" cmpd="sng" algn="ctr">
+                      <a:solidFill>
+                        <a:srgbClr val="CACACA"/>
+                      </a:solidFill>
+                      <a:prstDash val="solid"/>
+                      <a:round/>
+                      <a:headEnd type="none" w="med" len="med"/>
+                      <a:tailEnd type="none" w="med" len="med"/>
+                    </a:lnT>
+                    <a:lnB w="6350" cap="flat" cmpd="sng" algn="ctr">
+                      <a:solidFill>
+                        <a:srgbClr val="CACACA"/>
+                      </a:solidFill>
+                      <a:prstDash val="solid"/>
+                      <a:round/>
+                      <a:headEnd type="none" w="med" len="med"/>
+                      <a:tailEnd type="none" w="med" len="med"/>
+                    </a:lnB>
+                  </a:tcPr>
+                </a:tc>
+              </a:tr>
+              <a:tr h="310896">
+                <a:tc>
+                  <a:txBody>
+                    <a:bodyPr/>
+                    <a:lstStyle/>
+                    <a:p>
+                      <a:pPr algn="l" indent="0" marL="0">
+                        <a:buNone/>
+                      </a:pPr>
+                      <a:r>
+                        <a:rPr lang="en-US" sz="950" b="1" dirty="0">
+                          <a:solidFill>
+                            <a:srgbClr val="2B2B2B"/>
+                          </a:solidFill>
+                          <a:latin typeface="Verdana" pitchFamily="34" charset="0"/>
+                          <a:ea typeface="Verdana" pitchFamily="34" charset="-122"/>
+                          <a:cs typeface="Verdana" pitchFamily="34" charset="-120"/>
+                        </a:rPr>
+                        <a:t>CaixaBank</a:t>
+                      </a:r>
+                      <a:endParaRPr lang="en-US" sz="950" dirty="0">
+                        <a:latin typeface="Verdana" charset="0"/>
+                        <a:ea typeface="Verdana" charset="0"/>
+                        <a:cs typeface="Verdana" charset="0"/>
+                      </a:endParaRPr>
+                    </a:p>
+                  </a:txBody>
+                  <a:tcPr marL="91440" marR="91440" marT="45720" marB="45720" anchor="ctr">
+                    <a:lnL w="6350" cap="flat" cmpd="sng" algn="ctr">
+                      <a:solidFill>
+                        <a:srgbClr val="CACACA"/>
+                      </a:solidFill>
+                      <a:prstDash val="solid"/>
+                      <a:round/>
+                      <a:headEnd type="none" w="med" len="med"/>
+                      <a:tailEnd type="none" w="med" len="med"/>
+                    </a:lnL>
+                    <a:lnR w="6350" cap="flat" cmpd="sng" algn="ctr">
+                      <a:solidFill>
+                        <a:srgbClr val="CACACA"/>
+                      </a:solidFill>
+                      <a:prstDash val="solid"/>
+                      <a:round/>
+                      <a:headEnd type="none" w="med" len="med"/>
+                      <a:tailEnd type="none" w="med" len="med"/>
+                    </a:lnR>
+                    <a:lnT w="6350" cap="flat" cmpd="sng" algn="ctr">
+                      <a:solidFill>
+                        <a:srgbClr val="CACACA"/>
+                      </a:solidFill>
+                      <a:prstDash val="solid"/>
+                      <a:round/>
+                      <a:headEnd type="none" w="med" len="med"/>
+                      <a:tailEnd type="none" w="med" len="med"/>
+                    </a:lnT>
+                    <a:lnB w="6350" cap="flat" cmpd="sng" algn="ctr">
+                      <a:solidFill>
+                        <a:srgbClr val="CACACA"/>
+                      </a:solidFill>
+                      <a:prstDash val="solid"/>
+                      <a:round/>
+                      <a:headEnd type="none" w="med" len="med"/>
+                      <a:tailEnd type="none" w="med" len="med"/>
+                    </a:lnB>
+                  </a:tcPr>
+                </a:tc>
+                <a:tc>
+                  <a:txBody>
+                    <a:bodyPr/>
+                    <a:lstStyle/>
+                    <a:p>
+                      <a:pPr algn="l" indent="0" marL="0">
+                        <a:buNone/>
+                      </a:pPr>
+                      <a:r>
+                        <a:rPr lang="en-US" sz="950" dirty="0">
+                          <a:solidFill>
+                            <a:srgbClr val="818181"/>
+                          </a:solidFill>
+                          <a:latin typeface="Verdana" pitchFamily="34" charset="0"/>
+                          <a:ea typeface="Verdana" pitchFamily="34" charset="-122"/>
+                          <a:cs typeface="Verdana" pitchFamily="34" charset="-120"/>
+                        </a:rPr>
+                        <a:t>España</a:t>
+                      </a:r>
+                      <a:endParaRPr lang="en-US" sz="950" dirty="0">
+                        <a:latin typeface="Verdana" charset="0"/>
+                        <a:ea typeface="Verdana" charset="0"/>
+                        <a:cs typeface="Verdana" charset="0"/>
+                      </a:endParaRPr>
+                    </a:p>
+                  </a:txBody>
+                  <a:tcPr marL="91440" marR="91440" marT="45720" marB="45720" anchor="ctr">
+                    <a:lnL w="6350" cap="flat" cmpd="sng" algn="ctr">
+                      <a:solidFill>
+                        <a:srgbClr val="CACACA"/>
+                      </a:solidFill>
+                      <a:prstDash val="solid"/>
+                      <a:round/>
+                      <a:headEnd type="none" w="med" len="med"/>
+                      <a:tailEnd type="none" w="med" len="med"/>
+                    </a:lnL>
+                    <a:lnR w="6350" cap="flat" cmpd="sng" algn="ctr">
+                      <a:solidFill>
+                        <a:srgbClr val="CACACA"/>
+                      </a:solidFill>
+                      <a:prstDash val="solid"/>
+                      <a:round/>
+                      <a:headEnd type="none" w="med" len="med"/>
+                      <a:tailEnd type="none" w="med" len="med"/>
+                    </a:lnR>
+                    <a:lnT w="6350" cap="flat" cmpd="sng" algn="ctr">
+                      <a:solidFill>
+                        <a:srgbClr val="CACACA"/>
+                      </a:solidFill>
+                      <a:prstDash val="solid"/>
+                      <a:round/>
+                      <a:headEnd type="none" w="med" len="med"/>
+                      <a:tailEnd type="none" w="med" len="med"/>
+                    </a:lnT>
+                    <a:lnB w="6350" cap="flat" cmpd="sng" algn="ctr">
+                      <a:solidFill>
+                        <a:srgbClr val="CACACA"/>
+                      </a:solidFill>
+                      <a:prstDash val="solid"/>
+                      <a:round/>
+                      <a:headEnd type="none" w="med" len="med"/>
+                      <a:tailEnd type="none" w="med" len="med"/>
+                    </a:lnB>
+                  </a:tcPr>
+                </a:tc>
+                <a:tc>
+                  <a:txBody>
+                    <a:bodyPr/>
+                    <a:lstStyle/>
+                    <a:p>
+                      <a:pPr algn="l" indent="0" marL="0">
+                        <a:buNone/>
+                      </a:pPr>
+                      <a:r>
+                        <a:rPr lang="en-US" sz="900" i="1" dirty="0">
+                          <a:solidFill>
+                            <a:srgbClr val="818181"/>
+                          </a:solidFill>
+                          <a:latin typeface="Verdana" pitchFamily="34" charset="0"/>
+                          <a:ea typeface="Verdana" pitchFamily="34" charset="-122"/>
+                          <a:cs typeface="Verdana" pitchFamily="34" charset="-120"/>
+                        </a:rPr>
+                        <a:t>Grupo consolidado</a:t>
+                      </a:r>
+                      <a:endParaRPr lang="en-US" sz="900" dirty="0">
+                        <a:latin typeface="Verdana" charset="0"/>
+                        <a:ea typeface="Verdana" charset="0"/>
+                        <a:cs typeface="Verdana" charset="0"/>
+                      </a:endParaRPr>
+                    </a:p>
+                  </a:txBody>
+                  <a:tcPr marL="91440" marR="91440" marT="45720" marB="45720" anchor="ctr">
+                    <a:lnL w="6350" cap="flat" cmpd="sng" algn="ctr">
+                      <a:solidFill>
+                        <a:srgbClr val="CACACA"/>
+                      </a:solidFill>
+                      <a:prstDash val="solid"/>
+                      <a:round/>
+                      <a:headEnd type="none" w="med" len="med"/>
+                      <a:tailEnd type="none" w="med" len="med"/>
+                    </a:lnL>
+                    <a:lnR w="6350" cap="flat" cmpd="sng" algn="ctr">
+                      <a:solidFill>
+                        <a:srgbClr val="CACACA"/>
+                      </a:solidFill>
+                      <a:prstDash val="solid"/>
+                      <a:round/>
+                      <a:headEnd type="none" w="med" len="med"/>
+                      <a:tailEnd type="none" w="med" len="med"/>
+                    </a:lnR>
+                    <a:lnT w="6350" cap="flat" cmpd="sng" algn="ctr">
+                      <a:solidFill>
+                        <a:srgbClr val="CACACA"/>
+                      </a:solidFill>
+                      <a:prstDash val="solid"/>
+                      <a:round/>
+                      <a:headEnd type="none" w="med" len="med"/>
+                      <a:tailEnd type="none" w="med" len="med"/>
+                    </a:lnT>
+                    <a:lnB w="6350" cap="flat" cmpd="sng" algn="ctr">
+                      <a:solidFill>
+                        <a:srgbClr val="CACACA"/>
+                      </a:solidFill>
+                      <a:prstDash val="solid"/>
+                      <a:round/>
+                      <a:headEnd type="none" w="med" len="med"/>
+                      <a:tailEnd type="none" w="med" len="med"/>
+                    </a:lnB>
+                  </a:tcPr>
+                </a:tc>
+                <a:tc>
+                  <a:txBody>
+                    <a:bodyPr/>
+                    <a:lstStyle/>
+                    <a:p>
+                      <a:pPr algn="ctr" indent="0" marL="0">
+                        <a:buNone/>
+                      </a:pPr>
+                      <a:r>
+                        <a:rPr lang="en-US" sz="950" dirty="0">
+                          <a:solidFill>
+                            <a:srgbClr val="818181"/>
+                          </a:solidFill>
+                          <a:latin typeface="Verdana" pitchFamily="34" charset="0"/>
+                          <a:ea typeface="Verdana" pitchFamily="34" charset="-122"/>
+                          <a:cs typeface="Verdana" pitchFamily="34" charset="-120"/>
+                        </a:rPr>
+                        <a:t>406.233</a:t>
+                      </a:r>
+                      <a:endParaRPr lang="en-US" sz="950" dirty="0">
+                        <a:latin typeface="Verdana" charset="0"/>
+                        <a:ea typeface="Verdana" charset="0"/>
+                        <a:cs typeface="Verdana" charset="0"/>
+                      </a:endParaRPr>
+                    </a:p>
+                  </a:txBody>
+                  <a:tcPr marL="91440" marR="91440" marT="45720" marB="45720" anchor="ctr">
+                    <a:lnL w="6350" cap="flat" cmpd="sng" algn="ctr">
+                      <a:solidFill>
+                        <a:srgbClr val="CACACA"/>
+                      </a:solidFill>
+                      <a:prstDash val="solid"/>
+                      <a:round/>
+                      <a:headEnd type="none" w="med" len="med"/>
+                      <a:tailEnd type="none" w="med" len="med"/>
+                    </a:lnL>
+                    <a:lnR w="6350" cap="flat" cmpd="sng" algn="ctr">
+                      <a:solidFill>
+                        <a:srgbClr val="CACACA"/>
+                      </a:solidFill>
+                      <a:prstDash val="solid"/>
+                      <a:round/>
+                      <a:headEnd type="none" w="med" len="med"/>
+                      <a:tailEnd type="none" w="med" len="med"/>
+                    </a:lnR>
+                    <a:lnT w="6350" cap="flat" cmpd="sng" algn="ctr">
+                      <a:solidFill>
+                        <a:srgbClr val="CACACA"/>
+                      </a:solidFill>
+                      <a:prstDash val="solid"/>
+                      <a:round/>
+                      <a:headEnd type="none" w="med" len="med"/>
+                      <a:tailEnd type="none" w="med" len="med"/>
+                    </a:lnT>
+                    <a:lnB w="6350" cap="flat" cmpd="sng" algn="ctr">
+                      <a:solidFill>
+                        <a:srgbClr val="CACACA"/>
+                      </a:solidFill>
+                      <a:prstDash val="solid"/>
+                      <a:round/>
+                      <a:headEnd type="none" w="med" len="med"/>
+                      <a:tailEnd type="none" w="med" len="med"/>
+                    </a:lnB>
+                  </a:tcPr>
+                </a:tc>
+                <a:tc>
+                  <a:txBody>
+                    <a:bodyPr/>
+                    <a:lstStyle/>
+                    <a:p>
+                      <a:pPr algn="ctr" indent="0" marL="0">
+                        <a:buNone/>
+                      </a:pPr>
+                      <a:r>
+                        <a:rPr lang="en-US" sz="950" dirty="0">
+                          <a:solidFill>
+                            <a:srgbClr val="2B2B2B"/>
+                          </a:solidFill>
+                          <a:latin typeface="Verdana" pitchFamily="34" charset="0"/>
+                          <a:ea typeface="Verdana" pitchFamily="34" charset="-122"/>
+                          <a:cs typeface="Verdana" pitchFamily="34" charset="-120"/>
+                        </a:rPr>
+                        <a:t>4,11 %</a:t>
+                      </a:r>
+                      <a:endParaRPr lang="en-US" sz="950" dirty="0">
+                        <a:latin typeface="Verdana" charset="0"/>
+                        <a:ea typeface="Verdana" charset="0"/>
+                        <a:cs typeface="Verdana" charset="0"/>
+                      </a:endParaRPr>
+                    </a:p>
+                  </a:txBody>
+                  <a:tcPr marL="91440" marR="91440" marT="45720" marB="45720" anchor="ctr">
+                    <a:lnL w="6350" cap="flat" cmpd="sng" algn="ctr">
+                      <a:solidFill>
+                        <a:srgbClr val="CACACA"/>
+                      </a:solidFill>
+                      <a:prstDash val="solid"/>
+                      <a:round/>
+                      <a:headEnd type="none" w="med" len="med"/>
+                      <a:tailEnd type="none" w="med" len="med"/>
+                    </a:lnL>
+                    <a:lnR w="6350" cap="flat" cmpd="sng" algn="ctr">
+                      <a:solidFill>
+                        <a:srgbClr val="CACACA"/>
+                      </a:solidFill>
+                      <a:prstDash val="solid"/>
+                      <a:round/>
+                      <a:headEnd type="none" w="med" len="med"/>
+                      <a:tailEnd type="none" w="med" len="med"/>
+                    </a:lnR>
+                    <a:lnT w="6350" cap="flat" cmpd="sng" algn="ctr">
+                      <a:solidFill>
+                        <a:srgbClr val="CACACA"/>
+                      </a:solidFill>
+                      <a:prstDash val="solid"/>
+                      <a:round/>
+                      <a:headEnd type="none" w="med" len="med"/>
+                      <a:tailEnd type="none" w="med" len="med"/>
+                    </a:lnT>
+                    <a:lnB w="6350" cap="flat" cmpd="sng" algn="ctr">
+                      <a:solidFill>
+                        <a:srgbClr val="CACACA"/>
+                      </a:solidFill>
+                      <a:prstDash val="solid"/>
+                      <a:round/>
+                      <a:headEnd type="none" w="med" len="med"/>
+                      <a:tailEnd type="none" w="med" len="med"/>
+                    </a:lnB>
+                  </a:tcPr>
+                </a:tc>
+                <a:tc>
+                  <a:txBody>
+                    <a:bodyPr/>
+                    <a:lstStyle/>
+                    <a:p>
+                      <a:pPr algn="ctr" indent="0" marL="0">
+                        <a:buNone/>
+                      </a:pPr>
+                      <a:r>
+                        <a:rPr lang="en-US" sz="950" dirty="0">
+                          <a:solidFill>
+                            <a:srgbClr val="2B2B2B"/>
+                          </a:solidFill>
+                          <a:latin typeface="Verdana" pitchFamily="34" charset="0"/>
+                          <a:ea typeface="Verdana" pitchFamily="34" charset="-122"/>
+                          <a:cs typeface="Verdana" pitchFamily="34" charset="-120"/>
+                        </a:rPr>
+                        <a:t>2,65 %</a:t>
+                      </a:r>
+                      <a:endParaRPr lang="en-US" sz="950" dirty="0">
+                        <a:latin typeface="Verdana" charset="0"/>
+                        <a:ea typeface="Verdana" charset="0"/>
+                        <a:cs typeface="Verdana" charset="0"/>
+                      </a:endParaRPr>
+                    </a:p>
+                  </a:txBody>
+                  <a:tcPr marL="91440" marR="91440" marT="45720" marB="45720" anchor="ctr">
+                    <a:lnL w="6350" cap="flat" cmpd="sng" algn="ctr">
+                      <a:solidFill>
+                        <a:srgbClr val="CACACA"/>
+                      </a:solidFill>
+                      <a:prstDash val="solid"/>
+                      <a:round/>
+                      <a:headEnd type="none" w="med" len="med"/>
+                      <a:tailEnd type="none" w="med" len="med"/>
+                    </a:lnL>
+                    <a:lnR w="6350" cap="flat" cmpd="sng" algn="ctr">
+                      <a:solidFill>
+                        <a:srgbClr val="CACACA"/>
+                      </a:solidFill>
+                      <a:prstDash val="solid"/>
+                      <a:round/>
+                      <a:headEnd type="none" w="med" len="med"/>
+                      <a:tailEnd type="none" w="med" len="med"/>
+                    </a:lnR>
+                    <a:lnT w="6350" cap="flat" cmpd="sng" algn="ctr">
+                      <a:solidFill>
+                        <a:srgbClr val="CACACA"/>
+                      </a:solidFill>
+                      <a:prstDash val="solid"/>
+                      <a:round/>
+                      <a:headEnd type="none" w="med" len="med"/>
+                      <a:tailEnd type="none" w="med" len="med"/>
+                    </a:lnT>
+                    <a:lnB w="6350" cap="flat" cmpd="sng" algn="ctr">
+                      <a:solidFill>
+                        <a:srgbClr val="CACACA"/>
+                      </a:solidFill>
+                      <a:prstDash val="solid"/>
+                      <a:round/>
+                      <a:headEnd type="none" w="med" len="med"/>
+                      <a:tailEnd type="none" w="med" len="med"/>
+                    </a:lnB>
+                  </a:tcPr>
+                </a:tc>
+                <a:tc>
+                  <a:txBody>
+                    <a:bodyPr/>
+                    <a:lstStyle/>
+                    <a:p>
+                      <a:pPr algn="ctr" indent="0" marL="0">
+                        <a:buNone/>
+                      </a:pPr>
+                      <a:r>
+                        <a:rPr lang="en-US" sz="1000" b="1" dirty="0">
+                          <a:solidFill>
+                            <a:srgbClr val="2B2B2B"/>
+                          </a:solidFill>
+                          <a:latin typeface="Verdana" pitchFamily="34" charset="0"/>
+                          <a:ea typeface="Verdana" pitchFamily="34" charset="-122"/>
+                          <a:cs typeface="Verdana" pitchFamily="34" charset="-120"/>
+                        </a:rPr>
+                        <a:t>1,02 %</a:t>
+                      </a:r>
+                      <a:endParaRPr lang="en-US" sz="1000" dirty="0">
+                        <a:latin typeface="Verdana" charset="0"/>
+                        <a:ea typeface="Verdana" charset="0"/>
+                        <a:cs typeface="Verdana" charset="0"/>
+                      </a:endParaRPr>
+                    </a:p>
+                  </a:txBody>
+                  <a:tcPr marL="91440" marR="91440" marT="45720" marB="45720" anchor="ctr">
+                    <a:lnL w="6350" cap="flat" cmpd="sng" algn="ctr">
+                      <a:solidFill>
+                        <a:srgbClr val="CACACA"/>
+                      </a:solidFill>
+                      <a:prstDash val="solid"/>
+                      <a:round/>
+                      <a:headEnd type="none" w="med" len="med"/>
+                      <a:tailEnd type="none" w="med" len="med"/>
+                    </a:lnL>
+                    <a:lnR w="6350" cap="flat" cmpd="sng" algn="ctr">
+                      <a:solidFill>
+                        <a:srgbClr val="CACACA"/>
+                      </a:solidFill>
+                      <a:prstDash val="solid"/>
+                      <a:round/>
+                      <a:headEnd type="none" w="med" len="med"/>
+                      <a:tailEnd type="none" w="med" len="med"/>
+                    </a:lnR>
+                    <a:lnT w="6350" cap="flat" cmpd="sng" algn="ctr">
+                      <a:solidFill>
+                        <a:srgbClr val="CACACA"/>
+                      </a:solidFill>
+                      <a:prstDash val="solid"/>
+                      <a:round/>
+                      <a:headEnd type="none" w="med" len="med"/>
+                      <a:tailEnd type="none" w="med" len="med"/>
+                    </a:lnT>
+                    <a:lnB w="6350" cap="flat" cmpd="sng" algn="ctr">
+                      <a:solidFill>
+                        <a:srgbClr val="CACACA"/>
+                      </a:solidFill>
+                      <a:prstDash val="solid"/>
+                      <a:round/>
+                      <a:headEnd type="none" w="med" len="med"/>
+                      <a:tailEnd type="none" w="med" len="med"/>
+                    </a:lnB>
+                    <a:solidFill>
+                      <a:srgbClr val="FFF4C2"/>
+                    </a:solidFill>
+                  </a:tcPr>
+                </a:tc>
+                <a:tc>
+                  <a:txBody>
+                    <a:bodyPr/>
+                    <a:lstStyle/>
+                    <a:p>
+                      <a:pPr algn="ctr" indent="0" marL="0">
+                        <a:buNone/>
+                      </a:pPr>
+                      <a:r>
+                        <a:rPr lang="en-US" sz="950" dirty="0">
+                          <a:solidFill>
+                            <a:srgbClr val="2B2B2B"/>
+                          </a:solidFill>
+                          <a:latin typeface="Verdana" pitchFamily="34" charset="0"/>
+                          <a:ea typeface="Verdana" pitchFamily="34" charset="-122"/>
+                          <a:cs typeface="Verdana" pitchFamily="34" charset="-120"/>
+                        </a:rPr>
+                        <a:t>1,63 %</a:t>
+                      </a:r>
+                      <a:endParaRPr lang="en-US" sz="950" dirty="0">
+                        <a:latin typeface="Verdana" charset="0"/>
+                        <a:ea typeface="Verdana" charset="0"/>
+                        <a:cs typeface="Verdana" charset="0"/>
+                      </a:endParaRPr>
+                    </a:p>
+                  </a:txBody>
+                  <a:tcPr marL="91440" marR="91440" marT="45720" marB="45720" anchor="ctr">
+                    <a:lnL w="6350" cap="flat" cmpd="sng" algn="ctr">
+                      <a:solidFill>
+                        <a:srgbClr val="CACACA"/>
+                      </a:solidFill>
+                      <a:prstDash val="solid"/>
+                      <a:round/>
+                      <a:headEnd type="none" w="med" len="med"/>
+                      <a:tailEnd type="none" w="med" len="med"/>
+                    </a:lnL>
+                    <a:lnR w="6350" cap="flat" cmpd="sng" algn="ctr">
+                      <a:solidFill>
+                        <a:srgbClr val="CACACA"/>
+                      </a:solidFill>
+                      <a:prstDash val="solid"/>
+                      <a:round/>
+                      <a:headEnd type="none" w="med" len="med"/>
+                      <a:tailEnd type="none" w="med" len="med"/>
+                    </a:lnR>
+                    <a:lnT w="6350" cap="flat" cmpd="sng" algn="ctr">
+                      <a:solidFill>
+                        <a:srgbClr val="CACACA"/>
+                      </a:solidFill>
+                      <a:prstDash val="solid"/>
+                      <a:round/>
+                      <a:headEnd type="none" w="med" len="med"/>
+                      <a:tailEnd type="none" w="med" len="med"/>
+                    </a:lnT>
+                    <a:lnB w="6350" cap="flat" cmpd="sng" algn="ctr">
+                      <a:solidFill>
+                        <a:srgbClr val="CACACA"/>
+                      </a:solidFill>
+                      <a:prstDash val="solid"/>
+                      <a:round/>
+                      <a:headEnd type="none" w="med" len="med"/>
+                      <a:tailEnd type="none" w="med" len="med"/>
+                    </a:lnB>
+                  </a:tcPr>
+                </a:tc>
+                <a:tc>
+                  <a:txBody>
+                    <a:bodyPr/>
+                    <a:lstStyle/>
+                    <a:p>
+                      <a:pPr algn="ctr" indent="0" marL="0">
+                        <a:buNone/>
+                      </a:pPr>
+                      <a:r>
+                        <a:rPr lang="en-US" sz="950" dirty="0">
+                          <a:solidFill>
+                            <a:srgbClr val="2B2B2B"/>
+                          </a:solidFill>
+                          <a:latin typeface="Verdana" pitchFamily="34" charset="0"/>
+                          <a:ea typeface="Verdana" pitchFamily="34" charset="-122"/>
+                          <a:cs typeface="Verdana" pitchFamily="34" charset="-120"/>
+                        </a:rPr>
+                        <a:t>24 pb</a:t>
+                      </a:r>
+                      <a:endParaRPr lang="en-US" sz="950" dirty="0">
+                        <a:latin typeface="Verdana" charset="0"/>
+                        <a:ea typeface="Verdana" charset="0"/>
+                        <a:cs typeface="Verdana" charset="0"/>
+                      </a:endParaRPr>
+                    </a:p>
+                  </a:txBody>
+                  <a:tcPr marL="91440" marR="91440" marT="45720" marB="45720" anchor="ctr">
+                    <a:lnL w="6350" cap="flat" cmpd="sng" algn="ctr">
+                      <a:solidFill>
+                        <a:srgbClr val="CACACA"/>
+                      </a:solidFill>
+                      <a:prstDash val="solid"/>
+                      <a:round/>
+                      <a:headEnd type="none" w="med" len="med"/>
+                      <a:tailEnd type="none" w="med" len="med"/>
+                    </a:lnL>
+                    <a:lnR w="6350" cap="flat" cmpd="sng" algn="ctr">
+                      <a:solidFill>
+                        <a:srgbClr val="CACACA"/>
+                      </a:solidFill>
+                      <a:prstDash val="solid"/>
+                      <a:round/>
+                      <a:headEnd type="none" w="med" len="med"/>
+                      <a:tailEnd type="none" w="med" len="med"/>
+                    </a:lnR>
+                    <a:lnT w="6350" cap="flat" cmpd="sng" algn="ctr">
+                      <a:solidFill>
+                        <a:srgbClr val="CACACA"/>
+                      </a:solidFill>
+                      <a:prstDash val="solid"/>
+                      <a:round/>
+                      <a:headEnd type="none" w="med" len="med"/>
+                      <a:tailEnd type="none" w="med" len="med"/>
+                    </a:lnT>
+                    <a:lnB w="6350" cap="flat" cmpd="sng" algn="ctr">
+                      <a:solidFill>
+                        <a:srgbClr val="CACACA"/>
+                      </a:solidFill>
+                      <a:prstDash val="solid"/>
+                      <a:round/>
+                      <a:headEnd type="none" w="med" len="med"/>
+                      <a:tailEnd type="none" w="med" len="med"/>
+                    </a:lnB>
+                  </a:tcPr>
+                </a:tc>
+                <a:tc>
+                  <a:txBody>
+                    <a:bodyPr/>
+                    <a:lstStyle/>
+                    <a:p>
+                      <a:pPr algn="ctr" indent="0" marL="0">
+                        <a:buNone/>
+                      </a:pPr>
+                      <a:r>
+                        <a:rPr lang="en-US" sz="950" dirty="0">
+                          <a:solidFill>
+                            <a:srgbClr val="2B2B2B"/>
+                          </a:solidFill>
+                          <a:latin typeface="Verdana" pitchFamily="34" charset="0"/>
+                          <a:ea typeface="Verdana" pitchFamily="34" charset="-122"/>
+                          <a:cs typeface="Verdana" pitchFamily="34" charset="-120"/>
+                        </a:rPr>
+                        <a:t>2,24 %</a:t>
+                      </a:r>
+                      <a:endParaRPr lang="en-US" sz="950" dirty="0">
+                        <a:latin typeface="Verdana" charset="0"/>
+                        <a:ea typeface="Verdana" charset="0"/>
+                        <a:cs typeface="Verdana" charset="0"/>
+                      </a:endParaRPr>
+                    </a:p>
+                  </a:txBody>
+                  <a:tcPr marL="91440" marR="91440" marT="45720" marB="45720" anchor="ctr">
+                    <a:lnL w="6350" cap="flat" cmpd="sng" algn="ctr">
+                      <a:solidFill>
+                        <a:srgbClr val="CACACA"/>
+                      </a:solidFill>
+                      <a:prstDash val="solid"/>
+                      <a:round/>
+                      <a:headEnd type="none" w="med" len="med"/>
+                      <a:tailEnd type="none" w="med" len="med"/>
+                    </a:lnL>
+                    <a:lnR w="6350" cap="flat" cmpd="sng" algn="ctr">
+                      <a:solidFill>
+                        <a:srgbClr val="CACACA"/>
+                      </a:solidFill>
+                      <a:prstDash val="solid"/>
+                      <a:round/>
+                      <a:headEnd type="none" w="med" len="med"/>
+                      <a:tailEnd type="none" w="med" len="med"/>
+                    </a:lnR>
+                    <a:lnT w="6350" cap="flat" cmpd="sng" algn="ctr">
+                      <a:solidFill>
+                        <a:srgbClr val="CACACA"/>
+                      </a:solidFill>
+                      <a:prstDash val="solid"/>
+                      <a:round/>
+                      <a:headEnd type="none" w="med" len="med"/>
+                      <a:tailEnd type="none" w="med" len="med"/>
+                    </a:lnT>
+                    <a:lnB w="6350" cap="flat" cmpd="sng" algn="ctr">
+                      <a:solidFill>
+                        <a:srgbClr val="CACACA"/>
+                      </a:solidFill>
+                      <a:prstDash val="solid"/>
+                      <a:round/>
+                      <a:headEnd type="none" w="med" len="med"/>
+                      <a:tailEnd type="none" w="med" len="med"/>
+                    </a:lnB>
+                  </a:tcPr>
+                </a:tc>
+              </a:tr>
+              <a:tr h="310896">
+                <a:tc>
+                  <a:txBody>
+                    <a:bodyPr/>
+                    <a:lstStyle/>
+                    <a:p>
+                      <a:pPr algn="l" indent="0" marL="0">
+                        <a:buNone/>
+                      </a:pPr>
+                      <a:r>
+                        <a:rPr lang="en-US" sz="950" b="1" dirty="0">
+                          <a:solidFill>
+                            <a:srgbClr val="2B2B2B"/>
+                          </a:solidFill>
+                          <a:latin typeface="Verdana" pitchFamily="34" charset="0"/>
+                          <a:ea typeface="Verdana" pitchFamily="34" charset="-122"/>
+                          <a:cs typeface="Verdana" pitchFamily="34" charset="-120"/>
+                        </a:rPr>
+                        <a:t>BPER Banca</a:t>
+                      </a:r>
+                      <a:endParaRPr lang="en-US" sz="950" dirty="0">
+                        <a:latin typeface="Verdana" charset="0"/>
+                        <a:ea typeface="Verdana" charset="0"/>
+                        <a:cs typeface="Verdana" charset="0"/>
+                      </a:endParaRPr>
+                    </a:p>
+                  </a:txBody>
+                  <a:tcPr marL="91440" marR="91440" marT="45720" marB="45720" anchor="ctr">
+                    <a:lnL w="6350" cap="flat" cmpd="sng" algn="ctr">
+                      <a:solidFill>
+                        <a:srgbClr val="CACACA"/>
+                      </a:solidFill>
+                      <a:prstDash val="solid"/>
+                      <a:round/>
+                      <a:headEnd type="none" w="med" len="med"/>
+                      <a:tailEnd type="none" w="med" len="med"/>
+                    </a:lnL>
+                    <a:lnR w="6350" cap="flat" cmpd="sng" algn="ctr">
+                      <a:solidFill>
+                        <a:srgbClr val="CACACA"/>
+                      </a:solidFill>
+                      <a:prstDash val="solid"/>
+                      <a:round/>
+                      <a:headEnd type="none" w="med" len="med"/>
+                      <a:tailEnd type="none" w="med" len="med"/>
+                    </a:lnR>
+                    <a:lnT w="6350" cap="flat" cmpd="sng" algn="ctr">
+                      <a:solidFill>
+                        <a:srgbClr val="CACACA"/>
+                      </a:solidFill>
+                      <a:prstDash val="solid"/>
+                      <a:round/>
+                      <a:headEnd type="none" w="med" len="med"/>
+                      <a:tailEnd type="none" w="med" len="med"/>
+                    </a:lnT>
+                    <a:lnB w="6350" cap="flat" cmpd="sng" algn="ctr">
+                      <a:solidFill>
+                        <a:srgbClr val="CACACA"/>
+                      </a:solidFill>
+                      <a:prstDash val="solid"/>
+                      <a:round/>
+                      <a:headEnd type="none" w="med" len="med"/>
+                      <a:tailEnd type="none" w="med" len="med"/>
+                    </a:lnB>
+                  </a:tcPr>
+                </a:tc>
+                <a:tc>
+                  <a:txBody>
+                    <a:bodyPr/>
+                    <a:lstStyle/>
+                    <a:p>
+                      <a:pPr algn="l" indent="0" marL="0">
+                        <a:buNone/>
+                      </a:pPr>
+                      <a:r>
+                        <a:rPr lang="en-US" sz="950" dirty="0">
+                          <a:solidFill>
+                            <a:srgbClr val="818181"/>
+                          </a:solidFill>
+                          <a:latin typeface="Verdana" pitchFamily="34" charset="0"/>
+                          <a:ea typeface="Verdana" pitchFamily="34" charset="-122"/>
+                          <a:cs typeface="Verdana" pitchFamily="34" charset="-120"/>
+                        </a:rPr>
+                        <a:t>Italia</a:t>
+                      </a:r>
+                      <a:endParaRPr lang="en-US" sz="950" dirty="0">
+                        <a:latin typeface="Verdana" charset="0"/>
+                        <a:ea typeface="Verdana" charset="0"/>
+                        <a:cs typeface="Verdana" charset="0"/>
+                      </a:endParaRPr>
+                    </a:p>
+                  </a:txBody>
+                  <a:tcPr marL="91440" marR="91440" marT="45720" marB="45720" anchor="ctr">
+                    <a:lnL w="6350" cap="flat" cmpd="sng" algn="ctr">
+                      <a:solidFill>
+                        <a:srgbClr val="CACACA"/>
+                      </a:solidFill>
+                      <a:prstDash val="solid"/>
+                      <a:round/>
+                      <a:headEnd type="none" w="med" len="med"/>
+                      <a:tailEnd type="none" w="med" len="med"/>
+                    </a:lnL>
+                    <a:lnR w="6350" cap="flat" cmpd="sng" algn="ctr">
+                      <a:solidFill>
+                        <a:srgbClr val="CACACA"/>
+                      </a:solidFill>
+                      <a:prstDash val="solid"/>
+                      <a:round/>
+                      <a:headEnd type="none" w="med" len="med"/>
+                      <a:tailEnd type="none" w="med" len="med"/>
+                    </a:lnR>
+                    <a:lnT w="6350" cap="flat" cmpd="sng" algn="ctr">
+                      <a:solidFill>
+                        <a:srgbClr val="CACACA"/>
+                      </a:solidFill>
+                      <a:prstDash val="solid"/>
+                      <a:round/>
+                      <a:headEnd type="none" w="med" len="med"/>
+                      <a:tailEnd type="none" w="med" len="med"/>
+                    </a:lnT>
+                    <a:lnB w="6350" cap="flat" cmpd="sng" algn="ctr">
+                      <a:solidFill>
+                        <a:srgbClr val="CACACA"/>
+                      </a:solidFill>
+                      <a:prstDash val="solid"/>
+                      <a:round/>
+                      <a:headEnd type="none" w="med" len="med"/>
+                      <a:tailEnd type="none" w="med" len="med"/>
+                    </a:lnB>
+                  </a:tcPr>
+                </a:tc>
+                <a:tc>
+                  <a:txBody>
+                    <a:bodyPr/>
+                    <a:lstStyle/>
+                    <a:p>
+                      <a:pPr algn="l" indent="0" marL="0">
+                        <a:buNone/>
+                      </a:pPr>
+                      <a:r>
+                        <a:rPr lang="en-US" sz="900" i="1" dirty="0">
+                          <a:solidFill>
+                            <a:srgbClr val="818181"/>
+                          </a:solidFill>
+                          <a:latin typeface="Verdana" pitchFamily="34" charset="0"/>
+                          <a:ea typeface="Verdana" pitchFamily="34" charset="-122"/>
+                          <a:cs typeface="Verdana" pitchFamily="34" charset="-120"/>
+                        </a:rPr>
+                        <a:t>Grupo consolidado</a:t>
+                      </a:r>
+                      <a:endParaRPr lang="en-US" sz="900" dirty="0">
+                        <a:latin typeface="Verdana" charset="0"/>
+                        <a:ea typeface="Verdana" charset="0"/>
+                        <a:cs typeface="Verdana" charset="0"/>
+                      </a:endParaRPr>
+                    </a:p>
+                  </a:txBody>
+                  <a:tcPr marL="91440" marR="91440" marT="45720" marB="45720" anchor="ctr">
+                    <a:lnL w="6350" cap="flat" cmpd="sng" algn="ctr">
+                      <a:solidFill>
+                        <a:srgbClr val="CACACA"/>
+                      </a:solidFill>
+                      <a:prstDash val="solid"/>
+                      <a:round/>
+                      <a:headEnd type="none" w="med" len="med"/>
+                      <a:tailEnd type="none" w="med" len="med"/>
+                    </a:lnL>
+                    <a:lnR w="6350" cap="flat" cmpd="sng" algn="ctr">
+                      <a:solidFill>
+                        <a:srgbClr val="CACACA"/>
+                      </a:solidFill>
+                      <a:prstDash val="solid"/>
+                      <a:round/>
+                      <a:headEnd type="none" w="med" len="med"/>
+                      <a:tailEnd type="none" w="med" len="med"/>
+                    </a:lnR>
+                    <a:lnT w="6350" cap="flat" cmpd="sng" algn="ctr">
+                      <a:solidFill>
+                        <a:srgbClr val="CACACA"/>
+                      </a:solidFill>
+                      <a:prstDash val="solid"/>
+                      <a:round/>
+                      <a:headEnd type="none" w="med" len="med"/>
+                      <a:tailEnd type="none" w="med" len="med"/>
+                    </a:lnT>
+                    <a:lnB w="6350" cap="flat" cmpd="sng" algn="ctr">
+                      <a:solidFill>
+                        <a:srgbClr val="CACACA"/>
+                      </a:solidFill>
+                      <a:prstDash val="solid"/>
+                      <a:round/>
+                      <a:headEnd type="none" w="med" len="med"/>
+                      <a:tailEnd type="none" w="med" len="med"/>
+                    </a:lnB>
+                  </a:tcPr>
+                </a:tc>
+                <a:tc>
+                  <a:txBody>
+                    <a:bodyPr/>
+                    <a:lstStyle/>
+                    <a:p>
+                      <a:pPr algn="ctr" indent="0" marL="0">
+                        <a:buNone/>
+                      </a:pPr>
+                      <a:r>
+                        <a:rPr lang="en-US" sz="950" dirty="0">
+                          <a:solidFill>
+                            <a:srgbClr val="818181"/>
+                          </a:solidFill>
+                          <a:latin typeface="Verdana" pitchFamily="34" charset="0"/>
+                          <a:ea typeface="Verdana" pitchFamily="34" charset="-122"/>
+                          <a:cs typeface="Verdana" pitchFamily="34" charset="-120"/>
+                        </a:rPr>
+                        <a:t>129.216</a:t>
+                      </a:r>
+                      <a:endParaRPr lang="en-US" sz="950" dirty="0">
+                        <a:latin typeface="Verdana" charset="0"/>
+                        <a:ea typeface="Verdana" charset="0"/>
+                        <a:cs typeface="Verdana" charset="0"/>
+                      </a:endParaRPr>
+                    </a:p>
+                  </a:txBody>
+                  <a:tcPr marL="91440" marR="91440" marT="45720" marB="45720" anchor="ctr">
+                    <a:lnL w="6350" cap="flat" cmpd="sng" algn="ctr">
+                      <a:solidFill>
+                        <a:srgbClr val="CACACA"/>
+                      </a:solidFill>
+                      <a:prstDash val="solid"/>
+                      <a:round/>
+                      <a:headEnd type="none" w="med" len="med"/>
+                      <a:tailEnd type="none" w="med" len="med"/>
+                    </a:lnL>
+                    <a:lnR w="6350" cap="flat" cmpd="sng" algn="ctr">
+                      <a:solidFill>
+                        <a:srgbClr val="CACACA"/>
+                      </a:solidFill>
+                      <a:prstDash val="solid"/>
+                      <a:round/>
+                      <a:headEnd type="none" w="med" len="med"/>
+                      <a:tailEnd type="none" w="med" len="med"/>
+                    </a:lnR>
+                    <a:lnT w="6350" cap="flat" cmpd="sng" algn="ctr">
+                      <a:solidFill>
+                        <a:srgbClr val="CACACA"/>
+                      </a:solidFill>
+                      <a:prstDash val="solid"/>
+                      <a:round/>
+                      <a:headEnd type="none" w="med" len="med"/>
+                      <a:tailEnd type="none" w="med" len="med"/>
+                    </a:lnT>
+                    <a:lnB w="6350" cap="flat" cmpd="sng" algn="ctr">
+                      <a:solidFill>
+                        <a:srgbClr val="CACACA"/>
+                      </a:solidFill>
+                      <a:prstDash val="solid"/>
+                      <a:round/>
+                      <a:headEnd type="none" w="med" len="med"/>
+                      <a:tailEnd type="none" w="med" len="med"/>
+                    </a:lnB>
+                  </a:tcPr>
+                </a:tc>
+                <a:tc>
+                  <a:txBody>
+                    <a:bodyPr/>
+                    <a:lstStyle/>
+                    <a:p>
+                      <a:pPr algn="ctr" indent="0" marL="0">
+                        <a:buNone/>
+                      </a:pPr>
+                      <a:r>
+                        <a:rPr lang="en-US" sz="950" dirty="0">
+                          <a:solidFill>
+                            <a:srgbClr val="2B2B2B"/>
+                          </a:solidFill>
+                          <a:latin typeface="Verdana" pitchFamily="34" charset="0"/>
+                          <a:ea typeface="Verdana" pitchFamily="34" charset="-122"/>
+                          <a:cs typeface="Verdana" pitchFamily="34" charset="-120"/>
+                        </a:rPr>
+                        <a:t>6,00 %</a:t>
+                      </a:r>
+                      <a:endParaRPr lang="en-US" sz="950" dirty="0">
+                        <a:latin typeface="Verdana" charset="0"/>
+                        <a:ea typeface="Verdana" charset="0"/>
+                        <a:cs typeface="Verdana" charset="0"/>
+                      </a:endParaRPr>
+                    </a:p>
+                  </a:txBody>
+                  <a:tcPr marL="91440" marR="91440" marT="45720" marB="45720" anchor="ctr">
+                    <a:lnL w="6350" cap="flat" cmpd="sng" algn="ctr">
+                      <a:solidFill>
+                        <a:srgbClr val="CACACA"/>
+                      </a:solidFill>
+                      <a:prstDash val="solid"/>
+                      <a:round/>
+                      <a:headEnd type="none" w="med" len="med"/>
+                      <a:tailEnd type="none" w="med" len="med"/>
+                    </a:lnL>
+                    <a:lnR w="6350" cap="flat" cmpd="sng" algn="ctr">
+                      <a:solidFill>
+                        <a:srgbClr val="CACACA"/>
+                      </a:solidFill>
+                      <a:prstDash val="solid"/>
+                      <a:round/>
+                      <a:headEnd type="none" w="med" len="med"/>
+                      <a:tailEnd type="none" w="med" len="med"/>
+                    </a:lnR>
+                    <a:lnT w="6350" cap="flat" cmpd="sng" algn="ctr">
+                      <a:solidFill>
+                        <a:srgbClr val="CACACA"/>
+                      </a:solidFill>
+                      <a:prstDash val="solid"/>
+                      <a:round/>
+                      <a:headEnd type="none" w="med" len="med"/>
+                      <a:tailEnd type="none" w="med" len="med"/>
+                    </a:lnT>
+                    <a:lnB w="6350" cap="flat" cmpd="sng" algn="ctr">
+                      <a:solidFill>
+                        <a:srgbClr val="CACACA"/>
+                      </a:solidFill>
+                      <a:prstDash val="solid"/>
+                      <a:round/>
+                      <a:headEnd type="none" w="med" len="med"/>
+                      <a:tailEnd type="none" w="med" len="med"/>
+                    </a:lnB>
+                  </a:tcPr>
+                </a:tc>
+                <a:tc>
+                  <a:txBody>
+                    <a:bodyPr/>
+                    <a:lstStyle/>
+                    <a:p>
+                      <a:pPr algn="ctr" indent="0" marL="0">
+                        <a:buNone/>
+                      </a:pPr>
+                      <a:r>
+                        <a:rPr lang="en-US" sz="950" dirty="0">
+                          <a:solidFill>
+                            <a:srgbClr val="2B2B2B"/>
+                          </a:solidFill>
+                          <a:latin typeface="Verdana" pitchFamily="34" charset="0"/>
+                          <a:ea typeface="Verdana" pitchFamily="34" charset="-122"/>
+                          <a:cs typeface="Verdana" pitchFamily="34" charset="-120"/>
+                        </a:rPr>
+                        <a:t>3,42 %</a:t>
+                      </a:r>
+                      <a:endParaRPr lang="en-US" sz="950" dirty="0">
+                        <a:latin typeface="Verdana" charset="0"/>
+                        <a:ea typeface="Verdana" charset="0"/>
+                        <a:cs typeface="Verdana" charset="0"/>
+                      </a:endParaRPr>
+                    </a:p>
+                  </a:txBody>
+                  <a:tcPr marL="91440" marR="91440" marT="45720" marB="45720" anchor="ctr">
+                    <a:lnL w="6350" cap="flat" cmpd="sng" algn="ctr">
+                      <a:solidFill>
+                        <a:srgbClr val="CACACA"/>
+                      </a:solidFill>
+                      <a:prstDash val="solid"/>
+                      <a:round/>
+                      <a:headEnd type="none" w="med" len="med"/>
+                      <a:tailEnd type="none" w="med" len="med"/>
+                    </a:lnL>
+                    <a:lnR w="6350" cap="flat" cmpd="sng" algn="ctr">
+                      <a:solidFill>
+                        <a:srgbClr val="CACACA"/>
+                      </a:solidFill>
+                      <a:prstDash val="solid"/>
+                      <a:round/>
+                      <a:headEnd type="none" w="med" len="med"/>
+                      <a:tailEnd type="none" w="med" len="med"/>
+                    </a:lnR>
+                    <a:lnT w="6350" cap="flat" cmpd="sng" algn="ctr">
+                      <a:solidFill>
+                        <a:srgbClr val="CACACA"/>
+                      </a:solidFill>
+                      <a:prstDash val="solid"/>
+                      <a:round/>
+                      <a:headEnd type="none" w="med" len="med"/>
+                      <a:tailEnd type="none" w="med" len="med"/>
+                    </a:lnT>
+                    <a:lnB w="6350" cap="flat" cmpd="sng" algn="ctr">
+                      <a:solidFill>
+                        <a:srgbClr val="CACACA"/>
+                      </a:solidFill>
+                      <a:prstDash val="solid"/>
+                      <a:round/>
+                      <a:headEnd type="none" w="med" len="med"/>
+                      <a:tailEnd type="none" w="med" len="med"/>
+                    </a:lnB>
+                  </a:tcPr>
+                </a:tc>
+                <a:tc>
+                  <a:txBody>
+                    <a:bodyPr/>
+                    <a:lstStyle/>
+                    <a:p>
+                      <a:pPr algn="ctr" indent="0" marL="0">
+                        <a:buNone/>
+                      </a:pPr>
+                      <a:r>
+                        <a:rPr lang="en-US" sz="1000" b="1" dirty="0">
+                          <a:solidFill>
+                            <a:srgbClr val="2B2B2B"/>
+                          </a:solidFill>
+                          <a:latin typeface="Verdana" pitchFamily="34" charset="0"/>
+                          <a:ea typeface="Verdana" pitchFamily="34" charset="-122"/>
+                          <a:cs typeface="Verdana" pitchFamily="34" charset="-120"/>
+                        </a:rPr>
+                        <a:t>2,09 %</a:t>
+                      </a:r>
+                      <a:endParaRPr lang="en-US" sz="1000" dirty="0">
+                        <a:latin typeface="Verdana" charset="0"/>
+                        <a:ea typeface="Verdana" charset="0"/>
+                        <a:cs typeface="Verdana" charset="0"/>
+                      </a:endParaRPr>
+                    </a:p>
+                  </a:txBody>
+                  <a:tcPr marL="91440" marR="91440" marT="45720" marB="45720" anchor="ctr">
+                    <a:lnL w="6350" cap="flat" cmpd="sng" algn="ctr">
+                      <a:solidFill>
+                        <a:srgbClr val="CACACA"/>
+                      </a:solidFill>
+                      <a:prstDash val="solid"/>
+                      <a:round/>
+                      <a:headEnd type="none" w="med" len="med"/>
+                      <a:tailEnd type="none" w="med" len="med"/>
+                    </a:lnL>
+                    <a:lnR w="6350" cap="flat" cmpd="sng" algn="ctr">
+                      <a:solidFill>
+                        <a:srgbClr val="CACACA"/>
+                      </a:solidFill>
+                      <a:prstDash val="solid"/>
+                      <a:round/>
+                      <a:headEnd type="none" w="med" len="med"/>
+                      <a:tailEnd type="none" w="med" len="med"/>
+                    </a:lnR>
+                    <a:lnT w="6350" cap="flat" cmpd="sng" algn="ctr">
+                      <a:solidFill>
+                        <a:srgbClr val="CACACA"/>
+                      </a:solidFill>
+                      <a:prstDash val="solid"/>
+                      <a:round/>
+                      <a:headEnd type="none" w="med" len="med"/>
+                      <a:tailEnd type="none" w="med" len="med"/>
+                    </a:lnT>
+                    <a:lnB w="6350" cap="flat" cmpd="sng" algn="ctr">
+                      <a:solidFill>
+                        <a:srgbClr val="CACACA"/>
+                      </a:solidFill>
+                      <a:prstDash val="solid"/>
+                      <a:round/>
+                      <a:headEnd type="none" w="med" len="med"/>
+                      <a:tailEnd type="none" w="med" len="med"/>
+                    </a:lnB>
+                    <a:solidFill>
+                      <a:srgbClr val="FFF4C2"/>
+                    </a:solidFill>
+                  </a:tcPr>
+                </a:tc>
+                <a:tc>
+                  <a:txBody>
+                    <a:bodyPr/>
+                    <a:lstStyle/>
+                    <a:p>
+                      <a:pPr algn="ctr" indent="0" marL="0">
+                        <a:buNone/>
+                      </a:pPr>
+                      <a:r>
+                        <a:rPr lang="en-US" sz="950" dirty="0">
+                          <a:solidFill>
+                            <a:srgbClr val="2B2B2B"/>
+                          </a:solidFill>
+                          <a:latin typeface="Verdana" pitchFamily="34" charset="0"/>
+                          <a:ea typeface="Verdana" pitchFamily="34" charset="-122"/>
+                          <a:cs typeface="Verdana" pitchFamily="34" charset="-120"/>
+                        </a:rPr>
+                        <a:t>2,48 %</a:t>
+                      </a:r>
+                      <a:endParaRPr lang="en-US" sz="950" dirty="0">
+                        <a:latin typeface="Verdana" charset="0"/>
+                        <a:ea typeface="Verdana" charset="0"/>
+                        <a:cs typeface="Verdana" charset="0"/>
+                      </a:endParaRPr>
+                    </a:p>
+                  </a:txBody>
+                  <a:tcPr marL="91440" marR="91440" marT="45720" marB="45720" anchor="ctr">
+                    <a:lnL w="6350" cap="flat" cmpd="sng" algn="ctr">
+                      <a:solidFill>
+                        <a:srgbClr val="CACACA"/>
+                      </a:solidFill>
+                      <a:prstDash val="solid"/>
+                      <a:round/>
+                      <a:headEnd type="none" w="med" len="med"/>
+                      <a:tailEnd type="none" w="med" len="med"/>
+                    </a:lnL>
+                    <a:lnR w="6350" cap="flat" cmpd="sng" algn="ctr">
+                      <a:solidFill>
+                        <a:srgbClr val="CACACA"/>
+                      </a:solidFill>
+                      <a:prstDash val="solid"/>
+                      <a:round/>
+                      <a:headEnd type="none" w="med" len="med"/>
+                      <a:tailEnd type="none" w="med" len="med"/>
+                    </a:lnR>
+                    <a:lnT w="6350" cap="flat" cmpd="sng" algn="ctr">
+                      <a:solidFill>
+                        <a:srgbClr val="CACACA"/>
+                      </a:solidFill>
+                      <a:prstDash val="solid"/>
+                      <a:round/>
+                      <a:headEnd type="none" w="med" len="med"/>
+                      <a:tailEnd type="none" w="med" len="med"/>
+                    </a:lnT>
+                    <a:lnB w="6350" cap="flat" cmpd="sng" algn="ctr">
+                      <a:solidFill>
+                        <a:srgbClr val="CACACA"/>
+                      </a:solidFill>
+                      <a:prstDash val="solid"/>
+                      <a:round/>
+                      <a:headEnd type="none" w="med" len="med"/>
+                      <a:tailEnd type="none" w="med" len="med"/>
+                    </a:lnB>
+                  </a:tcPr>
+                </a:tc>
+                <a:tc>
+                  <a:txBody>
+                    <a:bodyPr/>
+                    <a:lstStyle/>
+                    <a:p>
+                      <a:pPr algn="ctr" indent="0" marL="0">
+                        <a:buNone/>
+                      </a:pPr>
+                      <a:r>
+                        <a:rPr lang="en-US" sz="950" dirty="0">
+                          <a:solidFill>
+                            <a:srgbClr val="2B2B2B"/>
+                          </a:solidFill>
+                          <a:latin typeface="Verdana" pitchFamily="34" charset="0"/>
+                          <a:ea typeface="Verdana" pitchFamily="34" charset="-122"/>
+                          <a:cs typeface="Verdana" pitchFamily="34" charset="-120"/>
+                        </a:rPr>
+                        <a:t>27 pb</a:t>
+                      </a:r>
+                      <a:endParaRPr lang="en-US" sz="950" dirty="0">
+                        <a:latin typeface="Verdana" charset="0"/>
+                        <a:ea typeface="Verdana" charset="0"/>
+                        <a:cs typeface="Verdana" charset="0"/>
+                      </a:endParaRPr>
+                    </a:p>
+                  </a:txBody>
+                  <a:tcPr marL="91440" marR="91440" marT="45720" marB="45720" anchor="ctr">
+                    <a:lnL w="6350" cap="flat" cmpd="sng" algn="ctr">
+                      <a:solidFill>
+                        <a:srgbClr val="CACACA"/>
+                      </a:solidFill>
+                      <a:prstDash val="solid"/>
+                      <a:round/>
+                      <a:headEnd type="none" w="med" len="med"/>
+                      <a:tailEnd type="none" w="med" len="med"/>
+                    </a:lnL>
+                    <a:lnR w="6350" cap="flat" cmpd="sng" algn="ctr">
+                      <a:solidFill>
+                        <a:srgbClr val="CACACA"/>
+                      </a:solidFill>
+                      <a:prstDash val="solid"/>
+                      <a:round/>
+                      <a:headEnd type="none" w="med" len="med"/>
+                      <a:tailEnd type="none" w="med" len="med"/>
+                    </a:lnR>
+                    <a:lnT w="6350" cap="flat" cmpd="sng" algn="ctr">
+                      <a:solidFill>
+                        <a:srgbClr val="CACACA"/>
+                      </a:solidFill>
+                      <a:prstDash val="solid"/>
+                      <a:round/>
+                      <a:headEnd type="none" w="med" len="med"/>
+                      <a:tailEnd type="none" w="med" len="med"/>
+                    </a:lnT>
+                    <a:lnB w="6350" cap="flat" cmpd="sng" algn="ctr">
+                      <a:solidFill>
+                        <a:srgbClr val="CACACA"/>
+                      </a:solidFill>
+                      <a:prstDash val="solid"/>
+                      <a:round/>
+                      <a:headEnd type="none" w="med" len="med"/>
+                      <a:tailEnd type="none" w="med" len="med"/>
+                    </a:lnB>
+                  </a:tcPr>
+                </a:tc>
+                <a:tc>
+                  <a:txBody>
+                    <a:bodyPr/>
+                    <a:lstStyle/>
+                    <a:p>
+                      <a:pPr algn="ctr" indent="0" marL="0">
+                        <a:buNone/>
+                      </a:pPr>
+                      <a:r>
+                        <a:rPr lang="en-US" sz="950" dirty="0">
+                          <a:solidFill>
+                            <a:srgbClr val="2B2B2B"/>
+                          </a:solidFill>
+                          <a:latin typeface="Verdana" pitchFamily="34" charset="0"/>
+                          <a:ea typeface="Verdana" pitchFamily="34" charset="-122"/>
+                          <a:cs typeface="Verdana" pitchFamily="34" charset="-120"/>
+                        </a:rPr>
+                        <a:t>3,24 %</a:t>
+                      </a:r>
+                      <a:endParaRPr lang="en-US" sz="950" dirty="0">
+                        <a:latin typeface="Verdana" charset="0"/>
+                        <a:ea typeface="Verdana" charset="0"/>
+                        <a:cs typeface="Verdana" charset="0"/>
+                      </a:endParaRPr>
+                    </a:p>
+                  </a:txBody>
+                  <a:tcPr marL="91440" marR="91440" marT="45720" marB="45720" anchor="ctr">
+                    <a:lnL w="6350" cap="flat" cmpd="sng" algn="ctr">
+                      <a:solidFill>
+                        <a:srgbClr val="CACACA"/>
+                      </a:solidFill>
+                      <a:prstDash val="solid"/>
+                      <a:round/>
+                      <a:headEnd type="none" w="med" len="med"/>
+                      <a:tailEnd type="none" w="med" len="med"/>
+                    </a:lnL>
+                    <a:lnR w="6350" cap="flat" cmpd="sng" algn="ctr">
+                      <a:solidFill>
+                        <a:srgbClr val="CACACA"/>
+                      </a:solidFill>
+                      <a:prstDash val="solid"/>
+                      <a:round/>
+                      <a:headEnd type="none" w="med" len="med"/>
+                      <a:tailEnd type="none" w="med" len="med"/>
+                    </a:lnR>
+                    <a:lnT w="6350" cap="flat" cmpd="sng" algn="ctr">
+                      <a:solidFill>
+                        <a:srgbClr val="CACACA"/>
+                      </a:solidFill>
+                      <a:prstDash val="solid"/>
+                      <a:round/>
+                      <a:headEnd type="none" w="med" len="med"/>
+                      <a:tailEnd type="none" w="med" len="med"/>
+                    </a:lnT>
+                    <a:lnB w="6350" cap="flat" cmpd="sng" algn="ctr">
+                      <a:solidFill>
+                        <a:srgbClr val="CACACA"/>
+                      </a:solidFill>
+                      <a:prstDash val="solid"/>
+                      <a:round/>
+                      <a:headEnd type="none" w="med" len="med"/>
+                      <a:tailEnd type="none" w="med" len="med"/>
+                    </a:lnB>
+                  </a:tcPr>
+                </a:tc>
+              </a:tr>
+            </a:tbl>
+          </a:graphicData>
+        </a:graphic>
+      </p:graphicFrame>
+      <p:sp>
+        <p:nvSpPr>
+          <p:cNvPr id="6" name="Shape 3"/>
+          <p:cNvSpPr/>
+          <p:nvPr/>
+        </p:nvSpPr>
+        <p:spPr>
+          <a:xfrm>
+            <a:off x="621792" y="3675888"/>
+            <a:ext cx="146304" cy="146304"/>
+          </a:xfrm>
+          <a:prstGeom prst="rect">
+            <a:avLst/>
+          </a:prstGeom>
+          <a:solidFill>
+            <a:srgbClr val="FFD200"/>
+          </a:solidFill>
+          <a:ln w="12700">
+            <a:solidFill>
+              <a:srgbClr val="CACACA"/>
+            </a:solidFill>
+            <a:prstDash val="solid"/>
+          </a:ln>
+        </p:spPr>
+      </p:sp>
+      <p:sp>
+        <p:nvSpPr>
+          <p:cNvPr id="7" name="Text 4"/>
+          <p:cNvSpPr txBox="1"/>
+          <p:nvPr/>
+        </p:nvSpPr>
+        <p:spPr>
+          <a:xfrm>
+            <a:off x="841248" y="3621024"/>
+            <a:ext cx="3840480" cy="237744"/>
+          </a:xfrm>
+          <a:prstGeom prst="rect">
+            <a:avLst/>
+          </a:prstGeom>
+          <a:noFill/>
+          <a:ln/>
+        </p:spPr>
+        <p:txBody>
+          <a:bodyPr wrap="square" lIns="0" tIns="0" rIns="0" bIns="0" rtlCol="0" anchor="ctr"/>
+          <a:lstStyle/>
+          <a:p>
+            <a:pPr indent="0" marL="0">
+              <a:buNone/>
+            </a:pPr>
+            <a:r>
+              <a:rPr lang="en-US" sz="850" dirty="0">
+                <a:solidFill>
+                  <a:srgbClr val="818181"/>
+                </a:solidFill>
+                <a:latin typeface="Verdana" pitchFamily="34" charset="0"/>
+                <a:ea typeface="Verdana" pitchFamily="34" charset="-122"/>
+                <a:cs typeface="Verdana" pitchFamily="34" charset="-120"/>
+              </a:rPr>
+              <a:t>perímetro = segmento de empresas publicado</a:t>
+            </a:r>
+            <a:endParaRPr lang="en-US" sz="850" dirty="0"/>
+          </a:p>
+        </p:txBody>
+      </p:sp>
+      <p:sp>
+        <p:nvSpPr>
+          <p:cNvPr id="8" name="Shape 5"/>
+          <p:cNvSpPr/>
+          <p:nvPr/>
+        </p:nvSpPr>
+        <p:spPr>
+          <a:xfrm>
+            <a:off x="4782312" y="3675888"/>
+            <a:ext cx="146304" cy="146304"/>
+          </a:xfrm>
+          <a:prstGeom prst="rect">
+            <a:avLst/>
+          </a:prstGeom>
+          <a:solidFill>
+            <a:srgbClr val="FFF4C2"/>
+          </a:solidFill>
+          <a:ln w="12700">
+            <a:solidFill>
+              <a:srgbClr val="CACACA"/>
+            </a:solidFill>
+            <a:prstDash val="solid"/>
+          </a:ln>
+        </p:spPr>
+      </p:sp>
+      <p:sp>
+        <p:nvSpPr>
+          <p:cNvPr id="9" name="Text 6"/>
+          <p:cNvSpPr txBox="1"/>
+          <p:nvPr/>
+        </p:nvSpPr>
+        <p:spPr>
+          <a:xfrm>
+            <a:off x="5001768" y="3621024"/>
+            <a:ext cx="3840480" cy="237744"/>
+          </a:xfrm>
+          <a:prstGeom prst="rect">
+            <a:avLst/>
+          </a:prstGeom>
+          <a:noFill/>
+          <a:ln/>
+        </p:spPr>
+        <p:txBody>
+          <a:bodyPr wrap="square" lIns="0" tIns="0" rIns="0" bIns="0" rtlCol="0" anchor="ctr"/>
+          <a:lstStyle/>
+          <a:p>
+            <a:pPr indent="0" marL="0">
+              <a:buNone/>
+            </a:pPr>
+            <a:r>
+              <a:rPr lang="en-US" sz="850" dirty="0">
+                <a:solidFill>
+                  <a:srgbClr val="818181"/>
+                </a:solidFill>
+                <a:latin typeface="Verdana" pitchFamily="34" charset="0"/>
+                <a:ea typeface="Verdana" pitchFamily="34" charset="-122"/>
+                <a:cs typeface="Verdana" pitchFamily="34" charset="-120"/>
+              </a:rPr>
+              <a:t>perímetro = grupo, no segmento</a:t>
+            </a:r>
+            <a:endParaRPr lang="en-US" sz="850" dirty="0"/>
+          </a:p>
+        </p:txBody>
+      </p:sp>
+      <p:sp>
+        <p:nvSpPr>
+          <p:cNvPr id="10" name="Shape 7"/>
+          <p:cNvSpPr/>
+          <p:nvPr/>
+        </p:nvSpPr>
+        <p:spPr>
+          <a:xfrm>
+            <a:off x="621792" y="3986784"/>
+            <a:ext cx="5321808" cy="1755648"/>
+          </a:xfrm>
+          <a:prstGeom prst="roundRect">
+            <a:avLst>
+              <a:gd name="adj" fmla="val 2083"/>
+            </a:avLst>
+          </a:prstGeom>
+          <a:solidFill>
+            <a:srgbClr val="FFF4C2"/>
+          </a:solidFill>
+          <a:ln w="12700">
+            <a:solidFill>
+              <a:srgbClr val="FFE066"/>
+            </a:solidFill>
+            <a:prstDash val="solid"/>
+          </a:ln>
+        </p:spPr>
+      </p:sp>
+      <p:sp>
+        <p:nvSpPr>
+          <p:cNvPr id="11" name="Shape 8"/>
+          <p:cNvSpPr/>
+          <p:nvPr/>
+        </p:nvSpPr>
+        <p:spPr>
+          <a:xfrm>
+            <a:off x="621792" y="3986784"/>
+            <a:ext cx="64008" cy="1755648"/>
+          </a:xfrm>
+          <a:prstGeom prst="rect">
+            <a:avLst/>
+          </a:prstGeom>
+          <a:solidFill>
+            <a:srgbClr val="F56600"/>
+          </a:solidFill>
+          <a:ln w="12700">
+            <a:solidFill>
+              <a:srgbClr val="F56600"/>
+            </a:solidFill>
+            <a:prstDash val="solid"/>
+          </a:ln>
+        </p:spPr>
+      </p:sp>
+      <p:sp>
+        <p:nvSpPr>
+          <p:cNvPr id="12" name="Text 9"/>
+          <p:cNvSpPr txBox="1"/>
+          <p:nvPr/>
+        </p:nvSpPr>
+        <p:spPr>
+          <a:xfrm>
+            <a:off x="841248" y="4078224"/>
+            <a:ext cx="4937760" cy="219456"/>
+          </a:xfrm>
+          <a:prstGeom prst="rect">
+            <a:avLst/>
+          </a:prstGeom>
+          <a:noFill/>
+          <a:ln/>
+        </p:spPr>
+        <p:txBody>
+          <a:bodyPr wrap="square" lIns="0" tIns="0" rIns="0" bIns="0" rtlCol="0" anchor="ctr"/>
+          <a:lstStyle/>
+          <a:p>
+            <a:pPr indent="0" marL="0">
+              <a:buNone/>
+            </a:pPr>
+            <a:r>
+              <a:rPr lang="en-US" sz="1100" b="1" dirty="0">
+                <a:solidFill>
+                  <a:srgbClr val="2B2B2B"/>
+                </a:solidFill>
+                <a:latin typeface="Verdana" pitchFamily="34" charset="0"/>
+                <a:ea typeface="Verdana" pitchFamily="34" charset="-122"/>
+                <a:cs typeface="Verdana" pitchFamily="34" charset="-120"/>
+              </a:rPr>
+              <a:t>El supuesto de 87 pb no infla el modelo</a:t>
+            </a:r>
+            <a:endParaRPr lang="en-US" sz="1100" dirty="0"/>
+          </a:p>
+        </p:txBody>
+      </p:sp>
+      <p:sp>
+        <p:nvSpPr>
+          <p:cNvPr id="13" name="Text 10"/>
+          <p:cNvSpPr txBox="1"/>
+          <p:nvPr/>
+        </p:nvSpPr>
+        <p:spPr>
+          <a:xfrm>
+            <a:off x="841248" y="4315968"/>
+            <a:ext cx="4937760" cy="1316736"/>
+          </a:xfrm>
+          <a:prstGeom prst="rect">
+            <a:avLst/>
+          </a:prstGeom>
+          <a:noFill/>
+          <a:ln/>
+        </p:spPr>
+        <p:txBody>
+          <a:bodyPr wrap="square" lIns="0" tIns="0" rIns="0" bIns="0" rtlCol="0" anchor="ctr"/>
+          <a:lstStyle/>
+          <a:p>
+            <a:pPr indent="0" marL="0">
+              <a:buNone/>
+            </a:pPr>
+            <a:r>
+              <a:rPr lang="en-US" sz="850" dirty="0">
+                <a:solidFill>
+                  <a:srgbClr val="2B2B2B"/>
+                </a:solidFill>
+                <a:latin typeface="Verdana" pitchFamily="34" charset="0"/>
+                <a:ea typeface="Verdana" pitchFamily="34" charset="-122"/>
+                <a:cs typeface="Verdana" pitchFamily="34" charset="-120"/>
+              </a:rPr>
+              <a:t>La cuenta de la lámina 7 supone 0,87 % de comisiones sobre el saldo medio. Los dos únicos segmentos de empresas publicados ganan MÁS: Commerzbank 1,22 % y ABN AMRO 0,99 %. El supuesto está en el extremo bajo de lo que una franquicia de banca de empresas cobra por euro prestado, así que no está regalando ROE al modelo.</a:t>
+            </a:r>
+            <a:endParaRPr lang="en-US" sz="850" dirty="0"/>
+          </a:p>
+        </p:txBody>
+      </p:sp>
+      <p:sp>
+        <p:nvSpPr>
+          <p:cNvPr id="14" name="Shape 11"/>
+          <p:cNvSpPr/>
+          <p:nvPr/>
+        </p:nvSpPr>
+        <p:spPr>
+          <a:xfrm>
+            <a:off x="6245352" y="3986784"/>
+            <a:ext cx="5321808" cy="1755648"/>
+          </a:xfrm>
+          <a:prstGeom prst="roundRect">
+            <a:avLst>
+              <a:gd name="adj" fmla="val 2083"/>
+            </a:avLst>
+          </a:prstGeom>
+          <a:solidFill>
+            <a:srgbClr val="FFD6BA"/>
+          </a:solidFill>
+          <a:ln w="12700">
+            <a:solidFill>
+              <a:srgbClr val="FFD6BA"/>
+            </a:solidFill>
+            <a:prstDash val="solid"/>
+          </a:ln>
+        </p:spPr>
+      </p:sp>
+      <p:sp>
+        <p:nvSpPr>
+          <p:cNvPr id="15" name="Shape 12"/>
+          <p:cNvSpPr/>
+          <p:nvPr/>
+        </p:nvSpPr>
+        <p:spPr>
+          <a:xfrm>
+            <a:off x="6245352" y="3986784"/>
+            <a:ext cx="64008" cy="1755648"/>
+          </a:xfrm>
+          <a:prstGeom prst="rect">
+            <a:avLst/>
+          </a:prstGeom>
+          <a:solidFill>
+            <a:srgbClr val="F56600"/>
+          </a:solidFill>
+          <a:ln w="12700">
+            <a:solidFill>
+              <a:srgbClr val="F56600"/>
+            </a:solidFill>
+            <a:prstDash val="solid"/>
+          </a:ln>
+        </p:spPr>
+      </p:sp>
+      <p:sp>
+        <p:nvSpPr>
+          <p:cNvPr id="16" name="Text 13"/>
+          <p:cNvSpPr txBox="1"/>
+          <p:nvPr/>
+        </p:nvSpPr>
+        <p:spPr>
+          <a:xfrm>
+            <a:off x="6464808" y="4078224"/>
+            <a:ext cx="4937760" cy="219456"/>
+          </a:xfrm>
+          <a:prstGeom prst="rect">
+            <a:avLst/>
+          </a:prstGeom>
+          <a:noFill/>
+          <a:ln/>
+        </p:spPr>
+        <p:txBody>
+          <a:bodyPr wrap="square" lIns="0" tIns="0" rIns="0" bIns="0" rtlCol="0" anchor="ctr"/>
+          <a:lstStyle/>
+          <a:p>
+            <a:pPr indent="0" marL="0">
+              <a:buNone/>
+            </a:pPr>
+            <a:r>
+              <a:rPr lang="en-US" sz="1100" b="1" dirty="0">
+                <a:solidFill>
+                  <a:srgbClr val="2B2B2B"/>
+                </a:solidFill>
+                <a:latin typeface="Verdana" pitchFamily="34" charset="0"/>
+                <a:ea typeface="Verdana" pitchFamily="34" charset="-122"/>
+                <a:cs typeface="Verdana" pitchFamily="34" charset="-120"/>
+              </a:rPr>
+              <a:t>«Ingresos / inversión» NO es un margen de préstamo</a:t>
+            </a:r>
+            <a:endParaRPr lang="en-US" sz="1100" dirty="0"/>
+          </a:p>
+        </p:txBody>
+      </p:sp>
+      <p:sp>
+        <p:nvSpPr>
+          <p:cNvPr id="17" name="Text 14"/>
+          <p:cNvSpPr txBox="1"/>
+          <p:nvPr/>
+        </p:nvSpPr>
+        <p:spPr>
+          <a:xfrm>
+            <a:off x="6464808" y="4315968"/>
+            <a:ext cx="4937760" cy="1316736"/>
+          </a:xfrm>
+          <a:prstGeom prst="rect">
+            <a:avLst/>
+          </a:prstGeom>
+          <a:noFill/>
+          <a:ln/>
+        </p:spPr>
+        <p:txBody>
+          <a:bodyPr wrap="square" lIns="0" tIns="0" rIns="0" bIns="0" rtlCol="0" anchor="ctr"/>
+          <a:lstStyle/>
+          <a:p>
+            <a:pPr indent="0" marL="0">
+              <a:buNone/>
+            </a:pPr>
+            <a:r>
+              <a:rPr lang="en-US" sz="850" dirty="0">
+                <a:solidFill>
+                  <a:srgbClr val="2B2B2B"/>
+                </a:solidFill>
+                <a:latin typeface="Verdana" pitchFamily="34" charset="0"/>
+                <a:ea typeface="Verdana" pitchFamily="34" charset="-122"/>
+                <a:cs typeface="Verdana" pitchFamily="34" charset="-120"/>
+              </a:rPr>
+              <a:t>El numerador es el ingreso de TODO el segmento -margen de depósitos y transaccional incluidos- y el denominador solo los préstamos. Banca dei Territori lo enseña en caricatura: 5,64 % sobre préstamos, porque lleva dentro gestión de activos y seguros. Por eso BPER, que es grupo, dobla en comisiones (2,09 %) a los segmentos de empresas.</a:t>
+            </a:r>
+            <a:endParaRPr lang="en-US" sz="850" dirty="0"/>
+          </a:p>
+        </p:txBody>
+      </p:sp>
+      <p:sp>
+        <p:nvSpPr>
+          <p:cNvPr id="18" name="Text 15"/>
+          <p:cNvSpPr txBox="1"/>
+          <p:nvPr/>
+        </p:nvSpPr>
+        <p:spPr>
+          <a:xfrm>
+            <a:off x="621792" y="6053328"/>
+            <a:ext cx="10945368" cy="475488"/>
+          </a:xfrm>
+          <a:prstGeom prst="rect">
+            <a:avLst/>
+          </a:prstGeom>
+          <a:noFill/>
+          <a:ln/>
+        </p:spPr>
+        <p:txBody>
+          <a:bodyPr wrap="square" lIns="0" tIns="0" rIns="0" bIns="0" rtlCol="0" anchor="ctr"/>
+          <a:lstStyle/>
+          <a:p>
+            <a:pPr indent="0" marL="0">
+              <a:buNone/>
+            </a:pPr>
+            <a:r>
+              <a:rPr lang="en-US" sz="700" i="1" dirty="0">
+                <a:solidFill>
+                  <a:srgbClr val="818181"/>
+                </a:solidFill>
+                <a:latin typeface="Verdana" pitchFamily="34" charset="0"/>
+                <a:ea typeface="Verdana" pitchFamily="34" charset="-122"/>
+                <a:cs typeface="Verdana" pitchFamily="34" charset="-120"/>
+              </a:rPr>
+              <a:t>Comunicado Q2 2026 de Commerzbank; informe intermedio Q2 2026 de ABN AMRO; resultados 1S26 de Intesa Sanpaolo e informe semestral a 30-jun-2026 (p. 72) para los préstamos de Banca dei Territori; Actividad y Resultados 1S26 de CaixaBank; resultados 1S26 de BPER e informe intermedio consolidado a 30-jun-2026 (p. 34) para los préstamos. Denominador: cartera media en Commerzbank; media de los dos cierres en Intesa y BPER; saldo final en ABN AMRO y CaixaBank. CaixaBank lo publica BRUTO y el resto NETO: con su mora del 1,78 %, el neto subiría sus ratios uno o dos puntos básicos. Datos en comparables_bancos/comparables_ratios.csv.</a:t>
+            </a:r>
+            <a:endParaRPr lang="en-US" sz="700" dirty="0"/>
+          </a:p>
+        </p:txBody>
+      </p:sp>
+    </p:spTree>
+  </p:cSld>
+  <p:clrMapOvr>
+    <a:masterClrMapping/>
+  </p:clrMapOvr>
+</p:sld>
+</file>
+
 <file path=ppt/theme/theme1.xml><?xml version="1.0" encoding="utf-8"?>
 <a:theme xmlns:a="http://schemas.openxmlformats.org/drawingml/2006/main" name="Office Theme">
   <a:themeElements>

--- a/pres/rentabilidad_pyme_laminas_adicionales.pptx
+++ b/pres/rentabilidad_pyme_laminas_adicionales.pptx
@@ -11,9 +11,10 @@
     <p:sldId id="259" r:id="rId5"/>
     <p:sldId id="260" r:id="rId6"/>
     <p:sldId id="261" r:id="rId7"/>
+    <p:sldId id="262" r:id="rId8"/>
   </p:sldIdLst>
   <p:notesMasterIdLst>
-    <p:notesMasterId r:id="rId8"/>
+    <p:notesMasterId r:id="rId9"/>
   </p:notesMasterIdLst>
   <p:sldSz cx="12192000" cy="6858000"/>
   <p:notesSz cx="6858000" cy="12192000"/>
@@ -3058,6 +3059,94 @@
 </p:notes>
 </file>
 
+<file path=ppt/notesSlides/notesSlide7.xml><?xml version="1.0" encoding="utf-8"?>
+<p:notes xmlns:a="http://schemas.openxmlformats.org/drawingml/2006/main" xmlns:r="http://schemas.openxmlformats.org/officeDocument/2006/relationships" xmlns:p="http://schemas.openxmlformats.org/presentationml/2006/main">
+  <p:cSld>
+    <p:spTree>
+      <p:nvGrpSpPr>
+        <p:cNvPr id="1" name=""/>
+        <p:cNvGrpSpPr/>
+        <p:nvPr/>
+      </p:nvGrpSpPr>
+      <p:grpSpPr>
+        <a:xfrm>
+          <a:off x="0" y="0"/>
+          <a:ext cx="0" cy="0"/>
+          <a:chOff x="0" y="0"/>
+          <a:chExt cx="0" cy="0"/>
+        </a:xfrm>
+      </p:grpSpPr>
+      <p:sp>
+        <p:nvSpPr>
+          <p:cNvPr id="2" name="Slide Image Placeholder 1"/>
+          <p:cNvSpPr>
+            <a:spLocks noGrp="1" noRot="1" noChangeAspect="1"/>
+          </p:cNvSpPr>
+          <p:nvPr>
+            <p:ph type="sldImg"/>
+          </p:nvPr>
+        </p:nvSpPr>
+        <p:spPr/>
+      </p:sp>
+      <p:sp>
+        <p:nvSpPr>
+          <p:cNvPr id="3" name="Notes Placeholder 2"/>
+          <p:cNvSpPr>
+            <a:spLocks noGrp="1"/>
+          </p:cNvSpPr>
+          <p:nvPr>
+            <p:ph type="body" idx="1"/>
+          </p:nvPr>
+        </p:nvSpPr>
+        <p:spPr/>
+        <p:txBody>
+          <a:bodyPr/>
+          <a:lstStyle/>
+          <a:p>
+            <a:r>
+              <a:rPr lang="en-US" dirty="0"/>
+              <a:t/>
+            </a:r>
+            <a:endParaRPr lang="en-US" dirty="0"/>
+          </a:p>
+        </p:txBody>
+      </p:sp>
+      <p:sp>
+        <p:nvSpPr>
+          <p:cNvPr id="4" name="Slide Number Placeholder 3"/>
+          <p:cNvSpPr>
+            <a:spLocks noGrp="1"/>
+          </p:cNvSpPr>
+          <p:nvPr>
+            <p:ph type="sldNum" sz="quarter" idx="10"/>
+          </p:nvPr>
+        </p:nvSpPr>
+        <p:spPr/>
+        <p:txBody>
+          <a:bodyPr/>
+          <a:lstStyle/>
+          <a:p>
+            <a:fld id="{F7021451-1387-4CA6-816F-3879F97B5CBC}" type="slidenum">
+              <a:rPr lang="en-US"/>
+              <a:t>7</a:t>
+            </a:fld>
+            <a:endParaRPr lang="en-US"/>
+          </a:p>
+        </p:txBody>
+      </p:sp>
+    </p:spTree>
+    <p:extLst>
+      <p:ext uri="{BB962C8B-B14F-4D97-AF65-F5344CB8AC3E}">
+        <p14:creationId xmlns:p14="http://schemas.microsoft.com/office/powerpoint/2010/main" val="1024086991"/>
+      </p:ext>
+    </p:extLst>
+  </p:cSld>
+  <p:clrMapOvr>
+    <a:masterClrMapping/>
+  </p:clrMapOvr>
+</p:notes>
+</file>
+
 <file path=ppt/slideLayouts/slideLayout1.xml><?xml version="1.0" encoding="utf-8"?>
 <p:sldLayout xmlns:a="http://schemas.openxmlformats.org/drawingml/2006/main" xmlns:r="http://schemas.openxmlformats.org/officeDocument/2006/relationships" xmlns:p="http://schemas.openxmlformats.org/presentationml/2006/main" preserve="1">
   <p:cSld name="DEFAULT">
@@ -20934,6 +21023,2144 @@
 </p:sld>
 </file>
 
+<file path=ppt/slides/slide7.xml><?xml version="1.0" encoding="utf-8"?>
+<p:sld xmlns:a="http://schemas.openxmlformats.org/drawingml/2006/main" xmlns:r="http://schemas.openxmlformats.org/officeDocument/2006/relationships" xmlns:p="http://schemas.openxmlformats.org/presentationml/2006/main">
+  <p:cSld name="Slide 7">
+    <p:bg>
+      <p:bgPr>
+        <a:solidFill>
+          <a:srgbClr val="FAFBFC"/>
+        </a:solidFill>
+      </p:bgPr>
+    </p:bg>
+    <p:spTree>
+      <p:nvGrpSpPr>
+        <p:cNvPr id="1" name=""/>
+        <p:cNvGrpSpPr/>
+        <p:nvPr/>
+      </p:nvGrpSpPr>
+      <p:grpSpPr>
+        <a:xfrm>
+          <a:off x="0" y="0"/>
+          <a:ext cx="0" cy="0"/>
+          <a:chOff x="0" y="0"/>
+          <a:chExt cx="0" cy="0"/>
+        </a:xfrm>
+      </p:grpSpPr>
+      <p:sp>
+        <p:nvSpPr>
+          <p:cNvPr id="2" name="Text 0"/>
+          <p:cNvSpPr txBox="1"/>
+          <p:nvPr/>
+        </p:nvSpPr>
+        <p:spPr>
+          <a:xfrm>
+            <a:off x="10040112" y="274320"/>
+            <a:ext cx="1600200" cy="256032"/>
+          </a:xfrm>
+          <a:prstGeom prst="rect">
+            <a:avLst/>
+          </a:prstGeom>
+          <a:noFill/>
+          <a:ln/>
+        </p:spPr>
+        <p:txBody>
+          <a:bodyPr wrap="square" lIns="0" tIns="0" rIns="0" bIns="0" rtlCol="0" anchor="ctr"/>
+          <a:lstStyle/>
+          <a:p>
+            <a:pPr algn="r" indent="0" marL="0">
+              <a:buNone/>
+            </a:pPr>
+            <a:r>
+              <a:rPr lang="en-US" sz="1300" b="1" dirty="0">
+                <a:solidFill>
+                  <a:srgbClr val="2B2B2B"/>
+                </a:solidFill>
+                <a:latin typeface="Verdana" pitchFamily="34" charset="0"/>
+                <a:ea typeface="Verdana" pitchFamily="34" charset="-122"/>
+                <a:cs typeface="Verdana" pitchFamily="34" charset="-120"/>
+              </a:rPr>
+              <a:t>bankinter</a:t>
+            </a:r>
+            <a:pPr algn="r" indent="0" marL="0">
+              <a:buNone/>
+            </a:pPr>
+            <a:r>
+              <a:rPr lang="en-US" sz="1300" b="1" dirty="0">
+                <a:solidFill>
+                  <a:srgbClr val="F56600"/>
+                </a:solidFill>
+                <a:latin typeface="Verdana" pitchFamily="34" charset="0"/>
+                <a:ea typeface="Verdana" pitchFamily="34" charset="-122"/>
+                <a:cs typeface="Verdana" pitchFamily="34" charset="-120"/>
+              </a:rPr>
+              <a:t>.</a:t>
+            </a:r>
+            <a:endParaRPr lang="en-US" sz="1300" dirty="0"/>
+          </a:p>
+        </p:txBody>
+      </p:sp>
+      <p:sp>
+        <p:nvSpPr>
+          <p:cNvPr id="3" name="Text 1"/>
+          <p:cNvSpPr txBox="1"/>
+          <p:nvPr/>
+        </p:nvSpPr>
+        <p:spPr>
+          <a:xfrm>
+            <a:off x="621792" y="420624"/>
+            <a:ext cx="9208008" cy="676656"/>
+          </a:xfrm>
+          <a:prstGeom prst="rect">
+            <a:avLst/>
+          </a:prstGeom>
+          <a:noFill/>
+          <a:ln/>
+        </p:spPr>
+        <p:txBody>
+          <a:bodyPr wrap="square" lIns="0" tIns="0" rIns="0" bIns="0" rtlCol="0" anchor="ctr"/>
+          <a:lstStyle/>
+          <a:p>
+            <a:pPr indent="0" marL="0">
+              <a:buNone/>
+            </a:pPr>
+            <a:r>
+              <a:rPr lang="en-US" sz="2200" b="1" dirty="0">
+                <a:solidFill>
+                  <a:srgbClr val="2B2B2B"/>
+                </a:solidFill>
+                <a:latin typeface="Verdana" pitchFamily="34" charset="0"/>
+                <a:ea typeface="Verdana" pitchFamily="34" charset="-122"/>
+                <a:cs typeface="Verdana" pitchFamily="34" charset="-120"/>
+              </a:rPr>
+              <a:t>Información, margen y riesgo de los siete mercados</a:t>
+            </a:r>
+            <a:endParaRPr lang="en-US" sz="2200" dirty="0"/>
+          </a:p>
+        </p:txBody>
+      </p:sp>
+      <p:sp>
+        <p:nvSpPr>
+          <p:cNvPr id="4" name="Text 2"/>
+          <p:cNvSpPr txBox="1"/>
+          <p:nvPr/>
+        </p:nvSpPr>
+        <p:spPr>
+          <a:xfrm>
+            <a:off x="621792" y="1060704"/>
+            <a:ext cx="10945368" cy="365760"/>
+          </a:xfrm>
+          <a:prstGeom prst="rect">
+            <a:avLst/>
+          </a:prstGeom>
+          <a:noFill/>
+          <a:ln/>
+        </p:spPr>
+        <p:txBody>
+          <a:bodyPr wrap="square" lIns="0" tIns="0" rIns="0" bIns="0" rtlCol="0" anchor="ctr"/>
+          <a:lstStyle/>
+          <a:p>
+            <a:pPr indent="0" marL="0">
+              <a:buNone/>
+            </a:pPr>
+            <a:r>
+              <a:rPr lang="en-US" sz="1050" dirty="0">
+                <a:solidFill>
+                  <a:srgbClr val="818181"/>
+                </a:solidFill>
+                <a:latin typeface="Verdana" pitchFamily="34" charset="0"/>
+                <a:ea typeface="Verdana" pitchFamily="34" charset="-122"/>
+                <a:cs typeface="Verdana" pitchFamily="34" charset="-120"/>
+              </a:rPr>
+              <a:t>Cada burbuja es un país · Eje horizontal: cuánto se puede saber del cliente antes de conceder · Eje vertical: margen bruto del préstamo PYME · Tamaño y color: coste del riesgo PD × LGD</a:t>
+            </a:r>
+            <a:endParaRPr lang="en-US" sz="1050" dirty="0"/>
+          </a:p>
+        </p:txBody>
+      </p:sp>
+      <p:sp>
+        <p:nvSpPr>
+          <p:cNvPr id="5" name="Shape 3"/>
+          <p:cNvSpPr/>
+          <p:nvPr/>
+        </p:nvSpPr>
+        <p:spPr>
+          <a:xfrm>
+            <a:off x="1481328" y="1755648"/>
+            <a:ext cx="6309360" cy="3474720"/>
+          </a:xfrm>
+          <a:prstGeom prst="rect">
+            <a:avLst/>
+          </a:prstGeom>
+          <a:solidFill>
+            <a:srgbClr val="FFFFFF"/>
+          </a:solidFill>
+          <a:ln w="9525">
+            <a:solidFill>
+              <a:srgbClr val="CACACA"/>
+            </a:solidFill>
+            <a:prstDash val="solid"/>
+          </a:ln>
+        </p:spPr>
+      </p:sp>
+      <p:sp>
+        <p:nvSpPr>
+          <p:cNvPr id="6" name="Shape 4"/>
+          <p:cNvSpPr/>
+          <p:nvPr/>
+        </p:nvSpPr>
+        <p:spPr>
+          <a:xfrm>
+            <a:off x="1481328" y="4882896"/>
+            <a:ext cx="6309360" cy="7315"/>
+          </a:xfrm>
+          <a:prstGeom prst="rect">
+            <a:avLst/>
+          </a:prstGeom>
+          <a:solidFill>
+            <a:srgbClr val="E5E5E5"/>
+          </a:solidFill>
+          <a:ln w="12700">
+            <a:solidFill>
+              <a:srgbClr val="E5E5E5"/>
+            </a:solidFill>
+            <a:prstDash val="solid"/>
+          </a:ln>
+        </p:spPr>
+      </p:sp>
+      <p:sp>
+        <p:nvSpPr>
+          <p:cNvPr id="7" name="Text 5"/>
+          <p:cNvSpPr txBox="1"/>
+          <p:nvPr/>
+        </p:nvSpPr>
+        <p:spPr>
+          <a:xfrm>
+            <a:off x="676656" y="4782312"/>
+            <a:ext cx="731520" cy="201168"/>
+          </a:xfrm>
+          <a:prstGeom prst="rect">
+            <a:avLst/>
+          </a:prstGeom>
+          <a:noFill/>
+          <a:ln/>
+        </p:spPr>
+        <p:txBody>
+          <a:bodyPr wrap="square" lIns="0" tIns="0" rIns="0" bIns="0" rtlCol="0" anchor="ctr"/>
+          <a:lstStyle/>
+          <a:p>
+            <a:pPr algn="r" indent="0" marL="0">
+              <a:buNone/>
+            </a:pPr>
+            <a:r>
+              <a:rPr lang="en-US" sz="850" dirty="0">
+                <a:solidFill>
+                  <a:srgbClr val="818181"/>
+                </a:solidFill>
+                <a:latin typeface="Verdana" pitchFamily="34" charset="0"/>
+                <a:ea typeface="Verdana" pitchFamily="34" charset="-122"/>
+                <a:cs typeface="Verdana" pitchFamily="34" charset="-120"/>
+              </a:rPr>
+              <a:t>3,5 %</a:t>
+            </a:r>
+            <a:endParaRPr lang="en-US" sz="850" dirty="0"/>
+          </a:p>
+        </p:txBody>
+      </p:sp>
+      <p:sp>
+        <p:nvSpPr>
+          <p:cNvPr id="8" name="Shape 6"/>
+          <p:cNvSpPr/>
+          <p:nvPr/>
+        </p:nvSpPr>
+        <p:spPr>
+          <a:xfrm>
+            <a:off x="1481328" y="4303776"/>
+            <a:ext cx="6309360" cy="7315"/>
+          </a:xfrm>
+          <a:prstGeom prst="rect">
+            <a:avLst/>
+          </a:prstGeom>
+          <a:solidFill>
+            <a:srgbClr val="E5E5E5"/>
+          </a:solidFill>
+          <a:ln w="12700">
+            <a:solidFill>
+              <a:srgbClr val="E5E5E5"/>
+            </a:solidFill>
+            <a:prstDash val="solid"/>
+          </a:ln>
+        </p:spPr>
+      </p:sp>
+      <p:sp>
+        <p:nvSpPr>
+          <p:cNvPr id="9" name="Text 7"/>
+          <p:cNvSpPr txBox="1"/>
+          <p:nvPr/>
+        </p:nvSpPr>
+        <p:spPr>
+          <a:xfrm>
+            <a:off x="676656" y="4203192"/>
+            <a:ext cx="731520" cy="201168"/>
+          </a:xfrm>
+          <a:prstGeom prst="rect">
+            <a:avLst/>
+          </a:prstGeom>
+          <a:noFill/>
+          <a:ln/>
+        </p:spPr>
+        <p:txBody>
+          <a:bodyPr wrap="square" lIns="0" tIns="0" rIns="0" bIns="0" rtlCol="0" anchor="ctr"/>
+          <a:lstStyle/>
+          <a:p>
+            <a:pPr algn="r" indent="0" marL="0">
+              <a:buNone/>
+            </a:pPr>
+            <a:r>
+              <a:rPr lang="en-US" sz="850" dirty="0">
+                <a:solidFill>
+                  <a:srgbClr val="818181"/>
+                </a:solidFill>
+                <a:latin typeface="Verdana" pitchFamily="34" charset="0"/>
+                <a:ea typeface="Verdana" pitchFamily="34" charset="-122"/>
+                <a:cs typeface="Verdana" pitchFamily="34" charset="-120"/>
+              </a:rPr>
+              <a:t>4,0 %</a:t>
+            </a:r>
+            <a:endParaRPr lang="en-US" sz="850" dirty="0"/>
+          </a:p>
+        </p:txBody>
+      </p:sp>
+      <p:sp>
+        <p:nvSpPr>
+          <p:cNvPr id="10" name="Shape 8"/>
+          <p:cNvSpPr/>
+          <p:nvPr/>
+        </p:nvSpPr>
+        <p:spPr>
+          <a:xfrm>
+            <a:off x="1481328" y="3724656"/>
+            <a:ext cx="6309360" cy="7315"/>
+          </a:xfrm>
+          <a:prstGeom prst="rect">
+            <a:avLst/>
+          </a:prstGeom>
+          <a:solidFill>
+            <a:srgbClr val="E5E5E5"/>
+          </a:solidFill>
+          <a:ln w="12700">
+            <a:solidFill>
+              <a:srgbClr val="E5E5E5"/>
+            </a:solidFill>
+            <a:prstDash val="solid"/>
+          </a:ln>
+        </p:spPr>
+      </p:sp>
+      <p:sp>
+        <p:nvSpPr>
+          <p:cNvPr id="11" name="Text 9"/>
+          <p:cNvSpPr txBox="1"/>
+          <p:nvPr/>
+        </p:nvSpPr>
+        <p:spPr>
+          <a:xfrm>
+            <a:off x="676656" y="3624072"/>
+            <a:ext cx="731520" cy="201168"/>
+          </a:xfrm>
+          <a:prstGeom prst="rect">
+            <a:avLst/>
+          </a:prstGeom>
+          <a:noFill/>
+          <a:ln/>
+        </p:spPr>
+        <p:txBody>
+          <a:bodyPr wrap="square" lIns="0" tIns="0" rIns="0" bIns="0" rtlCol="0" anchor="ctr"/>
+          <a:lstStyle/>
+          <a:p>
+            <a:pPr algn="r" indent="0" marL="0">
+              <a:buNone/>
+            </a:pPr>
+            <a:r>
+              <a:rPr lang="en-US" sz="850" dirty="0">
+                <a:solidFill>
+                  <a:srgbClr val="818181"/>
+                </a:solidFill>
+                <a:latin typeface="Verdana" pitchFamily="34" charset="0"/>
+                <a:ea typeface="Verdana" pitchFamily="34" charset="-122"/>
+                <a:cs typeface="Verdana" pitchFamily="34" charset="-120"/>
+              </a:rPr>
+              <a:t>4,5 %</a:t>
+            </a:r>
+            <a:endParaRPr lang="en-US" sz="850" dirty="0"/>
+          </a:p>
+        </p:txBody>
+      </p:sp>
+      <p:sp>
+        <p:nvSpPr>
+          <p:cNvPr id="12" name="Shape 10"/>
+          <p:cNvSpPr/>
+          <p:nvPr/>
+        </p:nvSpPr>
+        <p:spPr>
+          <a:xfrm>
+            <a:off x="1481328" y="3145536"/>
+            <a:ext cx="6309360" cy="7315"/>
+          </a:xfrm>
+          <a:prstGeom prst="rect">
+            <a:avLst/>
+          </a:prstGeom>
+          <a:solidFill>
+            <a:srgbClr val="E5E5E5"/>
+          </a:solidFill>
+          <a:ln w="12700">
+            <a:solidFill>
+              <a:srgbClr val="E5E5E5"/>
+            </a:solidFill>
+            <a:prstDash val="solid"/>
+          </a:ln>
+        </p:spPr>
+      </p:sp>
+      <p:sp>
+        <p:nvSpPr>
+          <p:cNvPr id="13" name="Text 11"/>
+          <p:cNvSpPr txBox="1"/>
+          <p:nvPr/>
+        </p:nvSpPr>
+        <p:spPr>
+          <a:xfrm>
+            <a:off x="676656" y="3044952"/>
+            <a:ext cx="731520" cy="201168"/>
+          </a:xfrm>
+          <a:prstGeom prst="rect">
+            <a:avLst/>
+          </a:prstGeom>
+          <a:noFill/>
+          <a:ln/>
+        </p:spPr>
+        <p:txBody>
+          <a:bodyPr wrap="square" lIns="0" tIns="0" rIns="0" bIns="0" rtlCol="0" anchor="ctr"/>
+          <a:lstStyle/>
+          <a:p>
+            <a:pPr algn="r" indent="0" marL="0">
+              <a:buNone/>
+            </a:pPr>
+            <a:r>
+              <a:rPr lang="en-US" sz="850" dirty="0">
+                <a:solidFill>
+                  <a:srgbClr val="818181"/>
+                </a:solidFill>
+                <a:latin typeface="Verdana" pitchFamily="34" charset="0"/>
+                <a:ea typeface="Verdana" pitchFamily="34" charset="-122"/>
+                <a:cs typeface="Verdana" pitchFamily="34" charset="-120"/>
+              </a:rPr>
+              <a:t>5,0 %</a:t>
+            </a:r>
+            <a:endParaRPr lang="en-US" sz="850" dirty="0"/>
+          </a:p>
+        </p:txBody>
+      </p:sp>
+      <p:sp>
+        <p:nvSpPr>
+          <p:cNvPr id="14" name="Shape 12"/>
+          <p:cNvSpPr/>
+          <p:nvPr/>
+        </p:nvSpPr>
+        <p:spPr>
+          <a:xfrm>
+            <a:off x="1481328" y="2566416"/>
+            <a:ext cx="6309360" cy="7315"/>
+          </a:xfrm>
+          <a:prstGeom prst="rect">
+            <a:avLst/>
+          </a:prstGeom>
+          <a:solidFill>
+            <a:srgbClr val="E5E5E5"/>
+          </a:solidFill>
+          <a:ln w="12700">
+            <a:solidFill>
+              <a:srgbClr val="E5E5E5"/>
+            </a:solidFill>
+            <a:prstDash val="solid"/>
+          </a:ln>
+        </p:spPr>
+      </p:sp>
+      <p:sp>
+        <p:nvSpPr>
+          <p:cNvPr id="15" name="Text 13"/>
+          <p:cNvSpPr txBox="1"/>
+          <p:nvPr/>
+        </p:nvSpPr>
+        <p:spPr>
+          <a:xfrm>
+            <a:off x="676656" y="2465832"/>
+            <a:ext cx="731520" cy="201168"/>
+          </a:xfrm>
+          <a:prstGeom prst="rect">
+            <a:avLst/>
+          </a:prstGeom>
+          <a:noFill/>
+          <a:ln/>
+        </p:spPr>
+        <p:txBody>
+          <a:bodyPr wrap="square" lIns="0" tIns="0" rIns="0" bIns="0" rtlCol="0" anchor="ctr"/>
+          <a:lstStyle/>
+          <a:p>
+            <a:pPr algn="r" indent="0" marL="0">
+              <a:buNone/>
+            </a:pPr>
+            <a:r>
+              <a:rPr lang="en-US" sz="850" dirty="0">
+                <a:solidFill>
+                  <a:srgbClr val="818181"/>
+                </a:solidFill>
+                <a:latin typeface="Verdana" pitchFamily="34" charset="0"/>
+                <a:ea typeface="Verdana" pitchFamily="34" charset="-122"/>
+                <a:cs typeface="Verdana" pitchFamily="34" charset="-120"/>
+              </a:rPr>
+              <a:t>5,5 %</a:t>
+            </a:r>
+            <a:endParaRPr lang="en-US" sz="850" dirty="0"/>
+          </a:p>
+        </p:txBody>
+      </p:sp>
+      <p:sp>
+        <p:nvSpPr>
+          <p:cNvPr id="16" name="Shape 14"/>
+          <p:cNvSpPr/>
+          <p:nvPr/>
+        </p:nvSpPr>
+        <p:spPr>
+          <a:xfrm>
+            <a:off x="1481328" y="1987296"/>
+            <a:ext cx="6309360" cy="7315"/>
+          </a:xfrm>
+          <a:prstGeom prst="rect">
+            <a:avLst/>
+          </a:prstGeom>
+          <a:solidFill>
+            <a:srgbClr val="E5E5E5"/>
+          </a:solidFill>
+          <a:ln w="12700">
+            <a:solidFill>
+              <a:srgbClr val="E5E5E5"/>
+            </a:solidFill>
+            <a:prstDash val="solid"/>
+          </a:ln>
+        </p:spPr>
+      </p:sp>
+      <p:sp>
+        <p:nvSpPr>
+          <p:cNvPr id="17" name="Text 15"/>
+          <p:cNvSpPr txBox="1"/>
+          <p:nvPr/>
+        </p:nvSpPr>
+        <p:spPr>
+          <a:xfrm>
+            <a:off x="676656" y="1886712"/>
+            <a:ext cx="731520" cy="201168"/>
+          </a:xfrm>
+          <a:prstGeom prst="rect">
+            <a:avLst/>
+          </a:prstGeom>
+          <a:noFill/>
+          <a:ln/>
+        </p:spPr>
+        <p:txBody>
+          <a:bodyPr wrap="square" lIns="0" tIns="0" rIns="0" bIns="0" rtlCol="0" anchor="ctr"/>
+          <a:lstStyle/>
+          <a:p>
+            <a:pPr algn="r" indent="0" marL="0">
+              <a:buNone/>
+            </a:pPr>
+            <a:r>
+              <a:rPr lang="en-US" sz="850" dirty="0">
+                <a:solidFill>
+                  <a:srgbClr val="818181"/>
+                </a:solidFill>
+                <a:latin typeface="Verdana" pitchFamily="34" charset="0"/>
+                <a:ea typeface="Verdana" pitchFamily="34" charset="-122"/>
+                <a:cs typeface="Verdana" pitchFamily="34" charset="-120"/>
+              </a:rPr>
+              <a:t>6,0 %</a:t>
+            </a:r>
+            <a:endParaRPr lang="en-US" sz="850" dirty="0"/>
+          </a:p>
+        </p:txBody>
+      </p:sp>
+      <p:sp>
+        <p:nvSpPr>
+          <p:cNvPr id="18" name="Text 16"/>
+          <p:cNvSpPr txBox="1"/>
+          <p:nvPr/>
+        </p:nvSpPr>
+        <p:spPr>
+          <a:xfrm>
+            <a:off x="2067375" y="5285232"/>
+            <a:ext cx="548640" cy="201168"/>
+          </a:xfrm>
+          <a:prstGeom prst="rect">
+            <a:avLst/>
+          </a:prstGeom>
+          <a:noFill/>
+          <a:ln/>
+        </p:spPr>
+        <p:txBody>
+          <a:bodyPr wrap="square" lIns="0" tIns="0" rIns="0" bIns="0" rtlCol="0" anchor="ctr"/>
+          <a:lstStyle/>
+          <a:p>
+            <a:pPr algn="ctr" indent="0" marL="0">
+              <a:buNone/>
+            </a:pPr>
+            <a:r>
+              <a:rPr lang="en-US" sz="850" dirty="0">
+                <a:solidFill>
+                  <a:srgbClr val="818181"/>
+                </a:solidFill>
+                <a:latin typeface="Verdana" pitchFamily="34" charset="0"/>
+                <a:ea typeface="Verdana" pitchFamily="34" charset="-122"/>
+                <a:cs typeface="Verdana" pitchFamily="34" charset="-120"/>
+              </a:rPr>
+              <a:t>20</a:t>
+            </a:r>
+            <a:endParaRPr lang="en-US" sz="850" dirty="0"/>
+          </a:p>
+        </p:txBody>
+      </p:sp>
+      <p:sp>
+        <p:nvSpPr>
+          <p:cNvPr id="19" name="Text 17"/>
+          <p:cNvSpPr txBox="1"/>
+          <p:nvPr/>
+        </p:nvSpPr>
+        <p:spPr>
+          <a:xfrm>
+            <a:off x="3501321" y="5285232"/>
+            <a:ext cx="548640" cy="201168"/>
+          </a:xfrm>
+          <a:prstGeom prst="rect">
+            <a:avLst/>
+          </a:prstGeom>
+          <a:noFill/>
+          <a:ln/>
+        </p:spPr>
+        <p:txBody>
+          <a:bodyPr wrap="square" lIns="0" tIns="0" rIns="0" bIns="0" rtlCol="0" anchor="ctr"/>
+          <a:lstStyle/>
+          <a:p>
+            <a:pPr algn="ctr" indent="0" marL="0">
+              <a:buNone/>
+            </a:pPr>
+            <a:r>
+              <a:rPr lang="en-US" sz="850" dirty="0">
+                <a:solidFill>
+                  <a:srgbClr val="818181"/>
+                </a:solidFill>
+                <a:latin typeface="Verdana" pitchFamily="34" charset="0"/>
+                <a:ea typeface="Verdana" pitchFamily="34" charset="-122"/>
+                <a:cs typeface="Verdana" pitchFamily="34" charset="-120"/>
+              </a:rPr>
+              <a:t>40</a:t>
+            </a:r>
+            <a:endParaRPr lang="en-US" sz="850" dirty="0"/>
+          </a:p>
+        </p:txBody>
+      </p:sp>
+      <p:sp>
+        <p:nvSpPr>
+          <p:cNvPr id="20" name="Text 18"/>
+          <p:cNvSpPr txBox="1"/>
+          <p:nvPr/>
+        </p:nvSpPr>
+        <p:spPr>
+          <a:xfrm>
+            <a:off x="4935266" y="5285232"/>
+            <a:ext cx="548640" cy="201168"/>
+          </a:xfrm>
+          <a:prstGeom prst="rect">
+            <a:avLst/>
+          </a:prstGeom>
+          <a:noFill/>
+          <a:ln/>
+        </p:spPr>
+        <p:txBody>
+          <a:bodyPr wrap="square" lIns="0" tIns="0" rIns="0" bIns="0" rtlCol="0" anchor="ctr"/>
+          <a:lstStyle/>
+          <a:p>
+            <a:pPr algn="ctr" indent="0" marL="0">
+              <a:buNone/>
+            </a:pPr>
+            <a:r>
+              <a:rPr lang="en-US" sz="850" dirty="0">
+                <a:solidFill>
+                  <a:srgbClr val="818181"/>
+                </a:solidFill>
+                <a:latin typeface="Verdana" pitchFamily="34" charset="0"/>
+                <a:ea typeface="Verdana" pitchFamily="34" charset="-122"/>
+                <a:cs typeface="Verdana" pitchFamily="34" charset="-120"/>
+              </a:rPr>
+              <a:t>60</a:t>
+            </a:r>
+            <a:endParaRPr lang="en-US" sz="850" dirty="0"/>
+          </a:p>
+        </p:txBody>
+      </p:sp>
+      <p:sp>
+        <p:nvSpPr>
+          <p:cNvPr id="21" name="Text 19"/>
+          <p:cNvSpPr txBox="1"/>
+          <p:nvPr/>
+        </p:nvSpPr>
+        <p:spPr>
+          <a:xfrm>
+            <a:off x="6369212" y="5285232"/>
+            <a:ext cx="548640" cy="201168"/>
+          </a:xfrm>
+          <a:prstGeom prst="rect">
+            <a:avLst/>
+          </a:prstGeom>
+          <a:noFill/>
+          <a:ln/>
+        </p:spPr>
+        <p:txBody>
+          <a:bodyPr wrap="square" lIns="0" tIns="0" rIns="0" bIns="0" rtlCol="0" anchor="ctr"/>
+          <a:lstStyle/>
+          <a:p>
+            <a:pPr algn="ctr" indent="0" marL="0">
+              <a:buNone/>
+            </a:pPr>
+            <a:r>
+              <a:rPr lang="en-US" sz="850" dirty="0">
+                <a:solidFill>
+                  <a:srgbClr val="818181"/>
+                </a:solidFill>
+                <a:latin typeface="Verdana" pitchFamily="34" charset="0"/>
+                <a:ea typeface="Verdana" pitchFamily="34" charset="-122"/>
+                <a:cs typeface="Verdana" pitchFamily="34" charset="-120"/>
+              </a:rPr>
+              <a:t>80</a:t>
+            </a:r>
+            <a:endParaRPr lang="en-US" sz="850" dirty="0"/>
+          </a:p>
+        </p:txBody>
+      </p:sp>
+      <p:sp>
+        <p:nvSpPr>
+          <p:cNvPr id="22" name="Shape 20"/>
+          <p:cNvSpPr/>
+          <p:nvPr/>
+        </p:nvSpPr>
+        <p:spPr>
+          <a:xfrm>
+            <a:off x="5424678" y="1755648"/>
+            <a:ext cx="10973" cy="3474720"/>
+          </a:xfrm>
+          <a:prstGeom prst="rect">
+            <a:avLst/>
+          </a:prstGeom>
+          <a:solidFill>
+            <a:srgbClr val="A1A1A1"/>
+          </a:solidFill>
+          <a:ln w="12700">
+            <a:solidFill>
+              <a:srgbClr val="A1A1A1"/>
+            </a:solidFill>
+            <a:prstDash val="solid"/>
+          </a:ln>
+        </p:spPr>
+      </p:sp>
+      <p:sp>
+        <p:nvSpPr>
+          <p:cNvPr id="23" name="Shape 21"/>
+          <p:cNvSpPr/>
+          <p:nvPr/>
+        </p:nvSpPr>
+        <p:spPr>
+          <a:xfrm>
+            <a:off x="1481328" y="4002634"/>
+            <a:ext cx="6309360" cy="10973"/>
+          </a:xfrm>
+          <a:prstGeom prst="rect">
+            <a:avLst/>
+          </a:prstGeom>
+          <a:solidFill>
+            <a:srgbClr val="A1A1A1"/>
+          </a:solidFill>
+          <a:ln w="12700">
+            <a:solidFill>
+              <a:srgbClr val="A1A1A1"/>
+            </a:solidFill>
+            <a:prstDash val="solid"/>
+          </a:ln>
+        </p:spPr>
+      </p:sp>
+      <p:sp>
+        <p:nvSpPr>
+          <p:cNvPr id="24" name="Text 22"/>
+          <p:cNvSpPr txBox="1"/>
+          <p:nvPr/>
+        </p:nvSpPr>
+        <p:spPr>
+          <a:xfrm>
+            <a:off x="5479542" y="5010912"/>
+            <a:ext cx="731520" cy="182880"/>
+          </a:xfrm>
+          <a:prstGeom prst="rect">
+            <a:avLst/>
+          </a:prstGeom>
+          <a:noFill/>
+          <a:ln/>
+        </p:spPr>
+        <p:txBody>
+          <a:bodyPr wrap="square" lIns="0" tIns="0" rIns="0" bIns="0" rtlCol="0" anchor="ctr"/>
+          <a:lstStyle/>
+          <a:p>
+            <a:pPr indent="0" marL="0">
+              <a:buNone/>
+            </a:pPr>
+            <a:r>
+              <a:rPr lang="en-US" sz="750" dirty="0">
+                <a:solidFill>
+                  <a:srgbClr val="A1A1A1"/>
+                </a:solidFill>
+                <a:latin typeface="Verdana" pitchFamily="34" charset="0"/>
+                <a:ea typeface="Verdana" pitchFamily="34" charset="-122"/>
+                <a:cs typeface="Verdana" pitchFamily="34" charset="-120"/>
+              </a:rPr>
+              <a:t>media 63</a:t>
+            </a:r>
+            <a:endParaRPr lang="en-US" sz="750" dirty="0"/>
+          </a:p>
+        </p:txBody>
+      </p:sp>
+      <p:sp>
+        <p:nvSpPr>
+          <p:cNvPr id="25" name="Text 23"/>
+          <p:cNvSpPr txBox="1"/>
+          <p:nvPr/>
+        </p:nvSpPr>
+        <p:spPr>
+          <a:xfrm>
+            <a:off x="1536192" y="3801466"/>
+            <a:ext cx="1005840" cy="182880"/>
+          </a:xfrm>
+          <a:prstGeom prst="rect">
+            <a:avLst/>
+          </a:prstGeom>
+          <a:noFill/>
+          <a:ln/>
+        </p:spPr>
+        <p:txBody>
+          <a:bodyPr wrap="square" lIns="0" tIns="0" rIns="0" bIns="0" rtlCol="0" anchor="ctr"/>
+          <a:lstStyle/>
+          <a:p>
+            <a:pPr indent="0" marL="0">
+              <a:buNone/>
+            </a:pPr>
+            <a:r>
+              <a:rPr lang="en-US" sz="750" dirty="0">
+                <a:solidFill>
+                  <a:srgbClr val="A1A1A1"/>
+                </a:solidFill>
+                <a:latin typeface="Verdana" pitchFamily="34" charset="0"/>
+                <a:ea typeface="Verdana" pitchFamily="34" charset="-122"/>
+                <a:cs typeface="Verdana" pitchFamily="34" charset="-120"/>
+              </a:rPr>
+              <a:t>media 4,26 %</a:t>
+            </a:r>
+            <a:endParaRPr lang="en-US" sz="750" dirty="0"/>
+          </a:p>
+        </p:txBody>
+      </p:sp>
+      <p:sp>
+        <p:nvSpPr>
+          <p:cNvPr id="26" name="Text 24"/>
+          <p:cNvSpPr txBox="1"/>
+          <p:nvPr/>
+        </p:nvSpPr>
+        <p:spPr>
+          <a:xfrm>
+            <a:off x="6373368" y="4754880"/>
+            <a:ext cx="1325880" cy="384048"/>
+          </a:xfrm>
+          <a:prstGeom prst="rect">
+            <a:avLst/>
+          </a:prstGeom>
+          <a:noFill/>
+          <a:ln/>
+        </p:spPr>
+        <p:txBody>
+          <a:bodyPr wrap="square" lIns="0" tIns="0" rIns="0" bIns="0" rtlCol="0" anchor="ctr"/>
+          <a:lstStyle/>
+          <a:p>
+            <a:pPr algn="r" indent="0" marL="0">
+              <a:lnSpc>
+                <a:spcPct val="105000"/>
+              </a:lnSpc>
+              <a:buNone/>
+            </a:pPr>
+            <a:r>
+              <a:rPr lang="en-US" sz="750" b="1" dirty="0">
+                <a:solidFill>
+                  <a:srgbClr val="F56600"/>
+                </a:solidFill>
+                <a:latin typeface="Verdana" pitchFamily="34" charset="0"/>
+                <a:ea typeface="Verdana" pitchFamily="34" charset="-122"/>
+                <a:cs typeface="Verdana" pitchFamily="34" charset="-120"/>
+              </a:rPr>
+              <a:t>mucha información</a:t>
+            </a:r>
+            <a:endParaRPr lang="en-US" sz="750" dirty="0"/>
+          </a:p>
+          <a:p>
+            <a:pPr algn="r" indent="0" marL="0">
+              <a:lnSpc>
+                <a:spcPct val="105000"/>
+              </a:lnSpc>
+              <a:buNone/>
+            </a:pPr>
+            <a:r>
+              <a:rPr lang="en-US" sz="750" b="1" dirty="0">
+                <a:solidFill>
+                  <a:srgbClr val="F56600"/>
+                </a:solidFill>
+                <a:latin typeface="Verdana" pitchFamily="34" charset="0"/>
+                <a:ea typeface="Verdana" pitchFamily="34" charset="-122"/>
+                <a:cs typeface="Verdana" pitchFamily="34" charset="-120"/>
+              </a:rPr>
+              <a:t>poco margen</a:t>
+            </a:r>
+            <a:endParaRPr lang="en-US" sz="750" dirty="0"/>
+          </a:p>
+        </p:txBody>
+      </p:sp>
+      <p:sp>
+        <p:nvSpPr>
+          <p:cNvPr id="27" name="Shape 25"/>
+          <p:cNvSpPr/>
+          <p:nvPr/>
+        </p:nvSpPr>
+        <p:spPr>
+          <a:xfrm>
+            <a:off x="5347051" y="4681728"/>
+            <a:ext cx="356006" cy="356006"/>
+          </a:xfrm>
+          <a:prstGeom prst="ellipse">
+            <a:avLst/>
+          </a:prstGeom>
+          <a:solidFill>
+            <a:srgbClr val="FFAB70"/>
+          </a:solidFill>
+          <a:ln w="22225">
+            <a:solidFill>
+              <a:srgbClr val="2B2B2B"/>
+            </a:solidFill>
+            <a:prstDash val="solid"/>
+          </a:ln>
+        </p:spPr>
+      </p:sp>
+      <p:sp>
+        <p:nvSpPr>
+          <p:cNvPr id="28" name="Text 26"/>
+          <p:cNvSpPr txBox="1"/>
+          <p:nvPr/>
+        </p:nvSpPr>
+        <p:spPr>
+          <a:xfrm>
+            <a:off x="4487515" y="4759147"/>
+            <a:ext cx="777240" cy="365760"/>
+          </a:xfrm>
+          <a:prstGeom prst="rect">
+            <a:avLst/>
+          </a:prstGeom>
+          <a:noFill/>
+          <a:ln/>
+        </p:spPr>
+        <p:txBody>
+          <a:bodyPr wrap="square" lIns="0" tIns="0" rIns="0" bIns="0" rtlCol="0" anchor="ctr"/>
+          <a:lstStyle/>
+          <a:p>
+            <a:pPr algn="r" indent="0" marL="0">
+              <a:lnSpc>
+                <a:spcPct val="95000"/>
+              </a:lnSpc>
+              <a:buNone/>
+            </a:pPr>
+            <a:r>
+              <a:rPr lang="en-US" sz="900" b="1" dirty="0">
+                <a:solidFill>
+                  <a:srgbClr val="F56600"/>
+                </a:solidFill>
+                <a:latin typeface="Verdana" pitchFamily="34" charset="0"/>
+                <a:ea typeface="Verdana" pitchFamily="34" charset="-122"/>
+                <a:cs typeface="Verdana" pitchFamily="34" charset="-120"/>
+              </a:rPr>
+              <a:t>España</a:t>
+            </a:r>
+            <a:pPr algn="r" indent="0" marL="0">
+              <a:lnSpc>
+                <a:spcPct val="95000"/>
+              </a:lnSpc>
+              <a:buNone/>
+            </a:pPr>
+            <a:endParaRPr lang="en-US" sz="900" dirty="0"/>
+          </a:p>
+          <a:p>
+            <a:pPr algn="r" indent="0" marL="0">
+              <a:lnSpc>
+                <a:spcPct val="95000"/>
+              </a:lnSpc>
+              <a:buNone/>
+            </a:pPr>
+            <a:r>
+              <a:rPr lang="en-US" sz="800" dirty="0">
+                <a:solidFill>
+                  <a:srgbClr val="818181"/>
+                </a:solidFill>
+                <a:latin typeface="Verdana" pitchFamily="34" charset="0"/>
+                <a:ea typeface="Verdana" pitchFamily="34" charset="-122"/>
+                <a:cs typeface="Verdana" pitchFamily="34" charset="-120"/>
+              </a:rPr>
+              <a:t>0,59 %</a:t>
+            </a:r>
+            <a:endParaRPr lang="en-US" sz="900" dirty="0"/>
+          </a:p>
+        </p:txBody>
+      </p:sp>
+      <p:sp>
+        <p:nvSpPr>
+          <p:cNvPr id="29" name="Shape 27"/>
+          <p:cNvSpPr/>
+          <p:nvPr/>
+        </p:nvSpPr>
+        <p:spPr>
+          <a:xfrm>
+            <a:off x="6161093" y="3982923"/>
+            <a:ext cx="247904" cy="247904"/>
+          </a:xfrm>
+          <a:prstGeom prst="ellipse">
+            <a:avLst/>
+          </a:prstGeom>
+          <a:solidFill>
+            <a:srgbClr val="77BFEE"/>
+          </a:solidFill>
+          <a:ln w="6350">
+            <a:solidFill>
+              <a:srgbClr val="77BFEE"/>
+            </a:solidFill>
+            <a:prstDash val="solid"/>
+          </a:ln>
+        </p:spPr>
+      </p:sp>
+      <p:sp>
+        <p:nvSpPr>
+          <p:cNvPr id="30" name="Text 28"/>
+          <p:cNvSpPr txBox="1"/>
+          <p:nvPr/>
+        </p:nvSpPr>
+        <p:spPr>
+          <a:xfrm>
+            <a:off x="6491293" y="4125163"/>
+            <a:ext cx="777240" cy="365760"/>
+          </a:xfrm>
+          <a:prstGeom prst="rect">
+            <a:avLst/>
+          </a:prstGeom>
+          <a:noFill/>
+          <a:ln/>
+        </p:spPr>
+        <p:txBody>
+          <a:bodyPr wrap="square" lIns="0" tIns="0" rIns="0" bIns="0" rtlCol="0" anchor="ctr"/>
+          <a:lstStyle/>
+          <a:p>
+            <a:pPr algn="l" indent="0" marL="0">
+              <a:lnSpc>
+                <a:spcPct val="95000"/>
+              </a:lnSpc>
+              <a:buNone/>
+            </a:pPr>
+            <a:r>
+              <a:rPr lang="en-US" sz="900" b="1" dirty="0">
+                <a:solidFill>
+                  <a:srgbClr val="2B2B2B"/>
+                </a:solidFill>
+                <a:latin typeface="Verdana" pitchFamily="34" charset="0"/>
+                <a:ea typeface="Verdana" pitchFamily="34" charset="-122"/>
+                <a:cs typeface="Verdana" pitchFamily="34" charset="-120"/>
+              </a:rPr>
+              <a:t>Alemania</a:t>
+            </a:r>
+            <a:pPr algn="l" indent="0" marL="0">
+              <a:lnSpc>
+                <a:spcPct val="95000"/>
+              </a:lnSpc>
+              <a:buNone/>
+            </a:pPr>
+            <a:endParaRPr lang="en-US" sz="900" dirty="0"/>
+          </a:p>
+          <a:p>
+            <a:pPr algn="l" indent="0" marL="0">
+              <a:lnSpc>
+                <a:spcPct val="95000"/>
+              </a:lnSpc>
+              <a:buNone/>
+            </a:pPr>
+            <a:r>
+              <a:rPr lang="en-US" sz="800" dirty="0">
+                <a:solidFill>
+                  <a:srgbClr val="818181"/>
+                </a:solidFill>
+                <a:latin typeface="Verdana" pitchFamily="34" charset="0"/>
+                <a:ea typeface="Verdana" pitchFamily="34" charset="-122"/>
+                <a:cs typeface="Verdana" pitchFamily="34" charset="-120"/>
+              </a:rPr>
+              <a:t>0,40 %</a:t>
+            </a:r>
+            <a:endParaRPr lang="en-US" sz="900" dirty="0"/>
+          </a:p>
+        </p:txBody>
+      </p:sp>
+      <p:sp>
+        <p:nvSpPr>
+          <p:cNvPr id="31" name="Shape 29"/>
+          <p:cNvSpPr/>
+          <p:nvPr/>
+        </p:nvSpPr>
+        <p:spPr>
+          <a:xfrm>
+            <a:off x="1901488" y="4760366"/>
+            <a:ext cx="407213" cy="407213"/>
+          </a:xfrm>
+          <a:prstGeom prst="ellipse">
+            <a:avLst/>
+          </a:prstGeom>
+          <a:solidFill>
+            <a:srgbClr val="FF8AC2"/>
+          </a:solidFill>
+          <a:ln w="6350">
+            <a:solidFill>
+              <a:srgbClr val="FF8AC2"/>
+            </a:solidFill>
+            <a:prstDash val="solid"/>
+          </a:ln>
+        </p:spPr>
+      </p:sp>
+      <p:sp>
+        <p:nvSpPr>
+          <p:cNvPr id="32" name="Text 30"/>
+          <p:cNvSpPr txBox="1"/>
+          <p:nvPr/>
+        </p:nvSpPr>
+        <p:spPr>
+          <a:xfrm>
+            <a:off x="2390997" y="4781093"/>
+            <a:ext cx="777240" cy="365760"/>
+          </a:xfrm>
+          <a:prstGeom prst="rect">
+            <a:avLst/>
+          </a:prstGeom>
+          <a:noFill/>
+          <a:ln/>
+        </p:spPr>
+        <p:txBody>
+          <a:bodyPr wrap="square" lIns="0" tIns="0" rIns="0" bIns="0" rtlCol="0" anchor="ctr"/>
+          <a:lstStyle/>
+          <a:p>
+            <a:pPr algn="l" indent="0" marL="0">
+              <a:lnSpc>
+                <a:spcPct val="95000"/>
+              </a:lnSpc>
+              <a:buNone/>
+            </a:pPr>
+            <a:r>
+              <a:rPr lang="en-US" sz="900" b="1" dirty="0">
+                <a:solidFill>
+                  <a:srgbClr val="2B2B2B"/>
+                </a:solidFill>
+                <a:latin typeface="Verdana" pitchFamily="34" charset="0"/>
+                <a:ea typeface="Verdana" pitchFamily="34" charset="-122"/>
+                <a:cs typeface="Verdana" pitchFamily="34" charset="-120"/>
+              </a:rPr>
+              <a:t>Francia</a:t>
+            </a:r>
+            <a:pPr algn="l" indent="0" marL="0">
+              <a:lnSpc>
+                <a:spcPct val="95000"/>
+              </a:lnSpc>
+              <a:buNone/>
+            </a:pPr>
+            <a:endParaRPr lang="en-US" sz="900" dirty="0"/>
+          </a:p>
+          <a:p>
+            <a:pPr algn="l" indent="0" marL="0">
+              <a:lnSpc>
+                <a:spcPct val="95000"/>
+              </a:lnSpc>
+              <a:buNone/>
+            </a:pPr>
+            <a:r>
+              <a:rPr lang="en-US" sz="800" dirty="0">
+                <a:solidFill>
+                  <a:srgbClr val="818181"/>
+                </a:solidFill>
+                <a:latin typeface="Verdana" pitchFamily="34" charset="0"/>
+                <a:ea typeface="Verdana" pitchFamily="34" charset="-122"/>
+                <a:cs typeface="Verdana" pitchFamily="34" charset="-120"/>
+              </a:rPr>
+              <a:t>0,68 %</a:t>
+            </a:r>
+            <a:endParaRPr lang="en-US" sz="900" dirty="0"/>
+          </a:p>
+        </p:txBody>
+      </p:sp>
+      <p:sp>
+        <p:nvSpPr>
+          <p:cNvPr id="33" name="Shape 31"/>
+          <p:cNvSpPr/>
+          <p:nvPr/>
+        </p:nvSpPr>
+        <p:spPr>
+          <a:xfrm>
+            <a:off x="6348430" y="3614318"/>
+            <a:ext cx="475488" cy="475488"/>
+          </a:xfrm>
+          <a:prstGeom prst="ellipse">
+            <a:avLst/>
+          </a:prstGeom>
+          <a:solidFill>
+            <a:srgbClr val="FF8AC2"/>
+          </a:solidFill>
+          <a:ln w="6350">
+            <a:solidFill>
+              <a:srgbClr val="FF8AC2"/>
+            </a:solidFill>
+            <a:prstDash val="solid"/>
+          </a:ln>
+        </p:spPr>
+      </p:sp>
+      <p:sp>
+        <p:nvSpPr>
+          <p:cNvPr id="34" name="Text 32"/>
+          <p:cNvSpPr txBox="1"/>
+          <p:nvPr/>
+        </p:nvSpPr>
+        <p:spPr>
+          <a:xfrm>
+            <a:off x="6906214" y="3632606"/>
+            <a:ext cx="777240" cy="365760"/>
+          </a:xfrm>
+          <a:prstGeom prst="rect">
+            <a:avLst/>
+          </a:prstGeom>
+          <a:noFill/>
+          <a:ln/>
+        </p:spPr>
+        <p:txBody>
+          <a:bodyPr wrap="square" lIns="0" tIns="0" rIns="0" bIns="0" rtlCol="0" anchor="ctr"/>
+          <a:lstStyle/>
+          <a:p>
+            <a:pPr algn="l" indent="0" marL="0">
+              <a:lnSpc>
+                <a:spcPct val="95000"/>
+              </a:lnSpc>
+              <a:buNone/>
+            </a:pPr>
+            <a:r>
+              <a:rPr lang="en-US" sz="900" b="1" dirty="0">
+                <a:solidFill>
+                  <a:srgbClr val="2B2B2B"/>
+                </a:solidFill>
+                <a:latin typeface="Verdana" pitchFamily="34" charset="0"/>
+                <a:ea typeface="Verdana" pitchFamily="34" charset="-122"/>
+                <a:cs typeface="Verdana" pitchFamily="34" charset="-120"/>
+              </a:rPr>
+              <a:t>Italia</a:t>
+            </a:r>
+            <a:pPr algn="l" indent="0" marL="0">
+              <a:lnSpc>
+                <a:spcPct val="95000"/>
+              </a:lnSpc>
+              <a:buNone/>
+            </a:pPr>
+            <a:endParaRPr lang="en-US" sz="900" dirty="0"/>
+          </a:p>
+          <a:p>
+            <a:pPr algn="l" indent="0" marL="0">
+              <a:lnSpc>
+                <a:spcPct val="95000"/>
+              </a:lnSpc>
+              <a:buNone/>
+            </a:pPr>
+            <a:r>
+              <a:rPr lang="en-US" sz="800" dirty="0">
+                <a:solidFill>
+                  <a:srgbClr val="818181"/>
+                </a:solidFill>
+                <a:latin typeface="Verdana" pitchFamily="34" charset="0"/>
+                <a:ea typeface="Verdana" pitchFamily="34" charset="-122"/>
+                <a:cs typeface="Verdana" pitchFamily="34" charset="-120"/>
+              </a:rPr>
+              <a:t>0,80 %</a:t>
+            </a:r>
+            <a:endParaRPr lang="en-US" sz="900" dirty="0"/>
+          </a:p>
+        </p:txBody>
+      </p:sp>
+      <p:sp>
+        <p:nvSpPr>
+          <p:cNvPr id="35" name="Shape 33"/>
+          <p:cNvSpPr/>
+          <p:nvPr/>
+        </p:nvSpPr>
+        <p:spPr>
+          <a:xfrm>
+            <a:off x="5379824" y="4070299"/>
+            <a:ext cx="304800" cy="304800"/>
+          </a:xfrm>
+          <a:prstGeom prst="ellipse">
+            <a:avLst/>
+          </a:prstGeom>
+          <a:solidFill>
+            <a:srgbClr val="FFAB70"/>
+          </a:solidFill>
+          <a:ln w="6350">
+            <a:solidFill>
+              <a:srgbClr val="FFAB70"/>
+            </a:solidFill>
+            <a:prstDash val="solid"/>
+          </a:ln>
+        </p:spPr>
+      </p:sp>
+      <p:sp>
+        <p:nvSpPr>
+          <p:cNvPr id="36" name="Text 34"/>
+          <p:cNvSpPr txBox="1"/>
+          <p:nvPr/>
+        </p:nvSpPr>
+        <p:spPr>
+          <a:xfrm>
+            <a:off x="4520288" y="4103827"/>
+            <a:ext cx="777240" cy="365760"/>
+          </a:xfrm>
+          <a:prstGeom prst="rect">
+            <a:avLst/>
+          </a:prstGeom>
+          <a:noFill/>
+          <a:ln/>
+        </p:spPr>
+        <p:txBody>
+          <a:bodyPr wrap="square" lIns="0" tIns="0" rIns="0" bIns="0" rtlCol="0" anchor="ctr"/>
+          <a:lstStyle/>
+          <a:p>
+            <a:pPr algn="r" indent="0" marL="0">
+              <a:lnSpc>
+                <a:spcPct val="95000"/>
+              </a:lnSpc>
+              <a:buNone/>
+            </a:pPr>
+            <a:r>
+              <a:rPr lang="en-US" sz="900" b="1" dirty="0">
+                <a:solidFill>
+                  <a:srgbClr val="2B2B2B"/>
+                </a:solidFill>
+                <a:latin typeface="Verdana" pitchFamily="34" charset="0"/>
+                <a:ea typeface="Verdana" pitchFamily="34" charset="-122"/>
+                <a:cs typeface="Verdana" pitchFamily="34" charset="-120"/>
+              </a:rPr>
+              <a:t>Portugal</a:t>
+            </a:r>
+            <a:pPr algn="r" indent="0" marL="0">
+              <a:lnSpc>
+                <a:spcPct val="95000"/>
+              </a:lnSpc>
+              <a:buNone/>
+            </a:pPr>
+            <a:endParaRPr lang="en-US" sz="900" dirty="0"/>
+          </a:p>
+          <a:p>
+            <a:pPr algn="r" indent="0" marL="0">
+              <a:lnSpc>
+                <a:spcPct val="95000"/>
+              </a:lnSpc>
+              <a:buNone/>
+            </a:pPr>
+            <a:r>
+              <a:rPr lang="en-US" sz="800" dirty="0">
+                <a:solidFill>
+                  <a:srgbClr val="818181"/>
+                </a:solidFill>
+                <a:latin typeface="Verdana" pitchFamily="34" charset="0"/>
+                <a:ea typeface="Verdana" pitchFamily="34" charset="-122"/>
+                <a:cs typeface="Verdana" pitchFamily="34" charset="-120"/>
+              </a:rPr>
+              <a:t>0,50 %</a:t>
+            </a:r>
+            <a:endParaRPr lang="en-US" sz="900" dirty="0"/>
+          </a:p>
+        </p:txBody>
+      </p:sp>
+      <p:sp>
+        <p:nvSpPr>
+          <p:cNvPr id="37" name="Shape 35"/>
+          <p:cNvSpPr/>
+          <p:nvPr/>
+        </p:nvSpPr>
+        <p:spPr>
+          <a:xfrm>
+            <a:off x="4655335" y="3800246"/>
+            <a:ext cx="219456" cy="219456"/>
+          </a:xfrm>
+          <a:prstGeom prst="ellipse">
+            <a:avLst/>
+          </a:prstGeom>
+          <a:solidFill>
+            <a:srgbClr val="77BFEE"/>
+          </a:solidFill>
+          <a:ln w="6350">
+            <a:solidFill>
+              <a:srgbClr val="77BFEE"/>
+            </a:solidFill>
+            <a:prstDash val="solid"/>
+          </a:ln>
+        </p:spPr>
+      </p:sp>
+      <p:sp>
+        <p:nvSpPr>
+          <p:cNvPr id="38" name="Text 36"/>
+          <p:cNvSpPr txBox="1"/>
+          <p:nvPr/>
+        </p:nvSpPr>
+        <p:spPr>
+          <a:xfrm>
+            <a:off x="3795799" y="3498494"/>
+            <a:ext cx="777240" cy="365760"/>
+          </a:xfrm>
+          <a:prstGeom prst="rect">
+            <a:avLst/>
+          </a:prstGeom>
+          <a:noFill/>
+          <a:ln/>
+        </p:spPr>
+        <p:txBody>
+          <a:bodyPr wrap="square" lIns="0" tIns="0" rIns="0" bIns="0" rtlCol="0" anchor="ctr"/>
+          <a:lstStyle/>
+          <a:p>
+            <a:pPr algn="r" indent="0" marL="0">
+              <a:lnSpc>
+                <a:spcPct val="95000"/>
+              </a:lnSpc>
+              <a:buNone/>
+            </a:pPr>
+            <a:r>
+              <a:rPr lang="en-US" sz="900" b="1" dirty="0">
+                <a:solidFill>
+                  <a:srgbClr val="2B2B2B"/>
+                </a:solidFill>
+                <a:latin typeface="Verdana" pitchFamily="34" charset="0"/>
+                <a:ea typeface="Verdana" pitchFamily="34" charset="-122"/>
+                <a:cs typeface="Verdana" pitchFamily="34" charset="-120"/>
+              </a:rPr>
+              <a:t>P. Bajos</a:t>
+            </a:r>
+            <a:pPr algn="r" indent="0" marL="0">
+              <a:lnSpc>
+                <a:spcPct val="95000"/>
+              </a:lnSpc>
+              <a:buNone/>
+            </a:pPr>
+            <a:endParaRPr lang="en-US" sz="900" dirty="0"/>
+          </a:p>
+          <a:p>
+            <a:pPr algn="r" indent="0" marL="0">
+              <a:lnSpc>
+                <a:spcPct val="95000"/>
+              </a:lnSpc>
+              <a:buNone/>
+            </a:pPr>
+            <a:r>
+              <a:rPr lang="en-US" sz="800" dirty="0">
+                <a:solidFill>
+                  <a:srgbClr val="818181"/>
+                </a:solidFill>
+                <a:latin typeface="Verdana" pitchFamily="34" charset="0"/>
+                <a:ea typeface="Verdana" pitchFamily="34" charset="-122"/>
+                <a:cs typeface="Verdana" pitchFamily="34" charset="-120"/>
+              </a:rPr>
+              <a:t>0,35 %</a:t>
+            </a:r>
+            <a:endParaRPr lang="en-US" sz="900" dirty="0"/>
+          </a:p>
+        </p:txBody>
+      </p:sp>
+      <p:sp>
+        <p:nvSpPr>
+          <p:cNvPr id="39" name="Shape 37"/>
+          <p:cNvSpPr/>
+          <p:nvPr/>
+        </p:nvSpPr>
+        <p:spPr>
+          <a:xfrm>
+            <a:off x="7057309" y="2013915"/>
+            <a:ext cx="247904" cy="247904"/>
+          </a:xfrm>
+          <a:prstGeom prst="ellipse">
+            <a:avLst/>
+          </a:prstGeom>
+          <a:solidFill>
+            <a:srgbClr val="77BFEE"/>
+          </a:solidFill>
+          <a:ln w="6350">
+            <a:solidFill>
+              <a:srgbClr val="77BFEE"/>
+            </a:solidFill>
+            <a:prstDash val="solid"/>
+          </a:ln>
+        </p:spPr>
+      </p:sp>
+      <p:sp>
+        <p:nvSpPr>
+          <p:cNvPr id="40" name="Text 38"/>
+          <p:cNvSpPr txBox="1"/>
+          <p:nvPr/>
+        </p:nvSpPr>
+        <p:spPr>
+          <a:xfrm>
+            <a:off x="6197773" y="1954987"/>
+            <a:ext cx="777240" cy="365760"/>
+          </a:xfrm>
+          <a:prstGeom prst="rect">
+            <a:avLst/>
+          </a:prstGeom>
+          <a:noFill/>
+          <a:ln/>
+        </p:spPr>
+        <p:txBody>
+          <a:bodyPr wrap="square" lIns="0" tIns="0" rIns="0" bIns="0" rtlCol="0" anchor="ctr"/>
+          <a:lstStyle/>
+          <a:p>
+            <a:pPr algn="r" indent="0" marL="0">
+              <a:lnSpc>
+                <a:spcPct val="95000"/>
+              </a:lnSpc>
+              <a:buNone/>
+            </a:pPr>
+            <a:r>
+              <a:rPr lang="en-US" sz="900" b="1" dirty="0">
+                <a:solidFill>
+                  <a:srgbClr val="2B2B2B"/>
+                </a:solidFill>
+                <a:latin typeface="Verdana" pitchFamily="34" charset="0"/>
+                <a:ea typeface="Verdana" pitchFamily="34" charset="-122"/>
+                <a:cs typeface="Verdana" pitchFamily="34" charset="-120"/>
+              </a:rPr>
+              <a:t>Irlanda</a:t>
+            </a:r>
+            <a:pPr algn="r" indent="0" marL="0">
+              <a:lnSpc>
+                <a:spcPct val="95000"/>
+              </a:lnSpc>
+              <a:buNone/>
+            </a:pPr>
+            <a:endParaRPr lang="en-US" sz="900" dirty="0"/>
+          </a:p>
+          <a:p>
+            <a:pPr algn="r" indent="0" marL="0">
+              <a:lnSpc>
+                <a:spcPct val="95000"/>
+              </a:lnSpc>
+              <a:buNone/>
+            </a:pPr>
+            <a:r>
+              <a:rPr lang="en-US" sz="800" dirty="0">
+                <a:solidFill>
+                  <a:srgbClr val="818181"/>
+                </a:solidFill>
+                <a:latin typeface="Verdana" pitchFamily="34" charset="0"/>
+                <a:ea typeface="Verdana" pitchFamily="34" charset="-122"/>
+                <a:cs typeface="Verdana" pitchFamily="34" charset="-120"/>
+              </a:rPr>
+              <a:t>0,40 %</a:t>
+            </a:r>
+            <a:endParaRPr lang="en-US" sz="900" dirty="0"/>
+          </a:p>
+        </p:txBody>
+      </p:sp>
+      <p:sp>
+        <p:nvSpPr>
+          <p:cNvPr id="41" name="Text 39"/>
+          <p:cNvSpPr txBox="1"/>
+          <p:nvPr/>
+        </p:nvSpPr>
+        <p:spPr>
+          <a:xfrm>
+            <a:off x="1481328" y="5486400"/>
+            <a:ext cx="6309360" cy="219456"/>
+          </a:xfrm>
+          <a:prstGeom prst="rect">
+            <a:avLst/>
+          </a:prstGeom>
+          <a:noFill/>
+          <a:ln/>
+        </p:spPr>
+        <p:txBody>
+          <a:bodyPr wrap="square" lIns="0" tIns="0" rIns="0" bIns="0" rtlCol="0" anchor="ctr"/>
+          <a:lstStyle/>
+          <a:p>
+            <a:pPr algn="ctr" indent="0" marL="0">
+              <a:buNone/>
+            </a:pPr>
+            <a:r>
+              <a:rPr lang="en-US" sz="900" dirty="0">
+                <a:solidFill>
+                  <a:srgbClr val="2B2B2B"/>
+                </a:solidFill>
+                <a:latin typeface="Verdana" pitchFamily="34" charset="0"/>
+                <a:ea typeface="Verdana" pitchFamily="34" charset="-122"/>
+                <a:cs typeface="Verdana" pitchFamily="34" charset="-120"/>
+              </a:rPr>
+              <a:t>Índice de información para la selección (0–100)</a:t>
+            </a:r>
+            <a:endParaRPr lang="en-US" sz="900" dirty="0"/>
+          </a:p>
+        </p:txBody>
+      </p:sp>
+      <p:sp>
+        <p:nvSpPr>
+          <p:cNvPr id="42" name="Text 40"/>
+          <p:cNvSpPr txBox="1"/>
+          <p:nvPr/>
+        </p:nvSpPr>
+        <p:spPr>
+          <a:xfrm>
+            <a:off x="548640" y="1481328"/>
+            <a:ext cx="2194560" cy="219456"/>
+          </a:xfrm>
+          <a:prstGeom prst="rect">
+            <a:avLst/>
+          </a:prstGeom>
+          <a:noFill/>
+          <a:ln/>
+        </p:spPr>
+        <p:txBody>
+          <a:bodyPr wrap="square" lIns="0" tIns="0" rIns="0" bIns="0" rtlCol="0" anchor="ctr"/>
+          <a:lstStyle/>
+          <a:p>
+            <a:pPr indent="0" marL="0">
+              <a:buNone/>
+            </a:pPr>
+            <a:r>
+              <a:rPr lang="en-US" sz="850" dirty="0">
+                <a:solidFill>
+                  <a:srgbClr val="2B2B2B"/>
+                </a:solidFill>
+                <a:latin typeface="Verdana" pitchFamily="34" charset="0"/>
+                <a:ea typeface="Verdana" pitchFamily="34" charset="-122"/>
+                <a:cs typeface="Verdana" pitchFamily="34" charset="-120"/>
+              </a:rPr>
+              <a:t>Margen bruto, % del saldo</a:t>
+            </a:r>
+            <a:endParaRPr lang="en-US" sz="850" dirty="0"/>
+          </a:p>
+        </p:txBody>
+      </p:sp>
+      <p:sp>
+        <p:nvSpPr>
+          <p:cNvPr id="43" name="Shape 41"/>
+          <p:cNvSpPr/>
+          <p:nvPr/>
+        </p:nvSpPr>
+        <p:spPr>
+          <a:xfrm>
+            <a:off x="1481328" y="5797296"/>
+            <a:ext cx="164592" cy="164592"/>
+          </a:xfrm>
+          <a:prstGeom prst="ellipse">
+            <a:avLst/>
+          </a:prstGeom>
+          <a:solidFill>
+            <a:srgbClr val="77BFEE"/>
+          </a:solidFill>
+          <a:ln w="12700">
+            <a:solidFill>
+              <a:srgbClr val="77BFEE"/>
+            </a:solidFill>
+            <a:prstDash val="solid"/>
+          </a:ln>
+        </p:spPr>
+      </p:sp>
+      <p:sp>
+        <p:nvSpPr>
+          <p:cNvPr id="44" name="Text 42"/>
+          <p:cNvSpPr txBox="1"/>
+          <p:nvPr/>
+        </p:nvSpPr>
+        <p:spPr>
+          <a:xfrm>
+            <a:off x="1719072" y="5760720"/>
+            <a:ext cx="1874520" cy="219456"/>
+          </a:xfrm>
+          <a:prstGeom prst="rect">
+            <a:avLst/>
+          </a:prstGeom>
+          <a:noFill/>
+          <a:ln/>
+        </p:spPr>
+        <p:txBody>
+          <a:bodyPr wrap="square" lIns="0" tIns="0" rIns="0" bIns="0" rtlCol="0" anchor="ctr"/>
+          <a:lstStyle/>
+          <a:p>
+            <a:pPr indent="0" marL="0">
+              <a:buNone/>
+            </a:pPr>
+            <a:r>
+              <a:rPr lang="en-US" sz="800" dirty="0">
+                <a:solidFill>
+                  <a:srgbClr val="818181"/>
+                </a:solidFill>
+                <a:latin typeface="Verdana" pitchFamily="34" charset="0"/>
+                <a:ea typeface="Verdana" pitchFamily="34" charset="-122"/>
+                <a:cs typeface="Verdana" pitchFamily="34" charset="-120"/>
+              </a:rPr>
+              <a:t>coste del riesgo &lt; 0,45 %</a:t>
+            </a:r>
+            <a:endParaRPr lang="en-US" sz="800" dirty="0"/>
+          </a:p>
+        </p:txBody>
+      </p:sp>
+      <p:sp>
+        <p:nvSpPr>
+          <p:cNvPr id="45" name="Shape 43"/>
+          <p:cNvSpPr/>
+          <p:nvPr/>
+        </p:nvSpPr>
+        <p:spPr>
+          <a:xfrm>
+            <a:off x="3630168" y="5797296"/>
+            <a:ext cx="164592" cy="164592"/>
+          </a:xfrm>
+          <a:prstGeom prst="ellipse">
+            <a:avLst/>
+          </a:prstGeom>
+          <a:solidFill>
+            <a:srgbClr val="FFAB70"/>
+          </a:solidFill>
+          <a:ln w="12700">
+            <a:solidFill>
+              <a:srgbClr val="FFAB70"/>
+            </a:solidFill>
+            <a:prstDash val="solid"/>
+          </a:ln>
+        </p:spPr>
+      </p:sp>
+      <p:sp>
+        <p:nvSpPr>
+          <p:cNvPr id="46" name="Text 44"/>
+          <p:cNvSpPr txBox="1"/>
+          <p:nvPr/>
+        </p:nvSpPr>
+        <p:spPr>
+          <a:xfrm>
+            <a:off x="3867912" y="5760720"/>
+            <a:ext cx="1874520" cy="219456"/>
+          </a:xfrm>
+          <a:prstGeom prst="rect">
+            <a:avLst/>
+          </a:prstGeom>
+          <a:noFill/>
+          <a:ln/>
+        </p:spPr>
+        <p:txBody>
+          <a:bodyPr wrap="square" lIns="0" tIns="0" rIns="0" bIns="0" rtlCol="0" anchor="ctr"/>
+          <a:lstStyle/>
+          <a:p>
+            <a:pPr indent="0" marL="0">
+              <a:buNone/>
+            </a:pPr>
+            <a:r>
+              <a:rPr lang="en-US" sz="800" dirty="0">
+                <a:solidFill>
+                  <a:srgbClr val="818181"/>
+                </a:solidFill>
+                <a:latin typeface="Verdana" pitchFamily="34" charset="0"/>
+                <a:ea typeface="Verdana" pitchFamily="34" charset="-122"/>
+                <a:cs typeface="Verdana" pitchFamily="34" charset="-120"/>
+              </a:rPr>
+              <a:t>0,45 a 0,65 %</a:t>
+            </a:r>
+            <a:endParaRPr lang="en-US" sz="800" dirty="0"/>
+          </a:p>
+        </p:txBody>
+      </p:sp>
+      <p:sp>
+        <p:nvSpPr>
+          <p:cNvPr id="47" name="Shape 45"/>
+          <p:cNvSpPr/>
+          <p:nvPr/>
+        </p:nvSpPr>
+        <p:spPr>
+          <a:xfrm>
+            <a:off x="5779008" y="5797296"/>
+            <a:ext cx="164592" cy="164592"/>
+          </a:xfrm>
+          <a:prstGeom prst="ellipse">
+            <a:avLst/>
+          </a:prstGeom>
+          <a:solidFill>
+            <a:srgbClr val="FF8AC2"/>
+          </a:solidFill>
+          <a:ln w="12700">
+            <a:solidFill>
+              <a:srgbClr val="FF8AC2"/>
+            </a:solidFill>
+            <a:prstDash val="solid"/>
+          </a:ln>
+        </p:spPr>
+      </p:sp>
+      <p:sp>
+        <p:nvSpPr>
+          <p:cNvPr id="48" name="Text 46"/>
+          <p:cNvSpPr txBox="1"/>
+          <p:nvPr/>
+        </p:nvSpPr>
+        <p:spPr>
+          <a:xfrm>
+            <a:off x="6016752" y="5760720"/>
+            <a:ext cx="1874520" cy="219456"/>
+          </a:xfrm>
+          <a:prstGeom prst="rect">
+            <a:avLst/>
+          </a:prstGeom>
+          <a:noFill/>
+          <a:ln/>
+        </p:spPr>
+        <p:txBody>
+          <a:bodyPr wrap="square" lIns="0" tIns="0" rIns="0" bIns="0" rtlCol="0" anchor="ctr"/>
+          <a:lstStyle/>
+          <a:p>
+            <a:pPr indent="0" marL="0">
+              <a:buNone/>
+            </a:pPr>
+            <a:r>
+              <a:rPr lang="en-US" sz="800" dirty="0">
+                <a:solidFill>
+                  <a:srgbClr val="818181"/>
+                </a:solidFill>
+                <a:latin typeface="Verdana" pitchFamily="34" charset="0"/>
+                <a:ea typeface="Verdana" pitchFamily="34" charset="-122"/>
+                <a:cs typeface="Verdana" pitchFamily="34" charset="-120"/>
+              </a:rPr>
+              <a:t>&gt; 0,65 %</a:t>
+            </a:r>
+            <a:endParaRPr lang="en-US" sz="800" dirty="0"/>
+          </a:p>
+        </p:txBody>
+      </p:sp>
+      <p:sp>
+        <p:nvSpPr>
+          <p:cNvPr id="49" name="Shape 47"/>
+          <p:cNvSpPr/>
+          <p:nvPr/>
+        </p:nvSpPr>
+        <p:spPr>
+          <a:xfrm>
+            <a:off x="8065008" y="1755648"/>
+            <a:ext cx="3502152" cy="2176272"/>
+          </a:xfrm>
+          <a:prstGeom prst="roundRect">
+            <a:avLst>
+              <a:gd name="adj" fmla="val 1681"/>
+            </a:avLst>
+          </a:prstGeom>
+          <a:solidFill>
+            <a:srgbClr val="FFF4C2"/>
+          </a:solidFill>
+          <a:ln w="12700">
+            <a:solidFill>
+              <a:srgbClr val="FFE066"/>
+            </a:solidFill>
+            <a:prstDash val="solid"/>
+          </a:ln>
+        </p:spPr>
+      </p:sp>
+      <p:sp>
+        <p:nvSpPr>
+          <p:cNvPr id="50" name="Shape 48"/>
+          <p:cNvSpPr/>
+          <p:nvPr/>
+        </p:nvSpPr>
+        <p:spPr>
+          <a:xfrm>
+            <a:off x="8065008" y="1755648"/>
+            <a:ext cx="64008" cy="2176272"/>
+          </a:xfrm>
+          <a:prstGeom prst="rect">
+            <a:avLst/>
+          </a:prstGeom>
+          <a:solidFill>
+            <a:srgbClr val="F56600"/>
+          </a:solidFill>
+          <a:ln w="12700">
+            <a:solidFill>
+              <a:srgbClr val="F56600"/>
+            </a:solidFill>
+            <a:prstDash val="solid"/>
+          </a:ln>
+        </p:spPr>
+      </p:sp>
+      <p:sp>
+        <p:nvSpPr>
+          <p:cNvPr id="51" name="Text 49"/>
+          <p:cNvSpPr txBox="1"/>
+          <p:nvPr/>
+        </p:nvSpPr>
+        <p:spPr>
+          <a:xfrm>
+            <a:off x="8284464" y="1847088"/>
+            <a:ext cx="3118104" cy="219456"/>
+          </a:xfrm>
+          <a:prstGeom prst="rect">
+            <a:avLst/>
+          </a:prstGeom>
+          <a:noFill/>
+          <a:ln/>
+        </p:spPr>
+        <p:txBody>
+          <a:bodyPr wrap="square" lIns="0" tIns="0" rIns="0" bIns="0" rtlCol="0" anchor="ctr"/>
+          <a:lstStyle/>
+          <a:p>
+            <a:pPr indent="0" marL="0">
+              <a:buNone/>
+            </a:pPr>
+            <a:r>
+              <a:rPr lang="en-US" sz="1100" b="1" dirty="0">
+                <a:solidFill>
+                  <a:srgbClr val="2B2B2B"/>
+                </a:solidFill>
+                <a:latin typeface="Verdana" pitchFamily="34" charset="0"/>
+                <a:ea typeface="Verdana" pitchFamily="34" charset="-122"/>
+                <a:cs typeface="Verdana" pitchFamily="34" charset="-120"/>
+              </a:rPr>
+              <a:t>España está en el cuadrante malo</a:t>
+            </a:r>
+            <a:endParaRPr lang="en-US" sz="1100" dirty="0"/>
+          </a:p>
+        </p:txBody>
+      </p:sp>
+      <p:sp>
+        <p:nvSpPr>
+          <p:cNvPr id="52" name="Text 50"/>
+          <p:cNvSpPr txBox="1"/>
+          <p:nvPr/>
+        </p:nvSpPr>
+        <p:spPr>
+          <a:xfrm>
+            <a:off x="8284464" y="2084832"/>
+            <a:ext cx="3118104" cy="1737360"/>
+          </a:xfrm>
+          <a:prstGeom prst="rect">
+            <a:avLst/>
+          </a:prstGeom>
+          <a:noFill/>
+          <a:ln/>
+        </p:spPr>
+        <p:txBody>
+          <a:bodyPr wrap="square" lIns="0" tIns="0" rIns="0" bIns="0" rtlCol="0" anchor="ctr"/>
+          <a:lstStyle/>
+          <a:p>
+            <a:pPr indent="0" marL="0">
+              <a:buNone/>
+            </a:pPr>
+            <a:r>
+              <a:rPr lang="en-US" sz="850" dirty="0">
+                <a:solidFill>
+                  <a:srgbClr val="2B2B2B"/>
+                </a:solidFill>
+                <a:latin typeface="Verdana" pitchFamily="34" charset="0"/>
+                <a:ea typeface="Verdana" pitchFamily="34" charset="-122"/>
+                <a:cs typeface="Verdana" pitchFamily="34" charset="-120"/>
+              </a:rPr>
+              <a:t>Tiene información por encima de la media (64,4 frente a 63) y el segundo margen más bajo de los siete (3,52 %). Gana 0,77 pp menos de margen del que le correspondería por su nivel de información: la mayor brecha de los siete. Tiene con qué seleccionar y no lo cobra.</a:t>
+            </a:r>
+            <a:endParaRPr lang="en-US" sz="850" dirty="0"/>
+          </a:p>
+        </p:txBody>
+      </p:sp>
+      <p:sp>
+        <p:nvSpPr>
+          <p:cNvPr id="53" name="Shape 51"/>
+          <p:cNvSpPr/>
+          <p:nvPr/>
+        </p:nvSpPr>
+        <p:spPr>
+          <a:xfrm>
+            <a:off x="8065008" y="4005072"/>
+            <a:ext cx="3502152" cy="1810512"/>
+          </a:xfrm>
+          <a:prstGeom prst="roundRect">
+            <a:avLst>
+              <a:gd name="adj" fmla="val 2020"/>
+            </a:avLst>
+          </a:prstGeom>
+          <a:solidFill>
+            <a:srgbClr val="FFD6BA"/>
+          </a:solidFill>
+          <a:ln w="12700">
+            <a:solidFill>
+              <a:srgbClr val="FFD6BA"/>
+            </a:solidFill>
+            <a:prstDash val="solid"/>
+          </a:ln>
+        </p:spPr>
+      </p:sp>
+      <p:sp>
+        <p:nvSpPr>
+          <p:cNvPr id="54" name="Shape 52"/>
+          <p:cNvSpPr/>
+          <p:nvPr/>
+        </p:nvSpPr>
+        <p:spPr>
+          <a:xfrm>
+            <a:off x="8065008" y="4005072"/>
+            <a:ext cx="64008" cy="1810512"/>
+          </a:xfrm>
+          <a:prstGeom prst="rect">
+            <a:avLst/>
+          </a:prstGeom>
+          <a:solidFill>
+            <a:srgbClr val="F56600"/>
+          </a:solidFill>
+          <a:ln w="12700">
+            <a:solidFill>
+              <a:srgbClr val="F56600"/>
+            </a:solidFill>
+            <a:prstDash val="solid"/>
+          </a:ln>
+        </p:spPr>
+      </p:sp>
+      <p:sp>
+        <p:nvSpPr>
+          <p:cNvPr id="55" name="Text 53"/>
+          <p:cNvSpPr txBox="1"/>
+          <p:nvPr/>
+        </p:nvSpPr>
+        <p:spPr>
+          <a:xfrm>
+            <a:off x="8284464" y="4096512"/>
+            <a:ext cx="3118104" cy="219456"/>
+          </a:xfrm>
+          <a:prstGeom prst="rect">
+            <a:avLst/>
+          </a:prstGeom>
+          <a:noFill/>
+          <a:ln/>
+        </p:spPr>
+        <p:txBody>
+          <a:bodyPr wrap="square" lIns="0" tIns="0" rIns="0" bIns="0" rtlCol="0" anchor="ctr"/>
+          <a:lstStyle/>
+          <a:p>
+            <a:pPr indent="0" marL="0">
+              <a:buNone/>
+            </a:pPr>
+            <a:r>
+              <a:rPr lang="en-US" sz="1100" b="1" dirty="0">
+                <a:solidFill>
+                  <a:srgbClr val="2B2B2B"/>
+                </a:solidFill>
+                <a:latin typeface="Verdana" pitchFamily="34" charset="0"/>
+                <a:ea typeface="Verdana" pitchFamily="34" charset="-122"/>
+                <a:cs typeface="Verdana" pitchFamily="34" charset="-120"/>
+              </a:rPr>
+              <a:t>Lo que el mapa NO dice</a:t>
+            </a:r>
+            <a:endParaRPr lang="en-US" sz="1100" dirty="0"/>
+          </a:p>
+        </p:txBody>
+      </p:sp>
+      <p:sp>
+        <p:nvSpPr>
+          <p:cNvPr id="56" name="Text 54"/>
+          <p:cNvSpPr txBox="1"/>
+          <p:nvPr/>
+        </p:nvSpPr>
+        <p:spPr>
+          <a:xfrm>
+            <a:off x="8284464" y="4334256"/>
+            <a:ext cx="3118104" cy="1371600"/>
+          </a:xfrm>
+          <a:prstGeom prst="rect">
+            <a:avLst/>
+          </a:prstGeom>
+          <a:noFill/>
+          <a:ln/>
+        </p:spPr>
+        <p:txBody>
+          <a:bodyPr wrap="square" lIns="0" tIns="0" rIns="0" bIns="0" rtlCol="0" anchor="ctr"/>
+          <a:lstStyle/>
+          <a:p>
+            <a:pPr indent="0" marL="0">
+              <a:buNone/>
+            </a:pPr>
+            <a:r>
+              <a:rPr lang="en-US" sz="850" dirty="0">
+                <a:solidFill>
+                  <a:srgbClr val="2B2B2B"/>
+                </a:solidFill>
+                <a:latin typeface="Verdana" pitchFamily="34" charset="0"/>
+                <a:ea typeface="Verdana" pitchFamily="34" charset="-122"/>
+                <a:cs typeface="Verdana" pitchFamily="34" charset="-120"/>
+              </a:rPr>
+              <a:t>Que más información dé más margen. La correlación de los siete es 0,68, pero descansa en los dos extremos: quitando Irlanda y Francia a la vez baja a 0,18. Por eso hay cuadrantes y no recta de ajuste. Tampoco compra riesgo: información contra coste del riesgo es -0,24; el eje que sí lo explica es el de recobro (-0,72).</a:t>
+            </a:r>
+            <a:endParaRPr lang="en-US" sz="850" dirty="0"/>
+          </a:p>
+        </p:txBody>
+      </p:sp>
+      <p:sp>
+        <p:nvSpPr>
+          <p:cNvPr id="57" name="Text 55"/>
+          <p:cNvSpPr txBox="1"/>
+          <p:nvPr/>
+        </p:nvSpPr>
+        <p:spPr>
+          <a:xfrm>
+            <a:off x="621792" y="6053328"/>
+            <a:ext cx="10945368" cy="475488"/>
+          </a:xfrm>
+          <a:prstGeom prst="rect">
+            <a:avLst/>
+          </a:prstGeom>
+          <a:noFill/>
+          <a:ln/>
+        </p:spPr>
+        <p:txBody>
+          <a:bodyPr wrap="square" lIns="0" tIns="0" rIns="0" bIns="0" rtlCol="0" anchor="ctr"/>
+          <a:lstStyle/>
+          <a:p>
+            <a:pPr indent="0" marL="0">
+              <a:buNone/>
+            </a:pPr>
+            <a:r>
+              <a:rPr lang="en-US" sz="700" i="1" dirty="0">
+                <a:solidFill>
+                  <a:srgbClr val="818181"/>
+                </a:solidFill>
+                <a:latin typeface="Verdana" pitchFamily="34" charset="0"/>
+                <a:ea typeface="Verdana" pitchFamily="34" charset="-122"/>
+                <a:cs typeface="Verdana" pitchFamily="34" charset="-120"/>
+              </a:rPr>
+              <a:t>Información: índice propio 0–100 de cuatro componentes (profundidad de información crediticia y cobertura del bureau, Banco Mundial Doing Business 2020; utilidad del registro público para PYME y disponibilidad de cuentas depositadas, ordinales propios sobre normativa vigente). Margen bruto: ingreso total menos coste de los recursos, lámina 7. Coste del riesgo: PD × LGD de la clase IRB de PYME, EBA COREP C 9.02 2026-Q1 — es pérdida esperada anual, no el stock de dudosos. El residuo de España es negativo en las 22 especificaciones probadas (de −0,92 a −0,11 pp). Siete puntos: lectura descriptiva, no causal. Datos en transversal/mapa_info_margen.csv.</a:t>
+            </a:r>
+            <a:endParaRPr lang="en-US" sz="700" dirty="0"/>
+          </a:p>
+        </p:txBody>
+      </p:sp>
+    </p:spTree>
+  </p:cSld>
+  <p:clrMapOvr>
+    <a:masterClrMapping/>
+  </p:clrMapOvr>
+</p:sld>
+</file>
+
 <file path=ppt/theme/theme1.xml><?xml version="1.0" encoding="utf-8"?>
 <a:theme xmlns:a="http://schemas.openxmlformats.org/drawingml/2006/main" name="Office Theme">
   <a:themeElements>

--- a/pres/rentabilidad_pyme_laminas_adicionales.pptx
+++ b/pres/rentabilidad_pyme_laminas_adicionales.pptx
@@ -21133,7 +21133,7 @@
                 <a:ea typeface="Verdana" pitchFamily="34" charset="-122"/>
                 <a:cs typeface="Verdana" pitchFamily="34" charset="-120"/>
               </a:rPr>
-              <a:t>Información, margen y riesgo de los siete mercados</a:t>
+              <a:t>¿Se paga el riesgo? ¿Lo compra la información?</a:t>
             </a:r>
             <a:endParaRPr lang="en-US" sz="2200" dirty="0"/>
           </a:p>
@@ -21172,7 +21172,7 @@
                 <a:ea typeface="Verdana" pitchFamily="34" charset="-122"/>
                 <a:cs typeface="Verdana" pitchFamily="34" charset="-120"/>
               </a:rPr>
-              <a:t>Cada burbuja es un país · Eje horizontal: cuánto se puede saber del cliente antes de conceder · Eje vertical: margen bruto del préstamo PYME · Tamaño y color: coste del riesgo PD × LGD</a:t>
+              <a:t>Coste del riesgo PD × LGD de la cartera PYME contra el margen bruto y contra la información disponible · Un punto por país · 2026</a:t>
             </a:r>
             <a:endParaRPr lang="en-US" sz="1050" dirty="0"/>
           </a:p>
@@ -21180,14 +21180,53 @@
       </p:sp>
       <p:sp>
         <p:nvSpPr>
-          <p:cNvPr id="5" name="Shape 3"/>
+          <p:cNvPr id="5" name="Text 3"/>
+          <p:cNvSpPr txBox="1"/>
+          <p:nvPr/>
+        </p:nvSpPr>
+        <p:spPr>
+          <a:xfrm>
+            <a:off x="658368" y="1591056"/>
+            <a:ext cx="5047488" cy="237744"/>
+          </a:xfrm>
+          <a:prstGeom prst="rect">
+            <a:avLst/>
+          </a:prstGeom>
+          <a:noFill/>
+          <a:ln/>
+        </p:spPr>
+        <p:txBody>
+          <a:bodyPr wrap="square" lIns="0" tIns="0" rIns="0" bIns="0" rtlCol="0" anchor="ctr"/>
+          <a:lstStyle/>
+          <a:p>
+            <a:pPr indent="0" marL="0">
+              <a:buNone/>
+            </a:pPr>
+            <a:r>
+              <a:rPr lang="en-US" sz="1250" b="1" dirty="0">
+                <a:solidFill>
+                  <a:srgbClr val="F56600"/>
+                </a:solidFill>
+                <a:latin typeface="Verdana" pitchFamily="34" charset="0"/>
+                <a:ea typeface="Verdana" pitchFamily="34" charset="-122"/>
+                <a:cs typeface="Verdana" pitchFamily="34" charset="-120"/>
+              </a:rPr>
+              <a:t>1 · ¿Cobra más quien más riesgo tiene?</a:t>
+            </a:r>
+            <a:endParaRPr lang="en-US" sz="1250" dirty="0"/>
+          </a:p>
+        </p:txBody>
+      </p:sp>
+      <p:sp>
+        <p:nvSpPr>
+          <p:cNvPr id="6" name="Shape 4"/>
           <p:cNvSpPr/>
           <p:nvPr/>
         </p:nvSpPr>
         <p:spPr>
           <a:xfrm>
-            <a:off x="1481328" y="1755648"/>
-            <a:ext cx="6309360" cy="3474720"/>
+            <a:off x="1316736" y="2212848"/>
+            <a:ext cx="4389120" cy="2359152"/>
           </a:xfrm>
           <a:prstGeom prst="rect">
             <a:avLst/>
@@ -21205,14 +21244,14 @@
       </p:sp>
       <p:sp>
         <p:nvSpPr>
-          <p:cNvPr id="6" name="Shape 4"/>
+          <p:cNvPr id="7" name="Shape 5"/>
           <p:cNvSpPr/>
           <p:nvPr/>
         </p:nvSpPr>
         <p:spPr>
           <a:xfrm>
-            <a:off x="1481328" y="4882896"/>
-            <a:ext cx="6309360" cy="7315"/>
+            <a:off x="1316736" y="4375404"/>
+            <a:ext cx="4389120" cy="7315"/>
           </a:xfrm>
           <a:prstGeom prst="rect">
             <a:avLst/>
@@ -21230,14 +21269,735 @@
       </p:sp>
       <p:sp>
         <p:nvSpPr>
-          <p:cNvPr id="7" name="Text 5"/>
+          <p:cNvPr id="8" name="Text 6"/>
           <p:cNvSpPr txBox="1"/>
           <p:nvPr/>
         </p:nvSpPr>
         <p:spPr>
           <a:xfrm>
-            <a:off x="676656" y="4782312"/>
-            <a:ext cx="731520" cy="201168"/>
+            <a:off x="621792" y="4274820"/>
+            <a:ext cx="621792" cy="201168"/>
+          </a:xfrm>
+          <a:prstGeom prst="rect">
+            <a:avLst/>
+          </a:prstGeom>
+          <a:noFill/>
+          <a:ln/>
+        </p:spPr>
+        <p:txBody>
+          <a:bodyPr wrap="square" lIns="0" tIns="0" rIns="0" bIns="0" rtlCol="0" anchor="ctr"/>
+          <a:lstStyle/>
+          <a:p>
+            <a:pPr algn="r" indent="0" marL="0">
+              <a:buNone/>
+            </a:pPr>
+            <a:r>
+              <a:rPr lang="en-US" sz="800" dirty="0">
+                <a:solidFill>
+                  <a:srgbClr val="818181"/>
+                </a:solidFill>
+                <a:latin typeface="Verdana" pitchFamily="34" charset="0"/>
+                <a:ea typeface="Verdana" pitchFamily="34" charset="-122"/>
+                <a:cs typeface="Verdana" pitchFamily="34" charset="-120"/>
+              </a:rPr>
+              <a:t>0,3 %</a:t>
+            </a:r>
+            <a:endParaRPr lang="en-US" sz="800" dirty="0"/>
+          </a:p>
+        </p:txBody>
+      </p:sp>
+      <p:sp>
+        <p:nvSpPr>
+          <p:cNvPr id="9" name="Shape 7"/>
+          <p:cNvSpPr/>
+          <p:nvPr/>
+        </p:nvSpPr>
+        <p:spPr>
+          <a:xfrm>
+            <a:off x="1316736" y="3982212"/>
+            <a:ext cx="4389120" cy="7315"/>
+          </a:xfrm>
+          <a:prstGeom prst="rect">
+            <a:avLst/>
+          </a:prstGeom>
+          <a:solidFill>
+            <a:srgbClr val="E5E5E5"/>
+          </a:solidFill>
+          <a:ln w="12700">
+            <a:solidFill>
+              <a:srgbClr val="E5E5E5"/>
+            </a:solidFill>
+            <a:prstDash val="solid"/>
+          </a:ln>
+        </p:spPr>
+      </p:sp>
+      <p:sp>
+        <p:nvSpPr>
+          <p:cNvPr id="10" name="Text 8"/>
+          <p:cNvSpPr txBox="1"/>
+          <p:nvPr/>
+        </p:nvSpPr>
+        <p:spPr>
+          <a:xfrm>
+            <a:off x="621792" y="3881628"/>
+            <a:ext cx="621792" cy="201168"/>
+          </a:xfrm>
+          <a:prstGeom prst="rect">
+            <a:avLst/>
+          </a:prstGeom>
+          <a:noFill/>
+          <a:ln/>
+        </p:spPr>
+        <p:txBody>
+          <a:bodyPr wrap="square" lIns="0" tIns="0" rIns="0" bIns="0" rtlCol="0" anchor="ctr"/>
+          <a:lstStyle/>
+          <a:p>
+            <a:pPr algn="r" indent="0" marL="0">
+              <a:buNone/>
+            </a:pPr>
+            <a:r>
+              <a:rPr lang="en-US" sz="800" dirty="0">
+                <a:solidFill>
+                  <a:srgbClr val="818181"/>
+                </a:solidFill>
+                <a:latin typeface="Verdana" pitchFamily="34" charset="0"/>
+                <a:ea typeface="Verdana" pitchFamily="34" charset="-122"/>
+                <a:cs typeface="Verdana" pitchFamily="34" charset="-120"/>
+              </a:rPr>
+              <a:t>0,4 %</a:t>
+            </a:r>
+            <a:endParaRPr lang="en-US" sz="800" dirty="0"/>
+          </a:p>
+        </p:txBody>
+      </p:sp>
+      <p:sp>
+        <p:nvSpPr>
+          <p:cNvPr id="11" name="Shape 9"/>
+          <p:cNvSpPr/>
+          <p:nvPr/>
+        </p:nvSpPr>
+        <p:spPr>
+          <a:xfrm>
+            <a:off x="1316736" y="3589020"/>
+            <a:ext cx="4389120" cy="7315"/>
+          </a:xfrm>
+          <a:prstGeom prst="rect">
+            <a:avLst/>
+          </a:prstGeom>
+          <a:solidFill>
+            <a:srgbClr val="E5E5E5"/>
+          </a:solidFill>
+          <a:ln w="12700">
+            <a:solidFill>
+              <a:srgbClr val="E5E5E5"/>
+            </a:solidFill>
+            <a:prstDash val="solid"/>
+          </a:ln>
+        </p:spPr>
+      </p:sp>
+      <p:sp>
+        <p:nvSpPr>
+          <p:cNvPr id="12" name="Text 10"/>
+          <p:cNvSpPr txBox="1"/>
+          <p:nvPr/>
+        </p:nvSpPr>
+        <p:spPr>
+          <a:xfrm>
+            <a:off x="621792" y="3488436"/>
+            <a:ext cx="621792" cy="201168"/>
+          </a:xfrm>
+          <a:prstGeom prst="rect">
+            <a:avLst/>
+          </a:prstGeom>
+          <a:noFill/>
+          <a:ln/>
+        </p:spPr>
+        <p:txBody>
+          <a:bodyPr wrap="square" lIns="0" tIns="0" rIns="0" bIns="0" rtlCol="0" anchor="ctr"/>
+          <a:lstStyle/>
+          <a:p>
+            <a:pPr algn="r" indent="0" marL="0">
+              <a:buNone/>
+            </a:pPr>
+            <a:r>
+              <a:rPr lang="en-US" sz="800" dirty="0">
+                <a:solidFill>
+                  <a:srgbClr val="818181"/>
+                </a:solidFill>
+                <a:latin typeface="Verdana" pitchFamily="34" charset="0"/>
+                <a:ea typeface="Verdana" pitchFamily="34" charset="-122"/>
+                <a:cs typeface="Verdana" pitchFamily="34" charset="-120"/>
+              </a:rPr>
+              <a:t>0,5 %</a:t>
+            </a:r>
+            <a:endParaRPr lang="en-US" sz="800" dirty="0"/>
+          </a:p>
+        </p:txBody>
+      </p:sp>
+      <p:sp>
+        <p:nvSpPr>
+          <p:cNvPr id="13" name="Shape 11"/>
+          <p:cNvSpPr/>
+          <p:nvPr/>
+        </p:nvSpPr>
+        <p:spPr>
+          <a:xfrm>
+            <a:off x="1316736" y="3195828"/>
+            <a:ext cx="4389120" cy="7315"/>
+          </a:xfrm>
+          <a:prstGeom prst="rect">
+            <a:avLst/>
+          </a:prstGeom>
+          <a:solidFill>
+            <a:srgbClr val="E5E5E5"/>
+          </a:solidFill>
+          <a:ln w="12700">
+            <a:solidFill>
+              <a:srgbClr val="E5E5E5"/>
+            </a:solidFill>
+            <a:prstDash val="solid"/>
+          </a:ln>
+        </p:spPr>
+      </p:sp>
+      <p:sp>
+        <p:nvSpPr>
+          <p:cNvPr id="14" name="Text 12"/>
+          <p:cNvSpPr txBox="1"/>
+          <p:nvPr/>
+        </p:nvSpPr>
+        <p:spPr>
+          <a:xfrm>
+            <a:off x="621792" y="3095244"/>
+            <a:ext cx="621792" cy="201168"/>
+          </a:xfrm>
+          <a:prstGeom prst="rect">
+            <a:avLst/>
+          </a:prstGeom>
+          <a:noFill/>
+          <a:ln/>
+        </p:spPr>
+        <p:txBody>
+          <a:bodyPr wrap="square" lIns="0" tIns="0" rIns="0" bIns="0" rtlCol="0" anchor="ctr"/>
+          <a:lstStyle/>
+          <a:p>
+            <a:pPr algn="r" indent="0" marL="0">
+              <a:buNone/>
+            </a:pPr>
+            <a:r>
+              <a:rPr lang="en-US" sz="800" dirty="0">
+                <a:solidFill>
+                  <a:srgbClr val="818181"/>
+                </a:solidFill>
+                <a:latin typeface="Verdana" pitchFamily="34" charset="0"/>
+                <a:ea typeface="Verdana" pitchFamily="34" charset="-122"/>
+                <a:cs typeface="Verdana" pitchFamily="34" charset="-120"/>
+              </a:rPr>
+              <a:t>0,6 %</a:t>
+            </a:r>
+            <a:endParaRPr lang="en-US" sz="800" dirty="0"/>
+          </a:p>
+        </p:txBody>
+      </p:sp>
+      <p:sp>
+        <p:nvSpPr>
+          <p:cNvPr id="15" name="Shape 13"/>
+          <p:cNvSpPr/>
+          <p:nvPr/>
+        </p:nvSpPr>
+        <p:spPr>
+          <a:xfrm>
+            <a:off x="1316736" y="2802636"/>
+            <a:ext cx="4389120" cy="7315"/>
+          </a:xfrm>
+          <a:prstGeom prst="rect">
+            <a:avLst/>
+          </a:prstGeom>
+          <a:solidFill>
+            <a:srgbClr val="E5E5E5"/>
+          </a:solidFill>
+          <a:ln w="12700">
+            <a:solidFill>
+              <a:srgbClr val="E5E5E5"/>
+            </a:solidFill>
+            <a:prstDash val="solid"/>
+          </a:ln>
+        </p:spPr>
+      </p:sp>
+      <p:sp>
+        <p:nvSpPr>
+          <p:cNvPr id="16" name="Text 14"/>
+          <p:cNvSpPr txBox="1"/>
+          <p:nvPr/>
+        </p:nvSpPr>
+        <p:spPr>
+          <a:xfrm>
+            <a:off x="621792" y="2702052"/>
+            <a:ext cx="621792" cy="201168"/>
+          </a:xfrm>
+          <a:prstGeom prst="rect">
+            <a:avLst/>
+          </a:prstGeom>
+          <a:noFill/>
+          <a:ln/>
+        </p:spPr>
+        <p:txBody>
+          <a:bodyPr wrap="square" lIns="0" tIns="0" rIns="0" bIns="0" rtlCol="0" anchor="ctr"/>
+          <a:lstStyle/>
+          <a:p>
+            <a:pPr algn="r" indent="0" marL="0">
+              <a:buNone/>
+            </a:pPr>
+            <a:r>
+              <a:rPr lang="en-US" sz="800" dirty="0">
+                <a:solidFill>
+                  <a:srgbClr val="818181"/>
+                </a:solidFill>
+                <a:latin typeface="Verdana" pitchFamily="34" charset="0"/>
+                <a:ea typeface="Verdana" pitchFamily="34" charset="-122"/>
+                <a:cs typeface="Verdana" pitchFamily="34" charset="-120"/>
+              </a:rPr>
+              <a:t>0,7 %</a:t>
+            </a:r>
+            <a:endParaRPr lang="en-US" sz="800" dirty="0"/>
+          </a:p>
+        </p:txBody>
+      </p:sp>
+      <p:sp>
+        <p:nvSpPr>
+          <p:cNvPr id="17" name="Shape 15"/>
+          <p:cNvSpPr/>
+          <p:nvPr/>
+        </p:nvSpPr>
+        <p:spPr>
+          <a:xfrm>
+            <a:off x="1316736" y="2409444"/>
+            <a:ext cx="4389120" cy="7315"/>
+          </a:xfrm>
+          <a:prstGeom prst="rect">
+            <a:avLst/>
+          </a:prstGeom>
+          <a:solidFill>
+            <a:srgbClr val="E5E5E5"/>
+          </a:solidFill>
+          <a:ln w="12700">
+            <a:solidFill>
+              <a:srgbClr val="E5E5E5"/>
+            </a:solidFill>
+            <a:prstDash val="solid"/>
+          </a:ln>
+        </p:spPr>
+      </p:sp>
+      <p:sp>
+        <p:nvSpPr>
+          <p:cNvPr id="18" name="Text 16"/>
+          <p:cNvSpPr txBox="1"/>
+          <p:nvPr/>
+        </p:nvSpPr>
+        <p:spPr>
+          <a:xfrm>
+            <a:off x="621792" y="2308860"/>
+            <a:ext cx="621792" cy="201168"/>
+          </a:xfrm>
+          <a:prstGeom prst="rect">
+            <a:avLst/>
+          </a:prstGeom>
+          <a:noFill/>
+          <a:ln/>
+        </p:spPr>
+        <p:txBody>
+          <a:bodyPr wrap="square" lIns="0" tIns="0" rIns="0" bIns="0" rtlCol="0" anchor="ctr"/>
+          <a:lstStyle/>
+          <a:p>
+            <a:pPr algn="r" indent="0" marL="0">
+              <a:buNone/>
+            </a:pPr>
+            <a:r>
+              <a:rPr lang="en-US" sz="800" dirty="0">
+                <a:solidFill>
+                  <a:srgbClr val="818181"/>
+                </a:solidFill>
+                <a:latin typeface="Verdana" pitchFamily="34" charset="0"/>
+                <a:ea typeface="Verdana" pitchFamily="34" charset="-122"/>
+                <a:cs typeface="Verdana" pitchFamily="34" charset="-120"/>
+              </a:rPr>
+              <a:t>0,8 %</a:t>
+            </a:r>
+            <a:endParaRPr lang="en-US" sz="800" dirty="0"/>
+          </a:p>
+        </p:txBody>
+      </p:sp>
+      <p:sp>
+        <p:nvSpPr>
+          <p:cNvPr id="19" name="Text 17"/>
+          <p:cNvSpPr txBox="1"/>
+          <p:nvPr/>
+        </p:nvSpPr>
+        <p:spPr>
+          <a:xfrm>
+            <a:off x="1435608" y="4626864"/>
+            <a:ext cx="640080" cy="201168"/>
+          </a:xfrm>
+          <a:prstGeom prst="rect">
+            <a:avLst/>
+          </a:prstGeom>
+          <a:noFill/>
+          <a:ln/>
+        </p:spPr>
+        <p:txBody>
+          <a:bodyPr wrap="square" lIns="0" tIns="0" rIns="0" bIns="0" rtlCol="0" anchor="ctr"/>
+          <a:lstStyle/>
+          <a:p>
+            <a:pPr algn="ctr" indent="0" marL="0">
+              <a:buNone/>
+            </a:pPr>
+            <a:r>
+              <a:rPr lang="en-US" sz="800" dirty="0">
+                <a:solidFill>
+                  <a:srgbClr val="818181"/>
+                </a:solidFill>
+                <a:latin typeface="Verdana" pitchFamily="34" charset="0"/>
+                <a:ea typeface="Verdana" pitchFamily="34" charset="-122"/>
+                <a:cs typeface="Verdana" pitchFamily="34" charset="-120"/>
+              </a:rPr>
+              <a:t>3,5 %</a:t>
+            </a:r>
+            <a:endParaRPr lang="en-US" sz="800" dirty="0"/>
+          </a:p>
+        </p:txBody>
+      </p:sp>
+      <p:sp>
+        <p:nvSpPr>
+          <p:cNvPr id="20" name="Text 18"/>
+          <p:cNvSpPr txBox="1"/>
+          <p:nvPr/>
+        </p:nvSpPr>
+        <p:spPr>
+          <a:xfrm>
+            <a:off x="2167128" y="4626864"/>
+            <a:ext cx="640080" cy="201168"/>
+          </a:xfrm>
+          <a:prstGeom prst="rect">
+            <a:avLst/>
+          </a:prstGeom>
+          <a:noFill/>
+          <a:ln/>
+        </p:spPr>
+        <p:txBody>
+          <a:bodyPr wrap="square" lIns="0" tIns="0" rIns="0" bIns="0" rtlCol="0" anchor="ctr"/>
+          <a:lstStyle/>
+          <a:p>
+            <a:pPr algn="ctr" indent="0" marL="0">
+              <a:buNone/>
+            </a:pPr>
+            <a:r>
+              <a:rPr lang="en-US" sz="800" dirty="0">
+                <a:solidFill>
+                  <a:srgbClr val="818181"/>
+                </a:solidFill>
+                <a:latin typeface="Verdana" pitchFamily="34" charset="0"/>
+                <a:ea typeface="Verdana" pitchFamily="34" charset="-122"/>
+                <a:cs typeface="Verdana" pitchFamily="34" charset="-120"/>
+              </a:rPr>
+              <a:t>4,0 %</a:t>
+            </a:r>
+            <a:endParaRPr lang="en-US" sz="800" dirty="0"/>
+          </a:p>
+        </p:txBody>
+      </p:sp>
+      <p:sp>
+        <p:nvSpPr>
+          <p:cNvPr id="21" name="Text 19"/>
+          <p:cNvSpPr txBox="1"/>
+          <p:nvPr/>
+        </p:nvSpPr>
+        <p:spPr>
+          <a:xfrm>
+            <a:off x="2898648" y="4626864"/>
+            <a:ext cx="640080" cy="201168"/>
+          </a:xfrm>
+          <a:prstGeom prst="rect">
+            <a:avLst/>
+          </a:prstGeom>
+          <a:noFill/>
+          <a:ln/>
+        </p:spPr>
+        <p:txBody>
+          <a:bodyPr wrap="square" lIns="0" tIns="0" rIns="0" bIns="0" rtlCol="0" anchor="ctr"/>
+          <a:lstStyle/>
+          <a:p>
+            <a:pPr algn="ctr" indent="0" marL="0">
+              <a:buNone/>
+            </a:pPr>
+            <a:r>
+              <a:rPr lang="en-US" sz="800" dirty="0">
+                <a:solidFill>
+                  <a:srgbClr val="818181"/>
+                </a:solidFill>
+                <a:latin typeface="Verdana" pitchFamily="34" charset="0"/>
+                <a:ea typeface="Verdana" pitchFamily="34" charset="-122"/>
+                <a:cs typeface="Verdana" pitchFamily="34" charset="-120"/>
+              </a:rPr>
+              <a:t>4,5 %</a:t>
+            </a:r>
+            <a:endParaRPr lang="en-US" sz="800" dirty="0"/>
+          </a:p>
+        </p:txBody>
+      </p:sp>
+      <p:sp>
+        <p:nvSpPr>
+          <p:cNvPr id="22" name="Text 20"/>
+          <p:cNvSpPr txBox="1"/>
+          <p:nvPr/>
+        </p:nvSpPr>
+        <p:spPr>
+          <a:xfrm>
+            <a:off x="3630168" y="4626864"/>
+            <a:ext cx="640080" cy="201168"/>
+          </a:xfrm>
+          <a:prstGeom prst="rect">
+            <a:avLst/>
+          </a:prstGeom>
+          <a:noFill/>
+          <a:ln/>
+        </p:spPr>
+        <p:txBody>
+          <a:bodyPr wrap="square" lIns="0" tIns="0" rIns="0" bIns="0" rtlCol="0" anchor="ctr"/>
+          <a:lstStyle/>
+          <a:p>
+            <a:pPr algn="ctr" indent="0" marL="0">
+              <a:buNone/>
+            </a:pPr>
+            <a:r>
+              <a:rPr lang="en-US" sz="800" dirty="0">
+                <a:solidFill>
+                  <a:srgbClr val="818181"/>
+                </a:solidFill>
+                <a:latin typeface="Verdana" pitchFamily="34" charset="0"/>
+                <a:ea typeface="Verdana" pitchFamily="34" charset="-122"/>
+                <a:cs typeface="Verdana" pitchFamily="34" charset="-120"/>
+              </a:rPr>
+              <a:t>5,0 %</a:t>
+            </a:r>
+            <a:endParaRPr lang="en-US" sz="800" dirty="0"/>
+          </a:p>
+        </p:txBody>
+      </p:sp>
+      <p:sp>
+        <p:nvSpPr>
+          <p:cNvPr id="23" name="Text 21"/>
+          <p:cNvSpPr txBox="1"/>
+          <p:nvPr/>
+        </p:nvSpPr>
+        <p:spPr>
+          <a:xfrm>
+            <a:off x="4361688" y="4626864"/>
+            <a:ext cx="640080" cy="201168"/>
+          </a:xfrm>
+          <a:prstGeom prst="rect">
+            <a:avLst/>
+          </a:prstGeom>
+          <a:noFill/>
+          <a:ln/>
+        </p:spPr>
+        <p:txBody>
+          <a:bodyPr wrap="square" lIns="0" tIns="0" rIns="0" bIns="0" rtlCol="0" anchor="ctr"/>
+          <a:lstStyle/>
+          <a:p>
+            <a:pPr algn="ctr" indent="0" marL="0">
+              <a:buNone/>
+            </a:pPr>
+            <a:r>
+              <a:rPr lang="en-US" sz="800" dirty="0">
+                <a:solidFill>
+                  <a:srgbClr val="818181"/>
+                </a:solidFill>
+                <a:latin typeface="Verdana" pitchFamily="34" charset="0"/>
+                <a:ea typeface="Verdana" pitchFamily="34" charset="-122"/>
+                <a:cs typeface="Verdana" pitchFamily="34" charset="-120"/>
+              </a:rPr>
+              <a:t>5,5 %</a:t>
+            </a:r>
+            <a:endParaRPr lang="en-US" sz="800" dirty="0"/>
+          </a:p>
+        </p:txBody>
+      </p:sp>
+      <p:sp>
+        <p:nvSpPr>
+          <p:cNvPr id="24" name="Text 22"/>
+          <p:cNvSpPr txBox="1"/>
+          <p:nvPr/>
+        </p:nvSpPr>
+        <p:spPr>
+          <a:xfrm>
+            <a:off x="5093208" y="4626864"/>
+            <a:ext cx="640080" cy="201168"/>
+          </a:xfrm>
+          <a:prstGeom prst="rect">
+            <a:avLst/>
+          </a:prstGeom>
+          <a:noFill/>
+          <a:ln/>
+        </p:spPr>
+        <p:txBody>
+          <a:bodyPr wrap="square" lIns="0" tIns="0" rIns="0" bIns="0" rtlCol="0" anchor="ctr"/>
+          <a:lstStyle/>
+          <a:p>
+            <a:pPr algn="ctr" indent="0" marL="0">
+              <a:buNone/>
+            </a:pPr>
+            <a:r>
+              <a:rPr lang="en-US" sz="800" dirty="0">
+                <a:solidFill>
+                  <a:srgbClr val="818181"/>
+                </a:solidFill>
+                <a:latin typeface="Verdana" pitchFamily="34" charset="0"/>
+                <a:ea typeface="Verdana" pitchFamily="34" charset="-122"/>
+                <a:cs typeface="Verdana" pitchFamily="34" charset="-120"/>
+              </a:rPr>
+              <a:t>6,0 %</a:t>
+            </a:r>
+            <a:endParaRPr lang="en-US" sz="800" dirty="0"/>
+          </a:p>
+        </p:txBody>
+      </p:sp>
+      <p:sp>
+        <p:nvSpPr>
+          <p:cNvPr id="25" name="Text 23"/>
+          <p:cNvSpPr txBox="1"/>
+          <p:nvPr/>
+        </p:nvSpPr>
+        <p:spPr>
+          <a:xfrm>
+            <a:off x="1316736" y="4846320"/>
+            <a:ext cx="4389120" cy="201168"/>
+          </a:xfrm>
+          <a:prstGeom prst="rect">
+            <a:avLst/>
+          </a:prstGeom>
+          <a:noFill/>
+          <a:ln/>
+        </p:spPr>
+        <p:txBody>
+          <a:bodyPr wrap="square" lIns="0" tIns="0" rIns="0" bIns="0" rtlCol="0" anchor="ctr"/>
+          <a:lstStyle/>
+          <a:p>
+            <a:pPr algn="ctr" indent="0" marL="0">
+              <a:buNone/>
+            </a:pPr>
+            <a:r>
+              <a:rPr lang="en-US" sz="850" dirty="0">
+                <a:solidFill>
+                  <a:srgbClr val="2B2B2B"/>
+                </a:solidFill>
+                <a:latin typeface="Verdana" pitchFamily="34" charset="0"/>
+                <a:ea typeface="Verdana" pitchFamily="34" charset="-122"/>
+                <a:cs typeface="Verdana" pitchFamily="34" charset="-120"/>
+              </a:rPr>
+              <a:t>Margen bruto del préstamo PYME, % del saldo</a:t>
+            </a:r>
+            <a:endParaRPr lang="en-US" sz="850" dirty="0"/>
+          </a:p>
+        </p:txBody>
+      </p:sp>
+      <p:sp>
+        <p:nvSpPr>
+          <p:cNvPr id="26" name="Shape 24"/>
+          <p:cNvSpPr/>
+          <p:nvPr/>
+        </p:nvSpPr>
+        <p:spPr>
+          <a:xfrm>
+            <a:off x="1675181" y="3125419"/>
+            <a:ext cx="219456" cy="219456"/>
+          </a:xfrm>
+          <a:prstGeom prst="ellipse">
+            <a:avLst/>
+          </a:prstGeom>
+          <a:solidFill>
+            <a:srgbClr val="F56600"/>
+          </a:solidFill>
+          <a:ln w="19050">
+            <a:solidFill>
+              <a:srgbClr val="2B2B2B"/>
+            </a:solidFill>
+            <a:prstDash val="solid"/>
+          </a:ln>
+        </p:spPr>
+      </p:sp>
+      <p:sp>
+        <p:nvSpPr>
+          <p:cNvPr id="27" name="Text 25"/>
+          <p:cNvSpPr txBox="1"/>
+          <p:nvPr/>
+        </p:nvSpPr>
+        <p:spPr>
+          <a:xfrm>
+            <a:off x="1967789" y="3134563"/>
+            <a:ext cx="749808" cy="201168"/>
+          </a:xfrm>
+          <a:prstGeom prst="rect">
+            <a:avLst/>
+          </a:prstGeom>
+          <a:noFill/>
+          <a:ln/>
+        </p:spPr>
+        <p:txBody>
+          <a:bodyPr wrap="square" lIns="0" tIns="0" rIns="0" bIns="0" rtlCol="0" anchor="ctr"/>
+          <a:lstStyle/>
+          <a:p>
+            <a:pPr algn="l" indent="0" marL="0">
+              <a:buNone/>
+            </a:pPr>
+            <a:r>
+              <a:rPr lang="en-US" sz="850" b="1" dirty="0">
+                <a:solidFill>
+                  <a:srgbClr val="F56600"/>
+                </a:solidFill>
+                <a:latin typeface="Verdana" pitchFamily="34" charset="0"/>
+                <a:ea typeface="Verdana" pitchFamily="34" charset="-122"/>
+                <a:cs typeface="Verdana" pitchFamily="34" charset="-120"/>
+              </a:rPr>
+              <a:t>España</a:t>
+            </a:r>
+            <a:endParaRPr lang="en-US" sz="850" dirty="0"/>
+          </a:p>
+        </p:txBody>
+      </p:sp>
+      <p:sp>
+        <p:nvSpPr>
+          <p:cNvPr id="28" name="Shape 26"/>
+          <p:cNvSpPr/>
+          <p:nvPr/>
+        </p:nvSpPr>
+        <p:spPr>
+          <a:xfrm>
+            <a:off x="2649017" y="3895344"/>
+            <a:ext cx="173736" cy="173736"/>
+          </a:xfrm>
+          <a:prstGeom prst="ellipse">
+            <a:avLst/>
+          </a:prstGeom>
+          <a:solidFill>
+            <a:srgbClr val="A1A1A1"/>
+          </a:solidFill>
+          <a:ln w="6350">
+            <a:solidFill>
+              <a:srgbClr val="A1A1A1"/>
+            </a:solidFill>
+            <a:prstDash val="solid"/>
+          </a:ln>
+        </p:spPr>
+      </p:sp>
+      <p:sp>
+        <p:nvSpPr>
+          <p:cNvPr id="29" name="Text 27"/>
+          <p:cNvSpPr txBox="1"/>
+          <p:nvPr/>
+        </p:nvSpPr>
+        <p:spPr>
+          <a:xfrm>
+            <a:off x="1826057" y="3881628"/>
+            <a:ext cx="749808" cy="201168"/>
           </a:xfrm>
           <a:prstGeom prst="rect">
             <a:avLst/>
@@ -21255,13 +22015,13 @@
             <a:r>
               <a:rPr lang="en-US" sz="850" dirty="0">
                 <a:solidFill>
-                  <a:srgbClr val="818181"/>
+                  <a:srgbClr val="2B2B2B"/>
                 </a:solidFill>
                 <a:latin typeface="Verdana" pitchFamily="34" charset="0"/>
                 <a:ea typeface="Verdana" pitchFamily="34" charset="-122"/>
                 <a:cs typeface="Verdana" pitchFamily="34" charset="-120"/>
               </a:rPr>
-              <a:t>3,5 %</a:t>
+              <a:t>Alemania</a:t>
             </a:r>
             <a:endParaRPr lang="en-US" sz="850" dirty="0"/>
           </a:p>
@@ -21269,14 +22029,398 @@
       </p:sp>
       <p:sp>
         <p:nvSpPr>
-          <p:cNvPr id="8" name="Shape 6"/>
+          <p:cNvPr id="30" name="Shape 28"/>
           <p:cNvSpPr/>
           <p:nvPr/>
         </p:nvSpPr>
         <p:spPr>
           <a:xfrm>
-            <a:off x="1481328" y="4303776"/>
-            <a:ext cx="6309360" cy="7315"/>
+            <a:off x="1566367" y="2794406"/>
+            <a:ext cx="173736" cy="173736"/>
+          </a:xfrm>
+          <a:prstGeom prst="ellipse">
+            <a:avLst/>
+          </a:prstGeom>
+          <a:solidFill>
+            <a:srgbClr val="A1A1A1"/>
+          </a:solidFill>
+          <a:ln w="6350">
+            <a:solidFill>
+              <a:srgbClr val="A1A1A1"/>
+            </a:solidFill>
+            <a:prstDash val="solid"/>
+          </a:ln>
+        </p:spPr>
+      </p:sp>
+      <p:sp>
+        <p:nvSpPr>
+          <p:cNvPr id="31" name="Text 29"/>
+          <p:cNvSpPr txBox="1"/>
+          <p:nvPr/>
+        </p:nvSpPr>
+        <p:spPr>
+          <a:xfrm>
+            <a:off x="1813255" y="2780690"/>
+            <a:ext cx="749808" cy="201168"/>
+          </a:xfrm>
+          <a:prstGeom prst="rect">
+            <a:avLst/>
+          </a:prstGeom>
+          <a:noFill/>
+          <a:ln/>
+        </p:spPr>
+        <p:txBody>
+          <a:bodyPr wrap="square" lIns="0" tIns="0" rIns="0" bIns="0" rtlCol="0" anchor="ctr"/>
+          <a:lstStyle/>
+          <a:p>
+            <a:pPr algn="l" indent="0" marL="0">
+              <a:buNone/>
+            </a:pPr>
+            <a:r>
+              <a:rPr lang="en-US" sz="850" dirty="0">
+                <a:solidFill>
+                  <a:srgbClr val="2B2B2B"/>
+                </a:solidFill>
+                <a:latin typeface="Verdana" pitchFamily="34" charset="0"/>
+                <a:ea typeface="Verdana" pitchFamily="34" charset="-122"/>
+                <a:cs typeface="Verdana" pitchFamily="34" charset="-120"/>
+              </a:rPr>
+              <a:t>Francia</a:t>
+            </a:r>
+            <a:endParaRPr lang="en-US" sz="850" dirty="0"/>
+          </a:p>
+        </p:txBody>
+      </p:sp>
+      <p:sp>
+        <p:nvSpPr>
+          <p:cNvPr id="32" name="Shape 30"/>
+          <p:cNvSpPr/>
+          <p:nvPr/>
+        </p:nvSpPr>
+        <p:spPr>
+          <a:xfrm>
+            <a:off x="2970886" y="2322576"/>
+            <a:ext cx="173736" cy="173736"/>
+          </a:xfrm>
+          <a:prstGeom prst="ellipse">
+            <a:avLst/>
+          </a:prstGeom>
+          <a:solidFill>
+            <a:srgbClr val="A1A1A1"/>
+          </a:solidFill>
+          <a:ln w="6350">
+            <a:solidFill>
+              <a:srgbClr val="A1A1A1"/>
+            </a:solidFill>
+            <a:prstDash val="solid"/>
+          </a:ln>
+        </p:spPr>
+      </p:sp>
+      <p:sp>
+        <p:nvSpPr>
+          <p:cNvPr id="33" name="Text 31"/>
+          <p:cNvSpPr txBox="1"/>
+          <p:nvPr/>
+        </p:nvSpPr>
+        <p:spPr>
+          <a:xfrm>
+            <a:off x="3217774" y="2308860"/>
+            <a:ext cx="749808" cy="201168"/>
+          </a:xfrm>
+          <a:prstGeom prst="rect">
+            <a:avLst/>
+          </a:prstGeom>
+          <a:noFill/>
+          <a:ln/>
+        </p:spPr>
+        <p:txBody>
+          <a:bodyPr wrap="square" lIns="0" tIns="0" rIns="0" bIns="0" rtlCol="0" anchor="ctr"/>
+          <a:lstStyle/>
+          <a:p>
+            <a:pPr algn="l" indent="0" marL="0">
+              <a:buNone/>
+            </a:pPr>
+            <a:r>
+              <a:rPr lang="en-US" sz="850" dirty="0">
+                <a:solidFill>
+                  <a:srgbClr val="2B2B2B"/>
+                </a:solidFill>
+                <a:latin typeface="Verdana" pitchFamily="34" charset="0"/>
+                <a:ea typeface="Verdana" pitchFamily="34" charset="-122"/>
+                <a:cs typeface="Verdana" pitchFamily="34" charset="-120"/>
+              </a:rPr>
+              <a:t>Italia</a:t>
+            </a:r>
+            <a:endParaRPr lang="en-US" sz="850" dirty="0"/>
+          </a:p>
+        </p:txBody>
+      </p:sp>
+      <p:sp>
+        <p:nvSpPr>
+          <p:cNvPr id="34" name="Shape 32"/>
+          <p:cNvSpPr/>
+          <p:nvPr/>
+        </p:nvSpPr>
+        <p:spPr>
+          <a:xfrm>
+            <a:off x="2502713" y="3502152"/>
+            <a:ext cx="173736" cy="173736"/>
+          </a:xfrm>
+          <a:prstGeom prst="ellipse">
+            <a:avLst/>
+          </a:prstGeom>
+          <a:solidFill>
+            <a:srgbClr val="A1A1A1"/>
+          </a:solidFill>
+          <a:ln w="6350">
+            <a:solidFill>
+              <a:srgbClr val="A1A1A1"/>
+            </a:solidFill>
+            <a:prstDash val="solid"/>
+          </a:ln>
+        </p:spPr>
+      </p:sp>
+      <p:sp>
+        <p:nvSpPr>
+          <p:cNvPr id="35" name="Text 33"/>
+          <p:cNvSpPr txBox="1"/>
+          <p:nvPr/>
+        </p:nvSpPr>
+        <p:spPr>
+          <a:xfrm>
+            <a:off x="2749601" y="3488436"/>
+            <a:ext cx="749808" cy="201168"/>
+          </a:xfrm>
+          <a:prstGeom prst="rect">
+            <a:avLst/>
+          </a:prstGeom>
+          <a:noFill/>
+          <a:ln/>
+        </p:spPr>
+        <p:txBody>
+          <a:bodyPr wrap="square" lIns="0" tIns="0" rIns="0" bIns="0" rtlCol="0" anchor="ctr"/>
+          <a:lstStyle/>
+          <a:p>
+            <a:pPr algn="l" indent="0" marL="0">
+              <a:buNone/>
+            </a:pPr>
+            <a:r>
+              <a:rPr lang="en-US" sz="850" dirty="0">
+                <a:solidFill>
+                  <a:srgbClr val="2B2B2B"/>
+                </a:solidFill>
+                <a:latin typeface="Verdana" pitchFamily="34" charset="0"/>
+                <a:ea typeface="Verdana" pitchFamily="34" charset="-122"/>
+                <a:cs typeface="Verdana" pitchFamily="34" charset="-120"/>
+              </a:rPr>
+              <a:t>Portugal</a:t>
+            </a:r>
+            <a:endParaRPr lang="en-US" sz="850" dirty="0"/>
+          </a:p>
+        </p:txBody>
+      </p:sp>
+      <p:sp>
+        <p:nvSpPr>
+          <p:cNvPr id="36" name="Shape 34"/>
+          <p:cNvSpPr/>
+          <p:nvPr/>
+        </p:nvSpPr>
+        <p:spPr>
+          <a:xfrm>
+            <a:off x="2897734" y="4091940"/>
+            <a:ext cx="173736" cy="173736"/>
+          </a:xfrm>
+          <a:prstGeom prst="ellipse">
+            <a:avLst/>
+          </a:prstGeom>
+          <a:solidFill>
+            <a:srgbClr val="A1A1A1"/>
+          </a:solidFill>
+          <a:ln w="6350">
+            <a:solidFill>
+              <a:srgbClr val="A1A1A1"/>
+            </a:solidFill>
+            <a:prstDash val="solid"/>
+          </a:ln>
+        </p:spPr>
+      </p:sp>
+      <p:sp>
+        <p:nvSpPr>
+          <p:cNvPr id="37" name="Text 35"/>
+          <p:cNvSpPr txBox="1"/>
+          <p:nvPr/>
+        </p:nvSpPr>
+        <p:spPr>
+          <a:xfrm>
+            <a:off x="3144622" y="4078224"/>
+            <a:ext cx="749808" cy="201168"/>
+          </a:xfrm>
+          <a:prstGeom prst="rect">
+            <a:avLst/>
+          </a:prstGeom>
+          <a:noFill/>
+          <a:ln/>
+        </p:spPr>
+        <p:txBody>
+          <a:bodyPr wrap="square" lIns="0" tIns="0" rIns="0" bIns="0" rtlCol="0" anchor="ctr"/>
+          <a:lstStyle/>
+          <a:p>
+            <a:pPr algn="l" indent="0" marL="0">
+              <a:buNone/>
+            </a:pPr>
+            <a:r>
+              <a:rPr lang="en-US" sz="850" dirty="0">
+                <a:solidFill>
+                  <a:srgbClr val="2B2B2B"/>
+                </a:solidFill>
+                <a:latin typeface="Verdana" pitchFamily="34" charset="0"/>
+                <a:ea typeface="Verdana" pitchFamily="34" charset="-122"/>
+                <a:cs typeface="Verdana" pitchFamily="34" charset="-120"/>
+              </a:rPr>
+              <a:t>P. Bajos</a:t>
+            </a:r>
+            <a:endParaRPr lang="en-US" sz="850" dirty="0"/>
+          </a:p>
+        </p:txBody>
+      </p:sp>
+      <p:sp>
+        <p:nvSpPr>
+          <p:cNvPr id="38" name="Shape 36"/>
+          <p:cNvSpPr/>
+          <p:nvPr/>
+        </p:nvSpPr>
+        <p:spPr>
+          <a:xfrm>
+            <a:off x="5136185" y="3895344"/>
+            <a:ext cx="173736" cy="173736"/>
+          </a:xfrm>
+          <a:prstGeom prst="ellipse">
+            <a:avLst/>
+          </a:prstGeom>
+          <a:solidFill>
+            <a:srgbClr val="A1A1A1"/>
+          </a:solidFill>
+          <a:ln w="6350">
+            <a:solidFill>
+              <a:srgbClr val="A1A1A1"/>
+            </a:solidFill>
+            <a:prstDash val="solid"/>
+          </a:ln>
+        </p:spPr>
+      </p:sp>
+      <p:sp>
+        <p:nvSpPr>
+          <p:cNvPr id="39" name="Text 37"/>
+          <p:cNvSpPr txBox="1"/>
+          <p:nvPr/>
+        </p:nvSpPr>
+        <p:spPr>
+          <a:xfrm>
+            <a:off x="4313225" y="3881628"/>
+            <a:ext cx="749808" cy="201168"/>
+          </a:xfrm>
+          <a:prstGeom prst="rect">
+            <a:avLst/>
+          </a:prstGeom>
+          <a:noFill/>
+          <a:ln/>
+        </p:spPr>
+        <p:txBody>
+          <a:bodyPr wrap="square" lIns="0" tIns="0" rIns="0" bIns="0" rtlCol="0" anchor="ctr"/>
+          <a:lstStyle/>
+          <a:p>
+            <a:pPr algn="r" indent="0" marL="0">
+              <a:buNone/>
+            </a:pPr>
+            <a:r>
+              <a:rPr lang="en-US" sz="850" dirty="0">
+                <a:solidFill>
+                  <a:srgbClr val="2B2B2B"/>
+                </a:solidFill>
+                <a:latin typeface="Verdana" pitchFamily="34" charset="0"/>
+                <a:ea typeface="Verdana" pitchFamily="34" charset="-122"/>
+                <a:cs typeface="Verdana" pitchFamily="34" charset="-120"/>
+              </a:rPr>
+              <a:t>Irlanda</a:t>
+            </a:r>
+            <a:endParaRPr lang="en-US" sz="850" dirty="0"/>
+          </a:p>
+        </p:txBody>
+      </p:sp>
+      <p:sp>
+        <p:nvSpPr>
+          <p:cNvPr id="40" name="Text 38"/>
+          <p:cNvSpPr txBox="1"/>
+          <p:nvPr/>
+        </p:nvSpPr>
+        <p:spPr>
+          <a:xfrm>
+            <a:off x="6519672" y="1591056"/>
+            <a:ext cx="5047488" cy="237744"/>
+          </a:xfrm>
+          <a:prstGeom prst="rect">
+            <a:avLst/>
+          </a:prstGeom>
+          <a:noFill/>
+          <a:ln/>
+        </p:spPr>
+        <p:txBody>
+          <a:bodyPr wrap="square" lIns="0" tIns="0" rIns="0" bIns="0" rtlCol="0" anchor="ctr"/>
+          <a:lstStyle/>
+          <a:p>
+            <a:pPr indent="0" marL="0">
+              <a:buNone/>
+            </a:pPr>
+            <a:r>
+              <a:rPr lang="en-US" sz="1250" b="1" dirty="0">
+                <a:solidFill>
+                  <a:srgbClr val="F56600"/>
+                </a:solidFill>
+                <a:latin typeface="Verdana" pitchFamily="34" charset="0"/>
+                <a:ea typeface="Verdana" pitchFamily="34" charset="-122"/>
+                <a:cs typeface="Verdana" pitchFamily="34" charset="-120"/>
+              </a:rPr>
+              <a:t>2 · ¿Baja el riesgo donde hay más información?</a:t>
+            </a:r>
+            <a:endParaRPr lang="en-US" sz="1250" dirty="0"/>
+          </a:p>
+        </p:txBody>
+      </p:sp>
+      <p:sp>
+        <p:nvSpPr>
+          <p:cNvPr id="41" name="Shape 39"/>
+          <p:cNvSpPr/>
+          <p:nvPr/>
+        </p:nvSpPr>
+        <p:spPr>
+          <a:xfrm>
+            <a:off x="7178040" y="2212848"/>
+            <a:ext cx="4389120" cy="2359152"/>
+          </a:xfrm>
+          <a:prstGeom prst="rect">
+            <a:avLst/>
+          </a:prstGeom>
+          <a:solidFill>
+            <a:srgbClr val="FFFFFF"/>
+          </a:solidFill>
+          <a:ln w="9525">
+            <a:solidFill>
+              <a:srgbClr val="CACACA"/>
+            </a:solidFill>
+            <a:prstDash val="solid"/>
+          </a:ln>
+        </p:spPr>
+      </p:sp>
+      <p:sp>
+        <p:nvSpPr>
+          <p:cNvPr id="42" name="Shape 40"/>
+          <p:cNvSpPr/>
+          <p:nvPr/>
+        </p:nvSpPr>
+        <p:spPr>
+          <a:xfrm>
+            <a:off x="7178040" y="4375404"/>
+            <a:ext cx="4389120" cy="7315"/>
           </a:xfrm>
           <a:prstGeom prst="rect">
             <a:avLst/>
@@ -21294,14 +22438,785 @@
       </p:sp>
       <p:sp>
         <p:nvSpPr>
-          <p:cNvPr id="9" name="Text 7"/>
+          <p:cNvPr id="43" name="Text 41"/>
           <p:cNvSpPr txBox="1"/>
           <p:nvPr/>
         </p:nvSpPr>
         <p:spPr>
           <a:xfrm>
-            <a:off x="676656" y="4203192"/>
-            <a:ext cx="731520" cy="201168"/>
+            <a:off x="6483096" y="4274820"/>
+            <a:ext cx="621792" cy="201168"/>
+          </a:xfrm>
+          <a:prstGeom prst="rect">
+            <a:avLst/>
+          </a:prstGeom>
+          <a:noFill/>
+          <a:ln/>
+        </p:spPr>
+        <p:txBody>
+          <a:bodyPr wrap="square" lIns="0" tIns="0" rIns="0" bIns="0" rtlCol="0" anchor="ctr"/>
+          <a:lstStyle/>
+          <a:p>
+            <a:pPr algn="r" indent="0" marL="0">
+              <a:buNone/>
+            </a:pPr>
+            <a:r>
+              <a:rPr lang="en-US" sz="800" dirty="0">
+                <a:solidFill>
+                  <a:srgbClr val="818181"/>
+                </a:solidFill>
+                <a:latin typeface="Verdana" pitchFamily="34" charset="0"/>
+                <a:ea typeface="Verdana" pitchFamily="34" charset="-122"/>
+                <a:cs typeface="Verdana" pitchFamily="34" charset="-120"/>
+              </a:rPr>
+              <a:t>0,3 %</a:t>
+            </a:r>
+            <a:endParaRPr lang="en-US" sz="800" dirty="0"/>
+          </a:p>
+        </p:txBody>
+      </p:sp>
+      <p:sp>
+        <p:nvSpPr>
+          <p:cNvPr id="44" name="Shape 42"/>
+          <p:cNvSpPr/>
+          <p:nvPr/>
+        </p:nvSpPr>
+        <p:spPr>
+          <a:xfrm>
+            <a:off x="7178040" y="3982212"/>
+            <a:ext cx="4389120" cy="7315"/>
+          </a:xfrm>
+          <a:prstGeom prst="rect">
+            <a:avLst/>
+          </a:prstGeom>
+          <a:solidFill>
+            <a:srgbClr val="E5E5E5"/>
+          </a:solidFill>
+          <a:ln w="12700">
+            <a:solidFill>
+              <a:srgbClr val="E5E5E5"/>
+            </a:solidFill>
+            <a:prstDash val="solid"/>
+          </a:ln>
+        </p:spPr>
+      </p:sp>
+      <p:sp>
+        <p:nvSpPr>
+          <p:cNvPr id="45" name="Text 43"/>
+          <p:cNvSpPr txBox="1"/>
+          <p:nvPr/>
+        </p:nvSpPr>
+        <p:spPr>
+          <a:xfrm>
+            <a:off x="6483096" y="3881628"/>
+            <a:ext cx="621792" cy="201168"/>
+          </a:xfrm>
+          <a:prstGeom prst="rect">
+            <a:avLst/>
+          </a:prstGeom>
+          <a:noFill/>
+          <a:ln/>
+        </p:spPr>
+        <p:txBody>
+          <a:bodyPr wrap="square" lIns="0" tIns="0" rIns="0" bIns="0" rtlCol="0" anchor="ctr"/>
+          <a:lstStyle/>
+          <a:p>
+            <a:pPr algn="r" indent="0" marL="0">
+              <a:buNone/>
+            </a:pPr>
+            <a:r>
+              <a:rPr lang="en-US" sz="800" dirty="0">
+                <a:solidFill>
+                  <a:srgbClr val="818181"/>
+                </a:solidFill>
+                <a:latin typeface="Verdana" pitchFamily="34" charset="0"/>
+                <a:ea typeface="Verdana" pitchFamily="34" charset="-122"/>
+                <a:cs typeface="Verdana" pitchFamily="34" charset="-120"/>
+              </a:rPr>
+              <a:t>0,4 %</a:t>
+            </a:r>
+            <a:endParaRPr lang="en-US" sz="800" dirty="0"/>
+          </a:p>
+        </p:txBody>
+      </p:sp>
+      <p:sp>
+        <p:nvSpPr>
+          <p:cNvPr id="46" name="Shape 44"/>
+          <p:cNvSpPr/>
+          <p:nvPr/>
+        </p:nvSpPr>
+        <p:spPr>
+          <a:xfrm>
+            <a:off x="7178040" y="3589020"/>
+            <a:ext cx="4389120" cy="7315"/>
+          </a:xfrm>
+          <a:prstGeom prst="rect">
+            <a:avLst/>
+          </a:prstGeom>
+          <a:solidFill>
+            <a:srgbClr val="E5E5E5"/>
+          </a:solidFill>
+          <a:ln w="12700">
+            <a:solidFill>
+              <a:srgbClr val="E5E5E5"/>
+            </a:solidFill>
+            <a:prstDash val="solid"/>
+          </a:ln>
+        </p:spPr>
+      </p:sp>
+      <p:sp>
+        <p:nvSpPr>
+          <p:cNvPr id="47" name="Text 45"/>
+          <p:cNvSpPr txBox="1"/>
+          <p:nvPr/>
+        </p:nvSpPr>
+        <p:spPr>
+          <a:xfrm>
+            <a:off x="6483096" y="3488436"/>
+            <a:ext cx="621792" cy="201168"/>
+          </a:xfrm>
+          <a:prstGeom prst="rect">
+            <a:avLst/>
+          </a:prstGeom>
+          <a:noFill/>
+          <a:ln/>
+        </p:spPr>
+        <p:txBody>
+          <a:bodyPr wrap="square" lIns="0" tIns="0" rIns="0" bIns="0" rtlCol="0" anchor="ctr"/>
+          <a:lstStyle/>
+          <a:p>
+            <a:pPr algn="r" indent="0" marL="0">
+              <a:buNone/>
+            </a:pPr>
+            <a:r>
+              <a:rPr lang="en-US" sz="800" dirty="0">
+                <a:solidFill>
+                  <a:srgbClr val="818181"/>
+                </a:solidFill>
+                <a:latin typeface="Verdana" pitchFamily="34" charset="0"/>
+                <a:ea typeface="Verdana" pitchFamily="34" charset="-122"/>
+                <a:cs typeface="Verdana" pitchFamily="34" charset="-120"/>
+              </a:rPr>
+              <a:t>0,5 %</a:t>
+            </a:r>
+            <a:endParaRPr lang="en-US" sz="800" dirty="0"/>
+          </a:p>
+        </p:txBody>
+      </p:sp>
+      <p:sp>
+        <p:nvSpPr>
+          <p:cNvPr id="48" name="Shape 46"/>
+          <p:cNvSpPr/>
+          <p:nvPr/>
+        </p:nvSpPr>
+        <p:spPr>
+          <a:xfrm>
+            <a:off x="7178040" y="3195828"/>
+            <a:ext cx="4389120" cy="7315"/>
+          </a:xfrm>
+          <a:prstGeom prst="rect">
+            <a:avLst/>
+          </a:prstGeom>
+          <a:solidFill>
+            <a:srgbClr val="E5E5E5"/>
+          </a:solidFill>
+          <a:ln w="12700">
+            <a:solidFill>
+              <a:srgbClr val="E5E5E5"/>
+            </a:solidFill>
+            <a:prstDash val="solid"/>
+          </a:ln>
+        </p:spPr>
+      </p:sp>
+      <p:sp>
+        <p:nvSpPr>
+          <p:cNvPr id="49" name="Text 47"/>
+          <p:cNvSpPr txBox="1"/>
+          <p:nvPr/>
+        </p:nvSpPr>
+        <p:spPr>
+          <a:xfrm>
+            <a:off x="6483096" y="3095244"/>
+            <a:ext cx="621792" cy="201168"/>
+          </a:xfrm>
+          <a:prstGeom prst="rect">
+            <a:avLst/>
+          </a:prstGeom>
+          <a:noFill/>
+          <a:ln/>
+        </p:spPr>
+        <p:txBody>
+          <a:bodyPr wrap="square" lIns="0" tIns="0" rIns="0" bIns="0" rtlCol="0" anchor="ctr"/>
+          <a:lstStyle/>
+          <a:p>
+            <a:pPr algn="r" indent="0" marL="0">
+              <a:buNone/>
+            </a:pPr>
+            <a:r>
+              <a:rPr lang="en-US" sz="800" dirty="0">
+                <a:solidFill>
+                  <a:srgbClr val="818181"/>
+                </a:solidFill>
+                <a:latin typeface="Verdana" pitchFamily="34" charset="0"/>
+                <a:ea typeface="Verdana" pitchFamily="34" charset="-122"/>
+                <a:cs typeface="Verdana" pitchFamily="34" charset="-120"/>
+              </a:rPr>
+              <a:t>0,6 %</a:t>
+            </a:r>
+            <a:endParaRPr lang="en-US" sz="800" dirty="0"/>
+          </a:p>
+        </p:txBody>
+      </p:sp>
+      <p:sp>
+        <p:nvSpPr>
+          <p:cNvPr id="50" name="Shape 48"/>
+          <p:cNvSpPr/>
+          <p:nvPr/>
+        </p:nvSpPr>
+        <p:spPr>
+          <a:xfrm>
+            <a:off x="7178040" y="2802636"/>
+            <a:ext cx="4389120" cy="7315"/>
+          </a:xfrm>
+          <a:prstGeom prst="rect">
+            <a:avLst/>
+          </a:prstGeom>
+          <a:solidFill>
+            <a:srgbClr val="E5E5E5"/>
+          </a:solidFill>
+          <a:ln w="12700">
+            <a:solidFill>
+              <a:srgbClr val="E5E5E5"/>
+            </a:solidFill>
+            <a:prstDash val="solid"/>
+          </a:ln>
+        </p:spPr>
+      </p:sp>
+      <p:sp>
+        <p:nvSpPr>
+          <p:cNvPr id="51" name="Text 49"/>
+          <p:cNvSpPr txBox="1"/>
+          <p:nvPr/>
+        </p:nvSpPr>
+        <p:spPr>
+          <a:xfrm>
+            <a:off x="6483096" y="2702052"/>
+            <a:ext cx="621792" cy="201168"/>
+          </a:xfrm>
+          <a:prstGeom prst="rect">
+            <a:avLst/>
+          </a:prstGeom>
+          <a:noFill/>
+          <a:ln/>
+        </p:spPr>
+        <p:txBody>
+          <a:bodyPr wrap="square" lIns="0" tIns="0" rIns="0" bIns="0" rtlCol="0" anchor="ctr"/>
+          <a:lstStyle/>
+          <a:p>
+            <a:pPr algn="r" indent="0" marL="0">
+              <a:buNone/>
+            </a:pPr>
+            <a:r>
+              <a:rPr lang="en-US" sz="800" dirty="0">
+                <a:solidFill>
+                  <a:srgbClr val="818181"/>
+                </a:solidFill>
+                <a:latin typeface="Verdana" pitchFamily="34" charset="0"/>
+                <a:ea typeface="Verdana" pitchFamily="34" charset="-122"/>
+                <a:cs typeface="Verdana" pitchFamily="34" charset="-120"/>
+              </a:rPr>
+              <a:t>0,7 %</a:t>
+            </a:r>
+            <a:endParaRPr lang="en-US" sz="800" dirty="0"/>
+          </a:p>
+        </p:txBody>
+      </p:sp>
+      <p:sp>
+        <p:nvSpPr>
+          <p:cNvPr id="52" name="Shape 50"/>
+          <p:cNvSpPr/>
+          <p:nvPr/>
+        </p:nvSpPr>
+        <p:spPr>
+          <a:xfrm>
+            <a:off x="7178040" y="2409444"/>
+            <a:ext cx="4389120" cy="7315"/>
+          </a:xfrm>
+          <a:prstGeom prst="rect">
+            <a:avLst/>
+          </a:prstGeom>
+          <a:solidFill>
+            <a:srgbClr val="E5E5E5"/>
+          </a:solidFill>
+          <a:ln w="12700">
+            <a:solidFill>
+              <a:srgbClr val="E5E5E5"/>
+            </a:solidFill>
+            <a:prstDash val="solid"/>
+          </a:ln>
+        </p:spPr>
+      </p:sp>
+      <p:sp>
+        <p:nvSpPr>
+          <p:cNvPr id="53" name="Text 51"/>
+          <p:cNvSpPr txBox="1"/>
+          <p:nvPr/>
+        </p:nvSpPr>
+        <p:spPr>
+          <a:xfrm>
+            <a:off x="6483096" y="2308860"/>
+            <a:ext cx="621792" cy="201168"/>
+          </a:xfrm>
+          <a:prstGeom prst="rect">
+            <a:avLst/>
+          </a:prstGeom>
+          <a:noFill/>
+          <a:ln/>
+        </p:spPr>
+        <p:txBody>
+          <a:bodyPr wrap="square" lIns="0" tIns="0" rIns="0" bIns="0" rtlCol="0" anchor="ctr"/>
+          <a:lstStyle/>
+          <a:p>
+            <a:pPr algn="r" indent="0" marL="0">
+              <a:buNone/>
+            </a:pPr>
+            <a:r>
+              <a:rPr lang="en-US" sz="800" dirty="0">
+                <a:solidFill>
+                  <a:srgbClr val="818181"/>
+                </a:solidFill>
+                <a:latin typeface="Verdana" pitchFamily="34" charset="0"/>
+                <a:ea typeface="Verdana" pitchFamily="34" charset="-122"/>
+                <a:cs typeface="Verdana" pitchFamily="34" charset="-120"/>
+              </a:rPr>
+              <a:t>0,8 %</a:t>
+            </a:r>
+            <a:endParaRPr lang="en-US" sz="800" dirty="0"/>
+          </a:p>
+        </p:txBody>
+      </p:sp>
+      <p:sp>
+        <p:nvSpPr>
+          <p:cNvPr id="54" name="Text 52"/>
+          <p:cNvSpPr txBox="1"/>
+          <p:nvPr/>
+        </p:nvSpPr>
+        <p:spPr>
+          <a:xfrm>
+            <a:off x="7456516" y="4626864"/>
+            <a:ext cx="640080" cy="201168"/>
+          </a:xfrm>
+          <a:prstGeom prst="rect">
+            <a:avLst/>
+          </a:prstGeom>
+          <a:noFill/>
+          <a:ln/>
+        </p:spPr>
+        <p:txBody>
+          <a:bodyPr wrap="square" lIns="0" tIns="0" rIns="0" bIns="0" rtlCol="0" anchor="ctr"/>
+          <a:lstStyle/>
+          <a:p>
+            <a:pPr algn="ctr" indent="0" marL="0">
+              <a:buNone/>
+            </a:pPr>
+            <a:r>
+              <a:rPr lang="en-US" sz="800" dirty="0">
+                <a:solidFill>
+                  <a:srgbClr val="818181"/>
+                </a:solidFill>
+                <a:latin typeface="Verdana" pitchFamily="34" charset="0"/>
+                <a:ea typeface="Verdana" pitchFamily="34" charset="-122"/>
+                <a:cs typeface="Verdana" pitchFamily="34" charset="-120"/>
+              </a:rPr>
+              <a:t>20</a:t>
+            </a:r>
+            <a:endParaRPr lang="en-US" sz="800" dirty="0"/>
+          </a:p>
+        </p:txBody>
+      </p:sp>
+      <p:sp>
+        <p:nvSpPr>
+          <p:cNvPr id="55" name="Text 53"/>
+          <p:cNvSpPr txBox="1"/>
+          <p:nvPr/>
+        </p:nvSpPr>
+        <p:spPr>
+          <a:xfrm>
+            <a:off x="8454044" y="4626864"/>
+            <a:ext cx="640080" cy="201168"/>
+          </a:xfrm>
+          <a:prstGeom prst="rect">
+            <a:avLst/>
+          </a:prstGeom>
+          <a:noFill/>
+          <a:ln/>
+        </p:spPr>
+        <p:txBody>
+          <a:bodyPr wrap="square" lIns="0" tIns="0" rIns="0" bIns="0" rtlCol="0" anchor="ctr"/>
+          <a:lstStyle/>
+          <a:p>
+            <a:pPr algn="ctr" indent="0" marL="0">
+              <a:buNone/>
+            </a:pPr>
+            <a:r>
+              <a:rPr lang="en-US" sz="800" dirty="0">
+                <a:solidFill>
+                  <a:srgbClr val="818181"/>
+                </a:solidFill>
+                <a:latin typeface="Verdana" pitchFamily="34" charset="0"/>
+                <a:ea typeface="Verdana" pitchFamily="34" charset="-122"/>
+                <a:cs typeface="Verdana" pitchFamily="34" charset="-120"/>
+              </a:rPr>
+              <a:t>40</a:t>
+            </a:r>
+            <a:endParaRPr lang="en-US" sz="800" dirty="0"/>
+          </a:p>
+        </p:txBody>
+      </p:sp>
+      <p:sp>
+        <p:nvSpPr>
+          <p:cNvPr id="56" name="Text 54"/>
+          <p:cNvSpPr txBox="1"/>
+          <p:nvPr/>
+        </p:nvSpPr>
+        <p:spPr>
+          <a:xfrm>
+            <a:off x="9451571" y="4626864"/>
+            <a:ext cx="640080" cy="201168"/>
+          </a:xfrm>
+          <a:prstGeom prst="rect">
+            <a:avLst/>
+          </a:prstGeom>
+          <a:noFill/>
+          <a:ln/>
+        </p:spPr>
+        <p:txBody>
+          <a:bodyPr wrap="square" lIns="0" tIns="0" rIns="0" bIns="0" rtlCol="0" anchor="ctr"/>
+          <a:lstStyle/>
+          <a:p>
+            <a:pPr algn="ctr" indent="0" marL="0">
+              <a:buNone/>
+            </a:pPr>
+            <a:r>
+              <a:rPr lang="en-US" sz="800" dirty="0">
+                <a:solidFill>
+                  <a:srgbClr val="818181"/>
+                </a:solidFill>
+                <a:latin typeface="Verdana" pitchFamily="34" charset="0"/>
+                <a:ea typeface="Verdana" pitchFamily="34" charset="-122"/>
+                <a:cs typeface="Verdana" pitchFamily="34" charset="-120"/>
+              </a:rPr>
+              <a:t>60</a:t>
+            </a:r>
+            <a:endParaRPr lang="en-US" sz="800" dirty="0"/>
+          </a:p>
+        </p:txBody>
+      </p:sp>
+      <p:sp>
+        <p:nvSpPr>
+          <p:cNvPr id="57" name="Text 55"/>
+          <p:cNvSpPr txBox="1"/>
+          <p:nvPr/>
+        </p:nvSpPr>
+        <p:spPr>
+          <a:xfrm>
+            <a:off x="10449098" y="4626864"/>
+            <a:ext cx="640080" cy="201168"/>
+          </a:xfrm>
+          <a:prstGeom prst="rect">
+            <a:avLst/>
+          </a:prstGeom>
+          <a:noFill/>
+          <a:ln/>
+        </p:spPr>
+        <p:txBody>
+          <a:bodyPr wrap="square" lIns="0" tIns="0" rIns="0" bIns="0" rtlCol="0" anchor="ctr"/>
+          <a:lstStyle/>
+          <a:p>
+            <a:pPr algn="ctr" indent="0" marL="0">
+              <a:buNone/>
+            </a:pPr>
+            <a:r>
+              <a:rPr lang="en-US" sz="800" dirty="0">
+                <a:solidFill>
+                  <a:srgbClr val="818181"/>
+                </a:solidFill>
+                <a:latin typeface="Verdana" pitchFamily="34" charset="0"/>
+                <a:ea typeface="Verdana" pitchFamily="34" charset="-122"/>
+                <a:cs typeface="Verdana" pitchFamily="34" charset="-120"/>
+              </a:rPr>
+              <a:t>80</a:t>
+            </a:r>
+            <a:endParaRPr lang="en-US" sz="800" dirty="0"/>
+          </a:p>
+        </p:txBody>
+      </p:sp>
+      <p:sp>
+        <p:nvSpPr>
+          <p:cNvPr id="58" name="Text 56"/>
+          <p:cNvSpPr txBox="1"/>
+          <p:nvPr/>
+        </p:nvSpPr>
+        <p:spPr>
+          <a:xfrm>
+            <a:off x="7178040" y="4846320"/>
+            <a:ext cx="4389120" cy="201168"/>
+          </a:xfrm>
+          <a:prstGeom prst="rect">
+            <a:avLst/>
+          </a:prstGeom>
+          <a:noFill/>
+          <a:ln/>
+        </p:spPr>
+        <p:txBody>
+          <a:bodyPr wrap="square" lIns="0" tIns="0" rIns="0" bIns="0" rtlCol="0" anchor="ctr"/>
+          <a:lstStyle/>
+          <a:p>
+            <a:pPr algn="ctr" indent="0" marL="0">
+              <a:buNone/>
+            </a:pPr>
+            <a:r>
+              <a:rPr lang="en-US" sz="850" dirty="0">
+                <a:solidFill>
+                  <a:srgbClr val="2B2B2B"/>
+                </a:solidFill>
+                <a:latin typeface="Verdana" pitchFamily="34" charset="0"/>
+                <a:ea typeface="Verdana" pitchFamily="34" charset="-122"/>
+                <a:cs typeface="Verdana" pitchFamily="34" charset="-120"/>
+              </a:rPr>
+              <a:t>Índice de información para la selección (0–100)</a:t>
+            </a:r>
+            <a:endParaRPr lang="en-US" sz="850" dirty="0"/>
+          </a:p>
+        </p:txBody>
+      </p:sp>
+      <p:sp>
+        <p:nvSpPr>
+          <p:cNvPr id="59" name="Shape 57"/>
+          <p:cNvSpPr/>
+          <p:nvPr/>
+        </p:nvSpPr>
+        <p:spPr>
+          <a:xfrm>
+            <a:off x="9881339" y="3125419"/>
+            <a:ext cx="219456" cy="219456"/>
+          </a:xfrm>
+          <a:prstGeom prst="ellipse">
+            <a:avLst/>
+          </a:prstGeom>
+          <a:solidFill>
+            <a:srgbClr val="F56600"/>
+          </a:solidFill>
+          <a:ln w="19050">
+            <a:solidFill>
+              <a:srgbClr val="2B2B2B"/>
+            </a:solidFill>
+            <a:prstDash val="solid"/>
+          </a:ln>
+        </p:spPr>
+      </p:sp>
+      <p:sp>
+        <p:nvSpPr>
+          <p:cNvPr id="60" name="Text 58"/>
+          <p:cNvSpPr txBox="1"/>
+          <p:nvPr/>
+        </p:nvSpPr>
+        <p:spPr>
+          <a:xfrm>
+            <a:off x="10173947" y="3134563"/>
+            <a:ext cx="749808" cy="201168"/>
+          </a:xfrm>
+          <a:prstGeom prst="rect">
+            <a:avLst/>
+          </a:prstGeom>
+          <a:noFill/>
+          <a:ln/>
+        </p:spPr>
+        <p:txBody>
+          <a:bodyPr wrap="square" lIns="0" tIns="0" rIns="0" bIns="0" rtlCol="0" anchor="ctr"/>
+          <a:lstStyle/>
+          <a:p>
+            <a:pPr algn="l" indent="0" marL="0">
+              <a:buNone/>
+            </a:pPr>
+            <a:r>
+              <a:rPr lang="en-US" sz="850" b="1" dirty="0">
+                <a:solidFill>
+                  <a:srgbClr val="F56600"/>
+                </a:solidFill>
+                <a:latin typeface="Verdana" pitchFamily="34" charset="0"/>
+                <a:ea typeface="Verdana" pitchFamily="34" charset="-122"/>
+                <a:cs typeface="Verdana" pitchFamily="34" charset="-120"/>
+              </a:rPr>
+              <a:t>España</a:t>
+            </a:r>
+            <a:endParaRPr lang="en-US" sz="850" dirty="0"/>
+          </a:p>
+        </p:txBody>
+      </p:sp>
+      <p:sp>
+        <p:nvSpPr>
+          <p:cNvPr id="61" name="Shape 59"/>
+          <p:cNvSpPr/>
+          <p:nvPr/>
+        </p:nvSpPr>
+        <p:spPr>
+          <a:xfrm>
+            <a:off x="10432888" y="3895344"/>
+            <a:ext cx="173736" cy="173736"/>
+          </a:xfrm>
+          <a:prstGeom prst="ellipse">
+            <a:avLst/>
+          </a:prstGeom>
+          <a:solidFill>
+            <a:srgbClr val="A1A1A1"/>
+          </a:solidFill>
+          <a:ln w="6350">
+            <a:solidFill>
+              <a:srgbClr val="A1A1A1"/>
+            </a:solidFill>
+            <a:prstDash val="solid"/>
+          </a:ln>
+        </p:spPr>
+      </p:sp>
+      <p:sp>
+        <p:nvSpPr>
+          <p:cNvPr id="62" name="Text 60"/>
+          <p:cNvSpPr txBox="1"/>
+          <p:nvPr/>
+        </p:nvSpPr>
+        <p:spPr>
+          <a:xfrm>
+            <a:off x="10679776" y="4110228"/>
+            <a:ext cx="749808" cy="201168"/>
+          </a:xfrm>
+          <a:prstGeom prst="rect">
+            <a:avLst/>
+          </a:prstGeom>
+          <a:noFill/>
+          <a:ln/>
+        </p:spPr>
+        <p:txBody>
+          <a:bodyPr wrap="square" lIns="0" tIns="0" rIns="0" bIns="0" rtlCol="0" anchor="ctr"/>
+          <a:lstStyle/>
+          <a:p>
+            <a:pPr algn="l" indent="0" marL="0">
+              <a:buNone/>
+            </a:pPr>
+            <a:r>
+              <a:rPr lang="en-US" sz="850" dirty="0">
+                <a:solidFill>
+                  <a:srgbClr val="2B2B2B"/>
+                </a:solidFill>
+                <a:latin typeface="Verdana" pitchFamily="34" charset="0"/>
+                <a:ea typeface="Verdana" pitchFamily="34" charset="-122"/>
+                <a:cs typeface="Verdana" pitchFamily="34" charset="-120"/>
+              </a:rPr>
+              <a:t>Alemania</a:t>
+            </a:r>
+            <a:endParaRPr lang="en-US" sz="850" dirty="0"/>
+          </a:p>
+        </p:txBody>
+      </p:sp>
+      <p:sp>
+        <p:nvSpPr>
+          <p:cNvPr id="63" name="Shape 61"/>
+          <p:cNvSpPr/>
+          <p:nvPr/>
+        </p:nvSpPr>
+        <p:spPr>
+          <a:xfrm>
+            <a:off x="7525096" y="2794406"/>
+            <a:ext cx="173736" cy="173736"/>
+          </a:xfrm>
+          <a:prstGeom prst="ellipse">
+            <a:avLst/>
+          </a:prstGeom>
+          <a:solidFill>
+            <a:srgbClr val="A1A1A1"/>
+          </a:solidFill>
+          <a:ln w="6350">
+            <a:solidFill>
+              <a:srgbClr val="A1A1A1"/>
+            </a:solidFill>
+            <a:prstDash val="solid"/>
+          </a:ln>
+        </p:spPr>
+      </p:sp>
+      <p:sp>
+        <p:nvSpPr>
+          <p:cNvPr id="64" name="Text 62"/>
+          <p:cNvSpPr txBox="1"/>
+          <p:nvPr/>
+        </p:nvSpPr>
+        <p:spPr>
+          <a:xfrm>
+            <a:off x="7771984" y="2780690"/>
+            <a:ext cx="749808" cy="201168"/>
+          </a:xfrm>
+          <a:prstGeom prst="rect">
+            <a:avLst/>
+          </a:prstGeom>
+          <a:noFill/>
+          <a:ln/>
+        </p:spPr>
+        <p:txBody>
+          <a:bodyPr wrap="square" lIns="0" tIns="0" rIns="0" bIns="0" rtlCol="0" anchor="ctr"/>
+          <a:lstStyle/>
+          <a:p>
+            <a:pPr algn="l" indent="0" marL="0">
+              <a:buNone/>
+            </a:pPr>
+            <a:r>
+              <a:rPr lang="en-US" sz="850" dirty="0">
+                <a:solidFill>
+                  <a:srgbClr val="2B2B2B"/>
+                </a:solidFill>
+                <a:latin typeface="Verdana" pitchFamily="34" charset="0"/>
+                <a:ea typeface="Verdana" pitchFamily="34" charset="-122"/>
+                <a:cs typeface="Verdana" pitchFamily="34" charset="-120"/>
+              </a:rPr>
+              <a:t>Francia</a:t>
+            </a:r>
+            <a:endParaRPr lang="en-US" sz="850" dirty="0"/>
+          </a:p>
+        </p:txBody>
+      </p:sp>
+      <p:sp>
+        <p:nvSpPr>
+          <p:cNvPr id="65" name="Shape 63"/>
+          <p:cNvSpPr/>
+          <p:nvPr/>
+        </p:nvSpPr>
+        <p:spPr>
+          <a:xfrm>
+            <a:off x="10642369" y="2322576"/>
+            <a:ext cx="173736" cy="173736"/>
+          </a:xfrm>
+          <a:prstGeom prst="ellipse">
+            <a:avLst/>
+          </a:prstGeom>
+          <a:solidFill>
+            <a:srgbClr val="A1A1A1"/>
+          </a:solidFill>
+          <a:ln w="6350">
+            <a:solidFill>
+              <a:srgbClr val="A1A1A1"/>
+            </a:solidFill>
+            <a:prstDash val="solid"/>
+          </a:ln>
+        </p:spPr>
+      </p:sp>
+      <p:sp>
+        <p:nvSpPr>
+          <p:cNvPr id="66" name="Text 64"/>
+          <p:cNvSpPr txBox="1"/>
+          <p:nvPr/>
+        </p:nvSpPr>
+        <p:spPr>
+          <a:xfrm>
+            <a:off x="9819409" y="2308860"/>
+            <a:ext cx="749808" cy="201168"/>
           </a:xfrm>
           <a:prstGeom prst="rect">
             <a:avLst/>
@@ -21319,13 +23234,13 @@
             <a:r>
               <a:rPr lang="en-US" sz="850" dirty="0">
                 <a:solidFill>
-                  <a:srgbClr val="818181"/>
+                  <a:srgbClr val="2B2B2B"/>
                 </a:solidFill>
                 <a:latin typeface="Verdana" pitchFamily="34" charset="0"/>
                 <a:ea typeface="Verdana" pitchFamily="34" charset="-122"/>
                 <a:cs typeface="Verdana" pitchFamily="34" charset="-120"/>
               </a:rPr>
-              <a:t>4,0 %</a:t>
+              <a:t>Italia</a:t>
             </a:r>
             <a:endParaRPr lang="en-US" sz="850" dirty="0"/>
           </a:p>
@@ -21333,24 +23248,24 @@
       </p:sp>
       <p:sp>
         <p:nvSpPr>
-          <p:cNvPr id="10" name="Shape 8"/>
+          <p:cNvPr id="67" name="Shape 65"/>
           <p:cNvSpPr/>
           <p:nvPr/>
         </p:nvSpPr>
         <p:spPr>
           <a:xfrm>
-            <a:off x="1481328" y="3724656"/>
-            <a:ext cx="6309360" cy="7315"/>
+            <a:off x="9909187" y="3502152"/>
+            <a:ext cx="173736" cy="173736"/>
           </a:xfrm>
-          <a:prstGeom prst="rect">
+          <a:prstGeom prst="ellipse">
             <a:avLst/>
           </a:prstGeom>
           <a:solidFill>
-            <a:srgbClr val="E5E5E5"/>
+            <a:srgbClr val="A1A1A1"/>
           </a:solidFill>
-          <a:ln w="12700">
+          <a:ln w="6350">
             <a:solidFill>
-              <a:srgbClr val="E5E5E5"/>
+              <a:srgbClr val="A1A1A1"/>
             </a:solidFill>
             <a:prstDash val="solid"/>
           </a:ln>
@@ -21358,14 +23273,14 @@
       </p:sp>
       <p:sp>
         <p:nvSpPr>
-          <p:cNvPr id="11" name="Text 9"/>
+          <p:cNvPr id="68" name="Text 66"/>
           <p:cNvSpPr txBox="1"/>
           <p:nvPr/>
         </p:nvSpPr>
         <p:spPr>
           <a:xfrm>
-            <a:off x="676656" y="3624072"/>
-            <a:ext cx="731520" cy="201168"/>
+            <a:off x="9086227" y="3488436"/>
+            <a:ext cx="749808" cy="201168"/>
           </a:xfrm>
           <a:prstGeom prst="rect">
             <a:avLst/>
@@ -21383,13 +23298,13 @@
             <a:r>
               <a:rPr lang="en-US" sz="850" dirty="0">
                 <a:solidFill>
-                  <a:srgbClr val="818181"/>
+                  <a:srgbClr val="2B2B2B"/>
                 </a:solidFill>
                 <a:latin typeface="Verdana" pitchFamily="34" charset="0"/>
                 <a:ea typeface="Verdana" pitchFamily="34" charset="-122"/>
                 <a:cs typeface="Verdana" pitchFamily="34" charset="-120"/>
               </a:rPr>
-              <a:t>4,5 %</a:t>
+              <a:t>Portugal</a:t>
             </a:r>
             <a:endParaRPr lang="en-US" sz="850" dirty="0"/>
           </a:p>
@@ -21397,24 +23312,24 @@
       </p:sp>
       <p:sp>
         <p:nvSpPr>
-          <p:cNvPr id="12" name="Shape 10"/>
+          <p:cNvPr id="69" name="Shape 67"/>
           <p:cNvSpPr/>
           <p:nvPr/>
         </p:nvSpPr>
         <p:spPr>
           <a:xfrm>
-            <a:off x="1481328" y="3145536"/>
-            <a:ext cx="6309360" cy="7315"/>
+            <a:off x="9375509" y="4091940"/>
+            <a:ext cx="173736" cy="173736"/>
           </a:xfrm>
-          <a:prstGeom prst="rect">
+          <a:prstGeom prst="ellipse">
             <a:avLst/>
           </a:prstGeom>
           <a:solidFill>
-            <a:srgbClr val="E5E5E5"/>
+            <a:srgbClr val="A1A1A1"/>
           </a:solidFill>
-          <a:ln w="12700">
+          <a:ln w="6350">
             <a:solidFill>
-              <a:srgbClr val="E5E5E5"/>
+              <a:srgbClr val="A1A1A1"/>
             </a:solidFill>
             <a:prstDash val="solid"/>
           </a:ln>
@@ -21422,14 +23337,14 @@
       </p:sp>
       <p:sp>
         <p:nvSpPr>
-          <p:cNvPr id="13" name="Text 11"/>
+          <p:cNvPr id="70" name="Text 68"/>
           <p:cNvSpPr txBox="1"/>
           <p:nvPr/>
         </p:nvSpPr>
         <p:spPr>
           <a:xfrm>
-            <a:off x="676656" y="3044952"/>
-            <a:ext cx="731520" cy="201168"/>
+            <a:off x="8552549" y="4078224"/>
+            <a:ext cx="749808" cy="201168"/>
           </a:xfrm>
           <a:prstGeom prst="rect">
             <a:avLst/>
@@ -21447,13 +23362,13 @@
             <a:r>
               <a:rPr lang="en-US" sz="850" dirty="0">
                 <a:solidFill>
-                  <a:srgbClr val="818181"/>
+                  <a:srgbClr val="2B2B2B"/>
                 </a:solidFill>
                 <a:latin typeface="Verdana" pitchFamily="34" charset="0"/>
                 <a:ea typeface="Verdana" pitchFamily="34" charset="-122"/>
                 <a:cs typeface="Verdana" pitchFamily="34" charset="-120"/>
               </a:rPr>
-              <a:t>5,0 %</a:t>
+              <a:t>P. Bajos</a:t>
             </a:r>
             <a:endParaRPr lang="en-US" sz="850" dirty="0"/>
           </a:p>
@@ -21461,24 +23376,24 @@
       </p:sp>
       <p:sp>
         <p:nvSpPr>
-          <p:cNvPr id="14" name="Shape 12"/>
+          <p:cNvPr id="71" name="Shape 69"/>
           <p:cNvSpPr/>
           <p:nvPr/>
         </p:nvSpPr>
         <p:spPr>
           <a:xfrm>
-            <a:off x="1481328" y="2566416"/>
-            <a:ext cx="6309360" cy="7315"/>
+            <a:off x="11056343" y="3895344"/>
+            <a:ext cx="173736" cy="173736"/>
           </a:xfrm>
-          <a:prstGeom prst="rect">
+          <a:prstGeom prst="ellipse">
             <a:avLst/>
           </a:prstGeom>
           <a:solidFill>
-            <a:srgbClr val="E5E5E5"/>
+            <a:srgbClr val="A1A1A1"/>
           </a:solidFill>
-          <a:ln w="12700">
+          <a:ln w="6350">
             <a:solidFill>
-              <a:srgbClr val="E5E5E5"/>
+              <a:srgbClr val="A1A1A1"/>
             </a:solidFill>
             <a:prstDash val="solid"/>
           </a:ln>
@@ -21486,117 +23401,14 @@
       </p:sp>
       <p:sp>
         <p:nvSpPr>
-          <p:cNvPr id="15" name="Text 13"/>
+          <p:cNvPr id="72" name="Text 70"/>
           <p:cNvSpPr txBox="1"/>
           <p:nvPr/>
         </p:nvSpPr>
         <p:spPr>
           <a:xfrm>
-            <a:off x="676656" y="2465832"/>
-            <a:ext cx="731520" cy="201168"/>
-          </a:xfrm>
-          <a:prstGeom prst="rect">
-            <a:avLst/>
-          </a:prstGeom>
-          <a:noFill/>
-          <a:ln/>
-        </p:spPr>
-        <p:txBody>
-          <a:bodyPr wrap="square" lIns="0" tIns="0" rIns="0" bIns="0" rtlCol="0" anchor="ctr"/>
-          <a:lstStyle/>
-          <a:p>
-            <a:pPr algn="r" indent="0" marL="0">
-              <a:buNone/>
-            </a:pPr>
-            <a:r>
-              <a:rPr lang="en-US" sz="850" dirty="0">
-                <a:solidFill>
-                  <a:srgbClr val="818181"/>
-                </a:solidFill>
-                <a:latin typeface="Verdana" pitchFamily="34" charset="0"/>
-                <a:ea typeface="Verdana" pitchFamily="34" charset="-122"/>
-                <a:cs typeface="Verdana" pitchFamily="34" charset="-120"/>
-              </a:rPr>
-              <a:t>5,5 %</a:t>
-            </a:r>
-            <a:endParaRPr lang="en-US" sz="850" dirty="0"/>
-          </a:p>
-        </p:txBody>
-      </p:sp>
-      <p:sp>
-        <p:nvSpPr>
-          <p:cNvPr id="16" name="Shape 14"/>
-          <p:cNvSpPr/>
-          <p:nvPr/>
-        </p:nvSpPr>
-        <p:spPr>
-          <a:xfrm>
-            <a:off x="1481328" y="1987296"/>
-            <a:ext cx="6309360" cy="7315"/>
-          </a:xfrm>
-          <a:prstGeom prst="rect">
-            <a:avLst/>
-          </a:prstGeom>
-          <a:solidFill>
-            <a:srgbClr val="E5E5E5"/>
-          </a:solidFill>
-          <a:ln w="12700">
-            <a:solidFill>
-              <a:srgbClr val="E5E5E5"/>
-            </a:solidFill>
-            <a:prstDash val="solid"/>
-          </a:ln>
-        </p:spPr>
-      </p:sp>
-      <p:sp>
-        <p:nvSpPr>
-          <p:cNvPr id="17" name="Text 15"/>
-          <p:cNvSpPr txBox="1"/>
-          <p:nvPr/>
-        </p:nvSpPr>
-        <p:spPr>
-          <a:xfrm>
-            <a:off x="676656" y="1886712"/>
-            <a:ext cx="731520" cy="201168"/>
-          </a:xfrm>
-          <a:prstGeom prst="rect">
-            <a:avLst/>
-          </a:prstGeom>
-          <a:noFill/>
-          <a:ln/>
-        </p:spPr>
-        <p:txBody>
-          <a:bodyPr wrap="square" lIns="0" tIns="0" rIns="0" bIns="0" rtlCol="0" anchor="ctr"/>
-          <a:lstStyle/>
-          <a:p>
-            <a:pPr algn="r" indent="0" marL="0">
-              <a:buNone/>
-            </a:pPr>
-            <a:r>
-              <a:rPr lang="en-US" sz="850" dirty="0">
-                <a:solidFill>
-                  <a:srgbClr val="818181"/>
-                </a:solidFill>
-                <a:latin typeface="Verdana" pitchFamily="34" charset="0"/>
-                <a:ea typeface="Verdana" pitchFamily="34" charset="-122"/>
-                <a:cs typeface="Verdana" pitchFamily="34" charset="-120"/>
-              </a:rPr>
-              <a:t>6,0 %</a:t>
-            </a:r>
-            <a:endParaRPr lang="en-US" sz="850" dirty="0"/>
-          </a:p>
-        </p:txBody>
-      </p:sp>
-      <p:sp>
-        <p:nvSpPr>
-          <p:cNvPr id="18" name="Text 16"/>
-          <p:cNvSpPr txBox="1"/>
-          <p:nvPr/>
-        </p:nvSpPr>
-        <p:spPr>
-          <a:xfrm>
-            <a:off x="2067375" y="5285232"/>
-            <a:ext cx="548640" cy="201168"/>
+            <a:off x="10768307" y="3653028"/>
+            <a:ext cx="749808" cy="201168"/>
           </a:xfrm>
           <a:prstGeom prst="rect">
             <a:avLst/>
@@ -21614,13 +23426,13 @@
             <a:r>
               <a:rPr lang="en-US" sz="850" dirty="0">
                 <a:solidFill>
-                  <a:srgbClr val="818181"/>
+                  <a:srgbClr val="2B2B2B"/>
                 </a:solidFill>
                 <a:latin typeface="Verdana" pitchFamily="34" charset="0"/>
                 <a:ea typeface="Verdana" pitchFamily="34" charset="-122"/>
                 <a:cs typeface="Verdana" pitchFamily="34" charset="-120"/>
               </a:rPr>
-              <a:t>20</a:t>
+              <a:t>Irlanda</a:t>
             </a:r>
             <a:endParaRPr lang="en-US" sz="850" dirty="0"/>
           </a:p>
@@ -21628,181 +23440,14 @@
       </p:sp>
       <p:sp>
         <p:nvSpPr>
-          <p:cNvPr id="19" name="Text 17"/>
+          <p:cNvPr id="73" name="Text 71"/>
           <p:cNvSpPr txBox="1"/>
           <p:nvPr/>
         </p:nvSpPr>
         <p:spPr>
           <a:xfrm>
-            <a:off x="3501321" y="5285232"/>
-            <a:ext cx="548640" cy="201168"/>
-          </a:xfrm>
-          <a:prstGeom prst="rect">
-            <a:avLst/>
-          </a:prstGeom>
-          <a:noFill/>
-          <a:ln/>
-        </p:spPr>
-        <p:txBody>
-          <a:bodyPr wrap="square" lIns="0" tIns="0" rIns="0" bIns="0" rtlCol="0" anchor="ctr"/>
-          <a:lstStyle/>
-          <a:p>
-            <a:pPr algn="ctr" indent="0" marL="0">
-              <a:buNone/>
-            </a:pPr>
-            <a:r>
-              <a:rPr lang="en-US" sz="850" dirty="0">
-                <a:solidFill>
-                  <a:srgbClr val="818181"/>
-                </a:solidFill>
-                <a:latin typeface="Verdana" pitchFamily="34" charset="0"/>
-                <a:ea typeface="Verdana" pitchFamily="34" charset="-122"/>
-                <a:cs typeface="Verdana" pitchFamily="34" charset="-120"/>
-              </a:rPr>
-              <a:t>40</a:t>
-            </a:r>
-            <a:endParaRPr lang="en-US" sz="850" dirty="0"/>
-          </a:p>
-        </p:txBody>
-      </p:sp>
-      <p:sp>
-        <p:nvSpPr>
-          <p:cNvPr id="20" name="Text 18"/>
-          <p:cNvSpPr txBox="1"/>
-          <p:nvPr/>
-        </p:nvSpPr>
-        <p:spPr>
-          <a:xfrm>
-            <a:off x="4935266" y="5285232"/>
-            <a:ext cx="548640" cy="201168"/>
-          </a:xfrm>
-          <a:prstGeom prst="rect">
-            <a:avLst/>
-          </a:prstGeom>
-          <a:noFill/>
-          <a:ln/>
-        </p:spPr>
-        <p:txBody>
-          <a:bodyPr wrap="square" lIns="0" tIns="0" rIns="0" bIns="0" rtlCol="0" anchor="ctr"/>
-          <a:lstStyle/>
-          <a:p>
-            <a:pPr algn="ctr" indent="0" marL="0">
-              <a:buNone/>
-            </a:pPr>
-            <a:r>
-              <a:rPr lang="en-US" sz="850" dirty="0">
-                <a:solidFill>
-                  <a:srgbClr val="818181"/>
-                </a:solidFill>
-                <a:latin typeface="Verdana" pitchFamily="34" charset="0"/>
-                <a:ea typeface="Verdana" pitchFamily="34" charset="-122"/>
-                <a:cs typeface="Verdana" pitchFamily="34" charset="-120"/>
-              </a:rPr>
-              <a:t>60</a:t>
-            </a:r>
-            <a:endParaRPr lang="en-US" sz="850" dirty="0"/>
-          </a:p>
-        </p:txBody>
-      </p:sp>
-      <p:sp>
-        <p:nvSpPr>
-          <p:cNvPr id="21" name="Text 19"/>
-          <p:cNvSpPr txBox="1"/>
-          <p:nvPr/>
-        </p:nvSpPr>
-        <p:spPr>
-          <a:xfrm>
-            <a:off x="6369212" y="5285232"/>
-            <a:ext cx="548640" cy="201168"/>
-          </a:xfrm>
-          <a:prstGeom prst="rect">
-            <a:avLst/>
-          </a:prstGeom>
-          <a:noFill/>
-          <a:ln/>
-        </p:spPr>
-        <p:txBody>
-          <a:bodyPr wrap="square" lIns="0" tIns="0" rIns="0" bIns="0" rtlCol="0" anchor="ctr"/>
-          <a:lstStyle/>
-          <a:p>
-            <a:pPr algn="ctr" indent="0" marL="0">
-              <a:buNone/>
-            </a:pPr>
-            <a:r>
-              <a:rPr lang="en-US" sz="850" dirty="0">
-                <a:solidFill>
-                  <a:srgbClr val="818181"/>
-                </a:solidFill>
-                <a:latin typeface="Verdana" pitchFamily="34" charset="0"/>
-                <a:ea typeface="Verdana" pitchFamily="34" charset="-122"/>
-                <a:cs typeface="Verdana" pitchFamily="34" charset="-120"/>
-              </a:rPr>
-              <a:t>80</a:t>
-            </a:r>
-            <a:endParaRPr lang="en-US" sz="850" dirty="0"/>
-          </a:p>
-        </p:txBody>
-      </p:sp>
-      <p:sp>
-        <p:nvSpPr>
-          <p:cNvPr id="22" name="Shape 20"/>
-          <p:cNvSpPr/>
-          <p:nvPr/>
-        </p:nvSpPr>
-        <p:spPr>
-          <a:xfrm>
-            <a:off x="5424678" y="1755648"/>
-            <a:ext cx="10973" cy="3474720"/>
-          </a:xfrm>
-          <a:prstGeom prst="rect">
-            <a:avLst/>
-          </a:prstGeom>
-          <a:solidFill>
-            <a:srgbClr val="A1A1A1"/>
-          </a:solidFill>
-          <a:ln w="12700">
-            <a:solidFill>
-              <a:srgbClr val="A1A1A1"/>
-            </a:solidFill>
-            <a:prstDash val="solid"/>
-          </a:ln>
-        </p:spPr>
-      </p:sp>
-      <p:sp>
-        <p:nvSpPr>
-          <p:cNvPr id="23" name="Shape 21"/>
-          <p:cNvSpPr/>
-          <p:nvPr/>
-        </p:nvSpPr>
-        <p:spPr>
-          <a:xfrm>
-            <a:off x="1481328" y="4002634"/>
-            <a:ext cx="6309360" cy="10973"/>
-          </a:xfrm>
-          <a:prstGeom prst="rect">
-            <a:avLst/>
-          </a:prstGeom>
-          <a:solidFill>
-            <a:srgbClr val="A1A1A1"/>
-          </a:solidFill>
-          <a:ln w="12700">
-            <a:solidFill>
-              <a:srgbClr val="A1A1A1"/>
-            </a:solidFill>
-            <a:prstDash val="solid"/>
-          </a:ln>
-        </p:spPr>
-      </p:sp>
-      <p:sp>
-        <p:nvSpPr>
-          <p:cNvPr id="24" name="Text 22"/>
-          <p:cNvSpPr txBox="1"/>
-          <p:nvPr/>
-        </p:nvSpPr>
-        <p:spPr>
-          <a:xfrm>
-            <a:off x="5479542" y="5010912"/>
-            <a:ext cx="731520" cy="182880"/>
+            <a:off x="621792" y="1938528"/>
+            <a:ext cx="2377440" cy="201168"/>
           </a:xfrm>
           <a:prstGeom prst="rect">
             <a:avLst/>
@@ -21818,30 +23463,82 @@
               <a:buNone/>
             </a:pPr>
             <a:r>
-              <a:rPr lang="en-US" sz="750" dirty="0">
+              <a:rPr lang="en-US" sz="800" dirty="0">
                 <a:solidFill>
-                  <a:srgbClr val="A1A1A1"/>
+                  <a:srgbClr val="818181"/>
                 </a:solidFill>
                 <a:latin typeface="Verdana" pitchFamily="34" charset="0"/>
                 <a:ea typeface="Verdana" pitchFamily="34" charset="-122"/>
                 <a:cs typeface="Verdana" pitchFamily="34" charset="-120"/>
               </a:rPr>
-              <a:t>media 63</a:t>
+              <a:t>Coste del riesgo, % del saldo</a:t>
             </a:r>
-            <a:endParaRPr lang="en-US" sz="750" dirty="0"/>
+            <a:endParaRPr lang="en-US" sz="800" dirty="0"/>
           </a:p>
         </p:txBody>
       </p:sp>
       <p:sp>
         <p:nvSpPr>
-          <p:cNvPr id="25" name="Text 23"/>
+          <p:cNvPr id="74" name="Shape 72"/>
+          <p:cNvSpPr/>
+          <p:nvPr/>
+        </p:nvSpPr>
+        <p:spPr>
+          <a:xfrm>
+            <a:off x="621792" y="5138928"/>
+            <a:ext cx="5084064" cy="859536"/>
+          </a:xfrm>
+          <a:prstGeom prst="roundRect">
+            <a:avLst>
+              <a:gd name="adj" fmla="val 4255"/>
+            </a:avLst>
+          </a:prstGeom>
+          <a:solidFill>
+            <a:srgbClr val="FFF4C2"/>
+          </a:solidFill>
+          <a:ln w="12700">
+            <a:solidFill>
+              <a:srgbClr val="FFE066"/>
+            </a:solidFill>
+            <a:prstDash val="solid"/>
+          </a:ln>
+        </p:spPr>
+      </p:sp>
+      <p:sp>
+        <p:nvSpPr>
+          <p:cNvPr id="75" name="Shape 73"/>
+          <p:cNvSpPr/>
+          <p:nvPr/>
+        </p:nvSpPr>
+        <p:spPr>
+          <a:xfrm>
+            <a:off x="621792" y="5138928"/>
+            <a:ext cx="64008" cy="859536"/>
+          </a:xfrm>
+          <a:prstGeom prst="rect">
+            <a:avLst/>
+          </a:prstGeom>
+          <a:solidFill>
+            <a:srgbClr val="F56600"/>
+          </a:solidFill>
+          <a:ln w="12700">
+            <a:solidFill>
+              <a:srgbClr val="F56600"/>
+            </a:solidFill>
+            <a:prstDash val="solid"/>
+          </a:ln>
+        </p:spPr>
+      </p:sp>
+      <p:sp>
+        <p:nvSpPr>
+          <p:cNvPr id="76" name="Text 74"/>
           <p:cNvSpPr txBox="1"/>
           <p:nvPr/>
         </p:nvSpPr>
         <p:spPr>
           <a:xfrm>
-            <a:off x="1536192" y="3801466"/>
-            <a:ext cx="1005840" cy="182880"/>
+            <a:off x="841248" y="5230368"/>
+            <a:ext cx="4700016" cy="219456"/>
           </a:xfrm>
           <a:prstGeom prst="rect">
             <a:avLst/>
@@ -21857,229 +23554,7 @@
               <a:buNone/>
             </a:pPr>
             <a:r>
-              <a:rPr lang="en-US" sz="750" dirty="0">
-                <a:solidFill>
-                  <a:srgbClr val="A1A1A1"/>
-                </a:solidFill>
-                <a:latin typeface="Verdana" pitchFamily="34" charset="0"/>
-                <a:ea typeface="Verdana" pitchFamily="34" charset="-122"/>
-                <a:cs typeface="Verdana" pitchFamily="34" charset="-120"/>
-              </a:rPr>
-              <a:t>media 4,26 %</a:t>
-            </a:r>
-            <a:endParaRPr lang="en-US" sz="750" dirty="0"/>
-          </a:p>
-        </p:txBody>
-      </p:sp>
-      <p:sp>
-        <p:nvSpPr>
-          <p:cNvPr id="26" name="Text 24"/>
-          <p:cNvSpPr txBox="1"/>
-          <p:nvPr/>
-        </p:nvSpPr>
-        <p:spPr>
-          <a:xfrm>
-            <a:off x="6373368" y="4754880"/>
-            <a:ext cx="1325880" cy="384048"/>
-          </a:xfrm>
-          <a:prstGeom prst="rect">
-            <a:avLst/>
-          </a:prstGeom>
-          <a:noFill/>
-          <a:ln/>
-        </p:spPr>
-        <p:txBody>
-          <a:bodyPr wrap="square" lIns="0" tIns="0" rIns="0" bIns="0" rtlCol="0" anchor="ctr"/>
-          <a:lstStyle/>
-          <a:p>
-            <a:pPr algn="r" indent="0" marL="0">
-              <a:lnSpc>
-                <a:spcPct val="105000"/>
-              </a:lnSpc>
-              <a:buNone/>
-            </a:pPr>
-            <a:r>
-              <a:rPr lang="en-US" sz="750" b="1" dirty="0">
-                <a:solidFill>
-                  <a:srgbClr val="F56600"/>
-                </a:solidFill>
-                <a:latin typeface="Verdana" pitchFamily="34" charset="0"/>
-                <a:ea typeface="Verdana" pitchFamily="34" charset="-122"/>
-                <a:cs typeface="Verdana" pitchFamily="34" charset="-120"/>
-              </a:rPr>
-              <a:t>mucha información</a:t>
-            </a:r>
-            <a:endParaRPr lang="en-US" sz="750" dirty="0"/>
-          </a:p>
-          <a:p>
-            <a:pPr algn="r" indent="0" marL="0">
-              <a:lnSpc>
-                <a:spcPct val="105000"/>
-              </a:lnSpc>
-              <a:buNone/>
-            </a:pPr>
-            <a:r>
-              <a:rPr lang="en-US" sz="750" b="1" dirty="0">
-                <a:solidFill>
-                  <a:srgbClr val="F56600"/>
-                </a:solidFill>
-                <a:latin typeface="Verdana" pitchFamily="34" charset="0"/>
-                <a:ea typeface="Verdana" pitchFamily="34" charset="-122"/>
-                <a:cs typeface="Verdana" pitchFamily="34" charset="-120"/>
-              </a:rPr>
-              <a:t>poco margen</a:t>
-            </a:r>
-            <a:endParaRPr lang="en-US" sz="750" dirty="0"/>
-          </a:p>
-        </p:txBody>
-      </p:sp>
-      <p:sp>
-        <p:nvSpPr>
-          <p:cNvPr id="27" name="Shape 25"/>
-          <p:cNvSpPr/>
-          <p:nvPr/>
-        </p:nvSpPr>
-        <p:spPr>
-          <a:xfrm>
-            <a:off x="5347051" y="4681728"/>
-            <a:ext cx="356006" cy="356006"/>
-          </a:xfrm>
-          <a:prstGeom prst="ellipse">
-            <a:avLst/>
-          </a:prstGeom>
-          <a:solidFill>
-            <a:srgbClr val="FFAB70"/>
-          </a:solidFill>
-          <a:ln w="22225">
-            <a:solidFill>
-              <a:srgbClr val="2B2B2B"/>
-            </a:solidFill>
-            <a:prstDash val="solid"/>
-          </a:ln>
-        </p:spPr>
-      </p:sp>
-      <p:sp>
-        <p:nvSpPr>
-          <p:cNvPr id="28" name="Text 26"/>
-          <p:cNvSpPr txBox="1"/>
-          <p:nvPr/>
-        </p:nvSpPr>
-        <p:spPr>
-          <a:xfrm>
-            <a:off x="4487515" y="4759147"/>
-            <a:ext cx="777240" cy="365760"/>
-          </a:xfrm>
-          <a:prstGeom prst="rect">
-            <a:avLst/>
-          </a:prstGeom>
-          <a:noFill/>
-          <a:ln/>
-        </p:spPr>
-        <p:txBody>
-          <a:bodyPr wrap="square" lIns="0" tIns="0" rIns="0" bIns="0" rtlCol="0" anchor="ctr"/>
-          <a:lstStyle/>
-          <a:p>
-            <a:pPr algn="r" indent="0" marL="0">
-              <a:lnSpc>
-                <a:spcPct val="95000"/>
-              </a:lnSpc>
-              <a:buNone/>
-            </a:pPr>
-            <a:r>
-              <a:rPr lang="en-US" sz="900" b="1" dirty="0">
-                <a:solidFill>
-                  <a:srgbClr val="F56600"/>
-                </a:solidFill>
-                <a:latin typeface="Verdana" pitchFamily="34" charset="0"/>
-                <a:ea typeface="Verdana" pitchFamily="34" charset="-122"/>
-                <a:cs typeface="Verdana" pitchFamily="34" charset="-120"/>
-              </a:rPr>
-              <a:t>España</a:t>
-            </a:r>
-            <a:pPr algn="r" indent="0" marL="0">
-              <a:lnSpc>
-                <a:spcPct val="95000"/>
-              </a:lnSpc>
-              <a:buNone/>
-            </a:pPr>
-            <a:endParaRPr lang="en-US" sz="900" dirty="0"/>
-          </a:p>
-          <a:p>
-            <a:pPr algn="r" indent="0" marL="0">
-              <a:lnSpc>
-                <a:spcPct val="95000"/>
-              </a:lnSpc>
-              <a:buNone/>
-            </a:pPr>
-            <a:r>
-              <a:rPr lang="en-US" sz="800" dirty="0">
-                <a:solidFill>
-                  <a:srgbClr val="818181"/>
-                </a:solidFill>
-                <a:latin typeface="Verdana" pitchFamily="34" charset="0"/>
-                <a:ea typeface="Verdana" pitchFamily="34" charset="-122"/>
-                <a:cs typeface="Verdana" pitchFamily="34" charset="-120"/>
-              </a:rPr>
-              <a:t>0,59 %</a:t>
-            </a:r>
-            <a:endParaRPr lang="en-US" sz="900" dirty="0"/>
-          </a:p>
-        </p:txBody>
-      </p:sp>
-      <p:sp>
-        <p:nvSpPr>
-          <p:cNvPr id="29" name="Shape 27"/>
-          <p:cNvSpPr/>
-          <p:nvPr/>
-        </p:nvSpPr>
-        <p:spPr>
-          <a:xfrm>
-            <a:off x="6161093" y="3982923"/>
-            <a:ext cx="247904" cy="247904"/>
-          </a:xfrm>
-          <a:prstGeom prst="ellipse">
-            <a:avLst/>
-          </a:prstGeom>
-          <a:solidFill>
-            <a:srgbClr val="77BFEE"/>
-          </a:solidFill>
-          <a:ln w="6350">
-            <a:solidFill>
-              <a:srgbClr val="77BFEE"/>
-            </a:solidFill>
-            <a:prstDash val="solid"/>
-          </a:ln>
-        </p:spPr>
-      </p:sp>
-      <p:sp>
-        <p:nvSpPr>
-          <p:cNvPr id="30" name="Text 28"/>
-          <p:cNvSpPr txBox="1"/>
-          <p:nvPr/>
-        </p:nvSpPr>
-        <p:spPr>
-          <a:xfrm>
-            <a:off x="6491293" y="4125163"/>
-            <a:ext cx="777240" cy="365760"/>
-          </a:xfrm>
-          <a:prstGeom prst="rect">
-            <a:avLst/>
-          </a:prstGeom>
-          <a:noFill/>
-          <a:ln/>
-        </p:spPr>
-        <p:txBody>
-          <a:bodyPr wrap="square" lIns="0" tIns="0" rIns="0" bIns="0" rtlCol="0" anchor="ctr"/>
-          <a:lstStyle/>
-          <a:p>
-            <a:pPr algn="l" indent="0" marL="0">
-              <a:lnSpc>
-                <a:spcPct val="95000"/>
-              </a:lnSpc>
-              <a:buNone/>
-            </a:pPr>
-            <a:r>
-              <a:rPr lang="en-US" sz="900" b="1" dirty="0">
+              <a:rPr lang="en-US" sz="1100" b="1" dirty="0">
                 <a:solidFill>
                   <a:srgbClr val="2B2B2B"/>
                 </a:solidFill>
@@ -22087,552 +23562,22 @@
                 <a:ea typeface="Verdana" pitchFamily="34" charset="-122"/>
                 <a:cs typeface="Verdana" pitchFamily="34" charset="-120"/>
               </a:rPr>
-              <a:t>Alemania</a:t>
+              <a:t>No. El riesgo NO se paga</a:t>
             </a:r>
-            <a:pPr algn="l" indent="0" marL="0">
-              <a:lnSpc>
-                <a:spcPct val="95000"/>
-              </a:lnSpc>
-              <a:buNone/>
-            </a:pPr>
-            <a:endParaRPr lang="en-US" sz="900" dirty="0"/>
-          </a:p>
-          <a:p>
-            <a:pPr algn="l" indent="0" marL="0">
-              <a:lnSpc>
-                <a:spcPct val="95000"/>
-              </a:lnSpc>
-              <a:buNone/>
-            </a:pPr>
-            <a:r>
-              <a:rPr lang="en-US" sz="800" dirty="0">
-                <a:solidFill>
-                  <a:srgbClr val="818181"/>
-                </a:solidFill>
-                <a:latin typeface="Verdana" pitchFamily="34" charset="0"/>
-                <a:ea typeface="Verdana" pitchFamily="34" charset="-122"/>
-                <a:cs typeface="Verdana" pitchFamily="34" charset="-120"/>
-              </a:rPr>
-              <a:t>0,40 %</a:t>
-            </a:r>
-            <a:endParaRPr lang="en-US" sz="900" dirty="0"/>
+            <a:endParaRPr lang="en-US" sz="1100" dirty="0"/>
           </a:p>
         </p:txBody>
       </p:sp>
       <p:sp>
         <p:nvSpPr>
-          <p:cNvPr id="31" name="Shape 29"/>
-          <p:cNvSpPr/>
-          <p:nvPr/>
-        </p:nvSpPr>
-        <p:spPr>
-          <a:xfrm>
-            <a:off x="1901488" y="4760366"/>
-            <a:ext cx="407213" cy="407213"/>
-          </a:xfrm>
-          <a:prstGeom prst="ellipse">
-            <a:avLst/>
-          </a:prstGeom>
-          <a:solidFill>
-            <a:srgbClr val="FF8AC2"/>
-          </a:solidFill>
-          <a:ln w="6350">
-            <a:solidFill>
-              <a:srgbClr val="FF8AC2"/>
-            </a:solidFill>
-            <a:prstDash val="solid"/>
-          </a:ln>
-        </p:spPr>
-      </p:sp>
-      <p:sp>
-        <p:nvSpPr>
-          <p:cNvPr id="32" name="Text 30"/>
+          <p:cNvPr id="77" name="Text 75"/>
           <p:cNvSpPr txBox="1"/>
           <p:nvPr/>
         </p:nvSpPr>
         <p:spPr>
           <a:xfrm>
-            <a:off x="2390997" y="4781093"/>
-            <a:ext cx="777240" cy="365760"/>
-          </a:xfrm>
-          <a:prstGeom prst="rect">
-            <a:avLst/>
-          </a:prstGeom>
-          <a:noFill/>
-          <a:ln/>
-        </p:spPr>
-        <p:txBody>
-          <a:bodyPr wrap="square" lIns="0" tIns="0" rIns="0" bIns="0" rtlCol="0" anchor="ctr"/>
-          <a:lstStyle/>
-          <a:p>
-            <a:pPr algn="l" indent="0" marL="0">
-              <a:lnSpc>
-                <a:spcPct val="95000"/>
-              </a:lnSpc>
-              <a:buNone/>
-            </a:pPr>
-            <a:r>
-              <a:rPr lang="en-US" sz="900" b="1" dirty="0">
-                <a:solidFill>
-                  <a:srgbClr val="2B2B2B"/>
-                </a:solidFill>
-                <a:latin typeface="Verdana" pitchFamily="34" charset="0"/>
-                <a:ea typeface="Verdana" pitchFamily="34" charset="-122"/>
-                <a:cs typeface="Verdana" pitchFamily="34" charset="-120"/>
-              </a:rPr>
-              <a:t>Francia</a:t>
-            </a:r>
-            <a:pPr algn="l" indent="0" marL="0">
-              <a:lnSpc>
-                <a:spcPct val="95000"/>
-              </a:lnSpc>
-              <a:buNone/>
-            </a:pPr>
-            <a:endParaRPr lang="en-US" sz="900" dirty="0"/>
-          </a:p>
-          <a:p>
-            <a:pPr algn="l" indent="0" marL="0">
-              <a:lnSpc>
-                <a:spcPct val="95000"/>
-              </a:lnSpc>
-              <a:buNone/>
-            </a:pPr>
-            <a:r>
-              <a:rPr lang="en-US" sz="800" dirty="0">
-                <a:solidFill>
-                  <a:srgbClr val="818181"/>
-                </a:solidFill>
-                <a:latin typeface="Verdana" pitchFamily="34" charset="0"/>
-                <a:ea typeface="Verdana" pitchFamily="34" charset="-122"/>
-                <a:cs typeface="Verdana" pitchFamily="34" charset="-120"/>
-              </a:rPr>
-              <a:t>0,68 %</a:t>
-            </a:r>
-            <a:endParaRPr lang="en-US" sz="900" dirty="0"/>
-          </a:p>
-        </p:txBody>
-      </p:sp>
-      <p:sp>
-        <p:nvSpPr>
-          <p:cNvPr id="33" name="Shape 31"/>
-          <p:cNvSpPr/>
-          <p:nvPr/>
-        </p:nvSpPr>
-        <p:spPr>
-          <a:xfrm>
-            <a:off x="6348430" y="3614318"/>
-            <a:ext cx="475488" cy="475488"/>
-          </a:xfrm>
-          <a:prstGeom prst="ellipse">
-            <a:avLst/>
-          </a:prstGeom>
-          <a:solidFill>
-            <a:srgbClr val="FF8AC2"/>
-          </a:solidFill>
-          <a:ln w="6350">
-            <a:solidFill>
-              <a:srgbClr val="FF8AC2"/>
-            </a:solidFill>
-            <a:prstDash val="solid"/>
-          </a:ln>
-        </p:spPr>
-      </p:sp>
-      <p:sp>
-        <p:nvSpPr>
-          <p:cNvPr id="34" name="Text 32"/>
-          <p:cNvSpPr txBox="1"/>
-          <p:nvPr/>
-        </p:nvSpPr>
-        <p:spPr>
-          <a:xfrm>
-            <a:off x="6906214" y="3632606"/>
-            <a:ext cx="777240" cy="365760"/>
-          </a:xfrm>
-          <a:prstGeom prst="rect">
-            <a:avLst/>
-          </a:prstGeom>
-          <a:noFill/>
-          <a:ln/>
-        </p:spPr>
-        <p:txBody>
-          <a:bodyPr wrap="square" lIns="0" tIns="0" rIns="0" bIns="0" rtlCol="0" anchor="ctr"/>
-          <a:lstStyle/>
-          <a:p>
-            <a:pPr algn="l" indent="0" marL="0">
-              <a:lnSpc>
-                <a:spcPct val="95000"/>
-              </a:lnSpc>
-              <a:buNone/>
-            </a:pPr>
-            <a:r>
-              <a:rPr lang="en-US" sz="900" b="1" dirty="0">
-                <a:solidFill>
-                  <a:srgbClr val="2B2B2B"/>
-                </a:solidFill>
-                <a:latin typeface="Verdana" pitchFamily="34" charset="0"/>
-                <a:ea typeface="Verdana" pitchFamily="34" charset="-122"/>
-                <a:cs typeface="Verdana" pitchFamily="34" charset="-120"/>
-              </a:rPr>
-              <a:t>Italia</a:t>
-            </a:r>
-            <a:pPr algn="l" indent="0" marL="0">
-              <a:lnSpc>
-                <a:spcPct val="95000"/>
-              </a:lnSpc>
-              <a:buNone/>
-            </a:pPr>
-            <a:endParaRPr lang="en-US" sz="900" dirty="0"/>
-          </a:p>
-          <a:p>
-            <a:pPr algn="l" indent="0" marL="0">
-              <a:lnSpc>
-                <a:spcPct val="95000"/>
-              </a:lnSpc>
-              <a:buNone/>
-            </a:pPr>
-            <a:r>
-              <a:rPr lang="en-US" sz="800" dirty="0">
-                <a:solidFill>
-                  <a:srgbClr val="818181"/>
-                </a:solidFill>
-                <a:latin typeface="Verdana" pitchFamily="34" charset="0"/>
-                <a:ea typeface="Verdana" pitchFamily="34" charset="-122"/>
-                <a:cs typeface="Verdana" pitchFamily="34" charset="-120"/>
-              </a:rPr>
-              <a:t>0,80 %</a:t>
-            </a:r>
-            <a:endParaRPr lang="en-US" sz="900" dirty="0"/>
-          </a:p>
-        </p:txBody>
-      </p:sp>
-      <p:sp>
-        <p:nvSpPr>
-          <p:cNvPr id="35" name="Shape 33"/>
-          <p:cNvSpPr/>
-          <p:nvPr/>
-        </p:nvSpPr>
-        <p:spPr>
-          <a:xfrm>
-            <a:off x="5379824" y="4070299"/>
-            <a:ext cx="304800" cy="304800"/>
-          </a:xfrm>
-          <a:prstGeom prst="ellipse">
-            <a:avLst/>
-          </a:prstGeom>
-          <a:solidFill>
-            <a:srgbClr val="FFAB70"/>
-          </a:solidFill>
-          <a:ln w="6350">
-            <a:solidFill>
-              <a:srgbClr val="FFAB70"/>
-            </a:solidFill>
-            <a:prstDash val="solid"/>
-          </a:ln>
-        </p:spPr>
-      </p:sp>
-      <p:sp>
-        <p:nvSpPr>
-          <p:cNvPr id="36" name="Text 34"/>
-          <p:cNvSpPr txBox="1"/>
-          <p:nvPr/>
-        </p:nvSpPr>
-        <p:spPr>
-          <a:xfrm>
-            <a:off x="4520288" y="4103827"/>
-            <a:ext cx="777240" cy="365760"/>
-          </a:xfrm>
-          <a:prstGeom prst="rect">
-            <a:avLst/>
-          </a:prstGeom>
-          <a:noFill/>
-          <a:ln/>
-        </p:spPr>
-        <p:txBody>
-          <a:bodyPr wrap="square" lIns="0" tIns="0" rIns="0" bIns="0" rtlCol="0" anchor="ctr"/>
-          <a:lstStyle/>
-          <a:p>
-            <a:pPr algn="r" indent="0" marL="0">
-              <a:lnSpc>
-                <a:spcPct val="95000"/>
-              </a:lnSpc>
-              <a:buNone/>
-            </a:pPr>
-            <a:r>
-              <a:rPr lang="en-US" sz="900" b="1" dirty="0">
-                <a:solidFill>
-                  <a:srgbClr val="2B2B2B"/>
-                </a:solidFill>
-                <a:latin typeface="Verdana" pitchFamily="34" charset="0"/>
-                <a:ea typeface="Verdana" pitchFamily="34" charset="-122"/>
-                <a:cs typeface="Verdana" pitchFamily="34" charset="-120"/>
-              </a:rPr>
-              <a:t>Portugal</a:t>
-            </a:r>
-            <a:pPr algn="r" indent="0" marL="0">
-              <a:lnSpc>
-                <a:spcPct val="95000"/>
-              </a:lnSpc>
-              <a:buNone/>
-            </a:pPr>
-            <a:endParaRPr lang="en-US" sz="900" dirty="0"/>
-          </a:p>
-          <a:p>
-            <a:pPr algn="r" indent="0" marL="0">
-              <a:lnSpc>
-                <a:spcPct val="95000"/>
-              </a:lnSpc>
-              <a:buNone/>
-            </a:pPr>
-            <a:r>
-              <a:rPr lang="en-US" sz="800" dirty="0">
-                <a:solidFill>
-                  <a:srgbClr val="818181"/>
-                </a:solidFill>
-                <a:latin typeface="Verdana" pitchFamily="34" charset="0"/>
-                <a:ea typeface="Verdana" pitchFamily="34" charset="-122"/>
-                <a:cs typeface="Verdana" pitchFamily="34" charset="-120"/>
-              </a:rPr>
-              <a:t>0,50 %</a:t>
-            </a:r>
-            <a:endParaRPr lang="en-US" sz="900" dirty="0"/>
-          </a:p>
-        </p:txBody>
-      </p:sp>
-      <p:sp>
-        <p:nvSpPr>
-          <p:cNvPr id="37" name="Shape 35"/>
-          <p:cNvSpPr/>
-          <p:nvPr/>
-        </p:nvSpPr>
-        <p:spPr>
-          <a:xfrm>
-            <a:off x="4655335" y="3800246"/>
-            <a:ext cx="219456" cy="219456"/>
-          </a:xfrm>
-          <a:prstGeom prst="ellipse">
-            <a:avLst/>
-          </a:prstGeom>
-          <a:solidFill>
-            <a:srgbClr val="77BFEE"/>
-          </a:solidFill>
-          <a:ln w="6350">
-            <a:solidFill>
-              <a:srgbClr val="77BFEE"/>
-            </a:solidFill>
-            <a:prstDash val="solid"/>
-          </a:ln>
-        </p:spPr>
-      </p:sp>
-      <p:sp>
-        <p:nvSpPr>
-          <p:cNvPr id="38" name="Text 36"/>
-          <p:cNvSpPr txBox="1"/>
-          <p:nvPr/>
-        </p:nvSpPr>
-        <p:spPr>
-          <a:xfrm>
-            <a:off x="3795799" y="3498494"/>
-            <a:ext cx="777240" cy="365760"/>
-          </a:xfrm>
-          <a:prstGeom prst="rect">
-            <a:avLst/>
-          </a:prstGeom>
-          <a:noFill/>
-          <a:ln/>
-        </p:spPr>
-        <p:txBody>
-          <a:bodyPr wrap="square" lIns="0" tIns="0" rIns="0" bIns="0" rtlCol="0" anchor="ctr"/>
-          <a:lstStyle/>
-          <a:p>
-            <a:pPr algn="r" indent="0" marL="0">
-              <a:lnSpc>
-                <a:spcPct val="95000"/>
-              </a:lnSpc>
-              <a:buNone/>
-            </a:pPr>
-            <a:r>
-              <a:rPr lang="en-US" sz="900" b="1" dirty="0">
-                <a:solidFill>
-                  <a:srgbClr val="2B2B2B"/>
-                </a:solidFill>
-                <a:latin typeface="Verdana" pitchFamily="34" charset="0"/>
-                <a:ea typeface="Verdana" pitchFamily="34" charset="-122"/>
-                <a:cs typeface="Verdana" pitchFamily="34" charset="-120"/>
-              </a:rPr>
-              <a:t>P. Bajos</a:t>
-            </a:r>
-            <a:pPr algn="r" indent="0" marL="0">
-              <a:lnSpc>
-                <a:spcPct val="95000"/>
-              </a:lnSpc>
-              <a:buNone/>
-            </a:pPr>
-            <a:endParaRPr lang="en-US" sz="900" dirty="0"/>
-          </a:p>
-          <a:p>
-            <a:pPr algn="r" indent="0" marL="0">
-              <a:lnSpc>
-                <a:spcPct val="95000"/>
-              </a:lnSpc>
-              <a:buNone/>
-            </a:pPr>
-            <a:r>
-              <a:rPr lang="en-US" sz="800" dirty="0">
-                <a:solidFill>
-                  <a:srgbClr val="818181"/>
-                </a:solidFill>
-                <a:latin typeface="Verdana" pitchFamily="34" charset="0"/>
-                <a:ea typeface="Verdana" pitchFamily="34" charset="-122"/>
-                <a:cs typeface="Verdana" pitchFamily="34" charset="-120"/>
-              </a:rPr>
-              <a:t>0,35 %</a:t>
-            </a:r>
-            <a:endParaRPr lang="en-US" sz="900" dirty="0"/>
-          </a:p>
-        </p:txBody>
-      </p:sp>
-      <p:sp>
-        <p:nvSpPr>
-          <p:cNvPr id="39" name="Shape 37"/>
-          <p:cNvSpPr/>
-          <p:nvPr/>
-        </p:nvSpPr>
-        <p:spPr>
-          <a:xfrm>
-            <a:off x="7057309" y="2013915"/>
-            <a:ext cx="247904" cy="247904"/>
-          </a:xfrm>
-          <a:prstGeom prst="ellipse">
-            <a:avLst/>
-          </a:prstGeom>
-          <a:solidFill>
-            <a:srgbClr val="77BFEE"/>
-          </a:solidFill>
-          <a:ln w="6350">
-            <a:solidFill>
-              <a:srgbClr val="77BFEE"/>
-            </a:solidFill>
-            <a:prstDash val="solid"/>
-          </a:ln>
-        </p:spPr>
-      </p:sp>
-      <p:sp>
-        <p:nvSpPr>
-          <p:cNvPr id="40" name="Text 38"/>
-          <p:cNvSpPr txBox="1"/>
-          <p:nvPr/>
-        </p:nvSpPr>
-        <p:spPr>
-          <a:xfrm>
-            <a:off x="6197773" y="1954987"/>
-            <a:ext cx="777240" cy="365760"/>
-          </a:xfrm>
-          <a:prstGeom prst="rect">
-            <a:avLst/>
-          </a:prstGeom>
-          <a:noFill/>
-          <a:ln/>
-        </p:spPr>
-        <p:txBody>
-          <a:bodyPr wrap="square" lIns="0" tIns="0" rIns="0" bIns="0" rtlCol="0" anchor="ctr"/>
-          <a:lstStyle/>
-          <a:p>
-            <a:pPr algn="r" indent="0" marL="0">
-              <a:lnSpc>
-                <a:spcPct val="95000"/>
-              </a:lnSpc>
-              <a:buNone/>
-            </a:pPr>
-            <a:r>
-              <a:rPr lang="en-US" sz="900" b="1" dirty="0">
-                <a:solidFill>
-                  <a:srgbClr val="2B2B2B"/>
-                </a:solidFill>
-                <a:latin typeface="Verdana" pitchFamily="34" charset="0"/>
-                <a:ea typeface="Verdana" pitchFamily="34" charset="-122"/>
-                <a:cs typeface="Verdana" pitchFamily="34" charset="-120"/>
-              </a:rPr>
-              <a:t>Irlanda</a:t>
-            </a:r>
-            <a:pPr algn="r" indent="0" marL="0">
-              <a:lnSpc>
-                <a:spcPct val="95000"/>
-              </a:lnSpc>
-              <a:buNone/>
-            </a:pPr>
-            <a:endParaRPr lang="en-US" sz="900" dirty="0"/>
-          </a:p>
-          <a:p>
-            <a:pPr algn="r" indent="0" marL="0">
-              <a:lnSpc>
-                <a:spcPct val="95000"/>
-              </a:lnSpc>
-              <a:buNone/>
-            </a:pPr>
-            <a:r>
-              <a:rPr lang="en-US" sz="800" dirty="0">
-                <a:solidFill>
-                  <a:srgbClr val="818181"/>
-                </a:solidFill>
-                <a:latin typeface="Verdana" pitchFamily="34" charset="0"/>
-                <a:ea typeface="Verdana" pitchFamily="34" charset="-122"/>
-                <a:cs typeface="Verdana" pitchFamily="34" charset="-120"/>
-              </a:rPr>
-              <a:t>0,40 %</a:t>
-            </a:r>
-            <a:endParaRPr lang="en-US" sz="900" dirty="0"/>
-          </a:p>
-        </p:txBody>
-      </p:sp>
-      <p:sp>
-        <p:nvSpPr>
-          <p:cNvPr id="41" name="Text 39"/>
-          <p:cNvSpPr txBox="1"/>
-          <p:nvPr/>
-        </p:nvSpPr>
-        <p:spPr>
-          <a:xfrm>
-            <a:off x="1481328" y="5486400"/>
-            <a:ext cx="6309360" cy="219456"/>
-          </a:xfrm>
-          <a:prstGeom prst="rect">
-            <a:avLst/>
-          </a:prstGeom>
-          <a:noFill/>
-          <a:ln/>
-        </p:spPr>
-        <p:txBody>
-          <a:bodyPr wrap="square" lIns="0" tIns="0" rIns="0" bIns="0" rtlCol="0" anchor="ctr"/>
-          <a:lstStyle/>
-          <a:p>
-            <a:pPr algn="ctr" indent="0" marL="0">
-              <a:buNone/>
-            </a:pPr>
-            <a:r>
-              <a:rPr lang="en-US" sz="900" dirty="0">
-                <a:solidFill>
-                  <a:srgbClr val="2B2B2B"/>
-                </a:solidFill>
-                <a:latin typeface="Verdana" pitchFamily="34" charset="0"/>
-                <a:ea typeface="Verdana" pitchFamily="34" charset="-122"/>
-                <a:cs typeface="Verdana" pitchFamily="34" charset="-120"/>
-              </a:rPr>
-              <a:t>Índice de información para la selección (0–100)</a:t>
-            </a:r>
-            <a:endParaRPr lang="en-US" sz="900" dirty="0"/>
-          </a:p>
-        </p:txBody>
-      </p:sp>
-      <p:sp>
-        <p:nvSpPr>
-          <p:cNvPr id="42" name="Text 40"/>
-          <p:cNvSpPr txBox="1"/>
-          <p:nvPr/>
-        </p:nvSpPr>
-        <p:spPr>
-          <a:xfrm>
-            <a:off x="548640" y="1481328"/>
-            <a:ext cx="2194560" cy="219456"/>
+            <a:off x="841248" y="5468112"/>
+            <a:ext cx="4700016" cy="420624"/>
           </a:xfrm>
           <a:prstGeom prst="rect">
             <a:avLst/>
@@ -22656,7 +23601,7 @@
                 <a:ea typeface="Verdana" pitchFamily="34" charset="-122"/>
                 <a:cs typeface="Verdana" pitchFamily="34" charset="-120"/>
               </a:rPr>
-              <a:t>Margen bruto, % del saldo</a:t>
+              <a:t>ρ = −0,42: quien más riesgo tiene, menos margen cobra, y en los 28 recortes probados ni uno da signo positivo. Italia es la excepción —mayor riesgo, segundo mayor margen—; España y Francia hacen lo contrario.</a:t>
             </a:r>
             <a:endParaRPr lang="en-US" sz="850" dirty="0"/>
           </a:p>
@@ -22664,24 +23609,26 @@
       </p:sp>
       <p:sp>
         <p:nvSpPr>
-          <p:cNvPr id="43" name="Shape 41"/>
+          <p:cNvPr id="78" name="Shape 76"/>
           <p:cNvSpPr/>
           <p:nvPr/>
         </p:nvSpPr>
         <p:spPr>
           <a:xfrm>
-            <a:off x="1481328" y="5797296"/>
-            <a:ext cx="164592" cy="164592"/>
+            <a:off x="6483096" y="5138928"/>
+            <a:ext cx="5084064" cy="859536"/>
           </a:xfrm>
-          <a:prstGeom prst="ellipse">
-            <a:avLst/>
+          <a:prstGeom prst="roundRect">
+            <a:avLst>
+              <a:gd name="adj" fmla="val 4255"/>
+            </a:avLst>
           </a:prstGeom>
           <a:solidFill>
-            <a:srgbClr val="77BFEE"/>
+            <a:srgbClr val="FFD6BA"/>
           </a:solidFill>
           <a:ln w="12700">
             <a:solidFill>
-              <a:srgbClr val="77BFEE"/>
+              <a:srgbClr val="FFD6BA"/>
             </a:solidFill>
             <a:prstDash val="solid"/>
           </a:ln>
@@ -22689,208 +23636,14 @@
       </p:sp>
       <p:sp>
         <p:nvSpPr>
-          <p:cNvPr id="44" name="Text 42"/>
-          <p:cNvSpPr txBox="1"/>
-          <p:nvPr/>
-        </p:nvSpPr>
-        <p:spPr>
-          <a:xfrm>
-            <a:off x="1719072" y="5760720"/>
-            <a:ext cx="1874520" cy="219456"/>
-          </a:xfrm>
-          <a:prstGeom prst="rect">
-            <a:avLst/>
-          </a:prstGeom>
-          <a:noFill/>
-          <a:ln/>
-        </p:spPr>
-        <p:txBody>
-          <a:bodyPr wrap="square" lIns="0" tIns="0" rIns="0" bIns="0" rtlCol="0" anchor="ctr"/>
-          <a:lstStyle/>
-          <a:p>
-            <a:pPr indent="0" marL="0">
-              <a:buNone/>
-            </a:pPr>
-            <a:r>
-              <a:rPr lang="en-US" sz="800" dirty="0">
-                <a:solidFill>
-                  <a:srgbClr val="818181"/>
-                </a:solidFill>
-                <a:latin typeface="Verdana" pitchFamily="34" charset="0"/>
-                <a:ea typeface="Verdana" pitchFamily="34" charset="-122"/>
-                <a:cs typeface="Verdana" pitchFamily="34" charset="-120"/>
-              </a:rPr>
-              <a:t>coste del riesgo &lt; 0,45 %</a:t>
-            </a:r>
-            <a:endParaRPr lang="en-US" sz="800" dirty="0"/>
-          </a:p>
-        </p:txBody>
-      </p:sp>
-      <p:sp>
-        <p:nvSpPr>
-          <p:cNvPr id="45" name="Shape 43"/>
+          <p:cNvPr id="79" name="Shape 77"/>
           <p:cNvSpPr/>
           <p:nvPr/>
         </p:nvSpPr>
         <p:spPr>
           <a:xfrm>
-            <a:off x="3630168" y="5797296"/>
-            <a:ext cx="164592" cy="164592"/>
-          </a:xfrm>
-          <a:prstGeom prst="ellipse">
-            <a:avLst/>
-          </a:prstGeom>
-          <a:solidFill>
-            <a:srgbClr val="FFAB70"/>
-          </a:solidFill>
-          <a:ln w="12700">
-            <a:solidFill>
-              <a:srgbClr val="FFAB70"/>
-            </a:solidFill>
-            <a:prstDash val="solid"/>
-          </a:ln>
-        </p:spPr>
-      </p:sp>
-      <p:sp>
-        <p:nvSpPr>
-          <p:cNvPr id="46" name="Text 44"/>
-          <p:cNvSpPr txBox="1"/>
-          <p:nvPr/>
-        </p:nvSpPr>
-        <p:spPr>
-          <a:xfrm>
-            <a:off x="3867912" y="5760720"/>
-            <a:ext cx="1874520" cy="219456"/>
-          </a:xfrm>
-          <a:prstGeom prst="rect">
-            <a:avLst/>
-          </a:prstGeom>
-          <a:noFill/>
-          <a:ln/>
-        </p:spPr>
-        <p:txBody>
-          <a:bodyPr wrap="square" lIns="0" tIns="0" rIns="0" bIns="0" rtlCol="0" anchor="ctr"/>
-          <a:lstStyle/>
-          <a:p>
-            <a:pPr indent="0" marL="0">
-              <a:buNone/>
-            </a:pPr>
-            <a:r>
-              <a:rPr lang="en-US" sz="800" dirty="0">
-                <a:solidFill>
-                  <a:srgbClr val="818181"/>
-                </a:solidFill>
-                <a:latin typeface="Verdana" pitchFamily="34" charset="0"/>
-                <a:ea typeface="Verdana" pitchFamily="34" charset="-122"/>
-                <a:cs typeface="Verdana" pitchFamily="34" charset="-120"/>
-              </a:rPr>
-              <a:t>0,45 a 0,65 %</a:t>
-            </a:r>
-            <a:endParaRPr lang="en-US" sz="800" dirty="0"/>
-          </a:p>
-        </p:txBody>
-      </p:sp>
-      <p:sp>
-        <p:nvSpPr>
-          <p:cNvPr id="47" name="Shape 45"/>
-          <p:cNvSpPr/>
-          <p:nvPr/>
-        </p:nvSpPr>
-        <p:spPr>
-          <a:xfrm>
-            <a:off x="5779008" y="5797296"/>
-            <a:ext cx="164592" cy="164592"/>
-          </a:xfrm>
-          <a:prstGeom prst="ellipse">
-            <a:avLst/>
-          </a:prstGeom>
-          <a:solidFill>
-            <a:srgbClr val="FF8AC2"/>
-          </a:solidFill>
-          <a:ln w="12700">
-            <a:solidFill>
-              <a:srgbClr val="FF8AC2"/>
-            </a:solidFill>
-            <a:prstDash val="solid"/>
-          </a:ln>
-        </p:spPr>
-      </p:sp>
-      <p:sp>
-        <p:nvSpPr>
-          <p:cNvPr id="48" name="Text 46"/>
-          <p:cNvSpPr txBox="1"/>
-          <p:nvPr/>
-        </p:nvSpPr>
-        <p:spPr>
-          <a:xfrm>
-            <a:off x="6016752" y="5760720"/>
-            <a:ext cx="1874520" cy="219456"/>
-          </a:xfrm>
-          <a:prstGeom prst="rect">
-            <a:avLst/>
-          </a:prstGeom>
-          <a:noFill/>
-          <a:ln/>
-        </p:spPr>
-        <p:txBody>
-          <a:bodyPr wrap="square" lIns="0" tIns="0" rIns="0" bIns="0" rtlCol="0" anchor="ctr"/>
-          <a:lstStyle/>
-          <a:p>
-            <a:pPr indent="0" marL="0">
-              <a:buNone/>
-            </a:pPr>
-            <a:r>
-              <a:rPr lang="en-US" sz="800" dirty="0">
-                <a:solidFill>
-                  <a:srgbClr val="818181"/>
-                </a:solidFill>
-                <a:latin typeface="Verdana" pitchFamily="34" charset="0"/>
-                <a:ea typeface="Verdana" pitchFamily="34" charset="-122"/>
-                <a:cs typeface="Verdana" pitchFamily="34" charset="-120"/>
-              </a:rPr>
-              <a:t>&gt; 0,65 %</a:t>
-            </a:r>
-            <a:endParaRPr lang="en-US" sz="800" dirty="0"/>
-          </a:p>
-        </p:txBody>
-      </p:sp>
-      <p:sp>
-        <p:nvSpPr>
-          <p:cNvPr id="49" name="Shape 47"/>
-          <p:cNvSpPr/>
-          <p:nvPr/>
-        </p:nvSpPr>
-        <p:spPr>
-          <a:xfrm>
-            <a:off x="8065008" y="1755648"/>
-            <a:ext cx="3502152" cy="2176272"/>
-          </a:xfrm>
-          <a:prstGeom prst="roundRect">
-            <a:avLst>
-              <a:gd name="adj" fmla="val 1681"/>
-            </a:avLst>
-          </a:prstGeom>
-          <a:solidFill>
-            <a:srgbClr val="FFF4C2"/>
-          </a:solidFill>
-          <a:ln w="12700">
-            <a:solidFill>
-              <a:srgbClr val="FFE066"/>
-            </a:solidFill>
-            <a:prstDash val="solid"/>
-          </a:ln>
-        </p:spPr>
-      </p:sp>
-      <p:sp>
-        <p:nvSpPr>
-          <p:cNvPr id="50" name="Shape 48"/>
-          <p:cNvSpPr/>
-          <p:nvPr/>
-        </p:nvSpPr>
-        <p:spPr>
-          <a:xfrm>
-            <a:off x="8065008" y="1755648"/>
-            <a:ext cx="64008" cy="2176272"/>
+            <a:off x="6483096" y="5138928"/>
+            <a:ext cx="64008" cy="859536"/>
           </a:xfrm>
           <a:prstGeom prst="rect">
             <a:avLst/>
@@ -22908,14 +23661,14 @@
       </p:sp>
       <p:sp>
         <p:nvSpPr>
-          <p:cNvPr id="51" name="Text 49"/>
+          <p:cNvPr id="80" name="Text 78"/>
           <p:cNvSpPr txBox="1"/>
           <p:nvPr/>
         </p:nvSpPr>
         <p:spPr>
           <a:xfrm>
-            <a:off x="8284464" y="1847088"/>
-            <a:ext cx="3118104" cy="219456"/>
+            <a:off x="6702552" y="5230368"/>
+            <a:ext cx="4700016" cy="219456"/>
           </a:xfrm>
           <a:prstGeom prst="rect">
             <a:avLst/>
@@ -22939,7 +23692,7 @@
                 <a:ea typeface="Verdana" pitchFamily="34" charset="-122"/>
                 <a:cs typeface="Verdana" pitchFamily="34" charset="-120"/>
               </a:rPr>
-              <a:t>España está en el cuadrante malo</a:t>
+              <a:t>Tampoco. La información no compra riesgo</a:t>
             </a:r>
             <a:endParaRPr lang="en-US" sz="1100" dirty="0"/>
           </a:p>
@@ -22947,14 +23700,14 @@
       </p:sp>
       <p:sp>
         <p:nvSpPr>
-          <p:cNvPr id="52" name="Text 50"/>
+          <p:cNvPr id="81" name="Text 79"/>
           <p:cNvSpPr txBox="1"/>
           <p:nvPr/>
         </p:nvSpPr>
         <p:spPr>
           <a:xfrm>
-            <a:off x="8284464" y="2084832"/>
-            <a:ext cx="3118104" cy="1737360"/>
+            <a:off x="6702552" y="5468112"/>
+            <a:ext cx="4700016" cy="420624"/>
           </a:xfrm>
           <a:prstGeom prst="rect">
             <a:avLst/>
@@ -22978,7 +23731,7 @@
                 <a:ea typeface="Verdana" pitchFamily="34" charset="-122"/>
                 <a:cs typeface="Verdana" pitchFamily="34" charset="-120"/>
               </a:rPr>
-              <a:t>Tiene información por encima de la media (64,4 frente a 63) y el segundo margen más bajo de los siete (3,52 %). Gana 0,77 pp menos de margen del que le correspondería por su nivel de información: la mayor brecha de los siete. Tiene con qué seleccionar y no lo cobra.</a:t>
+              <a:t>ρ = −0,24, y el signo ni siquiera aguanta: va de −0,90 a +0,64 según qué país se quite, y sale positivo en 6 de los 28. No hay relación: Italia tiene la segunda mayor información y el peor riesgo.</a:t>
             </a:r>
             <a:endParaRPr lang="en-US" sz="850" dirty="0"/>
           </a:p>
@@ -22986,137 +23739,7 @@
       </p:sp>
       <p:sp>
         <p:nvSpPr>
-          <p:cNvPr id="53" name="Shape 51"/>
-          <p:cNvSpPr/>
-          <p:nvPr/>
-        </p:nvSpPr>
-        <p:spPr>
-          <a:xfrm>
-            <a:off x="8065008" y="4005072"/>
-            <a:ext cx="3502152" cy="1810512"/>
-          </a:xfrm>
-          <a:prstGeom prst="roundRect">
-            <a:avLst>
-              <a:gd name="adj" fmla="val 2020"/>
-            </a:avLst>
-          </a:prstGeom>
-          <a:solidFill>
-            <a:srgbClr val="FFD6BA"/>
-          </a:solidFill>
-          <a:ln w="12700">
-            <a:solidFill>
-              <a:srgbClr val="FFD6BA"/>
-            </a:solidFill>
-            <a:prstDash val="solid"/>
-          </a:ln>
-        </p:spPr>
-      </p:sp>
-      <p:sp>
-        <p:nvSpPr>
-          <p:cNvPr id="54" name="Shape 52"/>
-          <p:cNvSpPr/>
-          <p:nvPr/>
-        </p:nvSpPr>
-        <p:spPr>
-          <a:xfrm>
-            <a:off x="8065008" y="4005072"/>
-            <a:ext cx="64008" cy="1810512"/>
-          </a:xfrm>
-          <a:prstGeom prst="rect">
-            <a:avLst/>
-          </a:prstGeom>
-          <a:solidFill>
-            <a:srgbClr val="F56600"/>
-          </a:solidFill>
-          <a:ln w="12700">
-            <a:solidFill>
-              <a:srgbClr val="F56600"/>
-            </a:solidFill>
-            <a:prstDash val="solid"/>
-          </a:ln>
-        </p:spPr>
-      </p:sp>
-      <p:sp>
-        <p:nvSpPr>
-          <p:cNvPr id="55" name="Text 53"/>
-          <p:cNvSpPr txBox="1"/>
-          <p:nvPr/>
-        </p:nvSpPr>
-        <p:spPr>
-          <a:xfrm>
-            <a:off x="8284464" y="4096512"/>
-            <a:ext cx="3118104" cy="219456"/>
-          </a:xfrm>
-          <a:prstGeom prst="rect">
-            <a:avLst/>
-          </a:prstGeom>
-          <a:noFill/>
-          <a:ln/>
-        </p:spPr>
-        <p:txBody>
-          <a:bodyPr wrap="square" lIns="0" tIns="0" rIns="0" bIns="0" rtlCol="0" anchor="ctr"/>
-          <a:lstStyle/>
-          <a:p>
-            <a:pPr indent="0" marL="0">
-              <a:buNone/>
-            </a:pPr>
-            <a:r>
-              <a:rPr lang="en-US" sz="1100" b="1" dirty="0">
-                <a:solidFill>
-                  <a:srgbClr val="2B2B2B"/>
-                </a:solidFill>
-                <a:latin typeface="Verdana" pitchFamily="34" charset="0"/>
-                <a:ea typeface="Verdana" pitchFamily="34" charset="-122"/>
-                <a:cs typeface="Verdana" pitchFamily="34" charset="-120"/>
-              </a:rPr>
-              <a:t>Lo que el mapa NO dice</a:t>
-            </a:r>
-            <a:endParaRPr lang="en-US" sz="1100" dirty="0"/>
-          </a:p>
-        </p:txBody>
-      </p:sp>
-      <p:sp>
-        <p:nvSpPr>
-          <p:cNvPr id="56" name="Text 54"/>
-          <p:cNvSpPr txBox="1"/>
-          <p:nvPr/>
-        </p:nvSpPr>
-        <p:spPr>
-          <a:xfrm>
-            <a:off x="8284464" y="4334256"/>
-            <a:ext cx="3118104" cy="1371600"/>
-          </a:xfrm>
-          <a:prstGeom prst="rect">
-            <a:avLst/>
-          </a:prstGeom>
-          <a:noFill/>
-          <a:ln/>
-        </p:spPr>
-        <p:txBody>
-          <a:bodyPr wrap="square" lIns="0" tIns="0" rIns="0" bIns="0" rtlCol="0" anchor="ctr"/>
-          <a:lstStyle/>
-          <a:p>
-            <a:pPr indent="0" marL="0">
-              <a:buNone/>
-            </a:pPr>
-            <a:r>
-              <a:rPr lang="en-US" sz="850" dirty="0">
-                <a:solidFill>
-                  <a:srgbClr val="2B2B2B"/>
-                </a:solidFill>
-                <a:latin typeface="Verdana" pitchFamily="34" charset="0"/>
-                <a:ea typeface="Verdana" pitchFamily="34" charset="-122"/>
-                <a:cs typeface="Verdana" pitchFamily="34" charset="-120"/>
-              </a:rPr>
-              <a:t>Que más información dé más margen. La correlación de los siete es 0,68, pero descansa en los dos extremos: quitando Irlanda y Francia a la vez baja a 0,18. Por eso hay cuadrantes y no recta de ajuste. Tampoco compra riesgo: información contra coste del riesgo es -0,24; el eje que sí lo explica es el de recobro (-0,72).</a:t>
-            </a:r>
-            <a:endParaRPr lang="en-US" sz="850" dirty="0"/>
-          </a:p>
-        </p:txBody>
-      </p:sp>
-      <p:sp>
-        <p:nvSpPr>
-          <p:cNvPr id="57" name="Text 55"/>
+          <p:cNvPr id="82" name="Text 80"/>
           <p:cNvSpPr txBox="1"/>
           <p:nvPr/>
         </p:nvSpPr>
@@ -23147,7 +23770,7 @@
                 <a:ea typeface="Verdana" pitchFamily="34" charset="-122"/>
                 <a:cs typeface="Verdana" pitchFamily="34" charset="-120"/>
               </a:rPr>
-              <a:t>Información: índice propio 0–100 de cuatro componentes (profundidad de información crediticia y cobertura del bureau, Banco Mundial Doing Business 2020; utilidad del registro público para PYME y disponibilidad de cuentas depositadas, ordinales propios sobre normativa vigente). Margen bruto: ingreso total menos coste de los recursos, lámina 7. Coste del riesgo: PD × LGD de la clase IRB de PYME, EBA COREP C 9.02 2026-Q1 — es pérdida esperada anual, no el stock de dudosos. El residuo de España es negativo en las 22 especificaciones probadas (de −0,92 a −0,11 pp). Siete puntos: lectura descriptiva, no causal. Datos en transversal/mapa_info_margen.csv.</a:t>
+              <a:t>Coste del riesgo: PD × LGD de la clase IRB «Corporates – of which SME», EBA COREP C 9.02 2026-Q1 — pérdida esperada anual, NO el stock de dudosos. Margen bruto: ingreso total menos coste de los recursos, lámina 7. Información: índice propio 0–100 (Banco Mundial Doing Business 2020 más dos ordinales propios sobre normativa vigente). Robustez: se recalcula cada correlación quitando uno y dos países, 28 casos. El eje que sí explica el coste del riesgo es el de recobro (ρ = −0,72), en la lámina de los dos ejes. Siete puntos: lectura descriptiva, no causal. Datos en transversal/mapa_info_margen.csv.</a:t>
             </a:r>
             <a:endParaRPr lang="en-US" sz="700" dirty="0"/>
           </a:p>

--- a/pres/rentabilidad_pyme_laminas_adicionales.pptx
+++ b/pres/rentabilidad_pyme_laminas_adicionales.pptx
@@ -12,9 +12,10 @@
     <p:sldId id="260" r:id="rId6"/>
     <p:sldId id="261" r:id="rId7"/>
     <p:sldId id="262" r:id="rId8"/>
+    <p:sldId id="263" r:id="rId9"/>
   </p:sldIdLst>
   <p:notesMasterIdLst>
-    <p:notesMasterId r:id="rId9"/>
+    <p:notesMasterId r:id="rId10"/>
   </p:notesMasterIdLst>
   <p:sldSz cx="12192000" cy="6858000"/>
   <p:notesSz cx="6858000" cy="12192000"/>
@@ -3129,6 +3130,94 @@
             <a:fld id="{F7021451-1387-4CA6-816F-3879F97B5CBC}" type="slidenum">
               <a:rPr lang="en-US"/>
               <a:t>7</a:t>
+            </a:fld>
+            <a:endParaRPr lang="en-US"/>
+          </a:p>
+        </p:txBody>
+      </p:sp>
+    </p:spTree>
+    <p:extLst>
+      <p:ext uri="{BB962C8B-B14F-4D97-AF65-F5344CB8AC3E}">
+        <p14:creationId xmlns:p14="http://schemas.microsoft.com/office/powerpoint/2010/main" val="1024086991"/>
+      </p:ext>
+    </p:extLst>
+  </p:cSld>
+  <p:clrMapOvr>
+    <a:masterClrMapping/>
+  </p:clrMapOvr>
+</p:notes>
+</file>
+
+<file path=ppt/notesSlides/notesSlide8.xml><?xml version="1.0" encoding="utf-8"?>
+<p:notes xmlns:a="http://schemas.openxmlformats.org/drawingml/2006/main" xmlns:r="http://schemas.openxmlformats.org/officeDocument/2006/relationships" xmlns:p="http://schemas.openxmlformats.org/presentationml/2006/main">
+  <p:cSld>
+    <p:spTree>
+      <p:nvGrpSpPr>
+        <p:cNvPr id="1" name=""/>
+        <p:cNvGrpSpPr/>
+        <p:nvPr/>
+      </p:nvGrpSpPr>
+      <p:grpSpPr>
+        <a:xfrm>
+          <a:off x="0" y="0"/>
+          <a:ext cx="0" cy="0"/>
+          <a:chOff x="0" y="0"/>
+          <a:chExt cx="0" cy="0"/>
+        </a:xfrm>
+      </p:grpSpPr>
+      <p:sp>
+        <p:nvSpPr>
+          <p:cNvPr id="2" name="Slide Image Placeholder 1"/>
+          <p:cNvSpPr>
+            <a:spLocks noGrp="1" noRot="1" noChangeAspect="1"/>
+          </p:cNvSpPr>
+          <p:nvPr>
+            <p:ph type="sldImg"/>
+          </p:nvPr>
+        </p:nvSpPr>
+        <p:spPr/>
+      </p:sp>
+      <p:sp>
+        <p:nvSpPr>
+          <p:cNvPr id="3" name="Notes Placeholder 2"/>
+          <p:cNvSpPr>
+            <a:spLocks noGrp="1"/>
+          </p:cNvSpPr>
+          <p:nvPr>
+            <p:ph type="body" idx="1"/>
+          </p:nvPr>
+        </p:nvSpPr>
+        <p:spPr/>
+        <p:txBody>
+          <a:bodyPr/>
+          <a:lstStyle/>
+          <a:p>
+            <a:r>
+              <a:rPr lang="en-US" dirty="0"/>
+              <a:t/>
+            </a:r>
+            <a:endParaRPr lang="en-US" dirty="0"/>
+          </a:p>
+        </p:txBody>
+      </p:sp>
+      <p:sp>
+        <p:nvSpPr>
+          <p:cNvPr id="4" name="Slide Number Placeholder 3"/>
+          <p:cNvSpPr>
+            <a:spLocks noGrp="1"/>
+          </p:cNvSpPr>
+          <p:nvPr>
+            <p:ph type="sldNum" sz="quarter" idx="10"/>
+          </p:nvPr>
+        </p:nvSpPr>
+        <p:spPr/>
+        <p:txBody>
+          <a:bodyPr/>
+          <a:lstStyle/>
+          <a:p>
+            <a:fld id="{F7021451-1387-4CA6-816F-3879F97B5CBC}" type="slidenum">
+              <a:rPr lang="en-US"/>
+              <a:t>8</a:t>
             </a:fld>
             <a:endParaRPr lang="en-US"/>
           </a:p>
@@ -23784,6 +23873,1060 @@
 </p:sld>
 </file>
 
+<file path=ppt/slides/slide8.xml><?xml version="1.0" encoding="utf-8"?>
+<p:sld xmlns:a="http://schemas.openxmlformats.org/drawingml/2006/main" xmlns:r="http://schemas.openxmlformats.org/officeDocument/2006/relationships" xmlns:p="http://schemas.openxmlformats.org/presentationml/2006/main">
+  <p:cSld name="Slide 8">
+    <p:bg>
+      <p:bgPr>
+        <a:solidFill>
+          <a:srgbClr val="FAFBFC"/>
+        </a:solidFill>
+      </p:bgPr>
+    </p:bg>
+    <p:spTree>
+      <p:nvGrpSpPr>
+        <p:cNvPr id="1" name=""/>
+        <p:cNvGrpSpPr/>
+        <p:nvPr/>
+      </p:nvGrpSpPr>
+      <p:grpSpPr>
+        <a:xfrm>
+          <a:off x="0" y="0"/>
+          <a:ext cx="0" cy="0"/>
+          <a:chOff x="0" y="0"/>
+          <a:chExt cx="0" cy="0"/>
+        </a:xfrm>
+      </p:grpSpPr>
+      <p:sp>
+        <p:nvSpPr>
+          <p:cNvPr id="2" name="Text 0"/>
+          <p:cNvSpPr txBox="1"/>
+          <p:nvPr/>
+        </p:nvSpPr>
+        <p:spPr>
+          <a:xfrm>
+            <a:off x="10040112" y="274320"/>
+            <a:ext cx="1600200" cy="256032"/>
+          </a:xfrm>
+          <a:prstGeom prst="rect">
+            <a:avLst/>
+          </a:prstGeom>
+          <a:noFill/>
+          <a:ln/>
+        </p:spPr>
+        <p:txBody>
+          <a:bodyPr wrap="square" lIns="0" tIns="0" rIns="0" bIns="0" rtlCol="0" anchor="ctr"/>
+          <a:lstStyle/>
+          <a:p>
+            <a:pPr algn="r" indent="0" marL="0">
+              <a:buNone/>
+            </a:pPr>
+            <a:r>
+              <a:rPr lang="en-US" sz="1300" b="1" dirty="0">
+                <a:solidFill>
+                  <a:srgbClr val="2B2B2B"/>
+                </a:solidFill>
+                <a:latin typeface="Verdana" pitchFamily="34" charset="0"/>
+                <a:ea typeface="Verdana" pitchFamily="34" charset="-122"/>
+                <a:cs typeface="Verdana" pitchFamily="34" charset="-120"/>
+              </a:rPr>
+              <a:t>bankinter</a:t>
+            </a:r>
+            <a:pPr algn="r" indent="0" marL="0">
+              <a:buNone/>
+            </a:pPr>
+            <a:r>
+              <a:rPr lang="en-US" sz="1300" b="1" dirty="0">
+                <a:solidFill>
+                  <a:srgbClr val="F56600"/>
+                </a:solidFill>
+                <a:latin typeface="Verdana" pitchFamily="34" charset="0"/>
+                <a:ea typeface="Verdana" pitchFamily="34" charset="-122"/>
+                <a:cs typeface="Verdana" pitchFamily="34" charset="-120"/>
+              </a:rPr>
+              <a:t>.</a:t>
+            </a:r>
+            <a:endParaRPr lang="en-US" sz="1300" dirty="0"/>
+          </a:p>
+        </p:txBody>
+      </p:sp>
+      <p:sp>
+        <p:nvSpPr>
+          <p:cNvPr id="3" name="Text 1"/>
+          <p:cNvSpPr txBox="1"/>
+          <p:nvPr/>
+        </p:nvSpPr>
+        <p:spPr>
+          <a:xfrm>
+            <a:off x="621792" y="420624"/>
+            <a:ext cx="9208008" cy="676656"/>
+          </a:xfrm>
+          <a:prstGeom prst="rect">
+            <a:avLst/>
+          </a:prstGeom>
+          <a:noFill/>
+          <a:ln/>
+        </p:spPr>
+        <p:txBody>
+          <a:bodyPr wrap="square" lIns="0" tIns="0" rIns="0" bIns="0" rtlCol="0" anchor="ctr"/>
+          <a:lstStyle/>
+          <a:p>
+            <a:pPr indent="0" marL="0">
+              <a:buNone/>
+            </a:pPr>
+            <a:r>
+              <a:rPr lang="en-US" sz="2200" b="1" dirty="0">
+                <a:solidFill>
+                  <a:srgbClr val="2B2B2B"/>
+                </a:solidFill>
+                <a:latin typeface="Verdana" pitchFamily="34" charset="0"/>
+                <a:ea typeface="Verdana" pitchFamily="34" charset="-122"/>
+                <a:cs typeface="Verdana" pitchFamily="34" charset="-120"/>
+              </a:rPr>
+              <a:t>Observaciones: España</a:t>
+            </a:r>
+            <a:endParaRPr lang="en-US" sz="2200" dirty="0"/>
+          </a:p>
+        </p:txBody>
+      </p:sp>
+      <p:sp>
+        <p:nvSpPr>
+          <p:cNvPr id="4" name="Text 2"/>
+          <p:cNvSpPr txBox="1"/>
+          <p:nvPr/>
+        </p:nvSpPr>
+        <p:spPr>
+          <a:xfrm>
+            <a:off x="621792" y="1060704"/>
+            <a:ext cx="10945368" cy="365760"/>
+          </a:xfrm>
+          <a:prstGeom prst="rect">
+            <a:avLst/>
+          </a:prstGeom>
+          <a:noFill/>
+          <a:ln/>
+        </p:spPr>
+        <p:txBody>
+          <a:bodyPr wrap="square" lIns="0" tIns="0" rIns="0" bIns="0" rtlCol="0" anchor="ctr"/>
+          <a:lstStyle/>
+          <a:p>
+            <a:pPr indent="0" marL="0">
+              <a:buNone/>
+            </a:pPr>
+            <a:r>
+              <a:rPr lang="en-US" sz="1050" dirty="0">
+                <a:solidFill>
+                  <a:srgbClr val="818181"/>
+                </a:solidFill>
+                <a:latin typeface="Verdana" pitchFamily="34" charset="0"/>
+                <a:ea typeface="Verdana" pitchFamily="34" charset="-122"/>
+                <a:cs typeface="Verdana" pitchFamily="34" charset="-120"/>
+              </a:rPr>
+              <a:t>Lo que se observa en el bloque español y no se ve en el agregado europeo · Hechos medidos; lo que se deriva de ellos va en la lámina de recomendaciones</a:t>
+            </a:r>
+            <a:endParaRPr lang="en-US" sz="1050" dirty="0"/>
+          </a:p>
+        </p:txBody>
+      </p:sp>
+      <p:sp>
+        <p:nvSpPr>
+          <p:cNvPr id="5" name="Shape 3"/>
+          <p:cNvSpPr/>
+          <p:nvPr/>
+        </p:nvSpPr>
+        <p:spPr>
+          <a:xfrm>
+            <a:off x="621792" y="1554480"/>
+            <a:ext cx="329184" cy="329184"/>
+          </a:xfrm>
+          <a:prstGeom prst="ellipse">
+            <a:avLst/>
+          </a:prstGeom>
+          <a:solidFill>
+            <a:srgbClr val="77BFEE"/>
+          </a:solidFill>
+          <a:ln w="12700">
+            <a:solidFill>
+              <a:srgbClr val="77BFEE"/>
+            </a:solidFill>
+            <a:prstDash val="solid"/>
+          </a:ln>
+        </p:spPr>
+      </p:sp>
+      <p:sp>
+        <p:nvSpPr>
+          <p:cNvPr id="6" name="Text 4"/>
+          <p:cNvSpPr txBox="1"/>
+          <p:nvPr/>
+        </p:nvSpPr>
+        <p:spPr>
+          <a:xfrm>
+            <a:off x="621792" y="1554480"/>
+            <a:ext cx="329184" cy="329184"/>
+          </a:xfrm>
+          <a:prstGeom prst="rect">
+            <a:avLst/>
+          </a:prstGeom>
+          <a:noFill/>
+          <a:ln/>
+        </p:spPr>
+        <p:txBody>
+          <a:bodyPr wrap="square" lIns="0" tIns="0" rIns="0" bIns="0" rtlCol="0" anchor="ctr"/>
+          <a:lstStyle/>
+          <a:p>
+            <a:pPr algn="ctr" indent="0" marL="0">
+              <a:buNone/>
+            </a:pPr>
+            <a:r>
+              <a:rPr lang="en-US" sz="1300" b="1" dirty="0">
+                <a:solidFill>
+                  <a:srgbClr val="2B2B2B"/>
+                </a:solidFill>
+                <a:latin typeface="Verdana" pitchFamily="34" charset="0"/>
+                <a:ea typeface="Verdana" pitchFamily="34" charset="-122"/>
+                <a:cs typeface="Verdana" pitchFamily="34" charset="-120"/>
+              </a:rPr>
+              <a:t>1</a:t>
+            </a:r>
+            <a:endParaRPr lang="en-US" sz="1300" dirty="0"/>
+          </a:p>
+        </p:txBody>
+      </p:sp>
+      <p:sp>
+        <p:nvSpPr>
+          <p:cNvPr id="7" name="Text 5"/>
+          <p:cNvSpPr txBox="1"/>
+          <p:nvPr/>
+        </p:nvSpPr>
+        <p:spPr>
+          <a:xfrm>
+            <a:off x="1124712" y="1517904"/>
+            <a:ext cx="10607040" cy="274320"/>
+          </a:xfrm>
+          <a:prstGeom prst="rect">
+            <a:avLst/>
+          </a:prstGeom>
+          <a:noFill/>
+          <a:ln/>
+        </p:spPr>
+        <p:txBody>
+          <a:bodyPr wrap="square" lIns="0" tIns="0" rIns="0" bIns="0" rtlCol="0" anchor="ctr"/>
+          <a:lstStyle/>
+          <a:p>
+            <a:pPr indent="0" marL="0">
+              <a:buNone/>
+            </a:pPr>
+            <a:r>
+              <a:rPr lang="en-US" sz="1250" b="1" dirty="0">
+                <a:solidFill>
+                  <a:srgbClr val="2B2B2B"/>
+                </a:solidFill>
+                <a:latin typeface="Verdana" pitchFamily="34" charset="0"/>
+                <a:ea typeface="Verdana" pitchFamily="34" charset="-122"/>
+                <a:cs typeface="Verdana" pitchFamily="34" charset="-120"/>
+              </a:rPr>
+              <a:t>El crédito se concede; lo que las pymes señalan es el precio</a:t>
+            </a:r>
+            <a:endParaRPr lang="en-US" sz="1250" dirty="0"/>
+          </a:p>
+        </p:txBody>
+      </p:sp>
+      <p:sp>
+        <p:nvSpPr>
+          <p:cNvPr id="8" name="Text 6"/>
+          <p:cNvSpPr txBox="1"/>
+          <p:nvPr/>
+        </p:nvSpPr>
+        <p:spPr>
+          <a:xfrm>
+            <a:off x="1124712" y="1792224"/>
+            <a:ext cx="10607040" cy="457200"/>
+          </a:xfrm>
+          <a:prstGeom prst="rect">
+            <a:avLst/>
+          </a:prstGeom>
+          <a:noFill/>
+          <a:ln/>
+        </p:spPr>
+        <p:txBody>
+          <a:bodyPr wrap="square" lIns="0" tIns="0" rIns="0" bIns="0" rtlCol="0" anchor="ctr"/>
+          <a:lstStyle/>
+          <a:p>
+            <a:pPr indent="0" marL="0">
+              <a:buNone/>
+            </a:pPr>
+            <a:r>
+              <a:rPr lang="en-US" sz="900" dirty="0">
+                <a:solidFill>
+                  <a:srgbClr val="818181"/>
+                </a:solidFill>
+                <a:latin typeface="Verdana" pitchFamily="34" charset="0"/>
+                <a:ea typeface="Verdana" pitchFamily="34" charset="-122"/>
+                <a:cs typeface="Verdana" pitchFamily="34" charset="-120"/>
+              </a:rPr>
+              <a:t>El 92,8 % de las pymes que pide financiación la obtiene y la acepta, y solo al 3,2 % no se le concede. Preguntadas por obstáculos, el 49,2 % no señala ninguno y el 21,6 % señala el precio, que es el más citado. Ese 21,6 % es el porcentaje de empresas que lo menciona sobre el total encuestado, NO un tipo de interés.</a:t>
+            </a:r>
+            <a:endParaRPr lang="en-US" sz="900" dirty="0"/>
+          </a:p>
+        </p:txBody>
+      </p:sp>
+      <p:sp>
+        <p:nvSpPr>
+          <p:cNvPr id="9" name="Shape 7"/>
+          <p:cNvSpPr/>
+          <p:nvPr/>
+        </p:nvSpPr>
+        <p:spPr>
+          <a:xfrm>
+            <a:off x="621792" y="2327148"/>
+            <a:ext cx="329184" cy="329184"/>
+          </a:xfrm>
+          <a:prstGeom prst="ellipse">
+            <a:avLst/>
+          </a:prstGeom>
+          <a:solidFill>
+            <a:srgbClr val="77BFEE"/>
+          </a:solidFill>
+          <a:ln w="12700">
+            <a:solidFill>
+              <a:srgbClr val="77BFEE"/>
+            </a:solidFill>
+            <a:prstDash val="solid"/>
+          </a:ln>
+        </p:spPr>
+      </p:sp>
+      <p:sp>
+        <p:nvSpPr>
+          <p:cNvPr id="10" name="Text 8"/>
+          <p:cNvSpPr txBox="1"/>
+          <p:nvPr/>
+        </p:nvSpPr>
+        <p:spPr>
+          <a:xfrm>
+            <a:off x="621792" y="2327148"/>
+            <a:ext cx="329184" cy="329184"/>
+          </a:xfrm>
+          <a:prstGeom prst="rect">
+            <a:avLst/>
+          </a:prstGeom>
+          <a:noFill/>
+          <a:ln/>
+        </p:spPr>
+        <p:txBody>
+          <a:bodyPr wrap="square" lIns="0" tIns="0" rIns="0" bIns="0" rtlCol="0" anchor="ctr"/>
+          <a:lstStyle/>
+          <a:p>
+            <a:pPr algn="ctr" indent="0" marL="0">
+              <a:buNone/>
+            </a:pPr>
+            <a:r>
+              <a:rPr lang="en-US" sz="1300" b="1" dirty="0">
+                <a:solidFill>
+                  <a:srgbClr val="2B2B2B"/>
+                </a:solidFill>
+                <a:latin typeface="Verdana" pitchFamily="34" charset="0"/>
+                <a:ea typeface="Verdana" pitchFamily="34" charset="-122"/>
+                <a:cs typeface="Verdana" pitchFamily="34" charset="-120"/>
+              </a:rPr>
+              <a:t>2</a:t>
+            </a:r>
+            <a:endParaRPr lang="en-US" sz="1300" dirty="0"/>
+          </a:p>
+        </p:txBody>
+      </p:sp>
+      <p:sp>
+        <p:nvSpPr>
+          <p:cNvPr id="11" name="Text 9"/>
+          <p:cNvSpPr txBox="1"/>
+          <p:nvPr/>
+        </p:nvSpPr>
+        <p:spPr>
+          <a:xfrm>
+            <a:off x="1124712" y="2290572"/>
+            <a:ext cx="10607040" cy="274320"/>
+          </a:xfrm>
+          <a:prstGeom prst="rect">
+            <a:avLst/>
+          </a:prstGeom>
+          <a:noFill/>
+          <a:ln/>
+        </p:spPr>
+        <p:txBody>
+          <a:bodyPr wrap="square" lIns="0" tIns="0" rIns="0" bIns="0" rtlCol="0" anchor="ctr"/>
+          <a:lstStyle/>
+          <a:p>
+            <a:pPr indent="0" marL="0">
+              <a:buNone/>
+            </a:pPr>
+            <a:r>
+              <a:rPr lang="en-US" sz="1250" b="1" dirty="0">
+                <a:solidFill>
+                  <a:srgbClr val="2B2B2B"/>
+                </a:solidFill>
+                <a:latin typeface="Verdana" pitchFamily="34" charset="0"/>
+                <a:ea typeface="Verdana" pitchFamily="34" charset="-122"/>
+                <a:cs typeface="Verdana" pitchFamily="34" charset="-120"/>
+              </a:rPr>
+              <a:t>La pyme pequeña tiene 2,1 puntos entre lo que gana y lo que paga</a:t>
+            </a:r>
+            <a:endParaRPr lang="en-US" sz="1250" dirty="0"/>
+          </a:p>
+        </p:txBody>
+      </p:sp>
+      <p:sp>
+        <p:nvSpPr>
+          <p:cNvPr id="12" name="Text 10"/>
+          <p:cNvSpPr txBox="1"/>
+          <p:nvPr/>
+        </p:nvSpPr>
+        <p:spPr>
+          <a:xfrm>
+            <a:off x="1124712" y="2564892"/>
+            <a:ext cx="10607040" cy="457200"/>
+          </a:xfrm>
+          <a:prstGeom prst="rect">
+            <a:avLst/>
+          </a:prstGeom>
+          <a:noFill/>
+          <a:ln/>
+        </p:spPr>
+        <p:txBody>
+          <a:bodyPr wrap="square" lIns="0" tIns="0" rIns="0" bIns="0" rtlCol="0" anchor="ctr"/>
+          <a:lstStyle/>
+          <a:p>
+            <a:pPr indent="0" marL="0">
+              <a:buNone/>
+            </a:pPr>
+            <a:r>
+              <a:rPr lang="en-US" sz="900" dirty="0">
+                <a:solidFill>
+                  <a:srgbClr val="818181"/>
+                </a:solidFill>
+                <a:latin typeface="Verdana" pitchFamily="34" charset="0"/>
+                <a:ea typeface="Verdana" pitchFamily="34" charset="-122"/>
+                <a:cs typeface="Verdana" pitchFamily="34" charset="-120"/>
+              </a:rPr>
+              <a:t>Gana un 5,4 % con su activo y paga un 3,3 % por su deuda: 2,1 puntos de diferencia. La mediana tiene 6,1 puntos, casi el triple, con un ROA del 10,4 %. En la serie de la Central de Balances esa diferencia lleva en 2,1 puntos desde 2023.</a:t>
+            </a:r>
+            <a:endParaRPr lang="en-US" sz="900" dirty="0"/>
+          </a:p>
+        </p:txBody>
+      </p:sp>
+      <p:sp>
+        <p:nvSpPr>
+          <p:cNvPr id="13" name="Shape 11"/>
+          <p:cNvSpPr/>
+          <p:nvPr/>
+        </p:nvSpPr>
+        <p:spPr>
+          <a:xfrm>
+            <a:off x="621792" y="3099816"/>
+            <a:ext cx="329184" cy="329184"/>
+          </a:xfrm>
+          <a:prstGeom prst="ellipse">
+            <a:avLst/>
+          </a:prstGeom>
+          <a:solidFill>
+            <a:srgbClr val="77BFEE"/>
+          </a:solidFill>
+          <a:ln w="12700">
+            <a:solidFill>
+              <a:srgbClr val="77BFEE"/>
+            </a:solidFill>
+            <a:prstDash val="solid"/>
+          </a:ln>
+        </p:spPr>
+      </p:sp>
+      <p:sp>
+        <p:nvSpPr>
+          <p:cNvPr id="14" name="Text 12"/>
+          <p:cNvSpPr txBox="1"/>
+          <p:nvPr/>
+        </p:nvSpPr>
+        <p:spPr>
+          <a:xfrm>
+            <a:off x="621792" y="3099816"/>
+            <a:ext cx="329184" cy="329184"/>
+          </a:xfrm>
+          <a:prstGeom prst="rect">
+            <a:avLst/>
+          </a:prstGeom>
+          <a:noFill/>
+          <a:ln/>
+        </p:spPr>
+        <p:txBody>
+          <a:bodyPr wrap="square" lIns="0" tIns="0" rIns="0" bIns="0" rtlCol="0" anchor="ctr"/>
+          <a:lstStyle/>
+          <a:p>
+            <a:pPr algn="ctr" indent="0" marL="0">
+              <a:buNone/>
+            </a:pPr>
+            <a:r>
+              <a:rPr lang="en-US" sz="1300" b="1" dirty="0">
+                <a:solidFill>
+                  <a:srgbClr val="2B2B2B"/>
+                </a:solidFill>
+                <a:latin typeface="Verdana" pitchFamily="34" charset="0"/>
+                <a:ea typeface="Verdana" pitchFamily="34" charset="-122"/>
+                <a:cs typeface="Verdana" pitchFamily="34" charset="-120"/>
+              </a:rPr>
+              <a:t>3</a:t>
+            </a:r>
+            <a:endParaRPr lang="en-US" sz="1300" dirty="0"/>
+          </a:p>
+        </p:txBody>
+      </p:sp>
+      <p:sp>
+        <p:nvSpPr>
+          <p:cNvPr id="15" name="Text 13"/>
+          <p:cNvSpPr txBox="1"/>
+          <p:nvPr/>
+        </p:nvSpPr>
+        <p:spPr>
+          <a:xfrm>
+            <a:off x="1124712" y="3063240"/>
+            <a:ext cx="10607040" cy="274320"/>
+          </a:xfrm>
+          <a:prstGeom prst="rect">
+            <a:avLst/>
+          </a:prstGeom>
+          <a:noFill/>
+          <a:ln/>
+        </p:spPr>
+        <p:txBody>
+          <a:bodyPr wrap="square" lIns="0" tIns="0" rIns="0" bIns="0" rtlCol="0" anchor="ctr"/>
+          <a:lstStyle/>
+          <a:p>
+            <a:pPr indent="0" marL="0">
+              <a:buNone/>
+            </a:pPr>
+            <a:r>
+              <a:rPr lang="en-US" sz="1250" b="1" dirty="0">
+                <a:solidFill>
+                  <a:srgbClr val="2B2B2B"/>
+                </a:solidFill>
+                <a:latin typeface="Verdana" pitchFamily="34" charset="0"/>
+                <a:ea typeface="Verdana" pitchFamily="34" charset="-122"/>
+                <a:cs typeface="Verdana" pitchFamily="34" charset="-120"/>
+              </a:rPr>
+              <a:t>El destino declarado es el circulante, el producto con menos estadística</a:t>
+            </a:r>
+            <a:endParaRPr lang="en-US" sz="1250" dirty="0"/>
+          </a:p>
+        </p:txBody>
+      </p:sp>
+      <p:sp>
+        <p:nvSpPr>
+          <p:cNvPr id="16" name="Text 14"/>
+          <p:cNvSpPr txBox="1"/>
+          <p:nvPr/>
+        </p:nvSpPr>
+        <p:spPr>
+          <a:xfrm>
+            <a:off x="1124712" y="3337560"/>
+            <a:ext cx="10607040" cy="457200"/>
+          </a:xfrm>
+          <a:prstGeom prst="rect">
+            <a:avLst/>
+          </a:prstGeom>
+          <a:noFill/>
+          <a:ln/>
+        </p:spPr>
+        <p:txBody>
+          <a:bodyPr wrap="square" lIns="0" tIns="0" rIns="0" bIns="0" rtlCol="0" anchor="ctr"/>
+          <a:lstStyle/>
+          <a:p>
+            <a:pPr indent="0" marL="0">
+              <a:buNone/>
+            </a:pPr>
+            <a:r>
+              <a:rPr lang="en-US" sz="900" dirty="0">
+                <a:solidFill>
+                  <a:srgbClr val="818181"/>
+                </a:solidFill>
+                <a:latin typeface="Verdana" pitchFamily="34" charset="0"/>
+                <a:ea typeface="Verdana" pitchFamily="34" charset="-122"/>
+                <a:cs typeface="Verdana" pitchFamily="34" charset="-120"/>
+              </a:rPr>
+              <a:t>El 73,0 % de las pymes con necesidades lo quiere para circulante, frente al 64,6 % de 2024. De ese producto no existe comisión de disponibilidad ni tasa de disposición en ninguna estadística, y el tipo del BCE ni siquiera tiene tramo de importe.</a:t>
+            </a:r>
+            <a:endParaRPr lang="en-US" sz="900" dirty="0"/>
+          </a:p>
+        </p:txBody>
+      </p:sp>
+      <p:sp>
+        <p:nvSpPr>
+          <p:cNvPr id="17" name="Shape 15"/>
+          <p:cNvSpPr/>
+          <p:nvPr/>
+        </p:nvSpPr>
+        <p:spPr>
+          <a:xfrm>
+            <a:off x="621792" y="3872484"/>
+            <a:ext cx="329184" cy="329184"/>
+          </a:xfrm>
+          <a:prstGeom prst="ellipse">
+            <a:avLst/>
+          </a:prstGeom>
+          <a:solidFill>
+            <a:srgbClr val="77BFEE"/>
+          </a:solidFill>
+          <a:ln w="12700">
+            <a:solidFill>
+              <a:srgbClr val="77BFEE"/>
+            </a:solidFill>
+            <a:prstDash val="solid"/>
+          </a:ln>
+        </p:spPr>
+      </p:sp>
+      <p:sp>
+        <p:nvSpPr>
+          <p:cNvPr id="18" name="Text 16"/>
+          <p:cNvSpPr txBox="1"/>
+          <p:nvPr/>
+        </p:nvSpPr>
+        <p:spPr>
+          <a:xfrm>
+            <a:off x="621792" y="3872484"/>
+            <a:ext cx="329184" cy="329184"/>
+          </a:xfrm>
+          <a:prstGeom prst="rect">
+            <a:avLst/>
+          </a:prstGeom>
+          <a:noFill/>
+          <a:ln/>
+        </p:spPr>
+        <p:txBody>
+          <a:bodyPr wrap="square" lIns="0" tIns="0" rIns="0" bIns="0" rtlCol="0" anchor="ctr"/>
+          <a:lstStyle/>
+          <a:p>
+            <a:pPr algn="ctr" indent="0" marL="0">
+              <a:buNone/>
+            </a:pPr>
+            <a:r>
+              <a:rPr lang="en-US" sz="1300" b="1" dirty="0">
+                <a:solidFill>
+                  <a:srgbClr val="2B2B2B"/>
+                </a:solidFill>
+                <a:latin typeface="Verdana" pitchFamily="34" charset="0"/>
+                <a:ea typeface="Verdana" pitchFamily="34" charset="-122"/>
+                <a:cs typeface="Verdana" pitchFamily="34" charset="-120"/>
+              </a:rPr>
+              <a:t>4</a:t>
+            </a:r>
+            <a:endParaRPr lang="en-US" sz="1300" dirty="0"/>
+          </a:p>
+        </p:txBody>
+      </p:sp>
+      <p:sp>
+        <p:nvSpPr>
+          <p:cNvPr id="19" name="Text 17"/>
+          <p:cNvSpPr txBox="1"/>
+          <p:nvPr/>
+        </p:nvSpPr>
+        <p:spPr>
+          <a:xfrm>
+            <a:off x="1124712" y="3835908"/>
+            <a:ext cx="10607040" cy="274320"/>
+          </a:xfrm>
+          <a:prstGeom prst="rect">
+            <a:avLst/>
+          </a:prstGeom>
+          <a:noFill/>
+          <a:ln/>
+        </p:spPr>
+        <p:txBody>
+          <a:bodyPr wrap="square" lIns="0" tIns="0" rIns="0" bIns="0" rtlCol="0" anchor="ctr"/>
+          <a:lstStyle/>
+          <a:p>
+            <a:pPr indent="0" marL="0">
+              <a:buNone/>
+            </a:pPr>
+            <a:r>
+              <a:rPr lang="en-US" sz="1250" b="1" dirty="0">
+                <a:solidFill>
+                  <a:srgbClr val="2B2B2B"/>
+                </a:solidFill>
+                <a:latin typeface="Verdana" pitchFamily="34" charset="0"/>
+                <a:ea typeface="Verdana" pitchFamily="34" charset="-122"/>
+                <a:cs typeface="Verdana" pitchFamily="34" charset="-120"/>
+              </a:rPr>
+              <a:t>Entre los cinco bancos españoles el orden lo marca el capital, no la eficiencia</a:t>
+            </a:r>
+            <a:endParaRPr lang="en-US" sz="1250" dirty="0"/>
+          </a:p>
+        </p:txBody>
+      </p:sp>
+      <p:sp>
+        <p:nvSpPr>
+          <p:cNvPr id="20" name="Text 18"/>
+          <p:cNvSpPr txBox="1"/>
+          <p:nvPr/>
+        </p:nvSpPr>
+        <p:spPr>
+          <a:xfrm>
+            <a:off x="1124712" y="4110228"/>
+            <a:ext cx="10607040" cy="457200"/>
+          </a:xfrm>
+          <a:prstGeom prst="rect">
+            <a:avLst/>
+          </a:prstGeom>
+          <a:noFill/>
+          <a:ln/>
+        </p:spPr>
+        <p:txBody>
+          <a:bodyPr wrap="square" lIns="0" tIns="0" rIns="0" bIns="0" rtlCol="0" anchor="ctr"/>
+          <a:lstStyle/>
+          <a:p>
+            <a:pPr indent="0" marL="0">
+              <a:buNone/>
+            </a:pPr>
+            <a:r>
+              <a:rPr lang="en-US" sz="900" dirty="0">
+                <a:solidFill>
+                  <a:srgbClr val="818181"/>
+                </a:solidFill>
+                <a:latin typeface="Verdana" pitchFamily="34" charset="0"/>
+                <a:ea typeface="Verdana" pitchFamily="34" charset="-122"/>
+                <a:cs typeface="Verdana" pitchFamily="34" charset="-120"/>
+              </a:rPr>
+              <a:t>Sabadell tiene la peor eficiencia de los cinco (41,0 %) y queda segundo en ROE, con una densidad de RWA del 37,3 %. BBVA tiene la segunda mejor eficiencia (34,3 %) y queda cuarto, con una densidad del 71,0 %. Es el mismo patrón del agregado europeo, y aquí los cinco operan en el mismo mercado.</a:t>
+            </a:r>
+            <a:endParaRPr lang="en-US" sz="900" dirty="0"/>
+          </a:p>
+        </p:txBody>
+      </p:sp>
+      <p:sp>
+        <p:nvSpPr>
+          <p:cNvPr id="21" name="Shape 19"/>
+          <p:cNvSpPr/>
+          <p:nvPr/>
+        </p:nvSpPr>
+        <p:spPr>
+          <a:xfrm>
+            <a:off x="621792" y="4645152"/>
+            <a:ext cx="329184" cy="329184"/>
+          </a:xfrm>
+          <a:prstGeom prst="ellipse">
+            <a:avLst/>
+          </a:prstGeom>
+          <a:solidFill>
+            <a:srgbClr val="77BFEE"/>
+          </a:solidFill>
+          <a:ln w="12700">
+            <a:solidFill>
+              <a:srgbClr val="77BFEE"/>
+            </a:solidFill>
+            <a:prstDash val="solid"/>
+          </a:ln>
+        </p:spPr>
+      </p:sp>
+      <p:sp>
+        <p:nvSpPr>
+          <p:cNvPr id="22" name="Text 20"/>
+          <p:cNvSpPr txBox="1"/>
+          <p:nvPr/>
+        </p:nvSpPr>
+        <p:spPr>
+          <a:xfrm>
+            <a:off x="621792" y="4645152"/>
+            <a:ext cx="329184" cy="329184"/>
+          </a:xfrm>
+          <a:prstGeom prst="rect">
+            <a:avLst/>
+          </a:prstGeom>
+          <a:noFill/>
+          <a:ln/>
+        </p:spPr>
+        <p:txBody>
+          <a:bodyPr wrap="square" lIns="0" tIns="0" rIns="0" bIns="0" rtlCol="0" anchor="ctr"/>
+          <a:lstStyle/>
+          <a:p>
+            <a:pPr algn="ctr" indent="0" marL="0">
+              <a:buNone/>
+            </a:pPr>
+            <a:r>
+              <a:rPr lang="en-US" sz="1300" b="1" dirty="0">
+                <a:solidFill>
+                  <a:srgbClr val="2B2B2B"/>
+                </a:solidFill>
+                <a:latin typeface="Verdana" pitchFamily="34" charset="0"/>
+                <a:ea typeface="Verdana" pitchFamily="34" charset="-122"/>
+                <a:cs typeface="Verdana" pitchFamily="34" charset="-120"/>
+              </a:rPr>
+              <a:t>5</a:t>
+            </a:r>
+            <a:endParaRPr lang="en-US" sz="1300" dirty="0"/>
+          </a:p>
+        </p:txBody>
+      </p:sp>
+      <p:sp>
+        <p:nvSpPr>
+          <p:cNvPr id="23" name="Text 21"/>
+          <p:cNvSpPr txBox="1"/>
+          <p:nvPr/>
+        </p:nvSpPr>
+        <p:spPr>
+          <a:xfrm>
+            <a:off x="1124712" y="4608576"/>
+            <a:ext cx="10607040" cy="274320"/>
+          </a:xfrm>
+          <a:prstGeom prst="rect">
+            <a:avLst/>
+          </a:prstGeom>
+          <a:noFill/>
+          <a:ln/>
+        </p:spPr>
+        <p:txBody>
+          <a:bodyPr wrap="square" lIns="0" tIns="0" rIns="0" bIns="0" rtlCol="0" anchor="ctr"/>
+          <a:lstStyle/>
+          <a:p>
+            <a:pPr indent="0" marL="0">
+              <a:buNone/>
+            </a:pPr>
+            <a:r>
+              <a:rPr lang="en-US" sz="1250" b="1" dirty="0">
+                <a:solidFill>
+                  <a:srgbClr val="2B2B2B"/>
+                </a:solidFill>
+                <a:latin typeface="Verdana" pitchFamily="34" charset="0"/>
+                <a:ea typeface="Verdana" pitchFamily="34" charset="-122"/>
+                <a:cs typeface="Verdana" pitchFamily="34" charset="-120"/>
+              </a:rPr>
+              <a:t>Entre el primero y el último hay 119 pb de precio de equilibrio</a:t>
+            </a:r>
+            <a:endParaRPr lang="en-US" sz="1250" dirty="0"/>
+          </a:p>
+        </p:txBody>
+      </p:sp>
+      <p:sp>
+        <p:nvSpPr>
+          <p:cNvPr id="24" name="Text 22"/>
+          <p:cNvSpPr txBox="1"/>
+          <p:nvPr/>
+        </p:nvSpPr>
+        <p:spPr>
+          <a:xfrm>
+            <a:off x="1124712" y="4882896"/>
+            <a:ext cx="10607040" cy="457200"/>
+          </a:xfrm>
+          <a:prstGeom prst="rect">
+            <a:avLst/>
+          </a:prstGeom>
+          <a:noFill/>
+          <a:ln/>
+        </p:spPr>
+        <p:txBody>
+          <a:bodyPr wrap="square" lIns="0" tIns="0" rIns="0" bIns="0" rtlCol="0" anchor="ctr"/>
+          <a:lstStyle/>
+          <a:p>
+            <a:pPr indent="0" marL="0">
+              <a:buNone/>
+            </a:pPr>
+            <a:r>
+              <a:rPr lang="en-US" sz="900" dirty="0">
+                <a:solidFill>
+                  <a:srgbClr val="818181"/>
+                </a:solidFill>
+                <a:latin typeface="Verdana" pitchFamily="34" charset="0"/>
+                <a:ea typeface="Verdana" pitchFamily="34" charset="-122"/>
+                <a:cs typeface="Verdana" pitchFamily="34" charset="-120"/>
+              </a:rPr>
+              <a:t>Con su propio riesgo, capital y gastos, Bankinter necesita un 2,58 % para un ROE del 15 % y BBVA un 3,77 %: 119 pb de diferencia. El precio y las comisiones del modelo son comunes a los cinco, así que la distancia es de estructura, no de política comercial.</a:t>
+            </a:r>
+            <a:endParaRPr lang="en-US" sz="900" dirty="0"/>
+          </a:p>
+        </p:txBody>
+      </p:sp>
+      <p:sp>
+        <p:nvSpPr>
+          <p:cNvPr id="25" name="Shape 23"/>
+          <p:cNvSpPr/>
+          <p:nvPr/>
+        </p:nvSpPr>
+        <p:spPr>
+          <a:xfrm>
+            <a:off x="621792" y="5417820"/>
+            <a:ext cx="329184" cy="329184"/>
+          </a:xfrm>
+          <a:prstGeom prst="ellipse">
+            <a:avLst/>
+          </a:prstGeom>
+          <a:solidFill>
+            <a:srgbClr val="77BFEE"/>
+          </a:solidFill>
+          <a:ln w="12700">
+            <a:solidFill>
+              <a:srgbClr val="77BFEE"/>
+            </a:solidFill>
+            <a:prstDash val="solid"/>
+          </a:ln>
+        </p:spPr>
+      </p:sp>
+      <p:sp>
+        <p:nvSpPr>
+          <p:cNvPr id="26" name="Text 24"/>
+          <p:cNvSpPr txBox="1"/>
+          <p:nvPr/>
+        </p:nvSpPr>
+        <p:spPr>
+          <a:xfrm>
+            <a:off x="621792" y="5417820"/>
+            <a:ext cx="329184" cy="329184"/>
+          </a:xfrm>
+          <a:prstGeom prst="rect">
+            <a:avLst/>
+          </a:prstGeom>
+          <a:noFill/>
+          <a:ln/>
+        </p:spPr>
+        <p:txBody>
+          <a:bodyPr wrap="square" lIns="0" tIns="0" rIns="0" bIns="0" rtlCol="0" anchor="ctr"/>
+          <a:lstStyle/>
+          <a:p>
+            <a:pPr algn="ctr" indent="0" marL="0">
+              <a:buNone/>
+            </a:pPr>
+            <a:r>
+              <a:rPr lang="en-US" sz="1300" b="1" dirty="0">
+                <a:solidFill>
+                  <a:srgbClr val="2B2B2B"/>
+                </a:solidFill>
+                <a:latin typeface="Verdana" pitchFamily="34" charset="0"/>
+                <a:ea typeface="Verdana" pitchFamily="34" charset="-122"/>
+                <a:cs typeface="Verdana" pitchFamily="34" charset="-120"/>
+              </a:rPr>
+              <a:t>6</a:t>
+            </a:r>
+            <a:endParaRPr lang="en-US" sz="1300" dirty="0"/>
+          </a:p>
+        </p:txBody>
+      </p:sp>
+      <p:sp>
+        <p:nvSpPr>
+          <p:cNvPr id="27" name="Text 25"/>
+          <p:cNvSpPr txBox="1"/>
+          <p:nvPr/>
+        </p:nvSpPr>
+        <p:spPr>
+          <a:xfrm>
+            <a:off x="1124712" y="5381244"/>
+            <a:ext cx="10607040" cy="274320"/>
+          </a:xfrm>
+          <a:prstGeom prst="rect">
+            <a:avLst/>
+          </a:prstGeom>
+          <a:noFill/>
+          <a:ln/>
+        </p:spPr>
+        <p:txBody>
+          <a:bodyPr wrap="square" lIns="0" tIns="0" rIns="0" bIns="0" rtlCol="0" anchor="ctr"/>
+          <a:lstStyle/>
+          <a:p>
+            <a:pPr indent="0" marL="0">
+              <a:buNone/>
+            </a:pPr>
+            <a:r>
+              <a:rPr lang="en-US" sz="1250" b="1" dirty="0">
+                <a:solidFill>
+                  <a:srgbClr val="2B2B2B"/>
+                </a:solidFill>
+                <a:latin typeface="Verdana" pitchFamily="34" charset="0"/>
+                <a:ea typeface="Verdana" pitchFamily="34" charset="-122"/>
+                <a:cs typeface="Verdana" pitchFamily="34" charset="-120"/>
+              </a:rPr>
+              <a:t>El autónomo paga 115 pb más y está fuera de las series de empresas</a:t>
+            </a:r>
+            <a:endParaRPr lang="en-US" sz="1250" dirty="0"/>
+          </a:p>
+        </p:txBody>
+      </p:sp>
+      <p:sp>
+        <p:nvSpPr>
+          <p:cNvPr id="28" name="Text 26"/>
+          <p:cNvSpPr txBox="1"/>
+          <p:nvPr/>
+        </p:nvSpPr>
+        <p:spPr>
+          <a:xfrm>
+            <a:off x="1124712" y="5655564"/>
+            <a:ext cx="10607040" cy="457200"/>
+          </a:xfrm>
+          <a:prstGeom prst="rect">
+            <a:avLst/>
+          </a:prstGeom>
+          <a:noFill/>
+          <a:ln/>
+        </p:spPr>
+        <p:txBody>
+          <a:bodyPr wrap="square" lIns="0" tIns="0" rIns="0" bIns="0" rtlCol="0" anchor="ctr"/>
+          <a:lstStyle/>
+          <a:p>
+            <a:pPr indent="0" marL="0">
+              <a:buNone/>
+            </a:pPr>
+            <a:r>
+              <a:rPr lang="en-US" sz="900" dirty="0">
+                <a:solidFill>
+                  <a:srgbClr val="818181"/>
+                </a:solidFill>
+                <a:latin typeface="Verdana" pitchFamily="34" charset="0"/>
+                <a:ea typeface="Verdana" pitchFamily="34" charset="-122"/>
+                <a:cs typeface="Verdana" pitchFamily="34" charset="-120"/>
+              </a:rPr>
+              <a:t>Paga un 4,57 %, 115 pb más que la sociedad del tramo ≤0,25 M€. El SEC 2010 lo clasifica en hogares, así que no aparece en ninguna serie de sociedades no financieras. Son 840 M€ al mes de nueva producción.</a:t>
+            </a:r>
+            <a:endParaRPr lang="en-US" sz="900" dirty="0"/>
+          </a:p>
+        </p:txBody>
+      </p:sp>
+      <p:sp>
+        <p:nvSpPr>
+          <p:cNvPr id="29" name="Text 27"/>
+          <p:cNvSpPr txBox="1"/>
+          <p:nvPr/>
+        </p:nvSpPr>
+        <p:spPr>
+          <a:xfrm>
+            <a:off x="621792" y="6053328"/>
+            <a:ext cx="10945368" cy="475488"/>
+          </a:xfrm>
+          <a:prstGeom prst="rect">
+            <a:avLst/>
+          </a:prstGeom>
+          <a:noFill/>
+          <a:ln/>
+        </p:spPr>
+        <p:txBody>
+          <a:bodyPr wrap="square" lIns="0" tIns="0" rIns="0" bIns="0" rtlCol="0" anchor="ctr"/>
+          <a:lstStyle/>
+          <a:p>
+            <a:pPr indent="0" marL="0">
+              <a:buNone/>
+            </a:pPr>
+            <a:r>
+              <a:rPr lang="en-US" sz="750" i="1" dirty="0">
+                <a:solidFill>
+                  <a:srgbClr val="818181"/>
+                </a:solidFill>
+                <a:latin typeface="Verdana" pitchFamily="34" charset="0"/>
+                <a:ea typeface="Verdana" pitchFamily="34" charset="-122"/>
+                <a:cs typeface="Verdana" pitchFamily="34" charset="-120"/>
+              </a:rPr>
+              <a:t>Las observaciones 1 y 3 salen de la encuesta CESGAR: son PORCENTAJES DE EMPRESAS sobre el total encuestado, no niveles de tipo de interés ni saldos netos de respuesta. En la pregunta de obstáculos las categorías se miden sobre esa misma base, la de «ninguno» incluida; sobre las pymes que sí señalan alguno, el precio sería el 42,5 %. La 2 sale de la Central de Balances Integrada del Banco de España, ejercicio 2024, ratios por tamaño según la Recomendación 2003/361/CE. Las 4 y 5 salen del modelo por banco, cuyo precio y comisiones son comunes a los cinco porque ninguno los publica por segmento: comparan estructura de riesgo, capital y coste, no habilidad comercial.</a:t>
+            </a:r>
+            <a:endParaRPr lang="en-US" sz="750" dirty="0"/>
+          </a:p>
+        </p:txBody>
+      </p:sp>
+    </p:spTree>
+  </p:cSld>
+  <p:clrMapOvr>
+    <a:masterClrMapping/>
+  </p:clrMapOvr>
+</p:sld>
+</file>
+
 <file path=ppt/theme/theme1.xml><?xml version="1.0" encoding="utf-8"?>
 <a:theme xmlns:a="http://schemas.openxmlformats.org/drawingml/2006/main" name="Office Theme">
   <a:themeElements>

--- a/pres/rentabilidad_pyme_laminas_adicionales.pptx
+++ b/pres/rentabilidad_pyme_laminas_adicionales.pptx
@@ -13,9 +13,10 @@
     <p:sldId id="261" r:id="rId7"/>
     <p:sldId id="262" r:id="rId8"/>
     <p:sldId id="263" r:id="rId9"/>
+    <p:sldId id="264" r:id="rId10"/>
   </p:sldIdLst>
   <p:notesMasterIdLst>
-    <p:notesMasterId r:id="rId10"/>
+    <p:notesMasterId r:id="rId11"/>
   </p:notesMasterIdLst>
   <p:sldSz cx="12192000" cy="6858000"/>
   <p:notesSz cx="6858000" cy="12192000"/>
@@ -3236,6 +3237,94 @@
 </p:notes>
 </file>
 
+<file path=ppt/notesSlides/notesSlide9.xml><?xml version="1.0" encoding="utf-8"?>
+<p:notes xmlns:a="http://schemas.openxmlformats.org/drawingml/2006/main" xmlns:r="http://schemas.openxmlformats.org/officeDocument/2006/relationships" xmlns:p="http://schemas.openxmlformats.org/presentationml/2006/main">
+  <p:cSld>
+    <p:spTree>
+      <p:nvGrpSpPr>
+        <p:cNvPr id="1" name=""/>
+        <p:cNvGrpSpPr/>
+        <p:nvPr/>
+      </p:nvGrpSpPr>
+      <p:grpSpPr>
+        <a:xfrm>
+          <a:off x="0" y="0"/>
+          <a:ext cx="0" cy="0"/>
+          <a:chOff x="0" y="0"/>
+          <a:chExt cx="0" cy="0"/>
+        </a:xfrm>
+      </p:grpSpPr>
+      <p:sp>
+        <p:nvSpPr>
+          <p:cNvPr id="2" name="Slide Image Placeholder 1"/>
+          <p:cNvSpPr>
+            <a:spLocks noGrp="1" noRot="1" noChangeAspect="1"/>
+          </p:cNvSpPr>
+          <p:nvPr>
+            <p:ph type="sldImg"/>
+          </p:nvPr>
+        </p:nvSpPr>
+        <p:spPr/>
+      </p:sp>
+      <p:sp>
+        <p:nvSpPr>
+          <p:cNvPr id="3" name="Notes Placeholder 2"/>
+          <p:cNvSpPr>
+            <a:spLocks noGrp="1"/>
+          </p:cNvSpPr>
+          <p:nvPr>
+            <p:ph type="body" idx="1"/>
+          </p:nvPr>
+        </p:nvSpPr>
+        <p:spPr/>
+        <p:txBody>
+          <a:bodyPr/>
+          <a:lstStyle/>
+          <a:p>
+            <a:r>
+              <a:rPr lang="en-US" dirty="0"/>
+              <a:t/>
+            </a:r>
+            <a:endParaRPr lang="en-US" dirty="0"/>
+          </a:p>
+        </p:txBody>
+      </p:sp>
+      <p:sp>
+        <p:nvSpPr>
+          <p:cNvPr id="4" name="Slide Number Placeholder 3"/>
+          <p:cNvSpPr>
+            <a:spLocks noGrp="1"/>
+          </p:cNvSpPr>
+          <p:nvPr>
+            <p:ph type="sldNum" sz="quarter" idx="10"/>
+          </p:nvPr>
+        </p:nvSpPr>
+        <p:spPr/>
+        <p:txBody>
+          <a:bodyPr/>
+          <a:lstStyle/>
+          <a:p>
+            <a:fld id="{F7021451-1387-4CA6-816F-3879F97B5CBC}" type="slidenum">
+              <a:rPr lang="en-US"/>
+              <a:t>9</a:t>
+            </a:fld>
+            <a:endParaRPr lang="en-US"/>
+          </a:p>
+        </p:txBody>
+      </p:sp>
+    </p:spTree>
+    <p:extLst>
+      <p:ext uri="{BB962C8B-B14F-4D97-AF65-F5344CB8AC3E}">
+        <p14:creationId xmlns:p14="http://schemas.microsoft.com/office/powerpoint/2010/main" val="1024086991"/>
+      </p:ext>
+    </p:extLst>
+  </p:cSld>
+  <p:clrMapOvr>
+    <a:masterClrMapping/>
+  </p:clrMapOvr>
+</p:notes>
+</file>
+
 <file path=ppt/slideLayouts/slideLayout1.xml><?xml version="1.0" encoding="utf-8"?>
 <p:sldLayout xmlns:a="http://schemas.openxmlformats.org/drawingml/2006/main" xmlns:r="http://schemas.openxmlformats.org/officeDocument/2006/relationships" xmlns:p="http://schemas.openxmlformats.org/presentationml/2006/main" preserve="1">
   <p:cSld name="DEFAULT">
@@ -23820,7 +23909,7 @@
                 <a:ea typeface="Verdana" pitchFamily="34" charset="-122"/>
                 <a:cs typeface="Verdana" pitchFamily="34" charset="-120"/>
               </a:rPr>
-              <a:t>ρ = −0,24, y el signo ni siquiera aguanta: va de −0,90 a +0,64 según qué país se quite, y sale positivo en 6 de los 28. No hay relación: Italia tiene la segunda mayor información y el peor riesgo.</a:t>
+              <a:t>ρ = −0,24, y el signo ni siquiera aguanta: va de −0,90 a ++0,64 según qué país se quite, y sale positivo en 6 de los 28. No hay relación: Italia tiene la segunda mayor información y el peor riesgo.</a:t>
             </a:r>
             <a:endParaRPr lang="en-US" sz="850" dirty="0"/>
           </a:p>
@@ -24927,6 +25016,4830 @@
 </p:sld>
 </file>
 
+<file path=ppt/slides/slide9.xml><?xml version="1.0" encoding="utf-8"?>
+<p:sld xmlns:a="http://schemas.openxmlformats.org/drawingml/2006/main" xmlns:r="http://schemas.openxmlformats.org/officeDocument/2006/relationships" xmlns:p="http://schemas.openxmlformats.org/presentationml/2006/main">
+  <p:cSld name="Slide 9">
+    <p:bg>
+      <p:bgPr>
+        <a:solidFill>
+          <a:srgbClr val="FAFBFC"/>
+        </a:solidFill>
+      </p:bgPr>
+    </p:bg>
+    <p:spTree>
+      <p:nvGrpSpPr>
+        <p:cNvPr id="1" name=""/>
+        <p:cNvGrpSpPr/>
+        <p:nvPr/>
+      </p:nvGrpSpPr>
+      <p:grpSpPr>
+        <a:xfrm>
+          <a:off x="0" y="0"/>
+          <a:ext cx="0" cy="0"/>
+          <a:chOff x="0" y="0"/>
+          <a:chExt cx="0" cy="0"/>
+        </a:xfrm>
+      </p:grpSpPr>
+      <p:sp>
+        <p:nvSpPr>
+          <p:cNvPr id="2" name="Text 0"/>
+          <p:cNvSpPr txBox="1"/>
+          <p:nvPr/>
+        </p:nvSpPr>
+        <p:spPr>
+          <a:xfrm>
+            <a:off x="10040112" y="274320"/>
+            <a:ext cx="1600200" cy="256032"/>
+          </a:xfrm>
+          <a:prstGeom prst="rect">
+            <a:avLst/>
+          </a:prstGeom>
+          <a:noFill/>
+          <a:ln/>
+        </p:spPr>
+        <p:txBody>
+          <a:bodyPr wrap="square" lIns="0" tIns="0" rIns="0" bIns="0" rtlCol="0" anchor="ctr"/>
+          <a:lstStyle/>
+          <a:p>
+            <a:pPr algn="r" indent="0" marL="0">
+              <a:buNone/>
+            </a:pPr>
+            <a:r>
+              <a:rPr lang="en-US" sz="1300" b="1" dirty="0">
+                <a:solidFill>
+                  <a:srgbClr val="2B2B2B"/>
+                </a:solidFill>
+                <a:latin typeface="Verdana" pitchFamily="34" charset="0"/>
+                <a:ea typeface="Verdana" pitchFamily="34" charset="-122"/>
+                <a:cs typeface="Verdana" pitchFamily="34" charset="-120"/>
+              </a:rPr>
+              <a:t>bankinter</a:t>
+            </a:r>
+            <a:pPr algn="r" indent="0" marL="0">
+              <a:buNone/>
+            </a:pPr>
+            <a:r>
+              <a:rPr lang="en-US" sz="1300" b="1" dirty="0">
+                <a:solidFill>
+                  <a:srgbClr val="F56600"/>
+                </a:solidFill>
+                <a:latin typeface="Verdana" pitchFamily="34" charset="0"/>
+                <a:ea typeface="Verdana" pitchFamily="34" charset="-122"/>
+                <a:cs typeface="Verdana" pitchFamily="34" charset="-120"/>
+              </a:rPr>
+              <a:t>.</a:t>
+            </a:r>
+            <a:endParaRPr lang="en-US" sz="1300" dirty="0"/>
+          </a:p>
+        </p:txBody>
+      </p:sp>
+      <p:sp>
+        <p:nvSpPr>
+          <p:cNvPr id="3" name="Text 1"/>
+          <p:cNvSpPr txBox="1"/>
+          <p:nvPr/>
+        </p:nvSpPr>
+        <p:spPr>
+          <a:xfrm>
+            <a:off x="621792" y="420624"/>
+            <a:ext cx="9208008" cy="676656"/>
+          </a:xfrm>
+          <a:prstGeom prst="rect">
+            <a:avLst/>
+          </a:prstGeom>
+          <a:noFill/>
+          <a:ln/>
+        </p:spPr>
+        <p:txBody>
+          <a:bodyPr wrap="square" lIns="0" tIns="0" rIns="0" bIns="0" rtlCol="0" anchor="ctr"/>
+          <a:lstStyle/>
+          <a:p>
+            <a:pPr indent="0" marL="0">
+              <a:buNone/>
+            </a:pPr>
+            <a:r>
+              <a:rPr lang="en-US" sz="2200" b="1" dirty="0">
+                <a:solidFill>
+                  <a:srgbClr val="2B2B2B"/>
+                </a:solidFill>
+                <a:latin typeface="Verdana" pitchFamily="34" charset="0"/>
+                <a:ea typeface="Verdana" pitchFamily="34" charset="-122"/>
+                <a:cs typeface="Verdana" pitchFamily="34" charset="-120"/>
+              </a:rPr>
+              <a:t>De dónde sale el capital: selección, garantía y modelo</a:t>
+            </a:r>
+            <a:endParaRPr lang="en-US" sz="2200" dirty="0"/>
+          </a:p>
+        </p:txBody>
+      </p:sp>
+      <p:sp>
+        <p:nvSpPr>
+          <p:cNvPr id="4" name="Text 2"/>
+          <p:cNvSpPr txBox="1"/>
+          <p:nvPr/>
+        </p:nvSpPr>
+        <p:spPr>
+          <a:xfrm>
+            <a:off x="621792" y="1060704"/>
+            <a:ext cx="10945368" cy="365760"/>
+          </a:xfrm>
+          <a:prstGeom prst="rect">
+            <a:avLst/>
+          </a:prstGeom>
+          <a:noFill/>
+          <a:ln/>
+        </p:spPr>
+        <p:txBody>
+          <a:bodyPr wrap="square" lIns="0" tIns="0" rIns="0" bIns="0" rtlCol="0" anchor="ctr"/>
+          <a:lstStyle/>
+          <a:p>
+            <a:pPr indent="0" marL="0">
+              <a:buNone/>
+            </a:pPr>
+            <a:r>
+              <a:rPr lang="en-US" sz="1050" dirty="0">
+                <a:solidFill>
+                  <a:srgbClr val="818181"/>
+                </a:solidFill>
+                <a:latin typeface="Verdana" pitchFamily="34" charset="0"/>
+                <a:ea typeface="Verdana" pitchFamily="34" charset="-122"/>
+                <a:cs typeface="Verdana" pitchFamily="34" charset="-120"/>
+              </a:rPr>
+              <a:t>Ponderación que predice la fórmula IRB del art. 153 CRR con la PD y la LGD observadas de cada país, frente a la densidad IRB que realmente se observa · Junio 2025</a:t>
+            </a:r>
+            <a:endParaRPr lang="en-US" sz="1050" dirty="0"/>
+          </a:p>
+        </p:txBody>
+      </p:sp>
+      <p:graphicFrame>
+        <p:nvGraphicFramePr>
+          <p:cNvPr id="10" name="Table 0"/>
+          <p:cNvGraphicFramePr>
+            <a:graphicFrameLocks noGrp="1"/>
+          </p:cNvGraphicFramePr>
+          <p:nvPr>
+            <p:extLst>
+              <p:ext uri="{D42A27DB-BD31-4B8C-83A1-F6EECF244321}">
+                <p14:modId xmlns:p14="http://schemas.microsoft.com/office/powerpoint/2010/main" val="1579011935"/>
+              </p:ext>
+            </p:extLst>
+          </p:nvPr>
+        </p:nvGraphicFramePr>
+        <p:xfrm>
+          <a:off x="621792" y="1664208"/>
+          <a:ext cx="10945368" cy="914400"/>
+        </p:xfrm>
+        <a:graphic>
+          <a:graphicData uri="http://schemas.openxmlformats.org/drawingml/2006/table">
+            <a:tbl>
+              <a:tblPr/>
+              <a:tblGrid>
+                <a:gridCol w="1481328"/>
+                <a:gridCol w="1005840"/>
+                <a:gridCol w="1051560"/>
+                <a:gridCol w="1536192"/>
+                <a:gridCol w="1536192"/>
+                <a:gridCol w="1280160"/>
+                <a:gridCol w="1481328"/>
+                <a:gridCol w="1572768"/>
+              </a:tblGrid>
+              <a:tr h="310896">
+                <a:tc>
+                  <a:txBody>
+                    <a:bodyPr/>
+                    <a:lstStyle/>
+                    <a:p>
+                      <a:pPr algn="l" indent="0" marL="0">
+                        <a:buNone/>
+                      </a:pPr>
+                      <a:r>
+                        <a:rPr lang="en-US" sz="850" b="1" dirty="0">
+                          <a:solidFill>
+                            <a:srgbClr val="FFFFFF"/>
+                          </a:solidFill>
+                          <a:latin typeface="Verdana" pitchFamily="34" charset="0"/>
+                          <a:ea typeface="Verdana" pitchFamily="34" charset="-122"/>
+                          <a:cs typeface="Verdana" pitchFamily="34" charset="-120"/>
+                        </a:rPr>
+                        <a:t>País</a:t>
+                      </a:r>
+                      <a:endParaRPr lang="en-US" sz="850" dirty="0">
+                        <a:latin typeface="Verdana" charset="0"/>
+                        <a:ea typeface="Verdana" charset="0"/>
+                        <a:cs typeface="Verdana" charset="0"/>
+                      </a:endParaRPr>
+                    </a:p>
+                  </a:txBody>
+                  <a:tcPr marL="91440" marR="91440" marT="45720" marB="45720" anchor="ctr">
+                    <a:lnL w="6350" cap="flat" cmpd="sng" algn="ctr">
+                      <a:solidFill>
+                        <a:srgbClr val="CACACA"/>
+                      </a:solidFill>
+                      <a:prstDash val="solid"/>
+                      <a:round/>
+                      <a:headEnd type="none" w="med" len="med"/>
+                      <a:tailEnd type="none" w="med" len="med"/>
+                    </a:lnL>
+                    <a:lnR w="6350" cap="flat" cmpd="sng" algn="ctr">
+                      <a:solidFill>
+                        <a:srgbClr val="CACACA"/>
+                      </a:solidFill>
+                      <a:prstDash val="solid"/>
+                      <a:round/>
+                      <a:headEnd type="none" w="med" len="med"/>
+                      <a:tailEnd type="none" w="med" len="med"/>
+                    </a:lnR>
+                    <a:lnT w="6350" cap="flat" cmpd="sng" algn="ctr">
+                      <a:solidFill>
+                        <a:srgbClr val="CACACA"/>
+                      </a:solidFill>
+                      <a:prstDash val="solid"/>
+                      <a:round/>
+                      <a:headEnd type="none" w="med" len="med"/>
+                      <a:tailEnd type="none" w="med" len="med"/>
+                    </a:lnT>
+                    <a:lnB w="6350" cap="flat" cmpd="sng" algn="ctr">
+                      <a:solidFill>
+                        <a:srgbClr val="CACACA"/>
+                      </a:solidFill>
+                      <a:prstDash val="solid"/>
+                      <a:round/>
+                      <a:headEnd type="none" w="med" len="med"/>
+                      <a:tailEnd type="none" w="med" len="med"/>
+                    </a:lnB>
+                    <a:solidFill>
+                      <a:srgbClr val="F56600"/>
+                    </a:solidFill>
+                  </a:tcPr>
+                </a:tc>
+                <a:tc>
+                  <a:txBody>
+                    <a:bodyPr/>
+                    <a:lstStyle/>
+                    <a:p>
+                      <a:pPr algn="ctr" indent="0" marL="0">
+                        <a:buNone/>
+                      </a:pPr>
+                      <a:r>
+                        <a:rPr lang="en-US" sz="850" b="1" dirty="0">
+                          <a:solidFill>
+                            <a:srgbClr val="FFFFFF"/>
+                          </a:solidFill>
+                          <a:latin typeface="Verdana" pitchFamily="34" charset="0"/>
+                          <a:ea typeface="Verdana" pitchFamily="34" charset="-122"/>
+                          <a:cs typeface="Verdana" pitchFamily="34" charset="-120"/>
+                        </a:rPr>
+                        <a:t>PD</a:t>
+                      </a:r>
+                      <a:endParaRPr lang="en-US" sz="850" dirty="0">
+                        <a:latin typeface="Verdana" charset="0"/>
+                        <a:ea typeface="Verdana" charset="0"/>
+                        <a:cs typeface="Verdana" charset="0"/>
+                      </a:endParaRPr>
+                    </a:p>
+                  </a:txBody>
+                  <a:tcPr marL="91440" marR="91440" marT="45720" marB="45720" anchor="ctr">
+                    <a:lnL w="6350" cap="flat" cmpd="sng" algn="ctr">
+                      <a:solidFill>
+                        <a:srgbClr val="CACACA"/>
+                      </a:solidFill>
+                      <a:prstDash val="solid"/>
+                      <a:round/>
+                      <a:headEnd type="none" w="med" len="med"/>
+                      <a:tailEnd type="none" w="med" len="med"/>
+                    </a:lnL>
+                    <a:lnR w="6350" cap="flat" cmpd="sng" algn="ctr">
+                      <a:solidFill>
+                        <a:srgbClr val="CACACA"/>
+                      </a:solidFill>
+                      <a:prstDash val="solid"/>
+                      <a:round/>
+                      <a:headEnd type="none" w="med" len="med"/>
+                      <a:tailEnd type="none" w="med" len="med"/>
+                    </a:lnR>
+                    <a:lnT w="6350" cap="flat" cmpd="sng" algn="ctr">
+                      <a:solidFill>
+                        <a:srgbClr val="CACACA"/>
+                      </a:solidFill>
+                      <a:prstDash val="solid"/>
+                      <a:round/>
+                      <a:headEnd type="none" w="med" len="med"/>
+                      <a:tailEnd type="none" w="med" len="med"/>
+                    </a:lnT>
+                    <a:lnB w="6350" cap="flat" cmpd="sng" algn="ctr">
+                      <a:solidFill>
+                        <a:srgbClr val="CACACA"/>
+                      </a:solidFill>
+                      <a:prstDash val="solid"/>
+                      <a:round/>
+                      <a:headEnd type="none" w="med" len="med"/>
+                      <a:tailEnd type="none" w="med" len="med"/>
+                    </a:lnB>
+                    <a:solidFill>
+                      <a:srgbClr val="F56600"/>
+                    </a:solidFill>
+                  </a:tcPr>
+                </a:tc>
+                <a:tc>
+                  <a:txBody>
+                    <a:bodyPr/>
+                    <a:lstStyle/>
+                    <a:p>
+                      <a:pPr algn="ctr" indent="0" marL="0">
+                        <a:buNone/>
+                      </a:pPr>
+                      <a:r>
+                        <a:rPr lang="en-US" sz="850" b="1" dirty="0">
+                          <a:solidFill>
+                            <a:srgbClr val="FFFFFF"/>
+                          </a:solidFill>
+                          <a:latin typeface="Verdana" pitchFamily="34" charset="0"/>
+                          <a:ea typeface="Verdana" pitchFamily="34" charset="-122"/>
+                          <a:cs typeface="Verdana" pitchFamily="34" charset="-120"/>
+                        </a:rPr>
+                        <a:t>LGD</a:t>
+                      </a:r>
+                      <a:endParaRPr lang="en-US" sz="850" dirty="0">
+                        <a:latin typeface="Verdana" charset="0"/>
+                        <a:ea typeface="Verdana" charset="0"/>
+                        <a:cs typeface="Verdana" charset="0"/>
+                      </a:endParaRPr>
+                    </a:p>
+                  </a:txBody>
+                  <a:tcPr marL="91440" marR="91440" marT="45720" marB="45720" anchor="ctr">
+                    <a:lnL w="6350" cap="flat" cmpd="sng" algn="ctr">
+                      <a:solidFill>
+                        <a:srgbClr val="CACACA"/>
+                      </a:solidFill>
+                      <a:prstDash val="solid"/>
+                      <a:round/>
+                      <a:headEnd type="none" w="med" len="med"/>
+                      <a:tailEnd type="none" w="med" len="med"/>
+                    </a:lnL>
+                    <a:lnR w="6350" cap="flat" cmpd="sng" algn="ctr">
+                      <a:solidFill>
+                        <a:srgbClr val="CACACA"/>
+                      </a:solidFill>
+                      <a:prstDash val="solid"/>
+                      <a:round/>
+                      <a:headEnd type="none" w="med" len="med"/>
+                      <a:tailEnd type="none" w="med" len="med"/>
+                    </a:lnR>
+                    <a:lnT w="6350" cap="flat" cmpd="sng" algn="ctr">
+                      <a:solidFill>
+                        <a:srgbClr val="CACACA"/>
+                      </a:solidFill>
+                      <a:prstDash val="solid"/>
+                      <a:round/>
+                      <a:headEnd type="none" w="med" len="med"/>
+                      <a:tailEnd type="none" w="med" len="med"/>
+                    </a:lnT>
+                    <a:lnB w="6350" cap="flat" cmpd="sng" algn="ctr">
+                      <a:solidFill>
+                        <a:srgbClr val="CACACA"/>
+                      </a:solidFill>
+                      <a:prstDash val="solid"/>
+                      <a:round/>
+                      <a:headEnd type="none" w="med" len="med"/>
+                      <a:tailEnd type="none" w="med" len="med"/>
+                    </a:lnB>
+                    <a:solidFill>
+                      <a:srgbClr val="F56600"/>
+                    </a:solidFill>
+                  </a:tcPr>
+                </a:tc>
+                <a:tc>
+                  <a:txBody>
+                    <a:bodyPr/>
+                    <a:lstStyle/>
+                    <a:p>
+                      <a:pPr algn="ctr" indent="0" marL="0">
+                        <a:buNone/>
+                      </a:pPr>
+                      <a:r>
+                        <a:rPr lang="en-US" sz="850" b="1" dirty="0">
+                          <a:solidFill>
+                            <a:srgbClr val="FFFFFF"/>
+                          </a:solidFill>
+                          <a:latin typeface="Verdana" pitchFamily="34" charset="0"/>
+                          <a:ea typeface="Verdana" pitchFamily="34" charset="-122"/>
+                          <a:cs typeface="Verdana" pitchFamily="34" charset="-120"/>
+                        </a:rPr>
+                        <a:t>RW que da</a:t>
+                      </a:r>
+                      <a:endParaRPr lang="en-US" sz="850" dirty="0">
+                        <a:latin typeface="Verdana" charset="0"/>
+                        <a:ea typeface="Verdana" charset="0"/>
+                        <a:cs typeface="Verdana" charset="0"/>
+                      </a:endParaRPr>
+                    </a:p>
+                    <a:p>
+                      <a:pPr algn="ctr" indent="0" marL="0">
+                        <a:buNone/>
+                      </a:pPr>
+                      <a:r>
+                        <a:rPr lang="en-US" sz="850" b="1" dirty="0">
+                          <a:solidFill>
+                            <a:srgbClr val="FFFFFF"/>
+                          </a:solidFill>
+                          <a:latin typeface="Verdana" pitchFamily="34" charset="0"/>
+                          <a:ea typeface="Verdana" pitchFamily="34" charset="-122"/>
+                          <a:cs typeface="Verdana" pitchFamily="34" charset="-120"/>
+                        </a:rPr>
+                        <a:t>la fórmula</a:t>
+                      </a:r>
+                      <a:endParaRPr lang="en-US" sz="850" dirty="0">
+                        <a:latin typeface="Verdana" charset="0"/>
+                        <a:ea typeface="Verdana" charset="0"/>
+                        <a:cs typeface="Verdana" charset="0"/>
+                      </a:endParaRPr>
+                    </a:p>
+                  </a:txBody>
+                  <a:tcPr marL="91440" marR="91440" marT="45720" marB="45720" anchor="ctr">
+                    <a:lnL w="6350" cap="flat" cmpd="sng" algn="ctr">
+                      <a:solidFill>
+                        <a:srgbClr val="CACACA"/>
+                      </a:solidFill>
+                      <a:prstDash val="solid"/>
+                      <a:round/>
+                      <a:headEnd type="none" w="med" len="med"/>
+                      <a:tailEnd type="none" w="med" len="med"/>
+                    </a:lnL>
+                    <a:lnR w="6350" cap="flat" cmpd="sng" algn="ctr">
+                      <a:solidFill>
+                        <a:srgbClr val="CACACA"/>
+                      </a:solidFill>
+                      <a:prstDash val="solid"/>
+                      <a:round/>
+                      <a:headEnd type="none" w="med" len="med"/>
+                      <a:tailEnd type="none" w="med" len="med"/>
+                    </a:lnR>
+                    <a:lnT w="6350" cap="flat" cmpd="sng" algn="ctr">
+                      <a:solidFill>
+                        <a:srgbClr val="CACACA"/>
+                      </a:solidFill>
+                      <a:prstDash val="solid"/>
+                      <a:round/>
+                      <a:headEnd type="none" w="med" len="med"/>
+                      <a:tailEnd type="none" w="med" len="med"/>
+                    </a:lnT>
+                    <a:lnB w="6350" cap="flat" cmpd="sng" algn="ctr">
+                      <a:solidFill>
+                        <a:srgbClr val="CACACA"/>
+                      </a:solidFill>
+                      <a:prstDash val="solid"/>
+                      <a:round/>
+                      <a:headEnd type="none" w="med" len="med"/>
+                      <a:tailEnd type="none" w="med" len="med"/>
+                    </a:lnB>
+                    <a:solidFill>
+                      <a:srgbClr val="F56600"/>
+                    </a:solidFill>
+                  </a:tcPr>
+                </a:tc>
+                <a:tc>
+                  <a:txBody>
+                    <a:bodyPr/>
+                    <a:lstStyle/>
+                    <a:p>
+                      <a:pPr algn="ctr" indent="0" marL="0">
+                        <a:buNone/>
+                      </a:pPr>
+                      <a:r>
+                        <a:rPr lang="en-US" sz="850" b="1" dirty="0">
+                          <a:solidFill>
+                            <a:srgbClr val="FFFFFF"/>
+                          </a:solidFill>
+                          <a:latin typeface="Verdana" pitchFamily="34" charset="0"/>
+                          <a:ea typeface="Verdana" pitchFamily="34" charset="-122"/>
+                          <a:cs typeface="Verdana" pitchFamily="34" charset="-120"/>
+                        </a:rPr>
+                        <a:t>Densidad IRB</a:t>
+                      </a:r>
+                      <a:endParaRPr lang="en-US" sz="850" dirty="0">
+                        <a:latin typeface="Verdana" charset="0"/>
+                        <a:ea typeface="Verdana" charset="0"/>
+                        <a:cs typeface="Verdana" charset="0"/>
+                      </a:endParaRPr>
+                    </a:p>
+                    <a:p>
+                      <a:pPr algn="ctr" indent="0" marL="0">
+                        <a:buNone/>
+                      </a:pPr>
+                      <a:r>
+                        <a:rPr lang="en-US" sz="850" b="1" dirty="0">
+                          <a:solidFill>
+                            <a:srgbClr val="FFFFFF"/>
+                          </a:solidFill>
+                          <a:latin typeface="Verdana" pitchFamily="34" charset="0"/>
+                          <a:ea typeface="Verdana" pitchFamily="34" charset="-122"/>
+                          <a:cs typeface="Verdana" pitchFamily="34" charset="-120"/>
+                        </a:rPr>
+                        <a:t>observada</a:t>
+                      </a:r>
+                      <a:endParaRPr lang="en-US" sz="850" dirty="0">
+                        <a:latin typeface="Verdana" charset="0"/>
+                        <a:ea typeface="Verdana" charset="0"/>
+                        <a:cs typeface="Verdana" charset="0"/>
+                      </a:endParaRPr>
+                    </a:p>
+                  </a:txBody>
+                  <a:tcPr marL="91440" marR="91440" marT="45720" marB="45720" anchor="ctr">
+                    <a:lnL w="6350" cap="flat" cmpd="sng" algn="ctr">
+                      <a:solidFill>
+                        <a:srgbClr val="CACACA"/>
+                      </a:solidFill>
+                      <a:prstDash val="solid"/>
+                      <a:round/>
+                      <a:headEnd type="none" w="med" len="med"/>
+                      <a:tailEnd type="none" w="med" len="med"/>
+                    </a:lnL>
+                    <a:lnR w="6350" cap="flat" cmpd="sng" algn="ctr">
+                      <a:solidFill>
+                        <a:srgbClr val="CACACA"/>
+                      </a:solidFill>
+                      <a:prstDash val="solid"/>
+                      <a:round/>
+                      <a:headEnd type="none" w="med" len="med"/>
+                      <a:tailEnd type="none" w="med" len="med"/>
+                    </a:lnR>
+                    <a:lnT w="6350" cap="flat" cmpd="sng" algn="ctr">
+                      <a:solidFill>
+                        <a:srgbClr val="CACACA"/>
+                      </a:solidFill>
+                      <a:prstDash val="solid"/>
+                      <a:round/>
+                      <a:headEnd type="none" w="med" len="med"/>
+                      <a:tailEnd type="none" w="med" len="med"/>
+                    </a:lnT>
+                    <a:lnB w="6350" cap="flat" cmpd="sng" algn="ctr">
+                      <a:solidFill>
+                        <a:srgbClr val="CACACA"/>
+                      </a:solidFill>
+                      <a:prstDash val="solid"/>
+                      <a:round/>
+                      <a:headEnd type="none" w="med" len="med"/>
+                      <a:tailEnd type="none" w="med" len="med"/>
+                    </a:lnB>
+                    <a:solidFill>
+                      <a:srgbClr val="F56600"/>
+                    </a:solidFill>
+                  </a:tcPr>
+                </a:tc>
+                <a:tc>
+                  <a:txBody>
+                    <a:bodyPr/>
+                    <a:lstStyle/>
+                    <a:p>
+                      <a:pPr algn="ctr" indent="0" marL="0">
+                        <a:buNone/>
+                      </a:pPr>
+                      <a:r>
+                        <a:rPr lang="en-US" sz="850" b="1" dirty="0">
+                          <a:solidFill>
+                            <a:srgbClr val="FFFFFF"/>
+                          </a:solidFill>
+                          <a:latin typeface="Verdana" pitchFamily="34" charset="0"/>
+                          <a:ea typeface="Verdana" pitchFamily="34" charset="-122"/>
+                          <a:cs typeface="Verdana" pitchFamily="34" charset="-120"/>
+                        </a:rPr>
+                        <a:t>Residuo</a:t>
+                      </a:r>
+                      <a:endParaRPr lang="en-US" sz="850" dirty="0">
+                        <a:latin typeface="Verdana" charset="0"/>
+                        <a:ea typeface="Verdana" charset="0"/>
+                        <a:cs typeface="Verdana" charset="0"/>
+                      </a:endParaRPr>
+                    </a:p>
+                  </a:txBody>
+                  <a:tcPr marL="91440" marR="91440" marT="45720" marB="45720" anchor="ctr">
+                    <a:lnL w="6350" cap="flat" cmpd="sng" algn="ctr">
+                      <a:solidFill>
+                        <a:srgbClr val="CACACA"/>
+                      </a:solidFill>
+                      <a:prstDash val="solid"/>
+                      <a:round/>
+                      <a:headEnd type="none" w="med" len="med"/>
+                      <a:tailEnd type="none" w="med" len="med"/>
+                    </a:lnL>
+                    <a:lnR w="6350" cap="flat" cmpd="sng" algn="ctr">
+                      <a:solidFill>
+                        <a:srgbClr val="CACACA"/>
+                      </a:solidFill>
+                      <a:prstDash val="solid"/>
+                      <a:round/>
+                      <a:headEnd type="none" w="med" len="med"/>
+                      <a:tailEnd type="none" w="med" len="med"/>
+                    </a:lnR>
+                    <a:lnT w="6350" cap="flat" cmpd="sng" algn="ctr">
+                      <a:solidFill>
+                        <a:srgbClr val="CACACA"/>
+                      </a:solidFill>
+                      <a:prstDash val="solid"/>
+                      <a:round/>
+                      <a:headEnd type="none" w="med" len="med"/>
+                      <a:tailEnd type="none" w="med" len="med"/>
+                    </a:lnT>
+                    <a:lnB w="6350" cap="flat" cmpd="sng" algn="ctr">
+                      <a:solidFill>
+                        <a:srgbClr val="CACACA"/>
+                      </a:solidFill>
+                      <a:prstDash val="solid"/>
+                      <a:round/>
+                      <a:headEnd type="none" w="med" len="med"/>
+                      <a:tailEnd type="none" w="med" len="med"/>
+                    </a:lnB>
+                    <a:solidFill>
+                      <a:srgbClr val="2B2B2B"/>
+                    </a:solidFill>
+                  </a:tcPr>
+                </a:tc>
+                <a:tc>
+                  <a:txBody>
+                    <a:bodyPr/>
+                    <a:lstStyle/>
+                    <a:p>
+                      <a:pPr algn="ctr" indent="0" marL="0">
+                        <a:buNone/>
+                      </a:pPr>
+                      <a:r>
+                        <a:rPr lang="en-US" sz="850" b="1" dirty="0">
+                          <a:solidFill>
+                            <a:srgbClr val="FFFFFF"/>
+                          </a:solidFill>
+                          <a:latin typeface="Verdana" pitchFamily="34" charset="0"/>
+                          <a:ea typeface="Verdana" pitchFamily="34" charset="-122"/>
+                          <a:cs typeface="Verdana" pitchFamily="34" charset="-120"/>
+                        </a:rPr>
+                        <a:t>Tasa de</a:t>
+                      </a:r>
+                      <a:endParaRPr lang="en-US" sz="850" dirty="0">
+                        <a:latin typeface="Verdana" charset="0"/>
+                        <a:ea typeface="Verdana" charset="0"/>
+                        <a:cs typeface="Verdana" charset="0"/>
+                      </a:endParaRPr>
+                    </a:p>
+                    <a:p>
+                      <a:pPr algn="ctr" indent="0" marL="0">
+                        <a:buNone/>
+                      </a:pPr>
+                      <a:r>
+                        <a:rPr lang="en-US" sz="850" b="1" dirty="0">
+                          <a:solidFill>
+                            <a:srgbClr val="FFFFFF"/>
+                          </a:solidFill>
+                          <a:latin typeface="Verdana" pitchFamily="34" charset="0"/>
+                          <a:ea typeface="Verdana" pitchFamily="34" charset="-122"/>
+                          <a:cs typeface="Verdana" pitchFamily="34" charset="-120"/>
+                        </a:rPr>
+                        <a:t>recuperación</a:t>
+                      </a:r>
+                      <a:endParaRPr lang="en-US" sz="850" dirty="0">
+                        <a:latin typeface="Verdana" charset="0"/>
+                        <a:ea typeface="Verdana" charset="0"/>
+                        <a:cs typeface="Verdana" charset="0"/>
+                      </a:endParaRPr>
+                    </a:p>
+                  </a:txBody>
+                  <a:tcPr marL="91440" marR="91440" marT="45720" marB="45720" anchor="ctr">
+                    <a:lnL w="6350" cap="flat" cmpd="sng" algn="ctr">
+                      <a:solidFill>
+                        <a:srgbClr val="CACACA"/>
+                      </a:solidFill>
+                      <a:prstDash val="solid"/>
+                      <a:round/>
+                      <a:headEnd type="none" w="med" len="med"/>
+                      <a:tailEnd type="none" w="med" len="med"/>
+                    </a:lnL>
+                    <a:lnR w="6350" cap="flat" cmpd="sng" algn="ctr">
+                      <a:solidFill>
+                        <a:srgbClr val="CACACA"/>
+                      </a:solidFill>
+                      <a:prstDash val="solid"/>
+                      <a:round/>
+                      <a:headEnd type="none" w="med" len="med"/>
+                      <a:tailEnd type="none" w="med" len="med"/>
+                    </a:lnR>
+                    <a:lnT w="6350" cap="flat" cmpd="sng" algn="ctr">
+                      <a:solidFill>
+                        <a:srgbClr val="CACACA"/>
+                      </a:solidFill>
+                      <a:prstDash val="solid"/>
+                      <a:round/>
+                      <a:headEnd type="none" w="med" len="med"/>
+                      <a:tailEnd type="none" w="med" len="med"/>
+                    </a:lnT>
+                    <a:lnB w="6350" cap="flat" cmpd="sng" algn="ctr">
+                      <a:solidFill>
+                        <a:srgbClr val="CACACA"/>
+                      </a:solidFill>
+                      <a:prstDash val="solid"/>
+                      <a:round/>
+                      <a:headEnd type="none" w="med" len="med"/>
+                      <a:tailEnd type="none" w="med" len="med"/>
+                    </a:lnB>
+                    <a:solidFill>
+                      <a:srgbClr val="F56600"/>
+                    </a:solidFill>
+                  </a:tcPr>
+                </a:tc>
+                <a:tc>
+                  <a:txBody>
+                    <a:bodyPr/>
+                    <a:lstStyle/>
+                    <a:p>
+                      <a:pPr algn="ctr" indent="0" marL="0">
+                        <a:buNone/>
+                      </a:pPr>
+                      <a:r>
+                        <a:rPr lang="en-US" sz="850" b="1" dirty="0">
+                          <a:solidFill>
+                            <a:srgbClr val="FFFFFF"/>
+                          </a:solidFill>
+                          <a:latin typeface="Verdana" pitchFamily="34" charset="0"/>
+                          <a:ea typeface="Verdana" pitchFamily="34" charset="-122"/>
+                          <a:cs typeface="Verdana" pitchFamily="34" charset="-120"/>
+                        </a:rPr>
+                        <a:t>NPL PYME</a:t>
+                      </a:r>
+                      <a:endParaRPr lang="en-US" sz="850" dirty="0">
+                        <a:latin typeface="Verdana" charset="0"/>
+                        <a:ea typeface="Verdana" charset="0"/>
+                        <a:cs typeface="Verdana" charset="0"/>
+                      </a:endParaRPr>
+                    </a:p>
+                  </a:txBody>
+                  <a:tcPr marL="91440" marR="91440" marT="45720" marB="45720" anchor="ctr">
+                    <a:lnL w="6350" cap="flat" cmpd="sng" algn="ctr">
+                      <a:solidFill>
+                        <a:srgbClr val="CACACA"/>
+                      </a:solidFill>
+                      <a:prstDash val="solid"/>
+                      <a:round/>
+                      <a:headEnd type="none" w="med" len="med"/>
+                      <a:tailEnd type="none" w="med" len="med"/>
+                    </a:lnL>
+                    <a:lnR w="6350" cap="flat" cmpd="sng" algn="ctr">
+                      <a:solidFill>
+                        <a:srgbClr val="CACACA"/>
+                      </a:solidFill>
+                      <a:prstDash val="solid"/>
+                      <a:round/>
+                      <a:headEnd type="none" w="med" len="med"/>
+                      <a:tailEnd type="none" w="med" len="med"/>
+                    </a:lnR>
+                    <a:lnT w="6350" cap="flat" cmpd="sng" algn="ctr">
+                      <a:solidFill>
+                        <a:srgbClr val="CACACA"/>
+                      </a:solidFill>
+                      <a:prstDash val="solid"/>
+                      <a:round/>
+                      <a:headEnd type="none" w="med" len="med"/>
+                      <a:tailEnd type="none" w="med" len="med"/>
+                    </a:lnT>
+                    <a:lnB w="6350" cap="flat" cmpd="sng" algn="ctr">
+                      <a:solidFill>
+                        <a:srgbClr val="CACACA"/>
+                      </a:solidFill>
+                      <a:prstDash val="solid"/>
+                      <a:round/>
+                      <a:headEnd type="none" w="med" len="med"/>
+                      <a:tailEnd type="none" w="med" len="med"/>
+                    </a:lnB>
+                    <a:solidFill>
+                      <a:srgbClr val="F56600"/>
+                    </a:solidFill>
+                  </a:tcPr>
+                </a:tc>
+              </a:tr>
+              <a:tr h="310896">
+                <a:tc>
+                  <a:txBody>
+                    <a:bodyPr/>
+                    <a:lstStyle/>
+                    <a:p>
+                      <a:pPr algn="l" indent="0" marL="0">
+                        <a:buNone/>
+                      </a:pPr>
+                      <a:r>
+                        <a:rPr lang="en-US" sz="1000" b="1" dirty="0">
+                          <a:solidFill>
+                            <a:srgbClr val="F56600"/>
+                          </a:solidFill>
+                          <a:latin typeface="Verdana" pitchFamily="34" charset="0"/>
+                          <a:ea typeface="Verdana" pitchFamily="34" charset="-122"/>
+                          <a:cs typeface="Verdana" pitchFamily="34" charset="-120"/>
+                        </a:rPr>
+                        <a:t>España</a:t>
+                      </a:r>
+                      <a:endParaRPr lang="en-US" sz="1000" dirty="0">
+                        <a:latin typeface="Verdana" charset="0"/>
+                        <a:ea typeface="Verdana" charset="0"/>
+                        <a:cs typeface="Verdana" charset="0"/>
+                      </a:endParaRPr>
+                    </a:p>
+                  </a:txBody>
+                  <a:tcPr marL="91440" marR="91440" marT="45720" marB="45720" anchor="ctr">
+                    <a:lnL w="6350" cap="flat" cmpd="sng" algn="ctr">
+                      <a:solidFill>
+                        <a:srgbClr val="CACACA"/>
+                      </a:solidFill>
+                      <a:prstDash val="solid"/>
+                      <a:round/>
+                      <a:headEnd type="none" w="med" len="med"/>
+                      <a:tailEnd type="none" w="med" len="med"/>
+                    </a:lnL>
+                    <a:lnR w="6350" cap="flat" cmpd="sng" algn="ctr">
+                      <a:solidFill>
+                        <a:srgbClr val="CACACA"/>
+                      </a:solidFill>
+                      <a:prstDash val="solid"/>
+                      <a:round/>
+                      <a:headEnd type="none" w="med" len="med"/>
+                      <a:tailEnd type="none" w="med" len="med"/>
+                    </a:lnR>
+                    <a:lnT w="6350" cap="flat" cmpd="sng" algn="ctr">
+                      <a:solidFill>
+                        <a:srgbClr val="CACACA"/>
+                      </a:solidFill>
+                      <a:prstDash val="solid"/>
+                      <a:round/>
+                      <a:headEnd type="none" w="med" len="med"/>
+                      <a:tailEnd type="none" w="med" len="med"/>
+                    </a:lnT>
+                    <a:lnB w="6350" cap="flat" cmpd="sng" algn="ctr">
+                      <a:solidFill>
+                        <a:srgbClr val="CACACA"/>
+                      </a:solidFill>
+                      <a:prstDash val="solid"/>
+                      <a:round/>
+                      <a:headEnd type="none" w="med" len="med"/>
+                      <a:tailEnd type="none" w="med" len="med"/>
+                    </a:lnB>
+                    <a:solidFill>
+                      <a:srgbClr val="FFF4C2"/>
+                    </a:solidFill>
+                  </a:tcPr>
+                </a:tc>
+                <a:tc>
+                  <a:txBody>
+                    <a:bodyPr/>
+                    <a:lstStyle/>
+                    <a:p>
+                      <a:pPr algn="ctr" indent="0" marL="0">
+                        <a:buNone/>
+                      </a:pPr>
+                      <a:r>
+                        <a:rPr lang="en-US" sz="1000" dirty="0">
+                          <a:solidFill>
+                            <a:srgbClr val="2B2B2B"/>
+                          </a:solidFill>
+                          <a:latin typeface="Verdana" pitchFamily="34" charset="0"/>
+                          <a:ea typeface="Verdana" pitchFamily="34" charset="-122"/>
+                          <a:cs typeface="Verdana" pitchFamily="34" charset="-120"/>
+                        </a:rPr>
+                        <a:t>1,73 %</a:t>
+                      </a:r>
+                      <a:endParaRPr lang="en-US" sz="1000" dirty="0">
+                        <a:latin typeface="Verdana" charset="0"/>
+                        <a:ea typeface="Verdana" charset="0"/>
+                        <a:cs typeface="Verdana" charset="0"/>
+                      </a:endParaRPr>
+                    </a:p>
+                  </a:txBody>
+                  <a:tcPr marL="91440" marR="91440" marT="45720" marB="45720" anchor="ctr">
+                    <a:lnL w="6350" cap="flat" cmpd="sng" algn="ctr">
+                      <a:solidFill>
+                        <a:srgbClr val="CACACA"/>
+                      </a:solidFill>
+                      <a:prstDash val="solid"/>
+                      <a:round/>
+                      <a:headEnd type="none" w="med" len="med"/>
+                      <a:tailEnd type="none" w="med" len="med"/>
+                    </a:lnL>
+                    <a:lnR w="6350" cap="flat" cmpd="sng" algn="ctr">
+                      <a:solidFill>
+                        <a:srgbClr val="CACACA"/>
+                      </a:solidFill>
+                      <a:prstDash val="solid"/>
+                      <a:round/>
+                      <a:headEnd type="none" w="med" len="med"/>
+                      <a:tailEnd type="none" w="med" len="med"/>
+                    </a:lnR>
+                    <a:lnT w="6350" cap="flat" cmpd="sng" algn="ctr">
+                      <a:solidFill>
+                        <a:srgbClr val="CACACA"/>
+                      </a:solidFill>
+                      <a:prstDash val="solid"/>
+                      <a:round/>
+                      <a:headEnd type="none" w="med" len="med"/>
+                      <a:tailEnd type="none" w="med" len="med"/>
+                    </a:lnT>
+                    <a:lnB w="6350" cap="flat" cmpd="sng" algn="ctr">
+                      <a:solidFill>
+                        <a:srgbClr val="CACACA"/>
+                      </a:solidFill>
+                      <a:prstDash val="solid"/>
+                      <a:round/>
+                      <a:headEnd type="none" w="med" len="med"/>
+                      <a:tailEnd type="none" w="med" len="med"/>
+                    </a:lnB>
+                  </a:tcPr>
+                </a:tc>
+                <a:tc>
+                  <a:txBody>
+                    <a:bodyPr/>
+                    <a:lstStyle/>
+                    <a:p>
+                      <a:pPr algn="ctr" indent="0" marL="0">
+                        <a:buNone/>
+                      </a:pPr>
+                      <a:r>
+                        <a:rPr lang="en-US" sz="1000" dirty="0">
+                          <a:solidFill>
+                            <a:srgbClr val="2B2B2B"/>
+                          </a:solidFill>
+                          <a:latin typeface="Verdana" pitchFamily="34" charset="0"/>
+                          <a:ea typeface="Verdana" pitchFamily="34" charset="-122"/>
+                          <a:cs typeface="Verdana" pitchFamily="34" charset="-120"/>
+                        </a:rPr>
+                        <a:t>34,4 %</a:t>
+                      </a:r>
+                      <a:endParaRPr lang="en-US" sz="1000" dirty="0">
+                        <a:latin typeface="Verdana" charset="0"/>
+                        <a:ea typeface="Verdana" charset="0"/>
+                        <a:cs typeface="Verdana" charset="0"/>
+                      </a:endParaRPr>
+                    </a:p>
+                  </a:txBody>
+                  <a:tcPr marL="91440" marR="91440" marT="45720" marB="45720" anchor="ctr">
+                    <a:lnL w="6350" cap="flat" cmpd="sng" algn="ctr">
+                      <a:solidFill>
+                        <a:srgbClr val="CACACA"/>
+                      </a:solidFill>
+                      <a:prstDash val="solid"/>
+                      <a:round/>
+                      <a:headEnd type="none" w="med" len="med"/>
+                      <a:tailEnd type="none" w="med" len="med"/>
+                    </a:lnL>
+                    <a:lnR w="6350" cap="flat" cmpd="sng" algn="ctr">
+                      <a:solidFill>
+                        <a:srgbClr val="CACACA"/>
+                      </a:solidFill>
+                      <a:prstDash val="solid"/>
+                      <a:round/>
+                      <a:headEnd type="none" w="med" len="med"/>
+                      <a:tailEnd type="none" w="med" len="med"/>
+                    </a:lnR>
+                    <a:lnT w="6350" cap="flat" cmpd="sng" algn="ctr">
+                      <a:solidFill>
+                        <a:srgbClr val="CACACA"/>
+                      </a:solidFill>
+                      <a:prstDash val="solid"/>
+                      <a:round/>
+                      <a:headEnd type="none" w="med" len="med"/>
+                      <a:tailEnd type="none" w="med" len="med"/>
+                    </a:lnT>
+                    <a:lnB w="6350" cap="flat" cmpd="sng" algn="ctr">
+                      <a:solidFill>
+                        <a:srgbClr val="CACACA"/>
+                      </a:solidFill>
+                      <a:prstDash val="solid"/>
+                      <a:round/>
+                      <a:headEnd type="none" w="med" len="med"/>
+                      <a:tailEnd type="none" w="med" len="med"/>
+                    </a:lnB>
+                  </a:tcPr>
+                </a:tc>
+                <a:tc>
+                  <a:txBody>
+                    <a:bodyPr/>
+                    <a:lstStyle/>
+                    <a:p>
+                      <a:pPr algn="ctr" indent="0" marL="0">
+                        <a:buNone/>
+                      </a:pPr>
+                      <a:r>
+                        <a:rPr lang="en-US" sz="1000" dirty="0">
+                          <a:solidFill>
+                            <a:srgbClr val="818181"/>
+                          </a:solidFill>
+                          <a:latin typeface="Verdana" pitchFamily="34" charset="0"/>
+                          <a:ea typeface="Verdana" pitchFamily="34" charset="-122"/>
+                          <a:cs typeface="Verdana" pitchFamily="34" charset="-120"/>
+                        </a:rPr>
+                        <a:t>56,0 %</a:t>
+                      </a:r>
+                      <a:endParaRPr lang="en-US" sz="1000" dirty="0">
+                        <a:latin typeface="Verdana" charset="0"/>
+                        <a:ea typeface="Verdana" charset="0"/>
+                        <a:cs typeface="Verdana" charset="0"/>
+                      </a:endParaRPr>
+                    </a:p>
+                  </a:txBody>
+                  <a:tcPr marL="91440" marR="91440" marT="45720" marB="45720" anchor="ctr">
+                    <a:lnL w="6350" cap="flat" cmpd="sng" algn="ctr">
+                      <a:solidFill>
+                        <a:srgbClr val="CACACA"/>
+                      </a:solidFill>
+                      <a:prstDash val="solid"/>
+                      <a:round/>
+                      <a:headEnd type="none" w="med" len="med"/>
+                      <a:tailEnd type="none" w="med" len="med"/>
+                    </a:lnL>
+                    <a:lnR w="6350" cap="flat" cmpd="sng" algn="ctr">
+                      <a:solidFill>
+                        <a:srgbClr val="CACACA"/>
+                      </a:solidFill>
+                      <a:prstDash val="solid"/>
+                      <a:round/>
+                      <a:headEnd type="none" w="med" len="med"/>
+                      <a:tailEnd type="none" w="med" len="med"/>
+                    </a:lnR>
+                    <a:lnT w="6350" cap="flat" cmpd="sng" algn="ctr">
+                      <a:solidFill>
+                        <a:srgbClr val="CACACA"/>
+                      </a:solidFill>
+                      <a:prstDash val="solid"/>
+                      <a:round/>
+                      <a:headEnd type="none" w="med" len="med"/>
+                      <a:tailEnd type="none" w="med" len="med"/>
+                    </a:lnT>
+                    <a:lnB w="6350" cap="flat" cmpd="sng" algn="ctr">
+                      <a:solidFill>
+                        <a:srgbClr val="CACACA"/>
+                      </a:solidFill>
+                      <a:prstDash val="solid"/>
+                      <a:round/>
+                      <a:headEnd type="none" w="med" len="med"/>
+                      <a:tailEnd type="none" w="med" len="med"/>
+                    </a:lnB>
+                  </a:tcPr>
+                </a:tc>
+                <a:tc>
+                  <a:txBody>
+                    <a:bodyPr/>
+                    <a:lstStyle/>
+                    <a:p>
+                      <a:pPr algn="ctr" indent="0" marL="0">
+                        <a:buNone/>
+                      </a:pPr>
+                      <a:r>
+                        <a:rPr lang="en-US" sz="1000" b="1" dirty="0">
+                          <a:solidFill>
+                            <a:srgbClr val="2B2B2B"/>
+                          </a:solidFill>
+                          <a:latin typeface="Verdana" pitchFamily="34" charset="0"/>
+                          <a:ea typeface="Verdana" pitchFamily="34" charset="-122"/>
+                          <a:cs typeface="Verdana" pitchFamily="34" charset="-120"/>
+                        </a:rPr>
+                        <a:t>55,4 %</a:t>
+                      </a:r>
+                      <a:endParaRPr lang="en-US" sz="1000" dirty="0">
+                        <a:latin typeface="Verdana" charset="0"/>
+                        <a:ea typeface="Verdana" charset="0"/>
+                        <a:cs typeface="Verdana" charset="0"/>
+                      </a:endParaRPr>
+                    </a:p>
+                  </a:txBody>
+                  <a:tcPr marL="91440" marR="91440" marT="45720" marB="45720" anchor="ctr">
+                    <a:lnL w="6350" cap="flat" cmpd="sng" algn="ctr">
+                      <a:solidFill>
+                        <a:srgbClr val="CACACA"/>
+                      </a:solidFill>
+                      <a:prstDash val="solid"/>
+                      <a:round/>
+                      <a:headEnd type="none" w="med" len="med"/>
+                      <a:tailEnd type="none" w="med" len="med"/>
+                    </a:lnL>
+                    <a:lnR w="6350" cap="flat" cmpd="sng" algn="ctr">
+                      <a:solidFill>
+                        <a:srgbClr val="CACACA"/>
+                      </a:solidFill>
+                      <a:prstDash val="solid"/>
+                      <a:round/>
+                      <a:headEnd type="none" w="med" len="med"/>
+                      <a:tailEnd type="none" w="med" len="med"/>
+                    </a:lnR>
+                    <a:lnT w="6350" cap="flat" cmpd="sng" algn="ctr">
+                      <a:solidFill>
+                        <a:srgbClr val="CACACA"/>
+                      </a:solidFill>
+                      <a:prstDash val="solid"/>
+                      <a:round/>
+                      <a:headEnd type="none" w="med" len="med"/>
+                      <a:tailEnd type="none" w="med" len="med"/>
+                    </a:lnT>
+                    <a:lnB w="6350" cap="flat" cmpd="sng" algn="ctr">
+                      <a:solidFill>
+                        <a:srgbClr val="CACACA"/>
+                      </a:solidFill>
+                      <a:prstDash val="solid"/>
+                      <a:round/>
+                      <a:headEnd type="none" w="med" len="med"/>
+                      <a:tailEnd type="none" w="med" len="med"/>
+                    </a:lnB>
+                    <a:solidFill>
+                      <a:srgbClr val="FFF4C2"/>
+                    </a:solidFill>
+                  </a:tcPr>
+                </a:tc>
+                <a:tc>
+                  <a:txBody>
+                    <a:bodyPr/>
+                    <a:lstStyle/>
+                    <a:p>
+                      <a:pPr algn="ctr" indent="0" marL="0">
+                        <a:buNone/>
+                      </a:pPr>
+                      <a:r>
+                        <a:rPr lang="en-US" sz="1000" b="1" dirty="0">
+                          <a:solidFill>
+                            <a:srgbClr val="2B2B2B"/>
+                          </a:solidFill>
+                          <a:latin typeface="Verdana" pitchFamily="34" charset="0"/>
+                          <a:ea typeface="Verdana" pitchFamily="34" charset="-122"/>
+                          <a:cs typeface="Verdana" pitchFamily="34" charset="-120"/>
+                        </a:rPr>
+                        <a:t>−0,6 pp</a:t>
+                      </a:r>
+                      <a:endParaRPr lang="en-US" sz="1000" dirty="0">
+                        <a:latin typeface="Verdana" charset="0"/>
+                        <a:ea typeface="Verdana" charset="0"/>
+                        <a:cs typeface="Verdana" charset="0"/>
+                      </a:endParaRPr>
+                    </a:p>
+                  </a:txBody>
+                  <a:tcPr marL="91440" marR="91440" marT="45720" marB="45720" anchor="ctr">
+                    <a:lnL w="6350" cap="flat" cmpd="sng" algn="ctr">
+                      <a:solidFill>
+                        <a:srgbClr val="CACACA"/>
+                      </a:solidFill>
+                      <a:prstDash val="solid"/>
+                      <a:round/>
+                      <a:headEnd type="none" w="med" len="med"/>
+                      <a:tailEnd type="none" w="med" len="med"/>
+                    </a:lnL>
+                    <a:lnR w="6350" cap="flat" cmpd="sng" algn="ctr">
+                      <a:solidFill>
+                        <a:srgbClr val="CACACA"/>
+                      </a:solidFill>
+                      <a:prstDash val="solid"/>
+                      <a:round/>
+                      <a:headEnd type="none" w="med" len="med"/>
+                      <a:tailEnd type="none" w="med" len="med"/>
+                    </a:lnR>
+                    <a:lnT w="6350" cap="flat" cmpd="sng" algn="ctr">
+                      <a:solidFill>
+                        <a:srgbClr val="CACACA"/>
+                      </a:solidFill>
+                      <a:prstDash val="solid"/>
+                      <a:round/>
+                      <a:headEnd type="none" w="med" len="med"/>
+                      <a:tailEnd type="none" w="med" len="med"/>
+                    </a:lnT>
+                    <a:lnB w="6350" cap="flat" cmpd="sng" algn="ctr">
+                      <a:solidFill>
+                        <a:srgbClr val="CACACA"/>
+                      </a:solidFill>
+                      <a:prstDash val="solid"/>
+                      <a:round/>
+                      <a:headEnd type="none" w="med" len="med"/>
+                      <a:tailEnd type="none" w="med" len="med"/>
+                    </a:lnB>
+                    <a:solidFill>
+                      <a:srgbClr val="C7E3F9"/>
+                    </a:solidFill>
+                  </a:tcPr>
+                </a:tc>
+                <a:tc>
+                  <a:txBody>
+                    <a:bodyPr/>
+                    <a:lstStyle/>
+                    <a:p>
+                      <a:pPr algn="ctr" indent="0" marL="0">
+                        <a:buNone/>
+                      </a:pPr>
+                      <a:r>
+                        <a:rPr lang="en-US" sz="1000" dirty="0">
+                          <a:solidFill>
+                            <a:srgbClr val="818181"/>
+                          </a:solidFill>
+                          <a:latin typeface="Verdana" pitchFamily="34" charset="0"/>
+                          <a:ea typeface="Verdana" pitchFamily="34" charset="-122"/>
+                          <a:cs typeface="Verdana" pitchFamily="34" charset="-120"/>
+                        </a:rPr>
+                        <a:t>77,5 %</a:t>
+                      </a:r>
+                      <a:endParaRPr lang="en-US" sz="1000" dirty="0">
+                        <a:latin typeface="Verdana" charset="0"/>
+                        <a:ea typeface="Verdana" charset="0"/>
+                        <a:cs typeface="Verdana" charset="0"/>
+                      </a:endParaRPr>
+                    </a:p>
+                  </a:txBody>
+                  <a:tcPr marL="91440" marR="91440" marT="45720" marB="45720" anchor="ctr">
+                    <a:lnL w="6350" cap="flat" cmpd="sng" algn="ctr">
+                      <a:solidFill>
+                        <a:srgbClr val="CACACA"/>
+                      </a:solidFill>
+                      <a:prstDash val="solid"/>
+                      <a:round/>
+                      <a:headEnd type="none" w="med" len="med"/>
+                      <a:tailEnd type="none" w="med" len="med"/>
+                    </a:lnL>
+                    <a:lnR w="6350" cap="flat" cmpd="sng" algn="ctr">
+                      <a:solidFill>
+                        <a:srgbClr val="CACACA"/>
+                      </a:solidFill>
+                      <a:prstDash val="solid"/>
+                      <a:round/>
+                      <a:headEnd type="none" w="med" len="med"/>
+                      <a:tailEnd type="none" w="med" len="med"/>
+                    </a:lnR>
+                    <a:lnT w="6350" cap="flat" cmpd="sng" algn="ctr">
+                      <a:solidFill>
+                        <a:srgbClr val="CACACA"/>
+                      </a:solidFill>
+                      <a:prstDash val="solid"/>
+                      <a:round/>
+                      <a:headEnd type="none" w="med" len="med"/>
+                      <a:tailEnd type="none" w="med" len="med"/>
+                    </a:lnT>
+                    <a:lnB w="6350" cap="flat" cmpd="sng" algn="ctr">
+                      <a:solidFill>
+                        <a:srgbClr val="CACACA"/>
+                      </a:solidFill>
+                      <a:prstDash val="solid"/>
+                      <a:round/>
+                      <a:headEnd type="none" w="med" len="med"/>
+                      <a:tailEnd type="none" w="med" len="med"/>
+                    </a:lnB>
+                  </a:tcPr>
+                </a:tc>
+                <a:tc>
+                  <a:txBody>
+                    <a:bodyPr/>
+                    <a:lstStyle/>
+                    <a:p>
+                      <a:pPr algn="ctr" indent="0" marL="0">
+                        <a:buNone/>
+                      </a:pPr>
+                      <a:r>
+                        <a:rPr lang="en-US" sz="1000" dirty="0">
+                          <a:solidFill>
+                            <a:srgbClr val="818181"/>
+                          </a:solidFill>
+                          <a:latin typeface="Verdana" pitchFamily="34" charset="0"/>
+                          <a:ea typeface="Verdana" pitchFamily="34" charset="-122"/>
+                          <a:cs typeface="Verdana" pitchFamily="34" charset="-120"/>
+                        </a:rPr>
+                        <a:t>5,38 %</a:t>
+                      </a:r>
+                      <a:endParaRPr lang="en-US" sz="1000" dirty="0">
+                        <a:latin typeface="Verdana" charset="0"/>
+                        <a:ea typeface="Verdana" charset="0"/>
+                        <a:cs typeface="Verdana" charset="0"/>
+                      </a:endParaRPr>
+                    </a:p>
+                  </a:txBody>
+                  <a:tcPr marL="91440" marR="91440" marT="45720" marB="45720" anchor="ctr">
+                    <a:lnL w="6350" cap="flat" cmpd="sng" algn="ctr">
+                      <a:solidFill>
+                        <a:srgbClr val="CACACA"/>
+                      </a:solidFill>
+                      <a:prstDash val="solid"/>
+                      <a:round/>
+                      <a:headEnd type="none" w="med" len="med"/>
+                      <a:tailEnd type="none" w="med" len="med"/>
+                    </a:lnL>
+                    <a:lnR w="6350" cap="flat" cmpd="sng" algn="ctr">
+                      <a:solidFill>
+                        <a:srgbClr val="CACACA"/>
+                      </a:solidFill>
+                      <a:prstDash val="solid"/>
+                      <a:round/>
+                      <a:headEnd type="none" w="med" len="med"/>
+                      <a:tailEnd type="none" w="med" len="med"/>
+                    </a:lnR>
+                    <a:lnT w="6350" cap="flat" cmpd="sng" algn="ctr">
+                      <a:solidFill>
+                        <a:srgbClr val="CACACA"/>
+                      </a:solidFill>
+                      <a:prstDash val="solid"/>
+                      <a:round/>
+                      <a:headEnd type="none" w="med" len="med"/>
+                      <a:tailEnd type="none" w="med" len="med"/>
+                    </a:lnT>
+                    <a:lnB w="6350" cap="flat" cmpd="sng" algn="ctr">
+                      <a:solidFill>
+                        <a:srgbClr val="CACACA"/>
+                      </a:solidFill>
+                      <a:prstDash val="solid"/>
+                      <a:round/>
+                      <a:headEnd type="none" w="med" len="med"/>
+                      <a:tailEnd type="none" w="med" len="med"/>
+                    </a:lnB>
+                  </a:tcPr>
+                </a:tc>
+              </a:tr>
+              <a:tr h="310896">
+                <a:tc>
+                  <a:txBody>
+                    <a:bodyPr/>
+                    <a:lstStyle/>
+                    <a:p>
+                      <a:pPr algn="l" indent="0" marL="0">
+                        <a:buNone/>
+                      </a:pPr>
+                      <a:r>
+                        <a:rPr lang="en-US" sz="1000" dirty="0">
+                          <a:solidFill>
+                            <a:srgbClr val="2B2B2B"/>
+                          </a:solidFill>
+                          <a:latin typeface="Verdana" pitchFamily="34" charset="0"/>
+                          <a:ea typeface="Verdana" pitchFamily="34" charset="-122"/>
+                          <a:cs typeface="Verdana" pitchFamily="34" charset="-120"/>
+                        </a:rPr>
+                        <a:t>Alemania</a:t>
+                      </a:r>
+                      <a:endParaRPr lang="en-US" sz="1000" dirty="0">
+                        <a:latin typeface="Verdana" charset="0"/>
+                        <a:ea typeface="Verdana" charset="0"/>
+                        <a:cs typeface="Verdana" charset="0"/>
+                      </a:endParaRPr>
+                    </a:p>
+                  </a:txBody>
+                  <a:tcPr marL="91440" marR="91440" marT="45720" marB="45720" anchor="ctr">
+                    <a:lnL w="6350" cap="flat" cmpd="sng" algn="ctr">
+                      <a:solidFill>
+                        <a:srgbClr val="CACACA"/>
+                      </a:solidFill>
+                      <a:prstDash val="solid"/>
+                      <a:round/>
+                      <a:headEnd type="none" w="med" len="med"/>
+                      <a:tailEnd type="none" w="med" len="med"/>
+                    </a:lnL>
+                    <a:lnR w="6350" cap="flat" cmpd="sng" algn="ctr">
+                      <a:solidFill>
+                        <a:srgbClr val="CACACA"/>
+                      </a:solidFill>
+                      <a:prstDash val="solid"/>
+                      <a:round/>
+                      <a:headEnd type="none" w="med" len="med"/>
+                      <a:tailEnd type="none" w="med" len="med"/>
+                    </a:lnR>
+                    <a:lnT w="6350" cap="flat" cmpd="sng" algn="ctr">
+                      <a:solidFill>
+                        <a:srgbClr val="CACACA"/>
+                      </a:solidFill>
+                      <a:prstDash val="solid"/>
+                      <a:round/>
+                      <a:headEnd type="none" w="med" len="med"/>
+                      <a:tailEnd type="none" w="med" len="med"/>
+                    </a:lnT>
+                    <a:lnB w="6350" cap="flat" cmpd="sng" algn="ctr">
+                      <a:solidFill>
+                        <a:srgbClr val="CACACA"/>
+                      </a:solidFill>
+                      <a:prstDash val="solid"/>
+                      <a:round/>
+                      <a:headEnd type="none" w="med" len="med"/>
+                      <a:tailEnd type="none" w="med" len="med"/>
+                    </a:lnB>
+                    <a:solidFill>
+                      <a:srgbClr val="FFFFFF"/>
+                    </a:solidFill>
+                  </a:tcPr>
+                </a:tc>
+                <a:tc>
+                  <a:txBody>
+                    <a:bodyPr/>
+                    <a:lstStyle/>
+                    <a:p>
+                      <a:pPr algn="ctr" indent="0" marL="0">
+                        <a:buNone/>
+                      </a:pPr>
+                      <a:r>
+                        <a:rPr lang="en-US" sz="1000" dirty="0">
+                          <a:solidFill>
+                            <a:srgbClr val="2B2B2B"/>
+                          </a:solidFill>
+                          <a:latin typeface="Verdana" pitchFamily="34" charset="0"/>
+                          <a:ea typeface="Verdana" pitchFamily="34" charset="-122"/>
+                          <a:cs typeface="Verdana" pitchFamily="34" charset="-120"/>
+                        </a:rPr>
+                        <a:t>1,26 %</a:t>
+                      </a:r>
+                      <a:endParaRPr lang="en-US" sz="1000" dirty="0">
+                        <a:latin typeface="Verdana" charset="0"/>
+                        <a:ea typeface="Verdana" charset="0"/>
+                        <a:cs typeface="Verdana" charset="0"/>
+                      </a:endParaRPr>
+                    </a:p>
+                  </a:txBody>
+                  <a:tcPr marL="91440" marR="91440" marT="45720" marB="45720" anchor="ctr">
+                    <a:lnL w="6350" cap="flat" cmpd="sng" algn="ctr">
+                      <a:solidFill>
+                        <a:srgbClr val="CACACA"/>
+                      </a:solidFill>
+                      <a:prstDash val="solid"/>
+                      <a:round/>
+                      <a:headEnd type="none" w="med" len="med"/>
+                      <a:tailEnd type="none" w="med" len="med"/>
+                    </a:lnL>
+                    <a:lnR w="6350" cap="flat" cmpd="sng" algn="ctr">
+                      <a:solidFill>
+                        <a:srgbClr val="CACACA"/>
+                      </a:solidFill>
+                      <a:prstDash val="solid"/>
+                      <a:round/>
+                      <a:headEnd type="none" w="med" len="med"/>
+                      <a:tailEnd type="none" w="med" len="med"/>
+                    </a:lnR>
+                    <a:lnT w="6350" cap="flat" cmpd="sng" algn="ctr">
+                      <a:solidFill>
+                        <a:srgbClr val="CACACA"/>
+                      </a:solidFill>
+                      <a:prstDash val="solid"/>
+                      <a:round/>
+                      <a:headEnd type="none" w="med" len="med"/>
+                      <a:tailEnd type="none" w="med" len="med"/>
+                    </a:lnT>
+                    <a:lnB w="6350" cap="flat" cmpd="sng" algn="ctr">
+                      <a:solidFill>
+                        <a:srgbClr val="CACACA"/>
+                      </a:solidFill>
+                      <a:prstDash val="solid"/>
+                      <a:round/>
+                      <a:headEnd type="none" w="med" len="med"/>
+                      <a:tailEnd type="none" w="med" len="med"/>
+                    </a:lnB>
+                  </a:tcPr>
+                </a:tc>
+                <a:tc>
+                  <a:txBody>
+                    <a:bodyPr/>
+                    <a:lstStyle/>
+                    <a:p>
+                      <a:pPr algn="ctr" indent="0" marL="0">
+                        <a:buNone/>
+                      </a:pPr>
+                      <a:r>
+                        <a:rPr lang="en-US" sz="1000" dirty="0">
+                          <a:solidFill>
+                            <a:srgbClr val="2B2B2B"/>
+                          </a:solidFill>
+                          <a:latin typeface="Verdana" pitchFamily="34" charset="0"/>
+                          <a:ea typeface="Verdana" pitchFamily="34" charset="-122"/>
+                          <a:cs typeface="Verdana" pitchFamily="34" charset="-120"/>
+                        </a:rPr>
+                        <a:t>31,4 %</a:t>
+                      </a:r>
+                      <a:endParaRPr lang="en-US" sz="1000" dirty="0">
+                        <a:latin typeface="Verdana" charset="0"/>
+                        <a:ea typeface="Verdana" charset="0"/>
+                        <a:cs typeface="Verdana" charset="0"/>
+                      </a:endParaRPr>
+                    </a:p>
+                  </a:txBody>
+                  <a:tcPr marL="91440" marR="91440" marT="45720" marB="45720" anchor="ctr">
+                    <a:lnL w="6350" cap="flat" cmpd="sng" algn="ctr">
+                      <a:solidFill>
+                        <a:srgbClr val="CACACA"/>
+                      </a:solidFill>
+                      <a:prstDash val="solid"/>
+                      <a:round/>
+                      <a:headEnd type="none" w="med" len="med"/>
+                      <a:tailEnd type="none" w="med" len="med"/>
+                    </a:lnL>
+                    <a:lnR w="6350" cap="flat" cmpd="sng" algn="ctr">
+                      <a:solidFill>
+                        <a:srgbClr val="CACACA"/>
+                      </a:solidFill>
+                      <a:prstDash val="solid"/>
+                      <a:round/>
+                      <a:headEnd type="none" w="med" len="med"/>
+                      <a:tailEnd type="none" w="med" len="med"/>
+                    </a:lnR>
+                    <a:lnT w="6350" cap="flat" cmpd="sng" algn="ctr">
+                      <a:solidFill>
+                        <a:srgbClr val="CACACA"/>
+                      </a:solidFill>
+                      <a:prstDash val="solid"/>
+                      <a:round/>
+                      <a:headEnd type="none" w="med" len="med"/>
+                      <a:tailEnd type="none" w="med" len="med"/>
+                    </a:lnT>
+                    <a:lnB w="6350" cap="flat" cmpd="sng" algn="ctr">
+                      <a:solidFill>
+                        <a:srgbClr val="CACACA"/>
+                      </a:solidFill>
+                      <a:prstDash val="solid"/>
+                      <a:round/>
+                      <a:headEnd type="none" w="med" len="med"/>
+                      <a:tailEnd type="none" w="med" len="med"/>
+                    </a:lnB>
+                  </a:tcPr>
+                </a:tc>
+                <a:tc>
+                  <a:txBody>
+                    <a:bodyPr/>
+                    <a:lstStyle/>
+                    <a:p>
+                      <a:pPr algn="ctr" indent="0" marL="0">
+                        <a:buNone/>
+                      </a:pPr>
+                      <a:r>
+                        <a:rPr lang="en-US" sz="1000" dirty="0">
+                          <a:solidFill>
+                            <a:srgbClr val="818181"/>
+                          </a:solidFill>
+                          <a:latin typeface="Verdana" pitchFamily="34" charset="0"/>
+                          <a:ea typeface="Verdana" pitchFamily="34" charset="-122"/>
+                          <a:cs typeface="Verdana" pitchFamily="34" charset="-120"/>
+                        </a:rPr>
+                        <a:t>46,6 %</a:t>
+                      </a:r>
+                      <a:endParaRPr lang="en-US" sz="1000" dirty="0">
+                        <a:latin typeface="Verdana" charset="0"/>
+                        <a:ea typeface="Verdana" charset="0"/>
+                        <a:cs typeface="Verdana" charset="0"/>
+                      </a:endParaRPr>
+                    </a:p>
+                  </a:txBody>
+                  <a:tcPr marL="91440" marR="91440" marT="45720" marB="45720" anchor="ctr">
+                    <a:lnL w="6350" cap="flat" cmpd="sng" algn="ctr">
+                      <a:solidFill>
+                        <a:srgbClr val="CACACA"/>
+                      </a:solidFill>
+                      <a:prstDash val="solid"/>
+                      <a:round/>
+                      <a:headEnd type="none" w="med" len="med"/>
+                      <a:tailEnd type="none" w="med" len="med"/>
+                    </a:lnL>
+                    <a:lnR w="6350" cap="flat" cmpd="sng" algn="ctr">
+                      <a:solidFill>
+                        <a:srgbClr val="CACACA"/>
+                      </a:solidFill>
+                      <a:prstDash val="solid"/>
+                      <a:round/>
+                      <a:headEnd type="none" w="med" len="med"/>
+                      <a:tailEnd type="none" w="med" len="med"/>
+                    </a:lnR>
+                    <a:lnT w="6350" cap="flat" cmpd="sng" algn="ctr">
+                      <a:solidFill>
+                        <a:srgbClr val="CACACA"/>
+                      </a:solidFill>
+                      <a:prstDash val="solid"/>
+                      <a:round/>
+                      <a:headEnd type="none" w="med" len="med"/>
+                      <a:tailEnd type="none" w="med" len="med"/>
+                    </a:lnT>
+                    <a:lnB w="6350" cap="flat" cmpd="sng" algn="ctr">
+                      <a:solidFill>
+                        <a:srgbClr val="CACACA"/>
+                      </a:solidFill>
+                      <a:prstDash val="solid"/>
+                      <a:round/>
+                      <a:headEnd type="none" w="med" len="med"/>
+                      <a:tailEnd type="none" w="med" len="med"/>
+                    </a:lnB>
+                  </a:tcPr>
+                </a:tc>
+                <a:tc>
+                  <a:txBody>
+                    <a:bodyPr/>
+                    <a:lstStyle/>
+                    <a:p>
+                      <a:pPr algn="ctr" indent="0" marL="0">
+                        <a:buNone/>
+                      </a:pPr>
+                      <a:r>
+                        <a:rPr lang="en-US" sz="1000" b="1" dirty="0">
+                          <a:solidFill>
+                            <a:srgbClr val="2B2B2B"/>
+                          </a:solidFill>
+                          <a:latin typeface="Verdana" pitchFamily="34" charset="0"/>
+                          <a:ea typeface="Verdana" pitchFamily="34" charset="-122"/>
+                          <a:cs typeface="Verdana" pitchFamily="34" charset="-120"/>
+                        </a:rPr>
+                        <a:t>30,1 %</a:t>
+                      </a:r>
+                      <a:endParaRPr lang="en-US" sz="1000" dirty="0">
+                        <a:latin typeface="Verdana" charset="0"/>
+                        <a:ea typeface="Verdana" charset="0"/>
+                        <a:cs typeface="Verdana" charset="0"/>
+                      </a:endParaRPr>
+                    </a:p>
+                  </a:txBody>
+                  <a:tcPr marL="91440" marR="91440" marT="45720" marB="45720" anchor="ctr">
+                    <a:lnL w="6350" cap="flat" cmpd="sng" algn="ctr">
+                      <a:solidFill>
+                        <a:srgbClr val="CACACA"/>
+                      </a:solidFill>
+                      <a:prstDash val="solid"/>
+                      <a:round/>
+                      <a:headEnd type="none" w="med" len="med"/>
+                      <a:tailEnd type="none" w="med" len="med"/>
+                    </a:lnL>
+                    <a:lnR w="6350" cap="flat" cmpd="sng" algn="ctr">
+                      <a:solidFill>
+                        <a:srgbClr val="CACACA"/>
+                      </a:solidFill>
+                      <a:prstDash val="solid"/>
+                      <a:round/>
+                      <a:headEnd type="none" w="med" len="med"/>
+                      <a:tailEnd type="none" w="med" len="med"/>
+                    </a:lnR>
+                    <a:lnT w="6350" cap="flat" cmpd="sng" algn="ctr">
+                      <a:solidFill>
+                        <a:srgbClr val="CACACA"/>
+                      </a:solidFill>
+                      <a:prstDash val="solid"/>
+                      <a:round/>
+                      <a:headEnd type="none" w="med" len="med"/>
+                      <a:tailEnd type="none" w="med" len="med"/>
+                    </a:lnT>
+                    <a:lnB w="6350" cap="flat" cmpd="sng" algn="ctr">
+                      <a:solidFill>
+                        <a:srgbClr val="CACACA"/>
+                      </a:solidFill>
+                      <a:prstDash val="solid"/>
+                      <a:round/>
+                      <a:headEnd type="none" w="med" len="med"/>
+                      <a:tailEnd type="none" w="med" len="med"/>
+                    </a:lnB>
+                    <a:solidFill>
+                      <a:srgbClr val="FFFFFF"/>
+                    </a:solidFill>
+                  </a:tcPr>
+                </a:tc>
+                <a:tc>
+                  <a:txBody>
+                    <a:bodyPr/>
+                    <a:lstStyle/>
+                    <a:p>
+                      <a:pPr algn="ctr" indent="0" marL="0">
+                        <a:buNone/>
+                      </a:pPr>
+                      <a:r>
+                        <a:rPr lang="en-US" sz="1000" b="1" dirty="0">
+                          <a:solidFill>
+                            <a:srgbClr val="2B2B2B"/>
+                          </a:solidFill>
+                          <a:latin typeface="Verdana" pitchFamily="34" charset="0"/>
+                          <a:ea typeface="Verdana" pitchFamily="34" charset="-122"/>
+                          <a:cs typeface="Verdana" pitchFamily="34" charset="-120"/>
+                        </a:rPr>
+                        <a:t>−16,5 pp</a:t>
+                      </a:r>
+                      <a:endParaRPr lang="en-US" sz="1000" dirty="0">
+                        <a:latin typeface="Verdana" charset="0"/>
+                        <a:ea typeface="Verdana" charset="0"/>
+                        <a:cs typeface="Verdana" charset="0"/>
+                      </a:endParaRPr>
+                    </a:p>
+                  </a:txBody>
+                  <a:tcPr marL="91440" marR="91440" marT="45720" marB="45720" anchor="ctr">
+                    <a:lnL w="6350" cap="flat" cmpd="sng" algn="ctr">
+                      <a:solidFill>
+                        <a:srgbClr val="CACACA"/>
+                      </a:solidFill>
+                      <a:prstDash val="solid"/>
+                      <a:round/>
+                      <a:headEnd type="none" w="med" len="med"/>
+                      <a:tailEnd type="none" w="med" len="med"/>
+                    </a:lnL>
+                    <a:lnR w="6350" cap="flat" cmpd="sng" algn="ctr">
+                      <a:solidFill>
+                        <a:srgbClr val="CACACA"/>
+                      </a:solidFill>
+                      <a:prstDash val="solid"/>
+                      <a:round/>
+                      <a:headEnd type="none" w="med" len="med"/>
+                      <a:tailEnd type="none" w="med" len="med"/>
+                    </a:lnR>
+                    <a:lnT w="6350" cap="flat" cmpd="sng" algn="ctr">
+                      <a:solidFill>
+                        <a:srgbClr val="CACACA"/>
+                      </a:solidFill>
+                      <a:prstDash val="solid"/>
+                      <a:round/>
+                      <a:headEnd type="none" w="med" len="med"/>
+                      <a:tailEnd type="none" w="med" len="med"/>
+                    </a:lnT>
+                    <a:lnB w="6350" cap="flat" cmpd="sng" algn="ctr">
+                      <a:solidFill>
+                        <a:srgbClr val="CACACA"/>
+                      </a:solidFill>
+                      <a:prstDash val="solid"/>
+                      <a:round/>
+                      <a:headEnd type="none" w="med" len="med"/>
+                      <a:tailEnd type="none" w="med" len="med"/>
+                    </a:lnB>
+                    <a:solidFill>
+                      <a:srgbClr val="FFCCE8"/>
+                    </a:solidFill>
+                  </a:tcPr>
+                </a:tc>
+                <a:tc>
+                  <a:txBody>
+                    <a:bodyPr/>
+                    <a:lstStyle/>
+                    <a:p>
+                      <a:pPr algn="ctr" indent="0" marL="0">
+                        <a:buNone/>
+                      </a:pPr>
+                      <a:r>
+                        <a:rPr lang="en-US" sz="1000" dirty="0">
+                          <a:solidFill>
+                            <a:srgbClr val="818181"/>
+                          </a:solidFill>
+                          <a:latin typeface="Verdana" pitchFamily="34" charset="0"/>
+                          <a:ea typeface="Verdana" pitchFamily="34" charset="-122"/>
+                          <a:cs typeface="Verdana" pitchFamily="34" charset="-120"/>
+                        </a:rPr>
+                        <a:t>79,8 %</a:t>
+                      </a:r>
+                      <a:endParaRPr lang="en-US" sz="1000" dirty="0">
+                        <a:latin typeface="Verdana" charset="0"/>
+                        <a:ea typeface="Verdana" charset="0"/>
+                        <a:cs typeface="Verdana" charset="0"/>
+                      </a:endParaRPr>
+                    </a:p>
+                  </a:txBody>
+                  <a:tcPr marL="91440" marR="91440" marT="45720" marB="45720" anchor="ctr">
+                    <a:lnL w="6350" cap="flat" cmpd="sng" algn="ctr">
+                      <a:solidFill>
+                        <a:srgbClr val="CACACA"/>
+                      </a:solidFill>
+                      <a:prstDash val="solid"/>
+                      <a:round/>
+                      <a:headEnd type="none" w="med" len="med"/>
+                      <a:tailEnd type="none" w="med" len="med"/>
+                    </a:lnL>
+                    <a:lnR w="6350" cap="flat" cmpd="sng" algn="ctr">
+                      <a:solidFill>
+                        <a:srgbClr val="CACACA"/>
+                      </a:solidFill>
+                      <a:prstDash val="solid"/>
+                      <a:round/>
+                      <a:headEnd type="none" w="med" len="med"/>
+                      <a:tailEnd type="none" w="med" len="med"/>
+                    </a:lnR>
+                    <a:lnT w="6350" cap="flat" cmpd="sng" algn="ctr">
+                      <a:solidFill>
+                        <a:srgbClr val="CACACA"/>
+                      </a:solidFill>
+                      <a:prstDash val="solid"/>
+                      <a:round/>
+                      <a:headEnd type="none" w="med" len="med"/>
+                      <a:tailEnd type="none" w="med" len="med"/>
+                    </a:lnT>
+                    <a:lnB w="6350" cap="flat" cmpd="sng" algn="ctr">
+                      <a:solidFill>
+                        <a:srgbClr val="CACACA"/>
+                      </a:solidFill>
+                      <a:prstDash val="solid"/>
+                      <a:round/>
+                      <a:headEnd type="none" w="med" len="med"/>
+                      <a:tailEnd type="none" w="med" len="med"/>
+                    </a:lnB>
+                  </a:tcPr>
+                </a:tc>
+                <a:tc>
+                  <a:txBody>
+                    <a:bodyPr/>
+                    <a:lstStyle/>
+                    <a:p>
+                      <a:pPr algn="ctr" indent="0" marL="0">
+                        <a:buNone/>
+                      </a:pPr>
+                      <a:r>
+                        <a:rPr lang="en-US" sz="1000" dirty="0">
+                          <a:solidFill>
+                            <a:srgbClr val="818181"/>
+                          </a:solidFill>
+                          <a:latin typeface="Verdana" pitchFamily="34" charset="0"/>
+                          <a:ea typeface="Verdana" pitchFamily="34" charset="-122"/>
+                          <a:cs typeface="Verdana" pitchFamily="34" charset="-120"/>
+                        </a:rPr>
+                        <a:t>4,32 %</a:t>
+                      </a:r>
+                      <a:endParaRPr lang="en-US" sz="1000" dirty="0">
+                        <a:latin typeface="Verdana" charset="0"/>
+                        <a:ea typeface="Verdana" charset="0"/>
+                        <a:cs typeface="Verdana" charset="0"/>
+                      </a:endParaRPr>
+                    </a:p>
+                  </a:txBody>
+                  <a:tcPr marL="91440" marR="91440" marT="45720" marB="45720" anchor="ctr">
+                    <a:lnL w="6350" cap="flat" cmpd="sng" algn="ctr">
+                      <a:solidFill>
+                        <a:srgbClr val="CACACA"/>
+                      </a:solidFill>
+                      <a:prstDash val="solid"/>
+                      <a:round/>
+                      <a:headEnd type="none" w="med" len="med"/>
+                      <a:tailEnd type="none" w="med" len="med"/>
+                    </a:lnL>
+                    <a:lnR w="6350" cap="flat" cmpd="sng" algn="ctr">
+                      <a:solidFill>
+                        <a:srgbClr val="CACACA"/>
+                      </a:solidFill>
+                      <a:prstDash val="solid"/>
+                      <a:round/>
+                      <a:headEnd type="none" w="med" len="med"/>
+                      <a:tailEnd type="none" w="med" len="med"/>
+                    </a:lnR>
+                    <a:lnT w="6350" cap="flat" cmpd="sng" algn="ctr">
+                      <a:solidFill>
+                        <a:srgbClr val="CACACA"/>
+                      </a:solidFill>
+                      <a:prstDash val="solid"/>
+                      <a:round/>
+                      <a:headEnd type="none" w="med" len="med"/>
+                      <a:tailEnd type="none" w="med" len="med"/>
+                    </a:lnT>
+                    <a:lnB w="6350" cap="flat" cmpd="sng" algn="ctr">
+                      <a:solidFill>
+                        <a:srgbClr val="CACACA"/>
+                      </a:solidFill>
+                      <a:prstDash val="solid"/>
+                      <a:round/>
+                      <a:headEnd type="none" w="med" len="med"/>
+                      <a:tailEnd type="none" w="med" len="med"/>
+                    </a:lnB>
+                  </a:tcPr>
+                </a:tc>
+              </a:tr>
+              <a:tr h="310896">
+                <a:tc>
+                  <a:txBody>
+                    <a:bodyPr/>
+                    <a:lstStyle/>
+                    <a:p>
+                      <a:pPr algn="l" indent="0" marL="0">
+                        <a:buNone/>
+                      </a:pPr>
+                      <a:r>
+                        <a:rPr lang="en-US" sz="1000" dirty="0">
+                          <a:solidFill>
+                            <a:srgbClr val="2B2B2B"/>
+                          </a:solidFill>
+                          <a:latin typeface="Verdana" pitchFamily="34" charset="0"/>
+                          <a:ea typeface="Verdana" pitchFamily="34" charset="-122"/>
+                          <a:cs typeface="Verdana" pitchFamily="34" charset="-120"/>
+                        </a:rPr>
+                        <a:t>Francia</a:t>
+                      </a:r>
+                      <a:endParaRPr lang="en-US" sz="1000" dirty="0">
+                        <a:latin typeface="Verdana" charset="0"/>
+                        <a:ea typeface="Verdana" charset="0"/>
+                        <a:cs typeface="Verdana" charset="0"/>
+                      </a:endParaRPr>
+                    </a:p>
+                  </a:txBody>
+                  <a:tcPr marL="91440" marR="91440" marT="45720" marB="45720" anchor="ctr">
+                    <a:lnL w="6350" cap="flat" cmpd="sng" algn="ctr">
+                      <a:solidFill>
+                        <a:srgbClr val="CACACA"/>
+                      </a:solidFill>
+                      <a:prstDash val="solid"/>
+                      <a:round/>
+                      <a:headEnd type="none" w="med" len="med"/>
+                      <a:tailEnd type="none" w="med" len="med"/>
+                    </a:lnL>
+                    <a:lnR w="6350" cap="flat" cmpd="sng" algn="ctr">
+                      <a:solidFill>
+                        <a:srgbClr val="CACACA"/>
+                      </a:solidFill>
+                      <a:prstDash val="solid"/>
+                      <a:round/>
+                      <a:headEnd type="none" w="med" len="med"/>
+                      <a:tailEnd type="none" w="med" len="med"/>
+                    </a:lnR>
+                    <a:lnT w="6350" cap="flat" cmpd="sng" algn="ctr">
+                      <a:solidFill>
+                        <a:srgbClr val="CACACA"/>
+                      </a:solidFill>
+                      <a:prstDash val="solid"/>
+                      <a:round/>
+                      <a:headEnd type="none" w="med" len="med"/>
+                      <a:tailEnd type="none" w="med" len="med"/>
+                    </a:lnT>
+                    <a:lnB w="6350" cap="flat" cmpd="sng" algn="ctr">
+                      <a:solidFill>
+                        <a:srgbClr val="CACACA"/>
+                      </a:solidFill>
+                      <a:prstDash val="solid"/>
+                      <a:round/>
+                      <a:headEnd type="none" w="med" len="med"/>
+                      <a:tailEnd type="none" w="med" len="med"/>
+                    </a:lnB>
+                    <a:solidFill>
+                      <a:srgbClr val="FFFFFF"/>
+                    </a:solidFill>
+                  </a:tcPr>
+                </a:tc>
+                <a:tc>
+                  <a:txBody>
+                    <a:bodyPr/>
+                    <a:lstStyle/>
+                    <a:p>
+                      <a:pPr algn="ctr" indent="0" marL="0">
+                        <a:buNone/>
+                      </a:pPr>
+                      <a:r>
+                        <a:rPr lang="en-US" sz="1000" dirty="0">
+                          <a:solidFill>
+                            <a:srgbClr val="2B2B2B"/>
+                          </a:solidFill>
+                          <a:latin typeface="Verdana" pitchFamily="34" charset="0"/>
+                          <a:ea typeface="Verdana" pitchFamily="34" charset="-122"/>
+                          <a:cs typeface="Verdana" pitchFamily="34" charset="-120"/>
+                        </a:rPr>
+                        <a:t>2,15 %</a:t>
+                      </a:r>
+                      <a:endParaRPr lang="en-US" sz="1000" dirty="0">
+                        <a:latin typeface="Verdana" charset="0"/>
+                        <a:ea typeface="Verdana" charset="0"/>
+                        <a:cs typeface="Verdana" charset="0"/>
+                      </a:endParaRPr>
+                    </a:p>
+                  </a:txBody>
+                  <a:tcPr marL="91440" marR="91440" marT="45720" marB="45720" anchor="ctr">
+                    <a:lnL w="6350" cap="flat" cmpd="sng" algn="ctr">
+                      <a:solidFill>
+                        <a:srgbClr val="CACACA"/>
+                      </a:solidFill>
+                      <a:prstDash val="solid"/>
+                      <a:round/>
+                      <a:headEnd type="none" w="med" len="med"/>
+                      <a:tailEnd type="none" w="med" len="med"/>
+                    </a:lnL>
+                    <a:lnR w="6350" cap="flat" cmpd="sng" algn="ctr">
+                      <a:solidFill>
+                        <a:srgbClr val="CACACA"/>
+                      </a:solidFill>
+                      <a:prstDash val="solid"/>
+                      <a:round/>
+                      <a:headEnd type="none" w="med" len="med"/>
+                      <a:tailEnd type="none" w="med" len="med"/>
+                    </a:lnR>
+                    <a:lnT w="6350" cap="flat" cmpd="sng" algn="ctr">
+                      <a:solidFill>
+                        <a:srgbClr val="CACACA"/>
+                      </a:solidFill>
+                      <a:prstDash val="solid"/>
+                      <a:round/>
+                      <a:headEnd type="none" w="med" len="med"/>
+                      <a:tailEnd type="none" w="med" len="med"/>
+                    </a:lnT>
+                    <a:lnB w="6350" cap="flat" cmpd="sng" algn="ctr">
+                      <a:solidFill>
+                        <a:srgbClr val="CACACA"/>
+                      </a:solidFill>
+                      <a:prstDash val="solid"/>
+                      <a:round/>
+                      <a:headEnd type="none" w="med" len="med"/>
+                      <a:tailEnd type="none" w="med" len="med"/>
+                    </a:lnB>
+                  </a:tcPr>
+                </a:tc>
+                <a:tc>
+                  <a:txBody>
+                    <a:bodyPr/>
+                    <a:lstStyle/>
+                    <a:p>
+                      <a:pPr algn="ctr" indent="0" marL="0">
+                        <a:buNone/>
+                      </a:pPr>
+                      <a:r>
+                        <a:rPr lang="en-US" sz="1000" dirty="0">
+                          <a:solidFill>
+                            <a:srgbClr val="2B2B2B"/>
+                          </a:solidFill>
+                          <a:latin typeface="Verdana" pitchFamily="34" charset="0"/>
+                          <a:ea typeface="Verdana" pitchFamily="34" charset="-122"/>
+                          <a:cs typeface="Verdana" pitchFamily="34" charset="-120"/>
+                        </a:rPr>
+                        <a:t>31,5 %</a:t>
+                      </a:r>
+                      <a:endParaRPr lang="en-US" sz="1000" dirty="0">
+                        <a:latin typeface="Verdana" charset="0"/>
+                        <a:ea typeface="Verdana" charset="0"/>
+                        <a:cs typeface="Verdana" charset="0"/>
+                      </a:endParaRPr>
+                    </a:p>
+                  </a:txBody>
+                  <a:tcPr marL="91440" marR="91440" marT="45720" marB="45720" anchor="ctr">
+                    <a:lnL w="6350" cap="flat" cmpd="sng" algn="ctr">
+                      <a:solidFill>
+                        <a:srgbClr val="CACACA"/>
+                      </a:solidFill>
+                      <a:prstDash val="solid"/>
+                      <a:round/>
+                      <a:headEnd type="none" w="med" len="med"/>
+                      <a:tailEnd type="none" w="med" len="med"/>
+                    </a:lnL>
+                    <a:lnR w="6350" cap="flat" cmpd="sng" algn="ctr">
+                      <a:solidFill>
+                        <a:srgbClr val="CACACA"/>
+                      </a:solidFill>
+                      <a:prstDash val="solid"/>
+                      <a:round/>
+                      <a:headEnd type="none" w="med" len="med"/>
+                      <a:tailEnd type="none" w="med" len="med"/>
+                    </a:lnR>
+                    <a:lnT w="6350" cap="flat" cmpd="sng" algn="ctr">
+                      <a:solidFill>
+                        <a:srgbClr val="CACACA"/>
+                      </a:solidFill>
+                      <a:prstDash val="solid"/>
+                      <a:round/>
+                      <a:headEnd type="none" w="med" len="med"/>
+                      <a:tailEnd type="none" w="med" len="med"/>
+                    </a:lnT>
+                    <a:lnB w="6350" cap="flat" cmpd="sng" algn="ctr">
+                      <a:solidFill>
+                        <a:srgbClr val="CACACA"/>
+                      </a:solidFill>
+                      <a:prstDash val="solid"/>
+                      <a:round/>
+                      <a:headEnd type="none" w="med" len="med"/>
+                      <a:tailEnd type="none" w="med" len="med"/>
+                    </a:lnB>
+                  </a:tcPr>
+                </a:tc>
+                <a:tc>
+                  <a:txBody>
+                    <a:bodyPr/>
+                    <a:lstStyle/>
+                    <a:p>
+                      <a:pPr algn="ctr" indent="0" marL="0">
+                        <a:buNone/>
+                      </a:pPr>
+                      <a:r>
+                        <a:rPr lang="en-US" sz="1000" dirty="0">
+                          <a:solidFill>
+                            <a:srgbClr val="818181"/>
+                          </a:solidFill>
+                          <a:latin typeface="Verdana" pitchFamily="34" charset="0"/>
+                          <a:ea typeface="Verdana" pitchFamily="34" charset="-122"/>
+                          <a:cs typeface="Verdana" pitchFamily="34" charset="-120"/>
+                        </a:rPr>
+                        <a:t>54,5 %</a:t>
+                      </a:r>
+                      <a:endParaRPr lang="en-US" sz="1000" dirty="0">
+                        <a:latin typeface="Verdana" charset="0"/>
+                        <a:ea typeface="Verdana" charset="0"/>
+                        <a:cs typeface="Verdana" charset="0"/>
+                      </a:endParaRPr>
+                    </a:p>
+                  </a:txBody>
+                  <a:tcPr marL="91440" marR="91440" marT="45720" marB="45720" anchor="ctr">
+                    <a:lnL w="6350" cap="flat" cmpd="sng" algn="ctr">
+                      <a:solidFill>
+                        <a:srgbClr val="CACACA"/>
+                      </a:solidFill>
+                      <a:prstDash val="solid"/>
+                      <a:round/>
+                      <a:headEnd type="none" w="med" len="med"/>
+                      <a:tailEnd type="none" w="med" len="med"/>
+                    </a:lnL>
+                    <a:lnR w="6350" cap="flat" cmpd="sng" algn="ctr">
+                      <a:solidFill>
+                        <a:srgbClr val="CACACA"/>
+                      </a:solidFill>
+                      <a:prstDash val="solid"/>
+                      <a:round/>
+                      <a:headEnd type="none" w="med" len="med"/>
+                      <a:tailEnd type="none" w="med" len="med"/>
+                    </a:lnR>
+                    <a:lnT w="6350" cap="flat" cmpd="sng" algn="ctr">
+                      <a:solidFill>
+                        <a:srgbClr val="CACACA"/>
+                      </a:solidFill>
+                      <a:prstDash val="solid"/>
+                      <a:round/>
+                      <a:headEnd type="none" w="med" len="med"/>
+                      <a:tailEnd type="none" w="med" len="med"/>
+                    </a:lnT>
+                    <a:lnB w="6350" cap="flat" cmpd="sng" algn="ctr">
+                      <a:solidFill>
+                        <a:srgbClr val="CACACA"/>
+                      </a:solidFill>
+                      <a:prstDash val="solid"/>
+                      <a:round/>
+                      <a:headEnd type="none" w="med" len="med"/>
+                      <a:tailEnd type="none" w="med" len="med"/>
+                    </a:lnB>
+                  </a:tcPr>
+                </a:tc>
+                <a:tc>
+                  <a:txBody>
+                    <a:bodyPr/>
+                    <a:lstStyle/>
+                    <a:p>
+                      <a:pPr algn="ctr" indent="0" marL="0">
+                        <a:buNone/>
+                      </a:pPr>
+                      <a:r>
+                        <a:rPr lang="en-US" sz="1000" b="1" dirty="0">
+                          <a:solidFill>
+                            <a:srgbClr val="2B2B2B"/>
+                          </a:solidFill>
+                          <a:latin typeface="Verdana" pitchFamily="34" charset="0"/>
+                          <a:ea typeface="Verdana" pitchFamily="34" charset="-122"/>
+                          <a:cs typeface="Verdana" pitchFamily="34" charset="-120"/>
+                        </a:rPr>
+                        <a:t>35,3 %</a:t>
+                      </a:r>
+                      <a:endParaRPr lang="en-US" sz="1000" dirty="0">
+                        <a:latin typeface="Verdana" charset="0"/>
+                        <a:ea typeface="Verdana" charset="0"/>
+                        <a:cs typeface="Verdana" charset="0"/>
+                      </a:endParaRPr>
+                    </a:p>
+                  </a:txBody>
+                  <a:tcPr marL="91440" marR="91440" marT="45720" marB="45720" anchor="ctr">
+                    <a:lnL w="6350" cap="flat" cmpd="sng" algn="ctr">
+                      <a:solidFill>
+                        <a:srgbClr val="CACACA"/>
+                      </a:solidFill>
+                      <a:prstDash val="solid"/>
+                      <a:round/>
+                      <a:headEnd type="none" w="med" len="med"/>
+                      <a:tailEnd type="none" w="med" len="med"/>
+                    </a:lnL>
+                    <a:lnR w="6350" cap="flat" cmpd="sng" algn="ctr">
+                      <a:solidFill>
+                        <a:srgbClr val="CACACA"/>
+                      </a:solidFill>
+                      <a:prstDash val="solid"/>
+                      <a:round/>
+                      <a:headEnd type="none" w="med" len="med"/>
+                      <a:tailEnd type="none" w="med" len="med"/>
+                    </a:lnR>
+                    <a:lnT w="6350" cap="flat" cmpd="sng" algn="ctr">
+                      <a:solidFill>
+                        <a:srgbClr val="CACACA"/>
+                      </a:solidFill>
+                      <a:prstDash val="solid"/>
+                      <a:round/>
+                      <a:headEnd type="none" w="med" len="med"/>
+                      <a:tailEnd type="none" w="med" len="med"/>
+                    </a:lnT>
+                    <a:lnB w="6350" cap="flat" cmpd="sng" algn="ctr">
+                      <a:solidFill>
+                        <a:srgbClr val="CACACA"/>
+                      </a:solidFill>
+                      <a:prstDash val="solid"/>
+                      <a:round/>
+                      <a:headEnd type="none" w="med" len="med"/>
+                      <a:tailEnd type="none" w="med" len="med"/>
+                    </a:lnB>
+                    <a:solidFill>
+                      <a:srgbClr val="FFFFFF"/>
+                    </a:solidFill>
+                  </a:tcPr>
+                </a:tc>
+                <a:tc>
+                  <a:txBody>
+                    <a:bodyPr/>
+                    <a:lstStyle/>
+                    <a:p>
+                      <a:pPr algn="ctr" indent="0" marL="0">
+                        <a:buNone/>
+                      </a:pPr>
+                      <a:r>
+                        <a:rPr lang="en-US" sz="1000" b="1" dirty="0">
+                          <a:solidFill>
+                            <a:srgbClr val="2B2B2B"/>
+                          </a:solidFill>
+                          <a:latin typeface="Verdana" pitchFamily="34" charset="0"/>
+                          <a:ea typeface="Verdana" pitchFamily="34" charset="-122"/>
+                          <a:cs typeface="Verdana" pitchFamily="34" charset="-120"/>
+                        </a:rPr>
+                        <a:t>−19,2 pp</a:t>
+                      </a:r>
+                      <a:endParaRPr lang="en-US" sz="1000" dirty="0">
+                        <a:latin typeface="Verdana" charset="0"/>
+                        <a:ea typeface="Verdana" charset="0"/>
+                        <a:cs typeface="Verdana" charset="0"/>
+                      </a:endParaRPr>
+                    </a:p>
+                  </a:txBody>
+                  <a:tcPr marL="91440" marR="91440" marT="45720" marB="45720" anchor="ctr">
+                    <a:lnL w="6350" cap="flat" cmpd="sng" algn="ctr">
+                      <a:solidFill>
+                        <a:srgbClr val="CACACA"/>
+                      </a:solidFill>
+                      <a:prstDash val="solid"/>
+                      <a:round/>
+                      <a:headEnd type="none" w="med" len="med"/>
+                      <a:tailEnd type="none" w="med" len="med"/>
+                    </a:lnL>
+                    <a:lnR w="6350" cap="flat" cmpd="sng" algn="ctr">
+                      <a:solidFill>
+                        <a:srgbClr val="CACACA"/>
+                      </a:solidFill>
+                      <a:prstDash val="solid"/>
+                      <a:round/>
+                      <a:headEnd type="none" w="med" len="med"/>
+                      <a:tailEnd type="none" w="med" len="med"/>
+                    </a:lnR>
+                    <a:lnT w="6350" cap="flat" cmpd="sng" algn="ctr">
+                      <a:solidFill>
+                        <a:srgbClr val="CACACA"/>
+                      </a:solidFill>
+                      <a:prstDash val="solid"/>
+                      <a:round/>
+                      <a:headEnd type="none" w="med" len="med"/>
+                      <a:tailEnd type="none" w="med" len="med"/>
+                    </a:lnT>
+                    <a:lnB w="6350" cap="flat" cmpd="sng" algn="ctr">
+                      <a:solidFill>
+                        <a:srgbClr val="CACACA"/>
+                      </a:solidFill>
+                      <a:prstDash val="solid"/>
+                      <a:round/>
+                      <a:headEnd type="none" w="med" len="med"/>
+                      <a:tailEnd type="none" w="med" len="med"/>
+                    </a:lnB>
+                    <a:solidFill>
+                      <a:srgbClr val="FFCCE8"/>
+                    </a:solidFill>
+                  </a:tcPr>
+                </a:tc>
+                <a:tc>
+                  <a:txBody>
+                    <a:bodyPr/>
+                    <a:lstStyle/>
+                    <a:p>
+                      <a:pPr algn="ctr" indent="0" marL="0">
+                        <a:buNone/>
+                      </a:pPr>
+                      <a:r>
+                        <a:rPr lang="en-US" sz="1000" dirty="0">
+                          <a:solidFill>
+                            <a:srgbClr val="818181"/>
+                          </a:solidFill>
+                          <a:latin typeface="Verdana" pitchFamily="34" charset="0"/>
+                          <a:ea typeface="Verdana" pitchFamily="34" charset="-122"/>
+                          <a:cs typeface="Verdana" pitchFamily="34" charset="-120"/>
+                        </a:rPr>
+                        <a:t>74,8 %</a:t>
+                      </a:r>
+                      <a:endParaRPr lang="en-US" sz="1000" dirty="0">
+                        <a:latin typeface="Verdana" charset="0"/>
+                        <a:ea typeface="Verdana" charset="0"/>
+                        <a:cs typeface="Verdana" charset="0"/>
+                      </a:endParaRPr>
+                    </a:p>
+                  </a:txBody>
+                  <a:tcPr marL="91440" marR="91440" marT="45720" marB="45720" anchor="ctr">
+                    <a:lnL w="6350" cap="flat" cmpd="sng" algn="ctr">
+                      <a:solidFill>
+                        <a:srgbClr val="CACACA"/>
+                      </a:solidFill>
+                      <a:prstDash val="solid"/>
+                      <a:round/>
+                      <a:headEnd type="none" w="med" len="med"/>
+                      <a:tailEnd type="none" w="med" len="med"/>
+                    </a:lnL>
+                    <a:lnR w="6350" cap="flat" cmpd="sng" algn="ctr">
+                      <a:solidFill>
+                        <a:srgbClr val="CACACA"/>
+                      </a:solidFill>
+                      <a:prstDash val="solid"/>
+                      <a:round/>
+                      <a:headEnd type="none" w="med" len="med"/>
+                      <a:tailEnd type="none" w="med" len="med"/>
+                    </a:lnR>
+                    <a:lnT w="6350" cap="flat" cmpd="sng" algn="ctr">
+                      <a:solidFill>
+                        <a:srgbClr val="CACACA"/>
+                      </a:solidFill>
+                      <a:prstDash val="solid"/>
+                      <a:round/>
+                      <a:headEnd type="none" w="med" len="med"/>
+                      <a:tailEnd type="none" w="med" len="med"/>
+                    </a:lnT>
+                    <a:lnB w="6350" cap="flat" cmpd="sng" algn="ctr">
+                      <a:solidFill>
+                        <a:srgbClr val="CACACA"/>
+                      </a:solidFill>
+                      <a:prstDash val="solid"/>
+                      <a:round/>
+                      <a:headEnd type="none" w="med" len="med"/>
+                      <a:tailEnd type="none" w="med" len="med"/>
+                    </a:lnB>
+                  </a:tcPr>
+                </a:tc>
+                <a:tc>
+                  <a:txBody>
+                    <a:bodyPr/>
+                    <a:lstStyle/>
+                    <a:p>
+                      <a:pPr algn="ctr" indent="0" marL="0">
+                        <a:buNone/>
+                      </a:pPr>
+                      <a:r>
+                        <a:rPr lang="en-US" sz="1000" dirty="0">
+                          <a:solidFill>
+                            <a:srgbClr val="818181"/>
+                          </a:solidFill>
+                          <a:latin typeface="Verdana" pitchFamily="34" charset="0"/>
+                          <a:ea typeface="Verdana" pitchFamily="34" charset="-122"/>
+                          <a:cs typeface="Verdana" pitchFamily="34" charset="-120"/>
+                        </a:rPr>
+                        <a:t>5,12 %</a:t>
+                      </a:r>
+                      <a:endParaRPr lang="en-US" sz="1000" dirty="0">
+                        <a:latin typeface="Verdana" charset="0"/>
+                        <a:ea typeface="Verdana" charset="0"/>
+                        <a:cs typeface="Verdana" charset="0"/>
+                      </a:endParaRPr>
+                    </a:p>
+                  </a:txBody>
+                  <a:tcPr marL="91440" marR="91440" marT="45720" marB="45720" anchor="ctr">
+                    <a:lnL w="6350" cap="flat" cmpd="sng" algn="ctr">
+                      <a:solidFill>
+                        <a:srgbClr val="CACACA"/>
+                      </a:solidFill>
+                      <a:prstDash val="solid"/>
+                      <a:round/>
+                      <a:headEnd type="none" w="med" len="med"/>
+                      <a:tailEnd type="none" w="med" len="med"/>
+                    </a:lnL>
+                    <a:lnR w="6350" cap="flat" cmpd="sng" algn="ctr">
+                      <a:solidFill>
+                        <a:srgbClr val="CACACA"/>
+                      </a:solidFill>
+                      <a:prstDash val="solid"/>
+                      <a:round/>
+                      <a:headEnd type="none" w="med" len="med"/>
+                      <a:tailEnd type="none" w="med" len="med"/>
+                    </a:lnR>
+                    <a:lnT w="6350" cap="flat" cmpd="sng" algn="ctr">
+                      <a:solidFill>
+                        <a:srgbClr val="CACACA"/>
+                      </a:solidFill>
+                      <a:prstDash val="solid"/>
+                      <a:round/>
+                      <a:headEnd type="none" w="med" len="med"/>
+                      <a:tailEnd type="none" w="med" len="med"/>
+                    </a:lnT>
+                    <a:lnB w="6350" cap="flat" cmpd="sng" algn="ctr">
+                      <a:solidFill>
+                        <a:srgbClr val="CACACA"/>
+                      </a:solidFill>
+                      <a:prstDash val="solid"/>
+                      <a:round/>
+                      <a:headEnd type="none" w="med" len="med"/>
+                      <a:tailEnd type="none" w="med" len="med"/>
+                    </a:lnB>
+                  </a:tcPr>
+                </a:tc>
+              </a:tr>
+              <a:tr h="310896">
+                <a:tc>
+                  <a:txBody>
+                    <a:bodyPr/>
+                    <a:lstStyle/>
+                    <a:p>
+                      <a:pPr algn="l" indent="0" marL="0">
+                        <a:buNone/>
+                      </a:pPr>
+                      <a:r>
+                        <a:rPr lang="en-US" sz="1000" dirty="0">
+                          <a:solidFill>
+                            <a:srgbClr val="2B2B2B"/>
+                          </a:solidFill>
+                          <a:latin typeface="Verdana" pitchFamily="34" charset="0"/>
+                          <a:ea typeface="Verdana" pitchFamily="34" charset="-122"/>
+                          <a:cs typeface="Verdana" pitchFamily="34" charset="-120"/>
+                        </a:rPr>
+                        <a:t>Italia</a:t>
+                      </a:r>
+                      <a:endParaRPr lang="en-US" sz="1000" dirty="0">
+                        <a:latin typeface="Verdana" charset="0"/>
+                        <a:ea typeface="Verdana" charset="0"/>
+                        <a:cs typeface="Verdana" charset="0"/>
+                      </a:endParaRPr>
+                    </a:p>
+                  </a:txBody>
+                  <a:tcPr marL="91440" marR="91440" marT="45720" marB="45720" anchor="ctr">
+                    <a:lnL w="6350" cap="flat" cmpd="sng" algn="ctr">
+                      <a:solidFill>
+                        <a:srgbClr val="CACACA"/>
+                      </a:solidFill>
+                      <a:prstDash val="solid"/>
+                      <a:round/>
+                      <a:headEnd type="none" w="med" len="med"/>
+                      <a:tailEnd type="none" w="med" len="med"/>
+                    </a:lnL>
+                    <a:lnR w="6350" cap="flat" cmpd="sng" algn="ctr">
+                      <a:solidFill>
+                        <a:srgbClr val="CACACA"/>
+                      </a:solidFill>
+                      <a:prstDash val="solid"/>
+                      <a:round/>
+                      <a:headEnd type="none" w="med" len="med"/>
+                      <a:tailEnd type="none" w="med" len="med"/>
+                    </a:lnR>
+                    <a:lnT w="6350" cap="flat" cmpd="sng" algn="ctr">
+                      <a:solidFill>
+                        <a:srgbClr val="CACACA"/>
+                      </a:solidFill>
+                      <a:prstDash val="solid"/>
+                      <a:round/>
+                      <a:headEnd type="none" w="med" len="med"/>
+                      <a:tailEnd type="none" w="med" len="med"/>
+                    </a:lnT>
+                    <a:lnB w="6350" cap="flat" cmpd="sng" algn="ctr">
+                      <a:solidFill>
+                        <a:srgbClr val="CACACA"/>
+                      </a:solidFill>
+                      <a:prstDash val="solid"/>
+                      <a:round/>
+                      <a:headEnd type="none" w="med" len="med"/>
+                      <a:tailEnd type="none" w="med" len="med"/>
+                    </a:lnB>
+                    <a:solidFill>
+                      <a:srgbClr val="FFFFFF"/>
+                    </a:solidFill>
+                  </a:tcPr>
+                </a:tc>
+                <a:tc>
+                  <a:txBody>
+                    <a:bodyPr/>
+                    <a:lstStyle/>
+                    <a:p>
+                      <a:pPr algn="ctr" indent="0" marL="0">
+                        <a:buNone/>
+                      </a:pPr>
+                      <a:r>
+                        <a:rPr lang="en-US" sz="1000" dirty="0">
+                          <a:solidFill>
+                            <a:srgbClr val="2B2B2B"/>
+                          </a:solidFill>
+                          <a:latin typeface="Verdana" pitchFamily="34" charset="0"/>
+                          <a:ea typeface="Verdana" pitchFamily="34" charset="-122"/>
+                          <a:cs typeface="Verdana" pitchFamily="34" charset="-120"/>
+                        </a:rPr>
+                        <a:t>2,26 %</a:t>
+                      </a:r>
+                      <a:endParaRPr lang="en-US" sz="1000" dirty="0">
+                        <a:latin typeface="Verdana" charset="0"/>
+                        <a:ea typeface="Verdana" charset="0"/>
+                        <a:cs typeface="Verdana" charset="0"/>
+                      </a:endParaRPr>
+                    </a:p>
+                  </a:txBody>
+                  <a:tcPr marL="91440" marR="91440" marT="45720" marB="45720" anchor="ctr">
+                    <a:lnL w="6350" cap="flat" cmpd="sng" algn="ctr">
+                      <a:solidFill>
+                        <a:srgbClr val="CACACA"/>
+                      </a:solidFill>
+                      <a:prstDash val="solid"/>
+                      <a:round/>
+                      <a:headEnd type="none" w="med" len="med"/>
+                      <a:tailEnd type="none" w="med" len="med"/>
+                    </a:lnL>
+                    <a:lnR w="6350" cap="flat" cmpd="sng" algn="ctr">
+                      <a:solidFill>
+                        <a:srgbClr val="CACACA"/>
+                      </a:solidFill>
+                      <a:prstDash val="solid"/>
+                      <a:round/>
+                      <a:headEnd type="none" w="med" len="med"/>
+                      <a:tailEnd type="none" w="med" len="med"/>
+                    </a:lnR>
+                    <a:lnT w="6350" cap="flat" cmpd="sng" algn="ctr">
+                      <a:solidFill>
+                        <a:srgbClr val="CACACA"/>
+                      </a:solidFill>
+                      <a:prstDash val="solid"/>
+                      <a:round/>
+                      <a:headEnd type="none" w="med" len="med"/>
+                      <a:tailEnd type="none" w="med" len="med"/>
+                    </a:lnT>
+                    <a:lnB w="6350" cap="flat" cmpd="sng" algn="ctr">
+                      <a:solidFill>
+                        <a:srgbClr val="CACACA"/>
+                      </a:solidFill>
+                      <a:prstDash val="solid"/>
+                      <a:round/>
+                      <a:headEnd type="none" w="med" len="med"/>
+                      <a:tailEnd type="none" w="med" len="med"/>
+                    </a:lnB>
+                  </a:tcPr>
+                </a:tc>
+                <a:tc>
+                  <a:txBody>
+                    <a:bodyPr/>
+                    <a:lstStyle/>
+                    <a:p>
+                      <a:pPr algn="ctr" indent="0" marL="0">
+                        <a:buNone/>
+                      </a:pPr>
+                      <a:r>
+                        <a:rPr lang="en-US" sz="1000" dirty="0">
+                          <a:solidFill>
+                            <a:srgbClr val="2B2B2B"/>
+                          </a:solidFill>
+                          <a:latin typeface="Verdana" pitchFamily="34" charset="0"/>
+                          <a:ea typeface="Verdana" pitchFamily="34" charset="-122"/>
+                          <a:cs typeface="Verdana" pitchFamily="34" charset="-120"/>
+                        </a:rPr>
+                        <a:t>35,6 %</a:t>
+                      </a:r>
+                      <a:endParaRPr lang="en-US" sz="1000" dirty="0">
+                        <a:latin typeface="Verdana" charset="0"/>
+                        <a:ea typeface="Verdana" charset="0"/>
+                        <a:cs typeface="Verdana" charset="0"/>
+                      </a:endParaRPr>
+                    </a:p>
+                  </a:txBody>
+                  <a:tcPr marL="91440" marR="91440" marT="45720" marB="45720" anchor="ctr">
+                    <a:lnL w="6350" cap="flat" cmpd="sng" algn="ctr">
+                      <a:solidFill>
+                        <a:srgbClr val="CACACA"/>
+                      </a:solidFill>
+                      <a:prstDash val="solid"/>
+                      <a:round/>
+                      <a:headEnd type="none" w="med" len="med"/>
+                      <a:tailEnd type="none" w="med" len="med"/>
+                    </a:lnL>
+                    <a:lnR w="6350" cap="flat" cmpd="sng" algn="ctr">
+                      <a:solidFill>
+                        <a:srgbClr val="CACACA"/>
+                      </a:solidFill>
+                      <a:prstDash val="solid"/>
+                      <a:round/>
+                      <a:headEnd type="none" w="med" len="med"/>
+                      <a:tailEnd type="none" w="med" len="med"/>
+                    </a:lnR>
+                    <a:lnT w="6350" cap="flat" cmpd="sng" algn="ctr">
+                      <a:solidFill>
+                        <a:srgbClr val="CACACA"/>
+                      </a:solidFill>
+                      <a:prstDash val="solid"/>
+                      <a:round/>
+                      <a:headEnd type="none" w="med" len="med"/>
+                      <a:tailEnd type="none" w="med" len="med"/>
+                    </a:lnT>
+                    <a:lnB w="6350" cap="flat" cmpd="sng" algn="ctr">
+                      <a:solidFill>
+                        <a:srgbClr val="CACACA"/>
+                      </a:solidFill>
+                      <a:prstDash val="solid"/>
+                      <a:round/>
+                      <a:headEnd type="none" w="med" len="med"/>
+                      <a:tailEnd type="none" w="med" len="med"/>
+                    </a:lnB>
+                  </a:tcPr>
+                </a:tc>
+                <a:tc>
+                  <a:txBody>
+                    <a:bodyPr/>
+                    <a:lstStyle/>
+                    <a:p>
+                      <a:pPr algn="ctr" indent="0" marL="0">
+                        <a:buNone/>
+                      </a:pPr>
+                      <a:r>
+                        <a:rPr lang="en-US" sz="1000" dirty="0">
+                          <a:solidFill>
+                            <a:srgbClr val="818181"/>
+                          </a:solidFill>
+                          <a:latin typeface="Verdana" pitchFamily="34" charset="0"/>
+                          <a:ea typeface="Verdana" pitchFamily="34" charset="-122"/>
+                          <a:cs typeface="Verdana" pitchFamily="34" charset="-120"/>
+                        </a:rPr>
+                        <a:t>62,3 %</a:t>
+                      </a:r>
+                      <a:endParaRPr lang="en-US" sz="1000" dirty="0">
+                        <a:latin typeface="Verdana" charset="0"/>
+                        <a:ea typeface="Verdana" charset="0"/>
+                        <a:cs typeface="Verdana" charset="0"/>
+                      </a:endParaRPr>
+                    </a:p>
+                  </a:txBody>
+                  <a:tcPr marL="91440" marR="91440" marT="45720" marB="45720" anchor="ctr">
+                    <a:lnL w="6350" cap="flat" cmpd="sng" algn="ctr">
+                      <a:solidFill>
+                        <a:srgbClr val="CACACA"/>
+                      </a:solidFill>
+                      <a:prstDash val="solid"/>
+                      <a:round/>
+                      <a:headEnd type="none" w="med" len="med"/>
+                      <a:tailEnd type="none" w="med" len="med"/>
+                    </a:lnL>
+                    <a:lnR w="6350" cap="flat" cmpd="sng" algn="ctr">
+                      <a:solidFill>
+                        <a:srgbClr val="CACACA"/>
+                      </a:solidFill>
+                      <a:prstDash val="solid"/>
+                      <a:round/>
+                      <a:headEnd type="none" w="med" len="med"/>
+                      <a:tailEnd type="none" w="med" len="med"/>
+                    </a:lnR>
+                    <a:lnT w="6350" cap="flat" cmpd="sng" algn="ctr">
+                      <a:solidFill>
+                        <a:srgbClr val="CACACA"/>
+                      </a:solidFill>
+                      <a:prstDash val="solid"/>
+                      <a:round/>
+                      <a:headEnd type="none" w="med" len="med"/>
+                      <a:tailEnd type="none" w="med" len="med"/>
+                    </a:lnT>
+                    <a:lnB w="6350" cap="flat" cmpd="sng" algn="ctr">
+                      <a:solidFill>
+                        <a:srgbClr val="CACACA"/>
+                      </a:solidFill>
+                      <a:prstDash val="solid"/>
+                      <a:round/>
+                      <a:headEnd type="none" w="med" len="med"/>
+                      <a:tailEnd type="none" w="med" len="med"/>
+                    </a:lnB>
+                  </a:tcPr>
+                </a:tc>
+                <a:tc>
+                  <a:txBody>
+                    <a:bodyPr/>
+                    <a:lstStyle/>
+                    <a:p>
+                      <a:pPr algn="ctr" indent="0" marL="0">
+                        <a:buNone/>
+                      </a:pPr>
+                      <a:r>
+                        <a:rPr lang="en-US" sz="1000" b="1" dirty="0">
+                          <a:solidFill>
+                            <a:srgbClr val="2B2B2B"/>
+                          </a:solidFill>
+                          <a:latin typeface="Verdana" pitchFamily="34" charset="0"/>
+                          <a:ea typeface="Verdana" pitchFamily="34" charset="-122"/>
+                          <a:cs typeface="Verdana" pitchFamily="34" charset="-120"/>
+                        </a:rPr>
+                        <a:t>37,7 %</a:t>
+                      </a:r>
+                      <a:endParaRPr lang="en-US" sz="1000" dirty="0">
+                        <a:latin typeface="Verdana" charset="0"/>
+                        <a:ea typeface="Verdana" charset="0"/>
+                        <a:cs typeface="Verdana" charset="0"/>
+                      </a:endParaRPr>
+                    </a:p>
+                  </a:txBody>
+                  <a:tcPr marL="91440" marR="91440" marT="45720" marB="45720" anchor="ctr">
+                    <a:lnL w="6350" cap="flat" cmpd="sng" algn="ctr">
+                      <a:solidFill>
+                        <a:srgbClr val="CACACA"/>
+                      </a:solidFill>
+                      <a:prstDash val="solid"/>
+                      <a:round/>
+                      <a:headEnd type="none" w="med" len="med"/>
+                      <a:tailEnd type="none" w="med" len="med"/>
+                    </a:lnL>
+                    <a:lnR w="6350" cap="flat" cmpd="sng" algn="ctr">
+                      <a:solidFill>
+                        <a:srgbClr val="CACACA"/>
+                      </a:solidFill>
+                      <a:prstDash val="solid"/>
+                      <a:round/>
+                      <a:headEnd type="none" w="med" len="med"/>
+                      <a:tailEnd type="none" w="med" len="med"/>
+                    </a:lnR>
+                    <a:lnT w="6350" cap="flat" cmpd="sng" algn="ctr">
+                      <a:solidFill>
+                        <a:srgbClr val="CACACA"/>
+                      </a:solidFill>
+                      <a:prstDash val="solid"/>
+                      <a:round/>
+                      <a:headEnd type="none" w="med" len="med"/>
+                      <a:tailEnd type="none" w="med" len="med"/>
+                    </a:lnT>
+                    <a:lnB w="6350" cap="flat" cmpd="sng" algn="ctr">
+                      <a:solidFill>
+                        <a:srgbClr val="CACACA"/>
+                      </a:solidFill>
+                      <a:prstDash val="solid"/>
+                      <a:round/>
+                      <a:headEnd type="none" w="med" len="med"/>
+                      <a:tailEnd type="none" w="med" len="med"/>
+                    </a:lnB>
+                    <a:solidFill>
+                      <a:srgbClr val="FFFFFF"/>
+                    </a:solidFill>
+                  </a:tcPr>
+                </a:tc>
+                <a:tc>
+                  <a:txBody>
+                    <a:bodyPr/>
+                    <a:lstStyle/>
+                    <a:p>
+                      <a:pPr algn="ctr" indent="0" marL="0">
+                        <a:buNone/>
+                      </a:pPr>
+                      <a:r>
+                        <a:rPr lang="en-US" sz="1000" b="1" dirty="0">
+                          <a:solidFill>
+                            <a:srgbClr val="2B2B2B"/>
+                          </a:solidFill>
+                          <a:latin typeface="Verdana" pitchFamily="34" charset="0"/>
+                          <a:ea typeface="Verdana" pitchFamily="34" charset="-122"/>
+                          <a:cs typeface="Verdana" pitchFamily="34" charset="-120"/>
+                        </a:rPr>
+                        <a:t>−24,6 pp</a:t>
+                      </a:r>
+                      <a:endParaRPr lang="en-US" sz="1000" dirty="0">
+                        <a:latin typeface="Verdana" charset="0"/>
+                        <a:ea typeface="Verdana" charset="0"/>
+                        <a:cs typeface="Verdana" charset="0"/>
+                      </a:endParaRPr>
+                    </a:p>
+                  </a:txBody>
+                  <a:tcPr marL="91440" marR="91440" marT="45720" marB="45720" anchor="ctr">
+                    <a:lnL w="6350" cap="flat" cmpd="sng" algn="ctr">
+                      <a:solidFill>
+                        <a:srgbClr val="CACACA"/>
+                      </a:solidFill>
+                      <a:prstDash val="solid"/>
+                      <a:round/>
+                      <a:headEnd type="none" w="med" len="med"/>
+                      <a:tailEnd type="none" w="med" len="med"/>
+                    </a:lnL>
+                    <a:lnR w="6350" cap="flat" cmpd="sng" algn="ctr">
+                      <a:solidFill>
+                        <a:srgbClr val="CACACA"/>
+                      </a:solidFill>
+                      <a:prstDash val="solid"/>
+                      <a:round/>
+                      <a:headEnd type="none" w="med" len="med"/>
+                      <a:tailEnd type="none" w="med" len="med"/>
+                    </a:lnR>
+                    <a:lnT w="6350" cap="flat" cmpd="sng" algn="ctr">
+                      <a:solidFill>
+                        <a:srgbClr val="CACACA"/>
+                      </a:solidFill>
+                      <a:prstDash val="solid"/>
+                      <a:round/>
+                      <a:headEnd type="none" w="med" len="med"/>
+                      <a:tailEnd type="none" w="med" len="med"/>
+                    </a:lnT>
+                    <a:lnB w="6350" cap="flat" cmpd="sng" algn="ctr">
+                      <a:solidFill>
+                        <a:srgbClr val="CACACA"/>
+                      </a:solidFill>
+                      <a:prstDash val="solid"/>
+                      <a:round/>
+                      <a:headEnd type="none" w="med" len="med"/>
+                      <a:tailEnd type="none" w="med" len="med"/>
+                    </a:lnB>
+                    <a:solidFill>
+                      <a:srgbClr val="FFCCE8"/>
+                    </a:solidFill>
+                  </a:tcPr>
+                </a:tc>
+                <a:tc>
+                  <a:txBody>
+                    <a:bodyPr/>
+                    <a:lstStyle/>
+                    <a:p>
+                      <a:pPr algn="ctr" indent="0" marL="0">
+                        <a:buNone/>
+                      </a:pPr>
+                      <a:r>
+                        <a:rPr lang="en-US" sz="1000" dirty="0">
+                          <a:solidFill>
+                            <a:srgbClr val="818181"/>
+                          </a:solidFill>
+                          <a:latin typeface="Verdana" pitchFamily="34" charset="0"/>
+                          <a:ea typeface="Verdana" pitchFamily="34" charset="-122"/>
+                          <a:cs typeface="Verdana" pitchFamily="34" charset="-120"/>
+                        </a:rPr>
+                        <a:t>65,6 %</a:t>
+                      </a:r>
+                      <a:endParaRPr lang="en-US" sz="1000" dirty="0">
+                        <a:latin typeface="Verdana" charset="0"/>
+                        <a:ea typeface="Verdana" charset="0"/>
+                        <a:cs typeface="Verdana" charset="0"/>
+                      </a:endParaRPr>
+                    </a:p>
+                  </a:txBody>
+                  <a:tcPr marL="91440" marR="91440" marT="45720" marB="45720" anchor="ctr">
+                    <a:lnL w="6350" cap="flat" cmpd="sng" algn="ctr">
+                      <a:solidFill>
+                        <a:srgbClr val="CACACA"/>
+                      </a:solidFill>
+                      <a:prstDash val="solid"/>
+                      <a:round/>
+                      <a:headEnd type="none" w="med" len="med"/>
+                      <a:tailEnd type="none" w="med" len="med"/>
+                    </a:lnL>
+                    <a:lnR w="6350" cap="flat" cmpd="sng" algn="ctr">
+                      <a:solidFill>
+                        <a:srgbClr val="CACACA"/>
+                      </a:solidFill>
+                      <a:prstDash val="solid"/>
+                      <a:round/>
+                      <a:headEnd type="none" w="med" len="med"/>
+                      <a:tailEnd type="none" w="med" len="med"/>
+                    </a:lnR>
+                    <a:lnT w="6350" cap="flat" cmpd="sng" algn="ctr">
+                      <a:solidFill>
+                        <a:srgbClr val="CACACA"/>
+                      </a:solidFill>
+                      <a:prstDash val="solid"/>
+                      <a:round/>
+                      <a:headEnd type="none" w="med" len="med"/>
+                      <a:tailEnd type="none" w="med" len="med"/>
+                    </a:lnT>
+                    <a:lnB w="6350" cap="flat" cmpd="sng" algn="ctr">
+                      <a:solidFill>
+                        <a:srgbClr val="CACACA"/>
+                      </a:solidFill>
+                      <a:prstDash val="solid"/>
+                      <a:round/>
+                      <a:headEnd type="none" w="med" len="med"/>
+                      <a:tailEnd type="none" w="med" len="med"/>
+                    </a:lnB>
+                  </a:tcPr>
+                </a:tc>
+                <a:tc>
+                  <a:txBody>
+                    <a:bodyPr/>
+                    <a:lstStyle/>
+                    <a:p>
+                      <a:pPr algn="ctr" indent="0" marL="0">
+                        <a:buNone/>
+                      </a:pPr>
+                      <a:r>
+                        <a:rPr lang="en-US" sz="1000" dirty="0">
+                          <a:solidFill>
+                            <a:srgbClr val="818181"/>
+                          </a:solidFill>
+                          <a:latin typeface="Verdana" pitchFamily="34" charset="0"/>
+                          <a:ea typeface="Verdana" pitchFamily="34" charset="-122"/>
+                          <a:cs typeface="Verdana" pitchFamily="34" charset="-120"/>
+                        </a:rPr>
+                        <a:t>4,90 %</a:t>
+                      </a:r>
+                      <a:endParaRPr lang="en-US" sz="1000" dirty="0">
+                        <a:latin typeface="Verdana" charset="0"/>
+                        <a:ea typeface="Verdana" charset="0"/>
+                        <a:cs typeface="Verdana" charset="0"/>
+                      </a:endParaRPr>
+                    </a:p>
+                  </a:txBody>
+                  <a:tcPr marL="91440" marR="91440" marT="45720" marB="45720" anchor="ctr">
+                    <a:lnL w="6350" cap="flat" cmpd="sng" algn="ctr">
+                      <a:solidFill>
+                        <a:srgbClr val="CACACA"/>
+                      </a:solidFill>
+                      <a:prstDash val="solid"/>
+                      <a:round/>
+                      <a:headEnd type="none" w="med" len="med"/>
+                      <a:tailEnd type="none" w="med" len="med"/>
+                    </a:lnL>
+                    <a:lnR w="6350" cap="flat" cmpd="sng" algn="ctr">
+                      <a:solidFill>
+                        <a:srgbClr val="CACACA"/>
+                      </a:solidFill>
+                      <a:prstDash val="solid"/>
+                      <a:round/>
+                      <a:headEnd type="none" w="med" len="med"/>
+                      <a:tailEnd type="none" w="med" len="med"/>
+                    </a:lnR>
+                    <a:lnT w="6350" cap="flat" cmpd="sng" algn="ctr">
+                      <a:solidFill>
+                        <a:srgbClr val="CACACA"/>
+                      </a:solidFill>
+                      <a:prstDash val="solid"/>
+                      <a:round/>
+                      <a:headEnd type="none" w="med" len="med"/>
+                      <a:tailEnd type="none" w="med" len="med"/>
+                    </a:lnT>
+                    <a:lnB w="6350" cap="flat" cmpd="sng" algn="ctr">
+                      <a:solidFill>
+                        <a:srgbClr val="CACACA"/>
+                      </a:solidFill>
+                      <a:prstDash val="solid"/>
+                      <a:round/>
+                      <a:headEnd type="none" w="med" len="med"/>
+                      <a:tailEnd type="none" w="med" len="med"/>
+                    </a:lnB>
+                  </a:tcPr>
+                </a:tc>
+              </a:tr>
+              <a:tr h="310896">
+                <a:tc>
+                  <a:txBody>
+                    <a:bodyPr/>
+                    <a:lstStyle/>
+                    <a:p>
+                      <a:pPr algn="l" indent="0" marL="0">
+                        <a:buNone/>
+                      </a:pPr>
+                      <a:r>
+                        <a:rPr lang="en-US" sz="1000" dirty="0">
+                          <a:solidFill>
+                            <a:srgbClr val="2B2B2B"/>
+                          </a:solidFill>
+                          <a:latin typeface="Verdana" pitchFamily="34" charset="0"/>
+                          <a:ea typeface="Verdana" pitchFamily="34" charset="-122"/>
+                          <a:cs typeface="Verdana" pitchFamily="34" charset="-120"/>
+                        </a:rPr>
+                        <a:t>Portugal</a:t>
+                      </a:r>
+                      <a:endParaRPr lang="en-US" sz="1000" dirty="0">
+                        <a:latin typeface="Verdana" charset="0"/>
+                        <a:ea typeface="Verdana" charset="0"/>
+                        <a:cs typeface="Verdana" charset="0"/>
+                      </a:endParaRPr>
+                    </a:p>
+                  </a:txBody>
+                  <a:tcPr marL="91440" marR="91440" marT="45720" marB="45720" anchor="ctr">
+                    <a:lnL w="6350" cap="flat" cmpd="sng" algn="ctr">
+                      <a:solidFill>
+                        <a:srgbClr val="CACACA"/>
+                      </a:solidFill>
+                      <a:prstDash val="solid"/>
+                      <a:round/>
+                      <a:headEnd type="none" w="med" len="med"/>
+                      <a:tailEnd type="none" w="med" len="med"/>
+                    </a:lnL>
+                    <a:lnR w="6350" cap="flat" cmpd="sng" algn="ctr">
+                      <a:solidFill>
+                        <a:srgbClr val="CACACA"/>
+                      </a:solidFill>
+                      <a:prstDash val="solid"/>
+                      <a:round/>
+                      <a:headEnd type="none" w="med" len="med"/>
+                      <a:tailEnd type="none" w="med" len="med"/>
+                    </a:lnR>
+                    <a:lnT w="6350" cap="flat" cmpd="sng" algn="ctr">
+                      <a:solidFill>
+                        <a:srgbClr val="CACACA"/>
+                      </a:solidFill>
+                      <a:prstDash val="solid"/>
+                      <a:round/>
+                      <a:headEnd type="none" w="med" len="med"/>
+                      <a:tailEnd type="none" w="med" len="med"/>
+                    </a:lnT>
+                    <a:lnB w="6350" cap="flat" cmpd="sng" algn="ctr">
+                      <a:solidFill>
+                        <a:srgbClr val="CACACA"/>
+                      </a:solidFill>
+                      <a:prstDash val="solid"/>
+                      <a:round/>
+                      <a:headEnd type="none" w="med" len="med"/>
+                      <a:tailEnd type="none" w="med" len="med"/>
+                    </a:lnB>
+                    <a:solidFill>
+                      <a:srgbClr val="FFFFFF"/>
+                    </a:solidFill>
+                  </a:tcPr>
+                </a:tc>
+                <a:tc>
+                  <a:txBody>
+                    <a:bodyPr/>
+                    <a:lstStyle/>
+                    <a:p>
+                      <a:pPr algn="ctr" indent="0" marL="0">
+                        <a:buNone/>
+                      </a:pPr>
+                      <a:r>
+                        <a:rPr lang="en-US" sz="1000" dirty="0">
+                          <a:solidFill>
+                            <a:srgbClr val="2B2B2B"/>
+                          </a:solidFill>
+                          <a:latin typeface="Verdana" pitchFamily="34" charset="0"/>
+                          <a:ea typeface="Verdana" pitchFamily="34" charset="-122"/>
+                          <a:cs typeface="Verdana" pitchFamily="34" charset="-120"/>
+                        </a:rPr>
+                        <a:t>1,26 %</a:t>
+                      </a:r>
+                      <a:endParaRPr lang="en-US" sz="1000" dirty="0">
+                        <a:latin typeface="Verdana" charset="0"/>
+                        <a:ea typeface="Verdana" charset="0"/>
+                        <a:cs typeface="Verdana" charset="0"/>
+                      </a:endParaRPr>
+                    </a:p>
+                  </a:txBody>
+                  <a:tcPr marL="91440" marR="91440" marT="45720" marB="45720" anchor="ctr">
+                    <a:lnL w="6350" cap="flat" cmpd="sng" algn="ctr">
+                      <a:solidFill>
+                        <a:srgbClr val="CACACA"/>
+                      </a:solidFill>
+                      <a:prstDash val="solid"/>
+                      <a:round/>
+                      <a:headEnd type="none" w="med" len="med"/>
+                      <a:tailEnd type="none" w="med" len="med"/>
+                    </a:lnL>
+                    <a:lnR w="6350" cap="flat" cmpd="sng" algn="ctr">
+                      <a:solidFill>
+                        <a:srgbClr val="CACACA"/>
+                      </a:solidFill>
+                      <a:prstDash val="solid"/>
+                      <a:round/>
+                      <a:headEnd type="none" w="med" len="med"/>
+                      <a:tailEnd type="none" w="med" len="med"/>
+                    </a:lnR>
+                    <a:lnT w="6350" cap="flat" cmpd="sng" algn="ctr">
+                      <a:solidFill>
+                        <a:srgbClr val="CACACA"/>
+                      </a:solidFill>
+                      <a:prstDash val="solid"/>
+                      <a:round/>
+                      <a:headEnd type="none" w="med" len="med"/>
+                      <a:tailEnd type="none" w="med" len="med"/>
+                    </a:lnT>
+                    <a:lnB w="6350" cap="flat" cmpd="sng" algn="ctr">
+                      <a:solidFill>
+                        <a:srgbClr val="CACACA"/>
+                      </a:solidFill>
+                      <a:prstDash val="solid"/>
+                      <a:round/>
+                      <a:headEnd type="none" w="med" len="med"/>
+                      <a:tailEnd type="none" w="med" len="med"/>
+                    </a:lnB>
+                  </a:tcPr>
+                </a:tc>
+                <a:tc>
+                  <a:txBody>
+                    <a:bodyPr/>
+                    <a:lstStyle/>
+                    <a:p>
+                      <a:pPr algn="ctr" indent="0" marL="0">
+                        <a:buNone/>
+                      </a:pPr>
+                      <a:r>
+                        <a:rPr lang="en-US" sz="1000" dirty="0">
+                          <a:solidFill>
+                            <a:srgbClr val="2B2B2B"/>
+                          </a:solidFill>
+                          <a:latin typeface="Verdana" pitchFamily="34" charset="0"/>
+                          <a:ea typeface="Verdana" pitchFamily="34" charset="-122"/>
+                          <a:cs typeface="Verdana" pitchFamily="34" charset="-120"/>
+                        </a:rPr>
+                        <a:t>40,0 % *</a:t>
+                      </a:r>
+                      <a:endParaRPr lang="en-US" sz="1000" dirty="0">
+                        <a:latin typeface="Verdana" charset="0"/>
+                        <a:ea typeface="Verdana" charset="0"/>
+                        <a:cs typeface="Verdana" charset="0"/>
+                      </a:endParaRPr>
+                    </a:p>
+                  </a:txBody>
+                  <a:tcPr marL="91440" marR="91440" marT="45720" marB="45720" anchor="ctr">
+                    <a:lnL w="6350" cap="flat" cmpd="sng" algn="ctr">
+                      <a:solidFill>
+                        <a:srgbClr val="CACACA"/>
+                      </a:solidFill>
+                      <a:prstDash val="solid"/>
+                      <a:round/>
+                      <a:headEnd type="none" w="med" len="med"/>
+                      <a:tailEnd type="none" w="med" len="med"/>
+                    </a:lnL>
+                    <a:lnR w="6350" cap="flat" cmpd="sng" algn="ctr">
+                      <a:solidFill>
+                        <a:srgbClr val="CACACA"/>
+                      </a:solidFill>
+                      <a:prstDash val="solid"/>
+                      <a:round/>
+                      <a:headEnd type="none" w="med" len="med"/>
+                      <a:tailEnd type="none" w="med" len="med"/>
+                    </a:lnR>
+                    <a:lnT w="6350" cap="flat" cmpd="sng" algn="ctr">
+                      <a:solidFill>
+                        <a:srgbClr val="CACACA"/>
+                      </a:solidFill>
+                      <a:prstDash val="solid"/>
+                      <a:round/>
+                      <a:headEnd type="none" w="med" len="med"/>
+                      <a:tailEnd type="none" w="med" len="med"/>
+                    </a:lnT>
+                    <a:lnB w="6350" cap="flat" cmpd="sng" algn="ctr">
+                      <a:solidFill>
+                        <a:srgbClr val="CACACA"/>
+                      </a:solidFill>
+                      <a:prstDash val="solid"/>
+                      <a:round/>
+                      <a:headEnd type="none" w="med" len="med"/>
+                      <a:tailEnd type="none" w="med" len="med"/>
+                    </a:lnB>
+                  </a:tcPr>
+                </a:tc>
+                <a:tc>
+                  <a:txBody>
+                    <a:bodyPr/>
+                    <a:lstStyle/>
+                    <a:p>
+                      <a:pPr algn="ctr" indent="0" marL="0">
+                        <a:buNone/>
+                      </a:pPr>
+                      <a:r>
+                        <a:rPr lang="en-US" sz="1000" dirty="0">
+                          <a:solidFill>
+                            <a:srgbClr val="818181"/>
+                          </a:solidFill>
+                          <a:latin typeface="Verdana" pitchFamily="34" charset="0"/>
+                          <a:ea typeface="Verdana" pitchFamily="34" charset="-122"/>
+                          <a:cs typeface="Verdana" pitchFamily="34" charset="-120"/>
+                        </a:rPr>
+                        <a:t>59,3 %</a:t>
+                      </a:r>
+                      <a:endParaRPr lang="en-US" sz="1000" dirty="0">
+                        <a:latin typeface="Verdana" charset="0"/>
+                        <a:ea typeface="Verdana" charset="0"/>
+                        <a:cs typeface="Verdana" charset="0"/>
+                      </a:endParaRPr>
+                    </a:p>
+                  </a:txBody>
+                  <a:tcPr marL="91440" marR="91440" marT="45720" marB="45720" anchor="ctr">
+                    <a:lnL w="6350" cap="flat" cmpd="sng" algn="ctr">
+                      <a:solidFill>
+                        <a:srgbClr val="CACACA"/>
+                      </a:solidFill>
+                      <a:prstDash val="solid"/>
+                      <a:round/>
+                      <a:headEnd type="none" w="med" len="med"/>
+                      <a:tailEnd type="none" w="med" len="med"/>
+                    </a:lnL>
+                    <a:lnR w="6350" cap="flat" cmpd="sng" algn="ctr">
+                      <a:solidFill>
+                        <a:srgbClr val="CACACA"/>
+                      </a:solidFill>
+                      <a:prstDash val="solid"/>
+                      <a:round/>
+                      <a:headEnd type="none" w="med" len="med"/>
+                      <a:tailEnd type="none" w="med" len="med"/>
+                    </a:lnR>
+                    <a:lnT w="6350" cap="flat" cmpd="sng" algn="ctr">
+                      <a:solidFill>
+                        <a:srgbClr val="CACACA"/>
+                      </a:solidFill>
+                      <a:prstDash val="solid"/>
+                      <a:round/>
+                      <a:headEnd type="none" w="med" len="med"/>
+                      <a:tailEnd type="none" w="med" len="med"/>
+                    </a:lnT>
+                    <a:lnB w="6350" cap="flat" cmpd="sng" algn="ctr">
+                      <a:solidFill>
+                        <a:srgbClr val="CACACA"/>
+                      </a:solidFill>
+                      <a:prstDash val="solid"/>
+                      <a:round/>
+                      <a:headEnd type="none" w="med" len="med"/>
+                      <a:tailEnd type="none" w="med" len="med"/>
+                    </a:lnB>
+                  </a:tcPr>
+                </a:tc>
+                <a:tc>
+                  <a:txBody>
+                    <a:bodyPr/>
+                    <a:lstStyle/>
+                    <a:p>
+                      <a:pPr algn="ctr" indent="0" marL="0">
+                        <a:buNone/>
+                      </a:pPr>
+                      <a:r>
+                        <a:rPr lang="en-US" sz="1000" b="1" dirty="0">
+                          <a:solidFill>
+                            <a:srgbClr val="2B2B2B"/>
+                          </a:solidFill>
+                          <a:latin typeface="Verdana" pitchFamily="34" charset="0"/>
+                          <a:ea typeface="Verdana" pitchFamily="34" charset="-122"/>
+                          <a:cs typeface="Verdana" pitchFamily="34" charset="-120"/>
+                        </a:rPr>
+                        <a:t>47,5 %</a:t>
+                      </a:r>
+                      <a:endParaRPr lang="en-US" sz="1000" dirty="0">
+                        <a:latin typeface="Verdana" charset="0"/>
+                        <a:ea typeface="Verdana" charset="0"/>
+                        <a:cs typeface="Verdana" charset="0"/>
+                      </a:endParaRPr>
+                    </a:p>
+                  </a:txBody>
+                  <a:tcPr marL="91440" marR="91440" marT="45720" marB="45720" anchor="ctr">
+                    <a:lnL w="6350" cap="flat" cmpd="sng" algn="ctr">
+                      <a:solidFill>
+                        <a:srgbClr val="CACACA"/>
+                      </a:solidFill>
+                      <a:prstDash val="solid"/>
+                      <a:round/>
+                      <a:headEnd type="none" w="med" len="med"/>
+                      <a:tailEnd type="none" w="med" len="med"/>
+                    </a:lnL>
+                    <a:lnR w="6350" cap="flat" cmpd="sng" algn="ctr">
+                      <a:solidFill>
+                        <a:srgbClr val="CACACA"/>
+                      </a:solidFill>
+                      <a:prstDash val="solid"/>
+                      <a:round/>
+                      <a:headEnd type="none" w="med" len="med"/>
+                      <a:tailEnd type="none" w="med" len="med"/>
+                    </a:lnR>
+                    <a:lnT w="6350" cap="flat" cmpd="sng" algn="ctr">
+                      <a:solidFill>
+                        <a:srgbClr val="CACACA"/>
+                      </a:solidFill>
+                      <a:prstDash val="solid"/>
+                      <a:round/>
+                      <a:headEnd type="none" w="med" len="med"/>
+                      <a:tailEnd type="none" w="med" len="med"/>
+                    </a:lnT>
+                    <a:lnB w="6350" cap="flat" cmpd="sng" algn="ctr">
+                      <a:solidFill>
+                        <a:srgbClr val="CACACA"/>
+                      </a:solidFill>
+                      <a:prstDash val="solid"/>
+                      <a:round/>
+                      <a:headEnd type="none" w="med" len="med"/>
+                      <a:tailEnd type="none" w="med" len="med"/>
+                    </a:lnB>
+                    <a:solidFill>
+                      <a:srgbClr val="FFFFFF"/>
+                    </a:solidFill>
+                  </a:tcPr>
+                </a:tc>
+                <a:tc>
+                  <a:txBody>
+                    <a:bodyPr/>
+                    <a:lstStyle/>
+                    <a:p>
+                      <a:pPr algn="ctr" indent="0" marL="0">
+                        <a:buNone/>
+                      </a:pPr>
+                      <a:r>
+                        <a:rPr lang="en-US" sz="1000" b="1" dirty="0">
+                          <a:solidFill>
+                            <a:srgbClr val="2B2B2B"/>
+                          </a:solidFill>
+                          <a:latin typeface="Verdana" pitchFamily="34" charset="0"/>
+                          <a:ea typeface="Verdana" pitchFamily="34" charset="-122"/>
+                          <a:cs typeface="Verdana" pitchFamily="34" charset="-120"/>
+                        </a:rPr>
+                        <a:t>−11,8 pp</a:t>
+                      </a:r>
+                      <a:endParaRPr lang="en-US" sz="1000" dirty="0">
+                        <a:latin typeface="Verdana" charset="0"/>
+                        <a:ea typeface="Verdana" charset="0"/>
+                        <a:cs typeface="Verdana" charset="0"/>
+                      </a:endParaRPr>
+                    </a:p>
+                  </a:txBody>
+                  <a:tcPr marL="91440" marR="91440" marT="45720" marB="45720" anchor="ctr">
+                    <a:lnL w="6350" cap="flat" cmpd="sng" algn="ctr">
+                      <a:solidFill>
+                        <a:srgbClr val="CACACA"/>
+                      </a:solidFill>
+                      <a:prstDash val="solid"/>
+                      <a:round/>
+                      <a:headEnd type="none" w="med" len="med"/>
+                      <a:tailEnd type="none" w="med" len="med"/>
+                    </a:lnL>
+                    <a:lnR w="6350" cap="flat" cmpd="sng" algn="ctr">
+                      <a:solidFill>
+                        <a:srgbClr val="CACACA"/>
+                      </a:solidFill>
+                      <a:prstDash val="solid"/>
+                      <a:round/>
+                      <a:headEnd type="none" w="med" len="med"/>
+                      <a:tailEnd type="none" w="med" len="med"/>
+                    </a:lnR>
+                    <a:lnT w="6350" cap="flat" cmpd="sng" algn="ctr">
+                      <a:solidFill>
+                        <a:srgbClr val="CACACA"/>
+                      </a:solidFill>
+                      <a:prstDash val="solid"/>
+                      <a:round/>
+                      <a:headEnd type="none" w="med" len="med"/>
+                      <a:tailEnd type="none" w="med" len="med"/>
+                    </a:lnT>
+                    <a:lnB w="6350" cap="flat" cmpd="sng" algn="ctr">
+                      <a:solidFill>
+                        <a:srgbClr val="CACACA"/>
+                      </a:solidFill>
+                      <a:prstDash val="solid"/>
+                      <a:round/>
+                      <a:headEnd type="none" w="med" len="med"/>
+                      <a:tailEnd type="none" w="med" len="med"/>
+                    </a:lnB>
+                    <a:solidFill>
+                      <a:srgbClr val="FFD6BA"/>
+                    </a:solidFill>
+                  </a:tcPr>
+                </a:tc>
+                <a:tc>
+                  <a:txBody>
+                    <a:bodyPr/>
+                    <a:lstStyle/>
+                    <a:p>
+                      <a:pPr algn="ctr" indent="0" marL="0">
+                        <a:buNone/>
+                      </a:pPr>
+                      <a:r>
+                        <a:rPr lang="en-US" sz="1000" dirty="0">
+                          <a:solidFill>
+                            <a:srgbClr val="818181"/>
+                          </a:solidFill>
+                          <a:latin typeface="Verdana" pitchFamily="34" charset="0"/>
+                          <a:ea typeface="Verdana" pitchFamily="34" charset="-122"/>
+                          <a:cs typeface="Verdana" pitchFamily="34" charset="-120"/>
+                        </a:rPr>
+                        <a:t>64,8 %</a:t>
+                      </a:r>
+                      <a:endParaRPr lang="en-US" sz="1000" dirty="0">
+                        <a:latin typeface="Verdana" charset="0"/>
+                        <a:ea typeface="Verdana" charset="0"/>
+                        <a:cs typeface="Verdana" charset="0"/>
+                      </a:endParaRPr>
+                    </a:p>
+                  </a:txBody>
+                  <a:tcPr marL="91440" marR="91440" marT="45720" marB="45720" anchor="ctr">
+                    <a:lnL w="6350" cap="flat" cmpd="sng" algn="ctr">
+                      <a:solidFill>
+                        <a:srgbClr val="CACACA"/>
+                      </a:solidFill>
+                      <a:prstDash val="solid"/>
+                      <a:round/>
+                      <a:headEnd type="none" w="med" len="med"/>
+                      <a:tailEnd type="none" w="med" len="med"/>
+                    </a:lnL>
+                    <a:lnR w="6350" cap="flat" cmpd="sng" algn="ctr">
+                      <a:solidFill>
+                        <a:srgbClr val="CACACA"/>
+                      </a:solidFill>
+                      <a:prstDash val="solid"/>
+                      <a:round/>
+                      <a:headEnd type="none" w="med" len="med"/>
+                      <a:tailEnd type="none" w="med" len="med"/>
+                    </a:lnR>
+                    <a:lnT w="6350" cap="flat" cmpd="sng" algn="ctr">
+                      <a:solidFill>
+                        <a:srgbClr val="CACACA"/>
+                      </a:solidFill>
+                      <a:prstDash val="solid"/>
+                      <a:round/>
+                      <a:headEnd type="none" w="med" len="med"/>
+                      <a:tailEnd type="none" w="med" len="med"/>
+                    </a:lnT>
+                    <a:lnB w="6350" cap="flat" cmpd="sng" algn="ctr">
+                      <a:solidFill>
+                        <a:srgbClr val="CACACA"/>
+                      </a:solidFill>
+                      <a:prstDash val="solid"/>
+                      <a:round/>
+                      <a:headEnd type="none" w="med" len="med"/>
+                      <a:tailEnd type="none" w="med" len="med"/>
+                    </a:lnB>
+                  </a:tcPr>
+                </a:tc>
+                <a:tc>
+                  <a:txBody>
+                    <a:bodyPr/>
+                    <a:lstStyle/>
+                    <a:p>
+                      <a:pPr algn="ctr" indent="0" marL="0">
+                        <a:buNone/>
+                      </a:pPr>
+                      <a:r>
+                        <a:rPr lang="en-US" sz="1000" dirty="0">
+                          <a:solidFill>
+                            <a:srgbClr val="818181"/>
+                          </a:solidFill>
+                          <a:latin typeface="Verdana" pitchFamily="34" charset="0"/>
+                          <a:ea typeface="Verdana" pitchFamily="34" charset="-122"/>
+                          <a:cs typeface="Verdana" pitchFamily="34" charset="-120"/>
+                        </a:rPr>
+                        <a:t>4,22 %</a:t>
+                      </a:r>
+                      <a:endParaRPr lang="en-US" sz="1000" dirty="0">
+                        <a:latin typeface="Verdana" charset="0"/>
+                        <a:ea typeface="Verdana" charset="0"/>
+                        <a:cs typeface="Verdana" charset="0"/>
+                      </a:endParaRPr>
+                    </a:p>
+                  </a:txBody>
+                  <a:tcPr marL="91440" marR="91440" marT="45720" marB="45720" anchor="ctr">
+                    <a:lnL w="6350" cap="flat" cmpd="sng" algn="ctr">
+                      <a:solidFill>
+                        <a:srgbClr val="CACACA"/>
+                      </a:solidFill>
+                      <a:prstDash val="solid"/>
+                      <a:round/>
+                      <a:headEnd type="none" w="med" len="med"/>
+                      <a:tailEnd type="none" w="med" len="med"/>
+                    </a:lnL>
+                    <a:lnR w="6350" cap="flat" cmpd="sng" algn="ctr">
+                      <a:solidFill>
+                        <a:srgbClr val="CACACA"/>
+                      </a:solidFill>
+                      <a:prstDash val="solid"/>
+                      <a:round/>
+                      <a:headEnd type="none" w="med" len="med"/>
+                      <a:tailEnd type="none" w="med" len="med"/>
+                    </a:lnR>
+                    <a:lnT w="6350" cap="flat" cmpd="sng" algn="ctr">
+                      <a:solidFill>
+                        <a:srgbClr val="CACACA"/>
+                      </a:solidFill>
+                      <a:prstDash val="solid"/>
+                      <a:round/>
+                      <a:headEnd type="none" w="med" len="med"/>
+                      <a:tailEnd type="none" w="med" len="med"/>
+                    </a:lnT>
+                    <a:lnB w="6350" cap="flat" cmpd="sng" algn="ctr">
+                      <a:solidFill>
+                        <a:srgbClr val="CACACA"/>
+                      </a:solidFill>
+                      <a:prstDash val="solid"/>
+                      <a:round/>
+                      <a:headEnd type="none" w="med" len="med"/>
+                      <a:tailEnd type="none" w="med" len="med"/>
+                    </a:lnB>
+                  </a:tcPr>
+                </a:tc>
+              </a:tr>
+              <a:tr h="310896">
+                <a:tc>
+                  <a:txBody>
+                    <a:bodyPr/>
+                    <a:lstStyle/>
+                    <a:p>
+                      <a:pPr algn="l" indent="0" marL="0">
+                        <a:buNone/>
+                      </a:pPr>
+                      <a:r>
+                        <a:rPr lang="en-US" sz="1000" b="1" dirty="0">
+                          <a:solidFill>
+                            <a:srgbClr val="2B2B2B"/>
+                          </a:solidFill>
+                          <a:latin typeface="Verdana" pitchFamily="34" charset="0"/>
+                          <a:ea typeface="Verdana" pitchFamily="34" charset="-122"/>
+                          <a:cs typeface="Verdana" pitchFamily="34" charset="-120"/>
+                        </a:rPr>
+                        <a:t>P. Bajos</a:t>
+                      </a:r>
+                      <a:endParaRPr lang="en-US" sz="1000" dirty="0">
+                        <a:latin typeface="Verdana" charset="0"/>
+                        <a:ea typeface="Verdana" charset="0"/>
+                        <a:cs typeface="Verdana" charset="0"/>
+                      </a:endParaRPr>
+                    </a:p>
+                  </a:txBody>
+                  <a:tcPr marL="91440" marR="91440" marT="45720" marB="45720" anchor="ctr">
+                    <a:lnL w="6350" cap="flat" cmpd="sng" algn="ctr">
+                      <a:solidFill>
+                        <a:srgbClr val="CACACA"/>
+                      </a:solidFill>
+                      <a:prstDash val="solid"/>
+                      <a:round/>
+                      <a:headEnd type="none" w="med" len="med"/>
+                      <a:tailEnd type="none" w="med" len="med"/>
+                    </a:lnL>
+                    <a:lnR w="6350" cap="flat" cmpd="sng" algn="ctr">
+                      <a:solidFill>
+                        <a:srgbClr val="CACACA"/>
+                      </a:solidFill>
+                      <a:prstDash val="solid"/>
+                      <a:round/>
+                      <a:headEnd type="none" w="med" len="med"/>
+                      <a:tailEnd type="none" w="med" len="med"/>
+                    </a:lnR>
+                    <a:lnT w="6350" cap="flat" cmpd="sng" algn="ctr">
+                      <a:solidFill>
+                        <a:srgbClr val="CACACA"/>
+                      </a:solidFill>
+                      <a:prstDash val="solid"/>
+                      <a:round/>
+                      <a:headEnd type="none" w="med" len="med"/>
+                      <a:tailEnd type="none" w="med" len="med"/>
+                    </a:lnT>
+                    <a:lnB w="6350" cap="flat" cmpd="sng" algn="ctr">
+                      <a:solidFill>
+                        <a:srgbClr val="CACACA"/>
+                      </a:solidFill>
+                      <a:prstDash val="solid"/>
+                      <a:round/>
+                      <a:headEnd type="none" w="med" len="med"/>
+                      <a:tailEnd type="none" w="med" len="med"/>
+                    </a:lnB>
+                    <a:solidFill>
+                      <a:srgbClr val="FFD200"/>
+                    </a:solidFill>
+                  </a:tcPr>
+                </a:tc>
+                <a:tc>
+                  <a:txBody>
+                    <a:bodyPr/>
+                    <a:lstStyle/>
+                    <a:p>
+                      <a:pPr algn="ctr" indent="0" marL="0">
+                        <a:buNone/>
+                      </a:pPr>
+                      <a:r>
+                        <a:rPr lang="en-US" sz="1000" dirty="0">
+                          <a:solidFill>
+                            <a:srgbClr val="2B2B2B"/>
+                          </a:solidFill>
+                          <a:latin typeface="Verdana" pitchFamily="34" charset="0"/>
+                          <a:ea typeface="Verdana" pitchFamily="34" charset="-122"/>
+                          <a:cs typeface="Verdana" pitchFamily="34" charset="-120"/>
+                        </a:rPr>
+                        <a:t>1,18 %</a:t>
+                      </a:r>
+                      <a:endParaRPr lang="en-US" sz="1000" dirty="0">
+                        <a:latin typeface="Verdana" charset="0"/>
+                        <a:ea typeface="Verdana" charset="0"/>
+                        <a:cs typeface="Verdana" charset="0"/>
+                      </a:endParaRPr>
+                    </a:p>
+                  </a:txBody>
+                  <a:tcPr marL="91440" marR="91440" marT="45720" marB="45720" anchor="ctr">
+                    <a:lnL w="6350" cap="flat" cmpd="sng" algn="ctr">
+                      <a:solidFill>
+                        <a:srgbClr val="CACACA"/>
+                      </a:solidFill>
+                      <a:prstDash val="solid"/>
+                      <a:round/>
+                      <a:headEnd type="none" w="med" len="med"/>
+                      <a:tailEnd type="none" w="med" len="med"/>
+                    </a:lnL>
+                    <a:lnR w="6350" cap="flat" cmpd="sng" algn="ctr">
+                      <a:solidFill>
+                        <a:srgbClr val="CACACA"/>
+                      </a:solidFill>
+                      <a:prstDash val="solid"/>
+                      <a:round/>
+                      <a:headEnd type="none" w="med" len="med"/>
+                      <a:tailEnd type="none" w="med" len="med"/>
+                    </a:lnR>
+                    <a:lnT w="6350" cap="flat" cmpd="sng" algn="ctr">
+                      <a:solidFill>
+                        <a:srgbClr val="CACACA"/>
+                      </a:solidFill>
+                      <a:prstDash val="solid"/>
+                      <a:round/>
+                      <a:headEnd type="none" w="med" len="med"/>
+                      <a:tailEnd type="none" w="med" len="med"/>
+                    </a:lnT>
+                    <a:lnB w="6350" cap="flat" cmpd="sng" algn="ctr">
+                      <a:solidFill>
+                        <a:srgbClr val="CACACA"/>
+                      </a:solidFill>
+                      <a:prstDash val="solid"/>
+                      <a:round/>
+                      <a:headEnd type="none" w="med" len="med"/>
+                      <a:tailEnd type="none" w="med" len="med"/>
+                    </a:lnB>
+                  </a:tcPr>
+                </a:tc>
+                <a:tc>
+                  <a:txBody>
+                    <a:bodyPr/>
+                    <a:lstStyle/>
+                    <a:p>
+                      <a:pPr algn="ctr" indent="0" marL="0">
+                        <a:buNone/>
+                      </a:pPr>
+                      <a:r>
+                        <a:rPr lang="en-US" sz="1000" dirty="0">
+                          <a:solidFill>
+                            <a:srgbClr val="2B2B2B"/>
+                          </a:solidFill>
+                          <a:latin typeface="Verdana" pitchFamily="34" charset="0"/>
+                          <a:ea typeface="Verdana" pitchFamily="34" charset="-122"/>
+                          <a:cs typeface="Verdana" pitchFamily="34" charset="-120"/>
+                        </a:rPr>
+                        <a:t>29,7 %</a:t>
+                      </a:r>
+                      <a:endParaRPr lang="en-US" sz="1000" dirty="0">
+                        <a:latin typeface="Verdana" charset="0"/>
+                        <a:ea typeface="Verdana" charset="0"/>
+                        <a:cs typeface="Verdana" charset="0"/>
+                      </a:endParaRPr>
+                    </a:p>
+                  </a:txBody>
+                  <a:tcPr marL="91440" marR="91440" marT="45720" marB="45720" anchor="ctr">
+                    <a:lnL w="6350" cap="flat" cmpd="sng" algn="ctr">
+                      <a:solidFill>
+                        <a:srgbClr val="CACACA"/>
+                      </a:solidFill>
+                      <a:prstDash val="solid"/>
+                      <a:round/>
+                      <a:headEnd type="none" w="med" len="med"/>
+                      <a:tailEnd type="none" w="med" len="med"/>
+                    </a:lnL>
+                    <a:lnR w="6350" cap="flat" cmpd="sng" algn="ctr">
+                      <a:solidFill>
+                        <a:srgbClr val="CACACA"/>
+                      </a:solidFill>
+                      <a:prstDash val="solid"/>
+                      <a:round/>
+                      <a:headEnd type="none" w="med" len="med"/>
+                      <a:tailEnd type="none" w="med" len="med"/>
+                    </a:lnR>
+                    <a:lnT w="6350" cap="flat" cmpd="sng" algn="ctr">
+                      <a:solidFill>
+                        <a:srgbClr val="CACACA"/>
+                      </a:solidFill>
+                      <a:prstDash val="solid"/>
+                      <a:round/>
+                      <a:headEnd type="none" w="med" len="med"/>
+                      <a:tailEnd type="none" w="med" len="med"/>
+                    </a:lnT>
+                    <a:lnB w="6350" cap="flat" cmpd="sng" algn="ctr">
+                      <a:solidFill>
+                        <a:srgbClr val="CACACA"/>
+                      </a:solidFill>
+                      <a:prstDash val="solid"/>
+                      <a:round/>
+                      <a:headEnd type="none" w="med" len="med"/>
+                      <a:tailEnd type="none" w="med" len="med"/>
+                    </a:lnB>
+                  </a:tcPr>
+                </a:tc>
+                <a:tc>
+                  <a:txBody>
+                    <a:bodyPr/>
+                    <a:lstStyle/>
+                    <a:p>
+                      <a:pPr algn="ctr" indent="0" marL="0">
+                        <a:buNone/>
+                      </a:pPr>
+                      <a:r>
+                        <a:rPr lang="en-US" sz="1000" dirty="0">
+                          <a:solidFill>
+                            <a:srgbClr val="818181"/>
+                          </a:solidFill>
+                          <a:latin typeface="Verdana" pitchFamily="34" charset="0"/>
+                          <a:ea typeface="Verdana" pitchFamily="34" charset="-122"/>
+                          <a:cs typeface="Verdana" pitchFamily="34" charset="-120"/>
+                        </a:rPr>
+                        <a:t>43,1 %</a:t>
+                      </a:r>
+                      <a:endParaRPr lang="en-US" sz="1000" dirty="0">
+                        <a:latin typeface="Verdana" charset="0"/>
+                        <a:ea typeface="Verdana" charset="0"/>
+                        <a:cs typeface="Verdana" charset="0"/>
+                      </a:endParaRPr>
+                    </a:p>
+                  </a:txBody>
+                  <a:tcPr marL="91440" marR="91440" marT="45720" marB="45720" anchor="ctr">
+                    <a:lnL w="6350" cap="flat" cmpd="sng" algn="ctr">
+                      <a:solidFill>
+                        <a:srgbClr val="CACACA"/>
+                      </a:solidFill>
+                      <a:prstDash val="solid"/>
+                      <a:round/>
+                      <a:headEnd type="none" w="med" len="med"/>
+                      <a:tailEnd type="none" w="med" len="med"/>
+                    </a:lnL>
+                    <a:lnR w="6350" cap="flat" cmpd="sng" algn="ctr">
+                      <a:solidFill>
+                        <a:srgbClr val="CACACA"/>
+                      </a:solidFill>
+                      <a:prstDash val="solid"/>
+                      <a:round/>
+                      <a:headEnd type="none" w="med" len="med"/>
+                      <a:tailEnd type="none" w="med" len="med"/>
+                    </a:lnR>
+                    <a:lnT w="6350" cap="flat" cmpd="sng" algn="ctr">
+                      <a:solidFill>
+                        <a:srgbClr val="CACACA"/>
+                      </a:solidFill>
+                      <a:prstDash val="solid"/>
+                      <a:round/>
+                      <a:headEnd type="none" w="med" len="med"/>
+                      <a:tailEnd type="none" w="med" len="med"/>
+                    </a:lnT>
+                    <a:lnB w="6350" cap="flat" cmpd="sng" algn="ctr">
+                      <a:solidFill>
+                        <a:srgbClr val="CACACA"/>
+                      </a:solidFill>
+                      <a:prstDash val="solid"/>
+                      <a:round/>
+                      <a:headEnd type="none" w="med" len="med"/>
+                      <a:tailEnd type="none" w="med" len="med"/>
+                    </a:lnB>
+                  </a:tcPr>
+                </a:tc>
+                <a:tc>
+                  <a:txBody>
+                    <a:bodyPr/>
+                    <a:lstStyle/>
+                    <a:p>
+                      <a:pPr algn="ctr" indent="0" marL="0">
+                        <a:buNone/>
+                      </a:pPr>
+                      <a:r>
+                        <a:rPr lang="en-US" sz="1000" b="1" dirty="0">
+                          <a:solidFill>
+                            <a:srgbClr val="2B2B2B"/>
+                          </a:solidFill>
+                          <a:latin typeface="Verdana" pitchFamily="34" charset="0"/>
+                          <a:ea typeface="Verdana" pitchFamily="34" charset="-122"/>
+                          <a:cs typeface="Verdana" pitchFamily="34" charset="-120"/>
+                        </a:rPr>
+                        <a:t>34,9 %</a:t>
+                      </a:r>
+                      <a:endParaRPr lang="en-US" sz="1000" dirty="0">
+                        <a:latin typeface="Verdana" charset="0"/>
+                        <a:ea typeface="Verdana" charset="0"/>
+                        <a:cs typeface="Verdana" charset="0"/>
+                      </a:endParaRPr>
+                    </a:p>
+                  </a:txBody>
+                  <a:tcPr marL="91440" marR="91440" marT="45720" marB="45720" anchor="ctr">
+                    <a:lnL w="6350" cap="flat" cmpd="sng" algn="ctr">
+                      <a:solidFill>
+                        <a:srgbClr val="CACACA"/>
+                      </a:solidFill>
+                      <a:prstDash val="solid"/>
+                      <a:round/>
+                      <a:headEnd type="none" w="med" len="med"/>
+                      <a:tailEnd type="none" w="med" len="med"/>
+                    </a:lnL>
+                    <a:lnR w="6350" cap="flat" cmpd="sng" algn="ctr">
+                      <a:solidFill>
+                        <a:srgbClr val="CACACA"/>
+                      </a:solidFill>
+                      <a:prstDash val="solid"/>
+                      <a:round/>
+                      <a:headEnd type="none" w="med" len="med"/>
+                      <a:tailEnd type="none" w="med" len="med"/>
+                    </a:lnR>
+                    <a:lnT w="6350" cap="flat" cmpd="sng" algn="ctr">
+                      <a:solidFill>
+                        <a:srgbClr val="CACACA"/>
+                      </a:solidFill>
+                      <a:prstDash val="solid"/>
+                      <a:round/>
+                      <a:headEnd type="none" w="med" len="med"/>
+                      <a:tailEnd type="none" w="med" len="med"/>
+                    </a:lnT>
+                    <a:lnB w="6350" cap="flat" cmpd="sng" algn="ctr">
+                      <a:solidFill>
+                        <a:srgbClr val="CACACA"/>
+                      </a:solidFill>
+                      <a:prstDash val="solid"/>
+                      <a:round/>
+                      <a:headEnd type="none" w="med" len="med"/>
+                      <a:tailEnd type="none" w="med" len="med"/>
+                    </a:lnB>
+                    <a:solidFill>
+                      <a:srgbClr val="FFD200"/>
+                    </a:solidFill>
+                  </a:tcPr>
+                </a:tc>
+                <a:tc>
+                  <a:txBody>
+                    <a:bodyPr/>
+                    <a:lstStyle/>
+                    <a:p>
+                      <a:pPr algn="ctr" indent="0" marL="0">
+                        <a:buNone/>
+                      </a:pPr>
+                      <a:r>
+                        <a:rPr lang="en-US" sz="1000" b="1" dirty="0">
+                          <a:solidFill>
+                            <a:srgbClr val="2B2B2B"/>
+                          </a:solidFill>
+                          <a:latin typeface="Verdana" pitchFamily="34" charset="0"/>
+                          <a:ea typeface="Verdana" pitchFamily="34" charset="-122"/>
+                          <a:cs typeface="Verdana" pitchFamily="34" charset="-120"/>
+                        </a:rPr>
+                        <a:t>−8,2 pp</a:t>
+                      </a:r>
+                      <a:endParaRPr lang="en-US" sz="1000" dirty="0">
+                        <a:latin typeface="Verdana" charset="0"/>
+                        <a:ea typeface="Verdana" charset="0"/>
+                        <a:cs typeface="Verdana" charset="0"/>
+                      </a:endParaRPr>
+                    </a:p>
+                  </a:txBody>
+                  <a:tcPr marL="91440" marR="91440" marT="45720" marB="45720" anchor="ctr">
+                    <a:lnL w="6350" cap="flat" cmpd="sng" algn="ctr">
+                      <a:solidFill>
+                        <a:srgbClr val="CACACA"/>
+                      </a:solidFill>
+                      <a:prstDash val="solid"/>
+                      <a:round/>
+                      <a:headEnd type="none" w="med" len="med"/>
+                      <a:tailEnd type="none" w="med" len="med"/>
+                    </a:lnL>
+                    <a:lnR w="6350" cap="flat" cmpd="sng" algn="ctr">
+                      <a:solidFill>
+                        <a:srgbClr val="CACACA"/>
+                      </a:solidFill>
+                      <a:prstDash val="solid"/>
+                      <a:round/>
+                      <a:headEnd type="none" w="med" len="med"/>
+                      <a:tailEnd type="none" w="med" len="med"/>
+                    </a:lnR>
+                    <a:lnT w="6350" cap="flat" cmpd="sng" algn="ctr">
+                      <a:solidFill>
+                        <a:srgbClr val="CACACA"/>
+                      </a:solidFill>
+                      <a:prstDash val="solid"/>
+                      <a:round/>
+                      <a:headEnd type="none" w="med" len="med"/>
+                      <a:tailEnd type="none" w="med" len="med"/>
+                    </a:lnT>
+                    <a:lnB w="6350" cap="flat" cmpd="sng" algn="ctr">
+                      <a:solidFill>
+                        <a:srgbClr val="CACACA"/>
+                      </a:solidFill>
+                      <a:prstDash val="solid"/>
+                      <a:round/>
+                      <a:headEnd type="none" w="med" len="med"/>
+                      <a:tailEnd type="none" w="med" len="med"/>
+                    </a:lnB>
+                    <a:solidFill>
+                      <a:srgbClr val="FFD6BA"/>
+                    </a:solidFill>
+                  </a:tcPr>
+                </a:tc>
+                <a:tc>
+                  <a:txBody>
+                    <a:bodyPr/>
+                    <a:lstStyle/>
+                    <a:p>
+                      <a:pPr algn="ctr" indent="0" marL="0">
+                        <a:buNone/>
+                      </a:pPr>
+                      <a:r>
+                        <a:rPr lang="en-US" sz="1000" dirty="0">
+                          <a:solidFill>
+                            <a:srgbClr val="818181"/>
+                          </a:solidFill>
+                          <a:latin typeface="Verdana" pitchFamily="34" charset="0"/>
+                          <a:ea typeface="Verdana" pitchFamily="34" charset="-122"/>
+                          <a:cs typeface="Verdana" pitchFamily="34" charset="-120"/>
+                        </a:rPr>
+                        <a:t>90,1 %</a:t>
+                      </a:r>
+                      <a:endParaRPr lang="en-US" sz="1000" dirty="0">
+                        <a:latin typeface="Verdana" charset="0"/>
+                        <a:ea typeface="Verdana" charset="0"/>
+                        <a:cs typeface="Verdana" charset="0"/>
+                      </a:endParaRPr>
+                    </a:p>
+                  </a:txBody>
+                  <a:tcPr marL="91440" marR="91440" marT="45720" marB="45720" anchor="ctr">
+                    <a:lnL w="6350" cap="flat" cmpd="sng" algn="ctr">
+                      <a:solidFill>
+                        <a:srgbClr val="CACACA"/>
+                      </a:solidFill>
+                      <a:prstDash val="solid"/>
+                      <a:round/>
+                      <a:headEnd type="none" w="med" len="med"/>
+                      <a:tailEnd type="none" w="med" len="med"/>
+                    </a:lnL>
+                    <a:lnR w="6350" cap="flat" cmpd="sng" algn="ctr">
+                      <a:solidFill>
+                        <a:srgbClr val="CACACA"/>
+                      </a:solidFill>
+                      <a:prstDash val="solid"/>
+                      <a:round/>
+                      <a:headEnd type="none" w="med" len="med"/>
+                      <a:tailEnd type="none" w="med" len="med"/>
+                    </a:lnR>
+                    <a:lnT w="6350" cap="flat" cmpd="sng" algn="ctr">
+                      <a:solidFill>
+                        <a:srgbClr val="CACACA"/>
+                      </a:solidFill>
+                      <a:prstDash val="solid"/>
+                      <a:round/>
+                      <a:headEnd type="none" w="med" len="med"/>
+                      <a:tailEnd type="none" w="med" len="med"/>
+                    </a:lnT>
+                    <a:lnB w="6350" cap="flat" cmpd="sng" algn="ctr">
+                      <a:solidFill>
+                        <a:srgbClr val="CACACA"/>
+                      </a:solidFill>
+                      <a:prstDash val="solid"/>
+                      <a:round/>
+                      <a:headEnd type="none" w="med" len="med"/>
+                      <a:tailEnd type="none" w="med" len="med"/>
+                    </a:lnB>
+                  </a:tcPr>
+                </a:tc>
+                <a:tc>
+                  <a:txBody>
+                    <a:bodyPr/>
+                    <a:lstStyle/>
+                    <a:p>
+                      <a:pPr algn="ctr" indent="0" marL="0">
+                        <a:buNone/>
+                      </a:pPr>
+                      <a:r>
+                        <a:rPr lang="en-US" sz="1000" dirty="0">
+                          <a:solidFill>
+                            <a:srgbClr val="818181"/>
+                          </a:solidFill>
+                          <a:latin typeface="Verdana" pitchFamily="34" charset="0"/>
+                          <a:ea typeface="Verdana" pitchFamily="34" charset="-122"/>
+                          <a:cs typeface="Verdana" pitchFamily="34" charset="-120"/>
+                        </a:rPr>
+                        <a:t>3,13 %</a:t>
+                      </a:r>
+                      <a:endParaRPr lang="en-US" sz="1000" dirty="0">
+                        <a:latin typeface="Verdana" charset="0"/>
+                        <a:ea typeface="Verdana" charset="0"/>
+                        <a:cs typeface="Verdana" charset="0"/>
+                      </a:endParaRPr>
+                    </a:p>
+                  </a:txBody>
+                  <a:tcPr marL="91440" marR="91440" marT="45720" marB="45720" anchor="ctr">
+                    <a:lnL w="6350" cap="flat" cmpd="sng" algn="ctr">
+                      <a:solidFill>
+                        <a:srgbClr val="CACACA"/>
+                      </a:solidFill>
+                      <a:prstDash val="solid"/>
+                      <a:round/>
+                      <a:headEnd type="none" w="med" len="med"/>
+                      <a:tailEnd type="none" w="med" len="med"/>
+                    </a:lnL>
+                    <a:lnR w="6350" cap="flat" cmpd="sng" algn="ctr">
+                      <a:solidFill>
+                        <a:srgbClr val="CACACA"/>
+                      </a:solidFill>
+                      <a:prstDash val="solid"/>
+                      <a:round/>
+                      <a:headEnd type="none" w="med" len="med"/>
+                      <a:tailEnd type="none" w="med" len="med"/>
+                    </a:lnR>
+                    <a:lnT w="6350" cap="flat" cmpd="sng" algn="ctr">
+                      <a:solidFill>
+                        <a:srgbClr val="CACACA"/>
+                      </a:solidFill>
+                      <a:prstDash val="solid"/>
+                      <a:round/>
+                      <a:headEnd type="none" w="med" len="med"/>
+                      <a:tailEnd type="none" w="med" len="med"/>
+                    </a:lnT>
+                    <a:lnB w="6350" cap="flat" cmpd="sng" algn="ctr">
+                      <a:solidFill>
+                        <a:srgbClr val="CACACA"/>
+                      </a:solidFill>
+                      <a:prstDash val="solid"/>
+                      <a:round/>
+                      <a:headEnd type="none" w="med" len="med"/>
+                      <a:tailEnd type="none" w="med" len="med"/>
+                    </a:lnB>
+                  </a:tcPr>
+                </a:tc>
+              </a:tr>
+              <a:tr h="310896">
+                <a:tc>
+                  <a:txBody>
+                    <a:bodyPr/>
+                    <a:lstStyle/>
+                    <a:p>
+                      <a:pPr algn="l" indent="0" marL="0">
+                        <a:buNone/>
+                      </a:pPr>
+                      <a:r>
+                        <a:rPr lang="en-US" sz="1000" dirty="0">
+                          <a:solidFill>
+                            <a:srgbClr val="2B2B2B"/>
+                          </a:solidFill>
+                          <a:latin typeface="Verdana" pitchFamily="34" charset="0"/>
+                          <a:ea typeface="Verdana" pitchFamily="34" charset="-122"/>
+                          <a:cs typeface="Verdana" pitchFamily="34" charset="-120"/>
+                        </a:rPr>
+                        <a:t>Irlanda</a:t>
+                      </a:r>
+                      <a:endParaRPr lang="en-US" sz="1000" dirty="0">
+                        <a:latin typeface="Verdana" charset="0"/>
+                        <a:ea typeface="Verdana" charset="0"/>
+                        <a:cs typeface="Verdana" charset="0"/>
+                      </a:endParaRPr>
+                    </a:p>
+                  </a:txBody>
+                  <a:tcPr marL="91440" marR="91440" marT="45720" marB="45720" anchor="ctr">
+                    <a:lnL w="6350" cap="flat" cmpd="sng" algn="ctr">
+                      <a:solidFill>
+                        <a:srgbClr val="CACACA"/>
+                      </a:solidFill>
+                      <a:prstDash val="solid"/>
+                      <a:round/>
+                      <a:headEnd type="none" w="med" len="med"/>
+                      <a:tailEnd type="none" w="med" len="med"/>
+                    </a:lnL>
+                    <a:lnR w="6350" cap="flat" cmpd="sng" algn="ctr">
+                      <a:solidFill>
+                        <a:srgbClr val="CACACA"/>
+                      </a:solidFill>
+                      <a:prstDash val="solid"/>
+                      <a:round/>
+                      <a:headEnd type="none" w="med" len="med"/>
+                      <a:tailEnd type="none" w="med" len="med"/>
+                    </a:lnR>
+                    <a:lnT w="6350" cap="flat" cmpd="sng" algn="ctr">
+                      <a:solidFill>
+                        <a:srgbClr val="CACACA"/>
+                      </a:solidFill>
+                      <a:prstDash val="solid"/>
+                      <a:round/>
+                      <a:headEnd type="none" w="med" len="med"/>
+                      <a:tailEnd type="none" w="med" len="med"/>
+                    </a:lnT>
+                    <a:lnB w="6350" cap="flat" cmpd="sng" algn="ctr">
+                      <a:solidFill>
+                        <a:srgbClr val="CACACA"/>
+                      </a:solidFill>
+                      <a:prstDash val="solid"/>
+                      <a:round/>
+                      <a:headEnd type="none" w="med" len="med"/>
+                      <a:tailEnd type="none" w="med" len="med"/>
+                    </a:lnB>
+                    <a:solidFill>
+                      <a:srgbClr val="FFFFFF"/>
+                    </a:solidFill>
+                  </a:tcPr>
+                </a:tc>
+                <a:tc>
+                  <a:txBody>
+                    <a:bodyPr/>
+                    <a:lstStyle/>
+                    <a:p>
+                      <a:pPr algn="ctr" indent="0" marL="0">
+                        <a:buNone/>
+                      </a:pPr>
+                      <a:r>
+                        <a:rPr lang="en-US" sz="1000" dirty="0">
+                          <a:solidFill>
+                            <a:srgbClr val="2B2B2B"/>
+                          </a:solidFill>
+                          <a:latin typeface="Verdana" pitchFamily="34" charset="0"/>
+                          <a:ea typeface="Verdana" pitchFamily="34" charset="-122"/>
+                          <a:cs typeface="Verdana" pitchFamily="34" charset="-120"/>
+                        </a:rPr>
+                        <a:t>1,08 %</a:t>
+                      </a:r>
+                      <a:endParaRPr lang="en-US" sz="1000" dirty="0">
+                        <a:latin typeface="Verdana" charset="0"/>
+                        <a:ea typeface="Verdana" charset="0"/>
+                        <a:cs typeface="Verdana" charset="0"/>
+                      </a:endParaRPr>
+                    </a:p>
+                  </a:txBody>
+                  <a:tcPr marL="91440" marR="91440" marT="45720" marB="45720" anchor="ctr">
+                    <a:lnL w="6350" cap="flat" cmpd="sng" algn="ctr">
+                      <a:solidFill>
+                        <a:srgbClr val="CACACA"/>
+                      </a:solidFill>
+                      <a:prstDash val="solid"/>
+                      <a:round/>
+                      <a:headEnd type="none" w="med" len="med"/>
+                      <a:tailEnd type="none" w="med" len="med"/>
+                    </a:lnL>
+                    <a:lnR w="6350" cap="flat" cmpd="sng" algn="ctr">
+                      <a:solidFill>
+                        <a:srgbClr val="CACACA"/>
+                      </a:solidFill>
+                      <a:prstDash val="solid"/>
+                      <a:round/>
+                      <a:headEnd type="none" w="med" len="med"/>
+                      <a:tailEnd type="none" w="med" len="med"/>
+                    </a:lnR>
+                    <a:lnT w="6350" cap="flat" cmpd="sng" algn="ctr">
+                      <a:solidFill>
+                        <a:srgbClr val="CACACA"/>
+                      </a:solidFill>
+                      <a:prstDash val="solid"/>
+                      <a:round/>
+                      <a:headEnd type="none" w="med" len="med"/>
+                      <a:tailEnd type="none" w="med" len="med"/>
+                    </a:lnT>
+                    <a:lnB w="6350" cap="flat" cmpd="sng" algn="ctr">
+                      <a:solidFill>
+                        <a:srgbClr val="CACACA"/>
+                      </a:solidFill>
+                      <a:prstDash val="solid"/>
+                      <a:round/>
+                      <a:headEnd type="none" w="med" len="med"/>
+                      <a:tailEnd type="none" w="med" len="med"/>
+                    </a:lnB>
+                  </a:tcPr>
+                </a:tc>
+                <a:tc>
+                  <a:txBody>
+                    <a:bodyPr/>
+                    <a:lstStyle/>
+                    <a:p>
+                      <a:pPr algn="ctr" indent="0" marL="0">
+                        <a:buNone/>
+                      </a:pPr>
+                      <a:r>
+                        <a:rPr lang="en-US" sz="1000" dirty="0">
+                          <a:solidFill>
+                            <a:srgbClr val="2B2B2B"/>
+                          </a:solidFill>
+                          <a:latin typeface="Verdana" pitchFamily="34" charset="0"/>
+                          <a:ea typeface="Verdana" pitchFamily="34" charset="-122"/>
+                          <a:cs typeface="Verdana" pitchFamily="34" charset="-120"/>
+                        </a:rPr>
+                        <a:t>37,3 %</a:t>
+                      </a:r>
+                      <a:endParaRPr lang="en-US" sz="1000" dirty="0">
+                        <a:latin typeface="Verdana" charset="0"/>
+                        <a:ea typeface="Verdana" charset="0"/>
+                        <a:cs typeface="Verdana" charset="0"/>
+                      </a:endParaRPr>
+                    </a:p>
+                  </a:txBody>
+                  <a:tcPr marL="91440" marR="91440" marT="45720" marB="45720" anchor="ctr">
+                    <a:lnL w="6350" cap="flat" cmpd="sng" algn="ctr">
+                      <a:solidFill>
+                        <a:srgbClr val="CACACA"/>
+                      </a:solidFill>
+                      <a:prstDash val="solid"/>
+                      <a:round/>
+                      <a:headEnd type="none" w="med" len="med"/>
+                      <a:tailEnd type="none" w="med" len="med"/>
+                    </a:lnL>
+                    <a:lnR w="6350" cap="flat" cmpd="sng" algn="ctr">
+                      <a:solidFill>
+                        <a:srgbClr val="CACACA"/>
+                      </a:solidFill>
+                      <a:prstDash val="solid"/>
+                      <a:round/>
+                      <a:headEnd type="none" w="med" len="med"/>
+                      <a:tailEnd type="none" w="med" len="med"/>
+                    </a:lnR>
+                    <a:lnT w="6350" cap="flat" cmpd="sng" algn="ctr">
+                      <a:solidFill>
+                        <a:srgbClr val="CACACA"/>
+                      </a:solidFill>
+                      <a:prstDash val="solid"/>
+                      <a:round/>
+                      <a:headEnd type="none" w="med" len="med"/>
+                      <a:tailEnd type="none" w="med" len="med"/>
+                    </a:lnT>
+                    <a:lnB w="6350" cap="flat" cmpd="sng" algn="ctr">
+                      <a:solidFill>
+                        <a:srgbClr val="CACACA"/>
+                      </a:solidFill>
+                      <a:prstDash val="solid"/>
+                      <a:round/>
+                      <a:headEnd type="none" w="med" len="med"/>
+                      <a:tailEnd type="none" w="med" len="med"/>
+                    </a:lnB>
+                  </a:tcPr>
+                </a:tc>
+                <a:tc>
+                  <a:txBody>
+                    <a:bodyPr/>
+                    <a:lstStyle/>
+                    <a:p>
+                      <a:pPr algn="ctr" indent="0" marL="0">
+                        <a:buNone/>
+                      </a:pPr>
+                      <a:r>
+                        <a:rPr lang="en-US" sz="1000" dirty="0">
+                          <a:solidFill>
+                            <a:srgbClr val="818181"/>
+                          </a:solidFill>
+                          <a:latin typeface="Verdana" pitchFamily="34" charset="0"/>
+                          <a:ea typeface="Verdana" pitchFamily="34" charset="-122"/>
+                          <a:cs typeface="Verdana" pitchFamily="34" charset="-120"/>
+                        </a:rPr>
+                        <a:t>52,7 %</a:t>
+                      </a:r>
+                      <a:endParaRPr lang="en-US" sz="1000" dirty="0">
+                        <a:latin typeface="Verdana" charset="0"/>
+                        <a:ea typeface="Verdana" charset="0"/>
+                        <a:cs typeface="Verdana" charset="0"/>
+                      </a:endParaRPr>
+                    </a:p>
+                  </a:txBody>
+                  <a:tcPr marL="91440" marR="91440" marT="45720" marB="45720" anchor="ctr">
+                    <a:lnL w="6350" cap="flat" cmpd="sng" algn="ctr">
+                      <a:solidFill>
+                        <a:srgbClr val="CACACA"/>
+                      </a:solidFill>
+                      <a:prstDash val="solid"/>
+                      <a:round/>
+                      <a:headEnd type="none" w="med" len="med"/>
+                      <a:tailEnd type="none" w="med" len="med"/>
+                    </a:lnL>
+                    <a:lnR w="6350" cap="flat" cmpd="sng" algn="ctr">
+                      <a:solidFill>
+                        <a:srgbClr val="CACACA"/>
+                      </a:solidFill>
+                      <a:prstDash val="solid"/>
+                      <a:round/>
+                      <a:headEnd type="none" w="med" len="med"/>
+                      <a:tailEnd type="none" w="med" len="med"/>
+                    </a:lnR>
+                    <a:lnT w="6350" cap="flat" cmpd="sng" algn="ctr">
+                      <a:solidFill>
+                        <a:srgbClr val="CACACA"/>
+                      </a:solidFill>
+                      <a:prstDash val="solid"/>
+                      <a:round/>
+                      <a:headEnd type="none" w="med" len="med"/>
+                      <a:tailEnd type="none" w="med" len="med"/>
+                    </a:lnT>
+                    <a:lnB w="6350" cap="flat" cmpd="sng" algn="ctr">
+                      <a:solidFill>
+                        <a:srgbClr val="CACACA"/>
+                      </a:solidFill>
+                      <a:prstDash val="solid"/>
+                      <a:round/>
+                      <a:headEnd type="none" w="med" len="med"/>
+                      <a:tailEnd type="none" w="med" len="med"/>
+                    </a:lnB>
+                  </a:tcPr>
+                </a:tc>
+                <a:tc>
+                  <a:txBody>
+                    <a:bodyPr/>
+                    <a:lstStyle/>
+                    <a:p>
+                      <a:pPr algn="ctr" indent="0" marL="0">
+                        <a:buNone/>
+                      </a:pPr>
+                      <a:r>
+                        <a:rPr lang="en-US" sz="1000" b="1" dirty="0">
+                          <a:solidFill>
+                            <a:srgbClr val="2B2B2B"/>
+                          </a:solidFill>
+                          <a:latin typeface="Verdana" pitchFamily="34" charset="0"/>
+                          <a:ea typeface="Verdana" pitchFamily="34" charset="-122"/>
+                          <a:cs typeface="Verdana" pitchFamily="34" charset="-120"/>
+                        </a:rPr>
+                        <a:t>64,7 %</a:t>
+                      </a:r>
+                      <a:endParaRPr lang="en-US" sz="1000" dirty="0">
+                        <a:latin typeface="Verdana" charset="0"/>
+                        <a:ea typeface="Verdana" charset="0"/>
+                        <a:cs typeface="Verdana" charset="0"/>
+                      </a:endParaRPr>
+                    </a:p>
+                  </a:txBody>
+                  <a:tcPr marL="91440" marR="91440" marT="45720" marB="45720" anchor="ctr">
+                    <a:lnL w="6350" cap="flat" cmpd="sng" algn="ctr">
+                      <a:solidFill>
+                        <a:srgbClr val="CACACA"/>
+                      </a:solidFill>
+                      <a:prstDash val="solid"/>
+                      <a:round/>
+                      <a:headEnd type="none" w="med" len="med"/>
+                      <a:tailEnd type="none" w="med" len="med"/>
+                    </a:lnL>
+                    <a:lnR w="6350" cap="flat" cmpd="sng" algn="ctr">
+                      <a:solidFill>
+                        <a:srgbClr val="CACACA"/>
+                      </a:solidFill>
+                      <a:prstDash val="solid"/>
+                      <a:round/>
+                      <a:headEnd type="none" w="med" len="med"/>
+                      <a:tailEnd type="none" w="med" len="med"/>
+                    </a:lnR>
+                    <a:lnT w="6350" cap="flat" cmpd="sng" algn="ctr">
+                      <a:solidFill>
+                        <a:srgbClr val="CACACA"/>
+                      </a:solidFill>
+                      <a:prstDash val="solid"/>
+                      <a:round/>
+                      <a:headEnd type="none" w="med" len="med"/>
+                      <a:tailEnd type="none" w="med" len="med"/>
+                    </a:lnT>
+                    <a:lnB w="6350" cap="flat" cmpd="sng" algn="ctr">
+                      <a:solidFill>
+                        <a:srgbClr val="CACACA"/>
+                      </a:solidFill>
+                      <a:prstDash val="solid"/>
+                      <a:round/>
+                      <a:headEnd type="none" w="med" len="med"/>
+                      <a:tailEnd type="none" w="med" len="med"/>
+                    </a:lnB>
+                    <a:solidFill>
+                      <a:srgbClr val="FFFFFF"/>
+                    </a:solidFill>
+                  </a:tcPr>
+                </a:tc>
+                <a:tc>
+                  <a:txBody>
+                    <a:bodyPr/>
+                    <a:lstStyle/>
+                    <a:p>
+                      <a:pPr algn="ctr" indent="0" marL="0">
+                        <a:buNone/>
+                      </a:pPr>
+                      <a:r>
+                        <a:rPr lang="en-US" sz="1000" b="1" dirty="0">
+                          <a:solidFill>
+                            <a:srgbClr val="2B2B2B"/>
+                          </a:solidFill>
+                          <a:latin typeface="Verdana" pitchFamily="34" charset="0"/>
+                          <a:ea typeface="Verdana" pitchFamily="34" charset="-122"/>
+                          <a:cs typeface="Verdana" pitchFamily="34" charset="-120"/>
+                        </a:rPr>
+                        <a:t>+12,0 pp</a:t>
+                      </a:r>
+                      <a:endParaRPr lang="en-US" sz="1000" dirty="0">
+                        <a:latin typeface="Verdana" charset="0"/>
+                        <a:ea typeface="Verdana" charset="0"/>
+                        <a:cs typeface="Verdana" charset="0"/>
+                      </a:endParaRPr>
+                    </a:p>
+                  </a:txBody>
+                  <a:tcPr marL="91440" marR="91440" marT="45720" marB="45720" anchor="ctr">
+                    <a:lnL w="6350" cap="flat" cmpd="sng" algn="ctr">
+                      <a:solidFill>
+                        <a:srgbClr val="CACACA"/>
+                      </a:solidFill>
+                      <a:prstDash val="solid"/>
+                      <a:round/>
+                      <a:headEnd type="none" w="med" len="med"/>
+                      <a:tailEnd type="none" w="med" len="med"/>
+                    </a:lnL>
+                    <a:lnR w="6350" cap="flat" cmpd="sng" algn="ctr">
+                      <a:solidFill>
+                        <a:srgbClr val="CACACA"/>
+                      </a:solidFill>
+                      <a:prstDash val="solid"/>
+                      <a:round/>
+                      <a:headEnd type="none" w="med" len="med"/>
+                      <a:tailEnd type="none" w="med" len="med"/>
+                    </a:lnR>
+                    <a:lnT w="6350" cap="flat" cmpd="sng" algn="ctr">
+                      <a:solidFill>
+                        <a:srgbClr val="CACACA"/>
+                      </a:solidFill>
+                      <a:prstDash val="solid"/>
+                      <a:round/>
+                      <a:headEnd type="none" w="med" len="med"/>
+                      <a:tailEnd type="none" w="med" len="med"/>
+                    </a:lnT>
+                    <a:lnB w="6350" cap="flat" cmpd="sng" algn="ctr">
+                      <a:solidFill>
+                        <a:srgbClr val="CACACA"/>
+                      </a:solidFill>
+                      <a:prstDash val="solid"/>
+                      <a:round/>
+                      <a:headEnd type="none" w="med" len="med"/>
+                      <a:tailEnd type="none" w="med" len="med"/>
+                    </a:lnB>
+                    <a:solidFill>
+                      <a:srgbClr val="FFD6BA"/>
+                    </a:solidFill>
+                  </a:tcPr>
+                </a:tc>
+                <a:tc>
+                  <a:txBody>
+                    <a:bodyPr/>
+                    <a:lstStyle/>
+                    <a:p>
+                      <a:pPr algn="ctr" indent="0" marL="0">
+                        <a:buNone/>
+                      </a:pPr>
+                      <a:r>
+                        <a:rPr lang="en-US" sz="1000" dirty="0">
+                          <a:solidFill>
+                            <a:srgbClr val="818181"/>
+                          </a:solidFill>
+                          <a:latin typeface="Verdana" pitchFamily="34" charset="0"/>
+                          <a:ea typeface="Verdana" pitchFamily="34" charset="-122"/>
+                          <a:cs typeface="Verdana" pitchFamily="34" charset="-120"/>
+                        </a:rPr>
+                        <a:t>86,1 %</a:t>
+                      </a:r>
+                      <a:endParaRPr lang="en-US" sz="1000" dirty="0">
+                        <a:latin typeface="Verdana" charset="0"/>
+                        <a:ea typeface="Verdana" charset="0"/>
+                        <a:cs typeface="Verdana" charset="0"/>
+                      </a:endParaRPr>
+                    </a:p>
+                  </a:txBody>
+                  <a:tcPr marL="91440" marR="91440" marT="45720" marB="45720" anchor="ctr">
+                    <a:lnL w="6350" cap="flat" cmpd="sng" algn="ctr">
+                      <a:solidFill>
+                        <a:srgbClr val="CACACA"/>
+                      </a:solidFill>
+                      <a:prstDash val="solid"/>
+                      <a:round/>
+                      <a:headEnd type="none" w="med" len="med"/>
+                      <a:tailEnd type="none" w="med" len="med"/>
+                    </a:lnL>
+                    <a:lnR w="6350" cap="flat" cmpd="sng" algn="ctr">
+                      <a:solidFill>
+                        <a:srgbClr val="CACACA"/>
+                      </a:solidFill>
+                      <a:prstDash val="solid"/>
+                      <a:round/>
+                      <a:headEnd type="none" w="med" len="med"/>
+                      <a:tailEnd type="none" w="med" len="med"/>
+                    </a:lnR>
+                    <a:lnT w="6350" cap="flat" cmpd="sng" algn="ctr">
+                      <a:solidFill>
+                        <a:srgbClr val="CACACA"/>
+                      </a:solidFill>
+                      <a:prstDash val="solid"/>
+                      <a:round/>
+                      <a:headEnd type="none" w="med" len="med"/>
+                      <a:tailEnd type="none" w="med" len="med"/>
+                    </a:lnT>
+                    <a:lnB w="6350" cap="flat" cmpd="sng" algn="ctr">
+                      <a:solidFill>
+                        <a:srgbClr val="CACACA"/>
+                      </a:solidFill>
+                      <a:prstDash val="solid"/>
+                      <a:round/>
+                      <a:headEnd type="none" w="med" len="med"/>
+                      <a:tailEnd type="none" w="med" len="med"/>
+                    </a:lnB>
+                  </a:tcPr>
+                </a:tc>
+                <a:tc>
+                  <a:txBody>
+                    <a:bodyPr/>
+                    <a:lstStyle/>
+                    <a:p>
+                      <a:pPr algn="ctr" indent="0" marL="0">
+                        <a:buNone/>
+                      </a:pPr>
+                      <a:r>
+                        <a:rPr lang="en-US" sz="1000" dirty="0">
+                          <a:solidFill>
+                            <a:srgbClr val="818181"/>
+                          </a:solidFill>
+                          <a:latin typeface="Verdana" pitchFamily="34" charset="0"/>
+                          <a:ea typeface="Verdana" pitchFamily="34" charset="-122"/>
+                          <a:cs typeface="Verdana" pitchFamily="34" charset="-120"/>
+                        </a:rPr>
+                        <a:t>3,77 %</a:t>
+                      </a:r>
+                      <a:endParaRPr lang="en-US" sz="1000" dirty="0">
+                        <a:latin typeface="Verdana" charset="0"/>
+                        <a:ea typeface="Verdana" charset="0"/>
+                        <a:cs typeface="Verdana" charset="0"/>
+                      </a:endParaRPr>
+                    </a:p>
+                  </a:txBody>
+                  <a:tcPr marL="91440" marR="91440" marT="45720" marB="45720" anchor="ctr">
+                    <a:lnL w="6350" cap="flat" cmpd="sng" algn="ctr">
+                      <a:solidFill>
+                        <a:srgbClr val="CACACA"/>
+                      </a:solidFill>
+                      <a:prstDash val="solid"/>
+                      <a:round/>
+                      <a:headEnd type="none" w="med" len="med"/>
+                      <a:tailEnd type="none" w="med" len="med"/>
+                    </a:lnL>
+                    <a:lnR w="6350" cap="flat" cmpd="sng" algn="ctr">
+                      <a:solidFill>
+                        <a:srgbClr val="CACACA"/>
+                      </a:solidFill>
+                      <a:prstDash val="solid"/>
+                      <a:round/>
+                      <a:headEnd type="none" w="med" len="med"/>
+                      <a:tailEnd type="none" w="med" len="med"/>
+                    </a:lnR>
+                    <a:lnT w="6350" cap="flat" cmpd="sng" algn="ctr">
+                      <a:solidFill>
+                        <a:srgbClr val="CACACA"/>
+                      </a:solidFill>
+                      <a:prstDash val="solid"/>
+                      <a:round/>
+                      <a:headEnd type="none" w="med" len="med"/>
+                      <a:tailEnd type="none" w="med" len="med"/>
+                    </a:lnT>
+                    <a:lnB w="6350" cap="flat" cmpd="sng" algn="ctr">
+                      <a:solidFill>
+                        <a:srgbClr val="CACACA"/>
+                      </a:solidFill>
+                      <a:prstDash val="solid"/>
+                      <a:round/>
+                      <a:headEnd type="none" w="med" len="med"/>
+                      <a:tailEnd type="none" w="med" len="med"/>
+                    </a:lnB>
+                  </a:tcPr>
+                </a:tc>
+              </a:tr>
+            </a:tbl>
+          </a:graphicData>
+        </a:graphic>
+      </p:graphicFrame>
+      <p:sp>
+        <p:nvSpPr>
+          <p:cNvPr id="6" name="Shape 3"/>
+          <p:cNvSpPr/>
+          <p:nvPr/>
+        </p:nvSpPr>
+        <p:spPr>
+          <a:xfrm>
+            <a:off x="621792" y="4297680"/>
+            <a:ext cx="5321808" cy="1664208"/>
+          </a:xfrm>
+          <a:prstGeom prst="roundRect">
+            <a:avLst>
+              <a:gd name="adj" fmla="val 2198"/>
+            </a:avLst>
+          </a:prstGeom>
+          <a:solidFill>
+            <a:srgbClr val="FFF4C2"/>
+          </a:solidFill>
+          <a:ln w="12700">
+            <a:solidFill>
+              <a:srgbClr val="FFE066"/>
+            </a:solidFill>
+            <a:prstDash val="solid"/>
+          </a:ln>
+        </p:spPr>
+      </p:sp>
+      <p:sp>
+        <p:nvSpPr>
+          <p:cNvPr id="7" name="Shape 4"/>
+          <p:cNvSpPr/>
+          <p:nvPr/>
+        </p:nvSpPr>
+        <p:spPr>
+          <a:xfrm>
+            <a:off x="621792" y="4297680"/>
+            <a:ext cx="64008" cy="1664208"/>
+          </a:xfrm>
+          <a:prstGeom prst="rect">
+            <a:avLst/>
+          </a:prstGeom>
+          <a:solidFill>
+            <a:srgbClr val="F56600"/>
+          </a:solidFill>
+          <a:ln w="12700">
+            <a:solidFill>
+              <a:srgbClr val="F56600"/>
+            </a:solidFill>
+            <a:prstDash val="solid"/>
+          </a:ln>
+        </p:spPr>
+      </p:sp>
+      <p:sp>
+        <p:nvSpPr>
+          <p:cNvPr id="8" name="Text 5"/>
+          <p:cNvSpPr txBox="1"/>
+          <p:nvPr/>
+        </p:nvSpPr>
+        <p:spPr>
+          <a:xfrm>
+            <a:off x="841248" y="4389120"/>
+            <a:ext cx="4937760" cy="219456"/>
+          </a:xfrm>
+          <a:prstGeom prst="rect">
+            <a:avLst/>
+          </a:prstGeom>
+          <a:noFill/>
+          <a:ln/>
+        </p:spPr>
+        <p:txBody>
+          <a:bodyPr wrap="square" lIns="0" tIns="0" rIns="0" bIns="0" rtlCol="0" anchor="ctr"/>
+          <a:lstStyle/>
+          <a:p>
+            <a:pPr indent="0" marL="0">
+              <a:buNone/>
+            </a:pPr>
+            <a:r>
+              <a:rPr lang="en-US" sz="1100" b="1" dirty="0">
+                <a:solidFill>
+                  <a:srgbClr val="2B2B2B"/>
+                </a:solidFill>
+                <a:latin typeface="Verdana" pitchFamily="34" charset="0"/>
+                <a:ea typeface="Verdana" pitchFamily="34" charset="-122"/>
+                <a:cs typeface="Verdana" pitchFamily="34" charset="-120"/>
+              </a:rPr>
+              <a:t>Países Bajos: mitad garantía, mitad selección</a:t>
+            </a:r>
+            <a:endParaRPr lang="en-US" sz="1100" dirty="0"/>
+          </a:p>
+        </p:txBody>
+      </p:sp>
+      <p:sp>
+        <p:nvSpPr>
+          <p:cNvPr id="9" name="Text 6"/>
+          <p:cNvSpPr txBox="1"/>
+          <p:nvPr/>
+        </p:nvSpPr>
+        <p:spPr>
+          <a:xfrm>
+            <a:off x="841248" y="4626864"/>
+            <a:ext cx="4937760" cy="1225296"/>
+          </a:xfrm>
+          <a:prstGeom prst="rect">
+            <a:avLst/>
+          </a:prstGeom>
+          <a:noFill/>
+          <a:ln/>
+        </p:spPr>
+        <p:txBody>
+          <a:bodyPr wrap="square" lIns="0" tIns="0" rIns="0" bIns="0" rtlCol="0" anchor="ctr"/>
+          <a:lstStyle/>
+          <a:p>
+            <a:pPr indent="0" marL="0">
+              <a:buNone/>
+            </a:pPr>
+            <a:r>
+              <a:rPr lang="en-US" sz="850" dirty="0">
+                <a:solidFill>
+                  <a:srgbClr val="2B2B2B"/>
+                </a:solidFill>
+                <a:latin typeface="Verdana" pitchFamily="34" charset="0"/>
+                <a:ea typeface="Verdana" pitchFamily="34" charset="-122"/>
+                <a:cs typeface="Verdana" pitchFamily="34" charset="-120"/>
+              </a:rPr>
+              <a:t>Consume 12,9 pp menos que España: 53 % por la LGD y 41 % por la PD. El reparto aguanta el tamaño de empresa (52 a 54 % la LGD) y solo se mueve con el vencimiento (47 % a un año, 60 % a cinco). Los dos inputs están corroborados fuera del modelo: tasa de recuperación concursal del 90,1 %, la más alta de los siete, y el NPL de PYME más bajo (3,13 %). Bajo IRB la garantía no compite con el modelo: entra dentro, por la LGD.</a:t>
+            </a:r>
+            <a:endParaRPr lang="en-US" sz="850" dirty="0"/>
+          </a:p>
+        </p:txBody>
+      </p:sp>
+      <p:sp>
+        <p:nvSpPr>
+          <p:cNvPr id="10" name="Shape 7"/>
+          <p:cNvSpPr/>
+          <p:nvPr/>
+        </p:nvSpPr>
+        <p:spPr>
+          <a:xfrm>
+            <a:off x="6245352" y="4297680"/>
+            <a:ext cx="5321808" cy="1664208"/>
+          </a:xfrm>
+          <a:prstGeom prst="roundRect">
+            <a:avLst>
+              <a:gd name="adj" fmla="val 2198"/>
+            </a:avLst>
+          </a:prstGeom>
+          <a:solidFill>
+            <a:srgbClr val="FFD6BA"/>
+          </a:solidFill>
+          <a:ln w="12700">
+            <a:solidFill>
+              <a:srgbClr val="FFD6BA"/>
+            </a:solidFill>
+            <a:prstDash val="solid"/>
+          </a:ln>
+        </p:spPr>
+      </p:sp>
+      <p:sp>
+        <p:nvSpPr>
+          <p:cNvPr id="11" name="Shape 8"/>
+          <p:cNvSpPr/>
+          <p:nvPr/>
+        </p:nvSpPr>
+        <p:spPr>
+          <a:xfrm>
+            <a:off x="6245352" y="4297680"/>
+            <a:ext cx="64008" cy="1664208"/>
+          </a:xfrm>
+          <a:prstGeom prst="rect">
+            <a:avLst/>
+          </a:prstGeom>
+          <a:solidFill>
+            <a:srgbClr val="F56600"/>
+          </a:solidFill>
+          <a:ln w="12700">
+            <a:solidFill>
+              <a:srgbClr val="F56600"/>
+            </a:solidFill>
+            <a:prstDash val="solid"/>
+          </a:ln>
+        </p:spPr>
+      </p:sp>
+      <p:sp>
+        <p:nvSpPr>
+          <p:cNvPr id="12" name="Text 9"/>
+          <p:cNvSpPr txBox="1"/>
+          <p:nvPr/>
+        </p:nvSpPr>
+        <p:spPr>
+          <a:xfrm>
+            <a:off x="6464808" y="4389120"/>
+            <a:ext cx="4937760" cy="219456"/>
+          </a:xfrm>
+          <a:prstGeom prst="rect">
+            <a:avLst/>
+          </a:prstGeom>
+          <a:noFill/>
+          <a:ln/>
+        </p:spPr>
+        <p:txBody>
+          <a:bodyPr wrap="square" lIns="0" tIns="0" rIns="0" bIns="0" rtlCol="0" anchor="ctr"/>
+          <a:lstStyle/>
+          <a:p>
+            <a:pPr indent="0" marL="0">
+              <a:buNone/>
+            </a:pPr>
+            <a:r>
+              <a:rPr lang="en-US" sz="1100" b="1" dirty="0">
+                <a:solidFill>
+                  <a:srgbClr val="2B2B2B"/>
+                </a:solidFill>
+                <a:latin typeface="Verdana" pitchFamily="34" charset="0"/>
+                <a:ea typeface="Verdana" pitchFamily="34" charset="-122"/>
+                <a:cs typeface="Verdana" pitchFamily="34" charset="-120"/>
+              </a:rPr>
+              <a:t>Lo que la fórmula no explica</a:t>
+            </a:r>
+            <a:endParaRPr lang="en-US" sz="1100" dirty="0"/>
+          </a:p>
+        </p:txBody>
+      </p:sp>
+      <p:sp>
+        <p:nvSpPr>
+          <p:cNvPr id="13" name="Text 10"/>
+          <p:cNvSpPr txBox="1"/>
+          <p:nvPr/>
+        </p:nvSpPr>
+        <p:spPr>
+          <a:xfrm>
+            <a:off x="6464808" y="4626864"/>
+            <a:ext cx="4937760" cy="1225296"/>
+          </a:xfrm>
+          <a:prstGeom prst="rect">
+            <a:avLst/>
+          </a:prstGeom>
+          <a:noFill/>
+          <a:ln/>
+        </p:spPr>
+        <p:txBody>
+          <a:bodyPr wrap="square" lIns="0" tIns="0" rIns="0" bIns="0" rtlCol="0" anchor="ctr"/>
+          <a:lstStyle/>
+          <a:p>
+            <a:pPr indent="0" marL="0">
+              <a:buNone/>
+            </a:pPr>
+            <a:r>
+              <a:rPr lang="en-US" sz="850" dirty="0">
+                <a:solidFill>
+                  <a:srgbClr val="2B2B2B"/>
+                </a:solidFill>
+                <a:latin typeface="Verdana" pitchFamily="34" charset="0"/>
+                <a:ea typeface="Verdana" pitchFamily="34" charset="-122"/>
+                <a:cs typeface="Verdana" pitchFamily="34" charset="-120"/>
+              </a:rPr>
+              <a:t>España es el único país donde la densidad observada coincide con la que da la fórmula (55,4 % frente a 56,0 %). En los demás el agregado pondera hasta 25 pp por debajo. Cuidado al leerlo: la PD y la LGD son MEDIANAS de entidades y la densidad es media ponderada por volumen, así que parte del residuo es esa asimetría y no comportamiento del modelo. No se puede separar con lo publicado.</a:t>
+            </a:r>
+            <a:endParaRPr lang="en-US" sz="850" dirty="0"/>
+          </a:p>
+        </p:txBody>
+      </p:sp>
+      <p:sp>
+        <p:nvSpPr>
+          <p:cNvPr id="14" name="Text 11"/>
+          <p:cNvSpPr txBox="1"/>
+          <p:nvPr/>
+        </p:nvSpPr>
+        <p:spPr>
+          <a:xfrm>
+            <a:off x="621792" y="6053328"/>
+            <a:ext cx="10945368" cy="475488"/>
+          </a:xfrm>
+          <a:prstGeom prst="rect">
+            <a:avLst/>
+          </a:prstGeom>
+          <a:noFill/>
+          <a:ln/>
+        </p:spPr>
+        <p:txBody>
+          <a:bodyPr wrap="square" lIns="0" tIns="0" rIns="0" bIns="0" rtlCol="0" anchor="ctr"/>
+          <a:lstStyle/>
+          <a:p>
+            <a:pPr indent="0" marL="0">
+              <a:buNone/>
+            </a:pPr>
+            <a:r>
+              <a:rPr lang="en-US" sz="700" i="1" dirty="0">
+                <a:solidFill>
+                  <a:srgbClr val="818181"/>
+                </a:solidFill>
+                <a:latin typeface="Verdana" pitchFamily="34" charset="0"/>
+                <a:ea typeface="Verdana" pitchFamily="34" charset="-122"/>
+                <a:cs typeface="Verdana" pitchFamily="34" charset="-120"/>
+              </a:rPr>
+              <a:t>PD y LGD: EBA, COREP C 9.02, clase «Corporates – of which SME», mediana de entidades declarantes, 2026-Q1. Densidad IRB observada: EBA, EU-wide Transparency Exercise, junio 2025, Portfolio = 2. Fórmula del art. 153 CRR con ajuste PYME del 153.4 y factor de apoyo del art. 501 (0,7619); SUPUESTOS declarados y no observados: facturación 25 M€ y vencimiento efectivo 2,5 años — la sensibilidad a los dos está en el CSV. Tasa de recuperación: Banco Mundial, Doing Business 2020 — céntimos por dólar que recupera el acreedor garantizado en un concurso, no un tipo de interés. NPL PYME: EBA Risk Dashboard 2026-Q1. (*) LGD de exactamente 40,00 %: es el valor supervisor del IRB BÁSICO (art. 161 CRR), donde el banco no estima su propia severidad. Datos en transversal/descomposicion_rwa.csv.</a:t>
+            </a:r>
+            <a:endParaRPr lang="en-US" sz="700" dirty="0"/>
+          </a:p>
+        </p:txBody>
+      </p:sp>
+    </p:spTree>
+  </p:cSld>
+  <p:clrMapOvr>
+    <a:masterClrMapping/>
+  </p:clrMapOvr>
+</p:sld>
+</file>
+
 <file path=ppt/theme/theme1.xml><?xml version="1.0" encoding="utf-8"?>
 <a:theme xmlns:a="http://schemas.openxmlformats.org/drawingml/2006/main" name="Office Theme">
   <a:themeElements>

--- a/pres/rentabilidad_pyme_laminas_adicionales.pptx
+++ b/pres/rentabilidad_pyme_laminas_adicionales.pptx
@@ -14,9 +14,10 @@
     <p:sldId id="262" r:id="rId8"/>
     <p:sldId id="263" r:id="rId9"/>
     <p:sldId id="264" r:id="rId10"/>
+    <p:sldId id="265" r:id="rId11"/>
   </p:sldIdLst>
   <p:notesMasterIdLst>
-    <p:notesMasterId r:id="rId11"/>
+    <p:notesMasterId r:id="rId12"/>
   </p:notesMasterIdLst>
   <p:sldSz cx="12192000" cy="6858000"/>
   <p:notesSz cx="6858000" cy="12192000"/>
@@ -2621,6 +2622,94 @@
 </p:notes>
 </file>
 
+<file path=ppt/notesSlides/notesSlide10.xml><?xml version="1.0" encoding="utf-8"?>
+<p:notes xmlns:a="http://schemas.openxmlformats.org/drawingml/2006/main" xmlns:r="http://schemas.openxmlformats.org/officeDocument/2006/relationships" xmlns:p="http://schemas.openxmlformats.org/presentationml/2006/main">
+  <p:cSld>
+    <p:spTree>
+      <p:nvGrpSpPr>
+        <p:cNvPr id="1" name=""/>
+        <p:cNvGrpSpPr/>
+        <p:nvPr/>
+      </p:nvGrpSpPr>
+      <p:grpSpPr>
+        <a:xfrm>
+          <a:off x="0" y="0"/>
+          <a:ext cx="0" cy="0"/>
+          <a:chOff x="0" y="0"/>
+          <a:chExt cx="0" cy="0"/>
+        </a:xfrm>
+      </p:grpSpPr>
+      <p:sp>
+        <p:nvSpPr>
+          <p:cNvPr id="2" name="Slide Image Placeholder 1"/>
+          <p:cNvSpPr>
+            <a:spLocks noGrp="1" noRot="1" noChangeAspect="1"/>
+          </p:cNvSpPr>
+          <p:nvPr>
+            <p:ph type="sldImg"/>
+          </p:nvPr>
+        </p:nvSpPr>
+        <p:spPr/>
+      </p:sp>
+      <p:sp>
+        <p:nvSpPr>
+          <p:cNvPr id="3" name="Notes Placeholder 2"/>
+          <p:cNvSpPr>
+            <a:spLocks noGrp="1"/>
+          </p:cNvSpPr>
+          <p:nvPr>
+            <p:ph type="body" idx="1"/>
+          </p:nvPr>
+        </p:nvSpPr>
+        <p:spPr/>
+        <p:txBody>
+          <a:bodyPr/>
+          <a:lstStyle/>
+          <a:p>
+            <a:r>
+              <a:rPr lang="en-US" dirty="0"/>
+              <a:t/>
+            </a:r>
+            <a:endParaRPr lang="en-US" dirty="0"/>
+          </a:p>
+        </p:txBody>
+      </p:sp>
+      <p:sp>
+        <p:nvSpPr>
+          <p:cNvPr id="4" name="Slide Number Placeholder 3"/>
+          <p:cNvSpPr>
+            <a:spLocks noGrp="1"/>
+          </p:cNvSpPr>
+          <p:nvPr>
+            <p:ph type="sldNum" sz="quarter" idx="10"/>
+          </p:nvPr>
+        </p:nvSpPr>
+        <p:spPr/>
+        <p:txBody>
+          <a:bodyPr/>
+          <a:lstStyle/>
+          <a:p>
+            <a:fld id="{F7021451-1387-4CA6-816F-3879F97B5CBC}" type="slidenum">
+              <a:rPr lang="en-US"/>
+              <a:t>10</a:t>
+            </a:fld>
+            <a:endParaRPr lang="en-US"/>
+          </a:p>
+        </p:txBody>
+      </p:sp>
+    </p:spTree>
+    <p:extLst>
+      <p:ext uri="{BB962C8B-B14F-4D97-AF65-F5344CB8AC3E}">
+        <p14:creationId xmlns:p14="http://schemas.microsoft.com/office/powerpoint/2010/main" val="1024086991"/>
+      </p:ext>
+    </p:extLst>
+  </p:cSld>
+  <p:clrMapOvr>
+    <a:masterClrMapping/>
+  </p:clrMapOvr>
+</p:notes>
+</file>
+
 <file path=ppt/notesSlides/notesSlide2.xml><?xml version="1.0" encoding="utf-8"?>
 <p:notes xmlns:a="http://schemas.openxmlformats.org/drawingml/2006/main" xmlns:r="http://schemas.openxmlformats.org/officeDocument/2006/relationships" xmlns:p="http://schemas.openxmlformats.org/presentationml/2006/main">
   <p:cSld>
@@ -5800,6 +5889,3739 @@
                 <a:cs typeface="Verdana" pitchFamily="34" charset="-120"/>
               </a:rPr>
               <a:t>BCE, MIR (ECB Data Portal), enero 2022 a julio 2026. Media anual del diferencial mensual, ponderada por el volumen de nueva producción de los dos tramos. Serie completa en prestamos_personales/prima_pyme.csv.</a:t>
+            </a:r>
+            <a:endParaRPr lang="en-US" sz="750" dirty="0"/>
+          </a:p>
+        </p:txBody>
+      </p:sp>
+    </p:spTree>
+  </p:cSld>
+  <p:clrMapOvr>
+    <a:masterClrMapping/>
+  </p:clrMapOvr>
+</p:sld>
+</file>
+
+<file path=ppt/slides/slide10.xml><?xml version="1.0" encoding="utf-8"?>
+<p:sld xmlns:a="http://schemas.openxmlformats.org/drawingml/2006/main" xmlns:r="http://schemas.openxmlformats.org/officeDocument/2006/relationships" xmlns:p="http://schemas.openxmlformats.org/presentationml/2006/main">
+  <p:cSld name="Slide 10">
+    <p:bg>
+      <p:bgPr>
+        <a:solidFill>
+          <a:srgbClr val="FAFBFC"/>
+        </a:solidFill>
+      </p:bgPr>
+    </p:bg>
+    <p:spTree>
+      <p:nvGrpSpPr>
+        <p:cNvPr id="1" name=""/>
+        <p:cNvGrpSpPr/>
+        <p:nvPr/>
+      </p:nvGrpSpPr>
+      <p:grpSpPr>
+        <a:xfrm>
+          <a:off x="0" y="0"/>
+          <a:ext cx="0" cy="0"/>
+          <a:chOff x="0" y="0"/>
+          <a:chExt cx="0" cy="0"/>
+        </a:xfrm>
+      </p:grpSpPr>
+      <p:sp>
+        <p:nvSpPr>
+          <p:cNvPr id="2" name="Text 0"/>
+          <p:cNvSpPr txBox="1"/>
+          <p:nvPr/>
+        </p:nvSpPr>
+        <p:spPr>
+          <a:xfrm>
+            <a:off x="10040112" y="274320"/>
+            <a:ext cx="1600200" cy="256032"/>
+          </a:xfrm>
+          <a:prstGeom prst="rect">
+            <a:avLst/>
+          </a:prstGeom>
+          <a:noFill/>
+          <a:ln/>
+        </p:spPr>
+        <p:txBody>
+          <a:bodyPr wrap="square" lIns="0" tIns="0" rIns="0" bIns="0" rtlCol="0" anchor="ctr"/>
+          <a:lstStyle/>
+          <a:p>
+            <a:pPr algn="r" indent="0" marL="0">
+              <a:buNone/>
+            </a:pPr>
+            <a:r>
+              <a:rPr lang="en-US" sz="1300" b="1" dirty="0">
+                <a:solidFill>
+                  <a:srgbClr val="2B2B2B"/>
+                </a:solidFill>
+                <a:latin typeface="Verdana" pitchFamily="34" charset="0"/>
+                <a:ea typeface="Verdana" pitchFamily="34" charset="-122"/>
+                <a:cs typeface="Verdana" pitchFamily="34" charset="-120"/>
+              </a:rPr>
+              <a:t>bankinter</a:t>
+            </a:r>
+            <a:pPr algn="r" indent="0" marL="0">
+              <a:buNone/>
+            </a:pPr>
+            <a:r>
+              <a:rPr lang="en-US" sz="1300" b="1" dirty="0">
+                <a:solidFill>
+                  <a:srgbClr val="F56600"/>
+                </a:solidFill>
+                <a:latin typeface="Verdana" pitchFamily="34" charset="0"/>
+                <a:ea typeface="Verdana" pitchFamily="34" charset="-122"/>
+                <a:cs typeface="Verdana" pitchFamily="34" charset="-120"/>
+              </a:rPr>
+              <a:t>.</a:t>
+            </a:r>
+            <a:endParaRPr lang="en-US" sz="1300" dirty="0"/>
+          </a:p>
+        </p:txBody>
+      </p:sp>
+      <p:sp>
+        <p:nvSpPr>
+          <p:cNvPr id="3" name="Text 1"/>
+          <p:cNvSpPr txBox="1"/>
+          <p:nvPr/>
+        </p:nvSpPr>
+        <p:spPr>
+          <a:xfrm>
+            <a:off x="621792" y="420624"/>
+            <a:ext cx="9208008" cy="676656"/>
+          </a:xfrm>
+          <a:prstGeom prst="rect">
+            <a:avLst/>
+          </a:prstGeom>
+          <a:noFill/>
+          <a:ln/>
+        </p:spPr>
+        <p:txBody>
+          <a:bodyPr wrap="square" lIns="0" tIns="0" rIns="0" bIns="0" rtlCol="0" anchor="ctr"/>
+          <a:lstStyle/>
+          <a:p>
+            <a:pPr indent="0" marL="0">
+              <a:buNone/>
+            </a:pPr>
+            <a:r>
+              <a:rPr lang="en-US" sz="2200" b="1" dirty="0">
+                <a:solidFill>
+                  <a:srgbClr val="2B2B2B"/>
+                </a:solidFill>
+                <a:latin typeface="Verdana" pitchFamily="34" charset="0"/>
+                <a:ea typeface="Verdana" pitchFamily="34" charset="-122"/>
+                <a:cs typeface="Verdana" pitchFamily="34" charset="-120"/>
+              </a:rPr>
+              <a:t>Supuestos del ROE</a:t>
+            </a:r>
+            <a:endParaRPr lang="en-US" sz="2200" dirty="0"/>
+          </a:p>
+        </p:txBody>
+      </p:sp>
+      <p:sp>
+        <p:nvSpPr>
+          <p:cNvPr id="4" name="Text 2"/>
+          <p:cNvSpPr txBox="1"/>
+          <p:nvPr/>
+        </p:nvSpPr>
+        <p:spPr>
+          <a:xfrm>
+            <a:off x="621792" y="1060704"/>
+            <a:ext cx="10945368" cy="365760"/>
+          </a:xfrm>
+          <a:prstGeom prst="rect">
+            <a:avLst/>
+          </a:prstGeom>
+          <a:noFill/>
+          <a:ln/>
+        </p:spPr>
+        <p:txBody>
+          <a:bodyPr wrap="square" lIns="0" tIns="0" rIns="0" bIns="0" rtlCol="0" anchor="ctr"/>
+          <a:lstStyle/>
+          <a:p>
+            <a:pPr indent="0" marL="0">
+              <a:buNone/>
+            </a:pPr>
+            <a:r>
+              <a:rPr lang="en-US" sz="1050" dirty="0">
+                <a:solidFill>
+                  <a:srgbClr val="818181"/>
+                </a:solidFill>
+                <a:latin typeface="Verdana" pitchFamily="34" charset="0"/>
+                <a:ea typeface="Verdana" pitchFamily="34" charset="-122"/>
+                <a:cs typeface="Verdana" pitchFamily="34" charset="-120"/>
+              </a:rPr>
+              <a:t>De dónde sale cada línea de la cuenta del préstamo PYME, y si el dato es de verdad de PYME o un proxy</a:t>
+            </a:r>
+            <a:endParaRPr lang="en-US" sz="1050" dirty="0"/>
+          </a:p>
+        </p:txBody>
+      </p:sp>
+      <p:graphicFrame>
+        <p:nvGraphicFramePr>
+          <p:cNvPr id="11" name="Table 0"/>
+          <p:cNvGraphicFramePr>
+            <a:graphicFrameLocks noGrp="1"/>
+          </p:cNvGraphicFramePr>
+          <p:nvPr>
+            <p:extLst>
+              <p:ext uri="{D42A27DB-BD31-4B8C-83A1-F6EECF244321}">
+                <p14:modId xmlns:p14="http://schemas.microsoft.com/office/powerpoint/2010/main" val="1579011935"/>
+              </p:ext>
+            </p:extLst>
+          </p:nvPr>
+        </p:nvGraphicFramePr>
+        <p:xfrm>
+          <a:off x="621792" y="1517904"/>
+          <a:ext cx="10945368" cy="914400"/>
+        </p:xfrm>
+        <a:graphic>
+          <a:graphicData uri="http://schemas.openxmlformats.org/drawingml/2006/table">
+            <a:tbl>
+              <a:tblPr/>
+              <a:tblGrid>
+                <a:gridCol w="1481328"/>
+                <a:gridCol w="2788920"/>
+                <a:gridCol w="4416552"/>
+                <a:gridCol w="1024128"/>
+                <a:gridCol w="1234440"/>
+              </a:tblGrid>
+              <a:tr h="292608">
+                <a:tc>
+                  <a:txBody>
+                    <a:bodyPr/>
+                    <a:lstStyle/>
+                    <a:p>
+                      <a:pPr algn="l" indent="0" marL="0">
+                        <a:buNone/>
+                      </a:pPr>
+                      <a:r>
+                        <a:rPr lang="en-US" sz="950" b="1" dirty="0">
+                          <a:solidFill>
+                            <a:srgbClr val="FFFFFF"/>
+                          </a:solidFill>
+                          <a:latin typeface="Verdana" pitchFamily="34" charset="0"/>
+                          <a:ea typeface="Verdana" pitchFamily="34" charset="-122"/>
+                          <a:cs typeface="Verdana" pitchFamily="34" charset="-120"/>
+                        </a:rPr>
+                        <a:t>Partida</a:t>
+                      </a:r>
+                      <a:endParaRPr lang="en-US" sz="950" dirty="0">
+                        <a:latin typeface="Verdana" charset="0"/>
+                        <a:ea typeface="Verdana" charset="0"/>
+                        <a:cs typeface="Verdana" charset="0"/>
+                      </a:endParaRPr>
+                    </a:p>
+                  </a:txBody>
+                  <a:tcPr marL="63500" marR="63500" marT="25400" marB="25400" anchor="ctr">
+                    <a:lnL w="6350" cap="flat" cmpd="sng" algn="ctr">
+                      <a:solidFill>
+                        <a:srgbClr val="CACACA"/>
+                      </a:solidFill>
+                      <a:prstDash val="solid"/>
+                      <a:round/>
+                      <a:headEnd type="none" w="med" len="med"/>
+                      <a:tailEnd type="none" w="med" len="med"/>
+                    </a:lnL>
+                    <a:lnR w="6350" cap="flat" cmpd="sng" algn="ctr">
+                      <a:solidFill>
+                        <a:srgbClr val="CACACA"/>
+                      </a:solidFill>
+                      <a:prstDash val="solid"/>
+                      <a:round/>
+                      <a:headEnd type="none" w="med" len="med"/>
+                      <a:tailEnd type="none" w="med" len="med"/>
+                    </a:lnR>
+                    <a:lnT w="6350" cap="flat" cmpd="sng" algn="ctr">
+                      <a:solidFill>
+                        <a:srgbClr val="CACACA"/>
+                      </a:solidFill>
+                      <a:prstDash val="solid"/>
+                      <a:round/>
+                      <a:headEnd type="none" w="med" len="med"/>
+                      <a:tailEnd type="none" w="med" len="med"/>
+                    </a:lnT>
+                    <a:lnB w="6350" cap="flat" cmpd="sng" algn="ctr">
+                      <a:solidFill>
+                        <a:srgbClr val="CACACA"/>
+                      </a:solidFill>
+                      <a:prstDash val="solid"/>
+                      <a:round/>
+                      <a:headEnd type="none" w="med" len="med"/>
+                      <a:tailEnd type="none" w="med" len="med"/>
+                    </a:lnB>
+                    <a:solidFill>
+                      <a:srgbClr val="F56600"/>
+                    </a:solidFill>
+                  </a:tcPr>
+                </a:tc>
+                <a:tc>
+                  <a:txBody>
+                    <a:bodyPr/>
+                    <a:lstStyle/>
+                    <a:p>
+                      <a:pPr algn="l" indent="0" marL="0">
+                        <a:buNone/>
+                      </a:pPr>
+                      <a:r>
+                        <a:rPr lang="en-US" sz="950" b="1" dirty="0">
+                          <a:solidFill>
+                            <a:srgbClr val="FFFFFF"/>
+                          </a:solidFill>
+                          <a:latin typeface="Verdana" pitchFamily="34" charset="0"/>
+                          <a:ea typeface="Verdana" pitchFamily="34" charset="-122"/>
+                          <a:cs typeface="Verdana" pitchFamily="34" charset="-120"/>
+                        </a:rPr>
+                        <a:t>Fuente</a:t>
+                      </a:r>
+                      <a:endParaRPr lang="en-US" sz="950" dirty="0">
+                        <a:latin typeface="Verdana" charset="0"/>
+                        <a:ea typeface="Verdana" charset="0"/>
+                        <a:cs typeface="Verdana" charset="0"/>
+                      </a:endParaRPr>
+                    </a:p>
+                  </a:txBody>
+                  <a:tcPr marL="63500" marR="63500" marT="25400" marB="25400" anchor="ctr">
+                    <a:lnL w="6350" cap="flat" cmpd="sng" algn="ctr">
+                      <a:solidFill>
+                        <a:srgbClr val="CACACA"/>
+                      </a:solidFill>
+                      <a:prstDash val="solid"/>
+                      <a:round/>
+                      <a:headEnd type="none" w="med" len="med"/>
+                      <a:tailEnd type="none" w="med" len="med"/>
+                    </a:lnL>
+                    <a:lnR w="6350" cap="flat" cmpd="sng" algn="ctr">
+                      <a:solidFill>
+                        <a:srgbClr val="CACACA"/>
+                      </a:solidFill>
+                      <a:prstDash val="solid"/>
+                      <a:round/>
+                      <a:headEnd type="none" w="med" len="med"/>
+                      <a:tailEnd type="none" w="med" len="med"/>
+                    </a:lnR>
+                    <a:lnT w="6350" cap="flat" cmpd="sng" algn="ctr">
+                      <a:solidFill>
+                        <a:srgbClr val="CACACA"/>
+                      </a:solidFill>
+                      <a:prstDash val="solid"/>
+                      <a:round/>
+                      <a:headEnd type="none" w="med" len="med"/>
+                      <a:tailEnd type="none" w="med" len="med"/>
+                    </a:lnT>
+                    <a:lnB w="6350" cap="flat" cmpd="sng" algn="ctr">
+                      <a:solidFill>
+                        <a:srgbClr val="CACACA"/>
+                      </a:solidFill>
+                      <a:prstDash val="solid"/>
+                      <a:round/>
+                      <a:headEnd type="none" w="med" len="med"/>
+                      <a:tailEnd type="none" w="med" len="med"/>
+                    </a:lnB>
+                    <a:solidFill>
+                      <a:srgbClr val="F56600"/>
+                    </a:solidFill>
+                  </a:tcPr>
+                </a:tc>
+                <a:tc>
+                  <a:txBody>
+                    <a:bodyPr/>
+                    <a:lstStyle/>
+                    <a:p>
+                      <a:pPr algn="l" indent="0" marL="0">
+                        <a:buNone/>
+                      </a:pPr>
+                      <a:r>
+                        <a:rPr lang="en-US" sz="950" b="1" dirty="0">
+                          <a:solidFill>
+                            <a:srgbClr val="FFFFFF"/>
+                          </a:solidFill>
+                          <a:latin typeface="Verdana" pitchFamily="34" charset="0"/>
+                          <a:ea typeface="Verdana" pitchFamily="34" charset="-122"/>
+                          <a:cs typeface="Verdana" pitchFamily="34" charset="-120"/>
+                        </a:rPr>
+                        <a:t>Qué se usa y por qué es, o no, de PYME</a:t>
+                      </a:r>
+                      <a:endParaRPr lang="en-US" sz="950" dirty="0">
+                        <a:latin typeface="Verdana" charset="0"/>
+                        <a:ea typeface="Verdana" charset="0"/>
+                        <a:cs typeface="Verdana" charset="0"/>
+                      </a:endParaRPr>
+                    </a:p>
+                  </a:txBody>
+                  <a:tcPr marL="63500" marR="63500" marT="25400" marB="25400" anchor="ctr">
+                    <a:lnL w="6350" cap="flat" cmpd="sng" algn="ctr">
+                      <a:solidFill>
+                        <a:srgbClr val="CACACA"/>
+                      </a:solidFill>
+                      <a:prstDash val="solid"/>
+                      <a:round/>
+                      <a:headEnd type="none" w="med" len="med"/>
+                      <a:tailEnd type="none" w="med" len="med"/>
+                    </a:lnL>
+                    <a:lnR w="6350" cap="flat" cmpd="sng" algn="ctr">
+                      <a:solidFill>
+                        <a:srgbClr val="CACACA"/>
+                      </a:solidFill>
+                      <a:prstDash val="solid"/>
+                      <a:round/>
+                      <a:headEnd type="none" w="med" len="med"/>
+                      <a:tailEnd type="none" w="med" len="med"/>
+                    </a:lnR>
+                    <a:lnT w="6350" cap="flat" cmpd="sng" algn="ctr">
+                      <a:solidFill>
+                        <a:srgbClr val="CACACA"/>
+                      </a:solidFill>
+                      <a:prstDash val="solid"/>
+                      <a:round/>
+                      <a:headEnd type="none" w="med" len="med"/>
+                      <a:tailEnd type="none" w="med" len="med"/>
+                    </a:lnT>
+                    <a:lnB w="6350" cap="flat" cmpd="sng" algn="ctr">
+                      <a:solidFill>
+                        <a:srgbClr val="CACACA"/>
+                      </a:solidFill>
+                      <a:prstDash val="solid"/>
+                      <a:round/>
+                      <a:headEnd type="none" w="med" len="med"/>
+                      <a:tailEnd type="none" w="med" len="med"/>
+                    </a:lnB>
+                    <a:solidFill>
+                      <a:srgbClr val="F56600"/>
+                    </a:solidFill>
+                  </a:tcPr>
+                </a:tc>
+                <a:tc>
+                  <a:txBody>
+                    <a:bodyPr/>
+                    <a:lstStyle/>
+                    <a:p>
+                      <a:pPr algn="ctr" indent="0" marL="0">
+                        <a:buNone/>
+                      </a:pPr>
+                      <a:r>
+                        <a:rPr lang="en-US" sz="950" b="1" dirty="0">
+                          <a:solidFill>
+                            <a:srgbClr val="FFFFFF"/>
+                          </a:solidFill>
+                          <a:latin typeface="Verdana" pitchFamily="34" charset="0"/>
+                          <a:ea typeface="Verdana" pitchFamily="34" charset="-122"/>
+                          <a:cs typeface="Verdana" pitchFamily="34" charset="-120"/>
+                        </a:rPr>
+                        <a:t>Tipo</a:t>
+                      </a:r>
+                      <a:endParaRPr lang="en-US" sz="950" dirty="0">
+                        <a:latin typeface="Verdana" charset="0"/>
+                        <a:ea typeface="Verdana" charset="0"/>
+                        <a:cs typeface="Verdana" charset="0"/>
+                      </a:endParaRPr>
+                    </a:p>
+                  </a:txBody>
+                  <a:tcPr marL="63500" marR="63500" marT="25400" marB="25400" anchor="ctr">
+                    <a:lnL w="6350" cap="flat" cmpd="sng" algn="ctr">
+                      <a:solidFill>
+                        <a:srgbClr val="CACACA"/>
+                      </a:solidFill>
+                      <a:prstDash val="solid"/>
+                      <a:round/>
+                      <a:headEnd type="none" w="med" len="med"/>
+                      <a:tailEnd type="none" w="med" len="med"/>
+                    </a:lnL>
+                    <a:lnR w="6350" cap="flat" cmpd="sng" algn="ctr">
+                      <a:solidFill>
+                        <a:srgbClr val="CACACA"/>
+                      </a:solidFill>
+                      <a:prstDash val="solid"/>
+                      <a:round/>
+                      <a:headEnd type="none" w="med" len="med"/>
+                      <a:tailEnd type="none" w="med" len="med"/>
+                    </a:lnR>
+                    <a:lnT w="6350" cap="flat" cmpd="sng" algn="ctr">
+                      <a:solidFill>
+                        <a:srgbClr val="CACACA"/>
+                      </a:solidFill>
+                      <a:prstDash val="solid"/>
+                      <a:round/>
+                      <a:headEnd type="none" w="med" len="med"/>
+                      <a:tailEnd type="none" w="med" len="med"/>
+                    </a:lnT>
+                    <a:lnB w="6350" cap="flat" cmpd="sng" algn="ctr">
+                      <a:solidFill>
+                        <a:srgbClr val="CACACA"/>
+                      </a:solidFill>
+                      <a:prstDash val="solid"/>
+                      <a:round/>
+                      <a:headEnd type="none" w="med" len="med"/>
+                      <a:tailEnd type="none" w="med" len="med"/>
+                    </a:lnB>
+                    <a:solidFill>
+                      <a:srgbClr val="F56600"/>
+                    </a:solidFill>
+                  </a:tcPr>
+                </a:tc>
+                <a:tc>
+                  <a:txBody>
+                    <a:bodyPr/>
+                    <a:lstStyle/>
+                    <a:p>
+                      <a:pPr algn="ctr" indent="0" marL="0">
+                        <a:buNone/>
+                      </a:pPr>
+                      <a:r>
+                        <a:rPr lang="en-US" sz="950" b="1" dirty="0">
+                          <a:solidFill>
+                            <a:srgbClr val="FFFFFF"/>
+                          </a:solidFill>
+                          <a:latin typeface="Verdana" pitchFamily="34" charset="0"/>
+                          <a:ea typeface="Verdana" pitchFamily="34" charset="-122"/>
+                          <a:cs typeface="Verdana" pitchFamily="34" charset="-120"/>
+                        </a:rPr>
+                        <a:t>Último dato</a:t>
+                      </a:r>
+                      <a:endParaRPr lang="en-US" sz="950" dirty="0">
+                        <a:latin typeface="Verdana" charset="0"/>
+                        <a:ea typeface="Verdana" charset="0"/>
+                        <a:cs typeface="Verdana" charset="0"/>
+                      </a:endParaRPr>
+                    </a:p>
+                  </a:txBody>
+                  <a:tcPr marL="63500" marR="63500" marT="25400" marB="25400" anchor="ctr">
+                    <a:lnL w="6350" cap="flat" cmpd="sng" algn="ctr">
+                      <a:solidFill>
+                        <a:srgbClr val="CACACA"/>
+                      </a:solidFill>
+                      <a:prstDash val="solid"/>
+                      <a:round/>
+                      <a:headEnd type="none" w="med" len="med"/>
+                      <a:tailEnd type="none" w="med" len="med"/>
+                    </a:lnL>
+                    <a:lnR w="6350" cap="flat" cmpd="sng" algn="ctr">
+                      <a:solidFill>
+                        <a:srgbClr val="CACACA"/>
+                      </a:solidFill>
+                      <a:prstDash val="solid"/>
+                      <a:round/>
+                      <a:headEnd type="none" w="med" len="med"/>
+                      <a:tailEnd type="none" w="med" len="med"/>
+                    </a:lnR>
+                    <a:lnT w="6350" cap="flat" cmpd="sng" algn="ctr">
+                      <a:solidFill>
+                        <a:srgbClr val="CACACA"/>
+                      </a:solidFill>
+                      <a:prstDash val="solid"/>
+                      <a:round/>
+                      <a:headEnd type="none" w="med" len="med"/>
+                      <a:tailEnd type="none" w="med" len="med"/>
+                    </a:lnT>
+                    <a:lnB w="6350" cap="flat" cmpd="sng" algn="ctr">
+                      <a:solidFill>
+                        <a:srgbClr val="CACACA"/>
+                      </a:solidFill>
+                      <a:prstDash val="solid"/>
+                      <a:round/>
+                      <a:headEnd type="none" w="med" len="med"/>
+                      <a:tailEnd type="none" w="med" len="med"/>
+                    </a:lnB>
+                    <a:solidFill>
+                      <a:srgbClr val="F56600"/>
+                    </a:solidFill>
+                  </a:tcPr>
+                </a:tc>
+              </a:tr>
+              <a:tr h="457200">
+                <a:tc>
+                  <a:txBody>
+                    <a:bodyPr/>
+                    <a:lstStyle/>
+                    <a:p>
+                      <a:pPr algn="l" indent="0" marL="0">
+                        <a:buNone/>
+                      </a:pPr>
+                      <a:r>
+                        <a:rPr lang="en-US" sz="950" b="1" dirty="0">
+                          <a:solidFill>
+                            <a:srgbClr val="2B2B2B"/>
+                          </a:solidFill>
+                          <a:latin typeface="Verdana" pitchFamily="34" charset="0"/>
+                          <a:ea typeface="Verdana" pitchFamily="34" charset="-122"/>
+                          <a:cs typeface="Verdana" pitchFamily="34" charset="-120"/>
+                        </a:rPr>
+                        <a:t>Precio del préstamo</a:t>
+                      </a:r>
+                      <a:endParaRPr lang="en-US" sz="950" dirty="0">
+                        <a:latin typeface="Verdana" charset="0"/>
+                        <a:ea typeface="Verdana" charset="0"/>
+                        <a:cs typeface="Verdana" charset="0"/>
+                      </a:endParaRPr>
+                    </a:p>
+                  </a:txBody>
+                  <a:tcPr marL="63500" marR="63500" marT="25400" marB="25400" anchor="ctr">
+                    <a:lnL w="6350" cap="flat" cmpd="sng" algn="ctr">
+                      <a:solidFill>
+                        <a:srgbClr val="CACACA"/>
+                      </a:solidFill>
+                      <a:prstDash val="solid"/>
+                      <a:round/>
+                      <a:headEnd type="none" w="med" len="med"/>
+                      <a:tailEnd type="none" w="med" len="med"/>
+                    </a:lnL>
+                    <a:lnR w="6350" cap="flat" cmpd="sng" algn="ctr">
+                      <a:solidFill>
+                        <a:srgbClr val="CACACA"/>
+                      </a:solidFill>
+                      <a:prstDash val="solid"/>
+                      <a:round/>
+                      <a:headEnd type="none" w="med" len="med"/>
+                      <a:tailEnd type="none" w="med" len="med"/>
+                    </a:lnR>
+                    <a:lnT w="6350" cap="flat" cmpd="sng" algn="ctr">
+                      <a:solidFill>
+                        <a:srgbClr val="CACACA"/>
+                      </a:solidFill>
+                      <a:prstDash val="solid"/>
+                      <a:round/>
+                      <a:headEnd type="none" w="med" len="med"/>
+                      <a:tailEnd type="none" w="med" len="med"/>
+                    </a:lnT>
+                    <a:lnB w="6350" cap="flat" cmpd="sng" algn="ctr">
+                      <a:solidFill>
+                        <a:srgbClr val="CACACA"/>
+                      </a:solidFill>
+                      <a:prstDash val="solid"/>
+                      <a:round/>
+                      <a:headEnd type="none" w="med" len="med"/>
+                      <a:tailEnd type="none" w="med" len="med"/>
+                    </a:lnB>
+                    <a:solidFill>
+                      <a:srgbClr val="FFFFFF"/>
+                    </a:solidFill>
+                  </a:tcPr>
+                </a:tc>
+                <a:tc>
+                  <a:txBody>
+                    <a:bodyPr/>
+                    <a:lstStyle/>
+                    <a:p>
+                      <a:pPr algn="l" indent="0" marL="0">
+                        <a:buNone/>
+                      </a:pPr>
+                      <a:r>
+                        <a:rPr lang="en-US" sz="750" dirty="0">
+                          <a:solidFill>
+                            <a:srgbClr val="818181"/>
+                          </a:solidFill>
+                          <a:latin typeface="Verdana" pitchFamily="34" charset="0"/>
+                          <a:ea typeface="Verdana" pitchFamily="34" charset="-122"/>
+                          <a:cs typeface="Verdana" pitchFamily="34" charset="-120"/>
+                        </a:rPr>
+                        <a:t>BCE, MIR: tipo de nueva producción a sociedades no financieras, tramo ≤1 M€, fijación total, sin comisiones</a:t>
+                      </a:r>
+                      <a:endParaRPr lang="en-US" sz="750" dirty="0">
+                        <a:latin typeface="Verdana" charset="0"/>
+                        <a:ea typeface="Verdana" charset="0"/>
+                        <a:cs typeface="Verdana" charset="0"/>
+                      </a:endParaRPr>
+                    </a:p>
+                  </a:txBody>
+                  <a:tcPr marL="63500" marR="63500" marT="25400" marB="25400" anchor="ctr">
+                    <a:lnL w="6350" cap="flat" cmpd="sng" algn="ctr">
+                      <a:solidFill>
+                        <a:srgbClr val="CACACA"/>
+                      </a:solidFill>
+                      <a:prstDash val="solid"/>
+                      <a:round/>
+                      <a:headEnd type="none" w="med" len="med"/>
+                      <a:tailEnd type="none" w="med" len="med"/>
+                    </a:lnL>
+                    <a:lnR w="6350" cap="flat" cmpd="sng" algn="ctr">
+                      <a:solidFill>
+                        <a:srgbClr val="CACACA"/>
+                      </a:solidFill>
+                      <a:prstDash val="solid"/>
+                      <a:round/>
+                      <a:headEnd type="none" w="med" len="med"/>
+                      <a:tailEnd type="none" w="med" len="med"/>
+                    </a:lnR>
+                    <a:lnT w="6350" cap="flat" cmpd="sng" algn="ctr">
+                      <a:solidFill>
+                        <a:srgbClr val="CACACA"/>
+                      </a:solidFill>
+                      <a:prstDash val="solid"/>
+                      <a:round/>
+                      <a:headEnd type="none" w="med" len="med"/>
+                      <a:tailEnd type="none" w="med" len="med"/>
+                    </a:lnT>
+                    <a:lnB w="6350" cap="flat" cmpd="sng" algn="ctr">
+                      <a:solidFill>
+                        <a:srgbClr val="CACACA"/>
+                      </a:solidFill>
+                      <a:prstDash val="solid"/>
+                      <a:round/>
+                      <a:headEnd type="none" w="med" len="med"/>
+                      <a:tailEnd type="none" w="med" len="med"/>
+                    </a:lnB>
+                    <a:solidFill>
+                      <a:srgbClr val="FFFFFF"/>
+                    </a:solidFill>
+                  </a:tcPr>
+                </a:tc>
+                <a:tc>
+                  <a:txBody>
+                    <a:bodyPr/>
+                    <a:lstStyle/>
+                    <a:p>
+                      <a:pPr algn="l" indent="0" marL="0">
+                        <a:buNone/>
+                      </a:pPr>
+                      <a:r>
+                        <a:rPr lang="en-US" sz="750" dirty="0">
+                          <a:solidFill>
+                            <a:srgbClr val="2B2B2B"/>
+                          </a:solidFill>
+                          <a:latin typeface="Verdana" pitchFamily="34" charset="0"/>
+                          <a:ea typeface="Verdana" pitchFamily="34" charset="-122"/>
+                          <a:cs typeface="Verdana" pitchFamily="34" charset="-120"/>
+                        </a:rPr>
+                        <a:t>Segmenta por IMPORTE DEL PRÉSTAMO, no por tamaño de empresa: una gran empresa que pide 800.000 € entra, y una mediana que pide 3 M€ no. Deja fuera al autónomo, que está en hogares.</a:t>
+                      </a:r>
+                      <a:endParaRPr lang="en-US" sz="750" dirty="0">
+                        <a:latin typeface="Verdana" charset="0"/>
+                        <a:ea typeface="Verdana" charset="0"/>
+                        <a:cs typeface="Verdana" charset="0"/>
+                      </a:endParaRPr>
+                    </a:p>
+                  </a:txBody>
+                  <a:tcPr marL="63500" marR="63500" marT="25400" marB="25400" anchor="ctr">
+                    <a:lnL w="6350" cap="flat" cmpd="sng" algn="ctr">
+                      <a:solidFill>
+                        <a:srgbClr val="CACACA"/>
+                      </a:solidFill>
+                      <a:prstDash val="solid"/>
+                      <a:round/>
+                      <a:headEnd type="none" w="med" len="med"/>
+                      <a:tailEnd type="none" w="med" len="med"/>
+                    </a:lnL>
+                    <a:lnR w="6350" cap="flat" cmpd="sng" algn="ctr">
+                      <a:solidFill>
+                        <a:srgbClr val="CACACA"/>
+                      </a:solidFill>
+                      <a:prstDash val="solid"/>
+                      <a:round/>
+                      <a:headEnd type="none" w="med" len="med"/>
+                      <a:tailEnd type="none" w="med" len="med"/>
+                    </a:lnR>
+                    <a:lnT w="6350" cap="flat" cmpd="sng" algn="ctr">
+                      <a:solidFill>
+                        <a:srgbClr val="CACACA"/>
+                      </a:solidFill>
+                      <a:prstDash val="solid"/>
+                      <a:round/>
+                      <a:headEnd type="none" w="med" len="med"/>
+                      <a:tailEnd type="none" w="med" len="med"/>
+                    </a:lnT>
+                    <a:lnB w="6350" cap="flat" cmpd="sng" algn="ctr">
+                      <a:solidFill>
+                        <a:srgbClr val="CACACA"/>
+                      </a:solidFill>
+                      <a:prstDash val="solid"/>
+                      <a:round/>
+                      <a:headEnd type="none" w="med" len="med"/>
+                      <a:tailEnd type="none" w="med" len="med"/>
+                    </a:lnB>
+                    <a:solidFill>
+                      <a:srgbClr val="FFFFFF"/>
+                    </a:solidFill>
+                  </a:tcPr>
+                </a:tc>
+                <a:tc>
+                  <a:txBody>
+                    <a:bodyPr/>
+                    <a:lstStyle/>
+                    <a:p>
+                      <a:pPr algn="ctr" indent="0" marL="0">
+                        <a:buNone/>
+                      </a:pPr>
+                      <a:r>
+                        <a:rPr lang="en-US" sz="800" b="1" dirty="0">
+                          <a:solidFill>
+                            <a:srgbClr val="2B2B2B"/>
+                          </a:solidFill>
+                          <a:latin typeface="Verdana" pitchFamily="34" charset="0"/>
+                          <a:ea typeface="Verdana" pitchFamily="34" charset="-122"/>
+                          <a:cs typeface="Verdana" pitchFamily="34" charset="-120"/>
+                        </a:rPr>
+                        <a:t>PROXY</a:t>
+                      </a:r>
+                      <a:endParaRPr lang="en-US" sz="800" dirty="0">
+                        <a:latin typeface="Verdana" charset="0"/>
+                        <a:ea typeface="Verdana" charset="0"/>
+                        <a:cs typeface="Verdana" charset="0"/>
+                      </a:endParaRPr>
+                    </a:p>
+                  </a:txBody>
+                  <a:tcPr marL="63500" marR="63500" marT="25400" marB="25400" anchor="ctr">
+                    <a:lnL w="6350" cap="flat" cmpd="sng" algn="ctr">
+                      <a:solidFill>
+                        <a:srgbClr val="CACACA"/>
+                      </a:solidFill>
+                      <a:prstDash val="solid"/>
+                      <a:round/>
+                      <a:headEnd type="none" w="med" len="med"/>
+                      <a:tailEnd type="none" w="med" len="med"/>
+                    </a:lnL>
+                    <a:lnR w="6350" cap="flat" cmpd="sng" algn="ctr">
+                      <a:solidFill>
+                        <a:srgbClr val="CACACA"/>
+                      </a:solidFill>
+                      <a:prstDash val="solid"/>
+                      <a:round/>
+                      <a:headEnd type="none" w="med" len="med"/>
+                      <a:tailEnd type="none" w="med" len="med"/>
+                    </a:lnR>
+                    <a:lnT w="6350" cap="flat" cmpd="sng" algn="ctr">
+                      <a:solidFill>
+                        <a:srgbClr val="CACACA"/>
+                      </a:solidFill>
+                      <a:prstDash val="solid"/>
+                      <a:round/>
+                      <a:headEnd type="none" w="med" len="med"/>
+                      <a:tailEnd type="none" w="med" len="med"/>
+                    </a:lnT>
+                    <a:lnB w="6350" cap="flat" cmpd="sng" algn="ctr">
+                      <a:solidFill>
+                        <a:srgbClr val="CACACA"/>
+                      </a:solidFill>
+                      <a:prstDash val="solid"/>
+                      <a:round/>
+                      <a:headEnd type="none" w="med" len="med"/>
+                      <a:tailEnd type="none" w="med" len="med"/>
+                    </a:lnB>
+                    <a:solidFill>
+                      <a:srgbClr val="FFAB70"/>
+                    </a:solidFill>
+                  </a:tcPr>
+                </a:tc>
+                <a:tc>
+                  <a:txBody>
+                    <a:bodyPr/>
+                    <a:lstStyle/>
+                    <a:p>
+                      <a:pPr algn="ctr" indent="0" marL="0">
+                        <a:buNone/>
+                      </a:pPr>
+                      <a:r>
+                        <a:rPr lang="en-US" sz="900" dirty="0">
+                          <a:solidFill>
+                            <a:srgbClr val="2B2B2B"/>
+                          </a:solidFill>
+                          <a:latin typeface="Verdana" pitchFamily="34" charset="0"/>
+                          <a:ea typeface="Verdana" pitchFamily="34" charset="-122"/>
+                          <a:cs typeface="Verdana" pitchFamily="34" charset="-120"/>
+                        </a:rPr>
+                        <a:t>2026-07</a:t>
+                      </a:r>
+                      <a:endParaRPr lang="en-US" sz="900" dirty="0">
+                        <a:latin typeface="Verdana" charset="0"/>
+                        <a:ea typeface="Verdana" charset="0"/>
+                        <a:cs typeface="Verdana" charset="0"/>
+                      </a:endParaRPr>
+                    </a:p>
+                  </a:txBody>
+                  <a:tcPr marL="63500" marR="63500" marT="25400" marB="25400" anchor="ctr">
+                    <a:lnL w="6350" cap="flat" cmpd="sng" algn="ctr">
+                      <a:solidFill>
+                        <a:srgbClr val="CACACA"/>
+                      </a:solidFill>
+                      <a:prstDash val="solid"/>
+                      <a:round/>
+                      <a:headEnd type="none" w="med" len="med"/>
+                      <a:tailEnd type="none" w="med" len="med"/>
+                    </a:lnL>
+                    <a:lnR w="6350" cap="flat" cmpd="sng" algn="ctr">
+                      <a:solidFill>
+                        <a:srgbClr val="CACACA"/>
+                      </a:solidFill>
+                      <a:prstDash val="solid"/>
+                      <a:round/>
+                      <a:headEnd type="none" w="med" len="med"/>
+                      <a:tailEnd type="none" w="med" len="med"/>
+                    </a:lnR>
+                    <a:lnT w="6350" cap="flat" cmpd="sng" algn="ctr">
+                      <a:solidFill>
+                        <a:srgbClr val="CACACA"/>
+                      </a:solidFill>
+                      <a:prstDash val="solid"/>
+                      <a:round/>
+                      <a:headEnd type="none" w="med" len="med"/>
+                      <a:tailEnd type="none" w="med" len="med"/>
+                    </a:lnT>
+                    <a:lnB w="6350" cap="flat" cmpd="sng" algn="ctr">
+                      <a:solidFill>
+                        <a:srgbClr val="CACACA"/>
+                      </a:solidFill>
+                      <a:prstDash val="solid"/>
+                      <a:round/>
+                      <a:headEnd type="none" w="med" len="med"/>
+                      <a:tailEnd type="none" w="med" len="med"/>
+                    </a:lnB>
+                    <a:solidFill>
+                      <a:srgbClr val="FFFFFF"/>
+                    </a:solidFill>
+                  </a:tcPr>
+                </a:tc>
+              </a:tr>
+              <a:tr h="457200">
+                <a:tc>
+                  <a:txBody>
+                    <a:bodyPr/>
+                    <a:lstStyle/>
+                    <a:p>
+                      <a:pPr algn="l" indent="0" marL="0">
+                        <a:buNone/>
+                      </a:pPr>
+                      <a:r>
+                        <a:rPr lang="en-US" sz="950" b="1" dirty="0">
+                          <a:solidFill>
+                            <a:srgbClr val="2B2B2B"/>
+                          </a:solidFill>
+                          <a:latin typeface="Verdana" pitchFamily="34" charset="0"/>
+                          <a:ea typeface="Verdana" pitchFamily="34" charset="-122"/>
+                          <a:cs typeface="Verdana" pitchFamily="34" charset="-120"/>
+                        </a:rPr>
+                        <a:t>Comisiones</a:t>
+                      </a:r>
+                      <a:endParaRPr lang="en-US" sz="950" dirty="0">
+                        <a:latin typeface="Verdana" charset="0"/>
+                        <a:ea typeface="Verdana" charset="0"/>
+                        <a:cs typeface="Verdana" charset="0"/>
+                      </a:endParaRPr>
+                    </a:p>
+                  </a:txBody>
+                  <a:tcPr marL="63500" marR="63500" marT="25400" marB="25400" anchor="ctr">
+                    <a:lnL w="6350" cap="flat" cmpd="sng" algn="ctr">
+                      <a:solidFill>
+                        <a:srgbClr val="CACACA"/>
+                      </a:solidFill>
+                      <a:prstDash val="solid"/>
+                      <a:round/>
+                      <a:headEnd type="none" w="med" len="med"/>
+                      <a:tailEnd type="none" w="med" len="med"/>
+                    </a:lnL>
+                    <a:lnR w="6350" cap="flat" cmpd="sng" algn="ctr">
+                      <a:solidFill>
+                        <a:srgbClr val="CACACA"/>
+                      </a:solidFill>
+                      <a:prstDash val="solid"/>
+                      <a:round/>
+                      <a:headEnd type="none" w="med" len="med"/>
+                      <a:tailEnd type="none" w="med" len="med"/>
+                    </a:lnR>
+                    <a:lnT w="6350" cap="flat" cmpd="sng" algn="ctr">
+                      <a:solidFill>
+                        <a:srgbClr val="CACACA"/>
+                      </a:solidFill>
+                      <a:prstDash val="solid"/>
+                      <a:round/>
+                      <a:headEnd type="none" w="med" len="med"/>
+                      <a:tailEnd type="none" w="med" len="med"/>
+                    </a:lnT>
+                    <a:lnB w="6350" cap="flat" cmpd="sng" algn="ctr">
+                      <a:solidFill>
+                        <a:srgbClr val="CACACA"/>
+                      </a:solidFill>
+                      <a:prstDash val="solid"/>
+                      <a:round/>
+                      <a:headEnd type="none" w="med" len="med"/>
+                      <a:tailEnd type="none" w="med" len="med"/>
+                    </a:lnB>
+                    <a:solidFill>
+                      <a:srgbClr val="F4F4F4"/>
+                    </a:solidFill>
+                  </a:tcPr>
+                </a:tc>
+                <a:tc>
+                  <a:txBody>
+                    <a:bodyPr/>
+                    <a:lstStyle/>
+                    <a:p>
+                      <a:pPr algn="l" indent="0" marL="0">
+                        <a:buNone/>
+                      </a:pPr>
+                      <a:r>
+                        <a:rPr lang="en-US" sz="750" dirty="0">
+                          <a:solidFill>
+                            <a:srgbClr val="818181"/>
+                          </a:solidFill>
+                          <a:latin typeface="Verdana" pitchFamily="34" charset="0"/>
+                          <a:ea typeface="Verdana" pitchFamily="34" charset="-122"/>
+                          <a:cs typeface="Verdana" pitchFamily="34" charset="-120"/>
+                        </a:rPr>
+                        <a:t>Banco de España, Boletín Estadístico, cap. 19: cuña TAE − tipo sin comisiones, tramo ≤1 M€</a:t>
+                      </a:r>
+                      <a:endParaRPr lang="en-US" sz="750" dirty="0">
+                        <a:latin typeface="Verdana" charset="0"/>
+                        <a:ea typeface="Verdana" charset="0"/>
+                        <a:cs typeface="Verdana" charset="0"/>
+                      </a:endParaRPr>
+                    </a:p>
+                  </a:txBody>
+                  <a:tcPr marL="63500" marR="63500" marT="25400" marB="25400" anchor="ctr">
+                    <a:lnL w="6350" cap="flat" cmpd="sng" algn="ctr">
+                      <a:solidFill>
+                        <a:srgbClr val="CACACA"/>
+                      </a:solidFill>
+                      <a:prstDash val="solid"/>
+                      <a:round/>
+                      <a:headEnd type="none" w="med" len="med"/>
+                      <a:tailEnd type="none" w="med" len="med"/>
+                    </a:lnL>
+                    <a:lnR w="6350" cap="flat" cmpd="sng" algn="ctr">
+                      <a:solidFill>
+                        <a:srgbClr val="CACACA"/>
+                      </a:solidFill>
+                      <a:prstDash val="solid"/>
+                      <a:round/>
+                      <a:headEnd type="none" w="med" len="med"/>
+                      <a:tailEnd type="none" w="med" len="med"/>
+                    </a:lnR>
+                    <a:lnT w="6350" cap="flat" cmpd="sng" algn="ctr">
+                      <a:solidFill>
+                        <a:srgbClr val="CACACA"/>
+                      </a:solidFill>
+                      <a:prstDash val="solid"/>
+                      <a:round/>
+                      <a:headEnd type="none" w="med" len="med"/>
+                      <a:tailEnd type="none" w="med" len="med"/>
+                    </a:lnT>
+                    <a:lnB w="6350" cap="flat" cmpd="sng" algn="ctr">
+                      <a:solidFill>
+                        <a:srgbClr val="CACACA"/>
+                      </a:solidFill>
+                      <a:prstDash val="solid"/>
+                      <a:round/>
+                      <a:headEnd type="none" w="med" len="med"/>
+                      <a:tailEnd type="none" w="med" len="med"/>
+                    </a:lnB>
+                    <a:solidFill>
+                      <a:srgbClr val="F4F4F4"/>
+                    </a:solidFill>
+                  </a:tcPr>
+                </a:tc>
+                <a:tc>
+                  <a:txBody>
+                    <a:bodyPr/>
+                    <a:lstStyle/>
+                    <a:p>
+                      <a:pPr algn="l" indent="0" marL="0">
+                        <a:buNone/>
+                      </a:pPr>
+                      <a:r>
+                        <a:rPr lang="en-US" sz="750" dirty="0">
+                          <a:solidFill>
+                            <a:srgbClr val="2B2B2B"/>
+                          </a:solidFill>
+                          <a:latin typeface="Verdana" pitchFamily="34" charset="0"/>
+                          <a:ea typeface="Verdana" pitchFamily="34" charset="-122"/>
+                          <a:cs typeface="Verdana" pitchFamily="34" charset="-120"/>
+                        </a:rPr>
+                        <a:t>Solo España publica un tipo con comisiones para empresas; su cuña de 87 pb se aplica a los siete. Fuera de España no es un dato. Contraste: los segmentos de empresas que se publican cobran de 99 a 122 pb.</a:t>
+                      </a:r>
+                      <a:endParaRPr lang="en-US" sz="750" dirty="0">
+                        <a:latin typeface="Verdana" charset="0"/>
+                        <a:ea typeface="Verdana" charset="0"/>
+                        <a:cs typeface="Verdana" charset="0"/>
+                      </a:endParaRPr>
+                    </a:p>
+                  </a:txBody>
+                  <a:tcPr marL="63500" marR="63500" marT="25400" marB="25400" anchor="ctr">
+                    <a:lnL w="6350" cap="flat" cmpd="sng" algn="ctr">
+                      <a:solidFill>
+                        <a:srgbClr val="CACACA"/>
+                      </a:solidFill>
+                      <a:prstDash val="solid"/>
+                      <a:round/>
+                      <a:headEnd type="none" w="med" len="med"/>
+                      <a:tailEnd type="none" w="med" len="med"/>
+                    </a:lnL>
+                    <a:lnR w="6350" cap="flat" cmpd="sng" algn="ctr">
+                      <a:solidFill>
+                        <a:srgbClr val="CACACA"/>
+                      </a:solidFill>
+                      <a:prstDash val="solid"/>
+                      <a:round/>
+                      <a:headEnd type="none" w="med" len="med"/>
+                      <a:tailEnd type="none" w="med" len="med"/>
+                    </a:lnR>
+                    <a:lnT w="6350" cap="flat" cmpd="sng" algn="ctr">
+                      <a:solidFill>
+                        <a:srgbClr val="CACACA"/>
+                      </a:solidFill>
+                      <a:prstDash val="solid"/>
+                      <a:round/>
+                      <a:headEnd type="none" w="med" len="med"/>
+                      <a:tailEnd type="none" w="med" len="med"/>
+                    </a:lnT>
+                    <a:lnB w="6350" cap="flat" cmpd="sng" algn="ctr">
+                      <a:solidFill>
+                        <a:srgbClr val="CACACA"/>
+                      </a:solidFill>
+                      <a:prstDash val="solid"/>
+                      <a:round/>
+                      <a:headEnd type="none" w="med" len="med"/>
+                      <a:tailEnd type="none" w="med" len="med"/>
+                    </a:lnB>
+                    <a:solidFill>
+                      <a:srgbClr val="F4F4F4"/>
+                    </a:solidFill>
+                  </a:tcPr>
+                </a:tc>
+                <a:tc>
+                  <a:txBody>
+                    <a:bodyPr/>
+                    <a:lstStyle/>
+                    <a:p>
+                      <a:pPr algn="ctr" indent="0" marL="0">
+                        <a:buNone/>
+                      </a:pPr>
+                      <a:r>
+                        <a:rPr lang="en-US" sz="800" b="1" dirty="0">
+                          <a:solidFill>
+                            <a:srgbClr val="2B2B2B"/>
+                          </a:solidFill>
+                          <a:latin typeface="Verdana" pitchFamily="34" charset="0"/>
+                          <a:ea typeface="Verdana" pitchFamily="34" charset="-122"/>
+                          <a:cs typeface="Verdana" pitchFamily="34" charset="-120"/>
+                        </a:rPr>
+                        <a:t>SUPUESTO</a:t>
+                      </a:r>
+                      <a:endParaRPr lang="en-US" sz="800" dirty="0">
+                        <a:latin typeface="Verdana" charset="0"/>
+                        <a:ea typeface="Verdana" charset="0"/>
+                        <a:cs typeface="Verdana" charset="0"/>
+                      </a:endParaRPr>
+                    </a:p>
+                  </a:txBody>
+                  <a:tcPr marL="63500" marR="63500" marT="25400" marB="25400" anchor="ctr">
+                    <a:lnL w="6350" cap="flat" cmpd="sng" algn="ctr">
+                      <a:solidFill>
+                        <a:srgbClr val="CACACA"/>
+                      </a:solidFill>
+                      <a:prstDash val="solid"/>
+                      <a:round/>
+                      <a:headEnd type="none" w="med" len="med"/>
+                      <a:tailEnd type="none" w="med" len="med"/>
+                    </a:lnL>
+                    <a:lnR w="6350" cap="flat" cmpd="sng" algn="ctr">
+                      <a:solidFill>
+                        <a:srgbClr val="CACACA"/>
+                      </a:solidFill>
+                      <a:prstDash val="solid"/>
+                      <a:round/>
+                      <a:headEnd type="none" w="med" len="med"/>
+                      <a:tailEnd type="none" w="med" len="med"/>
+                    </a:lnR>
+                    <a:lnT w="6350" cap="flat" cmpd="sng" algn="ctr">
+                      <a:solidFill>
+                        <a:srgbClr val="CACACA"/>
+                      </a:solidFill>
+                      <a:prstDash val="solid"/>
+                      <a:round/>
+                      <a:headEnd type="none" w="med" len="med"/>
+                      <a:tailEnd type="none" w="med" len="med"/>
+                    </a:lnT>
+                    <a:lnB w="6350" cap="flat" cmpd="sng" algn="ctr">
+                      <a:solidFill>
+                        <a:srgbClr val="CACACA"/>
+                      </a:solidFill>
+                      <a:prstDash val="solid"/>
+                      <a:round/>
+                      <a:headEnd type="none" w="med" len="med"/>
+                      <a:tailEnd type="none" w="med" len="med"/>
+                    </a:lnB>
+                    <a:solidFill>
+                      <a:srgbClr val="FF8AC2"/>
+                    </a:solidFill>
+                  </a:tcPr>
+                </a:tc>
+                <a:tc>
+                  <a:txBody>
+                    <a:bodyPr/>
+                    <a:lstStyle/>
+                    <a:p>
+                      <a:pPr algn="ctr" indent="0" marL="0">
+                        <a:buNone/>
+                      </a:pPr>
+                      <a:r>
+                        <a:rPr lang="en-US" sz="900" dirty="0">
+                          <a:solidFill>
+                            <a:srgbClr val="2B2B2B"/>
+                          </a:solidFill>
+                          <a:latin typeface="Verdana" pitchFamily="34" charset="0"/>
+                          <a:ea typeface="Verdana" pitchFamily="34" charset="-122"/>
+                          <a:cs typeface="Verdana" pitchFamily="34" charset="-120"/>
+                        </a:rPr>
+                        <a:t>2026-07</a:t>
+                      </a:r>
+                      <a:endParaRPr lang="en-US" sz="900" dirty="0">
+                        <a:latin typeface="Verdana" charset="0"/>
+                        <a:ea typeface="Verdana" charset="0"/>
+                        <a:cs typeface="Verdana" charset="0"/>
+                      </a:endParaRPr>
+                    </a:p>
+                  </a:txBody>
+                  <a:tcPr marL="63500" marR="63500" marT="25400" marB="25400" anchor="ctr">
+                    <a:lnL w="6350" cap="flat" cmpd="sng" algn="ctr">
+                      <a:solidFill>
+                        <a:srgbClr val="CACACA"/>
+                      </a:solidFill>
+                      <a:prstDash val="solid"/>
+                      <a:round/>
+                      <a:headEnd type="none" w="med" len="med"/>
+                      <a:tailEnd type="none" w="med" len="med"/>
+                    </a:lnL>
+                    <a:lnR w="6350" cap="flat" cmpd="sng" algn="ctr">
+                      <a:solidFill>
+                        <a:srgbClr val="CACACA"/>
+                      </a:solidFill>
+                      <a:prstDash val="solid"/>
+                      <a:round/>
+                      <a:headEnd type="none" w="med" len="med"/>
+                      <a:tailEnd type="none" w="med" len="med"/>
+                    </a:lnR>
+                    <a:lnT w="6350" cap="flat" cmpd="sng" algn="ctr">
+                      <a:solidFill>
+                        <a:srgbClr val="CACACA"/>
+                      </a:solidFill>
+                      <a:prstDash val="solid"/>
+                      <a:round/>
+                      <a:headEnd type="none" w="med" len="med"/>
+                      <a:tailEnd type="none" w="med" len="med"/>
+                    </a:lnT>
+                    <a:lnB w="6350" cap="flat" cmpd="sng" algn="ctr">
+                      <a:solidFill>
+                        <a:srgbClr val="CACACA"/>
+                      </a:solidFill>
+                      <a:prstDash val="solid"/>
+                      <a:round/>
+                      <a:headEnd type="none" w="med" len="med"/>
+                      <a:tailEnd type="none" w="med" len="med"/>
+                    </a:lnB>
+                    <a:solidFill>
+                      <a:srgbClr val="F4F4F4"/>
+                    </a:solidFill>
+                  </a:tcPr>
+                </a:tc>
+              </a:tr>
+              <a:tr h="457200">
+                <a:tc>
+                  <a:txBody>
+                    <a:bodyPr/>
+                    <a:lstStyle/>
+                    <a:p>
+                      <a:pPr algn="l" indent="0" marL="0">
+                        <a:buNone/>
+                      </a:pPr>
+                      <a:r>
+                        <a:rPr lang="en-US" sz="950" b="1" dirty="0">
+                          <a:solidFill>
+                            <a:srgbClr val="2B2B2B"/>
+                          </a:solidFill>
+                          <a:latin typeface="Verdana" pitchFamily="34" charset="0"/>
+                          <a:ea typeface="Verdana" pitchFamily="34" charset="-122"/>
+                          <a:cs typeface="Verdana" pitchFamily="34" charset="-120"/>
+                        </a:rPr>
+                        <a:t>Coste de los recursos</a:t>
+                      </a:r>
+                      <a:endParaRPr lang="en-US" sz="950" dirty="0">
+                        <a:latin typeface="Verdana" charset="0"/>
+                        <a:ea typeface="Verdana" charset="0"/>
+                        <a:cs typeface="Verdana" charset="0"/>
+                      </a:endParaRPr>
+                    </a:p>
+                  </a:txBody>
+                  <a:tcPr marL="63500" marR="63500" marT="25400" marB="25400" anchor="ctr">
+                    <a:lnL w="6350" cap="flat" cmpd="sng" algn="ctr">
+                      <a:solidFill>
+                        <a:srgbClr val="CACACA"/>
+                      </a:solidFill>
+                      <a:prstDash val="solid"/>
+                      <a:round/>
+                      <a:headEnd type="none" w="med" len="med"/>
+                      <a:tailEnd type="none" w="med" len="med"/>
+                    </a:lnL>
+                    <a:lnR w="6350" cap="flat" cmpd="sng" algn="ctr">
+                      <a:solidFill>
+                        <a:srgbClr val="CACACA"/>
+                      </a:solidFill>
+                      <a:prstDash val="solid"/>
+                      <a:round/>
+                      <a:headEnd type="none" w="med" len="med"/>
+                      <a:tailEnd type="none" w="med" len="med"/>
+                    </a:lnR>
+                    <a:lnT w="6350" cap="flat" cmpd="sng" algn="ctr">
+                      <a:solidFill>
+                        <a:srgbClr val="CACACA"/>
+                      </a:solidFill>
+                      <a:prstDash val="solid"/>
+                      <a:round/>
+                      <a:headEnd type="none" w="med" len="med"/>
+                      <a:tailEnd type="none" w="med" len="med"/>
+                    </a:lnT>
+                    <a:lnB w="6350" cap="flat" cmpd="sng" algn="ctr">
+                      <a:solidFill>
+                        <a:srgbClr val="CACACA"/>
+                      </a:solidFill>
+                      <a:prstDash val="solid"/>
+                      <a:round/>
+                      <a:headEnd type="none" w="med" len="med"/>
+                      <a:tailEnd type="none" w="med" len="med"/>
+                    </a:lnB>
+                    <a:solidFill>
+                      <a:srgbClr val="FFFFFF"/>
+                    </a:solidFill>
+                  </a:tcPr>
+                </a:tc>
+                <a:tc>
+                  <a:txBody>
+                    <a:bodyPr/>
+                    <a:lstStyle/>
+                    <a:p>
+                      <a:pPr algn="l" indent="0" marL="0">
+                        <a:buNone/>
+                      </a:pPr>
+                      <a:r>
+                        <a:rPr lang="en-US" sz="750" dirty="0">
+                          <a:solidFill>
+                            <a:srgbClr val="818181"/>
+                          </a:solidFill>
+                          <a:latin typeface="Verdana" pitchFamily="34" charset="0"/>
+                          <a:ea typeface="Verdana" pitchFamily="34" charset="-122"/>
+                          <a:cs typeface="Verdana" pitchFamily="34" charset="-120"/>
+                        </a:rPr>
+                        <a:t>BCE, MIR: depósitos a la vista y a plazo del sector 2240, ponderados por los saldos del BSI</a:t>
+                      </a:r>
+                      <a:endParaRPr lang="en-US" sz="750" dirty="0">
+                        <a:latin typeface="Verdana" charset="0"/>
+                        <a:ea typeface="Verdana" charset="0"/>
+                        <a:cs typeface="Verdana" charset="0"/>
+                      </a:endParaRPr>
+                    </a:p>
+                  </a:txBody>
+                  <a:tcPr marL="63500" marR="63500" marT="25400" marB="25400" anchor="ctr">
+                    <a:lnL w="6350" cap="flat" cmpd="sng" algn="ctr">
+                      <a:solidFill>
+                        <a:srgbClr val="CACACA"/>
+                      </a:solidFill>
+                      <a:prstDash val="solid"/>
+                      <a:round/>
+                      <a:headEnd type="none" w="med" len="med"/>
+                      <a:tailEnd type="none" w="med" len="med"/>
+                    </a:lnL>
+                    <a:lnR w="6350" cap="flat" cmpd="sng" algn="ctr">
+                      <a:solidFill>
+                        <a:srgbClr val="CACACA"/>
+                      </a:solidFill>
+                      <a:prstDash val="solid"/>
+                      <a:round/>
+                      <a:headEnd type="none" w="med" len="med"/>
+                      <a:tailEnd type="none" w="med" len="med"/>
+                    </a:lnR>
+                    <a:lnT w="6350" cap="flat" cmpd="sng" algn="ctr">
+                      <a:solidFill>
+                        <a:srgbClr val="CACACA"/>
+                      </a:solidFill>
+                      <a:prstDash val="solid"/>
+                      <a:round/>
+                      <a:headEnd type="none" w="med" len="med"/>
+                      <a:tailEnd type="none" w="med" len="med"/>
+                    </a:lnT>
+                    <a:lnB w="6350" cap="flat" cmpd="sng" algn="ctr">
+                      <a:solidFill>
+                        <a:srgbClr val="CACACA"/>
+                      </a:solidFill>
+                      <a:prstDash val="solid"/>
+                      <a:round/>
+                      <a:headEnd type="none" w="med" len="med"/>
+                      <a:tailEnd type="none" w="med" len="med"/>
+                    </a:lnB>
+                    <a:solidFill>
+                      <a:srgbClr val="FFFFFF"/>
+                    </a:solidFill>
+                  </a:tcPr>
+                </a:tc>
+                <a:tc>
+                  <a:txBody>
+                    <a:bodyPr/>
+                    <a:lstStyle/>
+                    <a:p>
+                      <a:pPr algn="l" indent="0" marL="0">
+                        <a:buNone/>
+                      </a:pPr>
+                      <a:r>
+                        <a:rPr lang="en-US" sz="750" dirty="0">
+                          <a:solidFill>
+                            <a:srgbClr val="2B2B2B"/>
+                          </a:solidFill>
+                          <a:latin typeface="Verdana" pitchFamily="34" charset="0"/>
+                          <a:ea typeface="Verdana" pitchFamily="34" charset="-122"/>
+                          <a:cs typeface="Verdana" pitchFamily="34" charset="-120"/>
+                        </a:rPr>
+                        <a:t>Depósito de SOCIEDADES NO FINANCIERAS, no de PYME: incluye la tesorería de la gran empresa. Supone además que el préstamo se financia con depósito de empresa y no en mercado.</a:t>
+                      </a:r>
+                      <a:endParaRPr lang="en-US" sz="750" dirty="0">
+                        <a:latin typeface="Verdana" charset="0"/>
+                        <a:ea typeface="Verdana" charset="0"/>
+                        <a:cs typeface="Verdana" charset="0"/>
+                      </a:endParaRPr>
+                    </a:p>
+                  </a:txBody>
+                  <a:tcPr marL="63500" marR="63500" marT="25400" marB="25400" anchor="ctr">
+                    <a:lnL w="6350" cap="flat" cmpd="sng" algn="ctr">
+                      <a:solidFill>
+                        <a:srgbClr val="CACACA"/>
+                      </a:solidFill>
+                      <a:prstDash val="solid"/>
+                      <a:round/>
+                      <a:headEnd type="none" w="med" len="med"/>
+                      <a:tailEnd type="none" w="med" len="med"/>
+                    </a:lnL>
+                    <a:lnR w="6350" cap="flat" cmpd="sng" algn="ctr">
+                      <a:solidFill>
+                        <a:srgbClr val="CACACA"/>
+                      </a:solidFill>
+                      <a:prstDash val="solid"/>
+                      <a:round/>
+                      <a:headEnd type="none" w="med" len="med"/>
+                      <a:tailEnd type="none" w="med" len="med"/>
+                    </a:lnR>
+                    <a:lnT w="6350" cap="flat" cmpd="sng" algn="ctr">
+                      <a:solidFill>
+                        <a:srgbClr val="CACACA"/>
+                      </a:solidFill>
+                      <a:prstDash val="solid"/>
+                      <a:round/>
+                      <a:headEnd type="none" w="med" len="med"/>
+                      <a:tailEnd type="none" w="med" len="med"/>
+                    </a:lnT>
+                    <a:lnB w="6350" cap="flat" cmpd="sng" algn="ctr">
+                      <a:solidFill>
+                        <a:srgbClr val="CACACA"/>
+                      </a:solidFill>
+                      <a:prstDash val="solid"/>
+                      <a:round/>
+                      <a:headEnd type="none" w="med" len="med"/>
+                      <a:tailEnd type="none" w="med" len="med"/>
+                    </a:lnB>
+                    <a:solidFill>
+                      <a:srgbClr val="FFFFFF"/>
+                    </a:solidFill>
+                  </a:tcPr>
+                </a:tc>
+                <a:tc>
+                  <a:txBody>
+                    <a:bodyPr/>
+                    <a:lstStyle/>
+                    <a:p>
+                      <a:pPr algn="ctr" indent="0" marL="0">
+                        <a:buNone/>
+                      </a:pPr>
+                      <a:r>
+                        <a:rPr lang="en-US" sz="800" b="1" dirty="0">
+                          <a:solidFill>
+                            <a:srgbClr val="2B2B2B"/>
+                          </a:solidFill>
+                          <a:latin typeface="Verdana" pitchFamily="34" charset="0"/>
+                          <a:ea typeface="Verdana" pitchFamily="34" charset="-122"/>
+                          <a:cs typeface="Verdana" pitchFamily="34" charset="-120"/>
+                        </a:rPr>
+                        <a:t>PROXY</a:t>
+                      </a:r>
+                      <a:endParaRPr lang="en-US" sz="800" dirty="0">
+                        <a:latin typeface="Verdana" charset="0"/>
+                        <a:ea typeface="Verdana" charset="0"/>
+                        <a:cs typeface="Verdana" charset="0"/>
+                      </a:endParaRPr>
+                    </a:p>
+                  </a:txBody>
+                  <a:tcPr marL="63500" marR="63500" marT="25400" marB="25400" anchor="ctr">
+                    <a:lnL w="6350" cap="flat" cmpd="sng" algn="ctr">
+                      <a:solidFill>
+                        <a:srgbClr val="CACACA"/>
+                      </a:solidFill>
+                      <a:prstDash val="solid"/>
+                      <a:round/>
+                      <a:headEnd type="none" w="med" len="med"/>
+                      <a:tailEnd type="none" w="med" len="med"/>
+                    </a:lnL>
+                    <a:lnR w="6350" cap="flat" cmpd="sng" algn="ctr">
+                      <a:solidFill>
+                        <a:srgbClr val="CACACA"/>
+                      </a:solidFill>
+                      <a:prstDash val="solid"/>
+                      <a:round/>
+                      <a:headEnd type="none" w="med" len="med"/>
+                      <a:tailEnd type="none" w="med" len="med"/>
+                    </a:lnR>
+                    <a:lnT w="6350" cap="flat" cmpd="sng" algn="ctr">
+                      <a:solidFill>
+                        <a:srgbClr val="CACACA"/>
+                      </a:solidFill>
+                      <a:prstDash val="solid"/>
+                      <a:round/>
+                      <a:headEnd type="none" w="med" len="med"/>
+                      <a:tailEnd type="none" w="med" len="med"/>
+                    </a:lnT>
+                    <a:lnB w="6350" cap="flat" cmpd="sng" algn="ctr">
+                      <a:solidFill>
+                        <a:srgbClr val="CACACA"/>
+                      </a:solidFill>
+                      <a:prstDash val="solid"/>
+                      <a:round/>
+                      <a:headEnd type="none" w="med" len="med"/>
+                      <a:tailEnd type="none" w="med" len="med"/>
+                    </a:lnB>
+                    <a:solidFill>
+                      <a:srgbClr val="FFAB70"/>
+                    </a:solidFill>
+                  </a:tcPr>
+                </a:tc>
+                <a:tc>
+                  <a:txBody>
+                    <a:bodyPr/>
+                    <a:lstStyle/>
+                    <a:p>
+                      <a:pPr algn="ctr" indent="0" marL="0">
+                        <a:buNone/>
+                      </a:pPr>
+                      <a:r>
+                        <a:rPr lang="en-US" sz="900" dirty="0">
+                          <a:solidFill>
+                            <a:srgbClr val="2B2B2B"/>
+                          </a:solidFill>
+                          <a:latin typeface="Verdana" pitchFamily="34" charset="0"/>
+                          <a:ea typeface="Verdana" pitchFamily="34" charset="-122"/>
+                          <a:cs typeface="Verdana" pitchFamily="34" charset="-120"/>
+                        </a:rPr>
+                        <a:t>2026-07</a:t>
+                      </a:r>
+                      <a:endParaRPr lang="en-US" sz="900" dirty="0">
+                        <a:latin typeface="Verdana" charset="0"/>
+                        <a:ea typeface="Verdana" charset="0"/>
+                        <a:cs typeface="Verdana" charset="0"/>
+                      </a:endParaRPr>
+                    </a:p>
+                  </a:txBody>
+                  <a:tcPr marL="63500" marR="63500" marT="25400" marB="25400" anchor="ctr">
+                    <a:lnL w="6350" cap="flat" cmpd="sng" algn="ctr">
+                      <a:solidFill>
+                        <a:srgbClr val="CACACA"/>
+                      </a:solidFill>
+                      <a:prstDash val="solid"/>
+                      <a:round/>
+                      <a:headEnd type="none" w="med" len="med"/>
+                      <a:tailEnd type="none" w="med" len="med"/>
+                    </a:lnL>
+                    <a:lnR w="6350" cap="flat" cmpd="sng" algn="ctr">
+                      <a:solidFill>
+                        <a:srgbClr val="CACACA"/>
+                      </a:solidFill>
+                      <a:prstDash val="solid"/>
+                      <a:round/>
+                      <a:headEnd type="none" w="med" len="med"/>
+                      <a:tailEnd type="none" w="med" len="med"/>
+                    </a:lnR>
+                    <a:lnT w="6350" cap="flat" cmpd="sng" algn="ctr">
+                      <a:solidFill>
+                        <a:srgbClr val="CACACA"/>
+                      </a:solidFill>
+                      <a:prstDash val="solid"/>
+                      <a:round/>
+                      <a:headEnd type="none" w="med" len="med"/>
+                      <a:tailEnd type="none" w="med" len="med"/>
+                    </a:lnT>
+                    <a:lnB w="6350" cap="flat" cmpd="sng" algn="ctr">
+                      <a:solidFill>
+                        <a:srgbClr val="CACACA"/>
+                      </a:solidFill>
+                      <a:prstDash val="solid"/>
+                      <a:round/>
+                      <a:headEnd type="none" w="med" len="med"/>
+                      <a:tailEnd type="none" w="med" len="med"/>
+                    </a:lnB>
+                    <a:solidFill>
+                      <a:srgbClr val="FFFFFF"/>
+                    </a:solidFill>
+                  </a:tcPr>
+                </a:tc>
+              </a:tr>
+              <a:tr h="457200">
+                <a:tc>
+                  <a:txBody>
+                    <a:bodyPr/>
+                    <a:lstStyle/>
+                    <a:p>
+                      <a:pPr algn="l" indent="0" marL="0">
+                        <a:buNone/>
+                      </a:pPr>
+                      <a:r>
+                        <a:rPr lang="en-US" sz="950" b="1" dirty="0">
+                          <a:solidFill>
+                            <a:srgbClr val="2B2B2B"/>
+                          </a:solidFill>
+                          <a:latin typeface="Verdana" pitchFamily="34" charset="0"/>
+                          <a:ea typeface="Verdana" pitchFamily="34" charset="-122"/>
+                          <a:cs typeface="Verdana" pitchFamily="34" charset="-120"/>
+                        </a:rPr>
+                        <a:t>Coste del riesgo</a:t>
+                      </a:r>
+                      <a:endParaRPr lang="en-US" sz="950" dirty="0">
+                        <a:latin typeface="Verdana" charset="0"/>
+                        <a:ea typeface="Verdana" charset="0"/>
+                        <a:cs typeface="Verdana" charset="0"/>
+                      </a:endParaRPr>
+                    </a:p>
+                  </a:txBody>
+                  <a:tcPr marL="63500" marR="63500" marT="25400" marB="25400" anchor="ctr">
+                    <a:lnL w="6350" cap="flat" cmpd="sng" algn="ctr">
+                      <a:solidFill>
+                        <a:srgbClr val="CACACA"/>
+                      </a:solidFill>
+                      <a:prstDash val="solid"/>
+                      <a:round/>
+                      <a:headEnd type="none" w="med" len="med"/>
+                      <a:tailEnd type="none" w="med" len="med"/>
+                    </a:lnL>
+                    <a:lnR w="6350" cap="flat" cmpd="sng" algn="ctr">
+                      <a:solidFill>
+                        <a:srgbClr val="CACACA"/>
+                      </a:solidFill>
+                      <a:prstDash val="solid"/>
+                      <a:round/>
+                      <a:headEnd type="none" w="med" len="med"/>
+                      <a:tailEnd type="none" w="med" len="med"/>
+                    </a:lnR>
+                    <a:lnT w="6350" cap="flat" cmpd="sng" algn="ctr">
+                      <a:solidFill>
+                        <a:srgbClr val="CACACA"/>
+                      </a:solidFill>
+                      <a:prstDash val="solid"/>
+                      <a:round/>
+                      <a:headEnd type="none" w="med" len="med"/>
+                      <a:tailEnd type="none" w="med" len="med"/>
+                    </a:lnT>
+                    <a:lnB w="6350" cap="flat" cmpd="sng" algn="ctr">
+                      <a:solidFill>
+                        <a:srgbClr val="CACACA"/>
+                      </a:solidFill>
+                      <a:prstDash val="solid"/>
+                      <a:round/>
+                      <a:headEnd type="none" w="med" len="med"/>
+                      <a:tailEnd type="none" w="med" len="med"/>
+                    </a:lnB>
+                    <a:solidFill>
+                      <a:srgbClr val="F4F4F4"/>
+                    </a:solidFill>
+                  </a:tcPr>
+                </a:tc>
+                <a:tc>
+                  <a:txBody>
+                    <a:bodyPr/>
+                    <a:lstStyle/>
+                    <a:p>
+                      <a:pPr algn="l" indent="0" marL="0">
+                        <a:buNone/>
+                      </a:pPr>
+                      <a:r>
+                        <a:rPr lang="en-US" sz="750" dirty="0">
+                          <a:solidFill>
+                            <a:srgbClr val="818181"/>
+                          </a:solidFill>
+                          <a:latin typeface="Verdana" pitchFamily="34" charset="0"/>
+                          <a:ea typeface="Verdana" pitchFamily="34" charset="-122"/>
+                          <a:cs typeface="Verdana" pitchFamily="34" charset="-120"/>
+                        </a:rPr>
+                        <a:t>EBA, COREP C 9.02: PD × LGD de la clase IRB «Corporates – of which SME»</a:t>
+                      </a:r>
+                      <a:endParaRPr lang="en-US" sz="750" dirty="0">
+                        <a:latin typeface="Verdana" charset="0"/>
+                        <a:ea typeface="Verdana" charset="0"/>
+                        <a:cs typeface="Verdana" charset="0"/>
+                      </a:endParaRPr>
+                    </a:p>
+                  </a:txBody>
+                  <a:tcPr marL="63500" marR="63500" marT="25400" marB="25400" anchor="ctr">
+                    <a:lnL w="6350" cap="flat" cmpd="sng" algn="ctr">
+                      <a:solidFill>
+                        <a:srgbClr val="CACACA"/>
+                      </a:solidFill>
+                      <a:prstDash val="solid"/>
+                      <a:round/>
+                      <a:headEnd type="none" w="med" len="med"/>
+                      <a:tailEnd type="none" w="med" len="med"/>
+                    </a:lnL>
+                    <a:lnR w="6350" cap="flat" cmpd="sng" algn="ctr">
+                      <a:solidFill>
+                        <a:srgbClr val="CACACA"/>
+                      </a:solidFill>
+                      <a:prstDash val="solid"/>
+                      <a:round/>
+                      <a:headEnd type="none" w="med" len="med"/>
+                      <a:tailEnd type="none" w="med" len="med"/>
+                    </a:lnR>
+                    <a:lnT w="6350" cap="flat" cmpd="sng" algn="ctr">
+                      <a:solidFill>
+                        <a:srgbClr val="CACACA"/>
+                      </a:solidFill>
+                      <a:prstDash val="solid"/>
+                      <a:round/>
+                      <a:headEnd type="none" w="med" len="med"/>
+                      <a:tailEnd type="none" w="med" len="med"/>
+                    </a:lnT>
+                    <a:lnB w="6350" cap="flat" cmpd="sng" algn="ctr">
+                      <a:solidFill>
+                        <a:srgbClr val="CACACA"/>
+                      </a:solidFill>
+                      <a:prstDash val="solid"/>
+                      <a:round/>
+                      <a:headEnd type="none" w="med" len="med"/>
+                      <a:tailEnd type="none" w="med" len="med"/>
+                    </a:lnB>
+                    <a:solidFill>
+                      <a:srgbClr val="F4F4F4"/>
+                    </a:solidFill>
+                  </a:tcPr>
+                </a:tc>
+                <a:tc>
+                  <a:txBody>
+                    <a:bodyPr/>
+                    <a:lstStyle/>
+                    <a:p>
+                      <a:pPr algn="l" indent="0" marL="0">
+                        <a:buNone/>
+                      </a:pPr>
+                      <a:r>
+                        <a:rPr lang="en-US" sz="750" dirty="0">
+                          <a:solidFill>
+                            <a:srgbClr val="2B2B2B"/>
+                          </a:solidFill>
+                          <a:latin typeface="Verdana" pitchFamily="34" charset="0"/>
+                          <a:ea typeface="Verdana" pitchFamily="34" charset="-122"/>
+                          <a:cs typeface="Verdana" pitchFamily="34" charset="-120"/>
+                        </a:rPr>
+                        <a:t>De PYME según el CRR (facturación hasta 50 M€). Matices: solo la cartera IRB, mediana de entidades y pérdida esperada, no dotación contable.</a:t>
+                      </a:r>
+                      <a:endParaRPr lang="en-US" sz="750" dirty="0">
+                        <a:latin typeface="Verdana" charset="0"/>
+                        <a:ea typeface="Verdana" charset="0"/>
+                        <a:cs typeface="Verdana" charset="0"/>
+                      </a:endParaRPr>
+                    </a:p>
+                  </a:txBody>
+                  <a:tcPr marL="63500" marR="63500" marT="25400" marB="25400" anchor="ctr">
+                    <a:lnL w="6350" cap="flat" cmpd="sng" algn="ctr">
+                      <a:solidFill>
+                        <a:srgbClr val="CACACA"/>
+                      </a:solidFill>
+                      <a:prstDash val="solid"/>
+                      <a:round/>
+                      <a:headEnd type="none" w="med" len="med"/>
+                      <a:tailEnd type="none" w="med" len="med"/>
+                    </a:lnL>
+                    <a:lnR w="6350" cap="flat" cmpd="sng" algn="ctr">
+                      <a:solidFill>
+                        <a:srgbClr val="CACACA"/>
+                      </a:solidFill>
+                      <a:prstDash val="solid"/>
+                      <a:round/>
+                      <a:headEnd type="none" w="med" len="med"/>
+                      <a:tailEnd type="none" w="med" len="med"/>
+                    </a:lnR>
+                    <a:lnT w="6350" cap="flat" cmpd="sng" algn="ctr">
+                      <a:solidFill>
+                        <a:srgbClr val="CACACA"/>
+                      </a:solidFill>
+                      <a:prstDash val="solid"/>
+                      <a:round/>
+                      <a:headEnd type="none" w="med" len="med"/>
+                      <a:tailEnd type="none" w="med" len="med"/>
+                    </a:lnT>
+                    <a:lnB w="6350" cap="flat" cmpd="sng" algn="ctr">
+                      <a:solidFill>
+                        <a:srgbClr val="CACACA"/>
+                      </a:solidFill>
+                      <a:prstDash val="solid"/>
+                      <a:round/>
+                      <a:headEnd type="none" w="med" len="med"/>
+                      <a:tailEnd type="none" w="med" len="med"/>
+                    </a:lnB>
+                    <a:solidFill>
+                      <a:srgbClr val="F4F4F4"/>
+                    </a:solidFill>
+                  </a:tcPr>
+                </a:tc>
+                <a:tc>
+                  <a:txBody>
+                    <a:bodyPr/>
+                    <a:lstStyle/>
+                    <a:p>
+                      <a:pPr algn="ctr" indent="0" marL="0">
+                        <a:buNone/>
+                      </a:pPr>
+                      <a:r>
+                        <a:rPr lang="en-US" sz="800" b="1" dirty="0">
+                          <a:solidFill>
+                            <a:srgbClr val="2B2B2B"/>
+                          </a:solidFill>
+                          <a:latin typeface="Verdana" pitchFamily="34" charset="0"/>
+                          <a:ea typeface="Verdana" pitchFamily="34" charset="-122"/>
+                          <a:cs typeface="Verdana" pitchFamily="34" charset="-120"/>
+                        </a:rPr>
+                        <a:t>PYME</a:t>
+                      </a:r>
+                      <a:endParaRPr lang="en-US" sz="800" dirty="0">
+                        <a:latin typeface="Verdana" charset="0"/>
+                        <a:ea typeface="Verdana" charset="0"/>
+                        <a:cs typeface="Verdana" charset="0"/>
+                      </a:endParaRPr>
+                    </a:p>
+                  </a:txBody>
+                  <a:tcPr marL="63500" marR="63500" marT="25400" marB="25400" anchor="ctr">
+                    <a:lnL w="6350" cap="flat" cmpd="sng" algn="ctr">
+                      <a:solidFill>
+                        <a:srgbClr val="CACACA"/>
+                      </a:solidFill>
+                      <a:prstDash val="solid"/>
+                      <a:round/>
+                      <a:headEnd type="none" w="med" len="med"/>
+                      <a:tailEnd type="none" w="med" len="med"/>
+                    </a:lnL>
+                    <a:lnR w="6350" cap="flat" cmpd="sng" algn="ctr">
+                      <a:solidFill>
+                        <a:srgbClr val="CACACA"/>
+                      </a:solidFill>
+                      <a:prstDash val="solid"/>
+                      <a:round/>
+                      <a:headEnd type="none" w="med" len="med"/>
+                      <a:tailEnd type="none" w="med" len="med"/>
+                    </a:lnR>
+                    <a:lnT w="6350" cap="flat" cmpd="sng" algn="ctr">
+                      <a:solidFill>
+                        <a:srgbClr val="CACACA"/>
+                      </a:solidFill>
+                      <a:prstDash val="solid"/>
+                      <a:round/>
+                      <a:headEnd type="none" w="med" len="med"/>
+                      <a:tailEnd type="none" w="med" len="med"/>
+                    </a:lnT>
+                    <a:lnB w="6350" cap="flat" cmpd="sng" algn="ctr">
+                      <a:solidFill>
+                        <a:srgbClr val="CACACA"/>
+                      </a:solidFill>
+                      <a:prstDash val="solid"/>
+                      <a:round/>
+                      <a:headEnd type="none" w="med" len="med"/>
+                      <a:tailEnd type="none" w="med" len="med"/>
+                    </a:lnB>
+                    <a:solidFill>
+                      <a:srgbClr val="77BFEE"/>
+                    </a:solidFill>
+                  </a:tcPr>
+                </a:tc>
+                <a:tc>
+                  <a:txBody>
+                    <a:bodyPr/>
+                    <a:lstStyle/>
+                    <a:p>
+                      <a:pPr algn="ctr" indent="0" marL="0">
+                        <a:buNone/>
+                      </a:pPr>
+                      <a:r>
+                        <a:rPr lang="en-US" sz="900" dirty="0">
+                          <a:solidFill>
+                            <a:srgbClr val="2B2B2B"/>
+                          </a:solidFill>
+                          <a:latin typeface="Verdana" pitchFamily="34" charset="0"/>
+                          <a:ea typeface="Verdana" pitchFamily="34" charset="-122"/>
+                          <a:cs typeface="Verdana" pitchFamily="34" charset="-120"/>
+                        </a:rPr>
+                        <a:t>2026-Q1</a:t>
+                      </a:r>
+                      <a:endParaRPr lang="en-US" sz="900" dirty="0">
+                        <a:latin typeface="Verdana" charset="0"/>
+                        <a:ea typeface="Verdana" charset="0"/>
+                        <a:cs typeface="Verdana" charset="0"/>
+                      </a:endParaRPr>
+                    </a:p>
+                  </a:txBody>
+                  <a:tcPr marL="63500" marR="63500" marT="25400" marB="25400" anchor="ctr">
+                    <a:lnL w="6350" cap="flat" cmpd="sng" algn="ctr">
+                      <a:solidFill>
+                        <a:srgbClr val="CACACA"/>
+                      </a:solidFill>
+                      <a:prstDash val="solid"/>
+                      <a:round/>
+                      <a:headEnd type="none" w="med" len="med"/>
+                      <a:tailEnd type="none" w="med" len="med"/>
+                    </a:lnL>
+                    <a:lnR w="6350" cap="flat" cmpd="sng" algn="ctr">
+                      <a:solidFill>
+                        <a:srgbClr val="CACACA"/>
+                      </a:solidFill>
+                      <a:prstDash val="solid"/>
+                      <a:round/>
+                      <a:headEnd type="none" w="med" len="med"/>
+                      <a:tailEnd type="none" w="med" len="med"/>
+                    </a:lnR>
+                    <a:lnT w="6350" cap="flat" cmpd="sng" algn="ctr">
+                      <a:solidFill>
+                        <a:srgbClr val="CACACA"/>
+                      </a:solidFill>
+                      <a:prstDash val="solid"/>
+                      <a:round/>
+                      <a:headEnd type="none" w="med" len="med"/>
+                      <a:tailEnd type="none" w="med" len="med"/>
+                    </a:lnT>
+                    <a:lnB w="6350" cap="flat" cmpd="sng" algn="ctr">
+                      <a:solidFill>
+                        <a:srgbClr val="CACACA"/>
+                      </a:solidFill>
+                      <a:prstDash val="solid"/>
+                      <a:round/>
+                      <a:headEnd type="none" w="med" len="med"/>
+                      <a:tailEnd type="none" w="med" len="med"/>
+                    </a:lnB>
+                    <a:solidFill>
+                      <a:srgbClr val="F4F4F4"/>
+                    </a:solidFill>
+                  </a:tcPr>
+                </a:tc>
+              </a:tr>
+              <a:tr h="457200">
+                <a:tc>
+                  <a:txBody>
+                    <a:bodyPr/>
+                    <a:lstStyle/>
+                    <a:p>
+                      <a:pPr algn="l" indent="0" marL="0">
+                        <a:buNone/>
+                      </a:pPr>
+                      <a:r>
+                        <a:rPr lang="en-US" sz="950" b="1" dirty="0">
+                          <a:solidFill>
+                            <a:srgbClr val="2B2B2B"/>
+                          </a:solidFill>
+                          <a:latin typeface="Verdana" pitchFamily="34" charset="0"/>
+                          <a:ea typeface="Verdana" pitchFamily="34" charset="-122"/>
+                          <a:cs typeface="Verdana" pitchFamily="34" charset="-120"/>
+                        </a:rPr>
+                        <a:t>Densidad de RWA</a:t>
+                      </a:r>
+                      <a:endParaRPr lang="en-US" sz="950" dirty="0">
+                        <a:latin typeface="Verdana" charset="0"/>
+                        <a:ea typeface="Verdana" charset="0"/>
+                        <a:cs typeface="Verdana" charset="0"/>
+                      </a:endParaRPr>
+                    </a:p>
+                  </a:txBody>
+                  <a:tcPr marL="63500" marR="63500" marT="25400" marB="25400" anchor="ctr">
+                    <a:lnL w="6350" cap="flat" cmpd="sng" algn="ctr">
+                      <a:solidFill>
+                        <a:srgbClr val="CACACA"/>
+                      </a:solidFill>
+                      <a:prstDash val="solid"/>
+                      <a:round/>
+                      <a:headEnd type="none" w="med" len="med"/>
+                      <a:tailEnd type="none" w="med" len="med"/>
+                    </a:lnL>
+                    <a:lnR w="6350" cap="flat" cmpd="sng" algn="ctr">
+                      <a:solidFill>
+                        <a:srgbClr val="CACACA"/>
+                      </a:solidFill>
+                      <a:prstDash val="solid"/>
+                      <a:round/>
+                      <a:headEnd type="none" w="med" len="med"/>
+                      <a:tailEnd type="none" w="med" len="med"/>
+                    </a:lnR>
+                    <a:lnT w="6350" cap="flat" cmpd="sng" algn="ctr">
+                      <a:solidFill>
+                        <a:srgbClr val="CACACA"/>
+                      </a:solidFill>
+                      <a:prstDash val="solid"/>
+                      <a:round/>
+                      <a:headEnd type="none" w="med" len="med"/>
+                      <a:tailEnd type="none" w="med" len="med"/>
+                    </a:lnT>
+                    <a:lnB w="6350" cap="flat" cmpd="sng" algn="ctr">
+                      <a:solidFill>
+                        <a:srgbClr val="CACACA"/>
+                      </a:solidFill>
+                      <a:prstDash val="solid"/>
+                      <a:round/>
+                      <a:headEnd type="none" w="med" len="med"/>
+                      <a:tailEnd type="none" w="med" len="med"/>
+                    </a:lnB>
+                    <a:solidFill>
+                      <a:srgbClr val="FFFFFF"/>
+                    </a:solidFill>
+                  </a:tcPr>
+                </a:tc>
+                <a:tc>
+                  <a:txBody>
+                    <a:bodyPr/>
+                    <a:lstStyle/>
+                    <a:p>
+                      <a:pPr algn="l" indent="0" marL="0">
+                        <a:buNone/>
+                      </a:pPr>
+                      <a:r>
+                        <a:rPr lang="en-US" sz="750" dirty="0">
+                          <a:solidFill>
+                            <a:srgbClr val="818181"/>
+                          </a:solidFill>
+                          <a:latin typeface="Verdana" pitchFamily="34" charset="0"/>
+                          <a:ea typeface="Verdana" pitchFamily="34" charset="-122"/>
+                          <a:cs typeface="Verdana" pitchFamily="34" charset="-120"/>
+                        </a:rPr>
+                        <a:t>EBA, Transparency Exercise: RWA sobre valor de exposición de la cartera PYME, estándar más IRB</a:t>
+                      </a:r>
+                      <a:endParaRPr lang="en-US" sz="750" dirty="0">
+                        <a:latin typeface="Verdana" charset="0"/>
+                        <a:ea typeface="Verdana" charset="0"/>
+                        <a:cs typeface="Verdana" charset="0"/>
+                      </a:endParaRPr>
+                    </a:p>
+                  </a:txBody>
+                  <a:tcPr marL="63500" marR="63500" marT="25400" marB="25400" anchor="ctr">
+                    <a:lnL w="6350" cap="flat" cmpd="sng" algn="ctr">
+                      <a:solidFill>
+                        <a:srgbClr val="CACACA"/>
+                      </a:solidFill>
+                      <a:prstDash val="solid"/>
+                      <a:round/>
+                      <a:headEnd type="none" w="med" len="med"/>
+                      <a:tailEnd type="none" w="med" len="med"/>
+                    </a:lnL>
+                    <a:lnR w="6350" cap="flat" cmpd="sng" algn="ctr">
+                      <a:solidFill>
+                        <a:srgbClr val="CACACA"/>
+                      </a:solidFill>
+                      <a:prstDash val="solid"/>
+                      <a:round/>
+                      <a:headEnd type="none" w="med" len="med"/>
+                      <a:tailEnd type="none" w="med" len="med"/>
+                    </a:lnR>
+                    <a:lnT w="6350" cap="flat" cmpd="sng" algn="ctr">
+                      <a:solidFill>
+                        <a:srgbClr val="CACACA"/>
+                      </a:solidFill>
+                      <a:prstDash val="solid"/>
+                      <a:round/>
+                      <a:headEnd type="none" w="med" len="med"/>
+                      <a:tailEnd type="none" w="med" len="med"/>
+                    </a:lnT>
+                    <a:lnB w="6350" cap="flat" cmpd="sng" algn="ctr">
+                      <a:solidFill>
+                        <a:srgbClr val="CACACA"/>
+                      </a:solidFill>
+                      <a:prstDash val="solid"/>
+                      <a:round/>
+                      <a:headEnd type="none" w="med" len="med"/>
+                      <a:tailEnd type="none" w="med" len="med"/>
+                    </a:lnB>
+                    <a:solidFill>
+                      <a:srgbClr val="FFFFFF"/>
+                    </a:solidFill>
+                  </a:tcPr>
+                </a:tc>
+                <a:tc>
+                  <a:txBody>
+                    <a:bodyPr/>
+                    <a:lstStyle/>
+                    <a:p>
+                      <a:pPr algn="l" indent="0" marL="0">
+                        <a:buNone/>
+                      </a:pPr>
+                      <a:r>
+                        <a:rPr lang="en-US" sz="750" dirty="0">
+                          <a:solidFill>
+                            <a:srgbClr val="2B2B2B"/>
+                          </a:solidFill>
+                          <a:latin typeface="Verdana" pitchFamily="34" charset="0"/>
+                          <a:ea typeface="Verdana" pitchFamily="34" charset="-122"/>
+                          <a:cs typeface="Verdana" pitchFamily="34" charset="-120"/>
+                        </a:rPr>
+                        <a:t>De PYME según el CRR, con el factor de apoyo del art. 501. Pero se agrega por supervisor e incluye PYME extranjera (el 46 % en España). Con solo la local, la densidad baja entre 1,7 y 4,4 pp en seis de los siete; el orden entre países no cambia.</a:t>
+                      </a:r>
+                      <a:endParaRPr lang="en-US" sz="750" dirty="0">
+                        <a:latin typeface="Verdana" charset="0"/>
+                        <a:ea typeface="Verdana" charset="0"/>
+                        <a:cs typeface="Verdana" charset="0"/>
+                      </a:endParaRPr>
+                    </a:p>
+                  </a:txBody>
+                  <a:tcPr marL="63500" marR="63500" marT="25400" marB="25400" anchor="ctr">
+                    <a:lnL w="6350" cap="flat" cmpd="sng" algn="ctr">
+                      <a:solidFill>
+                        <a:srgbClr val="CACACA"/>
+                      </a:solidFill>
+                      <a:prstDash val="solid"/>
+                      <a:round/>
+                      <a:headEnd type="none" w="med" len="med"/>
+                      <a:tailEnd type="none" w="med" len="med"/>
+                    </a:lnL>
+                    <a:lnR w="6350" cap="flat" cmpd="sng" algn="ctr">
+                      <a:solidFill>
+                        <a:srgbClr val="CACACA"/>
+                      </a:solidFill>
+                      <a:prstDash val="solid"/>
+                      <a:round/>
+                      <a:headEnd type="none" w="med" len="med"/>
+                      <a:tailEnd type="none" w="med" len="med"/>
+                    </a:lnR>
+                    <a:lnT w="6350" cap="flat" cmpd="sng" algn="ctr">
+                      <a:solidFill>
+                        <a:srgbClr val="CACACA"/>
+                      </a:solidFill>
+                      <a:prstDash val="solid"/>
+                      <a:round/>
+                      <a:headEnd type="none" w="med" len="med"/>
+                      <a:tailEnd type="none" w="med" len="med"/>
+                    </a:lnT>
+                    <a:lnB w="6350" cap="flat" cmpd="sng" algn="ctr">
+                      <a:solidFill>
+                        <a:srgbClr val="CACACA"/>
+                      </a:solidFill>
+                      <a:prstDash val="solid"/>
+                      <a:round/>
+                      <a:headEnd type="none" w="med" len="med"/>
+                      <a:tailEnd type="none" w="med" len="med"/>
+                    </a:lnB>
+                    <a:solidFill>
+                      <a:srgbClr val="FFFFFF"/>
+                    </a:solidFill>
+                  </a:tcPr>
+                </a:tc>
+                <a:tc>
+                  <a:txBody>
+                    <a:bodyPr/>
+                    <a:lstStyle/>
+                    <a:p>
+                      <a:pPr algn="ctr" indent="0" marL="0">
+                        <a:buNone/>
+                      </a:pPr>
+                      <a:r>
+                        <a:rPr lang="en-US" sz="800" b="1" dirty="0">
+                          <a:solidFill>
+                            <a:srgbClr val="2B2B2B"/>
+                          </a:solidFill>
+                          <a:latin typeface="Verdana" pitchFamily="34" charset="0"/>
+                          <a:ea typeface="Verdana" pitchFamily="34" charset="-122"/>
+                          <a:cs typeface="Verdana" pitchFamily="34" charset="-120"/>
+                        </a:rPr>
+                        <a:t>PYME</a:t>
+                      </a:r>
+                      <a:endParaRPr lang="en-US" sz="800" dirty="0">
+                        <a:latin typeface="Verdana" charset="0"/>
+                        <a:ea typeface="Verdana" charset="0"/>
+                        <a:cs typeface="Verdana" charset="0"/>
+                      </a:endParaRPr>
+                    </a:p>
+                  </a:txBody>
+                  <a:tcPr marL="63500" marR="63500" marT="25400" marB="25400" anchor="ctr">
+                    <a:lnL w="6350" cap="flat" cmpd="sng" algn="ctr">
+                      <a:solidFill>
+                        <a:srgbClr val="CACACA"/>
+                      </a:solidFill>
+                      <a:prstDash val="solid"/>
+                      <a:round/>
+                      <a:headEnd type="none" w="med" len="med"/>
+                      <a:tailEnd type="none" w="med" len="med"/>
+                    </a:lnL>
+                    <a:lnR w="6350" cap="flat" cmpd="sng" algn="ctr">
+                      <a:solidFill>
+                        <a:srgbClr val="CACACA"/>
+                      </a:solidFill>
+                      <a:prstDash val="solid"/>
+                      <a:round/>
+                      <a:headEnd type="none" w="med" len="med"/>
+                      <a:tailEnd type="none" w="med" len="med"/>
+                    </a:lnR>
+                    <a:lnT w="6350" cap="flat" cmpd="sng" algn="ctr">
+                      <a:solidFill>
+                        <a:srgbClr val="CACACA"/>
+                      </a:solidFill>
+                      <a:prstDash val="solid"/>
+                      <a:round/>
+                      <a:headEnd type="none" w="med" len="med"/>
+                      <a:tailEnd type="none" w="med" len="med"/>
+                    </a:lnT>
+                    <a:lnB w="6350" cap="flat" cmpd="sng" algn="ctr">
+                      <a:solidFill>
+                        <a:srgbClr val="CACACA"/>
+                      </a:solidFill>
+                      <a:prstDash val="solid"/>
+                      <a:round/>
+                      <a:headEnd type="none" w="med" len="med"/>
+                      <a:tailEnd type="none" w="med" len="med"/>
+                    </a:lnB>
+                    <a:solidFill>
+                      <a:srgbClr val="77BFEE"/>
+                    </a:solidFill>
+                  </a:tcPr>
+                </a:tc>
+                <a:tc>
+                  <a:txBody>
+                    <a:bodyPr/>
+                    <a:lstStyle/>
+                    <a:p>
+                      <a:pPr algn="ctr" indent="0" marL="0">
+                        <a:buNone/>
+                      </a:pPr>
+                      <a:r>
+                        <a:rPr lang="en-US" sz="900" dirty="0">
+                          <a:solidFill>
+                            <a:srgbClr val="2B2B2B"/>
+                          </a:solidFill>
+                          <a:latin typeface="Verdana" pitchFamily="34" charset="0"/>
+                          <a:ea typeface="Verdana" pitchFamily="34" charset="-122"/>
+                          <a:cs typeface="Verdana" pitchFamily="34" charset="-120"/>
+                        </a:rPr>
+                        <a:t>2025-06</a:t>
+                      </a:r>
+                      <a:endParaRPr lang="en-US" sz="900" dirty="0">
+                        <a:latin typeface="Verdana" charset="0"/>
+                        <a:ea typeface="Verdana" charset="0"/>
+                        <a:cs typeface="Verdana" charset="0"/>
+                      </a:endParaRPr>
+                    </a:p>
+                  </a:txBody>
+                  <a:tcPr marL="63500" marR="63500" marT="25400" marB="25400" anchor="ctr">
+                    <a:lnL w="6350" cap="flat" cmpd="sng" algn="ctr">
+                      <a:solidFill>
+                        <a:srgbClr val="CACACA"/>
+                      </a:solidFill>
+                      <a:prstDash val="solid"/>
+                      <a:round/>
+                      <a:headEnd type="none" w="med" len="med"/>
+                      <a:tailEnd type="none" w="med" len="med"/>
+                    </a:lnL>
+                    <a:lnR w="6350" cap="flat" cmpd="sng" algn="ctr">
+                      <a:solidFill>
+                        <a:srgbClr val="CACACA"/>
+                      </a:solidFill>
+                      <a:prstDash val="solid"/>
+                      <a:round/>
+                      <a:headEnd type="none" w="med" len="med"/>
+                      <a:tailEnd type="none" w="med" len="med"/>
+                    </a:lnR>
+                    <a:lnT w="6350" cap="flat" cmpd="sng" algn="ctr">
+                      <a:solidFill>
+                        <a:srgbClr val="CACACA"/>
+                      </a:solidFill>
+                      <a:prstDash val="solid"/>
+                      <a:round/>
+                      <a:headEnd type="none" w="med" len="med"/>
+                      <a:tailEnd type="none" w="med" len="med"/>
+                    </a:lnT>
+                    <a:lnB w="6350" cap="flat" cmpd="sng" algn="ctr">
+                      <a:solidFill>
+                        <a:srgbClr val="CACACA"/>
+                      </a:solidFill>
+                      <a:prstDash val="solid"/>
+                      <a:round/>
+                      <a:headEnd type="none" w="med" len="med"/>
+                      <a:tailEnd type="none" w="med" len="med"/>
+                    </a:lnB>
+                    <a:solidFill>
+                      <a:srgbClr val="FFFFFF"/>
+                    </a:solidFill>
+                  </a:tcPr>
+                </a:tc>
+              </a:tr>
+              <a:tr h="457200">
+                <a:tc>
+                  <a:txBody>
+                    <a:bodyPr/>
+                    <a:lstStyle/>
+                    <a:p>
+                      <a:pPr algn="l" indent="0" marL="0">
+                        <a:buNone/>
+                      </a:pPr>
+                      <a:r>
+                        <a:rPr lang="en-US" sz="950" b="1" dirty="0">
+                          <a:solidFill>
+                            <a:srgbClr val="2B2B2B"/>
+                          </a:solidFill>
+                          <a:latin typeface="Verdana" pitchFamily="34" charset="0"/>
+                          <a:ea typeface="Verdana" pitchFamily="34" charset="-122"/>
+                          <a:cs typeface="Verdana" pitchFamily="34" charset="-120"/>
+                        </a:rPr>
+                        <a:t>Gastos de explotación</a:t>
+                      </a:r>
+                      <a:endParaRPr lang="en-US" sz="950" dirty="0">
+                        <a:latin typeface="Verdana" charset="0"/>
+                        <a:ea typeface="Verdana" charset="0"/>
+                        <a:cs typeface="Verdana" charset="0"/>
+                      </a:endParaRPr>
+                    </a:p>
+                  </a:txBody>
+                  <a:tcPr marL="63500" marR="63500" marT="25400" marB="25400" anchor="ctr">
+                    <a:lnL w="6350" cap="flat" cmpd="sng" algn="ctr">
+                      <a:solidFill>
+                        <a:srgbClr val="CACACA"/>
+                      </a:solidFill>
+                      <a:prstDash val="solid"/>
+                      <a:round/>
+                      <a:headEnd type="none" w="med" len="med"/>
+                      <a:tailEnd type="none" w="med" len="med"/>
+                    </a:lnL>
+                    <a:lnR w="6350" cap="flat" cmpd="sng" algn="ctr">
+                      <a:solidFill>
+                        <a:srgbClr val="CACACA"/>
+                      </a:solidFill>
+                      <a:prstDash val="solid"/>
+                      <a:round/>
+                      <a:headEnd type="none" w="med" len="med"/>
+                      <a:tailEnd type="none" w="med" len="med"/>
+                    </a:lnR>
+                    <a:lnT w="6350" cap="flat" cmpd="sng" algn="ctr">
+                      <a:solidFill>
+                        <a:srgbClr val="CACACA"/>
+                      </a:solidFill>
+                      <a:prstDash val="solid"/>
+                      <a:round/>
+                      <a:headEnd type="none" w="med" len="med"/>
+                      <a:tailEnd type="none" w="med" len="med"/>
+                    </a:lnT>
+                    <a:lnB w="6350" cap="flat" cmpd="sng" algn="ctr">
+                      <a:solidFill>
+                        <a:srgbClr val="CACACA"/>
+                      </a:solidFill>
+                      <a:prstDash val="solid"/>
+                      <a:round/>
+                      <a:headEnd type="none" w="med" len="med"/>
+                      <a:tailEnd type="none" w="med" len="med"/>
+                    </a:lnB>
+                    <a:solidFill>
+                      <a:srgbClr val="F4F4F4"/>
+                    </a:solidFill>
+                  </a:tcPr>
+                </a:tc>
+                <a:tc>
+                  <a:txBody>
+                    <a:bodyPr/>
+                    <a:lstStyle/>
+                    <a:p>
+                      <a:pPr algn="l" indent="0" marL="0">
+                        <a:buNone/>
+                      </a:pPr>
+                      <a:r>
+                        <a:rPr lang="en-US" sz="750" dirty="0">
+                          <a:solidFill>
+                            <a:srgbClr val="818181"/>
+                          </a:solidFill>
+                          <a:latin typeface="Verdana" pitchFamily="34" charset="0"/>
+                          <a:ea typeface="Verdana" pitchFamily="34" charset="-122"/>
+                          <a:cs typeface="Verdana" pitchFamily="34" charset="-120"/>
+                        </a:rPr>
+                        <a:t>EBA Risk Dashboard: ratio de eficiencia (cost-to-income), grupo consolidado</a:t>
+                      </a:r>
+                      <a:endParaRPr lang="en-US" sz="750" dirty="0">
+                        <a:latin typeface="Verdana" charset="0"/>
+                        <a:ea typeface="Verdana" charset="0"/>
+                        <a:cs typeface="Verdana" charset="0"/>
+                      </a:endParaRPr>
+                    </a:p>
+                  </a:txBody>
+                  <a:tcPr marL="63500" marR="63500" marT="25400" marB="25400" anchor="ctr">
+                    <a:lnL w="6350" cap="flat" cmpd="sng" algn="ctr">
+                      <a:solidFill>
+                        <a:srgbClr val="CACACA"/>
+                      </a:solidFill>
+                      <a:prstDash val="solid"/>
+                      <a:round/>
+                      <a:headEnd type="none" w="med" len="med"/>
+                      <a:tailEnd type="none" w="med" len="med"/>
+                    </a:lnL>
+                    <a:lnR w="6350" cap="flat" cmpd="sng" algn="ctr">
+                      <a:solidFill>
+                        <a:srgbClr val="CACACA"/>
+                      </a:solidFill>
+                      <a:prstDash val="solid"/>
+                      <a:round/>
+                      <a:headEnd type="none" w="med" len="med"/>
+                      <a:tailEnd type="none" w="med" len="med"/>
+                    </a:lnR>
+                    <a:lnT w="6350" cap="flat" cmpd="sng" algn="ctr">
+                      <a:solidFill>
+                        <a:srgbClr val="CACACA"/>
+                      </a:solidFill>
+                      <a:prstDash val="solid"/>
+                      <a:round/>
+                      <a:headEnd type="none" w="med" len="med"/>
+                      <a:tailEnd type="none" w="med" len="med"/>
+                    </a:lnT>
+                    <a:lnB w="6350" cap="flat" cmpd="sng" algn="ctr">
+                      <a:solidFill>
+                        <a:srgbClr val="CACACA"/>
+                      </a:solidFill>
+                      <a:prstDash val="solid"/>
+                      <a:round/>
+                      <a:headEnd type="none" w="med" len="med"/>
+                      <a:tailEnd type="none" w="med" len="med"/>
+                    </a:lnB>
+                    <a:solidFill>
+                      <a:srgbClr val="F4F4F4"/>
+                    </a:solidFill>
+                  </a:tcPr>
+                </a:tc>
+                <a:tc>
+                  <a:txBody>
+                    <a:bodyPr/>
+                    <a:lstStyle/>
+                    <a:p>
+                      <a:pPr algn="l" indent="0" marL="0">
+                        <a:buNone/>
+                      </a:pPr>
+                      <a:r>
+                        <a:rPr lang="en-US" sz="750" dirty="0">
+                          <a:solidFill>
+                            <a:srgbClr val="2B2B2B"/>
+                          </a:solidFill>
+                          <a:latin typeface="Verdana" pitchFamily="34" charset="0"/>
+                          <a:ea typeface="Verdana" pitchFamily="34" charset="-122"/>
+                          <a:cs typeface="Verdana" pitchFamily="34" charset="-120"/>
+                        </a:rPr>
+                        <a:t>Eficiencia del banco entero aplicada al margen del préstamo. Supone que la PYME cuesta lo mismo por euro de margen que el resto del negocio.</a:t>
+                      </a:r>
+                      <a:endParaRPr lang="en-US" sz="750" dirty="0">
+                        <a:latin typeface="Verdana" charset="0"/>
+                        <a:ea typeface="Verdana" charset="0"/>
+                        <a:cs typeface="Verdana" charset="0"/>
+                      </a:endParaRPr>
+                    </a:p>
+                  </a:txBody>
+                  <a:tcPr marL="63500" marR="63500" marT="25400" marB="25400" anchor="ctr">
+                    <a:lnL w="6350" cap="flat" cmpd="sng" algn="ctr">
+                      <a:solidFill>
+                        <a:srgbClr val="CACACA"/>
+                      </a:solidFill>
+                      <a:prstDash val="solid"/>
+                      <a:round/>
+                      <a:headEnd type="none" w="med" len="med"/>
+                      <a:tailEnd type="none" w="med" len="med"/>
+                    </a:lnL>
+                    <a:lnR w="6350" cap="flat" cmpd="sng" algn="ctr">
+                      <a:solidFill>
+                        <a:srgbClr val="CACACA"/>
+                      </a:solidFill>
+                      <a:prstDash val="solid"/>
+                      <a:round/>
+                      <a:headEnd type="none" w="med" len="med"/>
+                      <a:tailEnd type="none" w="med" len="med"/>
+                    </a:lnR>
+                    <a:lnT w="6350" cap="flat" cmpd="sng" algn="ctr">
+                      <a:solidFill>
+                        <a:srgbClr val="CACACA"/>
+                      </a:solidFill>
+                      <a:prstDash val="solid"/>
+                      <a:round/>
+                      <a:headEnd type="none" w="med" len="med"/>
+                      <a:tailEnd type="none" w="med" len="med"/>
+                    </a:lnT>
+                    <a:lnB w="6350" cap="flat" cmpd="sng" algn="ctr">
+                      <a:solidFill>
+                        <a:srgbClr val="CACACA"/>
+                      </a:solidFill>
+                      <a:prstDash val="solid"/>
+                      <a:round/>
+                      <a:headEnd type="none" w="med" len="med"/>
+                      <a:tailEnd type="none" w="med" len="med"/>
+                    </a:lnB>
+                    <a:solidFill>
+                      <a:srgbClr val="F4F4F4"/>
+                    </a:solidFill>
+                  </a:tcPr>
+                </a:tc>
+                <a:tc>
+                  <a:txBody>
+                    <a:bodyPr/>
+                    <a:lstStyle/>
+                    <a:p>
+                      <a:pPr algn="ctr" indent="0" marL="0">
+                        <a:buNone/>
+                      </a:pPr>
+                      <a:r>
+                        <a:rPr lang="en-US" sz="800" b="1" dirty="0">
+                          <a:solidFill>
+                            <a:srgbClr val="2B2B2B"/>
+                          </a:solidFill>
+                          <a:latin typeface="Verdana" pitchFamily="34" charset="0"/>
+                          <a:ea typeface="Verdana" pitchFamily="34" charset="-122"/>
+                          <a:cs typeface="Verdana" pitchFamily="34" charset="-120"/>
+                        </a:rPr>
+                        <a:t>DEL BANCO</a:t>
+                      </a:r>
+                      <a:endParaRPr lang="en-US" sz="800" dirty="0">
+                        <a:latin typeface="Verdana" charset="0"/>
+                        <a:ea typeface="Verdana" charset="0"/>
+                        <a:cs typeface="Verdana" charset="0"/>
+                      </a:endParaRPr>
+                    </a:p>
+                  </a:txBody>
+                  <a:tcPr marL="63500" marR="63500" marT="25400" marB="25400" anchor="ctr">
+                    <a:lnL w="6350" cap="flat" cmpd="sng" algn="ctr">
+                      <a:solidFill>
+                        <a:srgbClr val="CACACA"/>
+                      </a:solidFill>
+                      <a:prstDash val="solid"/>
+                      <a:round/>
+                      <a:headEnd type="none" w="med" len="med"/>
+                      <a:tailEnd type="none" w="med" len="med"/>
+                    </a:lnL>
+                    <a:lnR w="6350" cap="flat" cmpd="sng" algn="ctr">
+                      <a:solidFill>
+                        <a:srgbClr val="CACACA"/>
+                      </a:solidFill>
+                      <a:prstDash val="solid"/>
+                      <a:round/>
+                      <a:headEnd type="none" w="med" len="med"/>
+                      <a:tailEnd type="none" w="med" len="med"/>
+                    </a:lnR>
+                    <a:lnT w="6350" cap="flat" cmpd="sng" algn="ctr">
+                      <a:solidFill>
+                        <a:srgbClr val="CACACA"/>
+                      </a:solidFill>
+                      <a:prstDash val="solid"/>
+                      <a:round/>
+                      <a:headEnd type="none" w="med" len="med"/>
+                      <a:tailEnd type="none" w="med" len="med"/>
+                    </a:lnT>
+                    <a:lnB w="6350" cap="flat" cmpd="sng" algn="ctr">
+                      <a:solidFill>
+                        <a:srgbClr val="CACACA"/>
+                      </a:solidFill>
+                      <a:prstDash val="solid"/>
+                      <a:round/>
+                      <a:headEnd type="none" w="med" len="med"/>
+                      <a:tailEnd type="none" w="med" len="med"/>
+                    </a:lnB>
+                    <a:solidFill>
+                      <a:srgbClr val="CACACA"/>
+                    </a:solidFill>
+                  </a:tcPr>
+                </a:tc>
+                <a:tc>
+                  <a:txBody>
+                    <a:bodyPr/>
+                    <a:lstStyle/>
+                    <a:p>
+                      <a:pPr algn="ctr" indent="0" marL="0">
+                        <a:buNone/>
+                      </a:pPr>
+                      <a:r>
+                        <a:rPr lang="en-US" sz="900" dirty="0">
+                          <a:solidFill>
+                            <a:srgbClr val="2B2B2B"/>
+                          </a:solidFill>
+                          <a:latin typeface="Verdana" pitchFamily="34" charset="0"/>
+                          <a:ea typeface="Verdana" pitchFamily="34" charset="-122"/>
+                          <a:cs typeface="Verdana" pitchFamily="34" charset="-120"/>
+                        </a:rPr>
+                        <a:t>2026-Q1</a:t>
+                      </a:r>
+                      <a:endParaRPr lang="en-US" sz="900" dirty="0">
+                        <a:latin typeface="Verdana" charset="0"/>
+                        <a:ea typeface="Verdana" charset="0"/>
+                        <a:cs typeface="Verdana" charset="0"/>
+                      </a:endParaRPr>
+                    </a:p>
+                  </a:txBody>
+                  <a:tcPr marL="63500" marR="63500" marT="25400" marB="25400" anchor="ctr">
+                    <a:lnL w="6350" cap="flat" cmpd="sng" algn="ctr">
+                      <a:solidFill>
+                        <a:srgbClr val="CACACA"/>
+                      </a:solidFill>
+                      <a:prstDash val="solid"/>
+                      <a:round/>
+                      <a:headEnd type="none" w="med" len="med"/>
+                      <a:tailEnd type="none" w="med" len="med"/>
+                    </a:lnL>
+                    <a:lnR w="6350" cap="flat" cmpd="sng" algn="ctr">
+                      <a:solidFill>
+                        <a:srgbClr val="CACACA"/>
+                      </a:solidFill>
+                      <a:prstDash val="solid"/>
+                      <a:round/>
+                      <a:headEnd type="none" w="med" len="med"/>
+                      <a:tailEnd type="none" w="med" len="med"/>
+                    </a:lnR>
+                    <a:lnT w="6350" cap="flat" cmpd="sng" algn="ctr">
+                      <a:solidFill>
+                        <a:srgbClr val="CACACA"/>
+                      </a:solidFill>
+                      <a:prstDash val="solid"/>
+                      <a:round/>
+                      <a:headEnd type="none" w="med" len="med"/>
+                      <a:tailEnd type="none" w="med" len="med"/>
+                    </a:lnT>
+                    <a:lnB w="6350" cap="flat" cmpd="sng" algn="ctr">
+                      <a:solidFill>
+                        <a:srgbClr val="CACACA"/>
+                      </a:solidFill>
+                      <a:prstDash val="solid"/>
+                      <a:round/>
+                      <a:headEnd type="none" w="med" len="med"/>
+                      <a:tailEnd type="none" w="med" len="med"/>
+                    </a:lnB>
+                    <a:solidFill>
+                      <a:srgbClr val="F4F4F4"/>
+                    </a:solidFill>
+                  </a:tcPr>
+                </a:tc>
+              </a:tr>
+              <a:tr h="457200">
+                <a:tc>
+                  <a:txBody>
+                    <a:bodyPr/>
+                    <a:lstStyle/>
+                    <a:p>
+                      <a:pPr algn="l" indent="0" marL="0">
+                        <a:buNone/>
+                      </a:pPr>
+                      <a:r>
+                        <a:rPr lang="en-US" sz="950" b="1" dirty="0">
+                          <a:solidFill>
+                            <a:srgbClr val="2B2B2B"/>
+                          </a:solidFill>
+                          <a:latin typeface="Verdana" pitchFamily="34" charset="0"/>
+                          <a:ea typeface="Verdana" pitchFamily="34" charset="-122"/>
+                          <a:cs typeface="Verdana" pitchFamily="34" charset="-120"/>
+                        </a:rPr>
+                        <a:t>CET1</a:t>
+                      </a:r>
+                      <a:endParaRPr lang="en-US" sz="950" dirty="0">
+                        <a:latin typeface="Verdana" charset="0"/>
+                        <a:ea typeface="Verdana" charset="0"/>
+                        <a:cs typeface="Verdana" charset="0"/>
+                      </a:endParaRPr>
+                    </a:p>
+                  </a:txBody>
+                  <a:tcPr marL="63500" marR="63500" marT="25400" marB="25400" anchor="ctr">
+                    <a:lnL w="6350" cap="flat" cmpd="sng" algn="ctr">
+                      <a:solidFill>
+                        <a:srgbClr val="CACACA"/>
+                      </a:solidFill>
+                      <a:prstDash val="solid"/>
+                      <a:round/>
+                      <a:headEnd type="none" w="med" len="med"/>
+                      <a:tailEnd type="none" w="med" len="med"/>
+                    </a:lnL>
+                    <a:lnR w="6350" cap="flat" cmpd="sng" algn="ctr">
+                      <a:solidFill>
+                        <a:srgbClr val="CACACA"/>
+                      </a:solidFill>
+                      <a:prstDash val="solid"/>
+                      <a:round/>
+                      <a:headEnd type="none" w="med" len="med"/>
+                      <a:tailEnd type="none" w="med" len="med"/>
+                    </a:lnR>
+                    <a:lnT w="6350" cap="flat" cmpd="sng" algn="ctr">
+                      <a:solidFill>
+                        <a:srgbClr val="CACACA"/>
+                      </a:solidFill>
+                      <a:prstDash val="solid"/>
+                      <a:round/>
+                      <a:headEnd type="none" w="med" len="med"/>
+                      <a:tailEnd type="none" w="med" len="med"/>
+                    </a:lnT>
+                    <a:lnB w="6350" cap="flat" cmpd="sng" algn="ctr">
+                      <a:solidFill>
+                        <a:srgbClr val="CACACA"/>
+                      </a:solidFill>
+                      <a:prstDash val="solid"/>
+                      <a:round/>
+                      <a:headEnd type="none" w="med" len="med"/>
+                      <a:tailEnd type="none" w="med" len="med"/>
+                    </a:lnB>
+                    <a:solidFill>
+                      <a:srgbClr val="FFFFFF"/>
+                    </a:solidFill>
+                  </a:tcPr>
+                </a:tc>
+                <a:tc>
+                  <a:txBody>
+                    <a:bodyPr/>
+                    <a:lstStyle/>
+                    <a:p>
+                      <a:pPr algn="l" indent="0" marL="0">
+                        <a:buNone/>
+                      </a:pPr>
+                      <a:r>
+                        <a:rPr lang="en-US" sz="750" dirty="0">
+                          <a:solidFill>
+                            <a:srgbClr val="818181"/>
+                          </a:solidFill>
+                          <a:latin typeface="Verdana" pitchFamily="34" charset="0"/>
+                          <a:ea typeface="Verdana" pitchFamily="34" charset="-122"/>
+                          <a:cs typeface="Verdana" pitchFamily="34" charset="-120"/>
+                        </a:rPr>
+                        <a:t>EBA Risk Dashboard: ratio CET1, grupo consolidado</a:t>
+                      </a:r>
+                      <a:endParaRPr lang="en-US" sz="750" dirty="0">
+                        <a:latin typeface="Verdana" charset="0"/>
+                        <a:ea typeface="Verdana" charset="0"/>
+                        <a:cs typeface="Verdana" charset="0"/>
+                      </a:endParaRPr>
+                    </a:p>
+                  </a:txBody>
+                  <a:tcPr marL="63500" marR="63500" marT="25400" marB="25400" anchor="ctr">
+                    <a:lnL w="6350" cap="flat" cmpd="sng" algn="ctr">
+                      <a:solidFill>
+                        <a:srgbClr val="CACACA"/>
+                      </a:solidFill>
+                      <a:prstDash val="solid"/>
+                      <a:round/>
+                      <a:headEnd type="none" w="med" len="med"/>
+                      <a:tailEnd type="none" w="med" len="med"/>
+                    </a:lnL>
+                    <a:lnR w="6350" cap="flat" cmpd="sng" algn="ctr">
+                      <a:solidFill>
+                        <a:srgbClr val="CACACA"/>
+                      </a:solidFill>
+                      <a:prstDash val="solid"/>
+                      <a:round/>
+                      <a:headEnd type="none" w="med" len="med"/>
+                      <a:tailEnd type="none" w="med" len="med"/>
+                    </a:lnR>
+                    <a:lnT w="6350" cap="flat" cmpd="sng" algn="ctr">
+                      <a:solidFill>
+                        <a:srgbClr val="CACACA"/>
+                      </a:solidFill>
+                      <a:prstDash val="solid"/>
+                      <a:round/>
+                      <a:headEnd type="none" w="med" len="med"/>
+                      <a:tailEnd type="none" w="med" len="med"/>
+                    </a:lnT>
+                    <a:lnB w="6350" cap="flat" cmpd="sng" algn="ctr">
+                      <a:solidFill>
+                        <a:srgbClr val="CACACA"/>
+                      </a:solidFill>
+                      <a:prstDash val="solid"/>
+                      <a:round/>
+                      <a:headEnd type="none" w="med" len="med"/>
+                      <a:tailEnd type="none" w="med" len="med"/>
+                    </a:lnB>
+                    <a:solidFill>
+                      <a:srgbClr val="FFFFFF"/>
+                    </a:solidFill>
+                  </a:tcPr>
+                </a:tc>
+                <a:tc>
+                  <a:txBody>
+                    <a:bodyPr/>
+                    <a:lstStyle/>
+                    <a:p>
+                      <a:pPr algn="l" indent="0" marL="0">
+                        <a:buNone/>
+                      </a:pPr>
+                      <a:r>
+                        <a:rPr lang="en-US" sz="750" dirty="0">
+                          <a:solidFill>
+                            <a:srgbClr val="2B2B2B"/>
+                          </a:solidFill>
+                          <a:latin typeface="Verdana" pitchFamily="34" charset="0"/>
+                          <a:ea typeface="Verdana" pitchFamily="34" charset="-122"/>
+                          <a:cs typeface="Verdana" pitchFamily="34" charset="-120"/>
+                        </a:rPr>
+                        <a:t>Solvencia del banco: el capital que se exige a cada euro de RWA, venga del segmento que venga.</a:t>
+                      </a:r>
+                      <a:endParaRPr lang="en-US" sz="750" dirty="0">
+                        <a:latin typeface="Verdana" charset="0"/>
+                        <a:ea typeface="Verdana" charset="0"/>
+                        <a:cs typeface="Verdana" charset="0"/>
+                      </a:endParaRPr>
+                    </a:p>
+                  </a:txBody>
+                  <a:tcPr marL="63500" marR="63500" marT="25400" marB="25400" anchor="ctr">
+                    <a:lnL w="6350" cap="flat" cmpd="sng" algn="ctr">
+                      <a:solidFill>
+                        <a:srgbClr val="CACACA"/>
+                      </a:solidFill>
+                      <a:prstDash val="solid"/>
+                      <a:round/>
+                      <a:headEnd type="none" w="med" len="med"/>
+                      <a:tailEnd type="none" w="med" len="med"/>
+                    </a:lnL>
+                    <a:lnR w="6350" cap="flat" cmpd="sng" algn="ctr">
+                      <a:solidFill>
+                        <a:srgbClr val="CACACA"/>
+                      </a:solidFill>
+                      <a:prstDash val="solid"/>
+                      <a:round/>
+                      <a:headEnd type="none" w="med" len="med"/>
+                      <a:tailEnd type="none" w="med" len="med"/>
+                    </a:lnR>
+                    <a:lnT w="6350" cap="flat" cmpd="sng" algn="ctr">
+                      <a:solidFill>
+                        <a:srgbClr val="CACACA"/>
+                      </a:solidFill>
+                      <a:prstDash val="solid"/>
+                      <a:round/>
+                      <a:headEnd type="none" w="med" len="med"/>
+                      <a:tailEnd type="none" w="med" len="med"/>
+                    </a:lnT>
+                    <a:lnB w="6350" cap="flat" cmpd="sng" algn="ctr">
+                      <a:solidFill>
+                        <a:srgbClr val="CACACA"/>
+                      </a:solidFill>
+                      <a:prstDash val="solid"/>
+                      <a:round/>
+                      <a:headEnd type="none" w="med" len="med"/>
+                      <a:tailEnd type="none" w="med" len="med"/>
+                    </a:lnB>
+                    <a:solidFill>
+                      <a:srgbClr val="FFFFFF"/>
+                    </a:solidFill>
+                  </a:tcPr>
+                </a:tc>
+                <a:tc>
+                  <a:txBody>
+                    <a:bodyPr/>
+                    <a:lstStyle/>
+                    <a:p>
+                      <a:pPr algn="ctr" indent="0" marL="0">
+                        <a:buNone/>
+                      </a:pPr>
+                      <a:r>
+                        <a:rPr lang="en-US" sz="800" b="1" dirty="0">
+                          <a:solidFill>
+                            <a:srgbClr val="2B2B2B"/>
+                          </a:solidFill>
+                          <a:latin typeface="Verdana" pitchFamily="34" charset="0"/>
+                          <a:ea typeface="Verdana" pitchFamily="34" charset="-122"/>
+                          <a:cs typeface="Verdana" pitchFamily="34" charset="-120"/>
+                        </a:rPr>
+                        <a:t>DEL BANCO</a:t>
+                      </a:r>
+                      <a:endParaRPr lang="en-US" sz="800" dirty="0">
+                        <a:latin typeface="Verdana" charset="0"/>
+                        <a:ea typeface="Verdana" charset="0"/>
+                        <a:cs typeface="Verdana" charset="0"/>
+                      </a:endParaRPr>
+                    </a:p>
+                  </a:txBody>
+                  <a:tcPr marL="63500" marR="63500" marT="25400" marB="25400" anchor="ctr">
+                    <a:lnL w="6350" cap="flat" cmpd="sng" algn="ctr">
+                      <a:solidFill>
+                        <a:srgbClr val="CACACA"/>
+                      </a:solidFill>
+                      <a:prstDash val="solid"/>
+                      <a:round/>
+                      <a:headEnd type="none" w="med" len="med"/>
+                      <a:tailEnd type="none" w="med" len="med"/>
+                    </a:lnL>
+                    <a:lnR w="6350" cap="flat" cmpd="sng" algn="ctr">
+                      <a:solidFill>
+                        <a:srgbClr val="CACACA"/>
+                      </a:solidFill>
+                      <a:prstDash val="solid"/>
+                      <a:round/>
+                      <a:headEnd type="none" w="med" len="med"/>
+                      <a:tailEnd type="none" w="med" len="med"/>
+                    </a:lnR>
+                    <a:lnT w="6350" cap="flat" cmpd="sng" algn="ctr">
+                      <a:solidFill>
+                        <a:srgbClr val="CACACA"/>
+                      </a:solidFill>
+                      <a:prstDash val="solid"/>
+                      <a:round/>
+                      <a:headEnd type="none" w="med" len="med"/>
+                      <a:tailEnd type="none" w="med" len="med"/>
+                    </a:lnT>
+                    <a:lnB w="6350" cap="flat" cmpd="sng" algn="ctr">
+                      <a:solidFill>
+                        <a:srgbClr val="CACACA"/>
+                      </a:solidFill>
+                      <a:prstDash val="solid"/>
+                      <a:round/>
+                      <a:headEnd type="none" w="med" len="med"/>
+                      <a:tailEnd type="none" w="med" len="med"/>
+                    </a:lnB>
+                    <a:solidFill>
+                      <a:srgbClr val="CACACA"/>
+                    </a:solidFill>
+                  </a:tcPr>
+                </a:tc>
+                <a:tc>
+                  <a:txBody>
+                    <a:bodyPr/>
+                    <a:lstStyle/>
+                    <a:p>
+                      <a:pPr algn="ctr" indent="0" marL="0">
+                        <a:buNone/>
+                      </a:pPr>
+                      <a:r>
+                        <a:rPr lang="en-US" sz="900" dirty="0">
+                          <a:solidFill>
+                            <a:srgbClr val="2B2B2B"/>
+                          </a:solidFill>
+                          <a:latin typeface="Verdana" pitchFamily="34" charset="0"/>
+                          <a:ea typeface="Verdana" pitchFamily="34" charset="-122"/>
+                          <a:cs typeface="Verdana" pitchFamily="34" charset="-120"/>
+                        </a:rPr>
+                        <a:t>2026-Q1</a:t>
+                      </a:r>
+                      <a:endParaRPr lang="en-US" sz="900" dirty="0">
+                        <a:latin typeface="Verdana" charset="0"/>
+                        <a:ea typeface="Verdana" charset="0"/>
+                        <a:cs typeface="Verdana" charset="0"/>
+                      </a:endParaRPr>
+                    </a:p>
+                  </a:txBody>
+                  <a:tcPr marL="63500" marR="63500" marT="25400" marB="25400" anchor="ctr">
+                    <a:lnL w="6350" cap="flat" cmpd="sng" algn="ctr">
+                      <a:solidFill>
+                        <a:srgbClr val="CACACA"/>
+                      </a:solidFill>
+                      <a:prstDash val="solid"/>
+                      <a:round/>
+                      <a:headEnd type="none" w="med" len="med"/>
+                      <a:tailEnd type="none" w="med" len="med"/>
+                    </a:lnL>
+                    <a:lnR w="6350" cap="flat" cmpd="sng" algn="ctr">
+                      <a:solidFill>
+                        <a:srgbClr val="CACACA"/>
+                      </a:solidFill>
+                      <a:prstDash val="solid"/>
+                      <a:round/>
+                      <a:headEnd type="none" w="med" len="med"/>
+                      <a:tailEnd type="none" w="med" len="med"/>
+                    </a:lnR>
+                    <a:lnT w="6350" cap="flat" cmpd="sng" algn="ctr">
+                      <a:solidFill>
+                        <a:srgbClr val="CACACA"/>
+                      </a:solidFill>
+                      <a:prstDash val="solid"/>
+                      <a:round/>
+                      <a:headEnd type="none" w="med" len="med"/>
+                      <a:tailEnd type="none" w="med" len="med"/>
+                    </a:lnT>
+                    <a:lnB w="6350" cap="flat" cmpd="sng" algn="ctr">
+                      <a:solidFill>
+                        <a:srgbClr val="CACACA"/>
+                      </a:solidFill>
+                      <a:prstDash val="solid"/>
+                      <a:round/>
+                      <a:headEnd type="none" w="med" len="med"/>
+                      <a:tailEnd type="none" w="med" len="med"/>
+                    </a:lnB>
+                    <a:solidFill>
+                      <a:srgbClr val="FFFFFF"/>
+                    </a:solidFill>
+                  </a:tcPr>
+                </a:tc>
+              </a:tr>
+              <a:tr h="457200">
+                <a:tc>
+                  <a:txBody>
+                    <a:bodyPr/>
+                    <a:lstStyle/>
+                    <a:p>
+                      <a:pPr algn="l" indent="0" marL="0">
+                        <a:buNone/>
+                      </a:pPr>
+                      <a:r>
+                        <a:rPr lang="en-US" sz="950" b="1" dirty="0">
+                          <a:solidFill>
+                            <a:srgbClr val="2B2B2B"/>
+                          </a:solidFill>
+                          <a:latin typeface="Verdana" pitchFamily="34" charset="0"/>
+                          <a:ea typeface="Verdana" pitchFamily="34" charset="-122"/>
+                          <a:cs typeface="Verdana" pitchFamily="34" charset="-120"/>
+                        </a:rPr>
+                        <a:t>Tipo impositivo</a:t>
+                      </a:r>
+                      <a:endParaRPr lang="en-US" sz="950" dirty="0">
+                        <a:latin typeface="Verdana" charset="0"/>
+                        <a:ea typeface="Verdana" charset="0"/>
+                        <a:cs typeface="Verdana" charset="0"/>
+                      </a:endParaRPr>
+                    </a:p>
+                  </a:txBody>
+                  <a:tcPr marL="63500" marR="63500" marT="25400" marB="25400" anchor="ctr">
+                    <a:lnL w="6350" cap="flat" cmpd="sng" algn="ctr">
+                      <a:solidFill>
+                        <a:srgbClr val="CACACA"/>
+                      </a:solidFill>
+                      <a:prstDash val="solid"/>
+                      <a:round/>
+                      <a:headEnd type="none" w="med" len="med"/>
+                      <a:tailEnd type="none" w="med" len="med"/>
+                    </a:lnL>
+                    <a:lnR w="6350" cap="flat" cmpd="sng" algn="ctr">
+                      <a:solidFill>
+                        <a:srgbClr val="CACACA"/>
+                      </a:solidFill>
+                      <a:prstDash val="solid"/>
+                      <a:round/>
+                      <a:headEnd type="none" w="med" len="med"/>
+                      <a:tailEnd type="none" w="med" len="med"/>
+                    </a:lnR>
+                    <a:lnT w="6350" cap="flat" cmpd="sng" algn="ctr">
+                      <a:solidFill>
+                        <a:srgbClr val="CACACA"/>
+                      </a:solidFill>
+                      <a:prstDash val="solid"/>
+                      <a:round/>
+                      <a:headEnd type="none" w="med" len="med"/>
+                      <a:tailEnd type="none" w="med" len="med"/>
+                    </a:lnT>
+                    <a:lnB w="6350" cap="flat" cmpd="sng" algn="ctr">
+                      <a:solidFill>
+                        <a:srgbClr val="CACACA"/>
+                      </a:solidFill>
+                      <a:prstDash val="solid"/>
+                      <a:round/>
+                      <a:headEnd type="none" w="med" len="med"/>
+                      <a:tailEnd type="none" w="med" len="med"/>
+                    </a:lnB>
+                    <a:solidFill>
+                      <a:srgbClr val="F4F4F4"/>
+                    </a:solidFill>
+                  </a:tcPr>
+                </a:tc>
+                <a:tc>
+                  <a:txBody>
+                    <a:bodyPr/>
+                    <a:lstStyle/>
+                    <a:p>
+                      <a:pPr algn="l" indent="0" marL="0">
+                        <a:buNone/>
+                      </a:pPr>
+                      <a:r>
+                        <a:rPr lang="en-US" sz="750" dirty="0">
+                          <a:solidFill>
+                            <a:srgbClr val="818181"/>
+                          </a:solidFill>
+                          <a:latin typeface="Verdana" pitchFamily="34" charset="0"/>
+                          <a:ea typeface="Verdana" pitchFamily="34" charset="-122"/>
+                          <a:cs typeface="Verdana" pitchFamily="34" charset="-120"/>
+                        </a:rPr>
+                        <a:t>Legislación de cada país: España 30 % (art. 29 LIS, entidades de crédito), Irlanda 15 % (mínimo de Pilar Dos)</a:t>
+                      </a:r>
+                      <a:endParaRPr lang="en-US" sz="750" dirty="0">
+                        <a:latin typeface="Verdana" charset="0"/>
+                        <a:ea typeface="Verdana" charset="0"/>
+                        <a:cs typeface="Verdana" charset="0"/>
+                      </a:endParaRPr>
+                    </a:p>
+                  </a:txBody>
+                  <a:tcPr marL="63500" marR="63500" marT="25400" marB="25400" anchor="ctr">
+                    <a:lnL w="6350" cap="flat" cmpd="sng" algn="ctr">
+                      <a:solidFill>
+                        <a:srgbClr val="CACACA"/>
+                      </a:solidFill>
+                      <a:prstDash val="solid"/>
+                      <a:round/>
+                      <a:headEnd type="none" w="med" len="med"/>
+                      <a:tailEnd type="none" w="med" len="med"/>
+                    </a:lnL>
+                    <a:lnR w="6350" cap="flat" cmpd="sng" algn="ctr">
+                      <a:solidFill>
+                        <a:srgbClr val="CACACA"/>
+                      </a:solidFill>
+                      <a:prstDash val="solid"/>
+                      <a:round/>
+                      <a:headEnd type="none" w="med" len="med"/>
+                      <a:tailEnd type="none" w="med" len="med"/>
+                    </a:lnR>
+                    <a:lnT w="6350" cap="flat" cmpd="sng" algn="ctr">
+                      <a:solidFill>
+                        <a:srgbClr val="CACACA"/>
+                      </a:solidFill>
+                      <a:prstDash val="solid"/>
+                      <a:round/>
+                      <a:headEnd type="none" w="med" len="med"/>
+                      <a:tailEnd type="none" w="med" len="med"/>
+                    </a:lnT>
+                    <a:lnB w="6350" cap="flat" cmpd="sng" algn="ctr">
+                      <a:solidFill>
+                        <a:srgbClr val="CACACA"/>
+                      </a:solidFill>
+                      <a:prstDash val="solid"/>
+                      <a:round/>
+                      <a:headEnd type="none" w="med" len="med"/>
+                      <a:tailEnd type="none" w="med" len="med"/>
+                    </a:lnB>
+                    <a:solidFill>
+                      <a:srgbClr val="F4F4F4"/>
+                    </a:solidFill>
+                  </a:tcPr>
+                </a:tc>
+                <a:tc>
+                  <a:txBody>
+                    <a:bodyPr/>
+                    <a:lstStyle/>
+                    <a:p>
+                      <a:pPr algn="l" indent="0" marL="0">
+                        <a:buNone/>
+                      </a:pPr>
+                      <a:r>
+                        <a:rPr lang="en-US" sz="750" dirty="0">
+                          <a:solidFill>
+                            <a:srgbClr val="2B2B2B"/>
+                          </a:solidFill>
+                          <a:latin typeface="Verdana" pitchFamily="34" charset="0"/>
+                          <a:ea typeface="Verdana" pitchFamily="34" charset="-122"/>
+                          <a:cs typeface="Verdana" pitchFamily="34" charset="-120"/>
+                        </a:rPr>
+                        <a:t>Tipo NOMINAL aplicable a bancos, no el efectivo. El resto de países, tipo combinado estatal más local.</a:t>
+                      </a:r>
+                      <a:endParaRPr lang="en-US" sz="750" dirty="0">
+                        <a:latin typeface="Verdana" charset="0"/>
+                        <a:ea typeface="Verdana" charset="0"/>
+                        <a:cs typeface="Verdana" charset="0"/>
+                      </a:endParaRPr>
+                    </a:p>
+                  </a:txBody>
+                  <a:tcPr marL="63500" marR="63500" marT="25400" marB="25400" anchor="ctr">
+                    <a:lnL w="6350" cap="flat" cmpd="sng" algn="ctr">
+                      <a:solidFill>
+                        <a:srgbClr val="CACACA"/>
+                      </a:solidFill>
+                      <a:prstDash val="solid"/>
+                      <a:round/>
+                      <a:headEnd type="none" w="med" len="med"/>
+                      <a:tailEnd type="none" w="med" len="med"/>
+                    </a:lnL>
+                    <a:lnR w="6350" cap="flat" cmpd="sng" algn="ctr">
+                      <a:solidFill>
+                        <a:srgbClr val="CACACA"/>
+                      </a:solidFill>
+                      <a:prstDash val="solid"/>
+                      <a:round/>
+                      <a:headEnd type="none" w="med" len="med"/>
+                      <a:tailEnd type="none" w="med" len="med"/>
+                    </a:lnR>
+                    <a:lnT w="6350" cap="flat" cmpd="sng" algn="ctr">
+                      <a:solidFill>
+                        <a:srgbClr val="CACACA"/>
+                      </a:solidFill>
+                      <a:prstDash val="solid"/>
+                      <a:round/>
+                      <a:headEnd type="none" w="med" len="med"/>
+                      <a:tailEnd type="none" w="med" len="med"/>
+                    </a:lnT>
+                    <a:lnB w="6350" cap="flat" cmpd="sng" algn="ctr">
+                      <a:solidFill>
+                        <a:srgbClr val="CACACA"/>
+                      </a:solidFill>
+                      <a:prstDash val="solid"/>
+                      <a:round/>
+                      <a:headEnd type="none" w="med" len="med"/>
+                      <a:tailEnd type="none" w="med" len="med"/>
+                    </a:lnB>
+                    <a:solidFill>
+                      <a:srgbClr val="F4F4F4"/>
+                    </a:solidFill>
+                  </a:tcPr>
+                </a:tc>
+                <a:tc>
+                  <a:txBody>
+                    <a:bodyPr/>
+                    <a:lstStyle/>
+                    <a:p>
+                      <a:pPr algn="ctr" indent="0" marL="0">
+                        <a:buNone/>
+                      </a:pPr>
+                      <a:r>
+                        <a:rPr lang="en-US" sz="800" b="1" dirty="0">
+                          <a:solidFill>
+                            <a:srgbClr val="2B2B2B"/>
+                          </a:solidFill>
+                          <a:latin typeface="Verdana" pitchFamily="34" charset="0"/>
+                          <a:ea typeface="Verdana" pitchFamily="34" charset="-122"/>
+                          <a:cs typeface="Verdana" pitchFamily="34" charset="-120"/>
+                        </a:rPr>
+                        <a:t>DEL BANCO</a:t>
+                      </a:r>
+                      <a:endParaRPr lang="en-US" sz="800" dirty="0">
+                        <a:latin typeface="Verdana" charset="0"/>
+                        <a:ea typeface="Verdana" charset="0"/>
+                        <a:cs typeface="Verdana" charset="0"/>
+                      </a:endParaRPr>
+                    </a:p>
+                  </a:txBody>
+                  <a:tcPr marL="63500" marR="63500" marT="25400" marB="25400" anchor="ctr">
+                    <a:lnL w="6350" cap="flat" cmpd="sng" algn="ctr">
+                      <a:solidFill>
+                        <a:srgbClr val="CACACA"/>
+                      </a:solidFill>
+                      <a:prstDash val="solid"/>
+                      <a:round/>
+                      <a:headEnd type="none" w="med" len="med"/>
+                      <a:tailEnd type="none" w="med" len="med"/>
+                    </a:lnL>
+                    <a:lnR w="6350" cap="flat" cmpd="sng" algn="ctr">
+                      <a:solidFill>
+                        <a:srgbClr val="CACACA"/>
+                      </a:solidFill>
+                      <a:prstDash val="solid"/>
+                      <a:round/>
+                      <a:headEnd type="none" w="med" len="med"/>
+                      <a:tailEnd type="none" w="med" len="med"/>
+                    </a:lnR>
+                    <a:lnT w="6350" cap="flat" cmpd="sng" algn="ctr">
+                      <a:solidFill>
+                        <a:srgbClr val="CACACA"/>
+                      </a:solidFill>
+                      <a:prstDash val="solid"/>
+                      <a:round/>
+                      <a:headEnd type="none" w="med" len="med"/>
+                      <a:tailEnd type="none" w="med" len="med"/>
+                    </a:lnT>
+                    <a:lnB w="6350" cap="flat" cmpd="sng" algn="ctr">
+                      <a:solidFill>
+                        <a:srgbClr val="CACACA"/>
+                      </a:solidFill>
+                      <a:prstDash val="solid"/>
+                      <a:round/>
+                      <a:headEnd type="none" w="med" len="med"/>
+                      <a:tailEnd type="none" w="med" len="med"/>
+                    </a:lnB>
+                    <a:solidFill>
+                      <a:srgbClr val="CACACA"/>
+                    </a:solidFill>
+                  </a:tcPr>
+                </a:tc>
+                <a:tc>
+                  <a:txBody>
+                    <a:bodyPr/>
+                    <a:lstStyle/>
+                    <a:p>
+                      <a:pPr algn="ctr" indent="0" marL="0">
+                        <a:buNone/>
+                      </a:pPr>
+                      <a:r>
+                        <a:rPr lang="en-US" sz="900" dirty="0">
+                          <a:solidFill>
+                            <a:srgbClr val="2B2B2B"/>
+                          </a:solidFill>
+                          <a:latin typeface="Verdana" pitchFamily="34" charset="0"/>
+                          <a:ea typeface="Verdana" pitchFamily="34" charset="-122"/>
+                          <a:cs typeface="Verdana" pitchFamily="34" charset="-120"/>
+                        </a:rPr>
+                        <a:t>2026</a:t>
+                      </a:r>
+                      <a:endParaRPr lang="en-US" sz="900" dirty="0">
+                        <a:latin typeface="Verdana" charset="0"/>
+                        <a:ea typeface="Verdana" charset="0"/>
+                        <a:cs typeface="Verdana" charset="0"/>
+                      </a:endParaRPr>
+                    </a:p>
+                  </a:txBody>
+                  <a:tcPr marL="63500" marR="63500" marT="25400" marB="25400" anchor="ctr">
+                    <a:lnL w="6350" cap="flat" cmpd="sng" algn="ctr">
+                      <a:solidFill>
+                        <a:srgbClr val="CACACA"/>
+                      </a:solidFill>
+                      <a:prstDash val="solid"/>
+                      <a:round/>
+                      <a:headEnd type="none" w="med" len="med"/>
+                      <a:tailEnd type="none" w="med" len="med"/>
+                    </a:lnL>
+                    <a:lnR w="6350" cap="flat" cmpd="sng" algn="ctr">
+                      <a:solidFill>
+                        <a:srgbClr val="CACACA"/>
+                      </a:solidFill>
+                      <a:prstDash val="solid"/>
+                      <a:round/>
+                      <a:headEnd type="none" w="med" len="med"/>
+                      <a:tailEnd type="none" w="med" len="med"/>
+                    </a:lnR>
+                    <a:lnT w="6350" cap="flat" cmpd="sng" algn="ctr">
+                      <a:solidFill>
+                        <a:srgbClr val="CACACA"/>
+                      </a:solidFill>
+                      <a:prstDash val="solid"/>
+                      <a:round/>
+                      <a:headEnd type="none" w="med" len="med"/>
+                      <a:tailEnd type="none" w="med" len="med"/>
+                    </a:lnT>
+                    <a:lnB w="6350" cap="flat" cmpd="sng" algn="ctr">
+                      <a:solidFill>
+                        <a:srgbClr val="CACACA"/>
+                      </a:solidFill>
+                      <a:prstDash val="solid"/>
+                      <a:round/>
+                      <a:headEnd type="none" w="med" len="med"/>
+                      <a:tailEnd type="none" w="med" len="med"/>
+                    </a:lnB>
+                    <a:solidFill>
+                      <a:srgbClr val="F4F4F4"/>
+                    </a:solidFill>
+                  </a:tcPr>
+                </a:tc>
+              </a:tr>
+            </a:tbl>
+          </a:graphicData>
+        </a:graphic>
+      </p:graphicFrame>
+      <p:sp>
+        <p:nvSpPr>
+          <p:cNvPr id="6" name="Shape 3"/>
+          <p:cNvSpPr/>
+          <p:nvPr/>
+        </p:nvSpPr>
+        <p:spPr>
+          <a:xfrm>
+            <a:off x="621792" y="5614416"/>
+            <a:ext cx="868680" cy="201168"/>
+          </a:xfrm>
+          <a:prstGeom prst="roundRect">
+            <a:avLst>
+              <a:gd name="adj" fmla="val 36364"/>
+            </a:avLst>
+          </a:prstGeom>
+          <a:solidFill>
+            <a:srgbClr val="77BFEE"/>
+          </a:solidFill>
+          <a:ln w="12700">
+            <a:solidFill>
+              <a:srgbClr val="77BFEE"/>
+            </a:solidFill>
+            <a:prstDash val="solid"/>
+          </a:ln>
+        </p:spPr>
+      </p:sp>
+      <p:sp>
+        <p:nvSpPr>
+          <p:cNvPr id="7" name="Text 4"/>
+          <p:cNvSpPr txBox="1"/>
+          <p:nvPr/>
+        </p:nvSpPr>
+        <p:spPr>
+          <a:xfrm>
+            <a:off x="621792" y="5614416"/>
+            <a:ext cx="868680" cy="201168"/>
+          </a:xfrm>
+          <a:prstGeom prst="rect">
+            <a:avLst/>
+          </a:prstGeom>
+          <a:noFill/>
+          <a:ln/>
+        </p:spPr>
+        <p:txBody>
+          <a:bodyPr wrap="square" lIns="0" tIns="0" rIns="0" bIns="0" rtlCol="0" anchor="ctr"/>
+          <a:lstStyle/>
+          <a:p>
+            <a:pPr algn="ctr" indent="0" marL="0">
+              <a:buNone/>
+            </a:pPr>
+            <a:r>
+              <a:rPr lang="en-US" sz="700" b="1" dirty="0">
+                <a:solidFill>
+                  <a:srgbClr val="2B2B2B"/>
+                </a:solidFill>
+                <a:latin typeface="Verdana" pitchFamily="34" charset="0"/>
+                <a:ea typeface="Verdana" pitchFamily="34" charset="-122"/>
+                <a:cs typeface="Verdana" pitchFamily="34" charset="-120"/>
+              </a:rPr>
+              <a:t>PYME</a:t>
+            </a:r>
+            <a:endParaRPr lang="en-US" sz="700" dirty="0"/>
+          </a:p>
+        </p:txBody>
+      </p:sp>
+      <p:sp>
+        <p:nvSpPr>
+          <p:cNvPr id="8" name="Text 5"/>
+          <p:cNvSpPr txBox="1"/>
+          <p:nvPr/>
+        </p:nvSpPr>
+        <p:spPr>
+          <a:xfrm>
+            <a:off x="1554480" y="5614416"/>
+            <a:ext cx="1783080" cy="201168"/>
+          </a:xfrm>
+          <a:prstGeom prst="rect">
+            <a:avLst/>
+          </a:prstGeom>
+          <a:noFill/>
+          <a:ln/>
+        </p:spPr>
+        <p:txBody>
+          <a:bodyPr wrap="square" lIns="0" tIns="0" rIns="0" bIns="0" rtlCol="0" anchor="ctr"/>
+          <a:lstStyle/>
+          <a:p>
+            <a:pPr indent="0" marL="0">
+              <a:buNone/>
+            </a:pPr>
+            <a:r>
+              <a:rPr lang="en-US" sz="750" dirty="0">
+                <a:solidFill>
+                  <a:srgbClr val="818181"/>
+                </a:solidFill>
+                <a:latin typeface="Verdana" pitchFamily="34" charset="0"/>
+                <a:ea typeface="Verdana" pitchFamily="34" charset="-122"/>
+                <a:cs typeface="Verdana" pitchFamily="34" charset="-120"/>
+              </a:rPr>
+              <a:t>el dato es del segmento</a:t>
+            </a:r>
+            <a:endParaRPr lang="en-US" sz="750" dirty="0"/>
+          </a:p>
+        </p:txBody>
+      </p:sp>
+      <p:sp>
+        <p:nvSpPr>
+          <p:cNvPr id="9" name="Shape 6"/>
+          <p:cNvSpPr/>
+          <p:nvPr/>
+        </p:nvSpPr>
+        <p:spPr>
+          <a:xfrm>
+            <a:off x="3364992" y="5614416"/>
+            <a:ext cx="868680" cy="201168"/>
+          </a:xfrm>
+          <a:prstGeom prst="roundRect">
+            <a:avLst>
+              <a:gd name="adj" fmla="val 36364"/>
+            </a:avLst>
+          </a:prstGeom>
+          <a:solidFill>
+            <a:srgbClr val="FFAB70"/>
+          </a:solidFill>
+          <a:ln w="12700">
+            <a:solidFill>
+              <a:srgbClr val="FFAB70"/>
+            </a:solidFill>
+            <a:prstDash val="solid"/>
+          </a:ln>
+        </p:spPr>
+      </p:sp>
+      <p:sp>
+        <p:nvSpPr>
+          <p:cNvPr id="10" name="Text 7"/>
+          <p:cNvSpPr txBox="1"/>
+          <p:nvPr/>
+        </p:nvSpPr>
+        <p:spPr>
+          <a:xfrm>
+            <a:off x="3364992" y="5614416"/>
+            <a:ext cx="868680" cy="201168"/>
+          </a:xfrm>
+          <a:prstGeom prst="rect">
+            <a:avLst/>
+          </a:prstGeom>
+          <a:noFill/>
+          <a:ln/>
+        </p:spPr>
+        <p:txBody>
+          <a:bodyPr wrap="square" lIns="0" tIns="0" rIns="0" bIns="0" rtlCol="0" anchor="ctr"/>
+          <a:lstStyle/>
+          <a:p>
+            <a:pPr algn="ctr" indent="0" marL="0">
+              <a:buNone/>
+            </a:pPr>
+            <a:r>
+              <a:rPr lang="en-US" sz="700" b="1" dirty="0">
+                <a:solidFill>
+                  <a:srgbClr val="2B2B2B"/>
+                </a:solidFill>
+                <a:latin typeface="Verdana" pitchFamily="34" charset="0"/>
+                <a:ea typeface="Verdana" pitchFamily="34" charset="-122"/>
+                <a:cs typeface="Verdana" pitchFamily="34" charset="-120"/>
+              </a:rPr>
+              <a:t>PROXY</a:t>
+            </a:r>
+            <a:endParaRPr lang="en-US" sz="700" dirty="0"/>
+          </a:p>
+        </p:txBody>
+      </p:sp>
+      <p:sp>
+        <p:nvSpPr>
+          <p:cNvPr id="11" name="Text 8"/>
+          <p:cNvSpPr txBox="1"/>
+          <p:nvPr/>
+        </p:nvSpPr>
+        <p:spPr>
+          <a:xfrm>
+            <a:off x="4297680" y="5614416"/>
+            <a:ext cx="1783080" cy="201168"/>
+          </a:xfrm>
+          <a:prstGeom prst="rect">
+            <a:avLst/>
+          </a:prstGeom>
+          <a:noFill/>
+          <a:ln/>
+        </p:spPr>
+        <p:txBody>
+          <a:bodyPr wrap="square" lIns="0" tIns="0" rIns="0" bIns="0" rtlCol="0" anchor="ctr"/>
+          <a:lstStyle/>
+          <a:p>
+            <a:pPr indent="0" marL="0">
+              <a:buNone/>
+            </a:pPr>
+            <a:r>
+              <a:rPr lang="en-US" sz="750" dirty="0">
+                <a:solidFill>
+                  <a:srgbClr val="818181"/>
+                </a:solidFill>
+                <a:latin typeface="Verdana" pitchFamily="34" charset="0"/>
+                <a:ea typeface="Verdana" pitchFamily="34" charset="-122"/>
+                <a:cs typeface="Verdana" pitchFamily="34" charset="-120"/>
+              </a:rPr>
+              <a:t>otro perímetro en su lugar</a:t>
+            </a:r>
+            <a:endParaRPr lang="en-US" sz="750" dirty="0"/>
+          </a:p>
+        </p:txBody>
+      </p:sp>
+      <p:sp>
+        <p:nvSpPr>
+          <p:cNvPr id="12" name="Shape 9"/>
+          <p:cNvSpPr/>
+          <p:nvPr/>
+        </p:nvSpPr>
+        <p:spPr>
+          <a:xfrm>
+            <a:off x="6108192" y="5614416"/>
+            <a:ext cx="868680" cy="201168"/>
+          </a:xfrm>
+          <a:prstGeom prst="roundRect">
+            <a:avLst>
+              <a:gd name="adj" fmla="val 36364"/>
+            </a:avLst>
+          </a:prstGeom>
+          <a:solidFill>
+            <a:srgbClr val="FF8AC2"/>
+          </a:solidFill>
+          <a:ln w="12700">
+            <a:solidFill>
+              <a:srgbClr val="FF8AC2"/>
+            </a:solidFill>
+            <a:prstDash val="solid"/>
+          </a:ln>
+        </p:spPr>
+      </p:sp>
+      <p:sp>
+        <p:nvSpPr>
+          <p:cNvPr id="13" name="Text 10"/>
+          <p:cNvSpPr txBox="1"/>
+          <p:nvPr/>
+        </p:nvSpPr>
+        <p:spPr>
+          <a:xfrm>
+            <a:off x="6108192" y="5614416"/>
+            <a:ext cx="868680" cy="201168"/>
+          </a:xfrm>
+          <a:prstGeom prst="rect">
+            <a:avLst/>
+          </a:prstGeom>
+          <a:noFill/>
+          <a:ln/>
+        </p:spPr>
+        <p:txBody>
+          <a:bodyPr wrap="square" lIns="0" tIns="0" rIns="0" bIns="0" rtlCol="0" anchor="ctr"/>
+          <a:lstStyle/>
+          <a:p>
+            <a:pPr algn="ctr" indent="0" marL="0">
+              <a:buNone/>
+            </a:pPr>
+            <a:r>
+              <a:rPr lang="en-US" sz="700" b="1" dirty="0">
+                <a:solidFill>
+                  <a:srgbClr val="2B2B2B"/>
+                </a:solidFill>
+                <a:latin typeface="Verdana" pitchFamily="34" charset="0"/>
+                <a:ea typeface="Verdana" pitchFamily="34" charset="-122"/>
+                <a:cs typeface="Verdana" pitchFamily="34" charset="-120"/>
+              </a:rPr>
+              <a:t>SUPUESTO</a:t>
+            </a:r>
+            <a:endParaRPr lang="en-US" sz="700" dirty="0"/>
+          </a:p>
+        </p:txBody>
+      </p:sp>
+      <p:sp>
+        <p:nvSpPr>
+          <p:cNvPr id="14" name="Text 11"/>
+          <p:cNvSpPr txBox="1"/>
+          <p:nvPr/>
+        </p:nvSpPr>
+        <p:spPr>
+          <a:xfrm>
+            <a:off x="7040880" y="5614416"/>
+            <a:ext cx="1783080" cy="201168"/>
+          </a:xfrm>
+          <a:prstGeom prst="rect">
+            <a:avLst/>
+          </a:prstGeom>
+          <a:noFill/>
+          <a:ln/>
+        </p:spPr>
+        <p:txBody>
+          <a:bodyPr wrap="square" lIns="0" tIns="0" rIns="0" bIns="0" rtlCol="0" anchor="ctr"/>
+          <a:lstStyle/>
+          <a:p>
+            <a:pPr indent="0" marL="0">
+              <a:buNone/>
+            </a:pPr>
+            <a:r>
+              <a:rPr lang="en-US" sz="750" dirty="0">
+                <a:solidFill>
+                  <a:srgbClr val="818181"/>
+                </a:solidFill>
+                <a:latin typeface="Verdana" pitchFamily="34" charset="0"/>
+                <a:ea typeface="Verdana" pitchFamily="34" charset="-122"/>
+                <a:cs typeface="Verdana" pitchFamily="34" charset="-120"/>
+              </a:rPr>
+              <a:t>no hay dato: se importa</a:t>
+            </a:r>
+            <a:endParaRPr lang="en-US" sz="750" dirty="0"/>
+          </a:p>
+        </p:txBody>
+      </p:sp>
+      <p:sp>
+        <p:nvSpPr>
+          <p:cNvPr id="15" name="Shape 12"/>
+          <p:cNvSpPr/>
+          <p:nvPr/>
+        </p:nvSpPr>
+        <p:spPr>
+          <a:xfrm>
+            <a:off x="8851392" y="5614416"/>
+            <a:ext cx="868680" cy="201168"/>
+          </a:xfrm>
+          <a:prstGeom prst="roundRect">
+            <a:avLst>
+              <a:gd name="adj" fmla="val 36364"/>
+            </a:avLst>
+          </a:prstGeom>
+          <a:solidFill>
+            <a:srgbClr val="CACACA"/>
+          </a:solidFill>
+          <a:ln w="12700">
+            <a:solidFill>
+              <a:srgbClr val="CACACA"/>
+            </a:solidFill>
+            <a:prstDash val="solid"/>
+          </a:ln>
+        </p:spPr>
+      </p:sp>
+      <p:sp>
+        <p:nvSpPr>
+          <p:cNvPr id="16" name="Text 13"/>
+          <p:cNvSpPr txBox="1"/>
+          <p:nvPr/>
+        </p:nvSpPr>
+        <p:spPr>
+          <a:xfrm>
+            <a:off x="8851392" y="5614416"/>
+            <a:ext cx="868680" cy="201168"/>
+          </a:xfrm>
+          <a:prstGeom prst="rect">
+            <a:avLst/>
+          </a:prstGeom>
+          <a:noFill/>
+          <a:ln/>
+        </p:spPr>
+        <p:txBody>
+          <a:bodyPr wrap="square" lIns="0" tIns="0" rIns="0" bIns="0" rtlCol="0" anchor="ctr"/>
+          <a:lstStyle/>
+          <a:p>
+            <a:pPr algn="ctr" indent="0" marL="0">
+              <a:buNone/>
+            </a:pPr>
+            <a:r>
+              <a:rPr lang="en-US" sz="700" b="1" dirty="0">
+                <a:solidFill>
+                  <a:srgbClr val="2B2B2B"/>
+                </a:solidFill>
+                <a:latin typeface="Verdana" pitchFamily="34" charset="0"/>
+                <a:ea typeface="Verdana" pitchFamily="34" charset="-122"/>
+                <a:cs typeface="Verdana" pitchFamily="34" charset="-120"/>
+              </a:rPr>
+              <a:t>DEL BANCO</a:t>
+            </a:r>
+            <a:endParaRPr lang="en-US" sz="700" dirty="0"/>
+          </a:p>
+        </p:txBody>
+      </p:sp>
+      <p:sp>
+        <p:nvSpPr>
+          <p:cNvPr id="17" name="Text 14"/>
+          <p:cNvSpPr txBox="1"/>
+          <p:nvPr/>
+        </p:nvSpPr>
+        <p:spPr>
+          <a:xfrm>
+            <a:off x="9784080" y="5614416"/>
+            <a:ext cx="1783080" cy="201168"/>
+          </a:xfrm>
+          <a:prstGeom prst="rect">
+            <a:avLst/>
+          </a:prstGeom>
+          <a:noFill/>
+          <a:ln/>
+        </p:spPr>
+        <p:txBody>
+          <a:bodyPr wrap="square" lIns="0" tIns="0" rIns="0" bIns="0" rtlCol="0" anchor="ctr"/>
+          <a:lstStyle/>
+          <a:p>
+            <a:pPr indent="0" marL="0">
+              <a:buNone/>
+            </a:pPr>
+            <a:r>
+              <a:rPr lang="en-US" sz="750" dirty="0">
+                <a:solidFill>
+                  <a:srgbClr val="818181"/>
+                </a:solidFill>
+                <a:latin typeface="Verdana" pitchFamily="34" charset="0"/>
+                <a:ea typeface="Verdana" pitchFamily="34" charset="-122"/>
+                <a:cs typeface="Verdana" pitchFamily="34" charset="-120"/>
+              </a:rPr>
+              <a:t>del banco entero, por diseño</a:t>
+            </a:r>
+            <a:endParaRPr lang="en-US" sz="750" dirty="0"/>
+          </a:p>
+        </p:txBody>
+      </p:sp>
+      <p:sp>
+        <p:nvSpPr>
+          <p:cNvPr id="18" name="Text 15"/>
+          <p:cNvSpPr txBox="1"/>
+          <p:nvPr/>
+        </p:nvSpPr>
+        <p:spPr>
+          <a:xfrm>
+            <a:off x="621792" y="6053328"/>
+            <a:ext cx="10945368" cy="475488"/>
+          </a:xfrm>
+          <a:prstGeom prst="rect">
+            <a:avLst/>
+          </a:prstGeom>
+          <a:noFill/>
+          <a:ln/>
+        </p:spPr>
+        <p:txBody>
+          <a:bodyPr wrap="square" lIns="0" tIns="0" rIns="0" bIns="0" rtlCol="0" anchor="ctr"/>
+          <a:lstStyle/>
+          <a:p>
+            <a:pPr indent="0" marL="0">
+              <a:buNone/>
+            </a:pPr>
+            <a:r>
+              <a:rPr lang="en-US" sz="750" i="1" dirty="0">
+                <a:solidFill>
+                  <a:srgbClr val="818181"/>
+                </a:solidFill>
+                <a:latin typeface="Verdana" pitchFamily="34" charset="0"/>
+                <a:ea typeface="Verdana" pitchFamily="34" charset="-122"/>
+                <a:cs typeface="Verdana" pitchFamily="34" charset="-120"/>
+              </a:rPr>
+              <a:t>«PYME» significa aquí la definición del CRR (art. 501: facturación hasta 50 M€), que no coincide con la de la Recomendación 2003/361/CE ni con los tramos de importe del MIR. Las tres fuentes que dicen «PYME» miden, por tanto, tres perímetros distintos. El detalle de cada supuesto y su sensibilidad está en notas.md.</a:t>
             </a:r>
             <a:endParaRPr lang="en-US" sz="750" dirty="0"/>
           </a:p>

--- a/pres/rentabilidad_pyme_laminas_adicionales.pptx
+++ b/pres/rentabilidad_pyme_laminas_adicionales.pptx
@@ -7608,7 +7608,7 @@
                           <a:ea typeface="Verdana" pitchFamily="34" charset="-122"/>
                           <a:cs typeface="Verdana" pitchFamily="34" charset="-120"/>
                         </a:rPr>
-                        <a:t>De PYME según el CRR (facturación hasta 50 M€). Matices: solo la cartera IRB, mediana de entidades y pérdida esperada, no dotación contable.</a:t>
+                        <a:t>De PYME, pero con la definición INTERNA de cada banco: en IRB el reporting no impone una común. Además, solo cartera IRB, mediana de entidades y pérdida esperada, no dotación contable.</a:t>
                       </a:r>
                       <a:endParaRPr lang="en-US" sz="750" dirty="0">
                         <a:latin typeface="Verdana" charset="0"/>
@@ -7950,7 +7950,7 @@
                           <a:ea typeface="Verdana" pitchFamily="34" charset="-122"/>
                           <a:cs typeface="Verdana" pitchFamily="34" charset="-120"/>
                         </a:rPr>
-                        <a:t>De PYME según el CRR, con el factor de apoyo del art. 501. Pero se agrega por supervisor e incluye PYME extranjera (el 46 % en España). Con solo la local, la densidad baja entre 1,7 y 4,4 pp en seis de los siete; el orden entre países no cambia.</a:t>
+                        <a:t>De PYME, con dos definiciones: estándar, facturación hasta 50 M€; IRB, la interna de cada banco. Incluye PYME extranjera (46 % en España): sin ella la densidad baja de 1,7 a 4,4 pp en seis de los siete, sin cambiar el orden.</a:t>
                       </a:r>
                       <a:endParaRPr lang="en-US" sz="750" dirty="0">
                         <a:latin typeface="Verdana" charset="0"/>
@@ -9621,7 +9621,7 @@
                 <a:ea typeface="Verdana" pitchFamily="34" charset="-122"/>
                 <a:cs typeface="Verdana" pitchFamily="34" charset="-120"/>
               </a:rPr>
-              <a:t>«PYME» significa aquí la definición del CRR (art. 501: facturación hasta 50 M€), que no coincide con la de la Recomendación 2003/361/CE ni con los tramos de importe del MIR. Las tres fuentes que dicen «PYME» miden, por tanto, tres perímetros distintos. El detalle de cada supuesto y su sensibilidad está en notas.md.</a:t>
+              <a:t>No hay UNA definición de PYME en los datos del EBA. Mora (FINREP): Recomendación 2003/361/CE completa, menos de 250 empleados y hasta 50 M€ de facturación o 43 M€ de balance. Capital por método estándar: el CRR solo define PYME en el art. 501, por facturación hasta 50 M€. Todo lo IRB —PD, LGD y la parte IRB de la densidad—: la definición interna de cada banco. Ninguna coincide con los tramos de importe del MIR. Detalle en notas.md.</a:t>
             </a:r>
             <a:endParaRPr lang="en-US" sz="750" dirty="0"/>
           </a:p>

--- a/pres/rentabilidad_pyme_laminas_adicionales.pptx
+++ b/pres/rentabilidad_pyme_laminas_adicionales.pptx
@@ -15,9 +15,10 @@
     <p:sldId id="263" r:id="rId9"/>
     <p:sldId id="264" r:id="rId10"/>
     <p:sldId id="265" r:id="rId11"/>
+    <p:sldId id="266" r:id="rId12"/>
   </p:sldIdLst>
   <p:notesMasterIdLst>
-    <p:notesMasterId r:id="rId12"/>
+    <p:notesMasterId r:id="rId13"/>
   </p:notesMasterIdLst>
   <p:sldSz cx="12192000" cy="6858000"/>
   <p:notesSz cx="6858000" cy="12192000"/>
@@ -2710,6 +2711,94 @@
 </p:notes>
 </file>
 
+<file path=ppt/notesSlides/notesSlide11.xml><?xml version="1.0" encoding="utf-8"?>
+<p:notes xmlns:a="http://schemas.openxmlformats.org/drawingml/2006/main" xmlns:r="http://schemas.openxmlformats.org/officeDocument/2006/relationships" xmlns:p="http://schemas.openxmlformats.org/presentationml/2006/main">
+  <p:cSld>
+    <p:spTree>
+      <p:nvGrpSpPr>
+        <p:cNvPr id="1" name=""/>
+        <p:cNvGrpSpPr/>
+        <p:nvPr/>
+      </p:nvGrpSpPr>
+      <p:grpSpPr>
+        <a:xfrm>
+          <a:off x="0" y="0"/>
+          <a:ext cx="0" cy="0"/>
+          <a:chOff x="0" y="0"/>
+          <a:chExt cx="0" cy="0"/>
+        </a:xfrm>
+      </p:grpSpPr>
+      <p:sp>
+        <p:nvSpPr>
+          <p:cNvPr id="2" name="Slide Image Placeholder 1"/>
+          <p:cNvSpPr>
+            <a:spLocks noGrp="1" noRot="1" noChangeAspect="1"/>
+          </p:cNvSpPr>
+          <p:nvPr>
+            <p:ph type="sldImg"/>
+          </p:nvPr>
+        </p:nvSpPr>
+        <p:spPr/>
+      </p:sp>
+      <p:sp>
+        <p:nvSpPr>
+          <p:cNvPr id="3" name="Notes Placeholder 2"/>
+          <p:cNvSpPr>
+            <a:spLocks noGrp="1"/>
+          </p:cNvSpPr>
+          <p:nvPr>
+            <p:ph type="body" idx="1"/>
+          </p:nvPr>
+        </p:nvSpPr>
+        <p:spPr/>
+        <p:txBody>
+          <a:bodyPr/>
+          <a:lstStyle/>
+          <a:p>
+            <a:r>
+              <a:rPr lang="en-US" dirty="0"/>
+              <a:t/>
+            </a:r>
+            <a:endParaRPr lang="en-US" dirty="0"/>
+          </a:p>
+        </p:txBody>
+      </p:sp>
+      <p:sp>
+        <p:nvSpPr>
+          <p:cNvPr id="4" name="Slide Number Placeholder 3"/>
+          <p:cNvSpPr>
+            <a:spLocks noGrp="1"/>
+          </p:cNvSpPr>
+          <p:nvPr>
+            <p:ph type="sldNum" sz="quarter" idx="10"/>
+          </p:nvPr>
+        </p:nvSpPr>
+        <p:spPr/>
+        <p:txBody>
+          <a:bodyPr/>
+          <a:lstStyle/>
+          <a:p>
+            <a:fld id="{F7021451-1387-4CA6-816F-3879F97B5CBC}" type="slidenum">
+              <a:rPr lang="en-US"/>
+              <a:t>11</a:t>
+            </a:fld>
+            <a:endParaRPr lang="en-US"/>
+          </a:p>
+        </p:txBody>
+      </p:sp>
+    </p:spTree>
+    <p:extLst>
+      <p:ext uri="{BB962C8B-B14F-4D97-AF65-F5344CB8AC3E}">
+        <p14:creationId xmlns:p14="http://schemas.microsoft.com/office/powerpoint/2010/main" val="1024086991"/>
+      </p:ext>
+    </p:extLst>
+  </p:cSld>
+  <p:clrMapOvr>
+    <a:masterClrMapping/>
+  </p:clrMapOvr>
+</p:notes>
+</file>
+
 <file path=ppt/notesSlides/notesSlide2.xml><?xml version="1.0" encoding="utf-8"?>
 <p:notes xmlns:a="http://schemas.openxmlformats.org/drawingml/2006/main" xmlns:r="http://schemas.openxmlformats.org/officeDocument/2006/relationships" xmlns:p="http://schemas.openxmlformats.org/presentationml/2006/main">
   <p:cSld>
@@ -6080,11 +6169,12 @@
             <a:tbl>
               <a:tblPr/>
               <a:tblGrid>
-                <a:gridCol w="1481328"/>
-                <a:gridCol w="2788920"/>
-                <a:gridCol w="4416552"/>
-                <a:gridCol w="1024128"/>
-                <a:gridCol w="1234440"/>
+                <a:gridCol w="1280160"/>
+                <a:gridCol w="2395728"/>
+                <a:gridCol w="3429000"/>
+                <a:gridCol w="1920240"/>
+                <a:gridCol w="987552"/>
+                <a:gridCol w="932688"/>
               </a:tblGrid>
               <a:tr h="292608">
                 <a:tc>
@@ -6096,7 +6186,7 @@
                         <a:buNone/>
                       </a:pPr>
                       <a:r>
-                        <a:rPr lang="en-US" sz="950" b="1" dirty="0">
+                        <a:rPr lang="en-US" sz="900" b="1" dirty="0">
                           <a:solidFill>
                             <a:srgbClr val="FFFFFF"/>
                           </a:solidFill>
@@ -6106,7 +6196,7 @@
                         </a:rPr>
                         <a:t>Partida</a:t>
                       </a:r>
-                      <a:endParaRPr lang="en-US" sz="950" dirty="0">
+                      <a:endParaRPr lang="en-US" sz="900" dirty="0">
                         <a:latin typeface="Verdana" charset="0"/>
                         <a:ea typeface="Verdana" charset="0"/>
                         <a:cs typeface="Verdana" charset="0"/>
@@ -6164,7 +6254,7 @@
                         <a:buNone/>
                       </a:pPr>
                       <a:r>
-                        <a:rPr lang="en-US" sz="950" b="1" dirty="0">
+                        <a:rPr lang="en-US" sz="900" b="1" dirty="0">
                           <a:solidFill>
                             <a:srgbClr val="FFFFFF"/>
                           </a:solidFill>
@@ -6174,7 +6264,7 @@
                         </a:rPr>
                         <a:t>Fuente</a:t>
                       </a:r>
-                      <a:endParaRPr lang="en-US" sz="950" dirty="0">
+                      <a:endParaRPr lang="en-US" sz="900" dirty="0">
                         <a:latin typeface="Verdana" charset="0"/>
                         <a:ea typeface="Verdana" charset="0"/>
                         <a:cs typeface="Verdana" charset="0"/>
@@ -6232,7 +6322,7 @@
                         <a:buNone/>
                       </a:pPr>
                       <a:r>
-                        <a:rPr lang="en-US" sz="950" b="1" dirty="0">
+                        <a:rPr lang="en-US" sz="900" b="1" dirty="0">
                           <a:solidFill>
                             <a:srgbClr val="FFFFFF"/>
                           </a:solidFill>
@@ -6242,7 +6332,7 @@
                         </a:rPr>
                         <a:t>Qué se usa y por qué es, o no, de PYME</a:t>
                       </a:r>
-                      <a:endParaRPr lang="en-US" sz="950" dirty="0">
+                      <a:endParaRPr lang="en-US" sz="900" dirty="0">
                         <a:latin typeface="Verdana" charset="0"/>
                         <a:ea typeface="Verdana" charset="0"/>
                         <a:cs typeface="Verdana" charset="0"/>
@@ -6296,11 +6386,79 @@
                     <a:bodyPr/>
                     <a:lstStyle/>
                     <a:p>
+                      <a:pPr algn="l" indent="0" marL="0">
+                        <a:buNone/>
+                      </a:pPr>
+                      <a:r>
+                        <a:rPr lang="en-US" sz="900" b="1" dirty="0">
+                          <a:solidFill>
+                            <a:srgbClr val="FFFFFF"/>
+                          </a:solidFill>
+                          <a:latin typeface="Verdana" pitchFamily="34" charset="0"/>
+                          <a:ea typeface="Verdana" pitchFamily="34" charset="-122"/>
+                          <a:cs typeface="Verdana" pitchFamily="34" charset="-120"/>
+                        </a:rPr>
+                        <a:t>Definición de PYME</a:t>
+                      </a:r>
+                      <a:endParaRPr lang="en-US" sz="900" dirty="0">
+                        <a:latin typeface="Verdana" charset="0"/>
+                        <a:ea typeface="Verdana" charset="0"/>
+                        <a:cs typeface="Verdana" charset="0"/>
+                      </a:endParaRPr>
+                    </a:p>
+                  </a:txBody>
+                  <a:tcPr marL="63500" marR="63500" marT="25400" marB="25400" anchor="ctr">
+                    <a:lnL w="6350" cap="flat" cmpd="sng" algn="ctr">
+                      <a:solidFill>
+                        <a:srgbClr val="CACACA"/>
+                      </a:solidFill>
+                      <a:prstDash val="solid"/>
+                      <a:round/>
+                      <a:headEnd type="none" w="med" len="med"/>
+                      <a:tailEnd type="none" w="med" len="med"/>
+                    </a:lnL>
+                    <a:lnR w="6350" cap="flat" cmpd="sng" algn="ctr">
+                      <a:solidFill>
+                        <a:srgbClr val="CACACA"/>
+                      </a:solidFill>
+                      <a:prstDash val="solid"/>
+                      <a:round/>
+                      <a:headEnd type="none" w="med" len="med"/>
+                      <a:tailEnd type="none" w="med" len="med"/>
+                    </a:lnR>
+                    <a:lnT w="6350" cap="flat" cmpd="sng" algn="ctr">
+                      <a:solidFill>
+                        <a:srgbClr val="CACACA"/>
+                      </a:solidFill>
+                      <a:prstDash val="solid"/>
+                      <a:round/>
+                      <a:headEnd type="none" w="med" len="med"/>
+                      <a:tailEnd type="none" w="med" len="med"/>
+                    </a:lnT>
+                    <a:lnB w="6350" cap="flat" cmpd="sng" algn="ctr">
+                      <a:solidFill>
+                        <a:srgbClr val="CACACA"/>
+                      </a:solidFill>
+                      <a:prstDash val="solid"/>
+                      <a:round/>
+                      <a:headEnd type="none" w="med" len="med"/>
+                      <a:tailEnd type="none" w="med" len="med"/>
+                    </a:lnB>
+                    <a:solidFill>
+                      <a:srgbClr val="2B2B2B"/>
+                    </a:solidFill>
+                  </a:tcPr>
+                </a:tc>
+                <a:tc>
+                  <a:txBody>
+                    <a:bodyPr/>
+                    <a:lstStyle/>
+                    <a:p>
                       <a:pPr algn="ctr" indent="0" marL="0">
                         <a:buNone/>
                       </a:pPr>
                       <a:r>
-                        <a:rPr lang="en-US" sz="950" b="1" dirty="0">
+                        <a:rPr lang="en-US" sz="900" b="1" dirty="0">
                           <a:solidFill>
                             <a:srgbClr val="FFFFFF"/>
                           </a:solidFill>
@@ -6310,7 +6468,7 @@
                         </a:rPr>
                         <a:t>Tipo</a:t>
                       </a:r>
-                      <a:endParaRPr lang="en-US" sz="950" dirty="0">
+                      <a:endParaRPr lang="en-US" sz="900" dirty="0">
                         <a:latin typeface="Verdana" charset="0"/>
                         <a:ea typeface="Verdana" charset="0"/>
                         <a:cs typeface="Verdana" charset="0"/>
@@ -6368,7 +6526,7 @@
                         <a:buNone/>
                       </a:pPr>
                       <a:r>
-                        <a:rPr lang="en-US" sz="950" b="1" dirty="0">
+                        <a:rPr lang="en-US" sz="900" b="1" dirty="0">
                           <a:solidFill>
                             <a:srgbClr val="FFFFFF"/>
                           </a:solidFill>
@@ -6376,9 +6534,9 @@
                           <a:ea typeface="Verdana" pitchFamily="34" charset="-122"/>
                           <a:cs typeface="Verdana" pitchFamily="34" charset="-120"/>
                         </a:rPr>
-                        <a:t>Último dato</a:t>
-                      </a:r>
-                      <a:endParaRPr lang="en-US" sz="950" dirty="0">
+                        <a:t>Último</a:t>
+                      </a:r>
+                      <a:endParaRPr lang="en-US" sz="900" dirty="0">
                         <a:latin typeface="Verdana" charset="0"/>
                         <a:ea typeface="Verdana" charset="0"/>
                         <a:cs typeface="Verdana" charset="0"/>
@@ -6438,7 +6596,7 @@
                         <a:buNone/>
                       </a:pPr>
                       <a:r>
-                        <a:rPr lang="en-US" sz="950" b="1" dirty="0">
+                        <a:rPr lang="en-US" sz="900" b="1" dirty="0">
                           <a:solidFill>
                             <a:srgbClr val="2B2B2B"/>
                           </a:solidFill>
@@ -6448,7 +6606,7 @@
                         </a:rPr>
                         <a:t>Precio del préstamo</a:t>
                       </a:r>
-                      <a:endParaRPr lang="en-US" sz="950" dirty="0">
+                      <a:endParaRPr lang="en-US" sz="900" dirty="0">
                         <a:latin typeface="Verdana" charset="0"/>
                         <a:ea typeface="Verdana" charset="0"/>
                         <a:cs typeface="Verdana" charset="0"/>
@@ -6514,7 +6672,7 @@
                           <a:ea typeface="Verdana" pitchFamily="34" charset="-122"/>
                           <a:cs typeface="Verdana" pitchFamily="34" charset="-120"/>
                         </a:rPr>
-                        <a:t>BCE, MIR: tipo de nueva producción a sociedades no financieras, tramo ≤1 M€, fijación total, sin comisiones</a:t>
+                        <a:t>BCE, MIR: tipo de nueva producción a sociedades no financieras, tramo ≤1 M€, sin comisiones</a:t>
                       </a:r>
                       <a:endParaRPr lang="en-US" sz="750" dirty="0">
                         <a:latin typeface="Verdana" charset="0"/>
@@ -6582,7 +6740,7 @@
                           <a:ea typeface="Verdana" pitchFamily="34" charset="-122"/>
                           <a:cs typeface="Verdana" pitchFamily="34" charset="-120"/>
                         </a:rPr>
-                        <a:t>Segmenta por IMPORTE DEL PRÉSTAMO, no por tamaño de empresa: una gran empresa que pide 800.000 € entra, y una mediana que pide 3 M€ no. Deja fuera al autónomo, que está en hogares.</a:t>
+                        <a:t>Mide el tamaño del PRÉSTAMO, no de la empresa: una gran empresa que pide 800.000 € entra y una mediana que pide 3 M€ no. Deja fuera al autónomo.</a:t>
                       </a:r>
                       <a:endParaRPr lang="en-US" sz="750" dirty="0">
                         <a:latin typeface="Verdana" charset="0"/>
@@ -6638,11 +6796,79 @@
                     <a:bodyPr/>
                     <a:lstStyle/>
                     <a:p>
+                      <a:pPr algn="l" indent="0" marL="0">
+                        <a:buNone/>
+                      </a:pPr>
+                      <a:r>
+                        <a:rPr lang="en-US" sz="750" b="1" dirty="0">
+                          <a:solidFill>
+                            <a:srgbClr val="2B2B2B"/>
+                          </a:solidFill>
+                          <a:latin typeface="Verdana" pitchFamily="34" charset="0"/>
+                          <a:ea typeface="Verdana" pitchFamily="34" charset="-122"/>
+                          <a:cs typeface="Verdana" pitchFamily="34" charset="-120"/>
+                        </a:rPr>
+                        <a:t>Ninguna: préstamo ≤1 M€</a:t>
+                      </a:r>
+                      <a:endParaRPr lang="en-US" sz="750" dirty="0">
+                        <a:latin typeface="Verdana" charset="0"/>
+                        <a:ea typeface="Verdana" charset="0"/>
+                        <a:cs typeface="Verdana" charset="0"/>
+                      </a:endParaRPr>
+                    </a:p>
+                  </a:txBody>
+                  <a:tcPr marL="63500" marR="63500" marT="25400" marB="25400" anchor="ctr">
+                    <a:lnL w="6350" cap="flat" cmpd="sng" algn="ctr">
+                      <a:solidFill>
+                        <a:srgbClr val="CACACA"/>
+                      </a:solidFill>
+                      <a:prstDash val="solid"/>
+                      <a:round/>
+                      <a:headEnd type="none" w="med" len="med"/>
+                      <a:tailEnd type="none" w="med" len="med"/>
+                    </a:lnL>
+                    <a:lnR w="6350" cap="flat" cmpd="sng" algn="ctr">
+                      <a:solidFill>
+                        <a:srgbClr val="CACACA"/>
+                      </a:solidFill>
+                      <a:prstDash val="solid"/>
+                      <a:round/>
+                      <a:headEnd type="none" w="med" len="med"/>
+                      <a:tailEnd type="none" w="med" len="med"/>
+                    </a:lnR>
+                    <a:lnT w="6350" cap="flat" cmpd="sng" algn="ctr">
+                      <a:solidFill>
+                        <a:srgbClr val="CACACA"/>
+                      </a:solidFill>
+                      <a:prstDash val="solid"/>
+                      <a:round/>
+                      <a:headEnd type="none" w="med" len="med"/>
+                      <a:tailEnd type="none" w="med" len="med"/>
+                    </a:lnT>
+                    <a:lnB w="6350" cap="flat" cmpd="sng" algn="ctr">
+                      <a:solidFill>
+                        <a:srgbClr val="CACACA"/>
+                      </a:solidFill>
+                      <a:prstDash val="solid"/>
+                      <a:round/>
+                      <a:headEnd type="none" w="med" len="med"/>
+                      <a:tailEnd type="none" w="med" len="med"/>
+                    </a:lnB>
+                    <a:solidFill>
+                      <a:srgbClr val="FFF4C2"/>
+                    </a:solidFill>
+                  </a:tcPr>
+                </a:tc>
+                <a:tc>
+                  <a:txBody>
+                    <a:bodyPr/>
+                    <a:lstStyle/>
+                    <a:p>
                       <a:pPr algn="ctr" indent="0" marL="0">
                         <a:buNone/>
                       </a:pPr>
                       <a:r>
-                        <a:rPr lang="en-US" sz="800" b="1" dirty="0">
+                        <a:rPr lang="en-US" sz="750" b="1" dirty="0">
                           <a:solidFill>
                             <a:srgbClr val="2B2B2B"/>
                           </a:solidFill>
@@ -6652,7 +6878,7 @@
                         </a:rPr>
                         <a:t>PROXY</a:t>
                       </a:r>
-                      <a:endParaRPr lang="en-US" sz="800" dirty="0">
+                      <a:endParaRPr lang="en-US" sz="750" dirty="0">
                         <a:latin typeface="Verdana" charset="0"/>
                         <a:ea typeface="Verdana" charset="0"/>
                         <a:cs typeface="Verdana" charset="0"/>
@@ -6710,7 +6936,7 @@
                         <a:buNone/>
                       </a:pPr>
                       <a:r>
-                        <a:rPr lang="en-US" sz="900" dirty="0">
+                        <a:rPr lang="en-US" sz="800" dirty="0">
                           <a:solidFill>
                             <a:srgbClr val="2B2B2B"/>
                           </a:solidFill>
@@ -6720,7 +6946,7 @@
                         </a:rPr>
                         <a:t>2026-07</a:t>
                       </a:r>
-                      <a:endParaRPr lang="en-US" sz="900" dirty="0">
+                      <a:endParaRPr lang="en-US" sz="800" dirty="0">
                         <a:latin typeface="Verdana" charset="0"/>
                         <a:ea typeface="Verdana" charset="0"/>
                         <a:cs typeface="Verdana" charset="0"/>
@@ -6780,7 +7006,7 @@
                         <a:buNone/>
                       </a:pPr>
                       <a:r>
-                        <a:rPr lang="en-US" sz="950" b="1" dirty="0">
+                        <a:rPr lang="en-US" sz="900" b="1" dirty="0">
                           <a:solidFill>
                             <a:srgbClr val="2B2B2B"/>
                           </a:solidFill>
@@ -6790,7 +7016,7 @@
                         </a:rPr>
                         <a:t>Comisiones</a:t>
                       </a:r>
-                      <a:endParaRPr lang="en-US" sz="950" dirty="0">
+                      <a:endParaRPr lang="en-US" sz="900" dirty="0">
                         <a:latin typeface="Verdana" charset="0"/>
                         <a:ea typeface="Verdana" charset="0"/>
                         <a:cs typeface="Verdana" charset="0"/>
@@ -6924,7 +7150,7 @@
                           <a:ea typeface="Verdana" pitchFamily="34" charset="-122"/>
                           <a:cs typeface="Verdana" pitchFamily="34" charset="-120"/>
                         </a:rPr>
-                        <a:t>Solo España publica un tipo con comisiones para empresas; su cuña de 87 pb se aplica a los siete. Fuera de España no es un dato. Contraste: los segmentos de empresas que se publican cobran de 99 a 122 pb.</a:t>
+                        <a:t>Solo España publica un tipo con comisiones para empresas; su cuña de 87 pb se aplica a los siete. Los segmentos de empresas que se publican cobran de 99 a 122 pb.</a:t>
                       </a:r>
                       <a:endParaRPr lang="en-US" sz="750" dirty="0">
                         <a:latin typeface="Verdana" charset="0"/>
@@ -6980,11 +7206,79 @@
                     <a:bodyPr/>
                     <a:lstStyle/>
                     <a:p>
+                      <a:pPr algn="l" indent="0" marL="0">
+                        <a:buNone/>
+                      </a:pPr>
+                      <a:r>
+                        <a:rPr lang="en-US" sz="750" b="1" dirty="0">
+                          <a:solidFill>
+                            <a:srgbClr val="2B2B2B"/>
+                          </a:solidFill>
+                          <a:latin typeface="Verdana" pitchFamily="34" charset="0"/>
+                          <a:ea typeface="Verdana" pitchFamily="34" charset="-122"/>
+                          <a:cs typeface="Verdana" pitchFamily="34" charset="-120"/>
+                        </a:rPr>
+                        <a:t>Ninguna: préstamo ≤1 M€</a:t>
+                      </a:r>
+                      <a:endParaRPr lang="en-US" sz="750" dirty="0">
+                        <a:latin typeface="Verdana" charset="0"/>
+                        <a:ea typeface="Verdana" charset="0"/>
+                        <a:cs typeface="Verdana" charset="0"/>
+                      </a:endParaRPr>
+                    </a:p>
+                  </a:txBody>
+                  <a:tcPr marL="63500" marR="63500" marT="25400" marB="25400" anchor="ctr">
+                    <a:lnL w="6350" cap="flat" cmpd="sng" algn="ctr">
+                      <a:solidFill>
+                        <a:srgbClr val="CACACA"/>
+                      </a:solidFill>
+                      <a:prstDash val="solid"/>
+                      <a:round/>
+                      <a:headEnd type="none" w="med" len="med"/>
+                      <a:tailEnd type="none" w="med" len="med"/>
+                    </a:lnL>
+                    <a:lnR w="6350" cap="flat" cmpd="sng" algn="ctr">
+                      <a:solidFill>
+                        <a:srgbClr val="CACACA"/>
+                      </a:solidFill>
+                      <a:prstDash val="solid"/>
+                      <a:round/>
+                      <a:headEnd type="none" w="med" len="med"/>
+                      <a:tailEnd type="none" w="med" len="med"/>
+                    </a:lnR>
+                    <a:lnT w="6350" cap="flat" cmpd="sng" algn="ctr">
+                      <a:solidFill>
+                        <a:srgbClr val="CACACA"/>
+                      </a:solidFill>
+                      <a:prstDash val="solid"/>
+                      <a:round/>
+                      <a:headEnd type="none" w="med" len="med"/>
+                      <a:tailEnd type="none" w="med" len="med"/>
+                    </a:lnT>
+                    <a:lnB w="6350" cap="flat" cmpd="sng" algn="ctr">
+                      <a:solidFill>
+                        <a:srgbClr val="CACACA"/>
+                      </a:solidFill>
+                      <a:prstDash val="solid"/>
+                      <a:round/>
+                      <a:headEnd type="none" w="med" len="med"/>
+                      <a:tailEnd type="none" w="med" len="med"/>
+                    </a:lnB>
+                    <a:solidFill>
+                      <a:srgbClr val="FFF4C2"/>
+                    </a:solidFill>
+                  </a:tcPr>
+                </a:tc>
+                <a:tc>
+                  <a:txBody>
+                    <a:bodyPr/>
+                    <a:lstStyle/>
+                    <a:p>
                       <a:pPr algn="ctr" indent="0" marL="0">
                         <a:buNone/>
                       </a:pPr>
                       <a:r>
-                        <a:rPr lang="en-US" sz="800" b="1" dirty="0">
+                        <a:rPr lang="en-US" sz="750" b="1" dirty="0">
                           <a:solidFill>
                             <a:srgbClr val="2B2B2B"/>
                           </a:solidFill>
@@ -6994,7 +7288,7 @@
                         </a:rPr>
                         <a:t>SUPUESTO</a:t>
                       </a:r>
-                      <a:endParaRPr lang="en-US" sz="800" dirty="0">
+                      <a:endParaRPr lang="en-US" sz="750" dirty="0">
                         <a:latin typeface="Verdana" charset="0"/>
                         <a:ea typeface="Verdana" charset="0"/>
                         <a:cs typeface="Verdana" charset="0"/>
@@ -7052,7 +7346,7 @@
                         <a:buNone/>
                       </a:pPr>
                       <a:r>
-                        <a:rPr lang="en-US" sz="900" dirty="0">
+                        <a:rPr lang="en-US" sz="800" dirty="0">
                           <a:solidFill>
                             <a:srgbClr val="2B2B2B"/>
                           </a:solidFill>
@@ -7062,7 +7356,7 @@
                         </a:rPr>
                         <a:t>2026-07</a:t>
                       </a:r>
-                      <a:endParaRPr lang="en-US" sz="900" dirty="0">
+                      <a:endParaRPr lang="en-US" sz="800" dirty="0">
                         <a:latin typeface="Verdana" charset="0"/>
                         <a:ea typeface="Verdana" charset="0"/>
                         <a:cs typeface="Verdana" charset="0"/>
@@ -7122,7 +7416,7 @@
                         <a:buNone/>
                       </a:pPr>
                       <a:r>
-                        <a:rPr lang="en-US" sz="950" b="1" dirty="0">
+                        <a:rPr lang="en-US" sz="900" b="1" dirty="0">
                           <a:solidFill>
                             <a:srgbClr val="2B2B2B"/>
                           </a:solidFill>
@@ -7132,7 +7426,7 @@
                         </a:rPr>
                         <a:t>Coste de los recursos</a:t>
                       </a:r>
-                      <a:endParaRPr lang="en-US" sz="950" dirty="0">
+                      <a:endParaRPr lang="en-US" sz="900" dirty="0">
                         <a:latin typeface="Verdana" charset="0"/>
                         <a:ea typeface="Verdana" charset="0"/>
                         <a:cs typeface="Verdana" charset="0"/>
@@ -7198,7 +7492,7 @@
                           <a:ea typeface="Verdana" pitchFamily="34" charset="-122"/>
                           <a:cs typeface="Verdana" pitchFamily="34" charset="-120"/>
                         </a:rPr>
-                        <a:t>BCE, MIR: depósitos a la vista y a plazo del sector 2240, ponderados por los saldos del BSI</a:t>
+                        <a:t>BCE, MIR: depósitos a la vista y a plazo del sector 2240, ponderados por saldos del BSI</a:t>
                       </a:r>
                       <a:endParaRPr lang="en-US" sz="750" dirty="0">
                         <a:latin typeface="Verdana" charset="0"/>
@@ -7266,7 +7560,7 @@
                           <a:ea typeface="Verdana" pitchFamily="34" charset="-122"/>
                           <a:cs typeface="Verdana" pitchFamily="34" charset="-120"/>
                         </a:rPr>
-                        <a:t>Depósito de SOCIEDADES NO FINANCIERAS, no de PYME: incluye la tesorería de la gran empresa. Supone además que el préstamo se financia con depósito de empresa y no en mercado.</a:t>
+                        <a:t>Depósito de todas las sociedades no financieras, incluida la tesorería de la gran empresa. Supone que el préstamo se financia con depósito y no en mercado.</a:t>
                       </a:r>
                       <a:endParaRPr lang="en-US" sz="750" dirty="0">
                         <a:latin typeface="Verdana" charset="0"/>
@@ -7322,11 +7616,79 @@
                     <a:bodyPr/>
                     <a:lstStyle/>
                     <a:p>
+                      <a:pPr algn="l" indent="0" marL="0">
+                        <a:buNone/>
+                      </a:pPr>
+                      <a:r>
+                        <a:rPr lang="en-US" sz="750" b="1" dirty="0">
+                          <a:solidFill>
+                            <a:srgbClr val="2B2B2B"/>
+                          </a:solidFill>
+                          <a:latin typeface="Verdana" pitchFamily="34" charset="0"/>
+                          <a:ea typeface="Verdana" pitchFamily="34" charset="-122"/>
+                          <a:cs typeface="Verdana" pitchFamily="34" charset="-120"/>
+                        </a:rPr>
+                        <a:t>Ninguna: todas las empresas</a:t>
+                      </a:r>
+                      <a:endParaRPr lang="en-US" sz="750" dirty="0">
+                        <a:latin typeface="Verdana" charset="0"/>
+                        <a:ea typeface="Verdana" charset="0"/>
+                        <a:cs typeface="Verdana" charset="0"/>
+                      </a:endParaRPr>
+                    </a:p>
+                  </a:txBody>
+                  <a:tcPr marL="63500" marR="63500" marT="25400" marB="25400" anchor="ctr">
+                    <a:lnL w="6350" cap="flat" cmpd="sng" algn="ctr">
+                      <a:solidFill>
+                        <a:srgbClr val="CACACA"/>
+                      </a:solidFill>
+                      <a:prstDash val="solid"/>
+                      <a:round/>
+                      <a:headEnd type="none" w="med" len="med"/>
+                      <a:tailEnd type="none" w="med" len="med"/>
+                    </a:lnL>
+                    <a:lnR w="6350" cap="flat" cmpd="sng" algn="ctr">
+                      <a:solidFill>
+                        <a:srgbClr val="CACACA"/>
+                      </a:solidFill>
+                      <a:prstDash val="solid"/>
+                      <a:round/>
+                      <a:headEnd type="none" w="med" len="med"/>
+                      <a:tailEnd type="none" w="med" len="med"/>
+                    </a:lnR>
+                    <a:lnT w="6350" cap="flat" cmpd="sng" algn="ctr">
+                      <a:solidFill>
+                        <a:srgbClr val="CACACA"/>
+                      </a:solidFill>
+                      <a:prstDash val="solid"/>
+                      <a:round/>
+                      <a:headEnd type="none" w="med" len="med"/>
+                      <a:tailEnd type="none" w="med" len="med"/>
+                    </a:lnT>
+                    <a:lnB w="6350" cap="flat" cmpd="sng" algn="ctr">
+                      <a:solidFill>
+                        <a:srgbClr val="CACACA"/>
+                      </a:solidFill>
+                      <a:prstDash val="solid"/>
+                      <a:round/>
+                      <a:headEnd type="none" w="med" len="med"/>
+                      <a:tailEnd type="none" w="med" len="med"/>
+                    </a:lnB>
+                    <a:solidFill>
+                      <a:srgbClr val="FFF4C2"/>
+                    </a:solidFill>
+                  </a:tcPr>
+                </a:tc>
+                <a:tc>
+                  <a:txBody>
+                    <a:bodyPr/>
+                    <a:lstStyle/>
+                    <a:p>
                       <a:pPr algn="ctr" indent="0" marL="0">
                         <a:buNone/>
                       </a:pPr>
                       <a:r>
-                        <a:rPr lang="en-US" sz="800" b="1" dirty="0">
+                        <a:rPr lang="en-US" sz="750" b="1" dirty="0">
                           <a:solidFill>
                             <a:srgbClr val="2B2B2B"/>
                           </a:solidFill>
@@ -7336,7 +7698,7 @@
                         </a:rPr>
                         <a:t>PROXY</a:t>
                       </a:r>
-                      <a:endParaRPr lang="en-US" sz="800" dirty="0">
+                      <a:endParaRPr lang="en-US" sz="750" dirty="0">
                         <a:latin typeface="Verdana" charset="0"/>
                         <a:ea typeface="Verdana" charset="0"/>
                         <a:cs typeface="Verdana" charset="0"/>
@@ -7394,7 +7756,7 @@
                         <a:buNone/>
                       </a:pPr>
                       <a:r>
-                        <a:rPr lang="en-US" sz="900" dirty="0">
+                        <a:rPr lang="en-US" sz="800" dirty="0">
                           <a:solidFill>
                             <a:srgbClr val="2B2B2B"/>
                           </a:solidFill>
@@ -7404,7 +7766,7 @@
                         </a:rPr>
                         <a:t>2026-07</a:t>
                       </a:r>
-                      <a:endParaRPr lang="en-US" sz="900" dirty="0">
+                      <a:endParaRPr lang="en-US" sz="800" dirty="0">
                         <a:latin typeface="Verdana" charset="0"/>
                         <a:ea typeface="Verdana" charset="0"/>
                         <a:cs typeface="Verdana" charset="0"/>
@@ -7464,7 +7826,7 @@
                         <a:buNone/>
                       </a:pPr>
                       <a:r>
-                        <a:rPr lang="en-US" sz="950" b="1" dirty="0">
+                        <a:rPr lang="en-US" sz="900" b="1" dirty="0">
                           <a:solidFill>
                             <a:srgbClr val="2B2B2B"/>
                           </a:solidFill>
@@ -7474,7 +7836,7 @@
                         </a:rPr>
                         <a:t>Coste del riesgo</a:t>
                       </a:r>
-                      <a:endParaRPr lang="en-US" sz="950" dirty="0">
+                      <a:endParaRPr lang="en-US" sz="900" dirty="0">
                         <a:latin typeface="Verdana" charset="0"/>
                         <a:ea typeface="Verdana" charset="0"/>
                         <a:cs typeface="Verdana" charset="0"/>
@@ -7608,7 +7970,7 @@
                           <a:ea typeface="Verdana" pitchFamily="34" charset="-122"/>
                           <a:cs typeface="Verdana" pitchFamily="34" charset="-120"/>
                         </a:rPr>
-                        <a:t>De PYME, pero con la definición INTERNA de cada banco: en IRB el reporting no impone una común. Además, solo cartera IRB, mediana de entidades y pérdida esperada, no dotación contable.</a:t>
+                        <a:t>Es del segmento, pero no está armonizado entre bancos. Además: solo cartera IRB, mediana de entidades y pérdida esperada, no dotación contable.</a:t>
                       </a:r>
                       <a:endParaRPr lang="en-US" sz="750" dirty="0">
                         <a:latin typeface="Verdana" charset="0"/>
@@ -7664,11 +8026,79 @@
                     <a:bodyPr/>
                     <a:lstStyle/>
                     <a:p>
+                      <a:pPr algn="l" indent="0" marL="0">
+                        <a:buNone/>
+                      </a:pPr>
+                      <a:r>
+                        <a:rPr lang="en-US" sz="750" b="1" dirty="0">
+                          <a:solidFill>
+                            <a:srgbClr val="2B2B2B"/>
+                          </a:solidFill>
+                          <a:latin typeface="Verdana" pitchFamily="34" charset="0"/>
+                          <a:ea typeface="Verdana" pitchFamily="34" charset="-122"/>
+                          <a:cs typeface="Verdana" pitchFamily="34" charset="-120"/>
+                        </a:rPr>
+                        <a:t>Interna de cada banco</a:t>
+                      </a:r>
+                      <a:endParaRPr lang="en-US" sz="750" dirty="0">
+                        <a:latin typeface="Verdana" charset="0"/>
+                        <a:ea typeface="Verdana" charset="0"/>
+                        <a:cs typeface="Verdana" charset="0"/>
+                      </a:endParaRPr>
+                    </a:p>
+                  </a:txBody>
+                  <a:tcPr marL="63500" marR="63500" marT="25400" marB="25400" anchor="ctr">
+                    <a:lnL w="6350" cap="flat" cmpd="sng" algn="ctr">
+                      <a:solidFill>
+                        <a:srgbClr val="CACACA"/>
+                      </a:solidFill>
+                      <a:prstDash val="solid"/>
+                      <a:round/>
+                      <a:headEnd type="none" w="med" len="med"/>
+                      <a:tailEnd type="none" w="med" len="med"/>
+                    </a:lnL>
+                    <a:lnR w="6350" cap="flat" cmpd="sng" algn="ctr">
+                      <a:solidFill>
+                        <a:srgbClr val="CACACA"/>
+                      </a:solidFill>
+                      <a:prstDash val="solid"/>
+                      <a:round/>
+                      <a:headEnd type="none" w="med" len="med"/>
+                      <a:tailEnd type="none" w="med" len="med"/>
+                    </a:lnR>
+                    <a:lnT w="6350" cap="flat" cmpd="sng" algn="ctr">
+                      <a:solidFill>
+                        <a:srgbClr val="CACACA"/>
+                      </a:solidFill>
+                      <a:prstDash val="solid"/>
+                      <a:round/>
+                      <a:headEnd type="none" w="med" len="med"/>
+                      <a:tailEnd type="none" w="med" len="med"/>
+                    </a:lnT>
+                    <a:lnB w="6350" cap="flat" cmpd="sng" algn="ctr">
+                      <a:solidFill>
+                        <a:srgbClr val="CACACA"/>
+                      </a:solidFill>
+                      <a:prstDash val="solid"/>
+                      <a:round/>
+                      <a:headEnd type="none" w="med" len="med"/>
+                      <a:tailEnd type="none" w="med" len="med"/>
+                    </a:lnB>
+                    <a:solidFill>
+                      <a:srgbClr val="FFF4C2"/>
+                    </a:solidFill>
+                  </a:tcPr>
+                </a:tc>
+                <a:tc>
+                  <a:txBody>
+                    <a:bodyPr/>
+                    <a:lstStyle/>
+                    <a:p>
                       <a:pPr algn="ctr" indent="0" marL="0">
                         <a:buNone/>
                       </a:pPr>
                       <a:r>
-                        <a:rPr lang="en-US" sz="800" b="1" dirty="0">
+                        <a:rPr lang="en-US" sz="750" b="1" dirty="0">
                           <a:solidFill>
                             <a:srgbClr val="2B2B2B"/>
                           </a:solidFill>
@@ -7678,7 +8108,7 @@
                         </a:rPr>
                         <a:t>PYME</a:t>
                       </a:r>
-                      <a:endParaRPr lang="en-US" sz="800" dirty="0">
+                      <a:endParaRPr lang="en-US" sz="750" dirty="0">
                         <a:latin typeface="Verdana" charset="0"/>
                         <a:ea typeface="Verdana" charset="0"/>
                         <a:cs typeface="Verdana" charset="0"/>
@@ -7736,7 +8166,7 @@
                         <a:buNone/>
                       </a:pPr>
                       <a:r>
-                        <a:rPr lang="en-US" sz="900" dirty="0">
+                        <a:rPr lang="en-US" sz="800" dirty="0">
                           <a:solidFill>
                             <a:srgbClr val="2B2B2B"/>
                           </a:solidFill>
@@ -7746,7 +8176,7 @@
                         </a:rPr>
                         <a:t>2026-Q1</a:t>
                       </a:r>
-                      <a:endParaRPr lang="en-US" sz="900" dirty="0">
+                      <a:endParaRPr lang="en-US" sz="800" dirty="0">
                         <a:latin typeface="Verdana" charset="0"/>
                         <a:ea typeface="Verdana" charset="0"/>
                         <a:cs typeface="Verdana" charset="0"/>
@@ -7806,7 +8236,7 @@
                         <a:buNone/>
                       </a:pPr>
                       <a:r>
-                        <a:rPr lang="en-US" sz="950" b="1" dirty="0">
+                        <a:rPr lang="en-US" sz="900" b="1" dirty="0">
                           <a:solidFill>
                             <a:srgbClr val="2B2B2B"/>
                           </a:solidFill>
@@ -7816,7 +8246,7 @@
                         </a:rPr>
                         <a:t>Densidad de RWA</a:t>
                       </a:r>
-                      <a:endParaRPr lang="en-US" sz="950" dirty="0">
+                      <a:endParaRPr lang="en-US" sz="900" dirty="0">
                         <a:latin typeface="Verdana" charset="0"/>
                         <a:ea typeface="Verdana" charset="0"/>
                         <a:cs typeface="Verdana" charset="0"/>
@@ -7882,7 +8312,7 @@
                           <a:ea typeface="Verdana" pitchFamily="34" charset="-122"/>
                           <a:cs typeface="Verdana" pitchFamily="34" charset="-120"/>
                         </a:rPr>
-                        <a:t>EBA, Transparency Exercise: RWA sobre valor de exposición de la cartera PYME, estándar más IRB</a:t>
+                        <a:t>EBA, Transparency Exercise: RWA sobre exposición de la cartera PYME, estándar más IRB</a:t>
                       </a:r>
                       <a:endParaRPr lang="en-US" sz="750" dirty="0">
                         <a:latin typeface="Verdana" charset="0"/>
@@ -7950,7 +8380,7 @@
                           <a:ea typeface="Verdana" pitchFamily="34" charset="-122"/>
                           <a:cs typeface="Verdana" pitchFamily="34" charset="-120"/>
                         </a:rPr>
-                        <a:t>De PYME, con dos definiciones: estándar, facturación hasta 50 M€; IRB, la interna de cada banco. Incluye PYME extranjera (46 % en España): sin ella la densidad baja de 1,7 a 4,4 pp en seis de los siete, sin cambiar el orden.</a:t>
+                        <a:t>Mezcla dos definiciones en la proporción IRB de cada país. Incluye PYME extranjera (46 % en España): sin ella baja 1,7–4,4 pp, sin cambiar el orden.</a:t>
                       </a:r>
                       <a:endParaRPr lang="en-US" sz="750" dirty="0">
                         <a:latin typeface="Verdana" charset="0"/>
@@ -8006,11 +8436,100 @@
                     <a:bodyPr/>
                     <a:lstStyle/>
                     <a:p>
+                      <a:pPr algn="l" indent="0" marL="0">
+                        <a:buNone/>
+                      </a:pPr>
+                      <a:r>
+                        <a:rPr lang="en-US" sz="750" b="1" dirty="0">
+                          <a:solidFill>
+                            <a:srgbClr val="2B2B2B"/>
+                          </a:solidFill>
+                          <a:latin typeface="Verdana" pitchFamily="34" charset="0"/>
+                          <a:ea typeface="Verdana" pitchFamily="34" charset="-122"/>
+                          <a:cs typeface="Verdana" pitchFamily="34" charset="-120"/>
+                        </a:rPr>
+                        <a:t>Estándar: facturación ≤50 M€</a:t>
+                      </a:r>
+                      <a:endParaRPr lang="en-US" sz="750" dirty="0">
+                        <a:latin typeface="Verdana" charset="0"/>
+                        <a:ea typeface="Verdana" charset="0"/>
+                        <a:cs typeface="Verdana" charset="0"/>
+                      </a:endParaRPr>
+                    </a:p>
+                    <a:p>
+                      <a:pPr algn="l" indent="0" marL="0">
+                        <a:buNone/>
+                      </a:pPr>
+                      <a:r>
+                        <a:rPr lang="en-US" sz="750" b="1" dirty="0">
+                          <a:solidFill>
+                            <a:srgbClr val="2B2B2B"/>
+                          </a:solidFill>
+                          <a:latin typeface="Verdana" pitchFamily="34" charset="0"/>
+                          <a:ea typeface="Verdana" pitchFamily="34" charset="-122"/>
+                          <a:cs typeface="Verdana" pitchFamily="34" charset="-120"/>
+                        </a:rPr>
+                        <a:t>IRB: interna de cada banco</a:t>
+                      </a:r>
+                      <a:endParaRPr lang="en-US" sz="750" dirty="0">
+                        <a:latin typeface="Verdana" charset="0"/>
+                        <a:ea typeface="Verdana" charset="0"/>
+                        <a:cs typeface="Verdana" charset="0"/>
+                      </a:endParaRPr>
+                    </a:p>
+                  </a:txBody>
+                  <a:tcPr marL="63500" marR="63500" marT="25400" marB="25400" anchor="ctr">
+                    <a:lnL w="6350" cap="flat" cmpd="sng" algn="ctr">
+                      <a:solidFill>
+                        <a:srgbClr val="CACACA"/>
+                      </a:solidFill>
+                      <a:prstDash val="solid"/>
+                      <a:round/>
+                      <a:headEnd type="none" w="med" len="med"/>
+                      <a:tailEnd type="none" w="med" len="med"/>
+                    </a:lnL>
+                    <a:lnR w="6350" cap="flat" cmpd="sng" algn="ctr">
+                      <a:solidFill>
+                        <a:srgbClr val="CACACA"/>
+                      </a:solidFill>
+                      <a:prstDash val="solid"/>
+                      <a:round/>
+                      <a:headEnd type="none" w="med" len="med"/>
+                      <a:tailEnd type="none" w="med" len="med"/>
+                    </a:lnR>
+                    <a:lnT w="6350" cap="flat" cmpd="sng" algn="ctr">
+                      <a:solidFill>
+                        <a:srgbClr val="CACACA"/>
+                      </a:solidFill>
+                      <a:prstDash val="solid"/>
+                      <a:round/>
+                      <a:headEnd type="none" w="med" len="med"/>
+                      <a:tailEnd type="none" w="med" len="med"/>
+                    </a:lnT>
+                    <a:lnB w="6350" cap="flat" cmpd="sng" algn="ctr">
+                      <a:solidFill>
+                        <a:srgbClr val="CACACA"/>
+                      </a:solidFill>
+                      <a:prstDash val="solid"/>
+                      <a:round/>
+                      <a:headEnd type="none" w="med" len="med"/>
+                      <a:tailEnd type="none" w="med" len="med"/>
+                    </a:lnB>
+                    <a:solidFill>
+                      <a:srgbClr val="FFF4C2"/>
+                    </a:solidFill>
+                  </a:tcPr>
+                </a:tc>
+                <a:tc>
+                  <a:txBody>
+                    <a:bodyPr/>
+                    <a:lstStyle/>
+                    <a:p>
                       <a:pPr algn="ctr" indent="0" marL="0">
                         <a:buNone/>
                       </a:pPr>
                       <a:r>
-                        <a:rPr lang="en-US" sz="800" b="1" dirty="0">
+                        <a:rPr lang="en-US" sz="750" b="1" dirty="0">
                           <a:solidFill>
                             <a:srgbClr val="2B2B2B"/>
                           </a:solidFill>
@@ -8020,7 +8539,7 @@
                         </a:rPr>
                         <a:t>PYME</a:t>
                       </a:r>
-                      <a:endParaRPr lang="en-US" sz="800" dirty="0">
+                      <a:endParaRPr lang="en-US" sz="750" dirty="0">
                         <a:latin typeface="Verdana" charset="0"/>
                         <a:ea typeface="Verdana" charset="0"/>
                         <a:cs typeface="Verdana" charset="0"/>
@@ -8078,7 +8597,7 @@
                         <a:buNone/>
                       </a:pPr>
                       <a:r>
-                        <a:rPr lang="en-US" sz="900" dirty="0">
+                        <a:rPr lang="en-US" sz="800" dirty="0">
                           <a:solidFill>
                             <a:srgbClr val="2B2B2B"/>
                           </a:solidFill>
@@ -8088,7 +8607,7 @@
                         </a:rPr>
                         <a:t>2025-06</a:t>
                       </a:r>
-                      <a:endParaRPr lang="en-US" sz="900" dirty="0">
+                      <a:endParaRPr lang="en-US" sz="800" dirty="0">
                         <a:latin typeface="Verdana" charset="0"/>
                         <a:ea typeface="Verdana" charset="0"/>
                         <a:cs typeface="Verdana" charset="0"/>
@@ -8148,7 +8667,7 @@
                         <a:buNone/>
                       </a:pPr>
                       <a:r>
-                        <a:rPr lang="en-US" sz="950" b="1" dirty="0">
+                        <a:rPr lang="en-US" sz="900" b="1" dirty="0">
                           <a:solidFill>
                             <a:srgbClr val="2B2B2B"/>
                           </a:solidFill>
@@ -8158,7 +8677,7 @@
                         </a:rPr>
                         <a:t>Gastos de explotación</a:t>
                       </a:r>
-                      <a:endParaRPr lang="en-US" sz="950" dirty="0">
+                      <a:endParaRPr lang="en-US" sz="900" dirty="0">
                         <a:latin typeface="Verdana" charset="0"/>
                         <a:ea typeface="Verdana" charset="0"/>
                         <a:cs typeface="Verdana" charset="0"/>
@@ -8292,7 +8811,7 @@
                           <a:ea typeface="Verdana" pitchFamily="34" charset="-122"/>
                           <a:cs typeface="Verdana" pitchFamily="34" charset="-120"/>
                         </a:rPr>
-                        <a:t>Eficiencia del banco entero aplicada al margen del préstamo. Supone que la PYME cuesta lo mismo por euro de margen que el resto del negocio.</a:t>
+                        <a:t>Eficiencia del banco entero aplicada al margen. Supone que la PYME cuesta lo mismo por euro de margen que el resto del negocio.</a:t>
                       </a:r>
                       <a:endParaRPr lang="en-US" sz="750" dirty="0">
                         <a:latin typeface="Verdana" charset="0"/>
@@ -8348,11 +8867,79 @@
                     <a:bodyPr/>
                     <a:lstStyle/>
                     <a:p>
+                      <a:pPr algn="l" indent="0" marL="0">
+                        <a:buNone/>
+                      </a:pPr>
+                      <a:r>
+                        <a:rPr lang="en-US" sz="750" dirty="0">
+                          <a:solidFill>
+                            <a:srgbClr val="818181"/>
+                          </a:solidFill>
+                          <a:latin typeface="Verdana" pitchFamily="34" charset="0"/>
+                          <a:ea typeface="Verdana" pitchFamily="34" charset="-122"/>
+                          <a:cs typeface="Verdana" pitchFamily="34" charset="-120"/>
+                        </a:rPr>
+                        <a:t>No aplica</a:t>
+                      </a:r>
+                      <a:endParaRPr lang="en-US" sz="750" dirty="0">
+                        <a:latin typeface="Verdana" charset="0"/>
+                        <a:ea typeface="Verdana" charset="0"/>
+                        <a:cs typeface="Verdana" charset="0"/>
+                      </a:endParaRPr>
+                    </a:p>
+                  </a:txBody>
+                  <a:tcPr marL="63500" marR="63500" marT="25400" marB="25400" anchor="ctr">
+                    <a:lnL w="6350" cap="flat" cmpd="sng" algn="ctr">
+                      <a:solidFill>
+                        <a:srgbClr val="CACACA"/>
+                      </a:solidFill>
+                      <a:prstDash val="solid"/>
+                      <a:round/>
+                      <a:headEnd type="none" w="med" len="med"/>
+                      <a:tailEnd type="none" w="med" len="med"/>
+                    </a:lnL>
+                    <a:lnR w="6350" cap="flat" cmpd="sng" algn="ctr">
+                      <a:solidFill>
+                        <a:srgbClr val="CACACA"/>
+                      </a:solidFill>
+                      <a:prstDash val="solid"/>
+                      <a:round/>
+                      <a:headEnd type="none" w="med" len="med"/>
+                      <a:tailEnd type="none" w="med" len="med"/>
+                    </a:lnR>
+                    <a:lnT w="6350" cap="flat" cmpd="sng" algn="ctr">
+                      <a:solidFill>
+                        <a:srgbClr val="CACACA"/>
+                      </a:solidFill>
+                      <a:prstDash val="solid"/>
+                      <a:round/>
+                      <a:headEnd type="none" w="med" len="med"/>
+                      <a:tailEnd type="none" w="med" len="med"/>
+                    </a:lnT>
+                    <a:lnB w="6350" cap="flat" cmpd="sng" algn="ctr">
+                      <a:solidFill>
+                        <a:srgbClr val="CACACA"/>
+                      </a:solidFill>
+                      <a:prstDash val="solid"/>
+                      <a:round/>
+                      <a:headEnd type="none" w="med" len="med"/>
+                      <a:tailEnd type="none" w="med" len="med"/>
+                    </a:lnB>
+                    <a:solidFill>
+                      <a:srgbClr val="F4F4F4"/>
+                    </a:solidFill>
+                  </a:tcPr>
+                </a:tc>
+                <a:tc>
+                  <a:txBody>
+                    <a:bodyPr/>
+                    <a:lstStyle/>
+                    <a:p>
                       <a:pPr algn="ctr" indent="0" marL="0">
                         <a:buNone/>
                       </a:pPr>
                       <a:r>
-                        <a:rPr lang="en-US" sz="800" b="1" dirty="0">
+                        <a:rPr lang="en-US" sz="750" b="1" dirty="0">
                           <a:solidFill>
                             <a:srgbClr val="2B2B2B"/>
                           </a:solidFill>
@@ -8362,7 +8949,7 @@
                         </a:rPr>
                         <a:t>DEL BANCO</a:t>
                       </a:r>
-                      <a:endParaRPr lang="en-US" sz="800" dirty="0">
+                      <a:endParaRPr lang="en-US" sz="750" dirty="0">
                         <a:latin typeface="Verdana" charset="0"/>
                         <a:ea typeface="Verdana" charset="0"/>
                         <a:cs typeface="Verdana" charset="0"/>
@@ -8420,7 +9007,7 @@
                         <a:buNone/>
                       </a:pPr>
                       <a:r>
-                        <a:rPr lang="en-US" sz="900" dirty="0">
+                        <a:rPr lang="en-US" sz="800" dirty="0">
                           <a:solidFill>
                             <a:srgbClr val="2B2B2B"/>
                           </a:solidFill>
@@ -8430,7 +9017,7 @@
                         </a:rPr>
                         <a:t>2026-Q1</a:t>
                       </a:r>
-                      <a:endParaRPr lang="en-US" sz="900" dirty="0">
+                      <a:endParaRPr lang="en-US" sz="800" dirty="0">
                         <a:latin typeface="Verdana" charset="0"/>
                         <a:ea typeface="Verdana" charset="0"/>
                         <a:cs typeface="Verdana" charset="0"/>
@@ -8490,7 +9077,7 @@
                         <a:buNone/>
                       </a:pPr>
                       <a:r>
-                        <a:rPr lang="en-US" sz="950" b="1" dirty="0">
+                        <a:rPr lang="en-US" sz="900" b="1" dirty="0">
                           <a:solidFill>
                             <a:srgbClr val="2B2B2B"/>
                           </a:solidFill>
@@ -8500,7 +9087,7 @@
                         </a:rPr>
                         <a:t>CET1</a:t>
                       </a:r>
-                      <a:endParaRPr lang="en-US" sz="950" dirty="0">
+                      <a:endParaRPr lang="en-US" sz="900" dirty="0">
                         <a:latin typeface="Verdana" charset="0"/>
                         <a:ea typeface="Verdana" charset="0"/>
                         <a:cs typeface="Verdana" charset="0"/>
@@ -8690,11 +9277,79 @@
                     <a:bodyPr/>
                     <a:lstStyle/>
                     <a:p>
+                      <a:pPr algn="l" indent="0" marL="0">
+                        <a:buNone/>
+                      </a:pPr>
+                      <a:r>
+                        <a:rPr lang="en-US" sz="750" dirty="0">
+                          <a:solidFill>
+                            <a:srgbClr val="818181"/>
+                          </a:solidFill>
+                          <a:latin typeface="Verdana" pitchFamily="34" charset="0"/>
+                          <a:ea typeface="Verdana" pitchFamily="34" charset="-122"/>
+                          <a:cs typeface="Verdana" pitchFamily="34" charset="-120"/>
+                        </a:rPr>
+                        <a:t>No aplica</a:t>
+                      </a:r>
+                      <a:endParaRPr lang="en-US" sz="750" dirty="0">
+                        <a:latin typeface="Verdana" charset="0"/>
+                        <a:ea typeface="Verdana" charset="0"/>
+                        <a:cs typeface="Verdana" charset="0"/>
+                      </a:endParaRPr>
+                    </a:p>
+                  </a:txBody>
+                  <a:tcPr marL="63500" marR="63500" marT="25400" marB="25400" anchor="ctr">
+                    <a:lnL w="6350" cap="flat" cmpd="sng" algn="ctr">
+                      <a:solidFill>
+                        <a:srgbClr val="CACACA"/>
+                      </a:solidFill>
+                      <a:prstDash val="solid"/>
+                      <a:round/>
+                      <a:headEnd type="none" w="med" len="med"/>
+                      <a:tailEnd type="none" w="med" len="med"/>
+                    </a:lnL>
+                    <a:lnR w="6350" cap="flat" cmpd="sng" algn="ctr">
+                      <a:solidFill>
+                        <a:srgbClr val="CACACA"/>
+                      </a:solidFill>
+                      <a:prstDash val="solid"/>
+                      <a:round/>
+                      <a:headEnd type="none" w="med" len="med"/>
+                      <a:tailEnd type="none" w="med" len="med"/>
+                    </a:lnR>
+                    <a:lnT w="6350" cap="flat" cmpd="sng" algn="ctr">
+                      <a:solidFill>
+                        <a:srgbClr val="CACACA"/>
+                      </a:solidFill>
+                      <a:prstDash val="solid"/>
+                      <a:round/>
+                      <a:headEnd type="none" w="med" len="med"/>
+                      <a:tailEnd type="none" w="med" len="med"/>
+                    </a:lnT>
+                    <a:lnB w="6350" cap="flat" cmpd="sng" algn="ctr">
+                      <a:solidFill>
+                        <a:srgbClr val="CACACA"/>
+                      </a:solidFill>
+                      <a:prstDash val="solid"/>
+                      <a:round/>
+                      <a:headEnd type="none" w="med" len="med"/>
+                      <a:tailEnd type="none" w="med" len="med"/>
+                    </a:lnB>
+                    <a:solidFill>
+                      <a:srgbClr val="FFFFFF"/>
+                    </a:solidFill>
+                  </a:tcPr>
+                </a:tc>
+                <a:tc>
+                  <a:txBody>
+                    <a:bodyPr/>
+                    <a:lstStyle/>
+                    <a:p>
                       <a:pPr algn="ctr" indent="0" marL="0">
                         <a:buNone/>
                       </a:pPr>
                       <a:r>
-                        <a:rPr lang="en-US" sz="800" b="1" dirty="0">
+                        <a:rPr lang="en-US" sz="750" b="1" dirty="0">
                           <a:solidFill>
                             <a:srgbClr val="2B2B2B"/>
                           </a:solidFill>
@@ -8704,7 +9359,7 @@
                         </a:rPr>
                         <a:t>DEL BANCO</a:t>
                       </a:r>
-                      <a:endParaRPr lang="en-US" sz="800" dirty="0">
+                      <a:endParaRPr lang="en-US" sz="750" dirty="0">
                         <a:latin typeface="Verdana" charset="0"/>
                         <a:ea typeface="Verdana" charset="0"/>
                         <a:cs typeface="Verdana" charset="0"/>
@@ -8762,7 +9417,7 @@
                         <a:buNone/>
                       </a:pPr>
                       <a:r>
-                        <a:rPr lang="en-US" sz="900" dirty="0">
+                        <a:rPr lang="en-US" sz="800" dirty="0">
                           <a:solidFill>
                             <a:srgbClr val="2B2B2B"/>
                           </a:solidFill>
@@ -8772,7 +9427,7 @@
                         </a:rPr>
                         <a:t>2026-Q1</a:t>
                       </a:r>
-                      <a:endParaRPr lang="en-US" sz="900" dirty="0">
+                      <a:endParaRPr lang="en-US" sz="800" dirty="0">
                         <a:latin typeface="Verdana" charset="0"/>
                         <a:ea typeface="Verdana" charset="0"/>
                         <a:cs typeface="Verdana" charset="0"/>
@@ -8832,7 +9487,7 @@
                         <a:buNone/>
                       </a:pPr>
                       <a:r>
-                        <a:rPr lang="en-US" sz="950" b="1" dirty="0">
+                        <a:rPr lang="en-US" sz="900" b="1" dirty="0">
                           <a:solidFill>
                             <a:srgbClr val="2B2B2B"/>
                           </a:solidFill>
@@ -8842,7 +9497,7 @@
                         </a:rPr>
                         <a:t>Tipo impositivo</a:t>
                       </a:r>
-                      <a:endParaRPr lang="en-US" sz="950" dirty="0">
+                      <a:endParaRPr lang="en-US" sz="900" dirty="0">
                         <a:latin typeface="Verdana" charset="0"/>
                         <a:ea typeface="Verdana" charset="0"/>
                         <a:cs typeface="Verdana" charset="0"/>
@@ -8908,7 +9563,7 @@
                           <a:ea typeface="Verdana" pitchFamily="34" charset="-122"/>
                           <a:cs typeface="Verdana" pitchFamily="34" charset="-120"/>
                         </a:rPr>
-                        <a:t>Legislación de cada país: España 30 % (art. 29 LIS, entidades de crédito), Irlanda 15 % (mínimo de Pilar Dos)</a:t>
+                        <a:t>Legislación nacional: España 30 % (art. 29 LIS), Irlanda 15 % (mínimo de Pilar Dos)</a:t>
                       </a:r>
                       <a:endParaRPr lang="en-US" sz="750" dirty="0">
                         <a:latin typeface="Verdana" charset="0"/>
@@ -8976,7 +9631,7 @@
                           <a:ea typeface="Verdana" pitchFamily="34" charset="-122"/>
                           <a:cs typeface="Verdana" pitchFamily="34" charset="-120"/>
                         </a:rPr>
-                        <a:t>Tipo NOMINAL aplicable a bancos, no el efectivo. El resto de países, tipo combinado estatal más local.</a:t>
+                        <a:t>Tipo NOMINAL aplicable a bancos, no el efectivo. El resto, tipo combinado estatal más local.</a:t>
                       </a:r>
                       <a:endParaRPr lang="en-US" sz="750" dirty="0">
                         <a:latin typeface="Verdana" charset="0"/>
@@ -9032,11 +9687,79 @@
                     <a:bodyPr/>
                     <a:lstStyle/>
                     <a:p>
+                      <a:pPr algn="l" indent="0" marL="0">
+                        <a:buNone/>
+                      </a:pPr>
+                      <a:r>
+                        <a:rPr lang="en-US" sz="750" dirty="0">
+                          <a:solidFill>
+                            <a:srgbClr val="818181"/>
+                          </a:solidFill>
+                          <a:latin typeface="Verdana" pitchFamily="34" charset="0"/>
+                          <a:ea typeface="Verdana" pitchFamily="34" charset="-122"/>
+                          <a:cs typeface="Verdana" pitchFamily="34" charset="-120"/>
+                        </a:rPr>
+                        <a:t>No aplica</a:t>
+                      </a:r>
+                      <a:endParaRPr lang="en-US" sz="750" dirty="0">
+                        <a:latin typeface="Verdana" charset="0"/>
+                        <a:ea typeface="Verdana" charset="0"/>
+                        <a:cs typeface="Verdana" charset="0"/>
+                      </a:endParaRPr>
+                    </a:p>
+                  </a:txBody>
+                  <a:tcPr marL="63500" marR="63500" marT="25400" marB="25400" anchor="ctr">
+                    <a:lnL w="6350" cap="flat" cmpd="sng" algn="ctr">
+                      <a:solidFill>
+                        <a:srgbClr val="CACACA"/>
+                      </a:solidFill>
+                      <a:prstDash val="solid"/>
+                      <a:round/>
+                      <a:headEnd type="none" w="med" len="med"/>
+                      <a:tailEnd type="none" w="med" len="med"/>
+                    </a:lnL>
+                    <a:lnR w="6350" cap="flat" cmpd="sng" algn="ctr">
+                      <a:solidFill>
+                        <a:srgbClr val="CACACA"/>
+                      </a:solidFill>
+                      <a:prstDash val="solid"/>
+                      <a:round/>
+                      <a:headEnd type="none" w="med" len="med"/>
+                      <a:tailEnd type="none" w="med" len="med"/>
+                    </a:lnR>
+                    <a:lnT w="6350" cap="flat" cmpd="sng" algn="ctr">
+                      <a:solidFill>
+                        <a:srgbClr val="CACACA"/>
+                      </a:solidFill>
+                      <a:prstDash val="solid"/>
+                      <a:round/>
+                      <a:headEnd type="none" w="med" len="med"/>
+                      <a:tailEnd type="none" w="med" len="med"/>
+                    </a:lnT>
+                    <a:lnB w="6350" cap="flat" cmpd="sng" algn="ctr">
+                      <a:solidFill>
+                        <a:srgbClr val="CACACA"/>
+                      </a:solidFill>
+                      <a:prstDash val="solid"/>
+                      <a:round/>
+                      <a:headEnd type="none" w="med" len="med"/>
+                      <a:tailEnd type="none" w="med" len="med"/>
+                    </a:lnB>
+                    <a:solidFill>
+                      <a:srgbClr val="F4F4F4"/>
+                    </a:solidFill>
+                  </a:tcPr>
+                </a:tc>
+                <a:tc>
+                  <a:txBody>
+                    <a:bodyPr/>
+                    <a:lstStyle/>
+                    <a:p>
                       <a:pPr algn="ctr" indent="0" marL="0">
                         <a:buNone/>
                       </a:pPr>
                       <a:r>
-                        <a:rPr lang="en-US" sz="800" b="1" dirty="0">
+                        <a:rPr lang="en-US" sz="750" b="1" dirty="0">
                           <a:solidFill>
                             <a:srgbClr val="2B2B2B"/>
                           </a:solidFill>
@@ -9046,7 +9769,7 @@
                         </a:rPr>
                         <a:t>DEL BANCO</a:t>
                       </a:r>
-                      <a:endParaRPr lang="en-US" sz="800" dirty="0">
+                      <a:endParaRPr lang="en-US" sz="750" dirty="0">
                         <a:latin typeface="Verdana" charset="0"/>
                         <a:ea typeface="Verdana" charset="0"/>
                         <a:cs typeface="Verdana" charset="0"/>
@@ -9104,7 +9827,7 @@
                         <a:buNone/>
                       </a:pPr>
                       <a:r>
-                        <a:rPr lang="en-US" sz="900" dirty="0">
+                        <a:rPr lang="en-US" sz="800" dirty="0">
                           <a:solidFill>
                             <a:srgbClr val="2B2B2B"/>
                           </a:solidFill>
@@ -9114,7 +9837,7 @@
                         </a:rPr>
                         <a:t>2026</a:t>
                       </a:r>
-                      <a:endParaRPr lang="en-US" sz="900" dirty="0">
+                      <a:endParaRPr lang="en-US" sz="800" dirty="0">
                         <a:latin typeface="Verdana" charset="0"/>
                         <a:ea typeface="Verdana" charset="0"/>
                         <a:cs typeface="Verdana" charset="0"/>
@@ -9624,6 +10347,5092 @@
               <a:t>No hay UNA definición de PYME en los datos del EBA. Mora (FINREP): Recomendación 2003/361/CE completa, menos de 250 empleados y hasta 50 M€ de facturación o 43 M€ de balance. Capital por método estándar: el CRR solo define PYME en el art. 501, por facturación hasta 50 M€. Todo lo IRB —PD, LGD y la parte IRB de la densidad—: la definición interna de cada banco. Ninguna coincide con los tramos de importe del MIR. Detalle en notas.md.</a:t>
             </a:r>
             <a:endParaRPr lang="en-US" sz="750" dirty="0"/>
+          </a:p>
+        </p:txBody>
+      </p:sp>
+    </p:spTree>
+  </p:cSld>
+  <p:clrMapOvr>
+    <a:masterClrMapping/>
+  </p:clrMapOvr>
+</p:sld>
+</file>
+
+<file path=ppt/slides/slide11.xml><?xml version="1.0" encoding="utf-8"?>
+<p:sld xmlns:a="http://schemas.openxmlformats.org/drawingml/2006/main" xmlns:r="http://schemas.openxmlformats.org/officeDocument/2006/relationships" xmlns:p="http://schemas.openxmlformats.org/presentationml/2006/main">
+  <p:cSld name="Slide 11">
+    <p:bg>
+      <p:bgPr>
+        <a:solidFill>
+          <a:srgbClr val="FAFBFC"/>
+        </a:solidFill>
+      </p:bgPr>
+    </p:bg>
+    <p:spTree>
+      <p:nvGrpSpPr>
+        <p:cNvPr id="1" name=""/>
+        <p:cNvGrpSpPr/>
+        <p:nvPr/>
+      </p:nvGrpSpPr>
+      <p:grpSpPr>
+        <a:xfrm>
+          <a:off x="0" y="0"/>
+          <a:ext cx="0" cy="0"/>
+          <a:chOff x="0" y="0"/>
+          <a:chExt cx="0" cy="0"/>
+        </a:xfrm>
+      </p:grpSpPr>
+      <p:sp>
+        <p:nvSpPr>
+          <p:cNvPr id="2" name="Text 0"/>
+          <p:cNvSpPr txBox="1"/>
+          <p:nvPr/>
+        </p:nvSpPr>
+        <p:spPr>
+          <a:xfrm>
+            <a:off x="10040112" y="274320"/>
+            <a:ext cx="1600200" cy="256032"/>
+          </a:xfrm>
+          <a:prstGeom prst="rect">
+            <a:avLst/>
+          </a:prstGeom>
+          <a:noFill/>
+          <a:ln/>
+        </p:spPr>
+        <p:txBody>
+          <a:bodyPr wrap="square" lIns="0" tIns="0" rIns="0" bIns="0" rtlCol="0" anchor="ctr"/>
+          <a:lstStyle/>
+          <a:p>
+            <a:pPr algn="r" indent="0" marL="0">
+              <a:buNone/>
+            </a:pPr>
+            <a:r>
+              <a:rPr lang="en-US" sz="1300" b="1" dirty="0">
+                <a:solidFill>
+                  <a:srgbClr val="2B2B2B"/>
+                </a:solidFill>
+                <a:latin typeface="Verdana" pitchFamily="34" charset="0"/>
+                <a:ea typeface="Verdana" pitchFamily="34" charset="-122"/>
+                <a:cs typeface="Verdana" pitchFamily="34" charset="-120"/>
+              </a:rPr>
+              <a:t>bankinter</a:t>
+            </a:r>
+            <a:pPr algn="r" indent="0" marL="0">
+              <a:buNone/>
+            </a:pPr>
+            <a:r>
+              <a:rPr lang="en-US" sz="1300" b="1" dirty="0">
+                <a:solidFill>
+                  <a:srgbClr val="F56600"/>
+                </a:solidFill>
+                <a:latin typeface="Verdana" pitchFamily="34" charset="0"/>
+                <a:ea typeface="Verdana" pitchFamily="34" charset="-122"/>
+                <a:cs typeface="Verdana" pitchFamily="34" charset="-120"/>
+              </a:rPr>
+              <a:t>.</a:t>
+            </a:r>
+            <a:endParaRPr lang="en-US" sz="1300" dirty="0"/>
+          </a:p>
+        </p:txBody>
+      </p:sp>
+      <p:sp>
+        <p:nvSpPr>
+          <p:cNvPr id="3" name="Text 1"/>
+          <p:cNvSpPr txBox="1"/>
+          <p:nvPr/>
+        </p:nvSpPr>
+        <p:spPr>
+          <a:xfrm>
+            <a:off x="621792" y="420624"/>
+            <a:ext cx="9208008" cy="676656"/>
+          </a:xfrm>
+          <a:prstGeom prst="rect">
+            <a:avLst/>
+          </a:prstGeom>
+          <a:noFill/>
+          <a:ln/>
+        </p:spPr>
+        <p:txBody>
+          <a:bodyPr wrap="square" lIns="0" tIns="0" rIns="0" bIns="0" rtlCol="0" anchor="ctr"/>
+          <a:lstStyle/>
+          <a:p>
+            <a:pPr indent="0" marL="0">
+              <a:buNone/>
+            </a:pPr>
+            <a:r>
+              <a:rPr lang="en-US" sz="2200" b="1" dirty="0">
+                <a:solidFill>
+                  <a:srgbClr val="2B2B2B"/>
+                </a:solidFill>
+                <a:latin typeface="Verdana" pitchFamily="34" charset="0"/>
+                <a:ea typeface="Verdana" pitchFamily="34" charset="-122"/>
+                <a:cs typeface="Verdana" pitchFamily="34" charset="-120"/>
+              </a:rPr>
+              <a:t>Qué es una PYME depende de a quién se pregunte</a:t>
+            </a:r>
+            <a:endParaRPr lang="en-US" sz="2200" dirty="0"/>
+          </a:p>
+        </p:txBody>
+      </p:sp>
+      <p:sp>
+        <p:nvSpPr>
+          <p:cNvPr id="4" name="Text 2"/>
+          <p:cNvSpPr txBox="1"/>
+          <p:nvPr/>
+        </p:nvSpPr>
+        <p:spPr>
+          <a:xfrm>
+            <a:off x="621792" y="1060704"/>
+            <a:ext cx="10945368" cy="365760"/>
+          </a:xfrm>
+          <a:prstGeom prst="rect">
+            <a:avLst/>
+          </a:prstGeom>
+          <a:noFill/>
+          <a:ln/>
+        </p:spPr>
+        <p:txBody>
+          <a:bodyPr wrap="square" lIns="0" tIns="0" rIns="0" bIns="0" rtlCol="0" anchor="ctr"/>
+          <a:lstStyle/>
+          <a:p>
+            <a:pPr indent="0" marL="0">
+              <a:buNone/>
+            </a:pPr>
+            <a:r>
+              <a:rPr lang="en-US" sz="1050" dirty="0">
+                <a:solidFill>
+                  <a:srgbClr val="818181"/>
+                </a:solidFill>
+                <a:latin typeface="Verdana" pitchFamily="34" charset="0"/>
+                <a:ea typeface="Verdana" pitchFamily="34" charset="-122"/>
+                <a:cs typeface="Verdana" pitchFamily="34" charset="-120"/>
+              </a:rPr>
+              <a:t>La definición de PYME de cada fuente de esta presentación, frente a la estándar de la UE · Solo dos fuentes la usan completa, y ninguna de las dos entra en la cuenta del ROE</a:t>
+            </a:r>
+            <a:endParaRPr lang="en-US" sz="1050" dirty="0"/>
+          </a:p>
+        </p:txBody>
+      </p:sp>
+      <p:graphicFrame>
+        <p:nvGraphicFramePr>
+          <p:cNvPr id="12" name="Table 0"/>
+          <p:cNvGraphicFramePr>
+            <a:graphicFrameLocks noGrp="1"/>
+          </p:cNvGraphicFramePr>
+          <p:nvPr>
+            <p:extLst>
+              <p:ext uri="{D42A27DB-BD31-4B8C-83A1-F6EECF244321}">
+                <p14:modId xmlns:p14="http://schemas.microsoft.com/office/powerpoint/2010/main" val="1579011935"/>
+              </p:ext>
+            </p:extLst>
+          </p:nvPr>
+        </p:nvGraphicFramePr>
+        <p:xfrm>
+          <a:off x="621792" y="1554480"/>
+          <a:ext cx="10945368" cy="914400"/>
+        </p:xfrm>
+        <a:graphic>
+          <a:graphicData uri="http://schemas.openxmlformats.org/drawingml/2006/table">
+            <a:tbl>
+              <a:tblPr/>
+              <a:tblGrid>
+                <a:gridCol w="1920240"/>
+                <a:gridCol w="2560320"/>
+                <a:gridCol w="1371600"/>
+                <a:gridCol w="3611880"/>
+                <a:gridCol w="1481328"/>
+              </a:tblGrid>
+              <a:tr h="274320">
+                <a:tc>
+                  <a:txBody>
+                    <a:bodyPr/>
+                    <a:lstStyle/>
+                    <a:p>
+                      <a:pPr algn="l" indent="0" marL="0">
+                        <a:buNone/>
+                      </a:pPr>
+                      <a:r>
+                        <a:rPr lang="en-US" sz="850" b="1" dirty="0">
+                          <a:solidFill>
+                            <a:srgbClr val="FFFFFF"/>
+                          </a:solidFill>
+                          <a:latin typeface="Verdana" pitchFamily="34" charset="0"/>
+                          <a:ea typeface="Verdana" pitchFamily="34" charset="-122"/>
+                          <a:cs typeface="Verdana" pitchFamily="34" charset="-120"/>
+                        </a:rPr>
+                        <a:t>Fuente</a:t>
+                      </a:r>
+                      <a:endParaRPr lang="en-US" sz="850" dirty="0">
+                        <a:latin typeface="Verdana" charset="0"/>
+                        <a:ea typeface="Verdana" charset="0"/>
+                        <a:cs typeface="Verdana" charset="0"/>
+                      </a:endParaRPr>
+                    </a:p>
+                  </a:txBody>
+                  <a:tcPr marL="63500" marR="63500" marT="12700" marB="12700" anchor="ctr">
+                    <a:lnL w="6350" cap="flat" cmpd="sng" algn="ctr">
+                      <a:solidFill>
+                        <a:srgbClr val="CACACA"/>
+                      </a:solidFill>
+                      <a:prstDash val="solid"/>
+                      <a:round/>
+                      <a:headEnd type="none" w="med" len="med"/>
+                      <a:tailEnd type="none" w="med" len="med"/>
+                    </a:lnL>
+                    <a:lnR w="6350" cap="flat" cmpd="sng" algn="ctr">
+                      <a:solidFill>
+                        <a:srgbClr val="CACACA"/>
+                      </a:solidFill>
+                      <a:prstDash val="solid"/>
+                      <a:round/>
+                      <a:headEnd type="none" w="med" len="med"/>
+                      <a:tailEnd type="none" w="med" len="med"/>
+                    </a:lnR>
+                    <a:lnT w="6350" cap="flat" cmpd="sng" algn="ctr">
+                      <a:solidFill>
+                        <a:srgbClr val="CACACA"/>
+                      </a:solidFill>
+                      <a:prstDash val="solid"/>
+                      <a:round/>
+                      <a:headEnd type="none" w="med" len="med"/>
+                      <a:tailEnd type="none" w="med" len="med"/>
+                    </a:lnT>
+                    <a:lnB w="6350" cap="flat" cmpd="sng" algn="ctr">
+                      <a:solidFill>
+                        <a:srgbClr val="CACACA"/>
+                      </a:solidFill>
+                      <a:prstDash val="solid"/>
+                      <a:round/>
+                      <a:headEnd type="none" w="med" len="med"/>
+                      <a:tailEnd type="none" w="med" len="med"/>
+                    </a:lnB>
+                    <a:solidFill>
+                      <a:srgbClr val="F56600"/>
+                    </a:solidFill>
+                  </a:tcPr>
+                </a:tc>
+                <a:tc>
+                  <a:txBody>
+                    <a:bodyPr/>
+                    <a:lstStyle/>
+                    <a:p>
+                      <a:pPr algn="l" indent="0" marL="0">
+                        <a:buNone/>
+                      </a:pPr>
+                      <a:r>
+                        <a:rPr lang="en-US" sz="850" b="1" dirty="0">
+                          <a:solidFill>
+                            <a:srgbClr val="FFFFFF"/>
+                          </a:solidFill>
+                          <a:latin typeface="Verdana" pitchFamily="34" charset="0"/>
+                          <a:ea typeface="Verdana" pitchFamily="34" charset="-122"/>
+                          <a:cs typeface="Verdana" pitchFamily="34" charset="-120"/>
+                        </a:rPr>
+                        <a:t>Qué datos del deck salen de ella</a:t>
+                      </a:r>
+                      <a:endParaRPr lang="en-US" sz="850" dirty="0">
+                        <a:latin typeface="Verdana" charset="0"/>
+                        <a:ea typeface="Verdana" charset="0"/>
+                        <a:cs typeface="Verdana" charset="0"/>
+                      </a:endParaRPr>
+                    </a:p>
+                  </a:txBody>
+                  <a:tcPr marL="63500" marR="63500" marT="12700" marB="12700" anchor="ctr">
+                    <a:lnL w="6350" cap="flat" cmpd="sng" algn="ctr">
+                      <a:solidFill>
+                        <a:srgbClr val="CACACA"/>
+                      </a:solidFill>
+                      <a:prstDash val="solid"/>
+                      <a:round/>
+                      <a:headEnd type="none" w="med" len="med"/>
+                      <a:tailEnd type="none" w="med" len="med"/>
+                    </a:lnL>
+                    <a:lnR w="6350" cap="flat" cmpd="sng" algn="ctr">
+                      <a:solidFill>
+                        <a:srgbClr val="CACACA"/>
+                      </a:solidFill>
+                      <a:prstDash val="solid"/>
+                      <a:round/>
+                      <a:headEnd type="none" w="med" len="med"/>
+                      <a:tailEnd type="none" w="med" len="med"/>
+                    </a:lnR>
+                    <a:lnT w="6350" cap="flat" cmpd="sng" algn="ctr">
+                      <a:solidFill>
+                        <a:srgbClr val="CACACA"/>
+                      </a:solidFill>
+                      <a:prstDash val="solid"/>
+                      <a:round/>
+                      <a:headEnd type="none" w="med" len="med"/>
+                      <a:tailEnd type="none" w="med" len="med"/>
+                    </a:lnT>
+                    <a:lnB w="6350" cap="flat" cmpd="sng" algn="ctr">
+                      <a:solidFill>
+                        <a:srgbClr val="CACACA"/>
+                      </a:solidFill>
+                      <a:prstDash val="solid"/>
+                      <a:round/>
+                      <a:headEnd type="none" w="med" len="med"/>
+                      <a:tailEnd type="none" w="med" len="med"/>
+                    </a:lnB>
+                    <a:solidFill>
+                      <a:srgbClr val="F56600"/>
+                    </a:solidFill>
+                  </a:tcPr>
+                </a:tc>
+                <a:tc>
+                  <a:txBody>
+                    <a:bodyPr/>
+                    <a:lstStyle/>
+                    <a:p>
+                      <a:pPr algn="l" indent="0" marL="0">
+                        <a:buNone/>
+                      </a:pPr>
+                      <a:r>
+                        <a:rPr lang="en-US" sz="850" b="1" dirty="0">
+                          <a:solidFill>
+                            <a:srgbClr val="FFFFFF"/>
+                          </a:solidFill>
+                          <a:latin typeface="Verdana" pitchFamily="34" charset="0"/>
+                          <a:ea typeface="Verdana" pitchFamily="34" charset="-122"/>
+                          <a:cs typeface="Verdana" pitchFamily="34" charset="-120"/>
+                        </a:rPr>
+                        <a:t>Criterio</a:t>
+                      </a:r>
+                      <a:endParaRPr lang="en-US" sz="850" dirty="0">
+                        <a:latin typeface="Verdana" charset="0"/>
+                        <a:ea typeface="Verdana" charset="0"/>
+                        <a:cs typeface="Verdana" charset="0"/>
+                      </a:endParaRPr>
+                    </a:p>
+                  </a:txBody>
+                  <a:tcPr marL="63500" marR="63500" marT="12700" marB="12700" anchor="ctr">
+                    <a:lnL w="6350" cap="flat" cmpd="sng" algn="ctr">
+                      <a:solidFill>
+                        <a:srgbClr val="CACACA"/>
+                      </a:solidFill>
+                      <a:prstDash val="solid"/>
+                      <a:round/>
+                      <a:headEnd type="none" w="med" len="med"/>
+                      <a:tailEnd type="none" w="med" len="med"/>
+                    </a:lnL>
+                    <a:lnR w="6350" cap="flat" cmpd="sng" algn="ctr">
+                      <a:solidFill>
+                        <a:srgbClr val="CACACA"/>
+                      </a:solidFill>
+                      <a:prstDash val="solid"/>
+                      <a:round/>
+                      <a:headEnd type="none" w="med" len="med"/>
+                      <a:tailEnd type="none" w="med" len="med"/>
+                    </a:lnR>
+                    <a:lnT w="6350" cap="flat" cmpd="sng" algn="ctr">
+                      <a:solidFill>
+                        <a:srgbClr val="CACACA"/>
+                      </a:solidFill>
+                      <a:prstDash val="solid"/>
+                      <a:round/>
+                      <a:headEnd type="none" w="med" len="med"/>
+                      <a:tailEnd type="none" w="med" len="med"/>
+                    </a:lnT>
+                    <a:lnB w="6350" cap="flat" cmpd="sng" algn="ctr">
+                      <a:solidFill>
+                        <a:srgbClr val="CACACA"/>
+                      </a:solidFill>
+                      <a:prstDash val="solid"/>
+                      <a:round/>
+                      <a:headEnd type="none" w="med" len="med"/>
+                      <a:tailEnd type="none" w="med" len="med"/>
+                    </a:lnB>
+                    <a:solidFill>
+                      <a:srgbClr val="F56600"/>
+                    </a:solidFill>
+                  </a:tcPr>
+                </a:tc>
+                <a:tc>
+                  <a:txBody>
+                    <a:bodyPr/>
+                    <a:lstStyle/>
+                    <a:p>
+                      <a:pPr algn="l" indent="0" marL="0">
+                        <a:buNone/>
+                      </a:pPr>
+                      <a:r>
+                        <a:rPr lang="en-US" sz="850" b="1" dirty="0">
+                          <a:solidFill>
+                            <a:srgbClr val="FFFFFF"/>
+                          </a:solidFill>
+                          <a:latin typeface="Verdana" pitchFamily="34" charset="0"/>
+                          <a:ea typeface="Verdana" pitchFamily="34" charset="-122"/>
+                          <a:cs typeface="Verdana" pitchFamily="34" charset="-120"/>
+                        </a:rPr>
+                        <a:t>Qué llama PYME</a:t>
+                      </a:r>
+                      <a:endParaRPr lang="en-US" sz="850" dirty="0">
+                        <a:latin typeface="Verdana" charset="0"/>
+                        <a:ea typeface="Verdana" charset="0"/>
+                        <a:cs typeface="Verdana" charset="0"/>
+                      </a:endParaRPr>
+                    </a:p>
+                  </a:txBody>
+                  <a:tcPr marL="63500" marR="63500" marT="12700" marB="12700" anchor="ctr">
+                    <a:lnL w="6350" cap="flat" cmpd="sng" algn="ctr">
+                      <a:solidFill>
+                        <a:srgbClr val="CACACA"/>
+                      </a:solidFill>
+                      <a:prstDash val="solid"/>
+                      <a:round/>
+                      <a:headEnd type="none" w="med" len="med"/>
+                      <a:tailEnd type="none" w="med" len="med"/>
+                    </a:lnL>
+                    <a:lnR w="6350" cap="flat" cmpd="sng" algn="ctr">
+                      <a:solidFill>
+                        <a:srgbClr val="CACACA"/>
+                      </a:solidFill>
+                      <a:prstDash val="solid"/>
+                      <a:round/>
+                      <a:headEnd type="none" w="med" len="med"/>
+                      <a:tailEnd type="none" w="med" len="med"/>
+                    </a:lnR>
+                    <a:lnT w="6350" cap="flat" cmpd="sng" algn="ctr">
+                      <a:solidFill>
+                        <a:srgbClr val="CACACA"/>
+                      </a:solidFill>
+                      <a:prstDash val="solid"/>
+                      <a:round/>
+                      <a:headEnd type="none" w="med" len="med"/>
+                      <a:tailEnd type="none" w="med" len="med"/>
+                    </a:lnT>
+                    <a:lnB w="6350" cap="flat" cmpd="sng" algn="ctr">
+                      <a:solidFill>
+                        <a:srgbClr val="CACACA"/>
+                      </a:solidFill>
+                      <a:prstDash val="solid"/>
+                      <a:round/>
+                      <a:headEnd type="none" w="med" len="med"/>
+                      <a:tailEnd type="none" w="med" len="med"/>
+                    </a:lnB>
+                    <a:solidFill>
+                      <a:srgbClr val="F56600"/>
+                    </a:solidFill>
+                  </a:tcPr>
+                </a:tc>
+                <a:tc>
+                  <a:txBody>
+                    <a:bodyPr/>
+                    <a:lstStyle/>
+                    <a:p>
+                      <a:pPr algn="ctr" indent="0" marL="0">
+                        <a:buNone/>
+                      </a:pPr>
+                      <a:r>
+                        <a:rPr lang="en-US" sz="850" b="1" dirty="0">
+                          <a:solidFill>
+                            <a:srgbClr val="FFFFFF"/>
+                          </a:solidFill>
+                          <a:latin typeface="Verdana" pitchFamily="34" charset="0"/>
+                          <a:ea typeface="Verdana" pitchFamily="34" charset="-122"/>
+                          <a:cs typeface="Verdana" pitchFamily="34" charset="-120"/>
+                        </a:rPr>
+                        <a:t>¿Es la estándar?</a:t>
+                      </a:r>
+                      <a:endParaRPr lang="en-US" sz="850" dirty="0">
+                        <a:latin typeface="Verdana" charset="0"/>
+                        <a:ea typeface="Verdana" charset="0"/>
+                        <a:cs typeface="Verdana" charset="0"/>
+                      </a:endParaRPr>
+                    </a:p>
+                  </a:txBody>
+                  <a:tcPr marL="63500" marR="63500" marT="12700" marB="12700" anchor="ctr">
+                    <a:lnL w="6350" cap="flat" cmpd="sng" algn="ctr">
+                      <a:solidFill>
+                        <a:srgbClr val="CACACA"/>
+                      </a:solidFill>
+                      <a:prstDash val="solid"/>
+                      <a:round/>
+                      <a:headEnd type="none" w="med" len="med"/>
+                      <a:tailEnd type="none" w="med" len="med"/>
+                    </a:lnL>
+                    <a:lnR w="6350" cap="flat" cmpd="sng" algn="ctr">
+                      <a:solidFill>
+                        <a:srgbClr val="CACACA"/>
+                      </a:solidFill>
+                      <a:prstDash val="solid"/>
+                      <a:round/>
+                      <a:headEnd type="none" w="med" len="med"/>
+                      <a:tailEnd type="none" w="med" len="med"/>
+                    </a:lnR>
+                    <a:lnT w="6350" cap="flat" cmpd="sng" algn="ctr">
+                      <a:solidFill>
+                        <a:srgbClr val="CACACA"/>
+                      </a:solidFill>
+                      <a:prstDash val="solid"/>
+                      <a:round/>
+                      <a:headEnd type="none" w="med" len="med"/>
+                      <a:tailEnd type="none" w="med" len="med"/>
+                    </a:lnT>
+                    <a:lnB w="6350" cap="flat" cmpd="sng" algn="ctr">
+                      <a:solidFill>
+                        <a:srgbClr val="CACACA"/>
+                      </a:solidFill>
+                      <a:prstDash val="solid"/>
+                      <a:round/>
+                      <a:headEnd type="none" w="med" len="med"/>
+                      <a:tailEnd type="none" w="med" len="med"/>
+                    </a:lnB>
+                    <a:solidFill>
+                      <a:srgbClr val="F56600"/>
+                    </a:solidFill>
+                  </a:tcPr>
+                </a:tc>
+              </a:tr>
+              <a:tr h="306324">
+                <a:tc>
+                  <a:txBody>
+                    <a:bodyPr/>
+                    <a:lstStyle/>
+                    <a:p>
+                      <a:pPr algn="l" indent="0" marL="0">
+                        <a:buNone/>
+                      </a:pPr>
+                      <a:r>
+                        <a:rPr lang="en-US" sz="800" b="1" dirty="0">
+                          <a:solidFill>
+                            <a:srgbClr val="2B2B2B"/>
+                          </a:solidFill>
+                          <a:latin typeface="Verdana" pitchFamily="34" charset="0"/>
+                          <a:ea typeface="Verdana" pitchFamily="34" charset="-122"/>
+                          <a:cs typeface="Verdana" pitchFamily="34" charset="-120"/>
+                        </a:rPr>
+                        <a:t>Recomendación 2003/361/CE</a:t>
+                      </a:r>
+                      <a:endParaRPr lang="en-US" sz="800" dirty="0">
+                        <a:latin typeface="Verdana" charset="0"/>
+                        <a:ea typeface="Verdana" charset="0"/>
+                        <a:cs typeface="Verdana" charset="0"/>
+                      </a:endParaRPr>
+                    </a:p>
+                  </a:txBody>
+                  <a:tcPr marL="63500" marR="63500" marT="12700" marB="12700" anchor="ctr">
+                    <a:lnL w="6350" cap="flat" cmpd="sng" algn="ctr">
+                      <a:solidFill>
+                        <a:srgbClr val="CACACA"/>
+                      </a:solidFill>
+                      <a:prstDash val="solid"/>
+                      <a:round/>
+                      <a:headEnd type="none" w="med" len="med"/>
+                      <a:tailEnd type="none" w="med" len="med"/>
+                    </a:lnL>
+                    <a:lnR w="6350" cap="flat" cmpd="sng" algn="ctr">
+                      <a:solidFill>
+                        <a:srgbClr val="CACACA"/>
+                      </a:solidFill>
+                      <a:prstDash val="solid"/>
+                      <a:round/>
+                      <a:headEnd type="none" w="med" len="med"/>
+                      <a:tailEnd type="none" w="med" len="med"/>
+                    </a:lnR>
+                    <a:lnT w="6350" cap="flat" cmpd="sng" algn="ctr">
+                      <a:solidFill>
+                        <a:srgbClr val="CACACA"/>
+                      </a:solidFill>
+                      <a:prstDash val="solid"/>
+                      <a:round/>
+                      <a:headEnd type="none" w="med" len="med"/>
+                      <a:tailEnd type="none" w="med" len="med"/>
+                    </a:lnT>
+                    <a:lnB w="6350" cap="flat" cmpd="sng" algn="ctr">
+                      <a:solidFill>
+                        <a:srgbClr val="CACACA"/>
+                      </a:solidFill>
+                      <a:prstDash val="solid"/>
+                      <a:round/>
+                      <a:headEnd type="none" w="med" len="med"/>
+                      <a:tailEnd type="none" w="med" len="med"/>
+                    </a:lnB>
+                    <a:solidFill>
+                      <a:srgbClr val="FFF4C2"/>
+                    </a:solidFill>
+                  </a:tcPr>
+                </a:tc>
+                <a:tc>
+                  <a:txBody>
+                    <a:bodyPr/>
+                    <a:lstStyle/>
+                    <a:p>
+                      <a:pPr algn="l" indent="0" marL="0">
+                        <a:buNone/>
+                      </a:pPr>
+                      <a:r>
+                        <a:rPr lang="en-US" sz="750" dirty="0">
+                          <a:solidFill>
+                            <a:srgbClr val="2B2B2B"/>
+                          </a:solidFill>
+                          <a:latin typeface="Verdana" pitchFamily="34" charset="0"/>
+                          <a:ea typeface="Verdana" pitchFamily="34" charset="-122"/>
+                          <a:cs typeface="Verdana" pitchFamily="34" charset="-120"/>
+                        </a:rPr>
+                        <a:t>La definición estándar de la UE</a:t>
+                      </a:r>
+                      <a:endParaRPr lang="en-US" sz="750" dirty="0">
+                        <a:latin typeface="Verdana" charset="0"/>
+                        <a:ea typeface="Verdana" charset="0"/>
+                        <a:cs typeface="Verdana" charset="0"/>
+                      </a:endParaRPr>
+                    </a:p>
+                  </a:txBody>
+                  <a:tcPr marL="63500" marR="63500" marT="12700" marB="12700" anchor="ctr">
+                    <a:lnL w="6350" cap="flat" cmpd="sng" algn="ctr">
+                      <a:solidFill>
+                        <a:srgbClr val="CACACA"/>
+                      </a:solidFill>
+                      <a:prstDash val="solid"/>
+                      <a:round/>
+                      <a:headEnd type="none" w="med" len="med"/>
+                      <a:tailEnd type="none" w="med" len="med"/>
+                    </a:lnL>
+                    <a:lnR w="6350" cap="flat" cmpd="sng" algn="ctr">
+                      <a:solidFill>
+                        <a:srgbClr val="CACACA"/>
+                      </a:solidFill>
+                      <a:prstDash val="solid"/>
+                      <a:round/>
+                      <a:headEnd type="none" w="med" len="med"/>
+                      <a:tailEnd type="none" w="med" len="med"/>
+                    </a:lnR>
+                    <a:lnT w="6350" cap="flat" cmpd="sng" algn="ctr">
+                      <a:solidFill>
+                        <a:srgbClr val="CACACA"/>
+                      </a:solidFill>
+                      <a:prstDash val="solid"/>
+                      <a:round/>
+                      <a:headEnd type="none" w="med" len="med"/>
+                      <a:tailEnd type="none" w="med" len="med"/>
+                    </a:lnT>
+                    <a:lnB w="6350" cap="flat" cmpd="sng" algn="ctr">
+                      <a:solidFill>
+                        <a:srgbClr val="CACACA"/>
+                      </a:solidFill>
+                      <a:prstDash val="solid"/>
+                      <a:round/>
+                      <a:headEnd type="none" w="med" len="med"/>
+                      <a:tailEnd type="none" w="med" len="med"/>
+                    </a:lnB>
+                    <a:solidFill>
+                      <a:srgbClr val="FFF4C2"/>
+                    </a:solidFill>
+                  </a:tcPr>
+                </a:tc>
+                <a:tc>
+                  <a:txBody>
+                    <a:bodyPr/>
+                    <a:lstStyle/>
+                    <a:p>
+                      <a:pPr algn="l" indent="0" marL="0">
+                        <a:buNone/>
+                      </a:pPr>
+                      <a:r>
+                        <a:rPr lang="en-US" sz="750" b="1" dirty="0">
+                          <a:solidFill>
+                            <a:srgbClr val="2B2B2B"/>
+                          </a:solidFill>
+                          <a:latin typeface="Verdana" pitchFamily="34" charset="0"/>
+                          <a:ea typeface="Verdana" pitchFamily="34" charset="-122"/>
+                          <a:cs typeface="Verdana" pitchFamily="34" charset="-120"/>
+                        </a:rPr>
+                        <a:t>Empleados, y facturación o balance</a:t>
+                      </a:r>
+                      <a:endParaRPr lang="en-US" sz="750" dirty="0">
+                        <a:latin typeface="Verdana" charset="0"/>
+                        <a:ea typeface="Verdana" charset="0"/>
+                        <a:cs typeface="Verdana" charset="0"/>
+                      </a:endParaRPr>
+                    </a:p>
+                  </a:txBody>
+                  <a:tcPr marL="63500" marR="63500" marT="12700" marB="12700" anchor="ctr">
+                    <a:lnL w="6350" cap="flat" cmpd="sng" algn="ctr">
+                      <a:solidFill>
+                        <a:srgbClr val="CACACA"/>
+                      </a:solidFill>
+                      <a:prstDash val="solid"/>
+                      <a:round/>
+                      <a:headEnd type="none" w="med" len="med"/>
+                      <a:tailEnd type="none" w="med" len="med"/>
+                    </a:lnL>
+                    <a:lnR w="6350" cap="flat" cmpd="sng" algn="ctr">
+                      <a:solidFill>
+                        <a:srgbClr val="CACACA"/>
+                      </a:solidFill>
+                      <a:prstDash val="solid"/>
+                      <a:round/>
+                      <a:headEnd type="none" w="med" len="med"/>
+                      <a:tailEnd type="none" w="med" len="med"/>
+                    </a:lnR>
+                    <a:lnT w="6350" cap="flat" cmpd="sng" algn="ctr">
+                      <a:solidFill>
+                        <a:srgbClr val="CACACA"/>
+                      </a:solidFill>
+                      <a:prstDash val="solid"/>
+                      <a:round/>
+                      <a:headEnd type="none" w="med" len="med"/>
+                      <a:tailEnd type="none" w="med" len="med"/>
+                    </a:lnT>
+                    <a:lnB w="6350" cap="flat" cmpd="sng" algn="ctr">
+                      <a:solidFill>
+                        <a:srgbClr val="CACACA"/>
+                      </a:solidFill>
+                      <a:prstDash val="solid"/>
+                      <a:round/>
+                      <a:headEnd type="none" w="med" len="med"/>
+                      <a:tailEnd type="none" w="med" len="med"/>
+                    </a:lnB>
+                    <a:solidFill>
+                      <a:srgbClr val="FFF4C2"/>
+                    </a:solidFill>
+                  </a:tcPr>
+                </a:tc>
+                <a:tc>
+                  <a:txBody>
+                    <a:bodyPr/>
+                    <a:lstStyle/>
+                    <a:p>
+                      <a:pPr algn="l" indent="0" marL="0">
+                        <a:buNone/>
+                      </a:pPr>
+                      <a:r>
+                        <a:rPr lang="en-US" sz="750" dirty="0">
+                          <a:solidFill>
+                            <a:srgbClr val="2B2B2B"/>
+                          </a:solidFill>
+                          <a:latin typeface="Verdana" pitchFamily="34" charset="0"/>
+                          <a:ea typeface="Verdana" pitchFamily="34" charset="-122"/>
+                          <a:cs typeface="Verdana" pitchFamily="34" charset="-120"/>
+                        </a:rPr>
+                        <a:t>Menos de 250 empleados y hasta 50 M€ de facturación o 43 M€ de balance. En un grupo, se suman las empresas vinculadas</a:t>
+                      </a:r>
+                      <a:endParaRPr lang="en-US" sz="750" dirty="0">
+                        <a:latin typeface="Verdana" charset="0"/>
+                        <a:ea typeface="Verdana" charset="0"/>
+                        <a:cs typeface="Verdana" charset="0"/>
+                      </a:endParaRPr>
+                    </a:p>
+                  </a:txBody>
+                  <a:tcPr marL="63500" marR="63500" marT="12700" marB="12700" anchor="ctr">
+                    <a:lnL w="6350" cap="flat" cmpd="sng" algn="ctr">
+                      <a:solidFill>
+                        <a:srgbClr val="CACACA"/>
+                      </a:solidFill>
+                      <a:prstDash val="solid"/>
+                      <a:round/>
+                      <a:headEnd type="none" w="med" len="med"/>
+                      <a:tailEnd type="none" w="med" len="med"/>
+                    </a:lnL>
+                    <a:lnR w="6350" cap="flat" cmpd="sng" algn="ctr">
+                      <a:solidFill>
+                        <a:srgbClr val="CACACA"/>
+                      </a:solidFill>
+                      <a:prstDash val="solid"/>
+                      <a:round/>
+                      <a:headEnd type="none" w="med" len="med"/>
+                      <a:tailEnd type="none" w="med" len="med"/>
+                    </a:lnR>
+                    <a:lnT w="6350" cap="flat" cmpd="sng" algn="ctr">
+                      <a:solidFill>
+                        <a:srgbClr val="CACACA"/>
+                      </a:solidFill>
+                      <a:prstDash val="solid"/>
+                      <a:round/>
+                      <a:headEnd type="none" w="med" len="med"/>
+                      <a:tailEnd type="none" w="med" len="med"/>
+                    </a:lnT>
+                    <a:lnB w="6350" cap="flat" cmpd="sng" algn="ctr">
+                      <a:solidFill>
+                        <a:srgbClr val="CACACA"/>
+                      </a:solidFill>
+                      <a:prstDash val="solid"/>
+                      <a:round/>
+                      <a:headEnd type="none" w="med" len="med"/>
+                      <a:tailEnd type="none" w="med" len="med"/>
+                    </a:lnB>
+                    <a:solidFill>
+                      <a:srgbClr val="FFF4C2"/>
+                    </a:solidFill>
+                  </a:tcPr>
+                </a:tc>
+                <a:tc>
+                  <a:txBody>
+                    <a:bodyPr/>
+                    <a:lstStyle/>
+                    <a:p>
+                      <a:pPr algn="ctr" indent="0" marL="0">
+                        <a:buNone/>
+                      </a:pPr>
+                      <a:r>
+                        <a:rPr lang="en-US" sz="750" b="1" dirty="0">
+                          <a:solidFill>
+                            <a:srgbClr val="2B2B2B"/>
+                          </a:solidFill>
+                          <a:latin typeface="Verdana" pitchFamily="34" charset="0"/>
+                          <a:ea typeface="Verdana" pitchFamily="34" charset="-122"/>
+                          <a:cs typeface="Verdana" pitchFamily="34" charset="-120"/>
+                        </a:rPr>
+                        <a:t>Es la referencia</a:t>
+                      </a:r>
+                      <a:endParaRPr lang="en-US" sz="750" dirty="0">
+                        <a:latin typeface="Verdana" charset="0"/>
+                        <a:ea typeface="Verdana" charset="0"/>
+                        <a:cs typeface="Verdana" charset="0"/>
+                      </a:endParaRPr>
+                    </a:p>
+                  </a:txBody>
+                  <a:tcPr marL="63500" marR="63500" marT="12700" marB="12700" anchor="ctr">
+                    <a:lnL w="6350" cap="flat" cmpd="sng" algn="ctr">
+                      <a:solidFill>
+                        <a:srgbClr val="CACACA"/>
+                      </a:solidFill>
+                      <a:prstDash val="solid"/>
+                      <a:round/>
+                      <a:headEnd type="none" w="med" len="med"/>
+                      <a:tailEnd type="none" w="med" len="med"/>
+                    </a:lnL>
+                    <a:lnR w="6350" cap="flat" cmpd="sng" algn="ctr">
+                      <a:solidFill>
+                        <a:srgbClr val="CACACA"/>
+                      </a:solidFill>
+                      <a:prstDash val="solid"/>
+                      <a:round/>
+                      <a:headEnd type="none" w="med" len="med"/>
+                      <a:tailEnd type="none" w="med" len="med"/>
+                    </a:lnR>
+                    <a:lnT w="6350" cap="flat" cmpd="sng" algn="ctr">
+                      <a:solidFill>
+                        <a:srgbClr val="CACACA"/>
+                      </a:solidFill>
+                      <a:prstDash val="solid"/>
+                      <a:round/>
+                      <a:headEnd type="none" w="med" len="med"/>
+                      <a:tailEnd type="none" w="med" len="med"/>
+                    </a:lnT>
+                    <a:lnB w="6350" cap="flat" cmpd="sng" algn="ctr">
+                      <a:solidFill>
+                        <a:srgbClr val="CACACA"/>
+                      </a:solidFill>
+                      <a:prstDash val="solid"/>
+                      <a:round/>
+                      <a:headEnd type="none" w="med" len="med"/>
+                      <a:tailEnd type="none" w="med" len="med"/>
+                    </a:lnB>
+                    <a:solidFill>
+                      <a:srgbClr val="FFD200"/>
+                    </a:solidFill>
+                  </a:tcPr>
+                </a:tc>
+              </a:tr>
+              <a:tr h="306324">
+                <a:tc>
+                  <a:txBody>
+                    <a:bodyPr/>
+                    <a:lstStyle/>
+                    <a:p>
+                      <a:pPr algn="l" indent="0" marL="0">
+                        <a:buNone/>
+                      </a:pPr>
+                      <a:r>
+                        <a:rPr lang="en-US" sz="800" b="1" dirty="0">
+                          <a:solidFill>
+                            <a:srgbClr val="2B2B2B"/>
+                          </a:solidFill>
+                          <a:latin typeface="Verdana" pitchFamily="34" charset="0"/>
+                          <a:ea typeface="Verdana" pitchFamily="34" charset="-122"/>
+                          <a:cs typeface="Verdana" pitchFamily="34" charset="-120"/>
+                        </a:rPr>
+                        <a:t>Banco de España, Central de Balances</a:t>
+                      </a:r>
+                      <a:endParaRPr lang="en-US" sz="800" dirty="0">
+                        <a:latin typeface="Verdana" charset="0"/>
+                        <a:ea typeface="Verdana" charset="0"/>
+                        <a:cs typeface="Verdana" charset="0"/>
+                      </a:endParaRPr>
+                    </a:p>
+                  </a:txBody>
+                  <a:tcPr marL="63500" marR="63500" marT="12700" marB="12700" anchor="ctr">
+                    <a:lnL w="6350" cap="flat" cmpd="sng" algn="ctr">
+                      <a:solidFill>
+                        <a:srgbClr val="CACACA"/>
+                      </a:solidFill>
+                      <a:prstDash val="solid"/>
+                      <a:round/>
+                      <a:headEnd type="none" w="med" len="med"/>
+                      <a:tailEnd type="none" w="med" len="med"/>
+                    </a:lnL>
+                    <a:lnR w="6350" cap="flat" cmpd="sng" algn="ctr">
+                      <a:solidFill>
+                        <a:srgbClr val="CACACA"/>
+                      </a:solidFill>
+                      <a:prstDash val="solid"/>
+                      <a:round/>
+                      <a:headEnd type="none" w="med" len="med"/>
+                      <a:tailEnd type="none" w="med" len="med"/>
+                    </a:lnR>
+                    <a:lnT w="6350" cap="flat" cmpd="sng" algn="ctr">
+                      <a:solidFill>
+                        <a:srgbClr val="CACACA"/>
+                      </a:solidFill>
+                      <a:prstDash val="solid"/>
+                      <a:round/>
+                      <a:headEnd type="none" w="med" len="med"/>
+                      <a:tailEnd type="none" w="med" len="med"/>
+                    </a:lnT>
+                    <a:lnB w="6350" cap="flat" cmpd="sng" algn="ctr">
+                      <a:solidFill>
+                        <a:srgbClr val="CACACA"/>
+                      </a:solidFill>
+                      <a:prstDash val="solid"/>
+                      <a:round/>
+                      <a:headEnd type="none" w="med" len="med"/>
+                      <a:tailEnd type="none" w="med" len="med"/>
+                    </a:lnB>
+                    <a:solidFill>
+                      <a:srgbClr val="F4F4F4"/>
+                    </a:solidFill>
+                  </a:tcPr>
+                </a:tc>
+                <a:tc>
+                  <a:txBody>
+                    <a:bodyPr/>
+                    <a:lstStyle/>
+                    <a:p>
+                      <a:pPr algn="l" indent="0" marL="0">
+                        <a:buNone/>
+                      </a:pPr>
+                      <a:r>
+                        <a:rPr lang="en-US" sz="750" dirty="0">
+                          <a:solidFill>
+                            <a:srgbClr val="2B2B2B"/>
+                          </a:solidFill>
+                          <a:latin typeface="Verdana" pitchFamily="34" charset="0"/>
+                          <a:ea typeface="Verdana" pitchFamily="34" charset="-122"/>
+                          <a:cs typeface="Verdana" pitchFamily="34" charset="-120"/>
+                        </a:rPr>
+                        <a:t>Capacidad de pago por tamaño</a:t>
+                      </a:r>
+                      <a:endParaRPr lang="en-US" sz="750" dirty="0">
+                        <a:latin typeface="Verdana" charset="0"/>
+                        <a:ea typeface="Verdana" charset="0"/>
+                        <a:cs typeface="Verdana" charset="0"/>
+                      </a:endParaRPr>
+                    </a:p>
+                  </a:txBody>
+                  <a:tcPr marL="63500" marR="63500" marT="12700" marB="12700" anchor="ctr">
+                    <a:lnL w="6350" cap="flat" cmpd="sng" algn="ctr">
+                      <a:solidFill>
+                        <a:srgbClr val="CACACA"/>
+                      </a:solidFill>
+                      <a:prstDash val="solid"/>
+                      <a:round/>
+                      <a:headEnd type="none" w="med" len="med"/>
+                      <a:tailEnd type="none" w="med" len="med"/>
+                    </a:lnL>
+                    <a:lnR w="6350" cap="flat" cmpd="sng" algn="ctr">
+                      <a:solidFill>
+                        <a:srgbClr val="CACACA"/>
+                      </a:solidFill>
+                      <a:prstDash val="solid"/>
+                      <a:round/>
+                      <a:headEnd type="none" w="med" len="med"/>
+                      <a:tailEnd type="none" w="med" len="med"/>
+                    </a:lnR>
+                    <a:lnT w="6350" cap="flat" cmpd="sng" algn="ctr">
+                      <a:solidFill>
+                        <a:srgbClr val="CACACA"/>
+                      </a:solidFill>
+                      <a:prstDash val="solid"/>
+                      <a:round/>
+                      <a:headEnd type="none" w="med" len="med"/>
+                      <a:tailEnd type="none" w="med" len="med"/>
+                    </a:lnT>
+                    <a:lnB w="6350" cap="flat" cmpd="sng" algn="ctr">
+                      <a:solidFill>
+                        <a:srgbClr val="CACACA"/>
+                      </a:solidFill>
+                      <a:prstDash val="solid"/>
+                      <a:round/>
+                      <a:headEnd type="none" w="med" len="med"/>
+                      <a:tailEnd type="none" w="med" len="med"/>
+                    </a:lnB>
+                    <a:solidFill>
+                      <a:srgbClr val="F4F4F4"/>
+                    </a:solidFill>
+                  </a:tcPr>
+                </a:tc>
+                <a:tc>
+                  <a:txBody>
+                    <a:bodyPr/>
+                    <a:lstStyle/>
+                    <a:p>
+                      <a:pPr algn="l" indent="0" marL="0">
+                        <a:buNone/>
+                      </a:pPr>
+                      <a:r>
+                        <a:rPr lang="en-US" sz="750" b="1" dirty="0">
+                          <a:solidFill>
+                            <a:srgbClr val="2B2B2B"/>
+                          </a:solidFill>
+                          <a:latin typeface="Verdana" pitchFamily="34" charset="0"/>
+                          <a:ea typeface="Verdana" pitchFamily="34" charset="-122"/>
+                          <a:cs typeface="Verdana" pitchFamily="34" charset="-120"/>
+                        </a:rPr>
+                        <a:t>Igual que la estándar</a:t>
+                      </a:r>
+                      <a:endParaRPr lang="en-US" sz="750" dirty="0">
+                        <a:latin typeface="Verdana" charset="0"/>
+                        <a:ea typeface="Verdana" charset="0"/>
+                        <a:cs typeface="Verdana" charset="0"/>
+                      </a:endParaRPr>
+                    </a:p>
+                  </a:txBody>
+                  <a:tcPr marL="63500" marR="63500" marT="12700" marB="12700" anchor="ctr">
+                    <a:lnL w="6350" cap="flat" cmpd="sng" algn="ctr">
+                      <a:solidFill>
+                        <a:srgbClr val="CACACA"/>
+                      </a:solidFill>
+                      <a:prstDash val="solid"/>
+                      <a:round/>
+                      <a:headEnd type="none" w="med" len="med"/>
+                      <a:tailEnd type="none" w="med" len="med"/>
+                    </a:lnL>
+                    <a:lnR w="6350" cap="flat" cmpd="sng" algn="ctr">
+                      <a:solidFill>
+                        <a:srgbClr val="CACACA"/>
+                      </a:solidFill>
+                      <a:prstDash val="solid"/>
+                      <a:round/>
+                      <a:headEnd type="none" w="med" len="med"/>
+                      <a:tailEnd type="none" w="med" len="med"/>
+                    </a:lnR>
+                    <a:lnT w="6350" cap="flat" cmpd="sng" algn="ctr">
+                      <a:solidFill>
+                        <a:srgbClr val="CACACA"/>
+                      </a:solidFill>
+                      <a:prstDash val="solid"/>
+                      <a:round/>
+                      <a:headEnd type="none" w="med" len="med"/>
+                      <a:tailEnd type="none" w="med" len="med"/>
+                    </a:lnT>
+                    <a:lnB w="6350" cap="flat" cmpd="sng" algn="ctr">
+                      <a:solidFill>
+                        <a:srgbClr val="CACACA"/>
+                      </a:solidFill>
+                      <a:prstDash val="solid"/>
+                      <a:round/>
+                      <a:headEnd type="none" w="med" len="med"/>
+                      <a:tailEnd type="none" w="med" len="med"/>
+                    </a:lnB>
+                    <a:solidFill>
+                      <a:srgbClr val="F4F4F4"/>
+                    </a:solidFill>
+                  </a:tcPr>
+                </a:tc>
+                <a:tc>
+                  <a:txBody>
+                    <a:bodyPr/>
+                    <a:lstStyle/>
+                    <a:p>
+                      <a:pPr algn="l" indent="0" marL="0">
+                        <a:buNone/>
+                      </a:pPr>
+                      <a:r>
+                        <a:rPr lang="en-US" sz="750" dirty="0">
+                          <a:solidFill>
+                            <a:srgbClr val="2B2B2B"/>
+                          </a:solidFill>
+                          <a:latin typeface="Verdana" pitchFamily="34" charset="0"/>
+                          <a:ea typeface="Verdana" pitchFamily="34" charset="-122"/>
+                          <a:cs typeface="Verdana" pitchFamily="34" charset="-120"/>
+                        </a:rPr>
+                        <a:t>Clasificación por tamaño de la Recomendación</a:t>
+                      </a:r>
+                      <a:endParaRPr lang="en-US" sz="750" dirty="0">
+                        <a:latin typeface="Verdana" charset="0"/>
+                        <a:ea typeface="Verdana" charset="0"/>
+                        <a:cs typeface="Verdana" charset="0"/>
+                      </a:endParaRPr>
+                    </a:p>
+                  </a:txBody>
+                  <a:tcPr marL="63500" marR="63500" marT="12700" marB="12700" anchor="ctr">
+                    <a:lnL w="6350" cap="flat" cmpd="sng" algn="ctr">
+                      <a:solidFill>
+                        <a:srgbClr val="CACACA"/>
+                      </a:solidFill>
+                      <a:prstDash val="solid"/>
+                      <a:round/>
+                      <a:headEnd type="none" w="med" len="med"/>
+                      <a:tailEnd type="none" w="med" len="med"/>
+                    </a:lnL>
+                    <a:lnR w="6350" cap="flat" cmpd="sng" algn="ctr">
+                      <a:solidFill>
+                        <a:srgbClr val="CACACA"/>
+                      </a:solidFill>
+                      <a:prstDash val="solid"/>
+                      <a:round/>
+                      <a:headEnd type="none" w="med" len="med"/>
+                      <a:tailEnd type="none" w="med" len="med"/>
+                    </a:lnR>
+                    <a:lnT w="6350" cap="flat" cmpd="sng" algn="ctr">
+                      <a:solidFill>
+                        <a:srgbClr val="CACACA"/>
+                      </a:solidFill>
+                      <a:prstDash val="solid"/>
+                      <a:round/>
+                      <a:headEnd type="none" w="med" len="med"/>
+                      <a:tailEnd type="none" w="med" len="med"/>
+                    </a:lnT>
+                    <a:lnB w="6350" cap="flat" cmpd="sng" algn="ctr">
+                      <a:solidFill>
+                        <a:srgbClr val="CACACA"/>
+                      </a:solidFill>
+                      <a:prstDash val="solid"/>
+                      <a:round/>
+                      <a:headEnd type="none" w="med" len="med"/>
+                      <a:tailEnd type="none" w="med" len="med"/>
+                    </a:lnB>
+                    <a:solidFill>
+                      <a:srgbClr val="F4F4F4"/>
+                    </a:solidFill>
+                  </a:tcPr>
+                </a:tc>
+                <a:tc>
+                  <a:txBody>
+                    <a:bodyPr/>
+                    <a:lstStyle/>
+                    <a:p>
+                      <a:pPr algn="ctr" indent="0" marL="0">
+                        <a:buNone/>
+                      </a:pPr>
+                      <a:r>
+                        <a:rPr lang="en-US" sz="750" b="1" dirty="0">
+                          <a:solidFill>
+                            <a:srgbClr val="2B2B2B"/>
+                          </a:solidFill>
+                          <a:latin typeface="Verdana" pitchFamily="34" charset="0"/>
+                          <a:ea typeface="Verdana" pitchFamily="34" charset="-122"/>
+                          <a:cs typeface="Verdana" pitchFamily="34" charset="-120"/>
+                        </a:rPr>
+                        <a:t>Sí, completa</a:t>
+                      </a:r>
+                      <a:endParaRPr lang="en-US" sz="750" dirty="0">
+                        <a:latin typeface="Verdana" charset="0"/>
+                        <a:ea typeface="Verdana" charset="0"/>
+                        <a:cs typeface="Verdana" charset="0"/>
+                      </a:endParaRPr>
+                    </a:p>
+                  </a:txBody>
+                  <a:tcPr marL="63500" marR="63500" marT="12700" marB="12700" anchor="ctr">
+                    <a:lnL w="6350" cap="flat" cmpd="sng" algn="ctr">
+                      <a:solidFill>
+                        <a:srgbClr val="CACACA"/>
+                      </a:solidFill>
+                      <a:prstDash val="solid"/>
+                      <a:round/>
+                      <a:headEnd type="none" w="med" len="med"/>
+                      <a:tailEnd type="none" w="med" len="med"/>
+                    </a:lnL>
+                    <a:lnR w="6350" cap="flat" cmpd="sng" algn="ctr">
+                      <a:solidFill>
+                        <a:srgbClr val="CACACA"/>
+                      </a:solidFill>
+                      <a:prstDash val="solid"/>
+                      <a:round/>
+                      <a:headEnd type="none" w="med" len="med"/>
+                      <a:tailEnd type="none" w="med" len="med"/>
+                    </a:lnR>
+                    <a:lnT w="6350" cap="flat" cmpd="sng" algn="ctr">
+                      <a:solidFill>
+                        <a:srgbClr val="CACACA"/>
+                      </a:solidFill>
+                      <a:prstDash val="solid"/>
+                      <a:round/>
+                      <a:headEnd type="none" w="med" len="med"/>
+                      <a:tailEnd type="none" w="med" len="med"/>
+                    </a:lnT>
+                    <a:lnB w="6350" cap="flat" cmpd="sng" algn="ctr">
+                      <a:solidFill>
+                        <a:srgbClr val="CACACA"/>
+                      </a:solidFill>
+                      <a:prstDash val="solid"/>
+                      <a:round/>
+                      <a:headEnd type="none" w="med" len="med"/>
+                      <a:tailEnd type="none" w="med" len="med"/>
+                    </a:lnB>
+                    <a:solidFill>
+                      <a:srgbClr val="C7E3F9"/>
+                    </a:solidFill>
+                  </a:tcPr>
+                </a:tc>
+              </a:tr>
+              <a:tr h="306324">
+                <a:tc>
+                  <a:txBody>
+                    <a:bodyPr/>
+                    <a:lstStyle/>
+                    <a:p>
+                      <a:pPr algn="l" indent="0" marL="0">
+                        <a:buNone/>
+                      </a:pPr>
+                      <a:r>
+                        <a:rPr lang="en-US" sz="800" b="1" dirty="0">
+                          <a:solidFill>
+                            <a:srgbClr val="2B2B2B"/>
+                          </a:solidFill>
+                          <a:latin typeface="Verdana" pitchFamily="34" charset="0"/>
+                          <a:ea typeface="Verdana" pitchFamily="34" charset="-122"/>
+                          <a:cs typeface="Verdana" pitchFamily="34" charset="-120"/>
+                        </a:rPr>
+                        <a:t>EBA, FINREP (Risk Dashboard)</a:t>
+                      </a:r>
+                      <a:endParaRPr lang="en-US" sz="800" dirty="0">
+                        <a:latin typeface="Verdana" charset="0"/>
+                        <a:ea typeface="Verdana" charset="0"/>
+                        <a:cs typeface="Verdana" charset="0"/>
+                      </a:endParaRPr>
+                    </a:p>
+                  </a:txBody>
+                  <a:tcPr marL="63500" marR="63500" marT="12700" marB="12700" anchor="ctr">
+                    <a:lnL w="6350" cap="flat" cmpd="sng" algn="ctr">
+                      <a:solidFill>
+                        <a:srgbClr val="CACACA"/>
+                      </a:solidFill>
+                      <a:prstDash val="solid"/>
+                      <a:round/>
+                      <a:headEnd type="none" w="med" len="med"/>
+                      <a:tailEnd type="none" w="med" len="med"/>
+                    </a:lnL>
+                    <a:lnR w="6350" cap="flat" cmpd="sng" algn="ctr">
+                      <a:solidFill>
+                        <a:srgbClr val="CACACA"/>
+                      </a:solidFill>
+                      <a:prstDash val="solid"/>
+                      <a:round/>
+                      <a:headEnd type="none" w="med" len="med"/>
+                      <a:tailEnd type="none" w="med" len="med"/>
+                    </a:lnR>
+                    <a:lnT w="6350" cap="flat" cmpd="sng" algn="ctr">
+                      <a:solidFill>
+                        <a:srgbClr val="CACACA"/>
+                      </a:solidFill>
+                      <a:prstDash val="solid"/>
+                      <a:round/>
+                      <a:headEnd type="none" w="med" len="med"/>
+                      <a:tailEnd type="none" w="med" len="med"/>
+                    </a:lnT>
+                    <a:lnB w="6350" cap="flat" cmpd="sng" algn="ctr">
+                      <a:solidFill>
+                        <a:srgbClr val="CACACA"/>
+                      </a:solidFill>
+                      <a:prstDash val="solid"/>
+                      <a:round/>
+                      <a:headEnd type="none" w="med" len="med"/>
+                      <a:tailEnd type="none" w="med" len="med"/>
+                    </a:lnB>
+                    <a:solidFill>
+                      <a:srgbClr val="FFFFFF"/>
+                    </a:solidFill>
+                  </a:tcPr>
+                </a:tc>
+                <a:tc>
+                  <a:txBody>
+                    <a:bodyPr/>
+                    <a:lstStyle/>
+                    <a:p>
+                      <a:pPr algn="l" indent="0" marL="0">
+                        <a:buNone/>
+                      </a:pPr>
+                      <a:r>
+                        <a:rPr lang="en-US" sz="750" dirty="0">
+                          <a:solidFill>
+                            <a:srgbClr val="2B2B2B"/>
+                          </a:solidFill>
+                          <a:latin typeface="Verdana" pitchFamily="34" charset="0"/>
+                          <a:ea typeface="Verdana" pitchFamily="34" charset="-122"/>
+                          <a:cs typeface="Verdana" pitchFamily="34" charset="-120"/>
+                        </a:rPr>
+                        <a:t>Mora de PYME</a:t>
+                      </a:r>
+                      <a:endParaRPr lang="en-US" sz="750" dirty="0">
+                        <a:latin typeface="Verdana" charset="0"/>
+                        <a:ea typeface="Verdana" charset="0"/>
+                        <a:cs typeface="Verdana" charset="0"/>
+                      </a:endParaRPr>
+                    </a:p>
+                  </a:txBody>
+                  <a:tcPr marL="63500" marR="63500" marT="12700" marB="12700" anchor="ctr">
+                    <a:lnL w="6350" cap="flat" cmpd="sng" algn="ctr">
+                      <a:solidFill>
+                        <a:srgbClr val="CACACA"/>
+                      </a:solidFill>
+                      <a:prstDash val="solid"/>
+                      <a:round/>
+                      <a:headEnd type="none" w="med" len="med"/>
+                      <a:tailEnd type="none" w="med" len="med"/>
+                    </a:lnL>
+                    <a:lnR w="6350" cap="flat" cmpd="sng" algn="ctr">
+                      <a:solidFill>
+                        <a:srgbClr val="CACACA"/>
+                      </a:solidFill>
+                      <a:prstDash val="solid"/>
+                      <a:round/>
+                      <a:headEnd type="none" w="med" len="med"/>
+                      <a:tailEnd type="none" w="med" len="med"/>
+                    </a:lnR>
+                    <a:lnT w="6350" cap="flat" cmpd="sng" algn="ctr">
+                      <a:solidFill>
+                        <a:srgbClr val="CACACA"/>
+                      </a:solidFill>
+                      <a:prstDash val="solid"/>
+                      <a:round/>
+                      <a:headEnd type="none" w="med" len="med"/>
+                      <a:tailEnd type="none" w="med" len="med"/>
+                    </a:lnT>
+                    <a:lnB w="6350" cap="flat" cmpd="sng" algn="ctr">
+                      <a:solidFill>
+                        <a:srgbClr val="CACACA"/>
+                      </a:solidFill>
+                      <a:prstDash val="solid"/>
+                      <a:round/>
+                      <a:headEnd type="none" w="med" len="med"/>
+                      <a:tailEnd type="none" w="med" len="med"/>
+                    </a:lnB>
+                    <a:solidFill>
+                      <a:srgbClr val="FFFFFF"/>
+                    </a:solidFill>
+                  </a:tcPr>
+                </a:tc>
+                <a:tc>
+                  <a:txBody>
+                    <a:bodyPr/>
+                    <a:lstStyle/>
+                    <a:p>
+                      <a:pPr algn="l" indent="0" marL="0">
+                        <a:buNone/>
+                      </a:pPr>
+                      <a:r>
+                        <a:rPr lang="en-US" sz="750" b="1" dirty="0">
+                          <a:solidFill>
+                            <a:srgbClr val="2B2B2B"/>
+                          </a:solidFill>
+                          <a:latin typeface="Verdana" pitchFamily="34" charset="0"/>
+                          <a:ea typeface="Verdana" pitchFamily="34" charset="-122"/>
+                          <a:cs typeface="Verdana" pitchFamily="34" charset="-120"/>
+                        </a:rPr>
+                        <a:t>Igual que la estándar</a:t>
+                      </a:r>
+                      <a:endParaRPr lang="en-US" sz="750" dirty="0">
+                        <a:latin typeface="Verdana" charset="0"/>
+                        <a:ea typeface="Verdana" charset="0"/>
+                        <a:cs typeface="Verdana" charset="0"/>
+                      </a:endParaRPr>
+                    </a:p>
+                  </a:txBody>
+                  <a:tcPr marL="63500" marR="63500" marT="12700" marB="12700" anchor="ctr">
+                    <a:lnL w="6350" cap="flat" cmpd="sng" algn="ctr">
+                      <a:solidFill>
+                        <a:srgbClr val="CACACA"/>
+                      </a:solidFill>
+                      <a:prstDash val="solid"/>
+                      <a:round/>
+                      <a:headEnd type="none" w="med" len="med"/>
+                      <a:tailEnd type="none" w="med" len="med"/>
+                    </a:lnL>
+                    <a:lnR w="6350" cap="flat" cmpd="sng" algn="ctr">
+                      <a:solidFill>
+                        <a:srgbClr val="CACACA"/>
+                      </a:solidFill>
+                      <a:prstDash val="solid"/>
+                      <a:round/>
+                      <a:headEnd type="none" w="med" len="med"/>
+                      <a:tailEnd type="none" w="med" len="med"/>
+                    </a:lnR>
+                    <a:lnT w="6350" cap="flat" cmpd="sng" algn="ctr">
+                      <a:solidFill>
+                        <a:srgbClr val="CACACA"/>
+                      </a:solidFill>
+                      <a:prstDash val="solid"/>
+                      <a:round/>
+                      <a:headEnd type="none" w="med" len="med"/>
+                      <a:tailEnd type="none" w="med" len="med"/>
+                    </a:lnT>
+                    <a:lnB w="6350" cap="flat" cmpd="sng" algn="ctr">
+                      <a:solidFill>
+                        <a:srgbClr val="CACACA"/>
+                      </a:solidFill>
+                      <a:prstDash val="solid"/>
+                      <a:round/>
+                      <a:headEnd type="none" w="med" len="med"/>
+                      <a:tailEnd type="none" w="med" len="med"/>
+                    </a:lnB>
+                    <a:solidFill>
+                      <a:srgbClr val="FFFFFF"/>
+                    </a:solidFill>
+                  </a:tcPr>
+                </a:tc>
+                <a:tc>
+                  <a:txBody>
+                    <a:bodyPr/>
+                    <a:lstStyle/>
+                    <a:p>
+                      <a:pPr algn="l" indent="0" marL="0">
+                        <a:buNone/>
+                      </a:pPr>
+                      <a:r>
+                        <a:rPr lang="en-US" sz="750" dirty="0">
+                          <a:solidFill>
+                            <a:srgbClr val="2B2B2B"/>
+                          </a:solidFill>
+                          <a:latin typeface="Verdana" pitchFamily="34" charset="0"/>
+                          <a:ea typeface="Verdana" pitchFamily="34" charset="-122"/>
+                          <a:cs typeface="Verdana" pitchFamily="34" charset="-120"/>
+                        </a:rPr>
+                        <a:t>Anexo V del reglamento de reporting remite a la Recomendación</a:t>
+                      </a:r>
+                      <a:endParaRPr lang="en-US" sz="750" dirty="0">
+                        <a:latin typeface="Verdana" charset="0"/>
+                        <a:ea typeface="Verdana" charset="0"/>
+                        <a:cs typeface="Verdana" charset="0"/>
+                      </a:endParaRPr>
+                    </a:p>
+                  </a:txBody>
+                  <a:tcPr marL="63500" marR="63500" marT="12700" marB="12700" anchor="ctr">
+                    <a:lnL w="6350" cap="flat" cmpd="sng" algn="ctr">
+                      <a:solidFill>
+                        <a:srgbClr val="CACACA"/>
+                      </a:solidFill>
+                      <a:prstDash val="solid"/>
+                      <a:round/>
+                      <a:headEnd type="none" w="med" len="med"/>
+                      <a:tailEnd type="none" w="med" len="med"/>
+                    </a:lnL>
+                    <a:lnR w="6350" cap="flat" cmpd="sng" algn="ctr">
+                      <a:solidFill>
+                        <a:srgbClr val="CACACA"/>
+                      </a:solidFill>
+                      <a:prstDash val="solid"/>
+                      <a:round/>
+                      <a:headEnd type="none" w="med" len="med"/>
+                      <a:tailEnd type="none" w="med" len="med"/>
+                    </a:lnR>
+                    <a:lnT w="6350" cap="flat" cmpd="sng" algn="ctr">
+                      <a:solidFill>
+                        <a:srgbClr val="CACACA"/>
+                      </a:solidFill>
+                      <a:prstDash val="solid"/>
+                      <a:round/>
+                      <a:headEnd type="none" w="med" len="med"/>
+                      <a:tailEnd type="none" w="med" len="med"/>
+                    </a:lnT>
+                    <a:lnB w="6350" cap="flat" cmpd="sng" algn="ctr">
+                      <a:solidFill>
+                        <a:srgbClr val="CACACA"/>
+                      </a:solidFill>
+                      <a:prstDash val="solid"/>
+                      <a:round/>
+                      <a:headEnd type="none" w="med" len="med"/>
+                      <a:tailEnd type="none" w="med" len="med"/>
+                    </a:lnB>
+                    <a:solidFill>
+                      <a:srgbClr val="FFFFFF"/>
+                    </a:solidFill>
+                  </a:tcPr>
+                </a:tc>
+                <a:tc>
+                  <a:txBody>
+                    <a:bodyPr/>
+                    <a:lstStyle/>
+                    <a:p>
+                      <a:pPr algn="ctr" indent="0" marL="0">
+                        <a:buNone/>
+                      </a:pPr>
+                      <a:r>
+                        <a:rPr lang="en-US" sz="750" b="1" dirty="0">
+                          <a:solidFill>
+                            <a:srgbClr val="2B2B2B"/>
+                          </a:solidFill>
+                          <a:latin typeface="Verdana" pitchFamily="34" charset="0"/>
+                          <a:ea typeface="Verdana" pitchFamily="34" charset="-122"/>
+                          <a:cs typeface="Verdana" pitchFamily="34" charset="-120"/>
+                        </a:rPr>
+                        <a:t>Sí, completa</a:t>
+                      </a:r>
+                      <a:endParaRPr lang="en-US" sz="750" dirty="0">
+                        <a:latin typeface="Verdana" charset="0"/>
+                        <a:ea typeface="Verdana" charset="0"/>
+                        <a:cs typeface="Verdana" charset="0"/>
+                      </a:endParaRPr>
+                    </a:p>
+                  </a:txBody>
+                  <a:tcPr marL="63500" marR="63500" marT="12700" marB="12700" anchor="ctr">
+                    <a:lnL w="6350" cap="flat" cmpd="sng" algn="ctr">
+                      <a:solidFill>
+                        <a:srgbClr val="CACACA"/>
+                      </a:solidFill>
+                      <a:prstDash val="solid"/>
+                      <a:round/>
+                      <a:headEnd type="none" w="med" len="med"/>
+                      <a:tailEnd type="none" w="med" len="med"/>
+                    </a:lnL>
+                    <a:lnR w="6350" cap="flat" cmpd="sng" algn="ctr">
+                      <a:solidFill>
+                        <a:srgbClr val="CACACA"/>
+                      </a:solidFill>
+                      <a:prstDash val="solid"/>
+                      <a:round/>
+                      <a:headEnd type="none" w="med" len="med"/>
+                      <a:tailEnd type="none" w="med" len="med"/>
+                    </a:lnR>
+                    <a:lnT w="6350" cap="flat" cmpd="sng" algn="ctr">
+                      <a:solidFill>
+                        <a:srgbClr val="CACACA"/>
+                      </a:solidFill>
+                      <a:prstDash val="solid"/>
+                      <a:round/>
+                      <a:headEnd type="none" w="med" len="med"/>
+                      <a:tailEnd type="none" w="med" len="med"/>
+                    </a:lnT>
+                    <a:lnB w="6350" cap="flat" cmpd="sng" algn="ctr">
+                      <a:solidFill>
+                        <a:srgbClr val="CACACA"/>
+                      </a:solidFill>
+                      <a:prstDash val="solid"/>
+                      <a:round/>
+                      <a:headEnd type="none" w="med" len="med"/>
+                      <a:tailEnd type="none" w="med" len="med"/>
+                    </a:lnB>
+                    <a:solidFill>
+                      <a:srgbClr val="C7E3F9"/>
+                    </a:solidFill>
+                  </a:tcPr>
+                </a:tc>
+              </a:tr>
+              <a:tr h="306324">
+                <a:tc>
+                  <a:txBody>
+                    <a:bodyPr/>
+                    <a:lstStyle/>
+                    <a:p>
+                      <a:pPr algn="l" indent="0" marL="0">
+                        <a:buNone/>
+                      </a:pPr>
+                      <a:r>
+                        <a:rPr lang="en-US" sz="800" b="1" dirty="0">
+                          <a:solidFill>
+                            <a:srgbClr val="2B2B2B"/>
+                          </a:solidFill>
+                          <a:latin typeface="Verdana" pitchFamily="34" charset="0"/>
+                          <a:ea typeface="Verdana" pitchFamily="34" charset="-122"/>
+                          <a:cs typeface="Verdana" pitchFamily="34" charset="-120"/>
+                        </a:rPr>
+                        <a:t>BCE, encuesta SAFE</a:t>
+                      </a:r>
+                      <a:endParaRPr lang="en-US" sz="800" dirty="0">
+                        <a:latin typeface="Verdana" charset="0"/>
+                        <a:ea typeface="Verdana" charset="0"/>
+                        <a:cs typeface="Verdana" charset="0"/>
+                      </a:endParaRPr>
+                    </a:p>
+                  </a:txBody>
+                  <a:tcPr marL="63500" marR="63500" marT="12700" marB="12700" anchor="ctr">
+                    <a:lnL w="6350" cap="flat" cmpd="sng" algn="ctr">
+                      <a:solidFill>
+                        <a:srgbClr val="CACACA"/>
+                      </a:solidFill>
+                      <a:prstDash val="solid"/>
+                      <a:round/>
+                      <a:headEnd type="none" w="med" len="med"/>
+                      <a:tailEnd type="none" w="med" len="med"/>
+                    </a:lnL>
+                    <a:lnR w="6350" cap="flat" cmpd="sng" algn="ctr">
+                      <a:solidFill>
+                        <a:srgbClr val="CACACA"/>
+                      </a:solidFill>
+                      <a:prstDash val="solid"/>
+                      <a:round/>
+                      <a:headEnd type="none" w="med" len="med"/>
+                      <a:tailEnd type="none" w="med" len="med"/>
+                    </a:lnR>
+                    <a:lnT w="6350" cap="flat" cmpd="sng" algn="ctr">
+                      <a:solidFill>
+                        <a:srgbClr val="CACACA"/>
+                      </a:solidFill>
+                      <a:prstDash val="solid"/>
+                      <a:round/>
+                      <a:headEnd type="none" w="med" len="med"/>
+                      <a:tailEnd type="none" w="med" len="med"/>
+                    </a:lnT>
+                    <a:lnB w="6350" cap="flat" cmpd="sng" algn="ctr">
+                      <a:solidFill>
+                        <a:srgbClr val="CACACA"/>
+                      </a:solidFill>
+                      <a:prstDash val="solid"/>
+                      <a:round/>
+                      <a:headEnd type="none" w="med" len="med"/>
+                      <a:tailEnd type="none" w="med" len="med"/>
+                    </a:lnB>
+                    <a:solidFill>
+                      <a:srgbClr val="F4F4F4"/>
+                    </a:solidFill>
+                  </a:tcPr>
+                </a:tc>
+                <a:tc>
+                  <a:txBody>
+                    <a:bodyPr/>
+                    <a:lstStyle/>
+                    <a:p>
+                      <a:pPr algn="l" indent="0" marL="0">
+                        <a:buNone/>
+                      </a:pPr>
+                      <a:r>
+                        <a:rPr lang="en-US" sz="750" dirty="0">
+                          <a:solidFill>
+                            <a:srgbClr val="2B2B2B"/>
+                          </a:solidFill>
+                          <a:latin typeface="Verdana" pitchFamily="34" charset="0"/>
+                          <a:ea typeface="Verdana" pitchFamily="34" charset="-122"/>
+                          <a:cs typeface="Verdana" pitchFamily="34" charset="-120"/>
+                        </a:rPr>
+                        <a:t>Tasa de rechazo, tipo del circulante, brecha de financiación</a:t>
+                      </a:r>
+                      <a:endParaRPr lang="en-US" sz="750" dirty="0">
+                        <a:latin typeface="Verdana" charset="0"/>
+                        <a:ea typeface="Verdana" charset="0"/>
+                        <a:cs typeface="Verdana" charset="0"/>
+                      </a:endParaRPr>
+                    </a:p>
+                  </a:txBody>
+                  <a:tcPr marL="63500" marR="63500" marT="12700" marB="12700" anchor="ctr">
+                    <a:lnL w="6350" cap="flat" cmpd="sng" algn="ctr">
+                      <a:solidFill>
+                        <a:srgbClr val="CACACA"/>
+                      </a:solidFill>
+                      <a:prstDash val="solid"/>
+                      <a:round/>
+                      <a:headEnd type="none" w="med" len="med"/>
+                      <a:tailEnd type="none" w="med" len="med"/>
+                    </a:lnL>
+                    <a:lnR w="6350" cap="flat" cmpd="sng" algn="ctr">
+                      <a:solidFill>
+                        <a:srgbClr val="CACACA"/>
+                      </a:solidFill>
+                      <a:prstDash val="solid"/>
+                      <a:round/>
+                      <a:headEnd type="none" w="med" len="med"/>
+                      <a:tailEnd type="none" w="med" len="med"/>
+                    </a:lnR>
+                    <a:lnT w="6350" cap="flat" cmpd="sng" algn="ctr">
+                      <a:solidFill>
+                        <a:srgbClr val="CACACA"/>
+                      </a:solidFill>
+                      <a:prstDash val="solid"/>
+                      <a:round/>
+                      <a:headEnd type="none" w="med" len="med"/>
+                      <a:tailEnd type="none" w="med" len="med"/>
+                    </a:lnT>
+                    <a:lnB w="6350" cap="flat" cmpd="sng" algn="ctr">
+                      <a:solidFill>
+                        <a:srgbClr val="CACACA"/>
+                      </a:solidFill>
+                      <a:prstDash val="solid"/>
+                      <a:round/>
+                      <a:headEnd type="none" w="med" len="med"/>
+                      <a:tailEnd type="none" w="med" len="med"/>
+                    </a:lnB>
+                    <a:solidFill>
+                      <a:srgbClr val="F4F4F4"/>
+                    </a:solidFill>
+                  </a:tcPr>
+                </a:tc>
+                <a:tc>
+                  <a:txBody>
+                    <a:bodyPr/>
+                    <a:lstStyle/>
+                    <a:p>
+                      <a:pPr algn="l" indent="0" marL="0">
+                        <a:buNone/>
+                      </a:pPr>
+                      <a:r>
+                        <a:rPr lang="en-US" sz="750" b="1" dirty="0">
+                          <a:solidFill>
+                            <a:srgbClr val="2B2B2B"/>
+                          </a:solidFill>
+                          <a:latin typeface="Verdana" pitchFamily="34" charset="0"/>
+                          <a:ea typeface="Verdana" pitchFamily="34" charset="-122"/>
+                          <a:cs typeface="Verdana" pitchFamily="34" charset="-120"/>
+                        </a:rPr>
+                        <a:t>Empleados</a:t>
+                      </a:r>
+                      <a:endParaRPr lang="en-US" sz="750" dirty="0">
+                        <a:latin typeface="Verdana" charset="0"/>
+                        <a:ea typeface="Verdana" charset="0"/>
+                        <a:cs typeface="Verdana" charset="0"/>
+                      </a:endParaRPr>
+                    </a:p>
+                  </a:txBody>
+                  <a:tcPr marL="63500" marR="63500" marT="12700" marB="12700" anchor="ctr">
+                    <a:lnL w="6350" cap="flat" cmpd="sng" algn="ctr">
+                      <a:solidFill>
+                        <a:srgbClr val="CACACA"/>
+                      </a:solidFill>
+                      <a:prstDash val="solid"/>
+                      <a:round/>
+                      <a:headEnd type="none" w="med" len="med"/>
+                      <a:tailEnd type="none" w="med" len="med"/>
+                    </a:lnL>
+                    <a:lnR w="6350" cap="flat" cmpd="sng" algn="ctr">
+                      <a:solidFill>
+                        <a:srgbClr val="CACACA"/>
+                      </a:solidFill>
+                      <a:prstDash val="solid"/>
+                      <a:round/>
+                      <a:headEnd type="none" w="med" len="med"/>
+                      <a:tailEnd type="none" w="med" len="med"/>
+                    </a:lnR>
+                    <a:lnT w="6350" cap="flat" cmpd="sng" algn="ctr">
+                      <a:solidFill>
+                        <a:srgbClr val="CACACA"/>
+                      </a:solidFill>
+                      <a:prstDash val="solid"/>
+                      <a:round/>
+                      <a:headEnd type="none" w="med" len="med"/>
+                      <a:tailEnd type="none" w="med" len="med"/>
+                    </a:lnT>
+                    <a:lnB w="6350" cap="flat" cmpd="sng" algn="ctr">
+                      <a:solidFill>
+                        <a:srgbClr val="CACACA"/>
+                      </a:solidFill>
+                      <a:prstDash val="solid"/>
+                      <a:round/>
+                      <a:headEnd type="none" w="med" len="med"/>
+                      <a:tailEnd type="none" w="med" len="med"/>
+                    </a:lnB>
+                    <a:solidFill>
+                      <a:srgbClr val="F4F4F4"/>
+                    </a:solidFill>
+                  </a:tcPr>
+                </a:tc>
+                <a:tc>
+                  <a:txBody>
+                    <a:bodyPr/>
+                    <a:lstStyle/>
+                    <a:p>
+                      <a:pPr algn="l" indent="0" marL="0">
+                        <a:buNone/>
+                      </a:pPr>
+                      <a:r>
+                        <a:rPr lang="en-US" sz="750" dirty="0">
+                          <a:solidFill>
+                            <a:srgbClr val="2B2B2B"/>
+                          </a:solidFill>
+                          <a:latin typeface="Verdana" pitchFamily="34" charset="0"/>
+                          <a:ea typeface="Verdana" pitchFamily="34" charset="-122"/>
+                          <a:cs typeface="Verdana" pitchFamily="34" charset="-120"/>
+                        </a:rPr>
+                        <a:t>Menos de 250 empleados; no mira facturación ni balance</a:t>
+                      </a:r>
+                      <a:endParaRPr lang="en-US" sz="750" dirty="0">
+                        <a:latin typeface="Verdana" charset="0"/>
+                        <a:ea typeface="Verdana" charset="0"/>
+                        <a:cs typeface="Verdana" charset="0"/>
+                      </a:endParaRPr>
+                    </a:p>
+                  </a:txBody>
+                  <a:tcPr marL="63500" marR="63500" marT="12700" marB="12700" anchor="ctr">
+                    <a:lnL w="6350" cap="flat" cmpd="sng" algn="ctr">
+                      <a:solidFill>
+                        <a:srgbClr val="CACACA"/>
+                      </a:solidFill>
+                      <a:prstDash val="solid"/>
+                      <a:round/>
+                      <a:headEnd type="none" w="med" len="med"/>
+                      <a:tailEnd type="none" w="med" len="med"/>
+                    </a:lnL>
+                    <a:lnR w="6350" cap="flat" cmpd="sng" algn="ctr">
+                      <a:solidFill>
+                        <a:srgbClr val="CACACA"/>
+                      </a:solidFill>
+                      <a:prstDash val="solid"/>
+                      <a:round/>
+                      <a:headEnd type="none" w="med" len="med"/>
+                      <a:tailEnd type="none" w="med" len="med"/>
+                    </a:lnR>
+                    <a:lnT w="6350" cap="flat" cmpd="sng" algn="ctr">
+                      <a:solidFill>
+                        <a:srgbClr val="CACACA"/>
+                      </a:solidFill>
+                      <a:prstDash val="solid"/>
+                      <a:round/>
+                      <a:headEnd type="none" w="med" len="med"/>
+                      <a:tailEnd type="none" w="med" len="med"/>
+                    </a:lnT>
+                    <a:lnB w="6350" cap="flat" cmpd="sng" algn="ctr">
+                      <a:solidFill>
+                        <a:srgbClr val="CACACA"/>
+                      </a:solidFill>
+                      <a:prstDash val="solid"/>
+                      <a:round/>
+                      <a:headEnd type="none" w="med" len="med"/>
+                      <a:tailEnd type="none" w="med" len="med"/>
+                    </a:lnB>
+                    <a:solidFill>
+                      <a:srgbClr val="F4F4F4"/>
+                    </a:solidFill>
+                  </a:tcPr>
+                </a:tc>
+                <a:tc>
+                  <a:txBody>
+                    <a:bodyPr/>
+                    <a:lstStyle/>
+                    <a:p>
+                      <a:pPr algn="ctr" indent="0" marL="0">
+                        <a:buNone/>
+                      </a:pPr>
+                      <a:r>
+                        <a:rPr lang="en-US" sz="750" b="1" dirty="0">
+                          <a:solidFill>
+                            <a:srgbClr val="2B2B2B"/>
+                          </a:solidFill>
+                          <a:latin typeface="Verdana" pitchFamily="34" charset="0"/>
+                          <a:ea typeface="Verdana" pitchFamily="34" charset="-122"/>
+                          <a:cs typeface="Verdana" pitchFamily="34" charset="-120"/>
+                        </a:rPr>
+                        <a:t>Solo un criterio</a:t>
+                      </a:r>
+                      <a:endParaRPr lang="en-US" sz="750" dirty="0">
+                        <a:latin typeface="Verdana" charset="0"/>
+                        <a:ea typeface="Verdana" charset="0"/>
+                        <a:cs typeface="Verdana" charset="0"/>
+                      </a:endParaRPr>
+                    </a:p>
+                  </a:txBody>
+                  <a:tcPr marL="63500" marR="63500" marT="12700" marB="12700" anchor="ctr">
+                    <a:lnL w="6350" cap="flat" cmpd="sng" algn="ctr">
+                      <a:solidFill>
+                        <a:srgbClr val="CACACA"/>
+                      </a:solidFill>
+                      <a:prstDash val="solid"/>
+                      <a:round/>
+                      <a:headEnd type="none" w="med" len="med"/>
+                      <a:tailEnd type="none" w="med" len="med"/>
+                    </a:lnL>
+                    <a:lnR w="6350" cap="flat" cmpd="sng" algn="ctr">
+                      <a:solidFill>
+                        <a:srgbClr val="CACACA"/>
+                      </a:solidFill>
+                      <a:prstDash val="solid"/>
+                      <a:round/>
+                      <a:headEnd type="none" w="med" len="med"/>
+                      <a:tailEnd type="none" w="med" len="med"/>
+                    </a:lnR>
+                    <a:lnT w="6350" cap="flat" cmpd="sng" algn="ctr">
+                      <a:solidFill>
+                        <a:srgbClr val="CACACA"/>
+                      </a:solidFill>
+                      <a:prstDash val="solid"/>
+                      <a:round/>
+                      <a:headEnd type="none" w="med" len="med"/>
+                      <a:tailEnd type="none" w="med" len="med"/>
+                    </a:lnT>
+                    <a:lnB w="6350" cap="flat" cmpd="sng" algn="ctr">
+                      <a:solidFill>
+                        <a:srgbClr val="CACACA"/>
+                      </a:solidFill>
+                      <a:prstDash val="solid"/>
+                      <a:round/>
+                      <a:headEnd type="none" w="med" len="med"/>
+                      <a:tailEnd type="none" w="med" len="med"/>
+                    </a:lnB>
+                    <a:solidFill>
+                      <a:srgbClr val="FFD6BA"/>
+                    </a:solidFill>
+                  </a:tcPr>
+                </a:tc>
+              </a:tr>
+              <a:tr h="306324">
+                <a:tc>
+                  <a:txBody>
+                    <a:bodyPr/>
+                    <a:lstStyle/>
+                    <a:p>
+                      <a:pPr algn="l" indent="0" marL="0">
+                        <a:buNone/>
+                      </a:pPr>
+                      <a:r>
+                        <a:rPr lang="en-US" sz="800" b="1" dirty="0">
+                          <a:solidFill>
+                            <a:srgbClr val="2B2B2B"/>
+                          </a:solidFill>
+                          <a:latin typeface="Verdana" pitchFamily="34" charset="0"/>
+                          <a:ea typeface="Verdana" pitchFamily="34" charset="-122"/>
+                          <a:cs typeface="Verdana" pitchFamily="34" charset="-120"/>
+                        </a:rPr>
+                        <a:t>CESGAR</a:t>
+                      </a:r>
+                      <a:endParaRPr lang="en-US" sz="800" dirty="0">
+                        <a:latin typeface="Verdana" charset="0"/>
+                        <a:ea typeface="Verdana" charset="0"/>
+                        <a:cs typeface="Verdana" charset="0"/>
+                      </a:endParaRPr>
+                    </a:p>
+                  </a:txBody>
+                  <a:tcPr marL="63500" marR="63500" marT="12700" marB="12700" anchor="ctr">
+                    <a:lnL w="6350" cap="flat" cmpd="sng" algn="ctr">
+                      <a:solidFill>
+                        <a:srgbClr val="CACACA"/>
+                      </a:solidFill>
+                      <a:prstDash val="solid"/>
+                      <a:round/>
+                      <a:headEnd type="none" w="med" len="med"/>
+                      <a:tailEnd type="none" w="med" len="med"/>
+                    </a:lnL>
+                    <a:lnR w="6350" cap="flat" cmpd="sng" algn="ctr">
+                      <a:solidFill>
+                        <a:srgbClr val="CACACA"/>
+                      </a:solidFill>
+                      <a:prstDash val="solid"/>
+                      <a:round/>
+                      <a:headEnd type="none" w="med" len="med"/>
+                      <a:tailEnd type="none" w="med" len="med"/>
+                    </a:lnR>
+                    <a:lnT w="6350" cap="flat" cmpd="sng" algn="ctr">
+                      <a:solidFill>
+                        <a:srgbClr val="CACACA"/>
+                      </a:solidFill>
+                      <a:prstDash val="solid"/>
+                      <a:round/>
+                      <a:headEnd type="none" w="med" len="med"/>
+                      <a:tailEnd type="none" w="med" len="med"/>
+                    </a:lnT>
+                    <a:lnB w="6350" cap="flat" cmpd="sng" algn="ctr">
+                      <a:solidFill>
+                        <a:srgbClr val="CACACA"/>
+                      </a:solidFill>
+                      <a:prstDash val="solid"/>
+                      <a:round/>
+                      <a:headEnd type="none" w="med" len="med"/>
+                      <a:tailEnd type="none" w="med" len="med"/>
+                    </a:lnB>
+                    <a:solidFill>
+                      <a:srgbClr val="FFFFFF"/>
+                    </a:solidFill>
+                  </a:tcPr>
+                </a:tc>
+                <a:tc>
+                  <a:txBody>
+                    <a:bodyPr/>
+                    <a:lstStyle/>
+                    <a:p>
+                      <a:pPr algn="l" indent="0" marL="0">
+                        <a:buNone/>
+                      </a:pPr>
+                      <a:r>
+                        <a:rPr lang="en-US" sz="750" dirty="0">
+                          <a:solidFill>
+                            <a:srgbClr val="2B2B2B"/>
+                          </a:solidFill>
+                          <a:latin typeface="Verdana" pitchFamily="34" charset="0"/>
+                          <a:ea typeface="Verdana" pitchFamily="34" charset="-122"/>
+                          <a:cs typeface="Verdana" pitchFamily="34" charset="-120"/>
+                        </a:rPr>
+                        <a:t>Demanda, obstáculos y destino de la financiación</a:t>
+                      </a:r>
+                      <a:endParaRPr lang="en-US" sz="750" dirty="0">
+                        <a:latin typeface="Verdana" charset="0"/>
+                        <a:ea typeface="Verdana" charset="0"/>
+                        <a:cs typeface="Verdana" charset="0"/>
+                      </a:endParaRPr>
+                    </a:p>
+                  </a:txBody>
+                  <a:tcPr marL="63500" marR="63500" marT="12700" marB="12700" anchor="ctr">
+                    <a:lnL w="6350" cap="flat" cmpd="sng" algn="ctr">
+                      <a:solidFill>
+                        <a:srgbClr val="CACACA"/>
+                      </a:solidFill>
+                      <a:prstDash val="solid"/>
+                      <a:round/>
+                      <a:headEnd type="none" w="med" len="med"/>
+                      <a:tailEnd type="none" w="med" len="med"/>
+                    </a:lnL>
+                    <a:lnR w="6350" cap="flat" cmpd="sng" algn="ctr">
+                      <a:solidFill>
+                        <a:srgbClr val="CACACA"/>
+                      </a:solidFill>
+                      <a:prstDash val="solid"/>
+                      <a:round/>
+                      <a:headEnd type="none" w="med" len="med"/>
+                      <a:tailEnd type="none" w="med" len="med"/>
+                    </a:lnR>
+                    <a:lnT w="6350" cap="flat" cmpd="sng" algn="ctr">
+                      <a:solidFill>
+                        <a:srgbClr val="CACACA"/>
+                      </a:solidFill>
+                      <a:prstDash val="solid"/>
+                      <a:round/>
+                      <a:headEnd type="none" w="med" len="med"/>
+                      <a:tailEnd type="none" w="med" len="med"/>
+                    </a:lnT>
+                    <a:lnB w="6350" cap="flat" cmpd="sng" algn="ctr">
+                      <a:solidFill>
+                        <a:srgbClr val="CACACA"/>
+                      </a:solidFill>
+                      <a:prstDash val="solid"/>
+                      <a:round/>
+                      <a:headEnd type="none" w="med" len="med"/>
+                      <a:tailEnd type="none" w="med" len="med"/>
+                    </a:lnB>
+                    <a:solidFill>
+                      <a:srgbClr val="FFFFFF"/>
+                    </a:solidFill>
+                  </a:tcPr>
+                </a:tc>
+                <a:tc>
+                  <a:txBody>
+                    <a:bodyPr/>
+                    <a:lstStyle/>
+                    <a:p>
+                      <a:pPr algn="l" indent="0" marL="0">
+                        <a:buNone/>
+                      </a:pPr>
+                      <a:r>
+                        <a:rPr lang="en-US" sz="750" b="1" dirty="0">
+                          <a:solidFill>
+                            <a:srgbClr val="2B2B2B"/>
+                          </a:solidFill>
+                          <a:latin typeface="Verdana" pitchFamily="34" charset="0"/>
+                          <a:ea typeface="Verdana" pitchFamily="34" charset="-122"/>
+                          <a:cs typeface="Verdana" pitchFamily="34" charset="-120"/>
+                        </a:rPr>
+                        <a:t>Empleados</a:t>
+                      </a:r>
+                      <a:endParaRPr lang="en-US" sz="750" dirty="0">
+                        <a:latin typeface="Verdana" charset="0"/>
+                        <a:ea typeface="Verdana" charset="0"/>
+                        <a:cs typeface="Verdana" charset="0"/>
+                      </a:endParaRPr>
+                    </a:p>
+                  </a:txBody>
+                  <a:tcPr marL="63500" marR="63500" marT="12700" marB="12700" anchor="ctr">
+                    <a:lnL w="6350" cap="flat" cmpd="sng" algn="ctr">
+                      <a:solidFill>
+                        <a:srgbClr val="CACACA"/>
+                      </a:solidFill>
+                      <a:prstDash val="solid"/>
+                      <a:round/>
+                      <a:headEnd type="none" w="med" len="med"/>
+                      <a:tailEnd type="none" w="med" len="med"/>
+                    </a:lnL>
+                    <a:lnR w="6350" cap="flat" cmpd="sng" algn="ctr">
+                      <a:solidFill>
+                        <a:srgbClr val="CACACA"/>
+                      </a:solidFill>
+                      <a:prstDash val="solid"/>
+                      <a:round/>
+                      <a:headEnd type="none" w="med" len="med"/>
+                      <a:tailEnd type="none" w="med" len="med"/>
+                    </a:lnR>
+                    <a:lnT w="6350" cap="flat" cmpd="sng" algn="ctr">
+                      <a:solidFill>
+                        <a:srgbClr val="CACACA"/>
+                      </a:solidFill>
+                      <a:prstDash val="solid"/>
+                      <a:round/>
+                      <a:headEnd type="none" w="med" len="med"/>
+                      <a:tailEnd type="none" w="med" len="med"/>
+                    </a:lnT>
+                    <a:lnB w="6350" cap="flat" cmpd="sng" algn="ctr">
+                      <a:solidFill>
+                        <a:srgbClr val="CACACA"/>
+                      </a:solidFill>
+                      <a:prstDash val="solid"/>
+                      <a:round/>
+                      <a:headEnd type="none" w="med" len="med"/>
+                      <a:tailEnd type="none" w="med" len="med"/>
+                    </a:lnB>
+                    <a:solidFill>
+                      <a:srgbClr val="FFFFFF"/>
+                    </a:solidFill>
+                  </a:tcPr>
+                </a:tc>
+                <a:tc>
+                  <a:txBody>
+                    <a:bodyPr/>
+                    <a:lstStyle/>
+                    <a:p>
+                      <a:pPr algn="l" indent="0" marL="0">
+                        <a:buNone/>
+                      </a:pPr>
+                      <a:r>
+                        <a:rPr lang="en-US" sz="750" dirty="0">
+                          <a:solidFill>
+                            <a:srgbClr val="2B2B2B"/>
+                          </a:solidFill>
+                          <a:latin typeface="Verdana" pitchFamily="34" charset="0"/>
+                          <a:ea typeface="Verdana" pitchFamily="34" charset="-122"/>
+                          <a:cs typeface="Verdana" pitchFamily="34" charset="-120"/>
+                        </a:rPr>
+                        <a:t>Menos de 250 empleados, e INCLUYE personas físicas (autónomos)</a:t>
+                      </a:r>
+                      <a:endParaRPr lang="en-US" sz="750" dirty="0">
+                        <a:latin typeface="Verdana" charset="0"/>
+                        <a:ea typeface="Verdana" charset="0"/>
+                        <a:cs typeface="Verdana" charset="0"/>
+                      </a:endParaRPr>
+                    </a:p>
+                  </a:txBody>
+                  <a:tcPr marL="63500" marR="63500" marT="12700" marB="12700" anchor="ctr">
+                    <a:lnL w="6350" cap="flat" cmpd="sng" algn="ctr">
+                      <a:solidFill>
+                        <a:srgbClr val="CACACA"/>
+                      </a:solidFill>
+                      <a:prstDash val="solid"/>
+                      <a:round/>
+                      <a:headEnd type="none" w="med" len="med"/>
+                      <a:tailEnd type="none" w="med" len="med"/>
+                    </a:lnL>
+                    <a:lnR w="6350" cap="flat" cmpd="sng" algn="ctr">
+                      <a:solidFill>
+                        <a:srgbClr val="CACACA"/>
+                      </a:solidFill>
+                      <a:prstDash val="solid"/>
+                      <a:round/>
+                      <a:headEnd type="none" w="med" len="med"/>
+                      <a:tailEnd type="none" w="med" len="med"/>
+                    </a:lnR>
+                    <a:lnT w="6350" cap="flat" cmpd="sng" algn="ctr">
+                      <a:solidFill>
+                        <a:srgbClr val="CACACA"/>
+                      </a:solidFill>
+                      <a:prstDash val="solid"/>
+                      <a:round/>
+                      <a:headEnd type="none" w="med" len="med"/>
+                      <a:tailEnd type="none" w="med" len="med"/>
+                    </a:lnT>
+                    <a:lnB w="6350" cap="flat" cmpd="sng" algn="ctr">
+                      <a:solidFill>
+                        <a:srgbClr val="CACACA"/>
+                      </a:solidFill>
+                      <a:prstDash val="solid"/>
+                      <a:round/>
+                      <a:headEnd type="none" w="med" len="med"/>
+                      <a:tailEnd type="none" w="med" len="med"/>
+                    </a:lnB>
+                    <a:solidFill>
+                      <a:srgbClr val="FFFFFF"/>
+                    </a:solidFill>
+                  </a:tcPr>
+                </a:tc>
+                <a:tc>
+                  <a:txBody>
+                    <a:bodyPr/>
+                    <a:lstStyle/>
+                    <a:p>
+                      <a:pPr algn="ctr" indent="0" marL="0">
+                        <a:buNone/>
+                      </a:pPr>
+                      <a:r>
+                        <a:rPr lang="en-US" sz="750" b="1" dirty="0">
+                          <a:solidFill>
+                            <a:srgbClr val="2B2B2B"/>
+                          </a:solidFill>
+                          <a:latin typeface="Verdana" pitchFamily="34" charset="0"/>
+                          <a:ea typeface="Verdana" pitchFamily="34" charset="-122"/>
+                          <a:cs typeface="Verdana" pitchFamily="34" charset="-120"/>
+                        </a:rPr>
+                        <a:t>Solo un criterio</a:t>
+                      </a:r>
+                      <a:endParaRPr lang="en-US" sz="750" dirty="0">
+                        <a:latin typeface="Verdana" charset="0"/>
+                        <a:ea typeface="Verdana" charset="0"/>
+                        <a:cs typeface="Verdana" charset="0"/>
+                      </a:endParaRPr>
+                    </a:p>
+                    <a:p>
+                      <a:pPr algn="ctr" indent="0" marL="0">
+                        <a:buNone/>
+                      </a:pPr>
+                      <a:r>
+                        <a:rPr lang="en-US" sz="750" b="1" dirty="0">
+                          <a:solidFill>
+                            <a:srgbClr val="2B2B2B"/>
+                          </a:solidFill>
+                          <a:latin typeface="Verdana" pitchFamily="34" charset="0"/>
+                          <a:ea typeface="Verdana" pitchFamily="34" charset="-122"/>
+                          <a:cs typeface="Verdana" pitchFamily="34" charset="-120"/>
+                        </a:rPr>
+                        <a:t>(añade autónomos)</a:t>
+                      </a:r>
+                      <a:endParaRPr lang="en-US" sz="750" dirty="0">
+                        <a:latin typeface="Verdana" charset="0"/>
+                        <a:ea typeface="Verdana" charset="0"/>
+                        <a:cs typeface="Verdana" charset="0"/>
+                      </a:endParaRPr>
+                    </a:p>
+                  </a:txBody>
+                  <a:tcPr marL="63500" marR="63500" marT="12700" marB="12700" anchor="ctr">
+                    <a:lnL w="6350" cap="flat" cmpd="sng" algn="ctr">
+                      <a:solidFill>
+                        <a:srgbClr val="CACACA"/>
+                      </a:solidFill>
+                      <a:prstDash val="solid"/>
+                      <a:round/>
+                      <a:headEnd type="none" w="med" len="med"/>
+                      <a:tailEnd type="none" w="med" len="med"/>
+                    </a:lnL>
+                    <a:lnR w="6350" cap="flat" cmpd="sng" algn="ctr">
+                      <a:solidFill>
+                        <a:srgbClr val="CACACA"/>
+                      </a:solidFill>
+                      <a:prstDash val="solid"/>
+                      <a:round/>
+                      <a:headEnd type="none" w="med" len="med"/>
+                      <a:tailEnd type="none" w="med" len="med"/>
+                    </a:lnR>
+                    <a:lnT w="6350" cap="flat" cmpd="sng" algn="ctr">
+                      <a:solidFill>
+                        <a:srgbClr val="CACACA"/>
+                      </a:solidFill>
+                      <a:prstDash val="solid"/>
+                      <a:round/>
+                      <a:headEnd type="none" w="med" len="med"/>
+                      <a:tailEnd type="none" w="med" len="med"/>
+                    </a:lnT>
+                    <a:lnB w="6350" cap="flat" cmpd="sng" algn="ctr">
+                      <a:solidFill>
+                        <a:srgbClr val="CACACA"/>
+                      </a:solidFill>
+                      <a:prstDash val="solid"/>
+                      <a:round/>
+                      <a:headEnd type="none" w="med" len="med"/>
+                      <a:tailEnd type="none" w="med" len="med"/>
+                    </a:lnB>
+                    <a:solidFill>
+                      <a:srgbClr val="FFD6BA"/>
+                    </a:solidFill>
+                  </a:tcPr>
+                </a:tc>
+              </a:tr>
+              <a:tr h="306324">
+                <a:tc>
+                  <a:txBody>
+                    <a:bodyPr/>
+                    <a:lstStyle/>
+                    <a:p>
+                      <a:pPr algn="l" indent="0" marL="0">
+                        <a:buNone/>
+                      </a:pPr>
+                      <a:r>
+                        <a:rPr lang="en-US" sz="800" b="1" dirty="0">
+                          <a:solidFill>
+                            <a:srgbClr val="2B2B2B"/>
+                          </a:solidFill>
+                          <a:latin typeface="Verdana" pitchFamily="34" charset="0"/>
+                          <a:ea typeface="Verdana" pitchFamily="34" charset="-122"/>
+                          <a:cs typeface="Verdana" pitchFamily="34" charset="-120"/>
+                        </a:rPr>
+                        <a:t>EBA, COREP, método estándar</a:t>
+                      </a:r>
+                      <a:endParaRPr lang="en-US" sz="800" dirty="0">
+                        <a:latin typeface="Verdana" charset="0"/>
+                        <a:ea typeface="Verdana" charset="0"/>
+                        <a:cs typeface="Verdana" charset="0"/>
+                      </a:endParaRPr>
+                    </a:p>
+                  </a:txBody>
+                  <a:tcPr marL="63500" marR="63500" marT="12700" marB="12700" anchor="ctr">
+                    <a:lnL w="6350" cap="flat" cmpd="sng" algn="ctr">
+                      <a:solidFill>
+                        <a:srgbClr val="CACACA"/>
+                      </a:solidFill>
+                      <a:prstDash val="solid"/>
+                      <a:round/>
+                      <a:headEnd type="none" w="med" len="med"/>
+                      <a:tailEnd type="none" w="med" len="med"/>
+                    </a:lnL>
+                    <a:lnR w="6350" cap="flat" cmpd="sng" algn="ctr">
+                      <a:solidFill>
+                        <a:srgbClr val="CACACA"/>
+                      </a:solidFill>
+                      <a:prstDash val="solid"/>
+                      <a:round/>
+                      <a:headEnd type="none" w="med" len="med"/>
+                      <a:tailEnd type="none" w="med" len="med"/>
+                    </a:lnR>
+                    <a:lnT w="6350" cap="flat" cmpd="sng" algn="ctr">
+                      <a:solidFill>
+                        <a:srgbClr val="CACACA"/>
+                      </a:solidFill>
+                      <a:prstDash val="solid"/>
+                      <a:round/>
+                      <a:headEnd type="none" w="med" len="med"/>
+                      <a:tailEnd type="none" w="med" len="med"/>
+                    </a:lnT>
+                    <a:lnB w="6350" cap="flat" cmpd="sng" algn="ctr">
+                      <a:solidFill>
+                        <a:srgbClr val="CACACA"/>
+                      </a:solidFill>
+                      <a:prstDash val="solid"/>
+                      <a:round/>
+                      <a:headEnd type="none" w="med" len="med"/>
+                      <a:tailEnd type="none" w="med" len="med"/>
+                    </a:lnB>
+                    <a:solidFill>
+                      <a:srgbClr val="F4F4F4"/>
+                    </a:solidFill>
+                  </a:tcPr>
+                </a:tc>
+                <a:tc>
+                  <a:txBody>
+                    <a:bodyPr/>
+                    <a:lstStyle/>
+                    <a:p>
+                      <a:pPr algn="l" indent="0" marL="0">
+                        <a:buNone/>
+                      </a:pPr>
+                      <a:r>
+                        <a:rPr lang="en-US" sz="750" dirty="0">
+                          <a:solidFill>
+                            <a:srgbClr val="2B2B2B"/>
+                          </a:solidFill>
+                          <a:latin typeface="Verdana" pitchFamily="34" charset="0"/>
+                          <a:ea typeface="Verdana" pitchFamily="34" charset="-122"/>
+                          <a:cs typeface="Verdana" pitchFamily="34" charset="-120"/>
+                        </a:rPr>
+                        <a:t>Densidad de RWA, parte estándar</a:t>
+                      </a:r>
+                      <a:endParaRPr lang="en-US" sz="750" dirty="0">
+                        <a:latin typeface="Verdana" charset="0"/>
+                        <a:ea typeface="Verdana" charset="0"/>
+                        <a:cs typeface="Verdana" charset="0"/>
+                      </a:endParaRPr>
+                    </a:p>
+                  </a:txBody>
+                  <a:tcPr marL="63500" marR="63500" marT="12700" marB="12700" anchor="ctr">
+                    <a:lnL w="6350" cap="flat" cmpd="sng" algn="ctr">
+                      <a:solidFill>
+                        <a:srgbClr val="CACACA"/>
+                      </a:solidFill>
+                      <a:prstDash val="solid"/>
+                      <a:round/>
+                      <a:headEnd type="none" w="med" len="med"/>
+                      <a:tailEnd type="none" w="med" len="med"/>
+                    </a:lnL>
+                    <a:lnR w="6350" cap="flat" cmpd="sng" algn="ctr">
+                      <a:solidFill>
+                        <a:srgbClr val="CACACA"/>
+                      </a:solidFill>
+                      <a:prstDash val="solid"/>
+                      <a:round/>
+                      <a:headEnd type="none" w="med" len="med"/>
+                      <a:tailEnd type="none" w="med" len="med"/>
+                    </a:lnR>
+                    <a:lnT w="6350" cap="flat" cmpd="sng" algn="ctr">
+                      <a:solidFill>
+                        <a:srgbClr val="CACACA"/>
+                      </a:solidFill>
+                      <a:prstDash val="solid"/>
+                      <a:round/>
+                      <a:headEnd type="none" w="med" len="med"/>
+                      <a:tailEnd type="none" w="med" len="med"/>
+                    </a:lnT>
+                    <a:lnB w="6350" cap="flat" cmpd="sng" algn="ctr">
+                      <a:solidFill>
+                        <a:srgbClr val="CACACA"/>
+                      </a:solidFill>
+                      <a:prstDash val="solid"/>
+                      <a:round/>
+                      <a:headEnd type="none" w="med" len="med"/>
+                      <a:tailEnd type="none" w="med" len="med"/>
+                    </a:lnB>
+                    <a:solidFill>
+                      <a:srgbClr val="F4F4F4"/>
+                    </a:solidFill>
+                  </a:tcPr>
+                </a:tc>
+                <a:tc>
+                  <a:txBody>
+                    <a:bodyPr/>
+                    <a:lstStyle/>
+                    <a:p>
+                      <a:pPr algn="l" indent="0" marL="0">
+                        <a:buNone/>
+                      </a:pPr>
+                      <a:r>
+                        <a:rPr lang="en-US" sz="750" b="1" dirty="0">
+                          <a:solidFill>
+                            <a:srgbClr val="2B2B2B"/>
+                          </a:solidFill>
+                          <a:latin typeface="Verdana" pitchFamily="34" charset="0"/>
+                          <a:ea typeface="Verdana" pitchFamily="34" charset="-122"/>
+                          <a:cs typeface="Verdana" pitchFamily="34" charset="-120"/>
+                        </a:rPr>
+                        <a:t>Facturación</a:t>
+                      </a:r>
+                      <a:endParaRPr lang="en-US" sz="750" dirty="0">
+                        <a:latin typeface="Verdana" charset="0"/>
+                        <a:ea typeface="Verdana" charset="0"/>
+                        <a:cs typeface="Verdana" charset="0"/>
+                      </a:endParaRPr>
+                    </a:p>
+                  </a:txBody>
+                  <a:tcPr marL="63500" marR="63500" marT="12700" marB="12700" anchor="ctr">
+                    <a:lnL w="6350" cap="flat" cmpd="sng" algn="ctr">
+                      <a:solidFill>
+                        <a:srgbClr val="CACACA"/>
+                      </a:solidFill>
+                      <a:prstDash val="solid"/>
+                      <a:round/>
+                      <a:headEnd type="none" w="med" len="med"/>
+                      <a:tailEnd type="none" w="med" len="med"/>
+                    </a:lnL>
+                    <a:lnR w="6350" cap="flat" cmpd="sng" algn="ctr">
+                      <a:solidFill>
+                        <a:srgbClr val="CACACA"/>
+                      </a:solidFill>
+                      <a:prstDash val="solid"/>
+                      <a:round/>
+                      <a:headEnd type="none" w="med" len="med"/>
+                      <a:tailEnd type="none" w="med" len="med"/>
+                    </a:lnR>
+                    <a:lnT w="6350" cap="flat" cmpd="sng" algn="ctr">
+                      <a:solidFill>
+                        <a:srgbClr val="CACACA"/>
+                      </a:solidFill>
+                      <a:prstDash val="solid"/>
+                      <a:round/>
+                      <a:headEnd type="none" w="med" len="med"/>
+                      <a:tailEnd type="none" w="med" len="med"/>
+                    </a:lnT>
+                    <a:lnB w="6350" cap="flat" cmpd="sng" algn="ctr">
+                      <a:solidFill>
+                        <a:srgbClr val="CACACA"/>
+                      </a:solidFill>
+                      <a:prstDash val="solid"/>
+                      <a:round/>
+                      <a:headEnd type="none" w="med" len="med"/>
+                      <a:tailEnd type="none" w="med" len="med"/>
+                    </a:lnB>
+                    <a:solidFill>
+                      <a:srgbClr val="F4F4F4"/>
+                    </a:solidFill>
+                  </a:tcPr>
+                </a:tc>
+                <a:tc>
+                  <a:txBody>
+                    <a:bodyPr/>
+                    <a:lstStyle/>
+                    <a:p>
+                      <a:pPr algn="l" indent="0" marL="0">
+                        <a:buNone/>
+                      </a:pPr>
+                      <a:r>
+                        <a:rPr lang="en-US" sz="750" dirty="0">
+                          <a:solidFill>
+                            <a:srgbClr val="2B2B2B"/>
+                          </a:solidFill>
+                          <a:latin typeface="Verdana" pitchFamily="34" charset="0"/>
+                          <a:ea typeface="Verdana" pitchFamily="34" charset="-122"/>
+                          <a:cs typeface="Verdana" pitchFamily="34" charset="-120"/>
+                        </a:rPr>
+                        <a:t>Hasta 50 M€ (CRR art. 501, único que la define); sin empleados ni balance</a:t>
+                      </a:r>
+                      <a:endParaRPr lang="en-US" sz="750" dirty="0">
+                        <a:latin typeface="Verdana" charset="0"/>
+                        <a:ea typeface="Verdana" charset="0"/>
+                        <a:cs typeface="Verdana" charset="0"/>
+                      </a:endParaRPr>
+                    </a:p>
+                  </a:txBody>
+                  <a:tcPr marL="63500" marR="63500" marT="12700" marB="12700" anchor="ctr">
+                    <a:lnL w="6350" cap="flat" cmpd="sng" algn="ctr">
+                      <a:solidFill>
+                        <a:srgbClr val="CACACA"/>
+                      </a:solidFill>
+                      <a:prstDash val="solid"/>
+                      <a:round/>
+                      <a:headEnd type="none" w="med" len="med"/>
+                      <a:tailEnd type="none" w="med" len="med"/>
+                    </a:lnL>
+                    <a:lnR w="6350" cap="flat" cmpd="sng" algn="ctr">
+                      <a:solidFill>
+                        <a:srgbClr val="CACACA"/>
+                      </a:solidFill>
+                      <a:prstDash val="solid"/>
+                      <a:round/>
+                      <a:headEnd type="none" w="med" len="med"/>
+                      <a:tailEnd type="none" w="med" len="med"/>
+                    </a:lnR>
+                    <a:lnT w="6350" cap="flat" cmpd="sng" algn="ctr">
+                      <a:solidFill>
+                        <a:srgbClr val="CACACA"/>
+                      </a:solidFill>
+                      <a:prstDash val="solid"/>
+                      <a:round/>
+                      <a:headEnd type="none" w="med" len="med"/>
+                      <a:tailEnd type="none" w="med" len="med"/>
+                    </a:lnT>
+                    <a:lnB w="6350" cap="flat" cmpd="sng" algn="ctr">
+                      <a:solidFill>
+                        <a:srgbClr val="CACACA"/>
+                      </a:solidFill>
+                      <a:prstDash val="solid"/>
+                      <a:round/>
+                      <a:headEnd type="none" w="med" len="med"/>
+                      <a:tailEnd type="none" w="med" len="med"/>
+                    </a:lnB>
+                    <a:solidFill>
+                      <a:srgbClr val="F4F4F4"/>
+                    </a:solidFill>
+                  </a:tcPr>
+                </a:tc>
+                <a:tc>
+                  <a:txBody>
+                    <a:bodyPr/>
+                    <a:lstStyle/>
+                    <a:p>
+                      <a:pPr algn="ctr" indent="0" marL="0">
+                        <a:buNone/>
+                      </a:pPr>
+                      <a:r>
+                        <a:rPr lang="en-US" sz="750" b="1" dirty="0">
+                          <a:solidFill>
+                            <a:srgbClr val="2B2B2B"/>
+                          </a:solidFill>
+                          <a:latin typeface="Verdana" pitchFamily="34" charset="0"/>
+                          <a:ea typeface="Verdana" pitchFamily="34" charset="-122"/>
+                          <a:cs typeface="Verdana" pitchFamily="34" charset="-120"/>
+                        </a:rPr>
+                        <a:t>Solo un criterio</a:t>
+                      </a:r>
+                      <a:endParaRPr lang="en-US" sz="750" dirty="0">
+                        <a:latin typeface="Verdana" charset="0"/>
+                        <a:ea typeface="Verdana" charset="0"/>
+                        <a:cs typeface="Verdana" charset="0"/>
+                      </a:endParaRPr>
+                    </a:p>
+                  </a:txBody>
+                  <a:tcPr marL="63500" marR="63500" marT="12700" marB="12700" anchor="ctr">
+                    <a:lnL w="6350" cap="flat" cmpd="sng" algn="ctr">
+                      <a:solidFill>
+                        <a:srgbClr val="CACACA"/>
+                      </a:solidFill>
+                      <a:prstDash val="solid"/>
+                      <a:round/>
+                      <a:headEnd type="none" w="med" len="med"/>
+                      <a:tailEnd type="none" w="med" len="med"/>
+                    </a:lnL>
+                    <a:lnR w="6350" cap="flat" cmpd="sng" algn="ctr">
+                      <a:solidFill>
+                        <a:srgbClr val="CACACA"/>
+                      </a:solidFill>
+                      <a:prstDash val="solid"/>
+                      <a:round/>
+                      <a:headEnd type="none" w="med" len="med"/>
+                      <a:tailEnd type="none" w="med" len="med"/>
+                    </a:lnR>
+                    <a:lnT w="6350" cap="flat" cmpd="sng" algn="ctr">
+                      <a:solidFill>
+                        <a:srgbClr val="CACACA"/>
+                      </a:solidFill>
+                      <a:prstDash val="solid"/>
+                      <a:round/>
+                      <a:headEnd type="none" w="med" len="med"/>
+                      <a:tailEnd type="none" w="med" len="med"/>
+                    </a:lnT>
+                    <a:lnB w="6350" cap="flat" cmpd="sng" algn="ctr">
+                      <a:solidFill>
+                        <a:srgbClr val="CACACA"/>
+                      </a:solidFill>
+                      <a:prstDash val="solid"/>
+                      <a:round/>
+                      <a:headEnd type="none" w="med" len="med"/>
+                      <a:tailEnd type="none" w="med" len="med"/>
+                    </a:lnB>
+                    <a:solidFill>
+                      <a:srgbClr val="FFD6BA"/>
+                    </a:solidFill>
+                  </a:tcPr>
+                </a:tc>
+              </a:tr>
+              <a:tr h="306324">
+                <a:tc>
+                  <a:txBody>
+                    <a:bodyPr/>
+                    <a:lstStyle/>
+                    <a:p>
+                      <a:pPr algn="l" indent="0" marL="0">
+                        <a:buNone/>
+                      </a:pPr>
+                      <a:r>
+                        <a:rPr lang="en-US" sz="800" b="1" dirty="0">
+                          <a:solidFill>
+                            <a:srgbClr val="2B2B2B"/>
+                          </a:solidFill>
+                          <a:latin typeface="Verdana" pitchFamily="34" charset="0"/>
+                          <a:ea typeface="Verdana" pitchFamily="34" charset="-122"/>
+                          <a:cs typeface="Verdana" pitchFamily="34" charset="-120"/>
+                        </a:rPr>
+                        <a:t>CRR, art. 153.4</a:t>
+                      </a:r>
+                      <a:endParaRPr lang="en-US" sz="800" dirty="0">
+                        <a:latin typeface="Verdana" charset="0"/>
+                        <a:ea typeface="Verdana" charset="0"/>
+                        <a:cs typeface="Verdana" charset="0"/>
+                      </a:endParaRPr>
+                    </a:p>
+                  </a:txBody>
+                  <a:tcPr marL="63500" marR="63500" marT="12700" marB="12700" anchor="ctr">
+                    <a:lnL w="6350" cap="flat" cmpd="sng" algn="ctr">
+                      <a:solidFill>
+                        <a:srgbClr val="CACACA"/>
+                      </a:solidFill>
+                      <a:prstDash val="solid"/>
+                      <a:round/>
+                      <a:headEnd type="none" w="med" len="med"/>
+                      <a:tailEnd type="none" w="med" len="med"/>
+                    </a:lnL>
+                    <a:lnR w="6350" cap="flat" cmpd="sng" algn="ctr">
+                      <a:solidFill>
+                        <a:srgbClr val="CACACA"/>
+                      </a:solidFill>
+                      <a:prstDash val="solid"/>
+                      <a:round/>
+                      <a:headEnd type="none" w="med" len="med"/>
+                      <a:tailEnd type="none" w="med" len="med"/>
+                    </a:lnR>
+                    <a:lnT w="6350" cap="flat" cmpd="sng" algn="ctr">
+                      <a:solidFill>
+                        <a:srgbClr val="CACACA"/>
+                      </a:solidFill>
+                      <a:prstDash val="solid"/>
+                      <a:round/>
+                      <a:headEnd type="none" w="med" len="med"/>
+                      <a:tailEnd type="none" w="med" len="med"/>
+                    </a:lnT>
+                    <a:lnB w="6350" cap="flat" cmpd="sng" algn="ctr">
+                      <a:solidFill>
+                        <a:srgbClr val="CACACA"/>
+                      </a:solidFill>
+                      <a:prstDash val="solid"/>
+                      <a:round/>
+                      <a:headEnd type="none" w="med" len="med"/>
+                      <a:tailEnd type="none" w="med" len="med"/>
+                    </a:lnB>
+                    <a:solidFill>
+                      <a:srgbClr val="FFFFFF"/>
+                    </a:solidFill>
+                  </a:tcPr>
+                </a:tc>
+                <a:tc>
+                  <a:txBody>
+                    <a:bodyPr/>
+                    <a:lstStyle/>
+                    <a:p>
+                      <a:pPr algn="l" indent="0" marL="0">
+                        <a:buNone/>
+                      </a:pPr>
+                      <a:r>
+                        <a:rPr lang="en-US" sz="750" dirty="0">
+                          <a:solidFill>
+                            <a:srgbClr val="2B2B2B"/>
+                          </a:solidFill>
+                          <a:latin typeface="Verdana" pitchFamily="34" charset="0"/>
+                          <a:ea typeface="Verdana" pitchFamily="34" charset="-122"/>
+                          <a:cs typeface="Verdana" pitchFamily="34" charset="-120"/>
+                        </a:rPr>
+                        <a:t>Fórmula IRB de la descomposición de la densidad</a:t>
+                      </a:r>
+                      <a:endParaRPr lang="en-US" sz="750" dirty="0">
+                        <a:latin typeface="Verdana" charset="0"/>
+                        <a:ea typeface="Verdana" charset="0"/>
+                        <a:cs typeface="Verdana" charset="0"/>
+                      </a:endParaRPr>
+                    </a:p>
+                  </a:txBody>
+                  <a:tcPr marL="63500" marR="63500" marT="12700" marB="12700" anchor="ctr">
+                    <a:lnL w="6350" cap="flat" cmpd="sng" algn="ctr">
+                      <a:solidFill>
+                        <a:srgbClr val="CACACA"/>
+                      </a:solidFill>
+                      <a:prstDash val="solid"/>
+                      <a:round/>
+                      <a:headEnd type="none" w="med" len="med"/>
+                      <a:tailEnd type="none" w="med" len="med"/>
+                    </a:lnL>
+                    <a:lnR w="6350" cap="flat" cmpd="sng" algn="ctr">
+                      <a:solidFill>
+                        <a:srgbClr val="CACACA"/>
+                      </a:solidFill>
+                      <a:prstDash val="solid"/>
+                      <a:round/>
+                      <a:headEnd type="none" w="med" len="med"/>
+                      <a:tailEnd type="none" w="med" len="med"/>
+                    </a:lnR>
+                    <a:lnT w="6350" cap="flat" cmpd="sng" algn="ctr">
+                      <a:solidFill>
+                        <a:srgbClr val="CACACA"/>
+                      </a:solidFill>
+                      <a:prstDash val="solid"/>
+                      <a:round/>
+                      <a:headEnd type="none" w="med" len="med"/>
+                      <a:tailEnd type="none" w="med" len="med"/>
+                    </a:lnT>
+                    <a:lnB w="6350" cap="flat" cmpd="sng" algn="ctr">
+                      <a:solidFill>
+                        <a:srgbClr val="CACACA"/>
+                      </a:solidFill>
+                      <a:prstDash val="solid"/>
+                      <a:round/>
+                      <a:headEnd type="none" w="med" len="med"/>
+                      <a:tailEnd type="none" w="med" len="med"/>
+                    </a:lnB>
+                    <a:solidFill>
+                      <a:srgbClr val="FFFFFF"/>
+                    </a:solidFill>
+                  </a:tcPr>
+                </a:tc>
+                <a:tc>
+                  <a:txBody>
+                    <a:bodyPr/>
+                    <a:lstStyle/>
+                    <a:p>
+                      <a:pPr algn="l" indent="0" marL="0">
+                        <a:buNone/>
+                      </a:pPr>
+                      <a:r>
+                        <a:rPr lang="en-US" sz="750" b="1" dirty="0">
+                          <a:solidFill>
+                            <a:srgbClr val="2B2B2B"/>
+                          </a:solidFill>
+                          <a:latin typeface="Verdana" pitchFamily="34" charset="0"/>
+                          <a:ea typeface="Verdana" pitchFamily="34" charset="-122"/>
+                          <a:cs typeface="Verdana" pitchFamily="34" charset="-120"/>
+                        </a:rPr>
+                        <a:t>Ventas del grupo</a:t>
+                      </a:r>
+                      <a:endParaRPr lang="en-US" sz="750" dirty="0">
+                        <a:latin typeface="Verdana" charset="0"/>
+                        <a:ea typeface="Verdana" charset="0"/>
+                        <a:cs typeface="Verdana" charset="0"/>
+                      </a:endParaRPr>
+                    </a:p>
+                  </a:txBody>
+                  <a:tcPr marL="63500" marR="63500" marT="12700" marB="12700" anchor="ctr">
+                    <a:lnL w="6350" cap="flat" cmpd="sng" algn="ctr">
+                      <a:solidFill>
+                        <a:srgbClr val="CACACA"/>
+                      </a:solidFill>
+                      <a:prstDash val="solid"/>
+                      <a:round/>
+                      <a:headEnd type="none" w="med" len="med"/>
+                      <a:tailEnd type="none" w="med" len="med"/>
+                    </a:lnL>
+                    <a:lnR w="6350" cap="flat" cmpd="sng" algn="ctr">
+                      <a:solidFill>
+                        <a:srgbClr val="CACACA"/>
+                      </a:solidFill>
+                      <a:prstDash val="solid"/>
+                      <a:round/>
+                      <a:headEnd type="none" w="med" len="med"/>
+                      <a:tailEnd type="none" w="med" len="med"/>
+                    </a:lnR>
+                    <a:lnT w="6350" cap="flat" cmpd="sng" algn="ctr">
+                      <a:solidFill>
+                        <a:srgbClr val="CACACA"/>
+                      </a:solidFill>
+                      <a:prstDash val="solid"/>
+                      <a:round/>
+                      <a:headEnd type="none" w="med" len="med"/>
+                      <a:tailEnd type="none" w="med" len="med"/>
+                    </a:lnT>
+                    <a:lnB w="6350" cap="flat" cmpd="sng" algn="ctr">
+                      <a:solidFill>
+                        <a:srgbClr val="CACACA"/>
+                      </a:solidFill>
+                      <a:prstDash val="solid"/>
+                      <a:round/>
+                      <a:headEnd type="none" w="med" len="med"/>
+                      <a:tailEnd type="none" w="med" len="med"/>
+                    </a:lnB>
+                    <a:solidFill>
+                      <a:srgbClr val="FFFFFF"/>
+                    </a:solidFill>
+                  </a:tcPr>
+                </a:tc>
+                <a:tc>
+                  <a:txBody>
+                    <a:bodyPr/>
+                    <a:lstStyle/>
+                    <a:p>
+                      <a:pPr algn="l" indent="0" marL="0">
+                        <a:buNone/>
+                      </a:pPr>
+                      <a:r>
+                        <a:rPr lang="en-US" sz="750" dirty="0">
+                          <a:solidFill>
+                            <a:srgbClr val="2B2B2B"/>
+                          </a:solidFill>
+                          <a:latin typeface="Verdana" pitchFamily="34" charset="0"/>
+                          <a:ea typeface="Verdana" pitchFamily="34" charset="-122"/>
+                          <a:cs typeface="Verdana" pitchFamily="34" charset="-120"/>
+                        </a:rPr>
+                        <a:t>Ventas del grupo consolidado por debajo de 50 M€</a:t>
+                      </a:r>
+                      <a:endParaRPr lang="en-US" sz="750" dirty="0">
+                        <a:latin typeface="Verdana" charset="0"/>
+                        <a:ea typeface="Verdana" charset="0"/>
+                        <a:cs typeface="Verdana" charset="0"/>
+                      </a:endParaRPr>
+                    </a:p>
+                  </a:txBody>
+                  <a:tcPr marL="63500" marR="63500" marT="12700" marB="12700" anchor="ctr">
+                    <a:lnL w="6350" cap="flat" cmpd="sng" algn="ctr">
+                      <a:solidFill>
+                        <a:srgbClr val="CACACA"/>
+                      </a:solidFill>
+                      <a:prstDash val="solid"/>
+                      <a:round/>
+                      <a:headEnd type="none" w="med" len="med"/>
+                      <a:tailEnd type="none" w="med" len="med"/>
+                    </a:lnL>
+                    <a:lnR w="6350" cap="flat" cmpd="sng" algn="ctr">
+                      <a:solidFill>
+                        <a:srgbClr val="CACACA"/>
+                      </a:solidFill>
+                      <a:prstDash val="solid"/>
+                      <a:round/>
+                      <a:headEnd type="none" w="med" len="med"/>
+                      <a:tailEnd type="none" w="med" len="med"/>
+                    </a:lnR>
+                    <a:lnT w="6350" cap="flat" cmpd="sng" algn="ctr">
+                      <a:solidFill>
+                        <a:srgbClr val="CACACA"/>
+                      </a:solidFill>
+                      <a:prstDash val="solid"/>
+                      <a:round/>
+                      <a:headEnd type="none" w="med" len="med"/>
+                      <a:tailEnd type="none" w="med" len="med"/>
+                    </a:lnT>
+                    <a:lnB w="6350" cap="flat" cmpd="sng" algn="ctr">
+                      <a:solidFill>
+                        <a:srgbClr val="CACACA"/>
+                      </a:solidFill>
+                      <a:prstDash val="solid"/>
+                      <a:round/>
+                      <a:headEnd type="none" w="med" len="med"/>
+                      <a:tailEnd type="none" w="med" len="med"/>
+                    </a:lnB>
+                    <a:solidFill>
+                      <a:srgbClr val="FFFFFF"/>
+                    </a:solidFill>
+                  </a:tcPr>
+                </a:tc>
+                <a:tc>
+                  <a:txBody>
+                    <a:bodyPr/>
+                    <a:lstStyle/>
+                    <a:p>
+                      <a:pPr algn="ctr" indent="0" marL="0">
+                        <a:buNone/>
+                      </a:pPr>
+                      <a:r>
+                        <a:rPr lang="en-US" sz="750" b="1" dirty="0">
+                          <a:solidFill>
+                            <a:srgbClr val="2B2B2B"/>
+                          </a:solidFill>
+                          <a:latin typeface="Verdana" pitchFamily="34" charset="0"/>
+                          <a:ea typeface="Verdana" pitchFamily="34" charset="-122"/>
+                          <a:cs typeface="Verdana" pitchFamily="34" charset="-120"/>
+                        </a:rPr>
+                        <a:t>Solo un criterio</a:t>
+                      </a:r>
+                      <a:endParaRPr lang="en-US" sz="750" dirty="0">
+                        <a:latin typeface="Verdana" charset="0"/>
+                        <a:ea typeface="Verdana" charset="0"/>
+                        <a:cs typeface="Verdana" charset="0"/>
+                      </a:endParaRPr>
+                    </a:p>
+                    <a:p>
+                      <a:pPr algn="ctr" indent="0" marL="0">
+                        <a:buNone/>
+                      </a:pPr>
+                      <a:r>
+                        <a:rPr lang="en-US" sz="750" b="1" dirty="0">
+                          <a:solidFill>
+                            <a:srgbClr val="2B2B2B"/>
+                          </a:solidFill>
+                          <a:latin typeface="Verdana" pitchFamily="34" charset="0"/>
+                          <a:ea typeface="Verdana" pitchFamily="34" charset="-122"/>
+                          <a:cs typeface="Verdana" pitchFamily="34" charset="-120"/>
+                        </a:rPr>
+                        <a:t>(grupo, no empresa)</a:t>
+                      </a:r>
+                      <a:endParaRPr lang="en-US" sz="750" dirty="0">
+                        <a:latin typeface="Verdana" charset="0"/>
+                        <a:ea typeface="Verdana" charset="0"/>
+                        <a:cs typeface="Verdana" charset="0"/>
+                      </a:endParaRPr>
+                    </a:p>
+                  </a:txBody>
+                  <a:tcPr marL="63500" marR="63500" marT="12700" marB="12700" anchor="ctr">
+                    <a:lnL w="6350" cap="flat" cmpd="sng" algn="ctr">
+                      <a:solidFill>
+                        <a:srgbClr val="CACACA"/>
+                      </a:solidFill>
+                      <a:prstDash val="solid"/>
+                      <a:round/>
+                      <a:headEnd type="none" w="med" len="med"/>
+                      <a:tailEnd type="none" w="med" len="med"/>
+                    </a:lnL>
+                    <a:lnR w="6350" cap="flat" cmpd="sng" algn="ctr">
+                      <a:solidFill>
+                        <a:srgbClr val="CACACA"/>
+                      </a:solidFill>
+                      <a:prstDash val="solid"/>
+                      <a:round/>
+                      <a:headEnd type="none" w="med" len="med"/>
+                      <a:tailEnd type="none" w="med" len="med"/>
+                    </a:lnR>
+                    <a:lnT w="6350" cap="flat" cmpd="sng" algn="ctr">
+                      <a:solidFill>
+                        <a:srgbClr val="CACACA"/>
+                      </a:solidFill>
+                      <a:prstDash val="solid"/>
+                      <a:round/>
+                      <a:headEnd type="none" w="med" len="med"/>
+                      <a:tailEnd type="none" w="med" len="med"/>
+                    </a:lnT>
+                    <a:lnB w="6350" cap="flat" cmpd="sng" algn="ctr">
+                      <a:solidFill>
+                        <a:srgbClr val="CACACA"/>
+                      </a:solidFill>
+                      <a:prstDash val="solid"/>
+                      <a:round/>
+                      <a:headEnd type="none" w="med" len="med"/>
+                      <a:tailEnd type="none" w="med" len="med"/>
+                    </a:lnB>
+                    <a:solidFill>
+                      <a:srgbClr val="FFD6BA"/>
+                    </a:solidFill>
+                  </a:tcPr>
+                </a:tc>
+              </a:tr>
+              <a:tr h="306324">
+                <a:tc>
+                  <a:txBody>
+                    <a:bodyPr/>
+                    <a:lstStyle/>
+                    <a:p>
+                      <a:pPr algn="l" indent="0" marL="0">
+                        <a:buNone/>
+                      </a:pPr>
+                      <a:r>
+                        <a:rPr lang="en-US" sz="800" b="1" dirty="0">
+                          <a:solidFill>
+                            <a:srgbClr val="2B2B2B"/>
+                          </a:solidFill>
+                          <a:latin typeface="Verdana" pitchFamily="34" charset="0"/>
+                          <a:ea typeface="Verdana" pitchFamily="34" charset="-122"/>
+                          <a:cs typeface="Verdana" pitchFamily="34" charset="-120"/>
+                        </a:rPr>
+                        <a:t>EBA, COREP, IRB</a:t>
+                      </a:r>
+                      <a:endParaRPr lang="en-US" sz="800" dirty="0">
+                        <a:latin typeface="Verdana" charset="0"/>
+                        <a:ea typeface="Verdana" charset="0"/>
+                        <a:cs typeface="Verdana" charset="0"/>
+                      </a:endParaRPr>
+                    </a:p>
+                  </a:txBody>
+                  <a:tcPr marL="63500" marR="63500" marT="12700" marB="12700" anchor="ctr">
+                    <a:lnL w="6350" cap="flat" cmpd="sng" algn="ctr">
+                      <a:solidFill>
+                        <a:srgbClr val="CACACA"/>
+                      </a:solidFill>
+                      <a:prstDash val="solid"/>
+                      <a:round/>
+                      <a:headEnd type="none" w="med" len="med"/>
+                      <a:tailEnd type="none" w="med" len="med"/>
+                    </a:lnL>
+                    <a:lnR w="6350" cap="flat" cmpd="sng" algn="ctr">
+                      <a:solidFill>
+                        <a:srgbClr val="CACACA"/>
+                      </a:solidFill>
+                      <a:prstDash val="solid"/>
+                      <a:round/>
+                      <a:headEnd type="none" w="med" len="med"/>
+                      <a:tailEnd type="none" w="med" len="med"/>
+                    </a:lnR>
+                    <a:lnT w="6350" cap="flat" cmpd="sng" algn="ctr">
+                      <a:solidFill>
+                        <a:srgbClr val="CACACA"/>
+                      </a:solidFill>
+                      <a:prstDash val="solid"/>
+                      <a:round/>
+                      <a:headEnd type="none" w="med" len="med"/>
+                      <a:tailEnd type="none" w="med" len="med"/>
+                    </a:lnT>
+                    <a:lnB w="6350" cap="flat" cmpd="sng" algn="ctr">
+                      <a:solidFill>
+                        <a:srgbClr val="CACACA"/>
+                      </a:solidFill>
+                      <a:prstDash val="solid"/>
+                      <a:round/>
+                      <a:headEnd type="none" w="med" len="med"/>
+                      <a:tailEnd type="none" w="med" len="med"/>
+                    </a:lnB>
+                    <a:solidFill>
+                      <a:srgbClr val="F4F4F4"/>
+                    </a:solidFill>
+                  </a:tcPr>
+                </a:tc>
+                <a:tc>
+                  <a:txBody>
+                    <a:bodyPr/>
+                    <a:lstStyle/>
+                    <a:p>
+                      <a:pPr algn="l" indent="0" marL="0">
+                        <a:buNone/>
+                      </a:pPr>
+                      <a:r>
+                        <a:rPr lang="en-US" sz="750" dirty="0">
+                          <a:solidFill>
+                            <a:srgbClr val="2B2B2B"/>
+                          </a:solidFill>
+                          <a:latin typeface="Verdana" pitchFamily="34" charset="0"/>
+                          <a:ea typeface="Verdana" pitchFamily="34" charset="-122"/>
+                          <a:cs typeface="Verdana" pitchFamily="34" charset="-120"/>
+                        </a:rPr>
+                        <a:t>Coste del riesgo (PD × LGD) y densidad, parte IRB</a:t>
+                      </a:r>
+                      <a:endParaRPr lang="en-US" sz="750" dirty="0">
+                        <a:latin typeface="Verdana" charset="0"/>
+                        <a:ea typeface="Verdana" charset="0"/>
+                        <a:cs typeface="Verdana" charset="0"/>
+                      </a:endParaRPr>
+                    </a:p>
+                  </a:txBody>
+                  <a:tcPr marL="63500" marR="63500" marT="12700" marB="12700" anchor="ctr">
+                    <a:lnL w="6350" cap="flat" cmpd="sng" algn="ctr">
+                      <a:solidFill>
+                        <a:srgbClr val="CACACA"/>
+                      </a:solidFill>
+                      <a:prstDash val="solid"/>
+                      <a:round/>
+                      <a:headEnd type="none" w="med" len="med"/>
+                      <a:tailEnd type="none" w="med" len="med"/>
+                    </a:lnL>
+                    <a:lnR w="6350" cap="flat" cmpd="sng" algn="ctr">
+                      <a:solidFill>
+                        <a:srgbClr val="CACACA"/>
+                      </a:solidFill>
+                      <a:prstDash val="solid"/>
+                      <a:round/>
+                      <a:headEnd type="none" w="med" len="med"/>
+                      <a:tailEnd type="none" w="med" len="med"/>
+                    </a:lnR>
+                    <a:lnT w="6350" cap="flat" cmpd="sng" algn="ctr">
+                      <a:solidFill>
+                        <a:srgbClr val="CACACA"/>
+                      </a:solidFill>
+                      <a:prstDash val="solid"/>
+                      <a:round/>
+                      <a:headEnd type="none" w="med" len="med"/>
+                      <a:tailEnd type="none" w="med" len="med"/>
+                    </a:lnT>
+                    <a:lnB w="6350" cap="flat" cmpd="sng" algn="ctr">
+                      <a:solidFill>
+                        <a:srgbClr val="CACACA"/>
+                      </a:solidFill>
+                      <a:prstDash val="solid"/>
+                      <a:round/>
+                      <a:headEnd type="none" w="med" len="med"/>
+                      <a:tailEnd type="none" w="med" len="med"/>
+                    </a:lnB>
+                    <a:solidFill>
+                      <a:srgbClr val="F4F4F4"/>
+                    </a:solidFill>
+                  </a:tcPr>
+                </a:tc>
+                <a:tc>
+                  <a:txBody>
+                    <a:bodyPr/>
+                    <a:lstStyle/>
+                    <a:p>
+                      <a:pPr algn="l" indent="0" marL="0">
+                        <a:buNone/>
+                      </a:pPr>
+                      <a:r>
+                        <a:rPr lang="en-US" sz="750" b="1" dirty="0">
+                          <a:solidFill>
+                            <a:srgbClr val="2B2B2B"/>
+                          </a:solidFill>
+                          <a:latin typeface="Verdana" pitchFamily="34" charset="0"/>
+                          <a:ea typeface="Verdana" pitchFamily="34" charset="-122"/>
+                          <a:cs typeface="Verdana" pitchFamily="34" charset="-120"/>
+                        </a:rPr>
+                        <a:t>Interna</a:t>
+                      </a:r>
+                      <a:endParaRPr lang="en-US" sz="750" dirty="0">
+                        <a:latin typeface="Verdana" charset="0"/>
+                        <a:ea typeface="Verdana" charset="0"/>
+                        <a:cs typeface="Verdana" charset="0"/>
+                      </a:endParaRPr>
+                    </a:p>
+                  </a:txBody>
+                  <a:tcPr marL="63500" marR="63500" marT="12700" marB="12700" anchor="ctr">
+                    <a:lnL w="6350" cap="flat" cmpd="sng" algn="ctr">
+                      <a:solidFill>
+                        <a:srgbClr val="CACACA"/>
+                      </a:solidFill>
+                      <a:prstDash val="solid"/>
+                      <a:round/>
+                      <a:headEnd type="none" w="med" len="med"/>
+                      <a:tailEnd type="none" w="med" len="med"/>
+                    </a:lnL>
+                    <a:lnR w="6350" cap="flat" cmpd="sng" algn="ctr">
+                      <a:solidFill>
+                        <a:srgbClr val="CACACA"/>
+                      </a:solidFill>
+                      <a:prstDash val="solid"/>
+                      <a:round/>
+                      <a:headEnd type="none" w="med" len="med"/>
+                      <a:tailEnd type="none" w="med" len="med"/>
+                    </a:lnR>
+                    <a:lnT w="6350" cap="flat" cmpd="sng" algn="ctr">
+                      <a:solidFill>
+                        <a:srgbClr val="CACACA"/>
+                      </a:solidFill>
+                      <a:prstDash val="solid"/>
+                      <a:round/>
+                      <a:headEnd type="none" w="med" len="med"/>
+                      <a:tailEnd type="none" w="med" len="med"/>
+                    </a:lnT>
+                    <a:lnB w="6350" cap="flat" cmpd="sng" algn="ctr">
+                      <a:solidFill>
+                        <a:srgbClr val="CACACA"/>
+                      </a:solidFill>
+                      <a:prstDash val="solid"/>
+                      <a:round/>
+                      <a:headEnd type="none" w="med" len="med"/>
+                      <a:tailEnd type="none" w="med" len="med"/>
+                    </a:lnB>
+                    <a:solidFill>
+                      <a:srgbClr val="F4F4F4"/>
+                    </a:solidFill>
+                  </a:tcPr>
+                </a:tc>
+                <a:tc>
+                  <a:txBody>
+                    <a:bodyPr/>
+                    <a:lstStyle/>
+                    <a:p>
+                      <a:pPr algn="l" indent="0" marL="0">
+                        <a:buNone/>
+                      </a:pPr>
+                      <a:r>
+                        <a:rPr lang="en-US" sz="750" dirty="0">
+                          <a:solidFill>
+                            <a:srgbClr val="2B2B2B"/>
+                          </a:solidFill>
+                          <a:latin typeface="Verdana" pitchFamily="34" charset="0"/>
+                          <a:ea typeface="Verdana" pitchFamily="34" charset="-122"/>
+                          <a:cs typeface="Verdana" pitchFamily="34" charset="-120"/>
+                        </a:rPr>
+                        <a:t>La que cada banco usa en su gestión de riesgos: no hay una común</a:t>
+                      </a:r>
+                      <a:endParaRPr lang="en-US" sz="750" dirty="0">
+                        <a:latin typeface="Verdana" charset="0"/>
+                        <a:ea typeface="Verdana" charset="0"/>
+                        <a:cs typeface="Verdana" charset="0"/>
+                      </a:endParaRPr>
+                    </a:p>
+                  </a:txBody>
+                  <a:tcPr marL="63500" marR="63500" marT="12700" marB="12700" anchor="ctr">
+                    <a:lnL w="6350" cap="flat" cmpd="sng" algn="ctr">
+                      <a:solidFill>
+                        <a:srgbClr val="CACACA"/>
+                      </a:solidFill>
+                      <a:prstDash val="solid"/>
+                      <a:round/>
+                      <a:headEnd type="none" w="med" len="med"/>
+                      <a:tailEnd type="none" w="med" len="med"/>
+                    </a:lnL>
+                    <a:lnR w="6350" cap="flat" cmpd="sng" algn="ctr">
+                      <a:solidFill>
+                        <a:srgbClr val="CACACA"/>
+                      </a:solidFill>
+                      <a:prstDash val="solid"/>
+                      <a:round/>
+                      <a:headEnd type="none" w="med" len="med"/>
+                      <a:tailEnd type="none" w="med" len="med"/>
+                    </a:lnR>
+                    <a:lnT w="6350" cap="flat" cmpd="sng" algn="ctr">
+                      <a:solidFill>
+                        <a:srgbClr val="CACACA"/>
+                      </a:solidFill>
+                      <a:prstDash val="solid"/>
+                      <a:round/>
+                      <a:headEnd type="none" w="med" len="med"/>
+                      <a:tailEnd type="none" w="med" len="med"/>
+                    </a:lnT>
+                    <a:lnB w="6350" cap="flat" cmpd="sng" algn="ctr">
+                      <a:solidFill>
+                        <a:srgbClr val="CACACA"/>
+                      </a:solidFill>
+                      <a:prstDash val="solid"/>
+                      <a:round/>
+                      <a:headEnd type="none" w="med" len="med"/>
+                      <a:tailEnd type="none" w="med" len="med"/>
+                    </a:lnB>
+                    <a:solidFill>
+                      <a:srgbClr val="F4F4F4"/>
+                    </a:solidFill>
+                  </a:tcPr>
+                </a:tc>
+                <a:tc>
+                  <a:txBody>
+                    <a:bodyPr/>
+                    <a:lstStyle/>
+                    <a:p>
+                      <a:pPr algn="ctr" indent="0" marL="0">
+                        <a:buNone/>
+                      </a:pPr>
+                      <a:r>
+                        <a:rPr lang="en-US" sz="750" b="1" dirty="0">
+                          <a:solidFill>
+                            <a:srgbClr val="2B2B2B"/>
+                          </a:solidFill>
+                          <a:latin typeface="Verdana" pitchFamily="34" charset="0"/>
+                          <a:ea typeface="Verdana" pitchFamily="34" charset="-122"/>
+                          <a:cs typeface="Verdana" pitchFamily="34" charset="-120"/>
+                        </a:rPr>
+                        <a:t>No</a:t>
+                      </a:r>
+                      <a:endParaRPr lang="en-US" sz="750" dirty="0">
+                        <a:latin typeface="Verdana" charset="0"/>
+                        <a:ea typeface="Verdana" charset="0"/>
+                        <a:cs typeface="Verdana" charset="0"/>
+                      </a:endParaRPr>
+                    </a:p>
+                  </a:txBody>
+                  <a:tcPr marL="63500" marR="63500" marT="12700" marB="12700" anchor="ctr">
+                    <a:lnL w="6350" cap="flat" cmpd="sng" algn="ctr">
+                      <a:solidFill>
+                        <a:srgbClr val="CACACA"/>
+                      </a:solidFill>
+                      <a:prstDash val="solid"/>
+                      <a:round/>
+                      <a:headEnd type="none" w="med" len="med"/>
+                      <a:tailEnd type="none" w="med" len="med"/>
+                    </a:lnL>
+                    <a:lnR w="6350" cap="flat" cmpd="sng" algn="ctr">
+                      <a:solidFill>
+                        <a:srgbClr val="CACACA"/>
+                      </a:solidFill>
+                      <a:prstDash val="solid"/>
+                      <a:round/>
+                      <a:headEnd type="none" w="med" len="med"/>
+                      <a:tailEnd type="none" w="med" len="med"/>
+                    </a:lnR>
+                    <a:lnT w="6350" cap="flat" cmpd="sng" algn="ctr">
+                      <a:solidFill>
+                        <a:srgbClr val="CACACA"/>
+                      </a:solidFill>
+                      <a:prstDash val="solid"/>
+                      <a:round/>
+                      <a:headEnd type="none" w="med" len="med"/>
+                      <a:tailEnd type="none" w="med" len="med"/>
+                    </a:lnT>
+                    <a:lnB w="6350" cap="flat" cmpd="sng" algn="ctr">
+                      <a:solidFill>
+                        <a:srgbClr val="CACACA"/>
+                      </a:solidFill>
+                      <a:prstDash val="solid"/>
+                      <a:round/>
+                      <a:headEnd type="none" w="med" len="med"/>
+                      <a:tailEnd type="none" w="med" len="med"/>
+                    </a:lnB>
+                    <a:solidFill>
+                      <a:srgbClr val="FFCCE8"/>
+                    </a:solidFill>
+                  </a:tcPr>
+                </a:tc>
+              </a:tr>
+              <a:tr h="306324">
+                <a:tc>
+                  <a:txBody>
+                    <a:bodyPr/>
+                    <a:lstStyle/>
+                    <a:p>
+                      <a:pPr algn="l" indent="0" marL="0">
+                        <a:buNone/>
+                      </a:pPr>
+                      <a:r>
+                        <a:rPr lang="en-US" sz="800" b="1" dirty="0">
+                          <a:solidFill>
+                            <a:srgbClr val="2B2B2B"/>
+                          </a:solidFill>
+                          <a:latin typeface="Verdana" pitchFamily="34" charset="0"/>
+                          <a:ea typeface="Verdana" pitchFamily="34" charset="-122"/>
+                          <a:cs typeface="Verdana" pitchFamily="34" charset="-120"/>
+                        </a:rPr>
+                        <a:t>BCE, MIR</a:t>
+                      </a:r>
+                      <a:endParaRPr lang="en-US" sz="800" dirty="0">
+                        <a:latin typeface="Verdana" charset="0"/>
+                        <a:ea typeface="Verdana" charset="0"/>
+                        <a:cs typeface="Verdana" charset="0"/>
+                      </a:endParaRPr>
+                    </a:p>
+                  </a:txBody>
+                  <a:tcPr marL="63500" marR="63500" marT="12700" marB="12700" anchor="ctr">
+                    <a:lnL w="6350" cap="flat" cmpd="sng" algn="ctr">
+                      <a:solidFill>
+                        <a:srgbClr val="CACACA"/>
+                      </a:solidFill>
+                      <a:prstDash val="solid"/>
+                      <a:round/>
+                      <a:headEnd type="none" w="med" len="med"/>
+                      <a:tailEnd type="none" w="med" len="med"/>
+                    </a:lnL>
+                    <a:lnR w="6350" cap="flat" cmpd="sng" algn="ctr">
+                      <a:solidFill>
+                        <a:srgbClr val="CACACA"/>
+                      </a:solidFill>
+                      <a:prstDash val="solid"/>
+                      <a:round/>
+                      <a:headEnd type="none" w="med" len="med"/>
+                      <a:tailEnd type="none" w="med" len="med"/>
+                    </a:lnR>
+                    <a:lnT w="6350" cap="flat" cmpd="sng" algn="ctr">
+                      <a:solidFill>
+                        <a:srgbClr val="CACACA"/>
+                      </a:solidFill>
+                      <a:prstDash val="solid"/>
+                      <a:round/>
+                      <a:headEnd type="none" w="med" len="med"/>
+                      <a:tailEnd type="none" w="med" len="med"/>
+                    </a:lnT>
+                    <a:lnB w="6350" cap="flat" cmpd="sng" algn="ctr">
+                      <a:solidFill>
+                        <a:srgbClr val="CACACA"/>
+                      </a:solidFill>
+                      <a:prstDash val="solid"/>
+                      <a:round/>
+                      <a:headEnd type="none" w="med" len="med"/>
+                      <a:tailEnd type="none" w="med" len="med"/>
+                    </a:lnB>
+                    <a:solidFill>
+                      <a:srgbClr val="FFFFFF"/>
+                    </a:solidFill>
+                  </a:tcPr>
+                </a:tc>
+                <a:tc>
+                  <a:txBody>
+                    <a:bodyPr/>
+                    <a:lstStyle/>
+                    <a:p>
+                      <a:pPr algn="l" indent="0" marL="0">
+                        <a:buNone/>
+                      </a:pPr>
+                      <a:r>
+                        <a:rPr lang="en-US" sz="750" dirty="0">
+                          <a:solidFill>
+                            <a:srgbClr val="2B2B2B"/>
+                          </a:solidFill>
+                          <a:latin typeface="Verdana" pitchFamily="34" charset="0"/>
+                          <a:ea typeface="Verdana" pitchFamily="34" charset="-122"/>
+                          <a:cs typeface="Verdana" pitchFamily="34" charset="-120"/>
+                        </a:rPr>
+                        <a:t>Precio, prima PYME, cuña y coste de los recursos</a:t>
+                      </a:r>
+                      <a:endParaRPr lang="en-US" sz="750" dirty="0">
+                        <a:latin typeface="Verdana" charset="0"/>
+                        <a:ea typeface="Verdana" charset="0"/>
+                        <a:cs typeface="Verdana" charset="0"/>
+                      </a:endParaRPr>
+                    </a:p>
+                  </a:txBody>
+                  <a:tcPr marL="63500" marR="63500" marT="12700" marB="12700" anchor="ctr">
+                    <a:lnL w="6350" cap="flat" cmpd="sng" algn="ctr">
+                      <a:solidFill>
+                        <a:srgbClr val="CACACA"/>
+                      </a:solidFill>
+                      <a:prstDash val="solid"/>
+                      <a:round/>
+                      <a:headEnd type="none" w="med" len="med"/>
+                      <a:tailEnd type="none" w="med" len="med"/>
+                    </a:lnL>
+                    <a:lnR w="6350" cap="flat" cmpd="sng" algn="ctr">
+                      <a:solidFill>
+                        <a:srgbClr val="CACACA"/>
+                      </a:solidFill>
+                      <a:prstDash val="solid"/>
+                      <a:round/>
+                      <a:headEnd type="none" w="med" len="med"/>
+                      <a:tailEnd type="none" w="med" len="med"/>
+                    </a:lnR>
+                    <a:lnT w="6350" cap="flat" cmpd="sng" algn="ctr">
+                      <a:solidFill>
+                        <a:srgbClr val="CACACA"/>
+                      </a:solidFill>
+                      <a:prstDash val="solid"/>
+                      <a:round/>
+                      <a:headEnd type="none" w="med" len="med"/>
+                      <a:tailEnd type="none" w="med" len="med"/>
+                    </a:lnT>
+                    <a:lnB w="6350" cap="flat" cmpd="sng" algn="ctr">
+                      <a:solidFill>
+                        <a:srgbClr val="CACACA"/>
+                      </a:solidFill>
+                      <a:prstDash val="solid"/>
+                      <a:round/>
+                      <a:headEnd type="none" w="med" len="med"/>
+                      <a:tailEnd type="none" w="med" len="med"/>
+                    </a:lnB>
+                    <a:solidFill>
+                      <a:srgbClr val="FFFFFF"/>
+                    </a:solidFill>
+                  </a:tcPr>
+                </a:tc>
+                <a:tc>
+                  <a:txBody>
+                    <a:bodyPr/>
+                    <a:lstStyle/>
+                    <a:p>
+                      <a:pPr algn="l" indent="0" marL="0">
+                        <a:buNone/>
+                      </a:pPr>
+                      <a:r>
+                        <a:rPr lang="en-US" sz="750" b="1" dirty="0">
+                          <a:solidFill>
+                            <a:srgbClr val="2B2B2B"/>
+                          </a:solidFill>
+                          <a:latin typeface="Verdana" pitchFamily="34" charset="0"/>
+                          <a:ea typeface="Verdana" pitchFamily="34" charset="-122"/>
+                          <a:cs typeface="Verdana" pitchFamily="34" charset="-120"/>
+                        </a:rPr>
+                        <a:t>Importe del préstamo</a:t>
+                      </a:r>
+                      <a:endParaRPr lang="en-US" sz="750" dirty="0">
+                        <a:latin typeface="Verdana" charset="0"/>
+                        <a:ea typeface="Verdana" charset="0"/>
+                        <a:cs typeface="Verdana" charset="0"/>
+                      </a:endParaRPr>
+                    </a:p>
+                  </a:txBody>
+                  <a:tcPr marL="63500" marR="63500" marT="12700" marB="12700" anchor="ctr">
+                    <a:lnL w="6350" cap="flat" cmpd="sng" algn="ctr">
+                      <a:solidFill>
+                        <a:srgbClr val="CACACA"/>
+                      </a:solidFill>
+                      <a:prstDash val="solid"/>
+                      <a:round/>
+                      <a:headEnd type="none" w="med" len="med"/>
+                      <a:tailEnd type="none" w="med" len="med"/>
+                    </a:lnL>
+                    <a:lnR w="6350" cap="flat" cmpd="sng" algn="ctr">
+                      <a:solidFill>
+                        <a:srgbClr val="CACACA"/>
+                      </a:solidFill>
+                      <a:prstDash val="solid"/>
+                      <a:round/>
+                      <a:headEnd type="none" w="med" len="med"/>
+                      <a:tailEnd type="none" w="med" len="med"/>
+                    </a:lnR>
+                    <a:lnT w="6350" cap="flat" cmpd="sng" algn="ctr">
+                      <a:solidFill>
+                        <a:srgbClr val="CACACA"/>
+                      </a:solidFill>
+                      <a:prstDash val="solid"/>
+                      <a:round/>
+                      <a:headEnd type="none" w="med" len="med"/>
+                      <a:tailEnd type="none" w="med" len="med"/>
+                    </a:lnT>
+                    <a:lnB w="6350" cap="flat" cmpd="sng" algn="ctr">
+                      <a:solidFill>
+                        <a:srgbClr val="CACACA"/>
+                      </a:solidFill>
+                      <a:prstDash val="solid"/>
+                      <a:round/>
+                      <a:headEnd type="none" w="med" len="med"/>
+                      <a:tailEnd type="none" w="med" len="med"/>
+                    </a:lnB>
+                    <a:solidFill>
+                      <a:srgbClr val="FFFFFF"/>
+                    </a:solidFill>
+                  </a:tcPr>
+                </a:tc>
+                <a:tc>
+                  <a:txBody>
+                    <a:bodyPr/>
+                    <a:lstStyle/>
+                    <a:p>
+                      <a:pPr algn="l" indent="0" marL="0">
+                        <a:buNone/>
+                      </a:pPr>
+                      <a:r>
+                        <a:rPr lang="en-US" sz="750" dirty="0">
+                          <a:solidFill>
+                            <a:srgbClr val="2B2B2B"/>
+                          </a:solidFill>
+                          <a:latin typeface="Verdana" pitchFamily="34" charset="0"/>
+                          <a:ea typeface="Verdana" pitchFamily="34" charset="-122"/>
+                          <a:cs typeface="Verdana" pitchFamily="34" charset="-120"/>
+                        </a:rPr>
+                        <a:t>Préstamo hasta 1 M€ (hasta 0,25 M€ en la prima). Los depósitos: todas las empresas</a:t>
+                      </a:r>
+                      <a:endParaRPr lang="en-US" sz="750" dirty="0">
+                        <a:latin typeface="Verdana" charset="0"/>
+                        <a:ea typeface="Verdana" charset="0"/>
+                        <a:cs typeface="Verdana" charset="0"/>
+                      </a:endParaRPr>
+                    </a:p>
+                  </a:txBody>
+                  <a:tcPr marL="63500" marR="63500" marT="12700" marB="12700" anchor="ctr">
+                    <a:lnL w="6350" cap="flat" cmpd="sng" algn="ctr">
+                      <a:solidFill>
+                        <a:srgbClr val="CACACA"/>
+                      </a:solidFill>
+                      <a:prstDash val="solid"/>
+                      <a:round/>
+                      <a:headEnd type="none" w="med" len="med"/>
+                      <a:tailEnd type="none" w="med" len="med"/>
+                    </a:lnL>
+                    <a:lnR w="6350" cap="flat" cmpd="sng" algn="ctr">
+                      <a:solidFill>
+                        <a:srgbClr val="CACACA"/>
+                      </a:solidFill>
+                      <a:prstDash val="solid"/>
+                      <a:round/>
+                      <a:headEnd type="none" w="med" len="med"/>
+                      <a:tailEnd type="none" w="med" len="med"/>
+                    </a:lnR>
+                    <a:lnT w="6350" cap="flat" cmpd="sng" algn="ctr">
+                      <a:solidFill>
+                        <a:srgbClr val="CACACA"/>
+                      </a:solidFill>
+                      <a:prstDash val="solid"/>
+                      <a:round/>
+                      <a:headEnd type="none" w="med" len="med"/>
+                      <a:tailEnd type="none" w="med" len="med"/>
+                    </a:lnT>
+                    <a:lnB w="6350" cap="flat" cmpd="sng" algn="ctr">
+                      <a:solidFill>
+                        <a:srgbClr val="CACACA"/>
+                      </a:solidFill>
+                      <a:prstDash val="solid"/>
+                      <a:round/>
+                      <a:headEnd type="none" w="med" len="med"/>
+                      <a:tailEnd type="none" w="med" len="med"/>
+                    </a:lnB>
+                    <a:solidFill>
+                      <a:srgbClr val="FFFFFF"/>
+                    </a:solidFill>
+                  </a:tcPr>
+                </a:tc>
+                <a:tc>
+                  <a:txBody>
+                    <a:bodyPr/>
+                    <a:lstStyle/>
+                    <a:p>
+                      <a:pPr algn="ctr" indent="0" marL="0">
+                        <a:buNone/>
+                      </a:pPr>
+                      <a:r>
+                        <a:rPr lang="en-US" sz="750" b="1" dirty="0">
+                          <a:solidFill>
+                            <a:srgbClr val="2B2B2B"/>
+                          </a:solidFill>
+                          <a:latin typeface="Verdana" pitchFamily="34" charset="0"/>
+                          <a:ea typeface="Verdana" pitchFamily="34" charset="-122"/>
+                          <a:cs typeface="Verdana" pitchFamily="34" charset="-120"/>
+                        </a:rPr>
+                        <a:t>No</a:t>
+                      </a:r>
+                      <a:endParaRPr lang="en-US" sz="750" dirty="0">
+                        <a:latin typeface="Verdana" charset="0"/>
+                        <a:ea typeface="Verdana" charset="0"/>
+                        <a:cs typeface="Verdana" charset="0"/>
+                      </a:endParaRPr>
+                    </a:p>
+                    <a:p>
+                      <a:pPr algn="ctr" indent="0" marL="0">
+                        <a:buNone/>
+                      </a:pPr>
+                      <a:r>
+                        <a:rPr lang="en-US" sz="750" b="1" dirty="0">
+                          <a:solidFill>
+                            <a:srgbClr val="2B2B2B"/>
+                          </a:solidFill>
+                          <a:latin typeface="Verdana" pitchFamily="34" charset="0"/>
+                          <a:ea typeface="Verdana" pitchFamily="34" charset="-122"/>
+                          <a:cs typeface="Verdana" pitchFamily="34" charset="-120"/>
+                        </a:rPr>
+                        <a:t>(mide el préstamo)</a:t>
+                      </a:r>
+                      <a:endParaRPr lang="en-US" sz="750" dirty="0">
+                        <a:latin typeface="Verdana" charset="0"/>
+                        <a:ea typeface="Verdana" charset="0"/>
+                        <a:cs typeface="Verdana" charset="0"/>
+                      </a:endParaRPr>
+                    </a:p>
+                  </a:txBody>
+                  <a:tcPr marL="63500" marR="63500" marT="12700" marB="12700" anchor="ctr">
+                    <a:lnL w="6350" cap="flat" cmpd="sng" algn="ctr">
+                      <a:solidFill>
+                        <a:srgbClr val="CACACA"/>
+                      </a:solidFill>
+                      <a:prstDash val="solid"/>
+                      <a:round/>
+                      <a:headEnd type="none" w="med" len="med"/>
+                      <a:tailEnd type="none" w="med" len="med"/>
+                    </a:lnL>
+                    <a:lnR w="6350" cap="flat" cmpd="sng" algn="ctr">
+                      <a:solidFill>
+                        <a:srgbClr val="CACACA"/>
+                      </a:solidFill>
+                      <a:prstDash val="solid"/>
+                      <a:round/>
+                      <a:headEnd type="none" w="med" len="med"/>
+                      <a:tailEnd type="none" w="med" len="med"/>
+                    </a:lnR>
+                    <a:lnT w="6350" cap="flat" cmpd="sng" algn="ctr">
+                      <a:solidFill>
+                        <a:srgbClr val="CACACA"/>
+                      </a:solidFill>
+                      <a:prstDash val="solid"/>
+                      <a:round/>
+                      <a:headEnd type="none" w="med" len="med"/>
+                      <a:tailEnd type="none" w="med" len="med"/>
+                    </a:lnT>
+                    <a:lnB w="6350" cap="flat" cmpd="sng" algn="ctr">
+                      <a:solidFill>
+                        <a:srgbClr val="CACACA"/>
+                      </a:solidFill>
+                      <a:prstDash val="solid"/>
+                      <a:round/>
+                      <a:headEnd type="none" w="med" len="med"/>
+                      <a:tailEnd type="none" w="med" len="med"/>
+                    </a:lnB>
+                    <a:solidFill>
+                      <a:srgbClr val="FFCCE8"/>
+                    </a:solidFill>
+                  </a:tcPr>
+                </a:tc>
+              </a:tr>
+              <a:tr h="306324">
+                <a:tc>
+                  <a:txBody>
+                    <a:bodyPr/>
+                    <a:lstStyle/>
+                    <a:p>
+                      <a:pPr algn="l" indent="0" marL="0">
+                        <a:buNone/>
+                      </a:pPr>
+                      <a:r>
+                        <a:rPr lang="en-US" sz="800" b="1" dirty="0">
+                          <a:solidFill>
+                            <a:srgbClr val="2B2B2B"/>
+                          </a:solidFill>
+                          <a:latin typeface="Verdana" pitchFamily="34" charset="0"/>
+                          <a:ea typeface="Verdana" pitchFamily="34" charset="-122"/>
+                          <a:cs typeface="Verdana" pitchFamily="34" charset="-120"/>
+                        </a:rPr>
+                        <a:t>Banco de España, Boletín</a:t>
+                      </a:r>
+                      <a:endParaRPr lang="en-US" sz="800" dirty="0">
+                        <a:latin typeface="Verdana" charset="0"/>
+                        <a:ea typeface="Verdana" charset="0"/>
+                        <a:cs typeface="Verdana" charset="0"/>
+                      </a:endParaRPr>
+                    </a:p>
+                  </a:txBody>
+                  <a:tcPr marL="63500" marR="63500" marT="12700" marB="12700" anchor="ctr">
+                    <a:lnL w="6350" cap="flat" cmpd="sng" algn="ctr">
+                      <a:solidFill>
+                        <a:srgbClr val="CACACA"/>
+                      </a:solidFill>
+                      <a:prstDash val="solid"/>
+                      <a:round/>
+                      <a:headEnd type="none" w="med" len="med"/>
+                      <a:tailEnd type="none" w="med" len="med"/>
+                    </a:lnL>
+                    <a:lnR w="6350" cap="flat" cmpd="sng" algn="ctr">
+                      <a:solidFill>
+                        <a:srgbClr val="CACACA"/>
+                      </a:solidFill>
+                      <a:prstDash val="solid"/>
+                      <a:round/>
+                      <a:headEnd type="none" w="med" len="med"/>
+                      <a:tailEnd type="none" w="med" len="med"/>
+                    </a:lnR>
+                    <a:lnT w="6350" cap="flat" cmpd="sng" algn="ctr">
+                      <a:solidFill>
+                        <a:srgbClr val="CACACA"/>
+                      </a:solidFill>
+                      <a:prstDash val="solid"/>
+                      <a:round/>
+                      <a:headEnd type="none" w="med" len="med"/>
+                      <a:tailEnd type="none" w="med" len="med"/>
+                    </a:lnT>
+                    <a:lnB w="6350" cap="flat" cmpd="sng" algn="ctr">
+                      <a:solidFill>
+                        <a:srgbClr val="CACACA"/>
+                      </a:solidFill>
+                      <a:prstDash val="solid"/>
+                      <a:round/>
+                      <a:headEnd type="none" w="med" len="med"/>
+                      <a:tailEnd type="none" w="med" len="med"/>
+                    </a:lnB>
+                    <a:solidFill>
+                      <a:srgbClr val="F4F4F4"/>
+                    </a:solidFill>
+                  </a:tcPr>
+                </a:tc>
+                <a:tc>
+                  <a:txBody>
+                    <a:bodyPr/>
+                    <a:lstStyle/>
+                    <a:p>
+                      <a:pPr algn="l" indent="0" marL="0">
+                        <a:buNone/>
+                      </a:pPr>
+                      <a:r>
+                        <a:rPr lang="en-US" sz="750" dirty="0">
+                          <a:solidFill>
+                            <a:srgbClr val="2B2B2B"/>
+                          </a:solidFill>
+                          <a:latin typeface="Verdana" pitchFamily="34" charset="0"/>
+                          <a:ea typeface="Verdana" pitchFamily="34" charset="-122"/>
+                          <a:cs typeface="Verdana" pitchFamily="34" charset="-120"/>
+                        </a:rPr>
+                        <a:t>Comisiones, autónomos</a:t>
+                      </a:r>
+                      <a:endParaRPr lang="en-US" sz="750" dirty="0">
+                        <a:latin typeface="Verdana" charset="0"/>
+                        <a:ea typeface="Verdana" charset="0"/>
+                        <a:cs typeface="Verdana" charset="0"/>
+                      </a:endParaRPr>
+                    </a:p>
+                  </a:txBody>
+                  <a:tcPr marL="63500" marR="63500" marT="12700" marB="12700" anchor="ctr">
+                    <a:lnL w="6350" cap="flat" cmpd="sng" algn="ctr">
+                      <a:solidFill>
+                        <a:srgbClr val="CACACA"/>
+                      </a:solidFill>
+                      <a:prstDash val="solid"/>
+                      <a:round/>
+                      <a:headEnd type="none" w="med" len="med"/>
+                      <a:tailEnd type="none" w="med" len="med"/>
+                    </a:lnL>
+                    <a:lnR w="6350" cap="flat" cmpd="sng" algn="ctr">
+                      <a:solidFill>
+                        <a:srgbClr val="CACACA"/>
+                      </a:solidFill>
+                      <a:prstDash val="solid"/>
+                      <a:round/>
+                      <a:headEnd type="none" w="med" len="med"/>
+                      <a:tailEnd type="none" w="med" len="med"/>
+                    </a:lnR>
+                    <a:lnT w="6350" cap="flat" cmpd="sng" algn="ctr">
+                      <a:solidFill>
+                        <a:srgbClr val="CACACA"/>
+                      </a:solidFill>
+                      <a:prstDash val="solid"/>
+                      <a:round/>
+                      <a:headEnd type="none" w="med" len="med"/>
+                      <a:tailEnd type="none" w="med" len="med"/>
+                    </a:lnT>
+                    <a:lnB w="6350" cap="flat" cmpd="sng" algn="ctr">
+                      <a:solidFill>
+                        <a:srgbClr val="CACACA"/>
+                      </a:solidFill>
+                      <a:prstDash val="solid"/>
+                      <a:round/>
+                      <a:headEnd type="none" w="med" len="med"/>
+                      <a:tailEnd type="none" w="med" len="med"/>
+                    </a:lnB>
+                    <a:solidFill>
+                      <a:srgbClr val="F4F4F4"/>
+                    </a:solidFill>
+                  </a:tcPr>
+                </a:tc>
+                <a:tc>
+                  <a:txBody>
+                    <a:bodyPr/>
+                    <a:lstStyle/>
+                    <a:p>
+                      <a:pPr algn="l" indent="0" marL="0">
+                        <a:buNone/>
+                      </a:pPr>
+                      <a:r>
+                        <a:rPr lang="en-US" sz="750" b="1" dirty="0">
+                          <a:solidFill>
+                            <a:srgbClr val="2B2B2B"/>
+                          </a:solidFill>
+                          <a:latin typeface="Verdana" pitchFamily="34" charset="0"/>
+                          <a:ea typeface="Verdana" pitchFamily="34" charset="-122"/>
+                          <a:cs typeface="Verdana" pitchFamily="34" charset="-120"/>
+                        </a:rPr>
+                        <a:t>Importe del préstamo</a:t>
+                      </a:r>
+                      <a:endParaRPr lang="en-US" sz="750" dirty="0">
+                        <a:latin typeface="Verdana" charset="0"/>
+                        <a:ea typeface="Verdana" charset="0"/>
+                        <a:cs typeface="Verdana" charset="0"/>
+                      </a:endParaRPr>
+                    </a:p>
+                  </a:txBody>
+                  <a:tcPr marL="63500" marR="63500" marT="12700" marB="12700" anchor="ctr">
+                    <a:lnL w="6350" cap="flat" cmpd="sng" algn="ctr">
+                      <a:solidFill>
+                        <a:srgbClr val="CACACA"/>
+                      </a:solidFill>
+                      <a:prstDash val="solid"/>
+                      <a:round/>
+                      <a:headEnd type="none" w="med" len="med"/>
+                      <a:tailEnd type="none" w="med" len="med"/>
+                    </a:lnL>
+                    <a:lnR w="6350" cap="flat" cmpd="sng" algn="ctr">
+                      <a:solidFill>
+                        <a:srgbClr val="CACACA"/>
+                      </a:solidFill>
+                      <a:prstDash val="solid"/>
+                      <a:round/>
+                      <a:headEnd type="none" w="med" len="med"/>
+                      <a:tailEnd type="none" w="med" len="med"/>
+                    </a:lnR>
+                    <a:lnT w="6350" cap="flat" cmpd="sng" algn="ctr">
+                      <a:solidFill>
+                        <a:srgbClr val="CACACA"/>
+                      </a:solidFill>
+                      <a:prstDash val="solid"/>
+                      <a:round/>
+                      <a:headEnd type="none" w="med" len="med"/>
+                      <a:tailEnd type="none" w="med" len="med"/>
+                    </a:lnT>
+                    <a:lnB w="6350" cap="flat" cmpd="sng" algn="ctr">
+                      <a:solidFill>
+                        <a:srgbClr val="CACACA"/>
+                      </a:solidFill>
+                      <a:prstDash val="solid"/>
+                      <a:round/>
+                      <a:headEnd type="none" w="med" len="med"/>
+                      <a:tailEnd type="none" w="med" len="med"/>
+                    </a:lnB>
+                    <a:solidFill>
+                      <a:srgbClr val="F4F4F4"/>
+                    </a:solidFill>
+                  </a:tcPr>
+                </a:tc>
+                <a:tc>
+                  <a:txBody>
+                    <a:bodyPr/>
+                    <a:lstStyle/>
+                    <a:p>
+                      <a:pPr algn="l" indent="0" marL="0">
+                        <a:buNone/>
+                      </a:pPr>
+                      <a:r>
+                        <a:rPr lang="en-US" sz="750" dirty="0">
+                          <a:solidFill>
+                            <a:srgbClr val="2B2B2B"/>
+                          </a:solidFill>
+                          <a:latin typeface="Verdana" pitchFamily="34" charset="0"/>
+                          <a:ea typeface="Verdana" pitchFamily="34" charset="-122"/>
+                          <a:cs typeface="Verdana" pitchFamily="34" charset="-120"/>
+                        </a:rPr>
+                        <a:t>Tramos de importe, como el MIR. El autónomo va aparte, como persona física</a:t>
+                      </a:r>
+                      <a:endParaRPr lang="en-US" sz="750" dirty="0">
+                        <a:latin typeface="Verdana" charset="0"/>
+                        <a:ea typeface="Verdana" charset="0"/>
+                        <a:cs typeface="Verdana" charset="0"/>
+                      </a:endParaRPr>
+                    </a:p>
+                  </a:txBody>
+                  <a:tcPr marL="63500" marR="63500" marT="12700" marB="12700" anchor="ctr">
+                    <a:lnL w="6350" cap="flat" cmpd="sng" algn="ctr">
+                      <a:solidFill>
+                        <a:srgbClr val="CACACA"/>
+                      </a:solidFill>
+                      <a:prstDash val="solid"/>
+                      <a:round/>
+                      <a:headEnd type="none" w="med" len="med"/>
+                      <a:tailEnd type="none" w="med" len="med"/>
+                    </a:lnL>
+                    <a:lnR w="6350" cap="flat" cmpd="sng" algn="ctr">
+                      <a:solidFill>
+                        <a:srgbClr val="CACACA"/>
+                      </a:solidFill>
+                      <a:prstDash val="solid"/>
+                      <a:round/>
+                      <a:headEnd type="none" w="med" len="med"/>
+                      <a:tailEnd type="none" w="med" len="med"/>
+                    </a:lnR>
+                    <a:lnT w="6350" cap="flat" cmpd="sng" algn="ctr">
+                      <a:solidFill>
+                        <a:srgbClr val="CACACA"/>
+                      </a:solidFill>
+                      <a:prstDash val="solid"/>
+                      <a:round/>
+                      <a:headEnd type="none" w="med" len="med"/>
+                      <a:tailEnd type="none" w="med" len="med"/>
+                    </a:lnT>
+                    <a:lnB w="6350" cap="flat" cmpd="sng" algn="ctr">
+                      <a:solidFill>
+                        <a:srgbClr val="CACACA"/>
+                      </a:solidFill>
+                      <a:prstDash val="solid"/>
+                      <a:round/>
+                      <a:headEnd type="none" w="med" len="med"/>
+                      <a:tailEnd type="none" w="med" len="med"/>
+                    </a:lnB>
+                    <a:solidFill>
+                      <a:srgbClr val="F4F4F4"/>
+                    </a:solidFill>
+                  </a:tcPr>
+                </a:tc>
+                <a:tc>
+                  <a:txBody>
+                    <a:bodyPr/>
+                    <a:lstStyle/>
+                    <a:p>
+                      <a:pPr algn="ctr" indent="0" marL="0">
+                        <a:buNone/>
+                      </a:pPr>
+                      <a:r>
+                        <a:rPr lang="en-US" sz="750" b="1" dirty="0">
+                          <a:solidFill>
+                            <a:srgbClr val="2B2B2B"/>
+                          </a:solidFill>
+                          <a:latin typeface="Verdana" pitchFamily="34" charset="0"/>
+                          <a:ea typeface="Verdana" pitchFamily="34" charset="-122"/>
+                          <a:cs typeface="Verdana" pitchFamily="34" charset="-120"/>
+                        </a:rPr>
+                        <a:t>No</a:t>
+                      </a:r>
+                      <a:endParaRPr lang="en-US" sz="750" dirty="0">
+                        <a:latin typeface="Verdana" charset="0"/>
+                        <a:ea typeface="Verdana" charset="0"/>
+                        <a:cs typeface="Verdana" charset="0"/>
+                      </a:endParaRPr>
+                    </a:p>
+                  </a:txBody>
+                  <a:tcPr marL="63500" marR="63500" marT="12700" marB="12700" anchor="ctr">
+                    <a:lnL w="6350" cap="flat" cmpd="sng" algn="ctr">
+                      <a:solidFill>
+                        <a:srgbClr val="CACACA"/>
+                      </a:solidFill>
+                      <a:prstDash val="solid"/>
+                      <a:round/>
+                      <a:headEnd type="none" w="med" len="med"/>
+                      <a:tailEnd type="none" w="med" len="med"/>
+                    </a:lnL>
+                    <a:lnR w="6350" cap="flat" cmpd="sng" algn="ctr">
+                      <a:solidFill>
+                        <a:srgbClr val="CACACA"/>
+                      </a:solidFill>
+                      <a:prstDash val="solid"/>
+                      <a:round/>
+                      <a:headEnd type="none" w="med" len="med"/>
+                      <a:tailEnd type="none" w="med" len="med"/>
+                    </a:lnR>
+                    <a:lnT w="6350" cap="flat" cmpd="sng" algn="ctr">
+                      <a:solidFill>
+                        <a:srgbClr val="CACACA"/>
+                      </a:solidFill>
+                      <a:prstDash val="solid"/>
+                      <a:round/>
+                      <a:headEnd type="none" w="med" len="med"/>
+                      <a:tailEnd type="none" w="med" len="med"/>
+                    </a:lnT>
+                    <a:lnB w="6350" cap="flat" cmpd="sng" algn="ctr">
+                      <a:solidFill>
+                        <a:srgbClr val="CACACA"/>
+                      </a:solidFill>
+                      <a:prstDash val="solid"/>
+                      <a:round/>
+                      <a:headEnd type="none" w="med" len="med"/>
+                      <a:tailEnd type="none" w="med" len="med"/>
+                    </a:lnB>
+                    <a:solidFill>
+                      <a:srgbClr val="FFCCE8"/>
+                    </a:solidFill>
+                  </a:tcPr>
+                </a:tc>
+              </a:tr>
+              <a:tr h="306324">
+                <a:tc>
+                  <a:txBody>
+                    <a:bodyPr/>
+                    <a:lstStyle/>
+                    <a:p>
+                      <a:pPr algn="l" indent="0" marL="0">
+                        <a:buNone/>
+                      </a:pPr>
+                      <a:r>
+                        <a:rPr lang="en-US" sz="800" b="1" dirty="0">
+                          <a:solidFill>
+                            <a:srgbClr val="2B2B2B"/>
+                          </a:solidFill>
+                          <a:latin typeface="Verdana" pitchFamily="34" charset="0"/>
+                          <a:ea typeface="Verdana" pitchFamily="34" charset="-122"/>
+                          <a:cs typeface="Verdana" pitchFamily="34" charset="-120"/>
+                        </a:rPr>
+                        <a:t>Banca d'Italia, STACORIS</a:t>
+                      </a:r>
+                      <a:endParaRPr lang="en-US" sz="800" dirty="0">
+                        <a:latin typeface="Verdana" charset="0"/>
+                        <a:ea typeface="Verdana" charset="0"/>
+                        <a:cs typeface="Verdana" charset="0"/>
+                      </a:endParaRPr>
+                    </a:p>
+                  </a:txBody>
+                  <a:tcPr marL="63500" marR="63500" marT="12700" marB="12700" anchor="ctr">
+                    <a:lnL w="6350" cap="flat" cmpd="sng" algn="ctr">
+                      <a:solidFill>
+                        <a:srgbClr val="CACACA"/>
+                      </a:solidFill>
+                      <a:prstDash val="solid"/>
+                      <a:round/>
+                      <a:headEnd type="none" w="med" len="med"/>
+                      <a:tailEnd type="none" w="med" len="med"/>
+                    </a:lnL>
+                    <a:lnR w="6350" cap="flat" cmpd="sng" algn="ctr">
+                      <a:solidFill>
+                        <a:srgbClr val="CACACA"/>
+                      </a:solidFill>
+                      <a:prstDash val="solid"/>
+                      <a:round/>
+                      <a:headEnd type="none" w="med" len="med"/>
+                      <a:tailEnd type="none" w="med" len="med"/>
+                    </a:lnR>
+                    <a:lnT w="6350" cap="flat" cmpd="sng" algn="ctr">
+                      <a:solidFill>
+                        <a:srgbClr val="CACACA"/>
+                      </a:solidFill>
+                      <a:prstDash val="solid"/>
+                      <a:round/>
+                      <a:headEnd type="none" w="med" len="med"/>
+                      <a:tailEnd type="none" w="med" len="med"/>
+                    </a:lnT>
+                    <a:lnB w="6350" cap="flat" cmpd="sng" algn="ctr">
+                      <a:solidFill>
+                        <a:srgbClr val="CACACA"/>
+                      </a:solidFill>
+                      <a:prstDash val="solid"/>
+                      <a:round/>
+                      <a:headEnd type="none" w="med" len="med"/>
+                      <a:tailEnd type="none" w="med" len="med"/>
+                    </a:lnB>
+                    <a:solidFill>
+                      <a:srgbClr val="FFFFFF"/>
+                    </a:solidFill>
+                  </a:tcPr>
+                </a:tc>
+                <a:tc>
+                  <a:txBody>
+                    <a:bodyPr/>
+                    <a:lstStyle/>
+                    <a:p>
+                      <a:pPr algn="l" indent="0" marL="0">
+                        <a:buNone/>
+                      </a:pPr>
+                      <a:r>
+                        <a:rPr lang="en-US" sz="750" dirty="0">
+                          <a:solidFill>
+                            <a:srgbClr val="2B2B2B"/>
+                          </a:solidFill>
+                          <a:latin typeface="Verdana" pitchFamily="34" charset="0"/>
+                          <a:ea typeface="Verdana" pitchFamily="34" charset="-122"/>
+                          <a:cs typeface="Verdana" pitchFamily="34" charset="-120"/>
+                        </a:rPr>
+                        <a:t>TAEG de empresas en Italia</a:t>
+                      </a:r>
+                      <a:endParaRPr lang="en-US" sz="750" dirty="0">
+                        <a:latin typeface="Verdana" charset="0"/>
+                        <a:ea typeface="Verdana" charset="0"/>
+                        <a:cs typeface="Verdana" charset="0"/>
+                      </a:endParaRPr>
+                    </a:p>
+                  </a:txBody>
+                  <a:tcPr marL="63500" marR="63500" marT="12700" marB="12700" anchor="ctr">
+                    <a:lnL w="6350" cap="flat" cmpd="sng" algn="ctr">
+                      <a:solidFill>
+                        <a:srgbClr val="CACACA"/>
+                      </a:solidFill>
+                      <a:prstDash val="solid"/>
+                      <a:round/>
+                      <a:headEnd type="none" w="med" len="med"/>
+                      <a:tailEnd type="none" w="med" len="med"/>
+                    </a:lnL>
+                    <a:lnR w="6350" cap="flat" cmpd="sng" algn="ctr">
+                      <a:solidFill>
+                        <a:srgbClr val="CACACA"/>
+                      </a:solidFill>
+                      <a:prstDash val="solid"/>
+                      <a:round/>
+                      <a:headEnd type="none" w="med" len="med"/>
+                      <a:tailEnd type="none" w="med" len="med"/>
+                    </a:lnR>
+                    <a:lnT w="6350" cap="flat" cmpd="sng" algn="ctr">
+                      <a:solidFill>
+                        <a:srgbClr val="CACACA"/>
+                      </a:solidFill>
+                      <a:prstDash val="solid"/>
+                      <a:round/>
+                      <a:headEnd type="none" w="med" len="med"/>
+                      <a:tailEnd type="none" w="med" len="med"/>
+                    </a:lnT>
+                    <a:lnB w="6350" cap="flat" cmpd="sng" algn="ctr">
+                      <a:solidFill>
+                        <a:srgbClr val="CACACA"/>
+                      </a:solidFill>
+                      <a:prstDash val="solid"/>
+                      <a:round/>
+                      <a:headEnd type="none" w="med" len="med"/>
+                      <a:tailEnd type="none" w="med" len="med"/>
+                    </a:lnB>
+                    <a:solidFill>
+                      <a:srgbClr val="FFFFFF"/>
+                    </a:solidFill>
+                  </a:tcPr>
+                </a:tc>
+                <a:tc>
+                  <a:txBody>
+                    <a:bodyPr/>
+                    <a:lstStyle/>
+                    <a:p>
+                      <a:pPr algn="l" indent="0" marL="0">
+                        <a:buNone/>
+                      </a:pPr>
+                      <a:r>
+                        <a:rPr lang="en-US" sz="750" b="1" dirty="0">
+                          <a:solidFill>
+                            <a:srgbClr val="2B2B2B"/>
+                          </a:solidFill>
+                          <a:latin typeface="Verdana" pitchFamily="34" charset="0"/>
+                          <a:ea typeface="Verdana" pitchFamily="34" charset="-122"/>
+                          <a:cs typeface="Verdana" pitchFamily="34" charset="-120"/>
+                        </a:rPr>
+                        <a:t>Importe disponible</a:t>
+                      </a:r>
+                      <a:endParaRPr lang="en-US" sz="750" dirty="0">
+                        <a:latin typeface="Verdana" charset="0"/>
+                        <a:ea typeface="Verdana" charset="0"/>
+                        <a:cs typeface="Verdana" charset="0"/>
+                      </a:endParaRPr>
+                    </a:p>
+                  </a:txBody>
+                  <a:tcPr marL="63500" marR="63500" marT="12700" marB="12700" anchor="ctr">
+                    <a:lnL w="6350" cap="flat" cmpd="sng" algn="ctr">
+                      <a:solidFill>
+                        <a:srgbClr val="CACACA"/>
+                      </a:solidFill>
+                      <a:prstDash val="solid"/>
+                      <a:round/>
+                      <a:headEnd type="none" w="med" len="med"/>
+                      <a:tailEnd type="none" w="med" len="med"/>
+                    </a:lnL>
+                    <a:lnR w="6350" cap="flat" cmpd="sng" algn="ctr">
+                      <a:solidFill>
+                        <a:srgbClr val="CACACA"/>
+                      </a:solidFill>
+                      <a:prstDash val="solid"/>
+                      <a:round/>
+                      <a:headEnd type="none" w="med" len="med"/>
+                      <a:tailEnd type="none" w="med" len="med"/>
+                    </a:lnR>
+                    <a:lnT w="6350" cap="flat" cmpd="sng" algn="ctr">
+                      <a:solidFill>
+                        <a:srgbClr val="CACACA"/>
+                      </a:solidFill>
+                      <a:prstDash val="solid"/>
+                      <a:round/>
+                      <a:headEnd type="none" w="med" len="med"/>
+                      <a:tailEnd type="none" w="med" len="med"/>
+                    </a:lnT>
+                    <a:lnB w="6350" cap="flat" cmpd="sng" algn="ctr">
+                      <a:solidFill>
+                        <a:srgbClr val="CACACA"/>
+                      </a:solidFill>
+                      <a:prstDash val="solid"/>
+                      <a:round/>
+                      <a:headEnd type="none" w="med" len="med"/>
+                      <a:tailEnd type="none" w="med" len="med"/>
+                    </a:lnB>
+                    <a:solidFill>
+                      <a:srgbClr val="FFFFFF"/>
+                    </a:solidFill>
+                  </a:tcPr>
+                </a:tc>
+                <a:tc>
+                  <a:txBody>
+                    <a:bodyPr/>
+                    <a:lstStyle/>
+                    <a:p>
+                      <a:pPr algn="l" indent="0" marL="0">
+                        <a:buNone/>
+                      </a:pPr>
+                      <a:r>
+                        <a:rPr lang="en-US" sz="750" dirty="0">
+                          <a:solidFill>
+                            <a:srgbClr val="2B2B2B"/>
+                          </a:solidFill>
+                          <a:latin typeface="Verdana" pitchFamily="34" charset="0"/>
+                          <a:ea typeface="Verdana" pitchFamily="34" charset="-122"/>
+                          <a:cs typeface="Verdana" pitchFamily="34" charset="-120"/>
+                        </a:rPr>
+                        <a:t>Clase de importe del crédito; excluye empresarios individuales</a:t>
+                      </a:r>
+                      <a:endParaRPr lang="en-US" sz="750" dirty="0">
+                        <a:latin typeface="Verdana" charset="0"/>
+                        <a:ea typeface="Verdana" charset="0"/>
+                        <a:cs typeface="Verdana" charset="0"/>
+                      </a:endParaRPr>
+                    </a:p>
+                  </a:txBody>
+                  <a:tcPr marL="63500" marR="63500" marT="12700" marB="12700" anchor="ctr">
+                    <a:lnL w="6350" cap="flat" cmpd="sng" algn="ctr">
+                      <a:solidFill>
+                        <a:srgbClr val="CACACA"/>
+                      </a:solidFill>
+                      <a:prstDash val="solid"/>
+                      <a:round/>
+                      <a:headEnd type="none" w="med" len="med"/>
+                      <a:tailEnd type="none" w="med" len="med"/>
+                    </a:lnL>
+                    <a:lnR w="6350" cap="flat" cmpd="sng" algn="ctr">
+                      <a:solidFill>
+                        <a:srgbClr val="CACACA"/>
+                      </a:solidFill>
+                      <a:prstDash val="solid"/>
+                      <a:round/>
+                      <a:headEnd type="none" w="med" len="med"/>
+                      <a:tailEnd type="none" w="med" len="med"/>
+                    </a:lnR>
+                    <a:lnT w="6350" cap="flat" cmpd="sng" algn="ctr">
+                      <a:solidFill>
+                        <a:srgbClr val="CACACA"/>
+                      </a:solidFill>
+                      <a:prstDash val="solid"/>
+                      <a:round/>
+                      <a:headEnd type="none" w="med" len="med"/>
+                      <a:tailEnd type="none" w="med" len="med"/>
+                    </a:lnT>
+                    <a:lnB w="6350" cap="flat" cmpd="sng" algn="ctr">
+                      <a:solidFill>
+                        <a:srgbClr val="CACACA"/>
+                      </a:solidFill>
+                      <a:prstDash val="solid"/>
+                      <a:round/>
+                      <a:headEnd type="none" w="med" len="med"/>
+                      <a:tailEnd type="none" w="med" len="med"/>
+                    </a:lnB>
+                    <a:solidFill>
+                      <a:srgbClr val="FFFFFF"/>
+                    </a:solidFill>
+                  </a:tcPr>
+                </a:tc>
+                <a:tc>
+                  <a:txBody>
+                    <a:bodyPr/>
+                    <a:lstStyle/>
+                    <a:p>
+                      <a:pPr algn="ctr" indent="0" marL="0">
+                        <a:buNone/>
+                      </a:pPr>
+                      <a:r>
+                        <a:rPr lang="en-US" sz="750" b="1" dirty="0">
+                          <a:solidFill>
+                            <a:srgbClr val="2B2B2B"/>
+                          </a:solidFill>
+                          <a:latin typeface="Verdana" pitchFamily="34" charset="0"/>
+                          <a:ea typeface="Verdana" pitchFamily="34" charset="-122"/>
+                          <a:cs typeface="Verdana" pitchFamily="34" charset="-120"/>
+                        </a:rPr>
+                        <a:t>No</a:t>
+                      </a:r>
+                      <a:endParaRPr lang="en-US" sz="750" dirty="0">
+                        <a:latin typeface="Verdana" charset="0"/>
+                        <a:ea typeface="Verdana" charset="0"/>
+                        <a:cs typeface="Verdana" charset="0"/>
+                      </a:endParaRPr>
+                    </a:p>
+                  </a:txBody>
+                  <a:tcPr marL="63500" marR="63500" marT="12700" marB="12700" anchor="ctr">
+                    <a:lnL w="6350" cap="flat" cmpd="sng" algn="ctr">
+                      <a:solidFill>
+                        <a:srgbClr val="CACACA"/>
+                      </a:solidFill>
+                      <a:prstDash val="solid"/>
+                      <a:round/>
+                      <a:headEnd type="none" w="med" len="med"/>
+                      <a:tailEnd type="none" w="med" len="med"/>
+                    </a:lnL>
+                    <a:lnR w="6350" cap="flat" cmpd="sng" algn="ctr">
+                      <a:solidFill>
+                        <a:srgbClr val="CACACA"/>
+                      </a:solidFill>
+                      <a:prstDash val="solid"/>
+                      <a:round/>
+                      <a:headEnd type="none" w="med" len="med"/>
+                      <a:tailEnd type="none" w="med" len="med"/>
+                    </a:lnR>
+                    <a:lnT w="6350" cap="flat" cmpd="sng" algn="ctr">
+                      <a:solidFill>
+                        <a:srgbClr val="CACACA"/>
+                      </a:solidFill>
+                      <a:prstDash val="solid"/>
+                      <a:round/>
+                      <a:headEnd type="none" w="med" len="med"/>
+                      <a:tailEnd type="none" w="med" len="med"/>
+                    </a:lnT>
+                    <a:lnB w="6350" cap="flat" cmpd="sng" algn="ctr">
+                      <a:solidFill>
+                        <a:srgbClr val="CACACA"/>
+                      </a:solidFill>
+                      <a:prstDash val="solid"/>
+                      <a:round/>
+                      <a:headEnd type="none" w="med" len="med"/>
+                      <a:tailEnd type="none" w="med" len="med"/>
+                    </a:lnB>
+                    <a:solidFill>
+                      <a:srgbClr val="FFCCE8"/>
+                    </a:solidFill>
+                  </a:tcPr>
+                </a:tc>
+              </a:tr>
+              <a:tr h="306324">
+                <a:tc>
+                  <a:txBody>
+                    <a:bodyPr/>
+                    <a:lstStyle/>
+                    <a:p>
+                      <a:pPr algn="l" indent="0" marL="0">
+                        <a:buNone/>
+                      </a:pPr>
+                      <a:r>
+                        <a:rPr lang="en-US" sz="800" b="1" dirty="0">
+                          <a:solidFill>
+                            <a:srgbClr val="2B2B2B"/>
+                          </a:solidFill>
+                          <a:latin typeface="Verdana" pitchFamily="34" charset="0"/>
+                          <a:ea typeface="Verdana" pitchFamily="34" charset="-122"/>
+                          <a:cs typeface="Verdana" pitchFamily="34" charset="-120"/>
+                        </a:rPr>
+                        <a:t>OCDE, Scoreboard</a:t>
+                      </a:r>
+                      <a:endParaRPr lang="en-US" sz="800" dirty="0">
+                        <a:latin typeface="Verdana" charset="0"/>
+                        <a:ea typeface="Verdana" charset="0"/>
+                        <a:cs typeface="Verdana" charset="0"/>
+                      </a:endParaRPr>
+                    </a:p>
+                  </a:txBody>
+                  <a:tcPr marL="63500" marR="63500" marT="12700" marB="12700" anchor="ctr">
+                    <a:lnL w="6350" cap="flat" cmpd="sng" algn="ctr">
+                      <a:solidFill>
+                        <a:srgbClr val="CACACA"/>
+                      </a:solidFill>
+                      <a:prstDash val="solid"/>
+                      <a:round/>
+                      <a:headEnd type="none" w="med" len="med"/>
+                      <a:tailEnd type="none" w="med" len="med"/>
+                    </a:lnL>
+                    <a:lnR w="6350" cap="flat" cmpd="sng" algn="ctr">
+                      <a:solidFill>
+                        <a:srgbClr val="CACACA"/>
+                      </a:solidFill>
+                      <a:prstDash val="solid"/>
+                      <a:round/>
+                      <a:headEnd type="none" w="med" len="med"/>
+                      <a:tailEnd type="none" w="med" len="med"/>
+                    </a:lnR>
+                    <a:lnT w="6350" cap="flat" cmpd="sng" algn="ctr">
+                      <a:solidFill>
+                        <a:srgbClr val="CACACA"/>
+                      </a:solidFill>
+                      <a:prstDash val="solid"/>
+                      <a:round/>
+                      <a:headEnd type="none" w="med" len="med"/>
+                      <a:tailEnd type="none" w="med" len="med"/>
+                    </a:lnT>
+                    <a:lnB w="6350" cap="flat" cmpd="sng" algn="ctr">
+                      <a:solidFill>
+                        <a:srgbClr val="CACACA"/>
+                      </a:solidFill>
+                      <a:prstDash val="solid"/>
+                      <a:round/>
+                      <a:headEnd type="none" w="med" len="med"/>
+                      <a:tailEnd type="none" w="med" len="med"/>
+                    </a:lnB>
+                    <a:solidFill>
+                      <a:srgbClr val="F4F4F4"/>
+                    </a:solidFill>
+                  </a:tcPr>
+                </a:tc>
+                <a:tc>
+                  <a:txBody>
+                    <a:bodyPr/>
+                    <a:lstStyle/>
+                    <a:p>
+                      <a:pPr algn="l" indent="0" marL="0">
+                        <a:buNone/>
+                      </a:pPr>
+                      <a:r>
+                        <a:rPr lang="en-US" sz="750" dirty="0">
+                          <a:solidFill>
+                            <a:srgbClr val="2B2B2B"/>
+                          </a:solidFill>
+                          <a:latin typeface="Verdana" pitchFamily="34" charset="0"/>
+                          <a:ea typeface="Verdana" pitchFamily="34" charset="-122"/>
+                          <a:cs typeface="Verdana" pitchFamily="34" charset="-120"/>
+                        </a:rPr>
+                        <a:t>Spread PYME</a:t>
+                      </a:r>
+                      <a:endParaRPr lang="en-US" sz="750" dirty="0">
+                        <a:latin typeface="Verdana" charset="0"/>
+                        <a:ea typeface="Verdana" charset="0"/>
+                        <a:cs typeface="Verdana" charset="0"/>
+                      </a:endParaRPr>
+                    </a:p>
+                  </a:txBody>
+                  <a:tcPr marL="63500" marR="63500" marT="12700" marB="12700" anchor="ctr">
+                    <a:lnL w="6350" cap="flat" cmpd="sng" algn="ctr">
+                      <a:solidFill>
+                        <a:srgbClr val="CACACA"/>
+                      </a:solidFill>
+                      <a:prstDash val="solid"/>
+                      <a:round/>
+                      <a:headEnd type="none" w="med" len="med"/>
+                      <a:tailEnd type="none" w="med" len="med"/>
+                    </a:lnL>
+                    <a:lnR w="6350" cap="flat" cmpd="sng" algn="ctr">
+                      <a:solidFill>
+                        <a:srgbClr val="CACACA"/>
+                      </a:solidFill>
+                      <a:prstDash val="solid"/>
+                      <a:round/>
+                      <a:headEnd type="none" w="med" len="med"/>
+                      <a:tailEnd type="none" w="med" len="med"/>
+                    </a:lnR>
+                    <a:lnT w="6350" cap="flat" cmpd="sng" algn="ctr">
+                      <a:solidFill>
+                        <a:srgbClr val="CACACA"/>
+                      </a:solidFill>
+                      <a:prstDash val="solid"/>
+                      <a:round/>
+                      <a:headEnd type="none" w="med" len="med"/>
+                      <a:tailEnd type="none" w="med" len="med"/>
+                    </a:lnT>
+                    <a:lnB w="6350" cap="flat" cmpd="sng" algn="ctr">
+                      <a:solidFill>
+                        <a:srgbClr val="CACACA"/>
+                      </a:solidFill>
+                      <a:prstDash val="solid"/>
+                      <a:round/>
+                      <a:headEnd type="none" w="med" len="med"/>
+                      <a:tailEnd type="none" w="med" len="med"/>
+                    </a:lnB>
+                    <a:solidFill>
+                      <a:srgbClr val="F4F4F4"/>
+                    </a:solidFill>
+                  </a:tcPr>
+                </a:tc>
+                <a:tc>
+                  <a:txBody>
+                    <a:bodyPr/>
+                    <a:lstStyle/>
+                    <a:p>
+                      <a:pPr algn="l" indent="0" marL="0">
+                        <a:buNone/>
+                      </a:pPr>
+                      <a:r>
+                        <a:rPr lang="en-US" sz="750" b="1" dirty="0">
+                          <a:solidFill>
+                            <a:srgbClr val="2B2B2B"/>
+                          </a:solidFill>
+                          <a:latin typeface="Verdana" pitchFamily="34" charset="0"/>
+                          <a:ea typeface="Verdana" pitchFamily="34" charset="-122"/>
+                          <a:cs typeface="Verdana" pitchFamily="34" charset="-120"/>
+                        </a:rPr>
+                        <a:t>Nacional</a:t>
+                      </a:r>
+                      <a:endParaRPr lang="en-US" sz="750" dirty="0">
+                        <a:latin typeface="Verdana" charset="0"/>
+                        <a:ea typeface="Verdana" charset="0"/>
+                        <a:cs typeface="Verdana" charset="0"/>
+                      </a:endParaRPr>
+                    </a:p>
+                  </a:txBody>
+                  <a:tcPr marL="63500" marR="63500" marT="12700" marB="12700" anchor="ctr">
+                    <a:lnL w="6350" cap="flat" cmpd="sng" algn="ctr">
+                      <a:solidFill>
+                        <a:srgbClr val="CACACA"/>
+                      </a:solidFill>
+                      <a:prstDash val="solid"/>
+                      <a:round/>
+                      <a:headEnd type="none" w="med" len="med"/>
+                      <a:tailEnd type="none" w="med" len="med"/>
+                    </a:lnL>
+                    <a:lnR w="6350" cap="flat" cmpd="sng" algn="ctr">
+                      <a:solidFill>
+                        <a:srgbClr val="CACACA"/>
+                      </a:solidFill>
+                      <a:prstDash val="solid"/>
+                      <a:round/>
+                      <a:headEnd type="none" w="med" len="med"/>
+                      <a:tailEnd type="none" w="med" len="med"/>
+                    </a:lnR>
+                    <a:lnT w="6350" cap="flat" cmpd="sng" algn="ctr">
+                      <a:solidFill>
+                        <a:srgbClr val="CACACA"/>
+                      </a:solidFill>
+                      <a:prstDash val="solid"/>
+                      <a:round/>
+                      <a:headEnd type="none" w="med" len="med"/>
+                      <a:tailEnd type="none" w="med" len="med"/>
+                    </a:lnT>
+                    <a:lnB w="6350" cap="flat" cmpd="sng" algn="ctr">
+                      <a:solidFill>
+                        <a:srgbClr val="CACACA"/>
+                      </a:solidFill>
+                      <a:prstDash val="solid"/>
+                      <a:round/>
+                      <a:headEnd type="none" w="med" len="med"/>
+                      <a:tailEnd type="none" w="med" len="med"/>
+                    </a:lnB>
+                    <a:solidFill>
+                      <a:srgbClr val="F4F4F4"/>
+                    </a:solidFill>
+                  </a:tcPr>
+                </a:tc>
+                <a:tc>
+                  <a:txBody>
+                    <a:bodyPr/>
+                    <a:lstStyle/>
+                    <a:p>
+                      <a:pPr algn="l" indent="0" marL="0">
+                        <a:buNone/>
+                      </a:pPr>
+                      <a:r>
+                        <a:rPr lang="en-US" sz="750" dirty="0">
+                          <a:solidFill>
+                            <a:srgbClr val="2B2B2B"/>
+                          </a:solidFill>
+                          <a:latin typeface="Verdana" pitchFamily="34" charset="0"/>
+                          <a:ea typeface="Verdana" pitchFamily="34" charset="-122"/>
+                          <a:cs typeface="Verdana" pitchFamily="34" charset="-120"/>
+                        </a:rPr>
+                        <a:t>La definición de cada país: no está armonizada</a:t>
+                      </a:r>
+                      <a:endParaRPr lang="en-US" sz="750" dirty="0">
+                        <a:latin typeface="Verdana" charset="0"/>
+                        <a:ea typeface="Verdana" charset="0"/>
+                        <a:cs typeface="Verdana" charset="0"/>
+                      </a:endParaRPr>
+                    </a:p>
+                  </a:txBody>
+                  <a:tcPr marL="63500" marR="63500" marT="12700" marB="12700" anchor="ctr">
+                    <a:lnL w="6350" cap="flat" cmpd="sng" algn="ctr">
+                      <a:solidFill>
+                        <a:srgbClr val="CACACA"/>
+                      </a:solidFill>
+                      <a:prstDash val="solid"/>
+                      <a:round/>
+                      <a:headEnd type="none" w="med" len="med"/>
+                      <a:tailEnd type="none" w="med" len="med"/>
+                    </a:lnL>
+                    <a:lnR w="6350" cap="flat" cmpd="sng" algn="ctr">
+                      <a:solidFill>
+                        <a:srgbClr val="CACACA"/>
+                      </a:solidFill>
+                      <a:prstDash val="solid"/>
+                      <a:round/>
+                      <a:headEnd type="none" w="med" len="med"/>
+                      <a:tailEnd type="none" w="med" len="med"/>
+                    </a:lnR>
+                    <a:lnT w="6350" cap="flat" cmpd="sng" algn="ctr">
+                      <a:solidFill>
+                        <a:srgbClr val="CACACA"/>
+                      </a:solidFill>
+                      <a:prstDash val="solid"/>
+                      <a:round/>
+                      <a:headEnd type="none" w="med" len="med"/>
+                      <a:tailEnd type="none" w="med" len="med"/>
+                    </a:lnT>
+                    <a:lnB w="6350" cap="flat" cmpd="sng" algn="ctr">
+                      <a:solidFill>
+                        <a:srgbClr val="CACACA"/>
+                      </a:solidFill>
+                      <a:prstDash val="solid"/>
+                      <a:round/>
+                      <a:headEnd type="none" w="med" len="med"/>
+                      <a:tailEnd type="none" w="med" len="med"/>
+                    </a:lnB>
+                    <a:solidFill>
+                      <a:srgbClr val="F4F4F4"/>
+                    </a:solidFill>
+                  </a:tcPr>
+                </a:tc>
+                <a:tc>
+                  <a:txBody>
+                    <a:bodyPr/>
+                    <a:lstStyle/>
+                    <a:p>
+                      <a:pPr algn="ctr" indent="0" marL="0">
+                        <a:buNone/>
+                      </a:pPr>
+                      <a:r>
+                        <a:rPr lang="en-US" sz="750" b="1" dirty="0">
+                          <a:solidFill>
+                            <a:srgbClr val="2B2B2B"/>
+                          </a:solidFill>
+                          <a:latin typeface="Verdana" pitchFamily="34" charset="0"/>
+                          <a:ea typeface="Verdana" pitchFamily="34" charset="-122"/>
+                          <a:cs typeface="Verdana" pitchFamily="34" charset="-120"/>
+                        </a:rPr>
+                        <a:t>No</a:t>
+                      </a:r>
+                      <a:endParaRPr lang="en-US" sz="750" dirty="0">
+                        <a:latin typeface="Verdana" charset="0"/>
+                        <a:ea typeface="Verdana" charset="0"/>
+                        <a:cs typeface="Verdana" charset="0"/>
+                      </a:endParaRPr>
+                    </a:p>
+                  </a:txBody>
+                  <a:tcPr marL="63500" marR="63500" marT="12700" marB="12700" anchor="ctr">
+                    <a:lnL w="6350" cap="flat" cmpd="sng" algn="ctr">
+                      <a:solidFill>
+                        <a:srgbClr val="CACACA"/>
+                      </a:solidFill>
+                      <a:prstDash val="solid"/>
+                      <a:round/>
+                      <a:headEnd type="none" w="med" len="med"/>
+                      <a:tailEnd type="none" w="med" len="med"/>
+                    </a:lnL>
+                    <a:lnR w="6350" cap="flat" cmpd="sng" algn="ctr">
+                      <a:solidFill>
+                        <a:srgbClr val="CACACA"/>
+                      </a:solidFill>
+                      <a:prstDash val="solid"/>
+                      <a:round/>
+                      <a:headEnd type="none" w="med" len="med"/>
+                      <a:tailEnd type="none" w="med" len="med"/>
+                    </a:lnR>
+                    <a:lnT w="6350" cap="flat" cmpd="sng" algn="ctr">
+                      <a:solidFill>
+                        <a:srgbClr val="CACACA"/>
+                      </a:solidFill>
+                      <a:prstDash val="solid"/>
+                      <a:round/>
+                      <a:headEnd type="none" w="med" len="med"/>
+                      <a:tailEnd type="none" w="med" len="med"/>
+                    </a:lnT>
+                    <a:lnB w="6350" cap="flat" cmpd="sng" algn="ctr">
+                      <a:solidFill>
+                        <a:srgbClr val="CACACA"/>
+                      </a:solidFill>
+                      <a:prstDash val="solid"/>
+                      <a:round/>
+                      <a:headEnd type="none" w="med" len="med"/>
+                      <a:tailEnd type="none" w="med" len="med"/>
+                    </a:lnB>
+                    <a:solidFill>
+                      <a:srgbClr val="FFCCE8"/>
+                    </a:solidFill>
+                  </a:tcPr>
+                </a:tc>
+              </a:tr>
+              <a:tr h="306324">
+                <a:tc>
+                  <a:txBody>
+                    <a:bodyPr/>
+                    <a:lstStyle/>
+                    <a:p>
+                      <a:pPr algn="l" indent="0" marL="0">
+                        <a:buNone/>
+                      </a:pPr>
+                      <a:r>
+                        <a:rPr lang="en-US" sz="800" b="1" dirty="0">
+                          <a:solidFill>
+                            <a:srgbClr val="2B2B2B"/>
+                          </a:solidFill>
+                          <a:latin typeface="Verdana" pitchFamily="34" charset="0"/>
+                          <a:ea typeface="Verdana" pitchFamily="34" charset="-122"/>
+                          <a:cs typeface="Verdana" pitchFamily="34" charset="-120"/>
+                        </a:rPr>
+                        <a:t>Bancos, cuentas por segmento</a:t>
+                      </a:r>
+                      <a:endParaRPr lang="en-US" sz="800" dirty="0">
+                        <a:latin typeface="Verdana" charset="0"/>
+                        <a:ea typeface="Verdana" charset="0"/>
+                        <a:cs typeface="Verdana" charset="0"/>
+                      </a:endParaRPr>
+                    </a:p>
+                  </a:txBody>
+                  <a:tcPr marL="63500" marR="63500" marT="12700" marB="12700" anchor="ctr">
+                    <a:lnL w="6350" cap="flat" cmpd="sng" algn="ctr">
+                      <a:solidFill>
+                        <a:srgbClr val="CACACA"/>
+                      </a:solidFill>
+                      <a:prstDash val="solid"/>
+                      <a:round/>
+                      <a:headEnd type="none" w="med" len="med"/>
+                      <a:tailEnd type="none" w="med" len="med"/>
+                    </a:lnL>
+                    <a:lnR w="6350" cap="flat" cmpd="sng" algn="ctr">
+                      <a:solidFill>
+                        <a:srgbClr val="CACACA"/>
+                      </a:solidFill>
+                      <a:prstDash val="solid"/>
+                      <a:round/>
+                      <a:headEnd type="none" w="med" len="med"/>
+                      <a:tailEnd type="none" w="med" len="med"/>
+                    </a:lnR>
+                    <a:lnT w="6350" cap="flat" cmpd="sng" algn="ctr">
+                      <a:solidFill>
+                        <a:srgbClr val="CACACA"/>
+                      </a:solidFill>
+                      <a:prstDash val="solid"/>
+                      <a:round/>
+                      <a:headEnd type="none" w="med" len="med"/>
+                      <a:tailEnd type="none" w="med" len="med"/>
+                    </a:lnT>
+                    <a:lnB w="6350" cap="flat" cmpd="sng" algn="ctr">
+                      <a:solidFill>
+                        <a:srgbClr val="CACACA"/>
+                      </a:solidFill>
+                      <a:prstDash val="solid"/>
+                      <a:round/>
+                      <a:headEnd type="none" w="med" len="med"/>
+                      <a:tailEnd type="none" w="med" len="med"/>
+                    </a:lnB>
+                    <a:solidFill>
+                      <a:srgbClr val="FFFFFF"/>
+                    </a:solidFill>
+                  </a:tcPr>
+                </a:tc>
+                <a:tc>
+                  <a:txBody>
+                    <a:bodyPr/>
+                    <a:lstStyle/>
+                    <a:p>
+                      <a:pPr algn="l" indent="0" marL="0">
+                        <a:buNone/>
+                      </a:pPr>
+                      <a:r>
+                        <a:rPr lang="en-US" sz="750" dirty="0">
+                          <a:solidFill>
+                            <a:srgbClr val="2B2B2B"/>
+                          </a:solidFill>
+                          <a:latin typeface="Verdana" pitchFamily="34" charset="0"/>
+                          <a:ea typeface="Verdana" pitchFamily="34" charset="-122"/>
+                          <a:cs typeface="Verdana" pitchFamily="34" charset="-120"/>
+                        </a:rPr>
+                        <a:t>Comparables banco a banco</a:t>
+                      </a:r>
+                      <a:endParaRPr lang="en-US" sz="750" dirty="0">
+                        <a:latin typeface="Verdana" charset="0"/>
+                        <a:ea typeface="Verdana" charset="0"/>
+                        <a:cs typeface="Verdana" charset="0"/>
+                      </a:endParaRPr>
+                    </a:p>
+                  </a:txBody>
+                  <a:tcPr marL="63500" marR="63500" marT="12700" marB="12700" anchor="ctr">
+                    <a:lnL w="6350" cap="flat" cmpd="sng" algn="ctr">
+                      <a:solidFill>
+                        <a:srgbClr val="CACACA"/>
+                      </a:solidFill>
+                      <a:prstDash val="solid"/>
+                      <a:round/>
+                      <a:headEnd type="none" w="med" len="med"/>
+                      <a:tailEnd type="none" w="med" len="med"/>
+                    </a:lnL>
+                    <a:lnR w="6350" cap="flat" cmpd="sng" algn="ctr">
+                      <a:solidFill>
+                        <a:srgbClr val="CACACA"/>
+                      </a:solidFill>
+                      <a:prstDash val="solid"/>
+                      <a:round/>
+                      <a:headEnd type="none" w="med" len="med"/>
+                      <a:tailEnd type="none" w="med" len="med"/>
+                    </a:lnR>
+                    <a:lnT w="6350" cap="flat" cmpd="sng" algn="ctr">
+                      <a:solidFill>
+                        <a:srgbClr val="CACACA"/>
+                      </a:solidFill>
+                      <a:prstDash val="solid"/>
+                      <a:round/>
+                      <a:headEnd type="none" w="med" len="med"/>
+                      <a:tailEnd type="none" w="med" len="med"/>
+                    </a:lnT>
+                    <a:lnB w="6350" cap="flat" cmpd="sng" algn="ctr">
+                      <a:solidFill>
+                        <a:srgbClr val="CACACA"/>
+                      </a:solidFill>
+                      <a:prstDash val="solid"/>
+                      <a:round/>
+                      <a:headEnd type="none" w="med" len="med"/>
+                      <a:tailEnd type="none" w="med" len="med"/>
+                    </a:lnB>
+                    <a:solidFill>
+                      <a:srgbClr val="FFFFFF"/>
+                    </a:solidFill>
+                  </a:tcPr>
+                </a:tc>
+                <a:tc>
+                  <a:txBody>
+                    <a:bodyPr/>
+                    <a:lstStyle/>
+                    <a:p>
+                      <a:pPr algn="l" indent="0" marL="0">
+                        <a:buNone/>
+                      </a:pPr>
+                      <a:r>
+                        <a:rPr lang="en-US" sz="750" b="1" dirty="0">
+                          <a:solidFill>
+                            <a:srgbClr val="2B2B2B"/>
+                          </a:solidFill>
+                          <a:latin typeface="Verdana" pitchFamily="34" charset="0"/>
+                          <a:ea typeface="Verdana" pitchFamily="34" charset="-122"/>
+                          <a:cs typeface="Verdana" pitchFamily="34" charset="-120"/>
+                        </a:rPr>
+                        <a:t>Segmento de gestión</a:t>
+                      </a:r>
+                      <a:endParaRPr lang="en-US" sz="750" dirty="0">
+                        <a:latin typeface="Verdana" charset="0"/>
+                        <a:ea typeface="Verdana" charset="0"/>
+                        <a:cs typeface="Verdana" charset="0"/>
+                      </a:endParaRPr>
+                    </a:p>
+                  </a:txBody>
+                  <a:tcPr marL="63500" marR="63500" marT="12700" marB="12700" anchor="ctr">
+                    <a:lnL w="6350" cap="flat" cmpd="sng" algn="ctr">
+                      <a:solidFill>
+                        <a:srgbClr val="CACACA"/>
+                      </a:solidFill>
+                      <a:prstDash val="solid"/>
+                      <a:round/>
+                      <a:headEnd type="none" w="med" len="med"/>
+                      <a:tailEnd type="none" w="med" len="med"/>
+                    </a:lnL>
+                    <a:lnR w="6350" cap="flat" cmpd="sng" algn="ctr">
+                      <a:solidFill>
+                        <a:srgbClr val="CACACA"/>
+                      </a:solidFill>
+                      <a:prstDash val="solid"/>
+                      <a:round/>
+                      <a:headEnd type="none" w="med" len="med"/>
+                      <a:tailEnd type="none" w="med" len="med"/>
+                    </a:lnR>
+                    <a:lnT w="6350" cap="flat" cmpd="sng" algn="ctr">
+                      <a:solidFill>
+                        <a:srgbClr val="CACACA"/>
+                      </a:solidFill>
+                      <a:prstDash val="solid"/>
+                      <a:round/>
+                      <a:headEnd type="none" w="med" len="med"/>
+                      <a:tailEnd type="none" w="med" len="med"/>
+                    </a:lnT>
+                    <a:lnB w="6350" cap="flat" cmpd="sng" algn="ctr">
+                      <a:solidFill>
+                        <a:srgbClr val="CACACA"/>
+                      </a:solidFill>
+                      <a:prstDash val="solid"/>
+                      <a:round/>
+                      <a:headEnd type="none" w="med" len="med"/>
+                      <a:tailEnd type="none" w="med" len="med"/>
+                    </a:lnB>
+                    <a:solidFill>
+                      <a:srgbClr val="FFFFFF"/>
+                    </a:solidFill>
+                  </a:tcPr>
+                </a:tc>
+                <a:tc>
+                  <a:txBody>
+                    <a:bodyPr/>
+                    <a:lstStyle/>
+                    <a:p>
+                      <a:pPr algn="l" indent="0" marL="0">
+                        <a:buNone/>
+                      </a:pPr>
+                      <a:r>
+                        <a:rPr lang="en-US" sz="750" dirty="0">
+                          <a:solidFill>
+                            <a:srgbClr val="2B2B2B"/>
+                          </a:solidFill>
+                          <a:latin typeface="Verdana" pitchFamily="34" charset="0"/>
+                          <a:ea typeface="Verdana" pitchFamily="34" charset="-122"/>
+                          <a:cs typeface="Verdana" pitchFamily="34" charset="-120"/>
+                        </a:rPr>
+                        <a:t>«Corporate Clients», «Banca dei Territori»…: mezclan PYME y gran empresa</a:t>
+                      </a:r>
+                      <a:endParaRPr lang="en-US" sz="750" dirty="0">
+                        <a:latin typeface="Verdana" charset="0"/>
+                        <a:ea typeface="Verdana" charset="0"/>
+                        <a:cs typeface="Verdana" charset="0"/>
+                      </a:endParaRPr>
+                    </a:p>
+                  </a:txBody>
+                  <a:tcPr marL="63500" marR="63500" marT="12700" marB="12700" anchor="ctr">
+                    <a:lnL w="6350" cap="flat" cmpd="sng" algn="ctr">
+                      <a:solidFill>
+                        <a:srgbClr val="CACACA"/>
+                      </a:solidFill>
+                      <a:prstDash val="solid"/>
+                      <a:round/>
+                      <a:headEnd type="none" w="med" len="med"/>
+                      <a:tailEnd type="none" w="med" len="med"/>
+                    </a:lnL>
+                    <a:lnR w="6350" cap="flat" cmpd="sng" algn="ctr">
+                      <a:solidFill>
+                        <a:srgbClr val="CACACA"/>
+                      </a:solidFill>
+                      <a:prstDash val="solid"/>
+                      <a:round/>
+                      <a:headEnd type="none" w="med" len="med"/>
+                      <a:tailEnd type="none" w="med" len="med"/>
+                    </a:lnR>
+                    <a:lnT w="6350" cap="flat" cmpd="sng" algn="ctr">
+                      <a:solidFill>
+                        <a:srgbClr val="CACACA"/>
+                      </a:solidFill>
+                      <a:prstDash val="solid"/>
+                      <a:round/>
+                      <a:headEnd type="none" w="med" len="med"/>
+                      <a:tailEnd type="none" w="med" len="med"/>
+                    </a:lnT>
+                    <a:lnB w="6350" cap="flat" cmpd="sng" algn="ctr">
+                      <a:solidFill>
+                        <a:srgbClr val="CACACA"/>
+                      </a:solidFill>
+                      <a:prstDash val="solid"/>
+                      <a:round/>
+                      <a:headEnd type="none" w="med" len="med"/>
+                      <a:tailEnd type="none" w="med" len="med"/>
+                    </a:lnB>
+                    <a:solidFill>
+                      <a:srgbClr val="FFFFFF"/>
+                    </a:solidFill>
+                  </a:tcPr>
+                </a:tc>
+                <a:tc>
+                  <a:txBody>
+                    <a:bodyPr/>
+                    <a:lstStyle/>
+                    <a:p>
+                      <a:pPr algn="ctr" indent="0" marL="0">
+                        <a:buNone/>
+                      </a:pPr>
+                      <a:r>
+                        <a:rPr lang="en-US" sz="750" b="1" dirty="0">
+                          <a:solidFill>
+                            <a:srgbClr val="2B2B2B"/>
+                          </a:solidFill>
+                          <a:latin typeface="Verdana" pitchFamily="34" charset="0"/>
+                          <a:ea typeface="Verdana" pitchFamily="34" charset="-122"/>
+                          <a:cs typeface="Verdana" pitchFamily="34" charset="-120"/>
+                        </a:rPr>
+                        <a:t>No</a:t>
+                      </a:r>
+                      <a:endParaRPr lang="en-US" sz="750" dirty="0">
+                        <a:latin typeface="Verdana" charset="0"/>
+                        <a:ea typeface="Verdana" charset="0"/>
+                        <a:cs typeface="Verdana" charset="0"/>
+                      </a:endParaRPr>
+                    </a:p>
+                  </a:txBody>
+                  <a:tcPr marL="63500" marR="63500" marT="12700" marB="12700" anchor="ctr">
+                    <a:lnL w="6350" cap="flat" cmpd="sng" algn="ctr">
+                      <a:solidFill>
+                        <a:srgbClr val="CACACA"/>
+                      </a:solidFill>
+                      <a:prstDash val="solid"/>
+                      <a:round/>
+                      <a:headEnd type="none" w="med" len="med"/>
+                      <a:tailEnd type="none" w="med" len="med"/>
+                    </a:lnL>
+                    <a:lnR w="6350" cap="flat" cmpd="sng" algn="ctr">
+                      <a:solidFill>
+                        <a:srgbClr val="CACACA"/>
+                      </a:solidFill>
+                      <a:prstDash val="solid"/>
+                      <a:round/>
+                      <a:headEnd type="none" w="med" len="med"/>
+                      <a:tailEnd type="none" w="med" len="med"/>
+                    </a:lnR>
+                    <a:lnT w="6350" cap="flat" cmpd="sng" algn="ctr">
+                      <a:solidFill>
+                        <a:srgbClr val="CACACA"/>
+                      </a:solidFill>
+                      <a:prstDash val="solid"/>
+                      <a:round/>
+                      <a:headEnd type="none" w="med" len="med"/>
+                      <a:tailEnd type="none" w="med" len="med"/>
+                    </a:lnT>
+                    <a:lnB w="6350" cap="flat" cmpd="sng" algn="ctr">
+                      <a:solidFill>
+                        <a:srgbClr val="CACACA"/>
+                      </a:solidFill>
+                      <a:prstDash val="solid"/>
+                      <a:round/>
+                      <a:headEnd type="none" w="med" len="med"/>
+                      <a:tailEnd type="none" w="med" len="med"/>
+                    </a:lnB>
+                    <a:solidFill>
+                      <a:srgbClr val="FFCCE8"/>
+                    </a:solidFill>
+                  </a:tcPr>
+                </a:tc>
+              </a:tr>
+            </a:tbl>
+          </a:graphicData>
+        </a:graphic>
+      </p:graphicFrame>
+      <p:sp>
+        <p:nvSpPr>
+          <p:cNvPr id="6" name="Text 3"/>
+          <p:cNvSpPr txBox="1"/>
+          <p:nvPr/>
+        </p:nvSpPr>
+        <p:spPr>
+          <a:xfrm>
+            <a:off x="621792" y="6053328"/>
+            <a:ext cx="10945368" cy="475488"/>
+          </a:xfrm>
+          <a:prstGeom prst="rect">
+            <a:avLst/>
+          </a:prstGeom>
+          <a:noFill/>
+          <a:ln/>
+        </p:spPr>
+        <p:txBody>
+          <a:bodyPr wrap="square" lIns="0" tIns="0" rIns="0" bIns="0" rtlCol="0" anchor="ctr"/>
+          <a:lstStyle/>
+          <a:p>
+            <a:pPr indent="0" marL="0">
+              <a:buNone/>
+            </a:pPr>
+            <a:r>
+              <a:rPr lang="en-US" sz="700" i="1" dirty="0">
+                <a:solidFill>
+                  <a:srgbClr val="818181"/>
+                </a:solidFill>
+                <a:latin typeface="Verdana" pitchFamily="34" charset="0"/>
+                <a:ea typeface="Verdana" pitchFamily="34" charset="-122"/>
+                <a:cs typeface="Verdana" pitchFamily="34" charset="-120"/>
+              </a:rPr>
+              <a:t>Recomendación 2003/361/CE: umbrales de la página oficial de la Comisión (DG GROW). FINREP y COREP: Reglamento de Ejecución (UE) 2021/451, anexos V y II; en el método estándar las instrucciones no definen PYME y se toma la del art. 501 del CRR, que es la única que da. CRR: Reglamento (UE) 575/2013, arts. 153.4 y 501. CESGAR: XV Informe, universo DIRCE. Banca d'Italia: STACORIS, tavola TRI30951. Detalle y citas literales en notas.md.</a:t>
+            </a:r>
+            <a:endParaRPr lang="en-US" sz="700" dirty="0"/>
           </a:p>
         </p:txBody>
       </p:sp>
